--- a/20243/Part 2-Regression/simple linear regression slides.pptx
+++ b/20243/Part 2-Regression/simple linear regression slides.pptx
@@ -135,8 +135,7 @@
 <file path=ppt/revisionInfo.xml><?xml version="1.0" encoding="utf-8"?>
 <p1510:revInfo xmlns:a="http://schemas.openxmlformats.org/drawingml/2006/main" xmlns:r="http://schemas.openxmlformats.org/officeDocument/2006/relationships" xmlns:p1510="http://schemas.microsoft.com/office/powerpoint/2015/10/main">
   <p1510:revLst>
-    <p1510:client id="{161A7FAA-B398-4429-9FC2-656B0895AF0F}" v="51" dt="2025-07-16T08:30:59.062"/>
-    <p1510:client id="{F585A28F-34F7-4D28-B641-78252DAB29E0}" v="1" dt="2025-07-16T09:16:07.771"/>
+    <p1510:client id="{0455E0E6-2388-40FF-8789-A613D1CB1008}" v="8" dt="2025-07-26T17:40:12.131"/>
   </p1510:revLst>
 </p1510:revInfo>
 </file>
@@ -1009,22 +1008,6 @@
           <pc:docMk/>
           <pc:sldMk cId="1040197143" sldId="460"/>
         </pc:sldMkLst>
-        <pc:picChg chg="del">
-          <ac:chgData name="Mohammed Fasha" userId="cc64f42d-a1a6-4f08-b97b-0c37f877119f" providerId="ADAL" clId="{161A7FAA-B398-4429-9FC2-656B0895AF0F}" dt="2025-07-16T08:18:58.259" v="234" actId="21"/>
-          <ac:picMkLst>
-            <pc:docMk/>
-            <pc:sldMk cId="1040197143" sldId="460"/>
-            <ac:picMk id="12" creationId="{ED72E220-66E3-C895-AA2B-7821BAB0B80F}"/>
-          </ac:picMkLst>
-        </pc:picChg>
-        <pc:picChg chg="del">
-          <ac:chgData name="Mohammed Fasha" userId="cc64f42d-a1a6-4f08-b97b-0c37f877119f" providerId="ADAL" clId="{161A7FAA-B398-4429-9FC2-656B0895AF0F}" dt="2025-07-16T08:19:12.149" v="237" actId="21"/>
-          <ac:picMkLst>
-            <pc:docMk/>
-            <pc:sldMk cId="1040197143" sldId="460"/>
-            <ac:picMk id="13" creationId="{923AB4FC-8803-B130-E7FF-D6F9B65D8759}"/>
-          </ac:picMkLst>
-        </pc:picChg>
       </pc:sldChg>
       <pc:sldChg chg="modSp mod ord">
         <pc:chgData name="Mohammed Fasha" userId="cc64f42d-a1a6-4f08-b97b-0c37f877119f" providerId="ADAL" clId="{161A7FAA-B398-4429-9FC2-656B0895AF0F}" dt="2025-07-16T08:31:04.392" v="376" actId="5793"/>
@@ -1063,30 +1046,6 @@
             <ac:spMk id="3" creationId="{A955792E-C166-AD40-E023-9C9473F341EE}"/>
           </ac:spMkLst>
         </pc:spChg>
-        <pc:picChg chg="add del">
-          <ac:chgData name="Mohammed Fasha" userId="cc64f42d-a1a6-4f08-b97b-0c37f877119f" providerId="ADAL" clId="{161A7FAA-B398-4429-9FC2-656B0895AF0F}" dt="2025-07-16T08:05:48.658" v="91" actId="478"/>
-          <ac:picMkLst>
-            <pc:docMk/>
-            <pc:sldMk cId="2300765676" sldId="477"/>
-            <ac:picMk id="5" creationId="{45D6DA4C-2F0D-260B-8062-714BA9263593}"/>
-          </ac:picMkLst>
-        </pc:picChg>
-        <pc:picChg chg="add del mod">
-          <ac:chgData name="Mohammed Fasha" userId="cc64f42d-a1a6-4f08-b97b-0c37f877119f" providerId="ADAL" clId="{161A7FAA-B398-4429-9FC2-656B0895AF0F}" dt="2025-07-16T08:04:14.371" v="84" actId="478"/>
-          <ac:picMkLst>
-            <pc:docMk/>
-            <pc:sldMk cId="2300765676" sldId="477"/>
-            <ac:picMk id="1026" creationId="{F9570969-F598-6ACB-2DD4-CCA2812970C4}"/>
-          </ac:picMkLst>
-        </pc:picChg>
-        <pc:picChg chg="add del mod">
-          <ac:chgData name="Mohammed Fasha" userId="cc64f42d-a1a6-4f08-b97b-0c37f877119f" providerId="ADAL" clId="{161A7FAA-B398-4429-9FC2-656B0895AF0F}" dt="2025-07-16T08:05:11.635" v="89" actId="478"/>
-          <ac:picMkLst>
-            <pc:docMk/>
-            <pc:sldMk cId="2300765676" sldId="477"/>
-            <ac:picMk id="1028" creationId="{6CD59B2C-D8DA-FE8A-6FE6-FA28D990AF89}"/>
-          </ac:picMkLst>
-        </pc:picChg>
         <pc:picChg chg="add mod">
           <ac:chgData name="Mohammed Fasha" userId="cc64f42d-a1a6-4f08-b97b-0c37f877119f" providerId="ADAL" clId="{161A7FAA-B398-4429-9FC2-656B0895AF0F}" dt="2025-07-16T08:08:48.133" v="117" actId="1076"/>
           <ac:picMkLst>
@@ -1125,22 +1084,6 @@
           <pc:docMk/>
           <pc:sldMk cId="575657110" sldId="479"/>
         </pc:sldMkLst>
-        <pc:spChg chg="add del mod">
-          <ac:chgData name="Mohammed Fasha" userId="cc64f42d-a1a6-4f08-b97b-0c37f877119f" providerId="ADAL" clId="{161A7FAA-B398-4429-9FC2-656B0895AF0F}" dt="2025-07-16T08:07:56.853" v="113" actId="404"/>
-          <ac:spMkLst>
-            <pc:docMk/>
-            <pc:sldMk cId="575657110" sldId="479"/>
-            <ac:spMk id="2" creationId="{4ADEBDBE-8C09-D3AD-763D-3410BE9FAF8D}"/>
-          </ac:spMkLst>
-        </pc:spChg>
-        <pc:spChg chg="add mod">
-          <ac:chgData name="Mohammed Fasha" userId="cc64f42d-a1a6-4f08-b97b-0c37f877119f" providerId="ADAL" clId="{161A7FAA-B398-4429-9FC2-656B0895AF0F}" dt="2025-07-16T08:07:02.451" v="107"/>
-          <ac:spMkLst>
-            <pc:docMk/>
-            <pc:sldMk cId="575657110" sldId="479"/>
-            <ac:spMk id="4" creationId="{61048862-B9F5-1154-77E8-4D0F5E449B7F}"/>
-          </ac:spMkLst>
-        </pc:spChg>
       </pc:sldChg>
       <pc:sldChg chg="modSp new mod">
         <pc:chgData name="Mohammed Fasha" userId="cc64f42d-a1a6-4f08-b97b-0c37f877119f" providerId="ADAL" clId="{161A7FAA-B398-4429-9FC2-656B0895AF0F}" dt="2025-07-16T08:12:50.396" v="164" actId="5793"/>
@@ -1185,14 +1128,6 @@
             <pc:docMk/>
             <pc:sldMk cId="3075052158" sldId="480"/>
             <ac:spMk id="3" creationId="{E520913F-E7B6-47CD-911A-B7E553D5285A}"/>
-          </ac:spMkLst>
-        </pc:spChg>
-        <pc:spChg chg="add mod">
-          <ac:chgData name="Mohammed Fasha" userId="cc64f42d-a1a6-4f08-b97b-0c37f877119f" providerId="ADAL" clId="{161A7FAA-B398-4429-9FC2-656B0895AF0F}" dt="2025-07-16T08:13:08.318" v="167"/>
-          <ac:spMkLst>
-            <pc:docMk/>
-            <pc:sldMk cId="3075052158" sldId="480"/>
-            <ac:spMk id="4" creationId="{5B28E922-3593-82D7-6A03-F52CCB4BFE39}"/>
           </ac:spMkLst>
         </pc:spChg>
         <pc:picChg chg="add mod">
@@ -1400,6 +1335,116 @@
     </pc:docChg>
   </pc:docChgLst>
   <pc:docChgLst>
+    <pc:chgData name="Mohammed Fasha" userId="cc64f42d-a1a6-4f08-b97b-0c37f877119f" providerId="ADAL" clId="{0455E0E6-2388-40FF-8789-A613D1CB1008}"/>
+    <pc:docChg chg="undo custSel modSld">
+      <pc:chgData name="Mohammed Fasha" userId="cc64f42d-a1a6-4f08-b97b-0c37f877119f" providerId="ADAL" clId="{0455E0E6-2388-40FF-8789-A613D1CB1008}" dt="2025-07-26T17:40:12.463" v="95" actId="1076"/>
+      <pc:docMkLst>
+        <pc:docMk/>
+      </pc:docMkLst>
+      <pc:sldChg chg="modSp mod">
+        <pc:chgData name="Mohammed Fasha" userId="cc64f42d-a1a6-4f08-b97b-0c37f877119f" providerId="ADAL" clId="{0455E0E6-2388-40FF-8789-A613D1CB1008}" dt="2025-07-26T15:01:03.233" v="3" actId="27636"/>
+        <pc:sldMkLst>
+          <pc:docMk/>
+          <pc:sldMk cId="1427723282" sldId="462"/>
+        </pc:sldMkLst>
+        <pc:spChg chg="mod">
+          <ac:chgData name="Mohammed Fasha" userId="cc64f42d-a1a6-4f08-b97b-0c37f877119f" providerId="ADAL" clId="{0455E0E6-2388-40FF-8789-A613D1CB1008}" dt="2025-07-26T15:01:03.233" v="3" actId="27636"/>
+          <ac:spMkLst>
+            <pc:docMk/>
+            <pc:sldMk cId="1427723282" sldId="462"/>
+            <ac:spMk id="2" creationId="{5161A592-C95D-5F4C-D812-FDE1F8B67D98}"/>
+          </ac:spMkLst>
+        </pc:spChg>
+      </pc:sldChg>
+      <pc:sldChg chg="addSp delSp modSp mod modClrScheme chgLayout">
+        <pc:chgData name="Mohammed Fasha" userId="cc64f42d-a1a6-4f08-b97b-0c37f877119f" providerId="ADAL" clId="{0455E0E6-2388-40FF-8789-A613D1CB1008}" dt="2025-07-26T15:01:41.656" v="43" actId="313"/>
+        <pc:sldMkLst>
+          <pc:docMk/>
+          <pc:sldMk cId="3941017664" sldId="482"/>
+        </pc:sldMkLst>
+        <pc:spChg chg="del mod ord">
+          <ac:chgData name="Mohammed Fasha" userId="cc64f42d-a1a6-4f08-b97b-0c37f877119f" providerId="ADAL" clId="{0455E0E6-2388-40FF-8789-A613D1CB1008}" dt="2025-07-26T15:01:25.721" v="5" actId="700"/>
+          <ac:spMkLst>
+            <pc:docMk/>
+            <pc:sldMk cId="3941017664" sldId="482"/>
+            <ac:spMk id="2" creationId="{4AB508A7-8888-D77B-B430-86487FE1DB28}"/>
+          </ac:spMkLst>
+        </pc:spChg>
+        <pc:spChg chg="del mod ord">
+          <ac:chgData name="Mohammed Fasha" userId="cc64f42d-a1a6-4f08-b97b-0c37f877119f" providerId="ADAL" clId="{0455E0E6-2388-40FF-8789-A613D1CB1008}" dt="2025-07-26T15:01:25.721" v="5" actId="700"/>
+          <ac:spMkLst>
+            <pc:docMk/>
+            <pc:sldMk cId="3941017664" sldId="482"/>
+            <ac:spMk id="3" creationId="{28A4CF1C-C04B-6B0E-66D9-A9DDA7F6AA70}"/>
+          </ac:spMkLst>
+        </pc:spChg>
+        <pc:spChg chg="add mod ord">
+          <ac:chgData name="Mohammed Fasha" userId="cc64f42d-a1a6-4f08-b97b-0c37f877119f" providerId="ADAL" clId="{0455E0E6-2388-40FF-8789-A613D1CB1008}" dt="2025-07-26T15:01:41.656" v="43" actId="313"/>
+          <ac:spMkLst>
+            <pc:docMk/>
+            <pc:sldMk cId="3941017664" sldId="482"/>
+            <ac:spMk id="4" creationId="{8E2EA1D2-44C5-E332-39BC-CE451FE205E7}"/>
+          </ac:spMkLst>
+        </pc:spChg>
+        <pc:spChg chg="add mod ord">
+          <ac:chgData name="Mohammed Fasha" userId="cc64f42d-a1a6-4f08-b97b-0c37f877119f" providerId="ADAL" clId="{0455E0E6-2388-40FF-8789-A613D1CB1008}" dt="2025-07-26T15:01:25.721" v="5" actId="700"/>
+          <ac:spMkLst>
+            <pc:docMk/>
+            <pc:sldMk cId="3941017664" sldId="482"/>
+            <ac:spMk id="5" creationId="{ABCBDB70-511E-63F0-2A2E-C4DED7350238}"/>
+          </ac:spMkLst>
+        </pc:spChg>
+      </pc:sldChg>
+      <pc:sldChg chg="addSp delSp modSp mod">
+        <pc:chgData name="Mohammed Fasha" userId="cc64f42d-a1a6-4f08-b97b-0c37f877119f" providerId="ADAL" clId="{0455E0E6-2388-40FF-8789-A613D1CB1008}" dt="2025-07-26T17:40:12.463" v="95" actId="1076"/>
+        <pc:sldMkLst>
+          <pc:docMk/>
+          <pc:sldMk cId="1291192180" sldId="483"/>
+        </pc:sldMkLst>
+        <pc:spChg chg="add del mod">
+          <ac:chgData name="Mohammed Fasha" userId="cc64f42d-a1a6-4f08-b97b-0c37f877119f" providerId="ADAL" clId="{0455E0E6-2388-40FF-8789-A613D1CB1008}" dt="2025-07-26T17:40:12.463" v="95" actId="1076"/>
+          <ac:spMkLst>
+            <pc:docMk/>
+            <pc:sldMk cId="1291192180" sldId="483"/>
+            <ac:spMk id="2" creationId="{269DA4D1-C52F-51DE-82E4-4CE2A0A5B4F9}"/>
+          </ac:spMkLst>
+        </pc:spChg>
+        <pc:spChg chg="mod">
+          <ac:chgData name="Mohammed Fasha" userId="cc64f42d-a1a6-4f08-b97b-0c37f877119f" providerId="ADAL" clId="{0455E0E6-2388-40FF-8789-A613D1CB1008}" dt="2025-07-26T15:06:53.019" v="86" actId="20577"/>
+          <ac:spMkLst>
+            <pc:docMk/>
+            <pc:sldMk cId="1291192180" sldId="483"/>
+            <ac:spMk id="3" creationId="{313D3DFB-4B7B-5020-971F-AF2B7A0A35FA}"/>
+          </ac:spMkLst>
+        </pc:spChg>
+        <pc:spChg chg="add">
+          <ac:chgData name="Mohammed Fasha" userId="cc64f42d-a1a6-4f08-b97b-0c37f877119f" providerId="ADAL" clId="{0455E0E6-2388-40FF-8789-A613D1CB1008}" dt="2025-07-26T17:39:42.717" v="87"/>
+          <ac:spMkLst>
+            <pc:docMk/>
+            <pc:sldMk cId="1291192180" sldId="483"/>
+            <ac:spMk id="4" creationId="{78257968-A349-C409-8BA2-16BC23D00E70}"/>
+          </ac:spMkLst>
+        </pc:spChg>
+        <pc:spChg chg="add mod">
+          <ac:chgData name="Mohammed Fasha" userId="cc64f42d-a1a6-4f08-b97b-0c37f877119f" providerId="ADAL" clId="{0455E0E6-2388-40FF-8789-A613D1CB1008}" dt="2025-07-26T17:39:58.898" v="90"/>
+          <ac:spMkLst>
+            <pc:docMk/>
+            <pc:sldMk cId="1291192180" sldId="483"/>
+            <ac:spMk id="5" creationId="{7A138DF1-02E8-85BC-68FA-8234ED2E27FF}"/>
+          </ac:spMkLst>
+        </pc:spChg>
+        <pc:spChg chg="add mod">
+          <ac:chgData name="Mohammed Fasha" userId="cc64f42d-a1a6-4f08-b97b-0c37f877119f" providerId="ADAL" clId="{0455E0E6-2388-40FF-8789-A613D1CB1008}" dt="2025-07-26T17:40:11.524" v="94" actId="1076"/>
+          <ac:spMkLst>
+            <pc:docMk/>
+            <pc:sldMk cId="1291192180" sldId="483"/>
+            <ac:spMk id="6" creationId="{753DAA7F-8E19-6902-2AEC-999C70373321}"/>
+          </ac:spMkLst>
+        </pc:spChg>
+      </pc:sldChg>
+    </pc:docChg>
+  </pc:docChgLst>
+  <pc:docChgLst>
     <pc:chgData name="Mohammed Fasha" userId="cc64f42d-a1a6-4f08-b97b-0c37f877119f" providerId="ADAL" clId="{D1859E10-E91F-4CD4-B9AD-657F2116AC8C}"/>
     <pc:docChg chg="custSel modMainMaster">
       <pc:chgData name="Mohammed Fasha" userId="cc64f42d-a1a6-4f08-b97b-0c37f877119f" providerId="ADAL" clId="{D1859E10-E91F-4CD4-B9AD-657F2116AC8C}" dt="2024-11-09T05:23:14.444" v="3" actId="1076"/>
@@ -1779,7 +1824,7 @@
           <a:p>
             <a:fld id="{D83FB9BE-DA6C-46CF-8E77-0CE63E601AD4}" type="datetimeFigureOut">
               <a:rPr lang="en-US" smtClean="0"/>
-              <a:t>7/16/2025</a:t>
+              <a:t>7/26/2025</a:t>
             </a:fld>
             <a:endParaRPr lang="en-US"/>
           </a:p>
@@ -1977,7 +2022,7 @@
           <a:p>
             <a:fld id="{D83FB9BE-DA6C-46CF-8E77-0CE63E601AD4}" type="datetimeFigureOut">
               <a:rPr lang="en-US" smtClean="0"/>
-              <a:t>7/16/2025</a:t>
+              <a:t>7/26/2025</a:t>
             </a:fld>
             <a:endParaRPr lang="en-US"/>
           </a:p>
@@ -2185,7 +2230,7 @@
           <a:p>
             <a:fld id="{D83FB9BE-DA6C-46CF-8E77-0CE63E601AD4}" type="datetimeFigureOut">
               <a:rPr lang="en-US" smtClean="0"/>
-              <a:t>7/16/2025</a:t>
+              <a:t>7/26/2025</a:t>
             </a:fld>
             <a:endParaRPr lang="en-US"/>
           </a:p>
@@ -2598,7 +2643,7 @@
           <a:p>
             <a:fld id="{D83FB9BE-DA6C-46CF-8E77-0CE63E601AD4}" type="datetimeFigureOut">
               <a:rPr lang="en-US" smtClean="0"/>
-              <a:t>7/16/2025</a:t>
+              <a:t>7/26/2025</a:t>
             </a:fld>
             <a:endParaRPr lang="en-US"/>
           </a:p>
@@ -2863,7 +2908,7 @@
           <a:p>
             <a:fld id="{D83FB9BE-DA6C-46CF-8E77-0CE63E601AD4}" type="datetimeFigureOut">
               <a:rPr lang="en-US" smtClean="0"/>
-              <a:t>7/16/2025</a:t>
+              <a:t>7/26/2025</a:t>
             </a:fld>
             <a:endParaRPr lang="en-US"/>
           </a:p>
@@ -3275,7 +3320,7 @@
           <a:p>
             <a:fld id="{D83FB9BE-DA6C-46CF-8E77-0CE63E601AD4}" type="datetimeFigureOut">
               <a:rPr lang="en-US" smtClean="0"/>
-              <a:t>7/16/2025</a:t>
+              <a:t>7/26/2025</a:t>
             </a:fld>
             <a:endParaRPr lang="en-US"/>
           </a:p>
@@ -3416,7 +3461,7 @@
           <a:p>
             <a:fld id="{D83FB9BE-DA6C-46CF-8E77-0CE63E601AD4}" type="datetimeFigureOut">
               <a:rPr lang="en-US" smtClean="0"/>
-              <a:t>7/16/2025</a:t>
+              <a:t>7/26/2025</a:t>
             </a:fld>
             <a:endParaRPr lang="en-US"/>
           </a:p>
@@ -3529,7 +3574,7 @@
           <a:p>
             <a:fld id="{D83FB9BE-DA6C-46CF-8E77-0CE63E601AD4}" type="datetimeFigureOut">
               <a:rPr lang="en-US" smtClean="0"/>
-              <a:t>7/16/2025</a:t>
+              <a:t>7/26/2025</a:t>
             </a:fld>
             <a:endParaRPr lang="en-US"/>
           </a:p>
@@ -3840,7 +3885,7 @@
           <a:p>
             <a:fld id="{D83FB9BE-DA6C-46CF-8E77-0CE63E601AD4}" type="datetimeFigureOut">
               <a:rPr lang="en-US" smtClean="0"/>
-              <a:t>7/16/2025</a:t>
+              <a:t>7/26/2025</a:t>
             </a:fld>
             <a:endParaRPr lang="en-US"/>
           </a:p>
@@ -4128,7 +4173,7 @@
           <a:p>
             <a:fld id="{D83FB9BE-DA6C-46CF-8E77-0CE63E601AD4}" type="datetimeFigureOut">
               <a:rPr lang="en-US" smtClean="0"/>
-              <a:t>7/16/2025</a:t>
+              <a:t>7/26/2025</a:t>
             </a:fld>
             <a:endParaRPr lang="en-US"/>
           </a:p>
@@ -4369,7 +4414,7 @@
           <a:p>
             <a:fld id="{D83FB9BE-DA6C-46CF-8E77-0CE63E601AD4}" type="datetimeFigureOut">
               <a:rPr lang="en-US" smtClean="0"/>
-              <a:t>7/16/2025</a:t>
+              <a:t>7/26/2025</a:t>
             </a:fld>
             <a:endParaRPr lang="en-US"/>
           </a:p>
@@ -6112,62 +6157,30 @@
         </p:spPr>
         <p:txBody>
           <a:bodyPr>
-            <a:normAutofit fontScale="85000" lnSpcReduction="10000"/>
+            <a:normAutofit/>
           </a:bodyPr>
           <a:lstStyle/>
           <a:p>
             <a:r>
-              <a:rPr lang="en-US" dirty="0"/>
+              <a:rPr lang="en-US" sz="2000" dirty="0"/>
               <a:t>A linear regression model can be trained using </a:t>
             </a:r>
             <a:r>
-              <a:rPr lang="en-US" b="1" i="1" dirty="0"/>
+              <a:rPr lang="en-US" sz="2000" b="1" dirty="0"/>
               <a:t>Gradient Descent</a:t>
             </a:r>
             <a:r>
-              <a:rPr lang="en-US" dirty="0"/>
+              <a:rPr lang="en-US" sz="2000" dirty="0"/>
               <a:t>, which adjusts the model's parameters to minimize the mean squared error (MSE).</a:t>
             </a:r>
           </a:p>
           <a:p>
             <a:r>
-              <a:rPr lang="en-US" dirty="0"/>
-              <a:t>To update (</a:t>
-            </a:r>
-            <a:r>
-              <a:rPr lang="en-US" i="1" dirty="0"/>
-              <a:t>Beta 0) </a:t>
-            </a:r>
-            <a:r>
-              <a:rPr lang="en-US" dirty="0"/>
-              <a:t>and (</a:t>
-            </a:r>
-            <a:r>
-              <a:rPr lang="en-US" i="1" dirty="0"/>
-              <a:t>Beta 1)</a:t>
-            </a:r>
-            <a:r>
-              <a:rPr lang="en-US" dirty="0"/>
-              <a:t> and reduce the cost function (minimizing the RMSE), gradient descent starts with random values for (</a:t>
-            </a:r>
-            <a:r>
-              <a:rPr lang="en-US" i="1" dirty="0"/>
-              <a:t>Beta 0) </a:t>
-            </a:r>
-            <a:r>
-              <a:rPr lang="en-US" dirty="0"/>
-              <a:t>and (</a:t>
-            </a:r>
-            <a:r>
-              <a:rPr lang="en-US" i="1" dirty="0"/>
-              <a:t>Beta 1) </a:t>
-            </a:r>
-            <a:r>
-              <a:rPr lang="en-US" dirty="0"/>
-              <a:t>and </a:t>
-            </a:r>
-            <a:r>
-              <a:rPr lang="en-US" b="1" i="1" dirty="0">
+              <a:rPr lang="en-US" sz="2000" dirty="0"/>
+              <a:t>To update (Beta 0) and (Beta 1) and reduce the cost function (minimizing the RMSE), gradient descent starts with random values for (Beta 0) and (Beta 1) and </a:t>
+            </a:r>
+            <a:r>
+              <a:rPr lang="en-US" sz="2000" b="1" dirty="0">
                 <a:solidFill>
                   <a:srgbClr val="FF0000"/>
                 </a:solidFill>
@@ -6175,19 +6188,19 @@
               <a:t>iteratively</a:t>
             </a:r>
             <a:r>
-              <a:rPr lang="en-US" dirty="0"/>
+              <a:rPr lang="en-US" sz="2000" dirty="0"/>
               <a:t> improves them to find the best-fit line.</a:t>
             </a:r>
           </a:p>
           <a:p>
             <a:r>
-              <a:rPr lang="en-US" dirty="0"/>
+              <a:rPr lang="en-US" sz="2000" dirty="0"/>
               <a:t>A gradient is simply the derivative, showing how small changes in inputs affect the output. </a:t>
             </a:r>
           </a:p>
           <a:p>
             <a:r>
-              <a:rPr lang="en-US" dirty="0"/>
+              <a:rPr lang="en-US" sz="2000" dirty="0"/>
               <a:t>By moving in the direction of the Mean Squared Error negative gradient with respect to the coefficients, the coefficients can be changed.</a:t>
             </a:r>
           </a:p>
@@ -6283,10 +6296,10 @@
       </p:grpSpPr>
       <p:sp>
         <p:nvSpPr>
-          <p:cNvPr id="2" name="Content Placeholder 1">
-            <a:extLst>
-              <a:ext uri="{FF2B5EF4-FFF2-40B4-BE49-F238E27FC236}">
-                <a16:creationId xmlns:a16="http://schemas.microsoft.com/office/drawing/2014/main" id="{4AB508A7-8888-D77B-B430-86487FE1DB28}"/>
+          <p:cNvPr id="4" name="Title 3">
+            <a:extLst>
+              <a:ext uri="{FF2B5EF4-FFF2-40B4-BE49-F238E27FC236}">
+                <a16:creationId xmlns:a16="http://schemas.microsoft.com/office/drawing/2014/main" id="{8E2EA1D2-44C5-E332-39BC-CE451FE205E7}"/>
               </a:ext>
             </a:extLst>
           </p:cNvPr>
@@ -6294,7 +6307,7 @@
             <a:spLocks noGrp="1"/>
           </p:cNvSpPr>
           <p:nvPr>
-            <p:ph idx="1"/>
+            <p:ph type="title"/>
           </p:nvPr>
         </p:nvSpPr>
         <p:spPr/>
@@ -6302,16 +6315,19 @@
           <a:bodyPr/>
           <a:lstStyle/>
           <a:p>
-            <a:endParaRPr lang="en-US"/>
-          </a:p>
-        </p:txBody>
-      </p:sp>
-      <p:sp>
-        <p:nvSpPr>
-          <p:cNvPr id="3" name="Title 2">
-            <a:extLst>
-              <a:ext uri="{FF2B5EF4-FFF2-40B4-BE49-F238E27FC236}">
-                <a16:creationId xmlns:a16="http://schemas.microsoft.com/office/drawing/2014/main" id="{28A4CF1C-C04B-6B0E-66D9-A9DDA7F6AA70}"/>
+            <a:r>
+              <a:rPr lang="en-US" dirty="0"/>
+              <a:t>Implement Regression in Python</a:t>
+            </a:r>
+          </a:p>
+        </p:txBody>
+      </p:sp>
+      <p:sp>
+        <p:nvSpPr>
+          <p:cNvPr id="5" name="Text Placeholder 4">
+            <a:extLst>
+              <a:ext uri="{FF2B5EF4-FFF2-40B4-BE49-F238E27FC236}">
+                <a16:creationId xmlns:a16="http://schemas.microsoft.com/office/drawing/2014/main" id="{ABCBDB70-511E-63F0-2A2E-C4DED7350238}"/>
               </a:ext>
             </a:extLst>
           </p:cNvPr>
@@ -6319,7 +6335,7 @@
             <a:spLocks noGrp="1"/>
           </p:cNvSpPr>
           <p:nvPr>
-            <p:ph type="title"/>
+            <p:ph type="body" idx="1"/>
           </p:nvPr>
         </p:nvSpPr>
         <p:spPr/>
@@ -6379,35 +6395,44 @@
         </p:nvSpPr>
         <p:spPr/>
         <p:txBody>
+          <a:bodyPr>
+            <a:normAutofit/>
+          </a:bodyPr>
+          <a:lstStyle/>
+          <a:p>
+            <a:endParaRPr lang="en-US" sz="1600" noProof="1"/>
+          </a:p>
+        </p:txBody>
+      </p:sp>
+      <p:sp>
+        <p:nvSpPr>
+          <p:cNvPr id="3" name="Title 2">
+            <a:extLst>
+              <a:ext uri="{FF2B5EF4-FFF2-40B4-BE49-F238E27FC236}">
+                <a16:creationId xmlns:a16="http://schemas.microsoft.com/office/drawing/2014/main" id="{313D3DFB-4B7B-5020-971F-AF2B7A0A35FA}"/>
+              </a:ext>
+            </a:extLst>
+          </p:cNvPr>
+          <p:cNvSpPr>
+            <a:spLocks noGrp="1"/>
+          </p:cNvSpPr>
+          <p:nvPr>
+            <p:ph type="title"/>
+          </p:nvPr>
+        </p:nvSpPr>
+        <p:spPr/>
+        <p:txBody>
           <a:bodyPr/>
           <a:lstStyle/>
           <a:p>
-            <a:endParaRPr lang="en-US"/>
-          </a:p>
-        </p:txBody>
-      </p:sp>
-      <p:sp>
-        <p:nvSpPr>
-          <p:cNvPr id="3" name="Title 2">
-            <a:extLst>
-              <a:ext uri="{FF2B5EF4-FFF2-40B4-BE49-F238E27FC236}">
-                <a16:creationId xmlns:a16="http://schemas.microsoft.com/office/drawing/2014/main" id="{313D3DFB-4B7B-5020-971F-AF2B7A0A35FA}"/>
-              </a:ext>
-            </a:extLst>
-          </p:cNvPr>
-          <p:cNvSpPr>
-            <a:spLocks noGrp="1"/>
-          </p:cNvSpPr>
-          <p:nvPr>
-            <p:ph type="title"/>
-          </p:nvPr>
-        </p:nvSpPr>
-        <p:spPr/>
-        <p:txBody>
-          <a:bodyPr/>
-          <a:lstStyle/>
-          <a:p>
-            <a:endParaRPr lang="en-US"/>
+            <a:r>
+              <a:rPr lang="en-US" dirty="0"/>
+              <a:t>Import the </a:t>
+            </a:r>
+            <a:r>
+              <a:rPr lang="en-US"/>
+              <a:t>Required Libraries</a:t>
+            </a:r>
           </a:p>
         </p:txBody>
       </p:sp>

--- a/20243/Part 2-Regression/simple linear regression slides.pptx
+++ b/20243/Part 2-Regression/simple linear regression slides.pptx
@@ -18,14 +18,17 @@
     <p:sldId id="481" r:id="rId15"/>
     <p:sldId id="461" r:id="rId16"/>
     <p:sldId id="462" r:id="rId17"/>
-    <p:sldId id="482" r:id="rId18"/>
-    <p:sldId id="483" r:id="rId19"/>
-    <p:sldId id="463" r:id="rId20"/>
-    <p:sldId id="465" r:id="rId21"/>
-    <p:sldId id="464" r:id="rId22"/>
-    <p:sldId id="466" r:id="rId23"/>
-    <p:sldId id="476" r:id="rId24"/>
-    <p:sldId id="456" r:id="rId25"/>
+    <p:sldId id="463" r:id="rId18"/>
+    <p:sldId id="482" r:id="rId19"/>
+    <p:sldId id="483" r:id="rId20"/>
+    <p:sldId id="486" r:id="rId21"/>
+    <p:sldId id="485" r:id="rId22"/>
+    <p:sldId id="487" r:id="rId23"/>
+    <p:sldId id="488" r:id="rId24"/>
+    <p:sldId id="465" r:id="rId25"/>
+    <p:sldId id="464" r:id="rId26"/>
+    <p:sldId id="466" r:id="rId27"/>
+    <p:sldId id="476" r:id="rId28"/>
   </p:sldIdLst>
   <p:sldSz cx="12192000" cy="6858000"/>
   <p:notesSz cx="6858000" cy="9144000"/>
@@ -135,7 +138,7 @@
 <file path=ppt/revisionInfo.xml><?xml version="1.0" encoding="utf-8"?>
 <p1510:revInfo xmlns:a="http://schemas.openxmlformats.org/drawingml/2006/main" xmlns:r="http://schemas.openxmlformats.org/officeDocument/2006/relationships" xmlns:p1510="http://schemas.microsoft.com/office/powerpoint/2015/10/main">
   <p1510:revLst>
-    <p1510:client id="{0455E0E6-2388-40FF-8789-A613D1CB1008}" v="8" dt="2025-07-26T17:40:12.131"/>
+    <p1510:client id="{0455E0E6-2388-40FF-8789-A613D1CB1008}" v="37" dt="2025-07-26T18:08:36.814"/>
   </p1510:revLst>
 </p1510:revInfo>
 </file>
@@ -1336,11 +1339,18 @@
   </pc:docChgLst>
   <pc:docChgLst>
     <pc:chgData name="Mohammed Fasha" userId="cc64f42d-a1a6-4f08-b97b-0c37f877119f" providerId="ADAL" clId="{0455E0E6-2388-40FF-8789-A613D1CB1008}"/>
-    <pc:docChg chg="undo custSel modSld">
-      <pc:chgData name="Mohammed Fasha" userId="cc64f42d-a1a6-4f08-b97b-0c37f877119f" providerId="ADAL" clId="{0455E0E6-2388-40FF-8789-A613D1CB1008}" dt="2025-07-26T17:40:12.463" v="95" actId="1076"/>
+    <pc:docChg chg="undo custSel addSld delSld modSld sldOrd">
+      <pc:chgData name="Mohammed Fasha" userId="cc64f42d-a1a6-4f08-b97b-0c37f877119f" providerId="ADAL" clId="{0455E0E6-2388-40FF-8789-A613D1CB1008}" dt="2025-07-26T18:10:35.618" v="584" actId="1076"/>
       <pc:docMkLst>
         <pc:docMk/>
       </pc:docMkLst>
+      <pc:sldChg chg="del">
+        <pc:chgData name="Mohammed Fasha" userId="cc64f42d-a1a6-4f08-b97b-0c37f877119f" providerId="ADAL" clId="{0455E0E6-2388-40FF-8789-A613D1CB1008}" dt="2025-07-26T17:56:17.628" v="131" actId="2696"/>
+        <pc:sldMkLst>
+          <pc:docMk/>
+          <pc:sldMk cId="3910887702" sldId="456"/>
+        </pc:sldMkLst>
+      </pc:sldChg>
       <pc:sldChg chg="modSp mod">
         <pc:chgData name="Mohammed Fasha" userId="cc64f42d-a1a6-4f08-b97b-0c37f877119f" providerId="ADAL" clId="{0455E0E6-2388-40FF-8789-A613D1CB1008}" dt="2025-07-26T15:01:03.233" v="3" actId="27636"/>
         <pc:sldMkLst>
@@ -1356,8 +1366,145 @@
           </ac:spMkLst>
         </pc:spChg>
       </pc:sldChg>
-      <pc:sldChg chg="addSp delSp modSp mod modClrScheme chgLayout">
-        <pc:chgData name="Mohammed Fasha" userId="cc64f42d-a1a6-4f08-b97b-0c37f877119f" providerId="ADAL" clId="{0455E0E6-2388-40FF-8789-A613D1CB1008}" dt="2025-07-26T15:01:41.656" v="43" actId="313"/>
+      <pc:sldChg chg="modSp mod">
+        <pc:chgData name="Mohammed Fasha" userId="cc64f42d-a1a6-4f08-b97b-0c37f877119f" providerId="ADAL" clId="{0455E0E6-2388-40FF-8789-A613D1CB1008}" dt="2025-07-26T18:10:35.618" v="584" actId="1076"/>
+        <pc:sldMkLst>
+          <pc:docMk/>
+          <pc:sldMk cId="538252582" sldId="463"/>
+        </pc:sldMkLst>
+        <pc:picChg chg="mod">
+          <ac:chgData name="Mohammed Fasha" userId="cc64f42d-a1a6-4f08-b97b-0c37f877119f" providerId="ADAL" clId="{0455E0E6-2388-40FF-8789-A613D1CB1008}" dt="2025-07-26T18:10:35.618" v="584" actId="1076"/>
+          <ac:picMkLst>
+            <pc:docMk/>
+            <pc:sldMk cId="538252582" sldId="463"/>
+            <ac:picMk id="5" creationId="{B77B7C33-3931-334D-F5F0-51578F602770}"/>
+          </ac:picMkLst>
+        </pc:picChg>
+      </pc:sldChg>
+      <pc:sldChg chg="modSp mod">
+        <pc:chgData name="Mohammed Fasha" userId="cc64f42d-a1a6-4f08-b97b-0c37f877119f" providerId="ADAL" clId="{0455E0E6-2388-40FF-8789-A613D1CB1008}" dt="2025-07-26T18:10:01.638" v="581" actId="113"/>
+        <pc:sldMkLst>
+          <pc:docMk/>
+          <pc:sldMk cId="1559017199" sldId="464"/>
+        </pc:sldMkLst>
+        <pc:spChg chg="mod">
+          <ac:chgData name="Mohammed Fasha" userId="cc64f42d-a1a6-4f08-b97b-0c37f877119f" providerId="ADAL" clId="{0455E0E6-2388-40FF-8789-A613D1CB1008}" dt="2025-07-26T18:10:01.638" v="581" actId="113"/>
+          <ac:spMkLst>
+            <pc:docMk/>
+            <pc:sldMk cId="1559017199" sldId="464"/>
+            <ac:spMk id="2" creationId="{E4639E90-EC50-1142-F307-1730254FA4B7}"/>
+          </ac:spMkLst>
+        </pc:spChg>
+        <pc:picChg chg="mod">
+          <ac:chgData name="Mohammed Fasha" userId="cc64f42d-a1a6-4f08-b97b-0c37f877119f" providerId="ADAL" clId="{0455E0E6-2388-40FF-8789-A613D1CB1008}" dt="2025-07-26T18:08:17.324" v="553" actId="1076"/>
+          <ac:picMkLst>
+            <pc:docMk/>
+            <pc:sldMk cId="1559017199" sldId="464"/>
+            <ac:picMk id="5" creationId="{A8CF5184-C11D-A684-D4E9-FA1F42D7D64D}"/>
+          </ac:picMkLst>
+        </pc:picChg>
+        <pc:picChg chg="mod">
+          <ac:chgData name="Mohammed Fasha" userId="cc64f42d-a1a6-4f08-b97b-0c37f877119f" providerId="ADAL" clId="{0455E0E6-2388-40FF-8789-A613D1CB1008}" dt="2025-07-26T18:08:19.026" v="554" actId="1076"/>
+          <ac:picMkLst>
+            <pc:docMk/>
+            <pc:sldMk cId="1559017199" sldId="464"/>
+            <ac:picMk id="7" creationId="{11CD6987-E88A-6289-EAA7-4A698B7CE9FF}"/>
+          </ac:picMkLst>
+        </pc:picChg>
+      </pc:sldChg>
+      <pc:sldChg chg="addSp modSp mod">
+        <pc:chgData name="Mohammed Fasha" userId="cc64f42d-a1a6-4f08-b97b-0c37f877119f" providerId="ADAL" clId="{0455E0E6-2388-40FF-8789-A613D1CB1008}" dt="2025-07-26T18:09:36.757" v="577" actId="113"/>
+        <pc:sldMkLst>
+          <pc:docMk/>
+          <pc:sldMk cId="2067025602" sldId="465"/>
+        </pc:sldMkLst>
+        <pc:spChg chg="mod">
+          <ac:chgData name="Mohammed Fasha" userId="cc64f42d-a1a6-4f08-b97b-0c37f877119f" providerId="ADAL" clId="{0455E0E6-2388-40FF-8789-A613D1CB1008}" dt="2025-07-26T18:08:48.204" v="562" actId="14100"/>
+          <ac:spMkLst>
+            <pc:docMk/>
+            <pc:sldMk cId="2067025602" sldId="465"/>
+            <ac:spMk id="2" creationId="{D6A166C5-B6FB-3038-2293-415E4C7D22E6}"/>
+          </ac:spMkLst>
+        </pc:spChg>
+        <pc:spChg chg="add mod">
+          <ac:chgData name="Mohammed Fasha" userId="cc64f42d-a1a6-4f08-b97b-0c37f877119f" providerId="ADAL" clId="{0455E0E6-2388-40FF-8789-A613D1CB1008}" dt="2025-07-26T18:09:36.757" v="577" actId="113"/>
+          <ac:spMkLst>
+            <pc:docMk/>
+            <pc:sldMk cId="2067025602" sldId="465"/>
+            <ac:spMk id="4" creationId="{BBEF8319-D9AC-E564-64FB-B881D619589E}"/>
+          </ac:spMkLst>
+        </pc:spChg>
+        <pc:picChg chg="mod">
+          <ac:chgData name="Mohammed Fasha" userId="cc64f42d-a1a6-4f08-b97b-0c37f877119f" providerId="ADAL" clId="{0455E0E6-2388-40FF-8789-A613D1CB1008}" dt="2025-07-26T18:09:00.350" v="566" actId="1076"/>
+          <ac:picMkLst>
+            <pc:docMk/>
+            <pc:sldMk cId="2067025602" sldId="465"/>
+            <ac:picMk id="6" creationId="{1200D47E-397F-9E31-C30B-EE0822713306}"/>
+          </ac:picMkLst>
+        </pc:picChg>
+      </pc:sldChg>
+      <pc:sldChg chg="modSp mod">
+        <pc:chgData name="Mohammed Fasha" userId="cc64f42d-a1a6-4f08-b97b-0c37f877119f" providerId="ADAL" clId="{0455E0E6-2388-40FF-8789-A613D1CB1008}" dt="2025-07-26T18:10:05.445" v="582" actId="113"/>
+        <pc:sldMkLst>
+          <pc:docMk/>
+          <pc:sldMk cId="2575217795" sldId="466"/>
+        </pc:sldMkLst>
+        <pc:spChg chg="mod">
+          <ac:chgData name="Mohammed Fasha" userId="cc64f42d-a1a6-4f08-b97b-0c37f877119f" providerId="ADAL" clId="{0455E0E6-2388-40FF-8789-A613D1CB1008}" dt="2025-07-26T18:10:05.445" v="582" actId="113"/>
+          <ac:spMkLst>
+            <pc:docMk/>
+            <pc:sldMk cId="2575217795" sldId="466"/>
+            <ac:spMk id="2" creationId="{AAD33A44-4738-B463-10DB-B09ADF5D976F}"/>
+          </ac:spMkLst>
+        </pc:spChg>
+        <pc:picChg chg="mod">
+          <ac:chgData name="Mohammed Fasha" userId="cc64f42d-a1a6-4f08-b97b-0c37f877119f" providerId="ADAL" clId="{0455E0E6-2388-40FF-8789-A613D1CB1008}" dt="2025-07-26T18:08:22.226" v="555" actId="1076"/>
+          <ac:picMkLst>
+            <pc:docMk/>
+            <pc:sldMk cId="2575217795" sldId="466"/>
+            <ac:picMk id="7" creationId="{673162F8-4616-4609-2A8E-E1582A467BE4}"/>
+          </ac:picMkLst>
+        </pc:picChg>
+      </pc:sldChg>
+      <pc:sldChg chg="modSp mod">
+        <pc:chgData name="Mohammed Fasha" userId="cc64f42d-a1a6-4f08-b97b-0c37f877119f" providerId="ADAL" clId="{0455E0E6-2388-40FF-8789-A613D1CB1008}" dt="2025-07-26T18:10:09.862" v="583" actId="113"/>
+        <pc:sldMkLst>
+          <pc:docMk/>
+          <pc:sldMk cId="1558611893" sldId="476"/>
+        </pc:sldMkLst>
+        <pc:spChg chg="mod">
+          <ac:chgData name="Mohammed Fasha" userId="cc64f42d-a1a6-4f08-b97b-0c37f877119f" providerId="ADAL" clId="{0455E0E6-2388-40FF-8789-A613D1CB1008}" dt="2025-07-26T18:10:09.862" v="583" actId="113"/>
+          <ac:spMkLst>
+            <pc:docMk/>
+            <pc:sldMk cId="1558611893" sldId="476"/>
+            <ac:spMk id="2" creationId="{4E795974-C30C-A8F4-FC12-5BE5FE355A52}"/>
+          </ac:spMkLst>
+        </pc:spChg>
+      </pc:sldChg>
+      <pc:sldChg chg="modSp mod">
+        <pc:chgData name="Mohammed Fasha" userId="cc64f42d-a1a6-4f08-b97b-0c37f877119f" providerId="ADAL" clId="{0455E0E6-2388-40FF-8789-A613D1CB1008}" dt="2025-07-26T17:56:45.668" v="167" actId="20577"/>
+        <pc:sldMkLst>
+          <pc:docMk/>
+          <pc:sldMk cId="2145969539" sldId="478"/>
+        </pc:sldMkLst>
+        <pc:spChg chg="mod">
+          <ac:chgData name="Mohammed Fasha" userId="cc64f42d-a1a6-4f08-b97b-0c37f877119f" providerId="ADAL" clId="{0455E0E6-2388-40FF-8789-A613D1CB1008}" dt="2025-07-26T17:56:45.668" v="167" actId="20577"/>
+          <ac:spMkLst>
+            <pc:docMk/>
+            <pc:sldMk cId="2145969539" sldId="478"/>
+            <ac:spMk id="2" creationId="{595313C8-76FF-2F07-3ED5-814AD3EC72DC}"/>
+          </ac:spMkLst>
+        </pc:spChg>
+      </pc:sldChg>
+      <pc:sldChg chg="add">
+        <pc:chgData name="Mohammed Fasha" userId="cc64f42d-a1a6-4f08-b97b-0c37f877119f" providerId="ADAL" clId="{0455E0E6-2388-40FF-8789-A613D1CB1008}" dt="2025-07-26T17:55:16.098" v="113"/>
+        <pc:sldMkLst>
+          <pc:docMk/>
+          <pc:sldMk cId="1929062822" sldId="482"/>
+        </pc:sldMkLst>
+      </pc:sldChg>
+      <pc:sldChg chg="addSp delSp modSp del mod modClrScheme chgLayout">
+        <pc:chgData name="Mohammed Fasha" userId="cc64f42d-a1a6-4f08-b97b-0c37f877119f" providerId="ADAL" clId="{0455E0E6-2388-40FF-8789-A613D1CB1008}" dt="2025-07-26T17:55:07.349" v="111" actId="2696"/>
         <pc:sldMkLst>
           <pc:docMk/>
           <pc:sldMk cId="3941017664" sldId="482"/>
@@ -1395,14 +1542,14 @@
           </ac:spMkLst>
         </pc:spChg>
       </pc:sldChg>
-      <pc:sldChg chg="addSp delSp modSp mod">
-        <pc:chgData name="Mohammed Fasha" userId="cc64f42d-a1a6-4f08-b97b-0c37f877119f" providerId="ADAL" clId="{0455E0E6-2388-40FF-8789-A613D1CB1008}" dt="2025-07-26T17:40:12.463" v="95" actId="1076"/>
+      <pc:sldChg chg="addSp delSp modSp del mod">
+        <pc:chgData name="Mohammed Fasha" userId="cc64f42d-a1a6-4f08-b97b-0c37f877119f" providerId="ADAL" clId="{0455E0E6-2388-40FF-8789-A613D1CB1008}" dt="2025-07-26T17:55:07.349" v="111" actId="2696"/>
         <pc:sldMkLst>
           <pc:docMk/>
           <pc:sldMk cId="1291192180" sldId="483"/>
         </pc:sldMkLst>
         <pc:spChg chg="add del mod">
-          <ac:chgData name="Mohammed Fasha" userId="cc64f42d-a1a6-4f08-b97b-0c37f877119f" providerId="ADAL" clId="{0455E0E6-2388-40FF-8789-A613D1CB1008}" dt="2025-07-26T17:40:12.463" v="95" actId="1076"/>
+          <ac:chgData name="Mohammed Fasha" userId="cc64f42d-a1a6-4f08-b97b-0c37f877119f" providerId="ADAL" clId="{0455E0E6-2388-40FF-8789-A613D1CB1008}" dt="2025-07-26T17:54:01.411" v="101" actId="21"/>
           <ac:spMkLst>
             <pc:docMk/>
             <pc:sldMk cId="1291192180" sldId="483"/>
@@ -1439,6 +1586,296 @@
             <pc:docMk/>
             <pc:sldMk cId="1291192180" sldId="483"/>
             <ac:spMk id="6" creationId="{753DAA7F-8E19-6902-2AEC-999C70373321}"/>
+          </ac:spMkLst>
+        </pc:spChg>
+        <pc:spChg chg="add mod">
+          <ac:chgData name="Mohammed Fasha" userId="cc64f42d-a1a6-4f08-b97b-0c37f877119f" providerId="ADAL" clId="{0455E0E6-2388-40FF-8789-A613D1CB1008}" dt="2025-07-26T17:54:53.066" v="109" actId="948"/>
+          <ac:spMkLst>
+            <pc:docMk/>
+            <pc:sldMk cId="1291192180" sldId="483"/>
+            <ac:spMk id="8" creationId="{ACB299D0-626F-737A-2A1F-4F549FE052EC}"/>
+          </ac:spMkLst>
+        </pc:spChg>
+      </pc:sldChg>
+      <pc:sldChg chg="add">
+        <pc:chgData name="Mohammed Fasha" userId="cc64f42d-a1a6-4f08-b97b-0c37f877119f" providerId="ADAL" clId="{0455E0E6-2388-40FF-8789-A613D1CB1008}" dt="2025-07-26T17:55:16.098" v="113"/>
+        <pc:sldMkLst>
+          <pc:docMk/>
+          <pc:sldMk cId="2662145334" sldId="483"/>
+        </pc:sldMkLst>
+      </pc:sldChg>
+      <pc:sldChg chg="new del">
+        <pc:chgData name="Mohammed Fasha" userId="cc64f42d-a1a6-4f08-b97b-0c37f877119f" providerId="ADAL" clId="{0455E0E6-2388-40FF-8789-A613D1CB1008}" dt="2025-07-26T17:55:11.080" v="112" actId="47"/>
+        <pc:sldMkLst>
+          <pc:docMk/>
+          <pc:sldMk cId="124150105" sldId="485"/>
+        </pc:sldMkLst>
+      </pc:sldChg>
+      <pc:sldChg chg="addSp delSp modSp new mod">
+        <pc:chgData name="Mohammed Fasha" userId="cc64f42d-a1a6-4f08-b97b-0c37f877119f" providerId="ADAL" clId="{0455E0E6-2388-40FF-8789-A613D1CB1008}" dt="2025-07-26T18:07:58.982" v="550" actId="113"/>
+        <pc:sldMkLst>
+          <pc:docMk/>
+          <pc:sldMk cId="165576399" sldId="485"/>
+        </pc:sldMkLst>
+        <pc:spChg chg="del mod">
+          <ac:chgData name="Mohammed Fasha" userId="cc64f42d-a1a6-4f08-b97b-0c37f877119f" providerId="ADAL" clId="{0455E0E6-2388-40FF-8789-A613D1CB1008}" dt="2025-07-26T17:59:17.930" v="256" actId="21"/>
+          <ac:spMkLst>
+            <pc:docMk/>
+            <pc:sldMk cId="165576399" sldId="485"/>
+            <ac:spMk id="2" creationId="{B6215021-449E-2896-03A8-06EEE826E74F}"/>
+          </ac:spMkLst>
+        </pc:spChg>
+        <pc:spChg chg="mod">
+          <ac:chgData name="Mohammed Fasha" userId="cc64f42d-a1a6-4f08-b97b-0c37f877119f" providerId="ADAL" clId="{0455E0E6-2388-40FF-8789-A613D1CB1008}" dt="2025-07-26T18:00:09.412" v="315" actId="20577"/>
+          <ac:spMkLst>
+            <pc:docMk/>
+            <pc:sldMk cId="165576399" sldId="485"/>
+            <ac:spMk id="3" creationId="{18D3AF28-B4CC-BA03-E601-706704D9F578}"/>
+          </ac:spMkLst>
+        </pc:spChg>
+        <pc:spChg chg="add mod">
+          <ac:chgData name="Mohammed Fasha" userId="cc64f42d-a1a6-4f08-b97b-0c37f877119f" providerId="ADAL" clId="{0455E0E6-2388-40FF-8789-A613D1CB1008}" dt="2025-07-26T18:07:52.819" v="548" actId="113"/>
+          <ac:spMkLst>
+            <pc:docMk/>
+            <pc:sldMk cId="165576399" sldId="485"/>
+            <ac:spMk id="5" creationId="{9DEAC493-EECE-8ECF-1390-683A329DE3A8}"/>
+          </ac:spMkLst>
+        </pc:spChg>
+        <pc:spChg chg="add mod">
+          <ac:chgData name="Mohammed Fasha" userId="cc64f42d-a1a6-4f08-b97b-0c37f877119f" providerId="ADAL" clId="{0455E0E6-2388-40FF-8789-A613D1CB1008}" dt="2025-07-26T18:07:55.452" v="549" actId="113"/>
+          <ac:spMkLst>
+            <pc:docMk/>
+            <pc:sldMk cId="165576399" sldId="485"/>
+            <ac:spMk id="7" creationId="{0A1C3751-059D-A947-518E-EEF9129D0C0E}"/>
+          </ac:spMkLst>
+        </pc:spChg>
+        <pc:spChg chg="add del mod">
+          <ac:chgData name="Mohammed Fasha" userId="cc64f42d-a1a6-4f08-b97b-0c37f877119f" providerId="ADAL" clId="{0455E0E6-2388-40FF-8789-A613D1CB1008}" dt="2025-07-26T17:59:26.389" v="259" actId="478"/>
+          <ac:spMkLst>
+            <pc:docMk/>
+            <pc:sldMk cId="165576399" sldId="485"/>
+            <ac:spMk id="8" creationId="{B6215021-449E-2896-03A8-06EEE826E74F}"/>
+          </ac:spMkLst>
+        </pc:spChg>
+        <pc:spChg chg="add del mod">
+          <ac:chgData name="Mohammed Fasha" userId="cc64f42d-a1a6-4f08-b97b-0c37f877119f" providerId="ADAL" clId="{0455E0E6-2388-40FF-8789-A613D1CB1008}" dt="2025-07-26T18:01:02.524" v="329"/>
+          <ac:spMkLst>
+            <pc:docMk/>
+            <pc:sldMk cId="165576399" sldId="485"/>
+            <ac:spMk id="10" creationId="{CB95687E-47BD-670A-1269-223F3255DE5B}"/>
+          </ac:spMkLst>
+        </pc:spChg>
+        <pc:spChg chg="add mod">
+          <ac:chgData name="Mohammed Fasha" userId="cc64f42d-a1a6-4f08-b97b-0c37f877119f" providerId="ADAL" clId="{0455E0E6-2388-40FF-8789-A613D1CB1008}" dt="2025-07-26T18:00:42.089" v="324"/>
+          <ac:spMkLst>
+            <pc:docMk/>
+            <pc:sldMk cId="165576399" sldId="485"/>
+            <ac:spMk id="11" creationId="{E74FFDBD-7691-0BC9-80E8-6A8F3A526534}"/>
+          </ac:spMkLst>
+        </pc:spChg>
+        <pc:spChg chg="add mod">
+          <ac:chgData name="Mohammed Fasha" userId="cc64f42d-a1a6-4f08-b97b-0c37f877119f" providerId="ADAL" clId="{0455E0E6-2388-40FF-8789-A613D1CB1008}" dt="2025-07-26T18:01:49.899" v="380" actId="1076"/>
+          <ac:spMkLst>
+            <pc:docMk/>
+            <pc:sldMk cId="165576399" sldId="485"/>
+            <ac:spMk id="12" creationId="{866F223C-F998-07B7-7CDD-5E733482CD66}"/>
+          </ac:spMkLst>
+        </pc:spChg>
+        <pc:spChg chg="add mod">
+          <ac:chgData name="Mohammed Fasha" userId="cc64f42d-a1a6-4f08-b97b-0c37f877119f" providerId="ADAL" clId="{0455E0E6-2388-40FF-8789-A613D1CB1008}" dt="2025-07-26T18:02:05.189" v="399" actId="20577"/>
+          <ac:spMkLst>
+            <pc:docMk/>
+            <pc:sldMk cId="165576399" sldId="485"/>
+            <ac:spMk id="13" creationId="{1B382C33-91C0-8349-9B35-6FB5DFF763EE}"/>
+          </ac:spMkLst>
+        </pc:spChg>
+        <pc:spChg chg="add del">
+          <ac:chgData name="Mohammed Fasha" userId="cc64f42d-a1a6-4f08-b97b-0c37f877119f" providerId="ADAL" clId="{0455E0E6-2388-40FF-8789-A613D1CB1008}" dt="2025-07-26T18:02:18.357" v="401" actId="22"/>
+          <ac:spMkLst>
+            <pc:docMk/>
+            <pc:sldMk cId="165576399" sldId="485"/>
+            <ac:spMk id="15" creationId="{F52AA695-0CBC-E840-C5D6-488DAA5BD2B3}"/>
+          </ac:spMkLst>
+        </pc:spChg>
+        <pc:spChg chg="add mod">
+          <ac:chgData name="Mohammed Fasha" userId="cc64f42d-a1a6-4f08-b97b-0c37f877119f" providerId="ADAL" clId="{0455E0E6-2388-40FF-8789-A613D1CB1008}" dt="2025-07-26T18:02:45.914" v="404" actId="1076"/>
+          <ac:spMkLst>
+            <pc:docMk/>
+            <pc:sldMk cId="165576399" sldId="485"/>
+            <ac:spMk id="17" creationId="{4E68AEC2-F7AB-068A-1964-7A91D12FE50D}"/>
+          </ac:spMkLst>
+        </pc:spChg>
+        <pc:spChg chg="add mod">
+          <ac:chgData name="Mohammed Fasha" userId="cc64f42d-a1a6-4f08-b97b-0c37f877119f" providerId="ADAL" clId="{0455E0E6-2388-40FF-8789-A613D1CB1008}" dt="2025-07-26T18:07:58.982" v="550" actId="113"/>
+          <ac:spMkLst>
+            <pc:docMk/>
+            <pc:sldMk cId="165576399" sldId="485"/>
+            <ac:spMk id="19" creationId="{218A98D4-6287-749F-445A-D0B620AB7F89}"/>
+          </ac:spMkLst>
+        </pc:spChg>
+      </pc:sldChg>
+      <pc:sldChg chg="addSp modSp add mod ord">
+        <pc:chgData name="Mohammed Fasha" userId="cc64f42d-a1a6-4f08-b97b-0c37f877119f" providerId="ADAL" clId="{0455E0E6-2388-40FF-8789-A613D1CB1008}" dt="2025-07-26T18:08:06.410" v="552" actId="113"/>
+        <pc:sldMkLst>
+          <pc:docMk/>
+          <pc:sldMk cId="952835031" sldId="486"/>
+        </pc:sldMkLst>
+        <pc:spChg chg="mod">
+          <ac:chgData name="Mohammed Fasha" userId="cc64f42d-a1a6-4f08-b97b-0c37f877119f" providerId="ADAL" clId="{0455E0E6-2388-40FF-8789-A613D1CB1008}" dt="2025-07-26T17:57:35.597" v="203" actId="1076"/>
+          <ac:spMkLst>
+            <pc:docMk/>
+            <pc:sldMk cId="952835031" sldId="486"/>
+            <ac:spMk id="2" creationId="{867A10B3-72F0-DEA2-7DED-0367CA380B36}"/>
+          </ac:spMkLst>
+        </pc:spChg>
+        <pc:spChg chg="mod">
+          <ac:chgData name="Mohammed Fasha" userId="cc64f42d-a1a6-4f08-b97b-0c37f877119f" providerId="ADAL" clId="{0455E0E6-2388-40FF-8789-A613D1CB1008}" dt="2025-07-26T17:58:34.124" v="246" actId="20577"/>
+          <ac:spMkLst>
+            <pc:docMk/>
+            <pc:sldMk cId="952835031" sldId="486"/>
+            <ac:spMk id="3" creationId="{A734EC80-B40E-0812-2410-9449D662958C}"/>
+          </ac:spMkLst>
+        </pc:spChg>
+        <pc:spChg chg="add mod">
+          <ac:chgData name="Mohammed Fasha" userId="cc64f42d-a1a6-4f08-b97b-0c37f877119f" providerId="ADAL" clId="{0455E0E6-2388-40FF-8789-A613D1CB1008}" dt="2025-07-26T18:08:03.456" v="551" actId="113"/>
+          <ac:spMkLst>
+            <pc:docMk/>
+            <pc:sldMk cId="952835031" sldId="486"/>
+            <ac:spMk id="5" creationId="{3D97D810-6FC8-DFB4-AEA6-1F5AC7EF64F7}"/>
+          </ac:spMkLst>
+        </pc:spChg>
+        <pc:spChg chg="add mod">
+          <ac:chgData name="Mohammed Fasha" userId="cc64f42d-a1a6-4f08-b97b-0c37f877119f" providerId="ADAL" clId="{0455E0E6-2388-40FF-8789-A613D1CB1008}" dt="2025-07-26T17:58:28.039" v="228" actId="1076"/>
+          <ac:spMkLst>
+            <pc:docMk/>
+            <pc:sldMk cId="952835031" sldId="486"/>
+            <ac:spMk id="6" creationId="{0FC3CFFA-3CDA-4185-057F-2BC99E81793B}"/>
+          </ac:spMkLst>
+        </pc:spChg>
+        <pc:spChg chg="add mod">
+          <ac:chgData name="Mohammed Fasha" userId="cc64f42d-a1a6-4f08-b97b-0c37f877119f" providerId="ADAL" clId="{0455E0E6-2388-40FF-8789-A613D1CB1008}" dt="2025-07-26T18:08:06.410" v="552" actId="113"/>
+          <ac:spMkLst>
+            <pc:docMk/>
+            <pc:sldMk cId="952835031" sldId="486"/>
+            <ac:spMk id="8" creationId="{92F4E3EE-1459-A6CC-DAC3-DE42F2873A6C}"/>
+          </ac:spMkLst>
+        </pc:spChg>
+      </pc:sldChg>
+      <pc:sldChg chg="addSp delSp modSp new mod">
+        <pc:chgData name="Mohammed Fasha" userId="cc64f42d-a1a6-4f08-b97b-0c37f877119f" providerId="ADAL" clId="{0455E0E6-2388-40FF-8789-A613D1CB1008}" dt="2025-07-26T18:07:48.760" v="547" actId="113"/>
+        <pc:sldMkLst>
+          <pc:docMk/>
+          <pc:sldMk cId="3390714327" sldId="487"/>
+        </pc:sldMkLst>
+        <pc:spChg chg="del mod">
+          <ac:chgData name="Mohammed Fasha" userId="cc64f42d-a1a6-4f08-b97b-0c37f877119f" providerId="ADAL" clId="{0455E0E6-2388-40FF-8789-A613D1CB1008}" dt="2025-07-26T18:03:34.704" v="411" actId="478"/>
+          <ac:spMkLst>
+            <pc:docMk/>
+            <pc:sldMk cId="3390714327" sldId="487"/>
+            <ac:spMk id="2" creationId="{288F7FB7-781D-6688-AD81-10DCE53FD9A4}"/>
+          </ac:spMkLst>
+        </pc:spChg>
+        <pc:spChg chg="mod">
+          <ac:chgData name="Mohammed Fasha" userId="cc64f42d-a1a6-4f08-b97b-0c37f877119f" providerId="ADAL" clId="{0455E0E6-2388-40FF-8789-A613D1CB1008}" dt="2025-07-26T18:03:51.872" v="435" actId="20577"/>
+          <ac:spMkLst>
+            <pc:docMk/>
+            <pc:sldMk cId="3390714327" sldId="487"/>
+            <ac:spMk id="3" creationId="{62185649-C82E-A3A1-050F-9B8CB93988AB}"/>
+          </ac:spMkLst>
+        </pc:spChg>
+        <pc:spChg chg="add mod">
+          <ac:chgData name="Mohammed Fasha" userId="cc64f42d-a1a6-4f08-b97b-0c37f877119f" providerId="ADAL" clId="{0455E0E6-2388-40FF-8789-A613D1CB1008}" dt="2025-07-26T18:07:48.760" v="547" actId="113"/>
+          <ac:spMkLst>
+            <pc:docMk/>
+            <pc:sldMk cId="3390714327" sldId="487"/>
+            <ac:spMk id="5" creationId="{183324EB-912D-14B6-940B-67A9A7B6C6C0}"/>
+          </ac:spMkLst>
+        </pc:spChg>
+        <pc:spChg chg="add mod">
+          <ac:chgData name="Mohammed Fasha" userId="cc64f42d-a1a6-4f08-b97b-0c37f877119f" providerId="ADAL" clId="{0455E0E6-2388-40FF-8789-A613D1CB1008}" dt="2025-07-26T18:07:45.871" v="546" actId="113"/>
+          <ac:spMkLst>
+            <pc:docMk/>
+            <pc:sldMk cId="3390714327" sldId="487"/>
+            <ac:spMk id="9" creationId="{B0D2EF0C-E643-3DDB-E0FE-3D4594086E87}"/>
+          </ac:spMkLst>
+        </pc:spChg>
+        <pc:spChg chg="add mod">
+          <ac:chgData name="Mohammed Fasha" userId="cc64f42d-a1a6-4f08-b97b-0c37f877119f" providerId="ADAL" clId="{0455E0E6-2388-40FF-8789-A613D1CB1008}" dt="2025-07-26T18:07:03.264" v="529" actId="20577"/>
+          <ac:spMkLst>
+            <pc:docMk/>
+            <pc:sldMk cId="3390714327" sldId="487"/>
+            <ac:spMk id="10" creationId="{53E579A2-15AC-99B0-3420-360A8FB1DA23}"/>
+          </ac:spMkLst>
+        </pc:spChg>
+        <pc:spChg chg="add mod">
+          <ac:chgData name="Mohammed Fasha" userId="cc64f42d-a1a6-4f08-b97b-0c37f877119f" providerId="ADAL" clId="{0455E0E6-2388-40FF-8789-A613D1CB1008}" dt="2025-07-26T18:06:40.467" v="514" actId="403"/>
+          <ac:spMkLst>
+            <pc:docMk/>
+            <pc:sldMk cId="3390714327" sldId="487"/>
+            <ac:spMk id="11" creationId="{4A070593-0CE8-45D5-DF62-3F13FC7319C1}"/>
+          </ac:spMkLst>
+        </pc:spChg>
+        <pc:spChg chg="add mod">
+          <ac:chgData name="Mohammed Fasha" userId="cc64f42d-a1a6-4f08-b97b-0c37f877119f" providerId="ADAL" clId="{0455E0E6-2388-40FF-8789-A613D1CB1008}" dt="2025-07-26T18:06:31.496" v="508" actId="1076"/>
+          <ac:spMkLst>
+            <pc:docMk/>
+            <pc:sldMk cId="3390714327" sldId="487"/>
+            <ac:spMk id="12" creationId="{B950AE4D-05FC-1BA2-97BD-60CF68022E2B}"/>
+          </ac:spMkLst>
+        </pc:spChg>
+        <pc:picChg chg="add mod">
+          <ac:chgData name="Mohammed Fasha" userId="cc64f42d-a1a6-4f08-b97b-0c37f877119f" providerId="ADAL" clId="{0455E0E6-2388-40FF-8789-A613D1CB1008}" dt="2025-07-26T18:04:20.108" v="439" actId="1076"/>
+          <ac:picMkLst>
+            <pc:docMk/>
+            <pc:sldMk cId="3390714327" sldId="487"/>
+            <ac:picMk id="7" creationId="{F3BC5B92-84C6-A71A-B9FF-22899DB146AE}"/>
+          </ac:picMkLst>
+        </pc:picChg>
+      </pc:sldChg>
+      <pc:sldChg chg="addSp delSp modSp new mod">
+        <pc:chgData name="Mohammed Fasha" userId="cc64f42d-a1a6-4f08-b97b-0c37f877119f" providerId="ADAL" clId="{0455E0E6-2388-40FF-8789-A613D1CB1008}" dt="2025-07-26T18:07:37.554" v="545" actId="790"/>
+        <pc:sldMkLst>
+          <pc:docMk/>
+          <pc:sldMk cId="3686005749" sldId="488"/>
+        </pc:sldMkLst>
+        <pc:spChg chg="del mod">
+          <ac:chgData name="Mohammed Fasha" userId="cc64f42d-a1a6-4f08-b97b-0c37f877119f" providerId="ADAL" clId="{0455E0E6-2388-40FF-8789-A613D1CB1008}" dt="2025-07-26T18:05:33.808" v="452" actId="21"/>
+          <ac:spMkLst>
+            <pc:docMk/>
+            <pc:sldMk cId="3686005749" sldId="488"/>
+            <ac:spMk id="2" creationId="{53E579A2-15AC-99B0-3420-360A8FB1DA23}"/>
+          </ac:spMkLst>
+        </pc:spChg>
+        <pc:spChg chg="mod">
+          <ac:chgData name="Mohammed Fasha" userId="cc64f42d-a1a6-4f08-b97b-0c37f877119f" providerId="ADAL" clId="{0455E0E6-2388-40FF-8789-A613D1CB1008}" dt="2025-07-26T18:07:08.304" v="538" actId="20577"/>
+          <ac:spMkLst>
+            <pc:docMk/>
+            <pc:sldMk cId="3686005749" sldId="488"/>
+            <ac:spMk id="3" creationId="{50668113-EA52-BF53-9D93-4C2380293EF7}"/>
+          </ac:spMkLst>
+        </pc:spChg>
+        <pc:spChg chg="add del mod">
+          <ac:chgData name="Mohammed Fasha" userId="cc64f42d-a1a6-4f08-b97b-0c37f877119f" providerId="ADAL" clId="{0455E0E6-2388-40FF-8789-A613D1CB1008}" dt="2025-07-26T18:07:18.095" v="540" actId="478"/>
+          <ac:spMkLst>
+            <pc:docMk/>
+            <pc:sldMk cId="3686005749" sldId="488"/>
+            <ac:spMk id="5" creationId="{9D40BC9F-D363-BC15-8247-AC924E9AAD53}"/>
+          </ac:spMkLst>
+        </pc:spChg>
+        <pc:spChg chg="add del mod">
+          <ac:chgData name="Mohammed Fasha" userId="cc64f42d-a1a6-4f08-b97b-0c37f877119f" providerId="ADAL" clId="{0455E0E6-2388-40FF-8789-A613D1CB1008}" dt="2025-07-26T18:07:16.252" v="539" actId="478"/>
+          <ac:spMkLst>
+            <pc:docMk/>
+            <pc:sldMk cId="3686005749" sldId="488"/>
+            <ac:spMk id="7" creationId="{8BABDD55-7F0B-1C89-2216-83D517EDBED8}"/>
+          </ac:spMkLst>
+        </pc:spChg>
+        <pc:spChg chg="add mod">
+          <ac:chgData name="Mohammed Fasha" userId="cc64f42d-a1a6-4f08-b97b-0c37f877119f" providerId="ADAL" clId="{0455E0E6-2388-40FF-8789-A613D1CB1008}" dt="2025-07-26T18:07:37.554" v="545" actId="790"/>
+          <ac:spMkLst>
+            <pc:docMk/>
+            <pc:sldMk cId="3686005749" sldId="488"/>
+            <ac:spMk id="9" creationId="{56EE8E37-34F9-1845-A547-FF7D96EC5DD6}"/>
           </ac:spMkLst>
         </pc:spChg>
       </pc:sldChg>
@@ -6282,7 +6719,13 @@
   <p:cSld>
     <p:spTree>
       <p:nvGrpSpPr>
-        <p:cNvPr id="1" name=""/>
+        <p:cNvPr id="1" name="">
+          <a:extLst>
+            <a:ext uri="{FF2B5EF4-FFF2-40B4-BE49-F238E27FC236}">
+              <a16:creationId xmlns:a16="http://schemas.microsoft.com/office/drawing/2014/main" id="{BD1A65E2-C284-83F6-6074-CCFEF74CE87A}"/>
+            </a:ext>
+          </a:extLst>
+        </p:cNvPr>
         <p:cNvGrpSpPr/>
         <p:nvPr/>
       </p:nvGrpSpPr>
@@ -6294,12 +6737,41 @@
           <a:chExt cx="0" cy="0"/>
         </a:xfrm>
       </p:grpSpPr>
+      <p:pic>
+        <p:nvPicPr>
+          <p:cNvPr id="5" name="Content Placeholder 4">
+            <a:extLst>
+              <a:ext uri="{FF2B5EF4-FFF2-40B4-BE49-F238E27FC236}">
+                <a16:creationId xmlns:a16="http://schemas.microsoft.com/office/drawing/2014/main" id="{B77B7C33-3931-334D-F5F0-51578F602770}"/>
+              </a:ext>
+            </a:extLst>
+          </p:cNvPr>
+          <p:cNvPicPr>
+            <a:picLocks noGrp="1" noChangeAspect="1"/>
+          </p:cNvPicPr>
+          <p:nvPr>
+            <p:ph idx="1"/>
+          </p:nvPr>
+        </p:nvPicPr>
+        <p:blipFill>
+          <a:blip r:embed="rId2"/>
+          <a:stretch>
+            <a:fillRect/>
+          </a:stretch>
+        </p:blipFill>
+        <p:spPr>
+          <a:xfrm>
+            <a:off x="838200" y="1791991"/>
+            <a:ext cx="3872753" cy="4242088"/>
+          </a:xfrm>
+        </p:spPr>
+      </p:pic>
       <p:sp>
         <p:nvSpPr>
-          <p:cNvPr id="4" name="Title 3">
-            <a:extLst>
-              <a:ext uri="{FF2B5EF4-FFF2-40B4-BE49-F238E27FC236}">
-                <a16:creationId xmlns:a16="http://schemas.microsoft.com/office/drawing/2014/main" id="{8E2EA1D2-44C5-E332-39BC-CE451FE205E7}"/>
+          <p:cNvPr id="3" name="Title 2">
+            <a:extLst>
+              <a:ext uri="{FF2B5EF4-FFF2-40B4-BE49-F238E27FC236}">
+                <a16:creationId xmlns:a16="http://schemas.microsoft.com/office/drawing/2014/main" id="{6A4F7E4E-1303-88AC-B630-42D669AF1547}"/>
               </a:ext>
             </a:extLst>
           </p:cNvPr>
@@ -6317,40 +6789,99 @@
           <a:p>
             <a:r>
               <a:rPr lang="en-US" dirty="0"/>
-              <a:t>Implement Regression in Python</a:t>
+              <a:t>Solving Linear Regression Using The Gradient Descent Method</a:t>
             </a:r>
           </a:p>
         </p:txBody>
       </p:sp>
-      <p:sp>
-        <p:nvSpPr>
-          <p:cNvPr id="5" name="Text Placeholder 4">
-            <a:extLst>
-              <a:ext uri="{FF2B5EF4-FFF2-40B4-BE49-F238E27FC236}">
-                <a16:creationId xmlns:a16="http://schemas.microsoft.com/office/drawing/2014/main" id="{ABCBDB70-511E-63F0-2A2E-C4DED7350238}"/>
-              </a:ext>
-            </a:extLst>
-          </p:cNvPr>
-          <p:cNvSpPr>
-            <a:spLocks noGrp="1"/>
-          </p:cNvSpPr>
-          <p:nvPr>
-            <p:ph type="body" idx="1"/>
-          </p:nvPr>
-        </p:nvSpPr>
-        <p:spPr/>
-        <p:txBody>
-          <a:bodyPr/>
-          <a:lstStyle/>
-          <a:p>
-            <a:endParaRPr lang="en-US"/>
-          </a:p>
-        </p:txBody>
-      </p:sp>
+      <p:pic>
+        <p:nvPicPr>
+          <p:cNvPr id="7" name="Picture 6" descr="A graph of a function&#10;&#10;AI-generated content may be incorrect.">
+            <a:extLst>
+              <a:ext uri="{FF2B5EF4-FFF2-40B4-BE49-F238E27FC236}">
+                <a16:creationId xmlns:a16="http://schemas.microsoft.com/office/drawing/2014/main" id="{D41F736F-AF01-4029-F291-F1741828EA3C}"/>
+              </a:ext>
+            </a:extLst>
+          </p:cNvPr>
+          <p:cNvPicPr>
+            <a:picLocks noChangeAspect="1"/>
+          </p:cNvPicPr>
+          <p:nvPr/>
+        </p:nvPicPr>
+        <p:blipFill>
+          <a:blip r:embed="rId3">
+            <a:extLst>
+              <a:ext uri="{28A0092B-C50C-407E-A947-70E740481C1C}">
+                <a14:useLocalDpi xmlns:a14="http://schemas.microsoft.com/office/drawing/2010/main" val="0"/>
+              </a:ext>
+            </a:extLst>
+          </a:blip>
+          <a:stretch>
+            <a:fillRect/>
+          </a:stretch>
+        </p:blipFill>
+        <p:spPr>
+          <a:xfrm>
+            <a:off x="5346290" y="1717698"/>
+            <a:ext cx="6110568" cy="4888454"/>
+          </a:xfrm>
+          <a:prstGeom prst="rect">
+            <a:avLst/>
+          </a:prstGeom>
+        </p:spPr>
+      </p:pic>
+      <p:pic>
+        <p:nvPicPr>
+          <p:cNvPr id="8" name="Picture 2" descr="Why Use Python? - Full Stack Python">
+            <a:hlinkClick r:id="rId4"/>
+            <a:extLst>
+              <a:ext uri="{FF2B5EF4-FFF2-40B4-BE49-F238E27FC236}">
+                <a16:creationId xmlns:a16="http://schemas.microsoft.com/office/drawing/2014/main" id="{D4AE6193-CCD4-99C8-A300-F96A67CCB423}"/>
+              </a:ext>
+            </a:extLst>
+          </p:cNvPr>
+          <p:cNvPicPr>
+            <a:picLocks noChangeAspect="1" noChangeArrowheads="1"/>
+          </p:cNvPicPr>
+          <p:nvPr/>
+        </p:nvPicPr>
+        <p:blipFill>
+          <a:blip r:embed="rId5">
+            <a:extLst>
+              <a:ext uri="{28A0092B-C50C-407E-A947-70E740481C1C}">
+                <a14:useLocalDpi xmlns:a14="http://schemas.microsoft.com/office/drawing/2010/main" val="0"/>
+              </a:ext>
+            </a:extLst>
+          </a:blip>
+          <a:srcRect/>
+          <a:stretch>
+            <a:fillRect/>
+          </a:stretch>
+        </p:blipFill>
+        <p:spPr bwMode="auto">
+          <a:xfrm>
+            <a:off x="838200" y="6280339"/>
+            <a:ext cx="1492624" cy="486147"/>
+          </a:xfrm>
+          <a:prstGeom prst="rect">
+            <a:avLst/>
+          </a:prstGeom>
+          <a:noFill/>
+          <a:extLst>
+            <a:ext uri="{909E8E84-426E-40DD-AFC4-6F175D3DCCD1}">
+              <a14:hiddenFill xmlns:a14="http://schemas.microsoft.com/office/drawing/2010/main">
+                <a:solidFill>
+                  <a:srgbClr val="FFFFFF"/>
+                </a:solidFill>
+              </a14:hiddenFill>
+            </a:ext>
+          </a:extLst>
+        </p:spPr>
+      </p:pic>
     </p:spTree>
     <p:extLst>
       <p:ext uri="{BB962C8B-B14F-4D97-AF65-F5344CB8AC3E}">
-        <p14:creationId xmlns:p14="http://schemas.microsoft.com/office/powerpoint/2010/main" val="3941017664"/>
+        <p14:creationId xmlns:p14="http://schemas.microsoft.com/office/powerpoint/2010/main" val="538252582"/>
       </p:ext>
     </p:extLst>
   </p:cSld>
@@ -6379,37 +6910,10 @@
       </p:grpSpPr>
       <p:sp>
         <p:nvSpPr>
-          <p:cNvPr id="2" name="Content Placeholder 1">
-            <a:extLst>
-              <a:ext uri="{FF2B5EF4-FFF2-40B4-BE49-F238E27FC236}">
-                <a16:creationId xmlns:a16="http://schemas.microsoft.com/office/drawing/2014/main" id="{269DA4D1-C52F-51DE-82E4-4CE2A0A5B4F9}"/>
-              </a:ext>
-            </a:extLst>
-          </p:cNvPr>
-          <p:cNvSpPr>
-            <a:spLocks noGrp="1"/>
-          </p:cNvSpPr>
-          <p:nvPr>
-            <p:ph idx="1"/>
-          </p:nvPr>
-        </p:nvSpPr>
-        <p:spPr/>
-        <p:txBody>
-          <a:bodyPr>
-            <a:normAutofit/>
-          </a:bodyPr>
-          <a:lstStyle/>
-          <a:p>
-            <a:endParaRPr lang="en-US" sz="1600" noProof="1"/>
-          </a:p>
-        </p:txBody>
-      </p:sp>
-      <p:sp>
-        <p:nvSpPr>
-          <p:cNvPr id="3" name="Title 2">
-            <a:extLst>
-              <a:ext uri="{FF2B5EF4-FFF2-40B4-BE49-F238E27FC236}">
-                <a16:creationId xmlns:a16="http://schemas.microsoft.com/office/drawing/2014/main" id="{313D3DFB-4B7B-5020-971F-AF2B7A0A35FA}"/>
+          <p:cNvPr id="4" name="Title 3">
+            <a:extLst>
+              <a:ext uri="{FF2B5EF4-FFF2-40B4-BE49-F238E27FC236}">
+                <a16:creationId xmlns:a16="http://schemas.microsoft.com/office/drawing/2014/main" id="{8E2EA1D2-44C5-E332-39BC-CE451FE205E7}"/>
               </a:ext>
             </a:extLst>
           </p:cNvPr>
@@ -6427,19 +6931,40 @@
           <a:p>
             <a:r>
               <a:rPr lang="en-US" dirty="0"/>
-              <a:t>Import the </a:t>
-            </a:r>
-            <a:r>
-              <a:rPr lang="en-US"/>
-              <a:t>Required Libraries</a:t>
-            </a:r>
+              <a:t>Implement Regression in Python</a:t>
+            </a:r>
+          </a:p>
+        </p:txBody>
+      </p:sp>
+      <p:sp>
+        <p:nvSpPr>
+          <p:cNvPr id="5" name="Text Placeholder 4">
+            <a:extLst>
+              <a:ext uri="{FF2B5EF4-FFF2-40B4-BE49-F238E27FC236}">
+                <a16:creationId xmlns:a16="http://schemas.microsoft.com/office/drawing/2014/main" id="{ABCBDB70-511E-63F0-2A2E-C4DED7350238}"/>
+              </a:ext>
+            </a:extLst>
+          </p:cNvPr>
+          <p:cNvSpPr>
+            <a:spLocks noGrp="1"/>
+          </p:cNvSpPr>
+          <p:nvPr>
+            <p:ph type="body" idx="1"/>
+          </p:nvPr>
+        </p:nvSpPr>
+        <p:spPr/>
+        <p:txBody>
+          <a:bodyPr/>
+          <a:lstStyle/>
+          <a:p>
+            <a:endParaRPr lang="en-US"/>
           </a:p>
         </p:txBody>
       </p:sp>
     </p:spTree>
     <p:extLst>
       <p:ext uri="{BB962C8B-B14F-4D97-AF65-F5344CB8AC3E}">
-        <p14:creationId xmlns:p14="http://schemas.microsoft.com/office/powerpoint/2010/main" val="1291192180"/>
+        <p14:creationId xmlns:p14="http://schemas.microsoft.com/office/powerpoint/2010/main" val="1929062822"/>
       </p:ext>
     </p:extLst>
   </p:cSld>
@@ -6454,10 +6979,605 @@
   <p:cSld>
     <p:spTree>
       <p:nvGrpSpPr>
+        <p:cNvPr id="1" name=""/>
+        <p:cNvGrpSpPr/>
+        <p:nvPr/>
+      </p:nvGrpSpPr>
+      <p:grpSpPr>
+        <a:xfrm>
+          <a:off x="0" y="0"/>
+          <a:ext cx="0" cy="0"/>
+          <a:chOff x="0" y="0"/>
+          <a:chExt cx="0" cy="0"/>
+        </a:xfrm>
+      </p:grpSpPr>
+      <p:sp>
+        <p:nvSpPr>
+          <p:cNvPr id="3" name="Title 2">
+            <a:extLst>
+              <a:ext uri="{FF2B5EF4-FFF2-40B4-BE49-F238E27FC236}">
+                <a16:creationId xmlns:a16="http://schemas.microsoft.com/office/drawing/2014/main" id="{313D3DFB-4B7B-5020-971F-AF2B7A0A35FA}"/>
+              </a:ext>
+            </a:extLst>
+          </p:cNvPr>
+          <p:cNvSpPr>
+            <a:spLocks noGrp="1"/>
+          </p:cNvSpPr>
+          <p:nvPr>
+            <p:ph type="title"/>
+          </p:nvPr>
+        </p:nvSpPr>
+        <p:spPr/>
+        <p:txBody>
+          <a:bodyPr/>
+          <a:lstStyle/>
+          <a:p>
+            <a:r>
+              <a:rPr lang="en-US" dirty="0"/>
+              <a:t>Import the </a:t>
+            </a:r>
+            <a:r>
+              <a:rPr lang="en-US"/>
+              <a:t>Required Libraries</a:t>
+            </a:r>
+          </a:p>
+        </p:txBody>
+      </p:sp>
+      <p:sp>
+        <p:nvSpPr>
+          <p:cNvPr id="8" name="TextBox 7">
+            <a:extLst>
+              <a:ext uri="{FF2B5EF4-FFF2-40B4-BE49-F238E27FC236}">
+                <a16:creationId xmlns:a16="http://schemas.microsoft.com/office/drawing/2014/main" id="{ACB299D0-626F-737A-2A1F-4F549FE052EC}"/>
+              </a:ext>
+            </a:extLst>
+          </p:cNvPr>
+          <p:cNvSpPr txBox="1"/>
+          <p:nvPr/>
+        </p:nvSpPr>
+        <p:spPr>
+          <a:xfrm>
+            <a:off x="903586" y="1927455"/>
+            <a:ext cx="10450213" cy="4385816"/>
+          </a:xfrm>
+          <a:prstGeom prst="rect">
+            <a:avLst/>
+          </a:prstGeom>
+          <a:noFill/>
+        </p:spPr>
+        <p:txBody>
+          <a:bodyPr wrap="square">
+            <a:spAutoFit/>
+          </a:bodyPr>
+          <a:lstStyle/>
+          <a:p>
+            <a:pPr>
+              <a:spcBef>
+                <a:spcPts val="600"/>
+              </a:spcBef>
+              <a:buNone/>
+            </a:pPr>
+            <a:r>
+              <a:rPr lang="en-US" b="1" noProof="1">
+                <a:solidFill>
+                  <a:srgbClr val="9723B4"/>
+                </a:solidFill>
+                <a:effectLst/>
+                <a:latin typeface="Courier New" panose="02070309020205020404" pitchFamily="49" charset="0"/>
+              </a:rPr>
+              <a:t>import</a:t>
+            </a:r>
+            <a:r>
+              <a:rPr lang="en-US" b="1" noProof="1">
+                <a:solidFill>
+                  <a:srgbClr val="000000"/>
+                </a:solidFill>
+                <a:effectLst/>
+                <a:latin typeface="Courier New" panose="02070309020205020404" pitchFamily="49" charset="0"/>
+              </a:rPr>
+              <a:t> numpy </a:t>
+            </a:r>
+            <a:r>
+              <a:rPr lang="en-US" b="1" noProof="1">
+                <a:solidFill>
+                  <a:srgbClr val="9723B4"/>
+                </a:solidFill>
+                <a:effectLst/>
+                <a:latin typeface="Courier New" panose="02070309020205020404" pitchFamily="49" charset="0"/>
+              </a:rPr>
+              <a:t>as</a:t>
+            </a:r>
+            <a:r>
+              <a:rPr lang="en-US" b="1" noProof="1">
+                <a:solidFill>
+                  <a:srgbClr val="000000"/>
+                </a:solidFill>
+                <a:effectLst/>
+                <a:latin typeface="Courier New" panose="02070309020205020404" pitchFamily="49" charset="0"/>
+              </a:rPr>
+              <a:t> np</a:t>
+            </a:r>
+          </a:p>
+          <a:p>
+            <a:pPr>
+              <a:spcBef>
+                <a:spcPts val="600"/>
+              </a:spcBef>
+              <a:buNone/>
+            </a:pPr>
+            <a:r>
+              <a:rPr lang="en-US" b="1" noProof="1">
+                <a:solidFill>
+                  <a:srgbClr val="9723B4"/>
+                </a:solidFill>
+                <a:effectLst/>
+                <a:latin typeface="Courier New" panose="02070309020205020404" pitchFamily="49" charset="0"/>
+              </a:rPr>
+              <a:t>import</a:t>
+            </a:r>
+            <a:r>
+              <a:rPr lang="en-US" b="1" noProof="1">
+                <a:solidFill>
+                  <a:srgbClr val="000000"/>
+                </a:solidFill>
+                <a:effectLst/>
+                <a:latin typeface="Courier New" panose="02070309020205020404" pitchFamily="49" charset="0"/>
+              </a:rPr>
+              <a:t> pandas </a:t>
+            </a:r>
+            <a:r>
+              <a:rPr lang="en-US" b="1" noProof="1">
+                <a:solidFill>
+                  <a:srgbClr val="9723B4"/>
+                </a:solidFill>
+                <a:effectLst/>
+                <a:latin typeface="Courier New" panose="02070309020205020404" pitchFamily="49" charset="0"/>
+              </a:rPr>
+              <a:t>as</a:t>
+            </a:r>
+            <a:r>
+              <a:rPr lang="en-US" b="1" noProof="1">
+                <a:solidFill>
+                  <a:srgbClr val="000000"/>
+                </a:solidFill>
+                <a:effectLst/>
+                <a:latin typeface="Courier New" panose="02070309020205020404" pitchFamily="49" charset="0"/>
+              </a:rPr>
+              <a:t> pd</a:t>
+            </a:r>
+          </a:p>
+          <a:p>
+            <a:pPr>
+              <a:spcBef>
+                <a:spcPts val="600"/>
+              </a:spcBef>
+              <a:buNone/>
+            </a:pPr>
+            <a:r>
+              <a:rPr lang="en-US" b="1" noProof="1">
+                <a:solidFill>
+                  <a:srgbClr val="9723B4"/>
+                </a:solidFill>
+                <a:effectLst/>
+                <a:latin typeface="Courier New" panose="02070309020205020404" pitchFamily="49" charset="0"/>
+              </a:rPr>
+              <a:t>import</a:t>
+            </a:r>
+            <a:r>
+              <a:rPr lang="en-US" b="1" noProof="1">
+                <a:solidFill>
+                  <a:srgbClr val="000000"/>
+                </a:solidFill>
+                <a:effectLst/>
+                <a:latin typeface="Courier New" panose="02070309020205020404" pitchFamily="49" charset="0"/>
+              </a:rPr>
+              <a:t> matplotlib.pyplot </a:t>
+            </a:r>
+            <a:r>
+              <a:rPr lang="en-US" b="1" noProof="1">
+                <a:solidFill>
+                  <a:srgbClr val="9723B4"/>
+                </a:solidFill>
+                <a:effectLst/>
+                <a:latin typeface="Courier New" panose="02070309020205020404" pitchFamily="49" charset="0"/>
+              </a:rPr>
+              <a:t>as</a:t>
+            </a:r>
+            <a:r>
+              <a:rPr lang="en-US" b="1" noProof="1">
+                <a:solidFill>
+                  <a:srgbClr val="000000"/>
+                </a:solidFill>
+                <a:effectLst/>
+                <a:latin typeface="Courier New" panose="02070309020205020404" pitchFamily="49" charset="0"/>
+              </a:rPr>
+              <a:t> plt  </a:t>
+            </a:r>
+          </a:p>
+          <a:p>
+            <a:pPr>
+              <a:spcBef>
+                <a:spcPts val="600"/>
+              </a:spcBef>
+              <a:buNone/>
+            </a:pPr>
+            <a:br>
+              <a:rPr lang="en-US" b="1" noProof="1">
+                <a:solidFill>
+                  <a:srgbClr val="000000"/>
+                </a:solidFill>
+                <a:effectLst/>
+                <a:latin typeface="Courier New" panose="02070309020205020404" pitchFamily="49" charset="0"/>
+              </a:rPr>
+            </a:br>
+            <a:r>
+              <a:rPr lang="en-US" b="1" noProof="1">
+                <a:solidFill>
+                  <a:srgbClr val="008000"/>
+                </a:solidFill>
+                <a:effectLst/>
+                <a:latin typeface="Courier New" panose="02070309020205020404" pitchFamily="49" charset="0"/>
+              </a:rPr>
+              <a:t># import the required machine learning libraries</a:t>
+            </a:r>
+            <a:endParaRPr lang="en-US" b="1" noProof="1">
+              <a:solidFill>
+                <a:srgbClr val="000000"/>
+              </a:solidFill>
+              <a:effectLst/>
+              <a:latin typeface="Courier New" panose="02070309020205020404" pitchFamily="49" charset="0"/>
+            </a:endParaRPr>
+          </a:p>
+          <a:p>
+            <a:pPr>
+              <a:spcBef>
+                <a:spcPts val="600"/>
+              </a:spcBef>
+              <a:buNone/>
+            </a:pPr>
+            <a:r>
+              <a:rPr lang="en-US" b="1" noProof="1">
+                <a:solidFill>
+                  <a:srgbClr val="9723B4"/>
+                </a:solidFill>
+                <a:effectLst/>
+                <a:latin typeface="Courier New" panose="02070309020205020404" pitchFamily="49" charset="0"/>
+              </a:rPr>
+              <a:t>from</a:t>
+            </a:r>
+            <a:r>
+              <a:rPr lang="en-US" b="1" noProof="1">
+                <a:solidFill>
+                  <a:srgbClr val="000000"/>
+                </a:solidFill>
+                <a:effectLst/>
+                <a:latin typeface="Courier New" panose="02070309020205020404" pitchFamily="49" charset="0"/>
+              </a:rPr>
+              <a:t> sklearn.linear_model </a:t>
+            </a:r>
+            <a:r>
+              <a:rPr lang="en-US" b="1" noProof="1">
+                <a:solidFill>
+                  <a:srgbClr val="9723B4"/>
+                </a:solidFill>
+                <a:effectLst/>
+                <a:latin typeface="Courier New" panose="02070309020205020404" pitchFamily="49" charset="0"/>
+              </a:rPr>
+              <a:t>import</a:t>
+            </a:r>
+            <a:r>
+              <a:rPr lang="en-US" b="1" noProof="1">
+                <a:solidFill>
+                  <a:srgbClr val="000000"/>
+                </a:solidFill>
+                <a:effectLst/>
+                <a:latin typeface="Courier New" panose="02070309020205020404" pitchFamily="49" charset="0"/>
+              </a:rPr>
+              <a:t> LinearRegression</a:t>
+            </a:r>
+          </a:p>
+          <a:p>
+            <a:pPr>
+              <a:spcBef>
+                <a:spcPts val="600"/>
+              </a:spcBef>
+              <a:buNone/>
+            </a:pPr>
+            <a:r>
+              <a:rPr lang="en-US" b="1" noProof="1">
+                <a:solidFill>
+                  <a:srgbClr val="9723B4"/>
+                </a:solidFill>
+                <a:effectLst/>
+                <a:latin typeface="Courier New" panose="02070309020205020404" pitchFamily="49" charset="0"/>
+              </a:rPr>
+              <a:t>from</a:t>
+            </a:r>
+            <a:r>
+              <a:rPr lang="en-US" b="1" noProof="1">
+                <a:solidFill>
+                  <a:srgbClr val="000000"/>
+                </a:solidFill>
+                <a:effectLst/>
+                <a:latin typeface="Courier New" panose="02070309020205020404" pitchFamily="49" charset="0"/>
+              </a:rPr>
+              <a:t> sklearn.model_selection </a:t>
+            </a:r>
+            <a:r>
+              <a:rPr lang="en-US" b="1" noProof="1">
+                <a:solidFill>
+                  <a:srgbClr val="9723B4"/>
+                </a:solidFill>
+                <a:effectLst/>
+                <a:latin typeface="Courier New" panose="02070309020205020404" pitchFamily="49" charset="0"/>
+              </a:rPr>
+              <a:t>import</a:t>
+            </a:r>
+            <a:r>
+              <a:rPr lang="en-US" b="1" noProof="1">
+                <a:solidFill>
+                  <a:srgbClr val="000000"/>
+                </a:solidFill>
+                <a:effectLst/>
+                <a:latin typeface="Courier New" panose="02070309020205020404" pitchFamily="49" charset="0"/>
+              </a:rPr>
+              <a:t> train_test_split </a:t>
+            </a:r>
+          </a:p>
+          <a:p>
+            <a:pPr>
+              <a:spcBef>
+                <a:spcPts val="600"/>
+              </a:spcBef>
+              <a:buNone/>
+            </a:pPr>
+            <a:r>
+              <a:rPr lang="en-US" b="1" noProof="1">
+                <a:solidFill>
+                  <a:srgbClr val="9723B4"/>
+                </a:solidFill>
+                <a:effectLst/>
+                <a:latin typeface="Courier New" panose="02070309020205020404" pitchFamily="49" charset="0"/>
+              </a:rPr>
+              <a:t>from</a:t>
+            </a:r>
+            <a:r>
+              <a:rPr lang="en-US" b="1" noProof="1">
+                <a:solidFill>
+                  <a:srgbClr val="000000"/>
+                </a:solidFill>
+                <a:effectLst/>
+                <a:latin typeface="Courier New" panose="02070309020205020404" pitchFamily="49" charset="0"/>
+              </a:rPr>
+              <a:t> sklearn.metrics </a:t>
+            </a:r>
+            <a:r>
+              <a:rPr lang="en-US" b="1" noProof="1">
+                <a:solidFill>
+                  <a:srgbClr val="9723B4"/>
+                </a:solidFill>
+                <a:effectLst/>
+                <a:latin typeface="Courier New" panose="02070309020205020404" pitchFamily="49" charset="0"/>
+              </a:rPr>
+              <a:t>import</a:t>
+            </a:r>
+            <a:r>
+              <a:rPr lang="en-US" b="1" noProof="1">
+                <a:solidFill>
+                  <a:srgbClr val="000000"/>
+                </a:solidFill>
+                <a:effectLst/>
+                <a:latin typeface="Courier New" panose="02070309020205020404" pitchFamily="49" charset="0"/>
+              </a:rPr>
+              <a:t> r2_score</a:t>
+            </a:r>
+          </a:p>
+          <a:p>
+            <a:pPr>
+              <a:spcBef>
+                <a:spcPts val="600"/>
+              </a:spcBef>
+              <a:buNone/>
+            </a:pPr>
+            <a:br>
+              <a:rPr lang="en-US" b="1" noProof="1">
+                <a:solidFill>
+                  <a:srgbClr val="000000"/>
+                </a:solidFill>
+                <a:effectLst/>
+                <a:latin typeface="Courier New" panose="02070309020205020404" pitchFamily="49" charset="0"/>
+              </a:rPr>
+            </a:br>
+            <a:r>
+              <a:rPr lang="en-US" b="1" noProof="1">
+                <a:solidFill>
+                  <a:srgbClr val="000000"/>
+                </a:solidFill>
+                <a:effectLst/>
+                <a:latin typeface="Courier New" panose="02070309020205020404" pitchFamily="49" charset="0"/>
+              </a:rPr>
+              <a:t>df = pd.read_csv(</a:t>
+            </a:r>
+            <a:r>
+              <a:rPr lang="en-US" b="1" noProof="1">
+                <a:solidFill>
+                  <a:srgbClr val="A31515"/>
+                </a:solidFill>
+                <a:effectLst/>
+                <a:latin typeface="Courier New" panose="02070309020205020404" pitchFamily="49" charset="0"/>
+              </a:rPr>
+              <a:t>'https://raw.githubusercontent.com/msfasha/307304-Data-Mining/refs/heads/main/20242/datasets/apartment_prices.csv'</a:t>
+            </a:r>
+            <a:r>
+              <a:rPr lang="en-US" b="1" noProof="1">
+                <a:solidFill>
+                  <a:srgbClr val="000000"/>
+                </a:solidFill>
+                <a:effectLst/>
+                <a:latin typeface="Courier New" panose="02070309020205020404" pitchFamily="49" charset="0"/>
+              </a:rPr>
+              <a:t>)</a:t>
+            </a:r>
+          </a:p>
+          <a:p>
+            <a:pPr>
+              <a:spcBef>
+                <a:spcPts val="600"/>
+              </a:spcBef>
+              <a:buNone/>
+            </a:pPr>
+            <a:r>
+              <a:rPr lang="en-US" b="1" noProof="1">
+                <a:solidFill>
+                  <a:srgbClr val="6A5221"/>
+                </a:solidFill>
+                <a:effectLst/>
+                <a:latin typeface="Courier New" panose="02070309020205020404" pitchFamily="49" charset="0"/>
+              </a:rPr>
+              <a:t>print</a:t>
+            </a:r>
+            <a:r>
+              <a:rPr lang="en-US" b="1" noProof="1">
+                <a:solidFill>
+                  <a:srgbClr val="000000"/>
+                </a:solidFill>
+                <a:effectLst/>
+                <a:latin typeface="Courier New" panose="02070309020205020404" pitchFamily="49" charset="0"/>
+              </a:rPr>
+              <a:t>(</a:t>
+            </a:r>
+            <a:r>
+              <a:rPr lang="en-US" b="1" noProof="1">
+                <a:solidFill>
+                  <a:srgbClr val="0000FF"/>
+                </a:solidFill>
+                <a:effectLst/>
+                <a:latin typeface="Courier New" panose="02070309020205020404" pitchFamily="49" charset="0"/>
+              </a:rPr>
+              <a:t>f</a:t>
+            </a:r>
+            <a:r>
+              <a:rPr lang="en-US" b="1" noProof="1">
+                <a:solidFill>
+                  <a:srgbClr val="A31515"/>
+                </a:solidFill>
+                <a:effectLst/>
+                <a:latin typeface="Courier New" panose="02070309020205020404" pitchFamily="49" charset="0"/>
+              </a:rPr>
+              <a:t>"Number of rows in the dataset: </a:t>
+            </a:r>
+            <a:r>
+              <a:rPr lang="en-US" b="1" noProof="1">
+                <a:solidFill>
+                  <a:srgbClr val="000000"/>
+                </a:solidFill>
+                <a:effectLst/>
+                <a:latin typeface="Courier New" panose="02070309020205020404" pitchFamily="49" charset="0"/>
+              </a:rPr>
+              <a:t>{</a:t>
+            </a:r>
+            <a:r>
+              <a:rPr lang="en-US" b="1" noProof="1">
+                <a:solidFill>
+                  <a:srgbClr val="6A5221"/>
+                </a:solidFill>
+                <a:effectLst/>
+                <a:latin typeface="Courier New" panose="02070309020205020404" pitchFamily="49" charset="0"/>
+              </a:rPr>
+              <a:t>len</a:t>
+            </a:r>
+            <a:r>
+              <a:rPr lang="en-US" b="1" noProof="1">
+                <a:solidFill>
+                  <a:srgbClr val="000000"/>
+                </a:solidFill>
+                <a:effectLst/>
+                <a:latin typeface="Courier New" panose="02070309020205020404" pitchFamily="49" charset="0"/>
+              </a:rPr>
+              <a:t>(df)}</a:t>
+            </a:r>
+            <a:r>
+              <a:rPr lang="en-US" b="1" noProof="1">
+                <a:solidFill>
+                  <a:srgbClr val="A31515"/>
+                </a:solidFill>
+                <a:effectLst/>
+                <a:latin typeface="Courier New" panose="02070309020205020404" pitchFamily="49" charset="0"/>
+              </a:rPr>
+              <a:t>"</a:t>
+            </a:r>
+            <a:r>
+              <a:rPr lang="en-US" b="1" noProof="1">
+                <a:solidFill>
+                  <a:srgbClr val="000000"/>
+                </a:solidFill>
+                <a:effectLst/>
+                <a:latin typeface="Courier New" panose="02070309020205020404" pitchFamily="49" charset="0"/>
+              </a:rPr>
+              <a:t>)</a:t>
+            </a:r>
+          </a:p>
+          <a:p>
+            <a:pPr>
+              <a:spcBef>
+                <a:spcPts val="600"/>
+              </a:spcBef>
+            </a:pPr>
+            <a:r>
+              <a:rPr lang="en-US" b="1" noProof="1">
+                <a:solidFill>
+                  <a:srgbClr val="000000"/>
+                </a:solidFill>
+                <a:effectLst/>
+                <a:latin typeface="Courier New" panose="02070309020205020404" pitchFamily="49" charset="0"/>
+              </a:rPr>
+              <a:t>df.head(</a:t>
+            </a:r>
+            <a:r>
+              <a:rPr lang="en-US" b="1" noProof="1">
+                <a:solidFill>
+                  <a:srgbClr val="116644"/>
+                </a:solidFill>
+                <a:effectLst/>
+                <a:latin typeface="Courier New" panose="02070309020205020404" pitchFamily="49" charset="0"/>
+              </a:rPr>
+              <a:t>3</a:t>
+            </a:r>
+            <a:r>
+              <a:rPr lang="en-US" b="1" noProof="1">
+                <a:solidFill>
+                  <a:srgbClr val="000000"/>
+                </a:solidFill>
+                <a:effectLst/>
+                <a:latin typeface="Courier New" panose="02070309020205020404" pitchFamily="49" charset="0"/>
+              </a:rPr>
+              <a:t>)</a:t>
+            </a:r>
+          </a:p>
+        </p:txBody>
+      </p:sp>
+    </p:spTree>
+    <p:extLst>
+      <p:ext uri="{BB962C8B-B14F-4D97-AF65-F5344CB8AC3E}">
+        <p14:creationId xmlns:p14="http://schemas.microsoft.com/office/powerpoint/2010/main" val="2662145334"/>
+      </p:ext>
+    </p:extLst>
+  </p:cSld>
+  <p:clrMapOvr>
+    <a:masterClrMapping/>
+  </p:clrMapOvr>
+</p:sld>
+</file>
+
+<file path=ppt/slides/slide17.xml><?xml version="1.0" encoding="utf-8"?>
+<p:sld xmlns:a="http://schemas.openxmlformats.org/drawingml/2006/main" xmlns:r="http://schemas.openxmlformats.org/officeDocument/2006/relationships" xmlns:p="http://schemas.openxmlformats.org/presentationml/2006/main">
+  <p:cSld>
+    <p:spTree>
+      <p:nvGrpSpPr>
         <p:cNvPr id="1" name="">
           <a:extLst>
             <a:ext uri="{FF2B5EF4-FFF2-40B4-BE49-F238E27FC236}">
-              <a16:creationId xmlns:a16="http://schemas.microsoft.com/office/drawing/2014/main" id="{BD1A65E2-C284-83F6-6074-CCFEF74CE87A}"/>
+              <a16:creationId xmlns:a16="http://schemas.microsoft.com/office/drawing/2014/main" id="{015ADE49-E05E-6062-5AAE-E6885C34FF1F}"/>
             </a:ext>
           </a:extLst>
         </p:cNvPr>
@@ -6472,41 +7592,50 @@
           <a:chExt cx="0" cy="0"/>
         </a:xfrm>
       </p:grpSpPr>
-      <p:pic>
-        <p:nvPicPr>
-          <p:cNvPr id="5" name="Content Placeholder 4">
-            <a:extLst>
-              <a:ext uri="{FF2B5EF4-FFF2-40B4-BE49-F238E27FC236}">
-                <a16:creationId xmlns:a16="http://schemas.microsoft.com/office/drawing/2014/main" id="{B77B7C33-3931-334D-F5F0-51578F602770}"/>
-              </a:ext>
-            </a:extLst>
-          </p:cNvPr>
-          <p:cNvPicPr>
-            <a:picLocks noGrp="1" noChangeAspect="1"/>
-          </p:cNvPicPr>
+      <p:sp>
+        <p:nvSpPr>
+          <p:cNvPr id="2" name="Content Placeholder 1">
+            <a:extLst>
+              <a:ext uri="{FF2B5EF4-FFF2-40B4-BE49-F238E27FC236}">
+                <a16:creationId xmlns:a16="http://schemas.microsoft.com/office/drawing/2014/main" id="{867A10B3-72F0-DEA2-7DED-0367CA380B36}"/>
+              </a:ext>
+            </a:extLst>
+          </p:cNvPr>
+          <p:cNvSpPr>
+            <a:spLocks noGrp="1"/>
+          </p:cNvSpPr>
           <p:nvPr>
             <p:ph idx="1"/>
           </p:nvPr>
-        </p:nvPicPr>
-        <p:blipFill>
-          <a:blip r:embed="rId2"/>
-          <a:stretch>
-            <a:fillRect/>
-          </a:stretch>
-        </p:blipFill>
+        </p:nvSpPr>
         <p:spPr>
           <a:xfrm>
-            <a:off x="1317812" y="1782123"/>
-            <a:ext cx="3872753" cy="4242088"/>
+            <a:off x="838200" y="1763236"/>
+            <a:ext cx="10515600" cy="318877"/>
           </a:xfrm>
         </p:spPr>
-      </p:pic>
+        <p:txBody>
+          <a:bodyPr>
+            <a:normAutofit fontScale="70000" lnSpcReduction="20000"/>
+          </a:bodyPr>
+          <a:lstStyle/>
+          <a:p>
+            <a:pPr marL="0" indent="0">
+              <a:buNone/>
+            </a:pPr>
+            <a:r>
+              <a:rPr lang="en-US" dirty="0"/>
+              <a:t>Split to x and y</a:t>
+            </a:r>
+          </a:p>
+        </p:txBody>
+      </p:sp>
       <p:sp>
         <p:nvSpPr>
           <p:cNvPr id="3" name="Title 2">
             <a:extLst>
               <a:ext uri="{FF2B5EF4-FFF2-40B4-BE49-F238E27FC236}">
-                <a16:creationId xmlns:a16="http://schemas.microsoft.com/office/drawing/2014/main" id="{6A4F7E4E-1303-88AC-B630-42D669AF1547}"/>
+                <a16:creationId xmlns:a16="http://schemas.microsoft.com/office/drawing/2014/main" id="{A734EC80-B40E-0812-2410-9449D662958C}"/>
               </a:ext>
             </a:extLst>
           </p:cNvPr>
@@ -6524,99 +7653,566 @@
           <a:p>
             <a:r>
               <a:rPr lang="en-US" dirty="0"/>
-              <a:t>Solving Linear Regression Using The Gradient Descent Method</a:t>
+              <a:t>Splitting the Data</a:t>
             </a:r>
           </a:p>
         </p:txBody>
       </p:sp>
-      <p:pic>
-        <p:nvPicPr>
-          <p:cNvPr id="7" name="Picture 6" descr="A graph of a function&#10;&#10;AI-generated content may be incorrect.">
-            <a:extLst>
-              <a:ext uri="{FF2B5EF4-FFF2-40B4-BE49-F238E27FC236}">
-                <a16:creationId xmlns:a16="http://schemas.microsoft.com/office/drawing/2014/main" id="{D41F736F-AF01-4029-F291-F1741828EA3C}"/>
-              </a:ext>
-            </a:extLst>
-          </p:cNvPr>
-          <p:cNvPicPr>
-            <a:picLocks noChangeAspect="1"/>
-          </p:cNvPicPr>
+      <p:sp>
+        <p:nvSpPr>
+          <p:cNvPr id="5" name="TextBox 4">
+            <a:extLst>
+              <a:ext uri="{FF2B5EF4-FFF2-40B4-BE49-F238E27FC236}">
+                <a16:creationId xmlns:a16="http://schemas.microsoft.com/office/drawing/2014/main" id="{3D97D810-6FC8-DFB4-AEA6-1F5AC7EF64F7}"/>
+              </a:ext>
+            </a:extLst>
+          </p:cNvPr>
+          <p:cNvSpPr txBox="1"/>
           <p:nvPr/>
-        </p:nvPicPr>
-        <p:blipFill>
-          <a:blip r:embed="rId3">
-            <a:extLst>
-              <a:ext uri="{28A0092B-C50C-407E-A947-70E740481C1C}">
-                <a14:useLocalDpi xmlns:a14="http://schemas.microsoft.com/office/drawing/2010/main" val="0"/>
-              </a:ext>
-            </a:extLst>
-          </a:blip>
-          <a:stretch>
-            <a:fillRect/>
-          </a:stretch>
-        </p:blipFill>
+        </p:nvSpPr>
         <p:spPr>
           <a:xfrm>
-            <a:off x="5346290" y="1717698"/>
-            <a:ext cx="6110568" cy="4888454"/>
+            <a:off x="838200" y="2198577"/>
+            <a:ext cx="10369378" cy="1014380"/>
+          </a:xfrm>
+          <a:prstGeom prst="rect">
+            <a:avLst/>
+          </a:prstGeom>
+          <a:noFill/>
+        </p:spPr>
+        <p:txBody>
+          <a:bodyPr wrap="square">
+            <a:spAutoFit/>
+          </a:bodyPr>
+          <a:lstStyle/>
+          <a:p>
+            <a:pPr>
+              <a:lnSpc>
+                <a:spcPts val="1425"/>
+              </a:lnSpc>
+              <a:buNone/>
+            </a:pPr>
+            <a:r>
+              <a:rPr lang="en-US" b="1" noProof="1">
+                <a:solidFill>
+                  <a:srgbClr val="000000"/>
+                </a:solidFill>
+                <a:effectLst/>
+                <a:latin typeface="Courier New" panose="02070309020205020404" pitchFamily="49" charset="0"/>
+              </a:rPr>
+              <a:t>x = df.iloc[:, </a:t>
+            </a:r>
+            <a:r>
+              <a:rPr lang="en-US" b="1" noProof="1">
+                <a:solidFill>
+                  <a:srgbClr val="116644"/>
+                </a:solidFill>
+                <a:effectLst/>
+                <a:latin typeface="Courier New" panose="02070309020205020404" pitchFamily="49" charset="0"/>
+              </a:rPr>
+              <a:t>0</a:t>
+            </a:r>
+            <a:r>
+              <a:rPr lang="en-US" b="1" noProof="1">
+                <a:solidFill>
+                  <a:srgbClr val="000000"/>
+                </a:solidFill>
+                <a:effectLst/>
+                <a:latin typeface="Courier New" panose="02070309020205020404" pitchFamily="49" charset="0"/>
+              </a:rPr>
+              <a:t>].values.reshape(</a:t>
+            </a:r>
+            <a:r>
+              <a:rPr lang="en-US" b="1" noProof="1">
+                <a:solidFill>
+                  <a:srgbClr val="116644"/>
+                </a:solidFill>
+                <a:effectLst/>
+                <a:latin typeface="Courier New" panose="02070309020205020404" pitchFamily="49" charset="0"/>
+              </a:rPr>
+              <a:t>-1</a:t>
+            </a:r>
+            <a:r>
+              <a:rPr lang="en-US" b="1" noProof="1">
+                <a:solidFill>
+                  <a:srgbClr val="000000"/>
+                </a:solidFill>
+                <a:effectLst/>
+                <a:latin typeface="Courier New" panose="02070309020205020404" pitchFamily="49" charset="0"/>
+              </a:rPr>
+              <a:t>, </a:t>
+            </a:r>
+            <a:r>
+              <a:rPr lang="en-US" b="1" noProof="1">
+                <a:solidFill>
+                  <a:srgbClr val="116644"/>
+                </a:solidFill>
+                <a:effectLst/>
+                <a:latin typeface="Courier New" panose="02070309020205020404" pitchFamily="49" charset="0"/>
+              </a:rPr>
+              <a:t>1</a:t>
+            </a:r>
+            <a:r>
+              <a:rPr lang="en-US" b="1" noProof="1">
+                <a:solidFill>
+                  <a:srgbClr val="000000"/>
+                </a:solidFill>
+                <a:effectLst/>
+                <a:latin typeface="Courier New" panose="02070309020205020404" pitchFamily="49" charset="0"/>
+              </a:rPr>
+              <a:t>)  </a:t>
+            </a:r>
+            <a:r>
+              <a:rPr lang="en-US" b="1" noProof="1">
+                <a:solidFill>
+                  <a:srgbClr val="008000"/>
+                </a:solidFill>
+                <a:effectLst/>
+                <a:latin typeface="Courier New" panose="02070309020205020404" pitchFamily="49" charset="0"/>
+              </a:rPr>
+              <a:t># Reshape x to be a 2D array</a:t>
+            </a:r>
+            <a:endParaRPr lang="en-US" b="1" noProof="1">
+              <a:solidFill>
+                <a:srgbClr val="000000"/>
+              </a:solidFill>
+              <a:effectLst/>
+              <a:latin typeface="Courier New" panose="02070309020205020404" pitchFamily="49" charset="0"/>
+            </a:endParaRPr>
+          </a:p>
+          <a:p>
+            <a:pPr>
+              <a:lnSpc>
+                <a:spcPts val="1425"/>
+              </a:lnSpc>
+              <a:buNone/>
+            </a:pPr>
+            <a:r>
+              <a:rPr lang="en-US" b="1" noProof="1">
+                <a:solidFill>
+                  <a:srgbClr val="000000"/>
+                </a:solidFill>
+                <a:effectLst/>
+                <a:latin typeface="Courier New" panose="02070309020205020404" pitchFamily="49" charset="0"/>
+              </a:rPr>
+              <a:t>y = df.iloc[:, </a:t>
+            </a:r>
+            <a:r>
+              <a:rPr lang="en-US" b="1" noProof="1">
+                <a:solidFill>
+                  <a:srgbClr val="116644"/>
+                </a:solidFill>
+                <a:effectLst/>
+                <a:latin typeface="Courier New" panose="02070309020205020404" pitchFamily="49" charset="0"/>
+              </a:rPr>
+              <a:t>-1</a:t>
+            </a:r>
+            <a:r>
+              <a:rPr lang="en-US" b="1" noProof="1">
+                <a:solidFill>
+                  <a:srgbClr val="000000"/>
+                </a:solidFill>
+                <a:effectLst/>
+                <a:latin typeface="Courier New" panose="02070309020205020404" pitchFamily="49" charset="0"/>
+              </a:rPr>
+              <a:t>].values  </a:t>
+            </a:r>
+            <a:r>
+              <a:rPr lang="en-US" b="1" noProof="1">
+                <a:solidFill>
+                  <a:srgbClr val="008000"/>
+                </a:solidFill>
+                <a:effectLst/>
+                <a:latin typeface="Courier New" panose="02070309020205020404" pitchFamily="49" charset="0"/>
+              </a:rPr>
+              <a:t># y can remain as a 1D array</a:t>
+            </a:r>
+            <a:endParaRPr lang="en-US" b="1" noProof="1">
+              <a:solidFill>
+                <a:srgbClr val="000000"/>
+              </a:solidFill>
+              <a:effectLst/>
+              <a:latin typeface="Courier New" panose="02070309020205020404" pitchFamily="49" charset="0"/>
+            </a:endParaRPr>
+          </a:p>
+          <a:p>
+            <a:pPr>
+              <a:lnSpc>
+                <a:spcPts val="1425"/>
+              </a:lnSpc>
+              <a:buNone/>
+            </a:pPr>
+            <a:br>
+              <a:rPr lang="en-US" b="1" noProof="1">
+                <a:solidFill>
+                  <a:srgbClr val="000000"/>
+                </a:solidFill>
+                <a:effectLst/>
+                <a:latin typeface="Courier New" panose="02070309020205020404" pitchFamily="49" charset="0"/>
+              </a:rPr>
+            </a:br>
+            <a:r>
+              <a:rPr lang="en-US" b="1" noProof="1">
+                <a:solidFill>
+                  <a:srgbClr val="008000"/>
+                </a:solidFill>
+                <a:effectLst/>
+                <a:latin typeface="Courier New" panose="02070309020205020404" pitchFamily="49" charset="0"/>
+              </a:rPr>
+              <a:t># x = df["Square_Area"]</a:t>
+            </a:r>
+            <a:endParaRPr lang="en-US" b="1" noProof="1">
+              <a:solidFill>
+                <a:srgbClr val="000000"/>
+              </a:solidFill>
+              <a:effectLst/>
+              <a:latin typeface="Courier New" panose="02070309020205020404" pitchFamily="49" charset="0"/>
+            </a:endParaRPr>
+          </a:p>
+          <a:p>
+            <a:pPr>
+              <a:lnSpc>
+                <a:spcPts val="1425"/>
+              </a:lnSpc>
+            </a:pPr>
+            <a:r>
+              <a:rPr lang="en-US" b="1" noProof="1">
+                <a:solidFill>
+                  <a:srgbClr val="008000"/>
+                </a:solidFill>
+                <a:effectLst/>
+                <a:latin typeface="Courier New" panose="02070309020205020404" pitchFamily="49" charset="0"/>
+              </a:rPr>
+              <a:t># y= df["Price"]</a:t>
+            </a:r>
+            <a:endParaRPr lang="en-US" b="1" noProof="1">
+              <a:solidFill>
+                <a:srgbClr val="000000"/>
+              </a:solidFill>
+              <a:effectLst/>
+              <a:latin typeface="Courier New" panose="02070309020205020404" pitchFamily="49" charset="0"/>
+            </a:endParaRPr>
+          </a:p>
+        </p:txBody>
+      </p:sp>
+      <p:sp>
+        <p:nvSpPr>
+          <p:cNvPr id="6" name="Content Placeholder 1">
+            <a:extLst>
+              <a:ext uri="{FF2B5EF4-FFF2-40B4-BE49-F238E27FC236}">
+                <a16:creationId xmlns:a16="http://schemas.microsoft.com/office/drawing/2014/main" id="{0FC3CFFA-3CDA-4185-057F-2BC99E81793B}"/>
+              </a:ext>
+            </a:extLst>
+          </p:cNvPr>
+          <p:cNvSpPr txBox="1">
+            <a:spLocks/>
+          </p:cNvSpPr>
+          <p:nvPr/>
+        </p:nvSpPr>
+        <p:spPr>
+          <a:xfrm>
+            <a:off x="838200" y="3534506"/>
+            <a:ext cx="10515600" cy="318877"/>
           </a:xfrm>
           <a:prstGeom prst="rect">
             <a:avLst/>
           </a:prstGeom>
         </p:spPr>
-      </p:pic>
-      <p:pic>
-        <p:nvPicPr>
-          <p:cNvPr id="8" name="Picture 2" descr="Why Use Python? - Full Stack Python">
-            <a:hlinkClick r:id="rId4"/>
-            <a:extLst>
-              <a:ext uri="{FF2B5EF4-FFF2-40B4-BE49-F238E27FC236}">
-                <a16:creationId xmlns:a16="http://schemas.microsoft.com/office/drawing/2014/main" id="{D4AE6193-CCD4-99C8-A300-F96A67CCB423}"/>
-              </a:ext>
-            </a:extLst>
-          </p:cNvPr>
-          <p:cNvPicPr>
-            <a:picLocks noChangeAspect="1" noChangeArrowheads="1"/>
-          </p:cNvPicPr>
+        <p:txBody>
+          <a:bodyPr vert="horz" lIns="91440" tIns="45720" rIns="91440" bIns="45720" rtlCol="0">
+            <a:normAutofit fontScale="70000" lnSpcReduction="20000"/>
+          </a:bodyPr>
+          <a:lstStyle>
+            <a:lvl1pPr marL="228600" indent="-228600" algn="l" defTabSz="914400" rtl="0" eaLnBrk="1" latinLnBrk="0" hangingPunct="1">
+              <a:lnSpc>
+                <a:spcPct val="90000"/>
+              </a:lnSpc>
+              <a:spcBef>
+                <a:spcPts val="1000"/>
+              </a:spcBef>
+              <a:buFont typeface="Arial" panose="020B0604020202020204" pitchFamily="34" charset="0"/>
+              <a:buChar char="•"/>
+              <a:defRPr sz="2800" kern="1200">
+                <a:solidFill>
+                  <a:schemeClr val="tx1"/>
+                </a:solidFill>
+                <a:latin typeface="+mn-lt"/>
+                <a:ea typeface="+mn-ea"/>
+                <a:cs typeface="+mn-cs"/>
+              </a:defRPr>
+            </a:lvl1pPr>
+            <a:lvl2pPr marL="685800" indent="-228600" algn="l" defTabSz="914400" rtl="0" eaLnBrk="1" latinLnBrk="0" hangingPunct="1">
+              <a:lnSpc>
+                <a:spcPct val="90000"/>
+              </a:lnSpc>
+              <a:spcBef>
+                <a:spcPts val="500"/>
+              </a:spcBef>
+              <a:buFont typeface="Arial" panose="020B0604020202020204" pitchFamily="34" charset="0"/>
+              <a:buChar char="•"/>
+              <a:defRPr sz="2400" kern="1200">
+                <a:solidFill>
+                  <a:schemeClr val="tx1"/>
+                </a:solidFill>
+                <a:latin typeface="+mn-lt"/>
+                <a:ea typeface="+mn-ea"/>
+                <a:cs typeface="+mn-cs"/>
+              </a:defRPr>
+            </a:lvl2pPr>
+            <a:lvl3pPr marL="1143000" indent="-228600" algn="l" defTabSz="914400" rtl="0" eaLnBrk="1" latinLnBrk="0" hangingPunct="1">
+              <a:lnSpc>
+                <a:spcPct val="90000"/>
+              </a:lnSpc>
+              <a:spcBef>
+                <a:spcPts val="500"/>
+              </a:spcBef>
+              <a:buFont typeface="Arial" panose="020B0604020202020204" pitchFamily="34" charset="0"/>
+              <a:buChar char="•"/>
+              <a:defRPr sz="2000" kern="1200">
+                <a:solidFill>
+                  <a:schemeClr val="tx1"/>
+                </a:solidFill>
+                <a:latin typeface="+mn-lt"/>
+                <a:ea typeface="+mn-ea"/>
+                <a:cs typeface="+mn-cs"/>
+              </a:defRPr>
+            </a:lvl3pPr>
+            <a:lvl4pPr marL="1600200" indent="-228600" algn="l" defTabSz="914400" rtl="0" eaLnBrk="1" latinLnBrk="0" hangingPunct="1">
+              <a:lnSpc>
+                <a:spcPct val="90000"/>
+              </a:lnSpc>
+              <a:spcBef>
+                <a:spcPts val="500"/>
+              </a:spcBef>
+              <a:buFont typeface="Arial" panose="020B0604020202020204" pitchFamily="34" charset="0"/>
+              <a:buChar char="•"/>
+              <a:defRPr sz="1800" kern="1200">
+                <a:solidFill>
+                  <a:schemeClr val="tx1"/>
+                </a:solidFill>
+                <a:latin typeface="+mn-lt"/>
+                <a:ea typeface="+mn-ea"/>
+                <a:cs typeface="+mn-cs"/>
+              </a:defRPr>
+            </a:lvl4pPr>
+            <a:lvl5pPr marL="2057400" indent="-228600" algn="l" defTabSz="914400" rtl="0" eaLnBrk="1" latinLnBrk="0" hangingPunct="1">
+              <a:lnSpc>
+                <a:spcPct val="90000"/>
+              </a:lnSpc>
+              <a:spcBef>
+                <a:spcPts val="500"/>
+              </a:spcBef>
+              <a:buFont typeface="Arial" panose="020B0604020202020204" pitchFamily="34" charset="0"/>
+              <a:buChar char="•"/>
+              <a:defRPr sz="1800" kern="1200">
+                <a:solidFill>
+                  <a:schemeClr val="tx1"/>
+                </a:solidFill>
+                <a:latin typeface="+mn-lt"/>
+                <a:ea typeface="+mn-ea"/>
+                <a:cs typeface="+mn-cs"/>
+              </a:defRPr>
+            </a:lvl5pPr>
+            <a:lvl6pPr marL="2514600" indent="-228600" algn="l" defTabSz="914400" rtl="0" eaLnBrk="1" latinLnBrk="0" hangingPunct="1">
+              <a:lnSpc>
+                <a:spcPct val="90000"/>
+              </a:lnSpc>
+              <a:spcBef>
+                <a:spcPts val="500"/>
+              </a:spcBef>
+              <a:buFont typeface="Arial" panose="020B0604020202020204" pitchFamily="34" charset="0"/>
+              <a:buChar char="•"/>
+              <a:defRPr sz="1800" kern="1200">
+                <a:solidFill>
+                  <a:schemeClr val="tx1"/>
+                </a:solidFill>
+                <a:latin typeface="+mn-lt"/>
+                <a:ea typeface="+mn-ea"/>
+                <a:cs typeface="+mn-cs"/>
+              </a:defRPr>
+            </a:lvl6pPr>
+            <a:lvl7pPr marL="2971800" indent="-228600" algn="l" defTabSz="914400" rtl="0" eaLnBrk="1" latinLnBrk="0" hangingPunct="1">
+              <a:lnSpc>
+                <a:spcPct val="90000"/>
+              </a:lnSpc>
+              <a:spcBef>
+                <a:spcPts val="500"/>
+              </a:spcBef>
+              <a:buFont typeface="Arial" panose="020B0604020202020204" pitchFamily="34" charset="0"/>
+              <a:buChar char="•"/>
+              <a:defRPr sz="1800" kern="1200">
+                <a:solidFill>
+                  <a:schemeClr val="tx1"/>
+                </a:solidFill>
+                <a:latin typeface="+mn-lt"/>
+                <a:ea typeface="+mn-ea"/>
+                <a:cs typeface="+mn-cs"/>
+              </a:defRPr>
+            </a:lvl7pPr>
+            <a:lvl8pPr marL="3429000" indent="-228600" algn="l" defTabSz="914400" rtl="0" eaLnBrk="1" latinLnBrk="0" hangingPunct="1">
+              <a:lnSpc>
+                <a:spcPct val="90000"/>
+              </a:lnSpc>
+              <a:spcBef>
+                <a:spcPts val="500"/>
+              </a:spcBef>
+              <a:buFont typeface="Arial" panose="020B0604020202020204" pitchFamily="34" charset="0"/>
+              <a:buChar char="•"/>
+              <a:defRPr sz="1800" kern="1200">
+                <a:solidFill>
+                  <a:schemeClr val="tx1"/>
+                </a:solidFill>
+                <a:latin typeface="+mn-lt"/>
+                <a:ea typeface="+mn-ea"/>
+                <a:cs typeface="+mn-cs"/>
+              </a:defRPr>
+            </a:lvl8pPr>
+            <a:lvl9pPr marL="3886200" indent="-228600" algn="l" defTabSz="914400" rtl="0" eaLnBrk="1" latinLnBrk="0" hangingPunct="1">
+              <a:lnSpc>
+                <a:spcPct val="90000"/>
+              </a:lnSpc>
+              <a:spcBef>
+                <a:spcPts val="500"/>
+              </a:spcBef>
+              <a:buFont typeface="Arial" panose="020B0604020202020204" pitchFamily="34" charset="0"/>
+              <a:buChar char="•"/>
+              <a:defRPr sz="1800" kern="1200">
+                <a:solidFill>
+                  <a:schemeClr val="tx1"/>
+                </a:solidFill>
+                <a:latin typeface="+mn-lt"/>
+                <a:ea typeface="+mn-ea"/>
+                <a:cs typeface="+mn-cs"/>
+              </a:defRPr>
+            </a:lvl9pPr>
+          </a:lstStyle>
+          <a:p>
+            <a:pPr marL="0" indent="0">
+              <a:buFont typeface="Arial" panose="020B0604020202020204" pitchFamily="34" charset="0"/>
+              <a:buNone/>
+            </a:pPr>
+            <a:r>
+              <a:rPr lang="en-US" dirty="0"/>
+              <a:t>Split to train and test</a:t>
+            </a:r>
+          </a:p>
+        </p:txBody>
+      </p:sp>
+      <p:sp>
+        <p:nvSpPr>
+          <p:cNvPr id="8" name="TextBox 7">
+            <a:extLst>
+              <a:ext uri="{FF2B5EF4-FFF2-40B4-BE49-F238E27FC236}">
+                <a16:creationId xmlns:a16="http://schemas.microsoft.com/office/drawing/2014/main" id="{92F4E3EE-1459-A6CC-DAC3-DE42F2873A6C}"/>
+              </a:ext>
+            </a:extLst>
+          </p:cNvPr>
+          <p:cNvSpPr txBox="1"/>
           <p:nvPr/>
-        </p:nvPicPr>
-        <p:blipFill>
-          <a:blip r:embed="rId5">
-            <a:extLst>
-              <a:ext uri="{28A0092B-C50C-407E-A947-70E740481C1C}">
-                <a14:useLocalDpi xmlns:a14="http://schemas.microsoft.com/office/drawing/2010/main" val="0"/>
-              </a:ext>
-            </a:extLst>
-          </a:blip>
-          <a:srcRect/>
-          <a:stretch>
-            <a:fillRect/>
-          </a:stretch>
-        </p:blipFill>
-        <p:spPr bwMode="auto">
+        </p:nvSpPr>
+        <p:spPr>
           <a:xfrm>
-            <a:off x="838200" y="6280339"/>
-            <a:ext cx="1492624" cy="486147"/>
+            <a:off x="838200" y="3972808"/>
+            <a:ext cx="10515600" cy="655308"/>
           </a:xfrm>
           <a:prstGeom prst="rect">
             <a:avLst/>
           </a:prstGeom>
           <a:noFill/>
-          <a:extLst>
-            <a:ext uri="{909E8E84-426E-40DD-AFC4-6F175D3DCCD1}">
-              <a14:hiddenFill xmlns:a14="http://schemas.microsoft.com/office/drawing/2010/main">
-                <a:solidFill>
-                  <a:srgbClr val="FFFFFF"/>
-                </a:solidFill>
-              </a14:hiddenFill>
-            </a:ext>
-          </a:extLst>
         </p:spPr>
-      </p:pic>
+        <p:txBody>
+          <a:bodyPr wrap="square">
+            <a:spAutoFit/>
+          </a:bodyPr>
+          <a:lstStyle/>
+          <a:p>
+            <a:pPr>
+              <a:lnSpc>
+                <a:spcPts val="1425"/>
+              </a:lnSpc>
+              <a:buNone/>
+            </a:pPr>
+            <a:r>
+              <a:rPr lang="en-US" b="1" noProof="1">
+                <a:solidFill>
+                  <a:srgbClr val="008000"/>
+                </a:solidFill>
+                <a:effectLst/>
+                <a:latin typeface="Courier New" panose="02070309020205020404" pitchFamily="49" charset="0"/>
+              </a:rPr>
+              <a:t># Splitting the dataset into training and test set. </a:t>
+            </a:r>
+            <a:endParaRPr lang="en-US" b="1" noProof="1">
+              <a:solidFill>
+                <a:srgbClr val="000000"/>
+              </a:solidFill>
+              <a:effectLst/>
+              <a:latin typeface="Courier New" panose="02070309020205020404" pitchFamily="49" charset="0"/>
+            </a:endParaRPr>
+          </a:p>
+          <a:p>
+            <a:pPr>
+              <a:lnSpc>
+                <a:spcPts val="1425"/>
+              </a:lnSpc>
+            </a:pPr>
+            <a:r>
+              <a:rPr lang="en-US" b="1" noProof="1">
+                <a:solidFill>
+                  <a:srgbClr val="000000"/>
+                </a:solidFill>
+                <a:effectLst/>
+                <a:latin typeface="Courier New" panose="02070309020205020404" pitchFamily="49" charset="0"/>
+              </a:rPr>
+              <a:t>x_train, x_test, y_train, y_test= train_test_split(x, y, test_size= </a:t>
+            </a:r>
+            <a:r>
+              <a:rPr lang="en-US" b="1" noProof="1">
+                <a:solidFill>
+                  <a:srgbClr val="116644"/>
+                </a:solidFill>
+                <a:effectLst/>
+                <a:latin typeface="Courier New" panose="02070309020205020404" pitchFamily="49" charset="0"/>
+              </a:rPr>
+              <a:t>.1</a:t>
+            </a:r>
+            <a:r>
+              <a:rPr lang="en-US" b="1" noProof="1">
+                <a:solidFill>
+                  <a:srgbClr val="000000"/>
+                </a:solidFill>
+                <a:effectLst/>
+                <a:latin typeface="Courier New" panose="02070309020205020404" pitchFamily="49" charset="0"/>
+              </a:rPr>
+              <a:t>, random_state=</a:t>
+            </a:r>
+            <a:r>
+              <a:rPr lang="en-US" b="1" noProof="1">
+                <a:solidFill>
+                  <a:srgbClr val="116644"/>
+                </a:solidFill>
+                <a:effectLst/>
+                <a:latin typeface="Courier New" panose="02070309020205020404" pitchFamily="49" charset="0"/>
+              </a:rPr>
+              <a:t>0</a:t>
+            </a:r>
+            <a:r>
+              <a:rPr lang="en-US" b="1" noProof="1">
+                <a:solidFill>
+                  <a:srgbClr val="000000"/>
+                </a:solidFill>
+                <a:effectLst/>
+                <a:latin typeface="Courier New" panose="02070309020205020404" pitchFamily="49" charset="0"/>
+              </a:rPr>
+              <a:t>)  </a:t>
+            </a:r>
+          </a:p>
+        </p:txBody>
+      </p:sp>
     </p:spTree>
     <p:extLst>
       <p:ext uri="{BB962C8B-B14F-4D97-AF65-F5344CB8AC3E}">
-        <p14:creationId xmlns:p14="http://schemas.microsoft.com/office/powerpoint/2010/main" val="538252582"/>
+        <p14:creationId xmlns:p14="http://schemas.microsoft.com/office/powerpoint/2010/main" val="952835031"/>
       </p:ext>
     </p:extLst>
   </p:cSld>
@@ -6626,7 +8222,2584 @@
 </p:sld>
 </file>
 
-<file path=ppt/slides/slide17.xml><?xml version="1.0" encoding="utf-8"?>
+<file path=ppt/slides/slide18.xml><?xml version="1.0" encoding="utf-8"?>
+<p:sld xmlns:a="http://schemas.openxmlformats.org/drawingml/2006/main" xmlns:r="http://schemas.openxmlformats.org/officeDocument/2006/relationships" xmlns:p="http://schemas.openxmlformats.org/presentationml/2006/main">
+  <p:cSld>
+    <p:spTree>
+      <p:nvGrpSpPr>
+        <p:cNvPr id="1" name=""/>
+        <p:cNvGrpSpPr/>
+        <p:nvPr/>
+      </p:nvGrpSpPr>
+      <p:grpSpPr>
+        <a:xfrm>
+          <a:off x="0" y="0"/>
+          <a:ext cx="0" cy="0"/>
+          <a:chOff x="0" y="0"/>
+          <a:chExt cx="0" cy="0"/>
+        </a:xfrm>
+      </p:grpSpPr>
+      <p:sp>
+        <p:nvSpPr>
+          <p:cNvPr id="3" name="Title 2">
+            <a:extLst>
+              <a:ext uri="{FF2B5EF4-FFF2-40B4-BE49-F238E27FC236}">
+                <a16:creationId xmlns:a16="http://schemas.microsoft.com/office/drawing/2014/main" id="{18D3AF28-B4CC-BA03-E601-706704D9F578}"/>
+              </a:ext>
+            </a:extLst>
+          </p:cNvPr>
+          <p:cNvSpPr>
+            <a:spLocks noGrp="1"/>
+          </p:cNvSpPr>
+          <p:nvPr>
+            <p:ph type="title"/>
+          </p:nvPr>
+        </p:nvSpPr>
+        <p:spPr/>
+        <p:txBody>
+          <a:bodyPr/>
+          <a:lstStyle/>
+          <a:p>
+            <a:r>
+              <a:rPr lang="en-US" dirty="0"/>
+              <a:t>Create the Regression Model and Train it</a:t>
+            </a:r>
+          </a:p>
+        </p:txBody>
+      </p:sp>
+      <p:sp>
+        <p:nvSpPr>
+          <p:cNvPr id="5" name="TextBox 4">
+            <a:extLst>
+              <a:ext uri="{FF2B5EF4-FFF2-40B4-BE49-F238E27FC236}">
+                <a16:creationId xmlns:a16="http://schemas.microsoft.com/office/drawing/2014/main" id="{9DEAC493-EECE-8ECF-1390-683A329DE3A8}"/>
+              </a:ext>
+            </a:extLst>
+          </p:cNvPr>
+          <p:cNvSpPr txBox="1"/>
+          <p:nvPr/>
+        </p:nvSpPr>
+        <p:spPr>
+          <a:xfrm>
+            <a:off x="838200" y="2233841"/>
+            <a:ext cx="6094970" cy="296235"/>
+          </a:xfrm>
+          <a:prstGeom prst="rect">
+            <a:avLst/>
+          </a:prstGeom>
+          <a:noFill/>
+        </p:spPr>
+        <p:txBody>
+          <a:bodyPr wrap="square">
+            <a:spAutoFit/>
+          </a:bodyPr>
+          <a:lstStyle/>
+          <a:p>
+            <a:pPr>
+              <a:lnSpc>
+                <a:spcPts val="1425"/>
+              </a:lnSpc>
+            </a:pPr>
+            <a:r>
+              <a:rPr lang="en-US" b="1" noProof="1">
+                <a:solidFill>
+                  <a:srgbClr val="000000"/>
+                </a:solidFill>
+                <a:effectLst/>
+                <a:latin typeface="Courier New" panose="02070309020205020404" pitchFamily="49" charset="0"/>
+              </a:rPr>
+              <a:t>regressor= LinearRegression()  </a:t>
+            </a:r>
+          </a:p>
+        </p:txBody>
+      </p:sp>
+      <p:sp>
+        <p:nvSpPr>
+          <p:cNvPr id="7" name="TextBox 6">
+            <a:extLst>
+              <a:ext uri="{FF2B5EF4-FFF2-40B4-BE49-F238E27FC236}">
+                <a16:creationId xmlns:a16="http://schemas.microsoft.com/office/drawing/2014/main" id="{0A1C3751-059D-A947-518E-EEF9129D0C0E}"/>
+              </a:ext>
+            </a:extLst>
+          </p:cNvPr>
+          <p:cNvSpPr txBox="1"/>
+          <p:nvPr/>
+        </p:nvSpPr>
+        <p:spPr>
+          <a:xfrm>
+            <a:off x="838200" y="3250239"/>
+            <a:ext cx="6094970" cy="834844"/>
+          </a:xfrm>
+          <a:prstGeom prst="rect">
+            <a:avLst/>
+          </a:prstGeom>
+          <a:noFill/>
+        </p:spPr>
+        <p:txBody>
+          <a:bodyPr wrap="square">
+            <a:spAutoFit/>
+          </a:bodyPr>
+          <a:lstStyle/>
+          <a:p>
+            <a:pPr>
+              <a:lnSpc>
+                <a:spcPts val="1425"/>
+              </a:lnSpc>
+              <a:buNone/>
+            </a:pPr>
+            <a:r>
+              <a:rPr lang="fr-FR" b="1" noProof="1">
+                <a:solidFill>
+                  <a:srgbClr val="000000"/>
+                </a:solidFill>
+                <a:effectLst/>
+                <a:latin typeface="Courier New" panose="02070309020205020404" pitchFamily="49" charset="0"/>
+              </a:rPr>
+              <a:t>regressor.fit(x_train, y_train)  </a:t>
+            </a:r>
+          </a:p>
+          <a:p>
+            <a:pPr>
+              <a:lnSpc>
+                <a:spcPts val="1425"/>
+              </a:lnSpc>
+              <a:buNone/>
+            </a:pPr>
+            <a:br>
+              <a:rPr lang="fr-FR" b="1" noProof="1">
+                <a:solidFill>
+                  <a:srgbClr val="000000"/>
+                </a:solidFill>
+                <a:effectLst/>
+                <a:latin typeface="Courier New" panose="02070309020205020404" pitchFamily="49" charset="0"/>
+              </a:rPr>
+            </a:br>
+            <a:r>
+              <a:rPr lang="fr-FR" b="1" noProof="1">
+                <a:solidFill>
+                  <a:srgbClr val="6A5221"/>
+                </a:solidFill>
+                <a:effectLst/>
+                <a:latin typeface="Courier New" panose="02070309020205020404" pitchFamily="49" charset="0"/>
+              </a:rPr>
+              <a:t>print</a:t>
+            </a:r>
+            <a:r>
+              <a:rPr lang="fr-FR" b="1" noProof="1">
+                <a:solidFill>
+                  <a:srgbClr val="000000"/>
+                </a:solidFill>
+                <a:effectLst/>
+                <a:latin typeface="Courier New" panose="02070309020205020404" pitchFamily="49" charset="0"/>
+              </a:rPr>
+              <a:t>(regressor.coef_)</a:t>
+            </a:r>
+          </a:p>
+          <a:p>
+            <a:pPr>
+              <a:lnSpc>
+                <a:spcPts val="1425"/>
+              </a:lnSpc>
+            </a:pPr>
+            <a:r>
+              <a:rPr lang="fr-FR" b="1" noProof="1">
+                <a:solidFill>
+                  <a:srgbClr val="6A5221"/>
+                </a:solidFill>
+                <a:effectLst/>
+                <a:latin typeface="Courier New" panose="02070309020205020404" pitchFamily="49" charset="0"/>
+              </a:rPr>
+              <a:t>print</a:t>
+            </a:r>
+            <a:r>
+              <a:rPr lang="fr-FR" b="1" noProof="1">
+                <a:solidFill>
+                  <a:srgbClr val="000000"/>
+                </a:solidFill>
+                <a:effectLst/>
+                <a:latin typeface="Courier New" panose="02070309020205020404" pitchFamily="49" charset="0"/>
+              </a:rPr>
+              <a:t>(regressor.intercept_)</a:t>
+            </a:r>
+          </a:p>
+        </p:txBody>
+      </p:sp>
+      <p:sp>
+        <p:nvSpPr>
+          <p:cNvPr id="11" name="Content Placeholder 1">
+            <a:extLst>
+              <a:ext uri="{FF2B5EF4-FFF2-40B4-BE49-F238E27FC236}">
+                <a16:creationId xmlns:a16="http://schemas.microsoft.com/office/drawing/2014/main" id="{E74FFDBD-7691-0BC9-80E8-6A8F3A526534}"/>
+              </a:ext>
+            </a:extLst>
+          </p:cNvPr>
+          <p:cNvSpPr>
+            <a:spLocks noGrp="1"/>
+          </p:cNvSpPr>
+          <p:nvPr>
+            <p:ph idx="1"/>
+          </p:nvPr>
+        </p:nvSpPr>
+        <p:spPr>
+          <a:xfrm>
+            <a:off x="838200" y="1763236"/>
+            <a:ext cx="10515600" cy="318877"/>
+          </a:xfrm>
+        </p:spPr>
+        <p:txBody>
+          <a:bodyPr>
+            <a:normAutofit fontScale="70000" lnSpcReduction="20000"/>
+          </a:bodyPr>
+          <a:lstStyle/>
+          <a:p>
+            <a:pPr marL="0" indent="0">
+              <a:buNone/>
+            </a:pPr>
+            <a:r>
+              <a:rPr lang="en-US" dirty="0"/>
+              <a:t>Create the Machine Learning model and make any required configurations</a:t>
+            </a:r>
+          </a:p>
+        </p:txBody>
+      </p:sp>
+      <p:sp>
+        <p:nvSpPr>
+          <p:cNvPr id="12" name="Content Placeholder 1">
+            <a:extLst>
+              <a:ext uri="{FF2B5EF4-FFF2-40B4-BE49-F238E27FC236}">
+                <a16:creationId xmlns:a16="http://schemas.microsoft.com/office/drawing/2014/main" id="{866F223C-F998-07B7-7CDD-5E733482CD66}"/>
+              </a:ext>
+            </a:extLst>
+          </p:cNvPr>
+          <p:cNvSpPr txBox="1">
+            <a:spLocks/>
+          </p:cNvSpPr>
+          <p:nvPr/>
+        </p:nvSpPr>
+        <p:spPr>
+          <a:xfrm>
+            <a:off x="838200" y="2802276"/>
+            <a:ext cx="10515600" cy="318877"/>
+          </a:xfrm>
+          <a:prstGeom prst="rect">
+            <a:avLst/>
+          </a:prstGeom>
+        </p:spPr>
+        <p:txBody>
+          <a:bodyPr vert="horz" lIns="91440" tIns="45720" rIns="91440" bIns="45720" rtlCol="0">
+            <a:normAutofit fontScale="70000" lnSpcReduction="20000"/>
+          </a:bodyPr>
+          <a:lstStyle>
+            <a:lvl1pPr marL="228600" indent="-228600" algn="l" defTabSz="914400" rtl="0" eaLnBrk="1" latinLnBrk="0" hangingPunct="1">
+              <a:lnSpc>
+                <a:spcPct val="90000"/>
+              </a:lnSpc>
+              <a:spcBef>
+                <a:spcPts val="1000"/>
+              </a:spcBef>
+              <a:buFont typeface="Arial" panose="020B0604020202020204" pitchFamily="34" charset="0"/>
+              <a:buChar char="•"/>
+              <a:defRPr sz="2800" kern="1200">
+                <a:solidFill>
+                  <a:schemeClr val="tx1"/>
+                </a:solidFill>
+                <a:latin typeface="+mn-lt"/>
+                <a:ea typeface="+mn-ea"/>
+                <a:cs typeface="+mn-cs"/>
+              </a:defRPr>
+            </a:lvl1pPr>
+            <a:lvl2pPr marL="685800" indent="-228600" algn="l" defTabSz="914400" rtl="0" eaLnBrk="1" latinLnBrk="0" hangingPunct="1">
+              <a:lnSpc>
+                <a:spcPct val="90000"/>
+              </a:lnSpc>
+              <a:spcBef>
+                <a:spcPts val="500"/>
+              </a:spcBef>
+              <a:buFont typeface="Arial" panose="020B0604020202020204" pitchFamily="34" charset="0"/>
+              <a:buChar char="•"/>
+              <a:defRPr sz="2400" kern="1200">
+                <a:solidFill>
+                  <a:schemeClr val="tx1"/>
+                </a:solidFill>
+                <a:latin typeface="+mn-lt"/>
+                <a:ea typeface="+mn-ea"/>
+                <a:cs typeface="+mn-cs"/>
+              </a:defRPr>
+            </a:lvl2pPr>
+            <a:lvl3pPr marL="1143000" indent="-228600" algn="l" defTabSz="914400" rtl="0" eaLnBrk="1" latinLnBrk="0" hangingPunct="1">
+              <a:lnSpc>
+                <a:spcPct val="90000"/>
+              </a:lnSpc>
+              <a:spcBef>
+                <a:spcPts val="500"/>
+              </a:spcBef>
+              <a:buFont typeface="Arial" panose="020B0604020202020204" pitchFamily="34" charset="0"/>
+              <a:buChar char="•"/>
+              <a:defRPr sz="2000" kern="1200">
+                <a:solidFill>
+                  <a:schemeClr val="tx1"/>
+                </a:solidFill>
+                <a:latin typeface="+mn-lt"/>
+                <a:ea typeface="+mn-ea"/>
+                <a:cs typeface="+mn-cs"/>
+              </a:defRPr>
+            </a:lvl3pPr>
+            <a:lvl4pPr marL="1600200" indent="-228600" algn="l" defTabSz="914400" rtl="0" eaLnBrk="1" latinLnBrk="0" hangingPunct="1">
+              <a:lnSpc>
+                <a:spcPct val="90000"/>
+              </a:lnSpc>
+              <a:spcBef>
+                <a:spcPts val="500"/>
+              </a:spcBef>
+              <a:buFont typeface="Arial" panose="020B0604020202020204" pitchFamily="34" charset="0"/>
+              <a:buChar char="•"/>
+              <a:defRPr sz="1800" kern="1200">
+                <a:solidFill>
+                  <a:schemeClr val="tx1"/>
+                </a:solidFill>
+                <a:latin typeface="+mn-lt"/>
+                <a:ea typeface="+mn-ea"/>
+                <a:cs typeface="+mn-cs"/>
+              </a:defRPr>
+            </a:lvl4pPr>
+            <a:lvl5pPr marL="2057400" indent="-228600" algn="l" defTabSz="914400" rtl="0" eaLnBrk="1" latinLnBrk="0" hangingPunct="1">
+              <a:lnSpc>
+                <a:spcPct val="90000"/>
+              </a:lnSpc>
+              <a:spcBef>
+                <a:spcPts val="500"/>
+              </a:spcBef>
+              <a:buFont typeface="Arial" panose="020B0604020202020204" pitchFamily="34" charset="0"/>
+              <a:buChar char="•"/>
+              <a:defRPr sz="1800" kern="1200">
+                <a:solidFill>
+                  <a:schemeClr val="tx1"/>
+                </a:solidFill>
+                <a:latin typeface="+mn-lt"/>
+                <a:ea typeface="+mn-ea"/>
+                <a:cs typeface="+mn-cs"/>
+              </a:defRPr>
+            </a:lvl5pPr>
+            <a:lvl6pPr marL="2514600" indent="-228600" algn="l" defTabSz="914400" rtl="0" eaLnBrk="1" latinLnBrk="0" hangingPunct="1">
+              <a:lnSpc>
+                <a:spcPct val="90000"/>
+              </a:lnSpc>
+              <a:spcBef>
+                <a:spcPts val="500"/>
+              </a:spcBef>
+              <a:buFont typeface="Arial" panose="020B0604020202020204" pitchFamily="34" charset="0"/>
+              <a:buChar char="•"/>
+              <a:defRPr sz="1800" kern="1200">
+                <a:solidFill>
+                  <a:schemeClr val="tx1"/>
+                </a:solidFill>
+                <a:latin typeface="+mn-lt"/>
+                <a:ea typeface="+mn-ea"/>
+                <a:cs typeface="+mn-cs"/>
+              </a:defRPr>
+            </a:lvl6pPr>
+            <a:lvl7pPr marL="2971800" indent="-228600" algn="l" defTabSz="914400" rtl="0" eaLnBrk="1" latinLnBrk="0" hangingPunct="1">
+              <a:lnSpc>
+                <a:spcPct val="90000"/>
+              </a:lnSpc>
+              <a:spcBef>
+                <a:spcPts val="500"/>
+              </a:spcBef>
+              <a:buFont typeface="Arial" panose="020B0604020202020204" pitchFamily="34" charset="0"/>
+              <a:buChar char="•"/>
+              <a:defRPr sz="1800" kern="1200">
+                <a:solidFill>
+                  <a:schemeClr val="tx1"/>
+                </a:solidFill>
+                <a:latin typeface="+mn-lt"/>
+                <a:ea typeface="+mn-ea"/>
+                <a:cs typeface="+mn-cs"/>
+              </a:defRPr>
+            </a:lvl7pPr>
+            <a:lvl8pPr marL="3429000" indent="-228600" algn="l" defTabSz="914400" rtl="0" eaLnBrk="1" latinLnBrk="0" hangingPunct="1">
+              <a:lnSpc>
+                <a:spcPct val="90000"/>
+              </a:lnSpc>
+              <a:spcBef>
+                <a:spcPts val="500"/>
+              </a:spcBef>
+              <a:buFont typeface="Arial" panose="020B0604020202020204" pitchFamily="34" charset="0"/>
+              <a:buChar char="•"/>
+              <a:defRPr sz="1800" kern="1200">
+                <a:solidFill>
+                  <a:schemeClr val="tx1"/>
+                </a:solidFill>
+                <a:latin typeface="+mn-lt"/>
+                <a:ea typeface="+mn-ea"/>
+                <a:cs typeface="+mn-cs"/>
+              </a:defRPr>
+            </a:lvl8pPr>
+            <a:lvl9pPr marL="3886200" indent="-228600" algn="l" defTabSz="914400" rtl="0" eaLnBrk="1" latinLnBrk="0" hangingPunct="1">
+              <a:lnSpc>
+                <a:spcPct val="90000"/>
+              </a:lnSpc>
+              <a:spcBef>
+                <a:spcPts val="500"/>
+              </a:spcBef>
+              <a:buFont typeface="Arial" panose="020B0604020202020204" pitchFamily="34" charset="0"/>
+              <a:buChar char="•"/>
+              <a:defRPr sz="1800" kern="1200">
+                <a:solidFill>
+                  <a:schemeClr val="tx1"/>
+                </a:solidFill>
+                <a:latin typeface="+mn-lt"/>
+                <a:ea typeface="+mn-ea"/>
+                <a:cs typeface="+mn-cs"/>
+              </a:defRPr>
+            </a:lvl9pPr>
+          </a:lstStyle>
+          <a:p>
+            <a:pPr marL="0" indent="0">
+              <a:buFont typeface="Arial" panose="020B0604020202020204" pitchFamily="34" charset="0"/>
+              <a:buNone/>
+            </a:pPr>
+            <a:r>
+              <a:rPr lang="en-US" dirty="0"/>
+              <a:t>Train the model and print the learnt coefficients</a:t>
+            </a:r>
+          </a:p>
+        </p:txBody>
+      </p:sp>
+      <p:sp>
+        <p:nvSpPr>
+          <p:cNvPr id="13" name="Content Placeholder 1">
+            <a:extLst>
+              <a:ext uri="{FF2B5EF4-FFF2-40B4-BE49-F238E27FC236}">
+                <a16:creationId xmlns:a16="http://schemas.microsoft.com/office/drawing/2014/main" id="{1B382C33-91C0-8349-9B35-6FB5DFF763EE}"/>
+              </a:ext>
+            </a:extLst>
+          </p:cNvPr>
+          <p:cNvSpPr txBox="1">
+            <a:spLocks/>
+          </p:cNvSpPr>
+          <p:nvPr/>
+        </p:nvSpPr>
+        <p:spPr>
+          <a:xfrm>
+            <a:off x="780535" y="4777297"/>
+            <a:ext cx="10515600" cy="318877"/>
+          </a:xfrm>
+          <a:prstGeom prst="rect">
+            <a:avLst/>
+          </a:prstGeom>
+        </p:spPr>
+        <p:txBody>
+          <a:bodyPr vert="horz" lIns="91440" tIns="45720" rIns="91440" bIns="45720" rtlCol="0">
+            <a:normAutofit fontScale="70000" lnSpcReduction="20000"/>
+          </a:bodyPr>
+          <a:lstStyle>
+            <a:lvl1pPr marL="228600" indent="-228600" algn="l" defTabSz="914400" rtl="0" eaLnBrk="1" latinLnBrk="0" hangingPunct="1">
+              <a:lnSpc>
+                <a:spcPct val="90000"/>
+              </a:lnSpc>
+              <a:spcBef>
+                <a:spcPts val="1000"/>
+              </a:spcBef>
+              <a:buFont typeface="Arial" panose="020B0604020202020204" pitchFamily="34" charset="0"/>
+              <a:buChar char="•"/>
+              <a:defRPr sz="2800" kern="1200">
+                <a:solidFill>
+                  <a:schemeClr val="tx1"/>
+                </a:solidFill>
+                <a:latin typeface="+mn-lt"/>
+                <a:ea typeface="+mn-ea"/>
+                <a:cs typeface="+mn-cs"/>
+              </a:defRPr>
+            </a:lvl1pPr>
+            <a:lvl2pPr marL="685800" indent="-228600" algn="l" defTabSz="914400" rtl="0" eaLnBrk="1" latinLnBrk="0" hangingPunct="1">
+              <a:lnSpc>
+                <a:spcPct val="90000"/>
+              </a:lnSpc>
+              <a:spcBef>
+                <a:spcPts val="500"/>
+              </a:spcBef>
+              <a:buFont typeface="Arial" panose="020B0604020202020204" pitchFamily="34" charset="0"/>
+              <a:buChar char="•"/>
+              <a:defRPr sz="2400" kern="1200">
+                <a:solidFill>
+                  <a:schemeClr val="tx1"/>
+                </a:solidFill>
+                <a:latin typeface="+mn-lt"/>
+                <a:ea typeface="+mn-ea"/>
+                <a:cs typeface="+mn-cs"/>
+              </a:defRPr>
+            </a:lvl2pPr>
+            <a:lvl3pPr marL="1143000" indent="-228600" algn="l" defTabSz="914400" rtl="0" eaLnBrk="1" latinLnBrk="0" hangingPunct="1">
+              <a:lnSpc>
+                <a:spcPct val="90000"/>
+              </a:lnSpc>
+              <a:spcBef>
+                <a:spcPts val="500"/>
+              </a:spcBef>
+              <a:buFont typeface="Arial" panose="020B0604020202020204" pitchFamily="34" charset="0"/>
+              <a:buChar char="•"/>
+              <a:defRPr sz="2000" kern="1200">
+                <a:solidFill>
+                  <a:schemeClr val="tx1"/>
+                </a:solidFill>
+                <a:latin typeface="+mn-lt"/>
+                <a:ea typeface="+mn-ea"/>
+                <a:cs typeface="+mn-cs"/>
+              </a:defRPr>
+            </a:lvl3pPr>
+            <a:lvl4pPr marL="1600200" indent="-228600" algn="l" defTabSz="914400" rtl="0" eaLnBrk="1" latinLnBrk="0" hangingPunct="1">
+              <a:lnSpc>
+                <a:spcPct val="90000"/>
+              </a:lnSpc>
+              <a:spcBef>
+                <a:spcPts val="500"/>
+              </a:spcBef>
+              <a:buFont typeface="Arial" panose="020B0604020202020204" pitchFamily="34" charset="0"/>
+              <a:buChar char="•"/>
+              <a:defRPr sz="1800" kern="1200">
+                <a:solidFill>
+                  <a:schemeClr val="tx1"/>
+                </a:solidFill>
+                <a:latin typeface="+mn-lt"/>
+                <a:ea typeface="+mn-ea"/>
+                <a:cs typeface="+mn-cs"/>
+              </a:defRPr>
+            </a:lvl4pPr>
+            <a:lvl5pPr marL="2057400" indent="-228600" algn="l" defTabSz="914400" rtl="0" eaLnBrk="1" latinLnBrk="0" hangingPunct="1">
+              <a:lnSpc>
+                <a:spcPct val="90000"/>
+              </a:lnSpc>
+              <a:spcBef>
+                <a:spcPts val="500"/>
+              </a:spcBef>
+              <a:buFont typeface="Arial" panose="020B0604020202020204" pitchFamily="34" charset="0"/>
+              <a:buChar char="•"/>
+              <a:defRPr sz="1800" kern="1200">
+                <a:solidFill>
+                  <a:schemeClr val="tx1"/>
+                </a:solidFill>
+                <a:latin typeface="+mn-lt"/>
+                <a:ea typeface="+mn-ea"/>
+                <a:cs typeface="+mn-cs"/>
+              </a:defRPr>
+            </a:lvl5pPr>
+            <a:lvl6pPr marL="2514600" indent="-228600" algn="l" defTabSz="914400" rtl="0" eaLnBrk="1" latinLnBrk="0" hangingPunct="1">
+              <a:lnSpc>
+                <a:spcPct val="90000"/>
+              </a:lnSpc>
+              <a:spcBef>
+                <a:spcPts val="500"/>
+              </a:spcBef>
+              <a:buFont typeface="Arial" panose="020B0604020202020204" pitchFamily="34" charset="0"/>
+              <a:buChar char="•"/>
+              <a:defRPr sz="1800" kern="1200">
+                <a:solidFill>
+                  <a:schemeClr val="tx1"/>
+                </a:solidFill>
+                <a:latin typeface="+mn-lt"/>
+                <a:ea typeface="+mn-ea"/>
+                <a:cs typeface="+mn-cs"/>
+              </a:defRPr>
+            </a:lvl6pPr>
+            <a:lvl7pPr marL="2971800" indent="-228600" algn="l" defTabSz="914400" rtl="0" eaLnBrk="1" latinLnBrk="0" hangingPunct="1">
+              <a:lnSpc>
+                <a:spcPct val="90000"/>
+              </a:lnSpc>
+              <a:spcBef>
+                <a:spcPts val="500"/>
+              </a:spcBef>
+              <a:buFont typeface="Arial" panose="020B0604020202020204" pitchFamily="34" charset="0"/>
+              <a:buChar char="•"/>
+              <a:defRPr sz="1800" kern="1200">
+                <a:solidFill>
+                  <a:schemeClr val="tx1"/>
+                </a:solidFill>
+                <a:latin typeface="+mn-lt"/>
+                <a:ea typeface="+mn-ea"/>
+                <a:cs typeface="+mn-cs"/>
+              </a:defRPr>
+            </a:lvl7pPr>
+            <a:lvl8pPr marL="3429000" indent="-228600" algn="l" defTabSz="914400" rtl="0" eaLnBrk="1" latinLnBrk="0" hangingPunct="1">
+              <a:lnSpc>
+                <a:spcPct val="90000"/>
+              </a:lnSpc>
+              <a:spcBef>
+                <a:spcPts val="500"/>
+              </a:spcBef>
+              <a:buFont typeface="Arial" panose="020B0604020202020204" pitchFamily="34" charset="0"/>
+              <a:buChar char="•"/>
+              <a:defRPr sz="1800" kern="1200">
+                <a:solidFill>
+                  <a:schemeClr val="tx1"/>
+                </a:solidFill>
+                <a:latin typeface="+mn-lt"/>
+                <a:ea typeface="+mn-ea"/>
+                <a:cs typeface="+mn-cs"/>
+              </a:defRPr>
+            </a:lvl8pPr>
+            <a:lvl9pPr marL="3886200" indent="-228600" algn="l" defTabSz="914400" rtl="0" eaLnBrk="1" latinLnBrk="0" hangingPunct="1">
+              <a:lnSpc>
+                <a:spcPct val="90000"/>
+              </a:lnSpc>
+              <a:spcBef>
+                <a:spcPts val="500"/>
+              </a:spcBef>
+              <a:buFont typeface="Arial" panose="020B0604020202020204" pitchFamily="34" charset="0"/>
+              <a:buChar char="•"/>
+              <a:defRPr sz="1800" kern="1200">
+                <a:solidFill>
+                  <a:schemeClr val="tx1"/>
+                </a:solidFill>
+                <a:latin typeface="+mn-lt"/>
+                <a:ea typeface="+mn-ea"/>
+                <a:cs typeface="+mn-cs"/>
+              </a:defRPr>
+            </a:lvl9pPr>
+          </a:lstStyle>
+          <a:p>
+            <a:pPr marL="0" indent="0">
+              <a:buFont typeface="Arial" panose="020B0604020202020204" pitchFamily="34" charset="0"/>
+              <a:buNone/>
+            </a:pPr>
+            <a:r>
+              <a:rPr lang="en-US" dirty="0"/>
+              <a:t>Make Predictions</a:t>
+            </a:r>
+          </a:p>
+        </p:txBody>
+      </p:sp>
+      <p:sp>
+        <p:nvSpPr>
+          <p:cNvPr id="17" name="TextBox 16">
+            <a:extLst>
+              <a:ext uri="{FF2B5EF4-FFF2-40B4-BE49-F238E27FC236}">
+                <a16:creationId xmlns:a16="http://schemas.microsoft.com/office/drawing/2014/main" id="{4E68AEC2-F7AB-068A-1964-7A91D12FE50D}"/>
+              </a:ext>
+            </a:extLst>
+          </p:cNvPr>
+          <p:cNvSpPr txBox="1"/>
+          <p:nvPr/>
+        </p:nvSpPr>
+        <p:spPr>
+          <a:xfrm>
+            <a:off x="780535" y="4085083"/>
+            <a:ext cx="6094970" cy="369332"/>
+          </a:xfrm>
+          <a:prstGeom prst="rect">
+            <a:avLst/>
+          </a:prstGeom>
+          <a:noFill/>
+        </p:spPr>
+        <p:txBody>
+          <a:bodyPr wrap="square">
+            <a:spAutoFit/>
+          </a:bodyPr>
+          <a:lstStyle/>
+          <a:p>
+            <a:r>
+              <a:rPr lang="en-US" b="0" i="0" dirty="0">
+                <a:solidFill>
+                  <a:srgbClr val="1F1F1F"/>
+                </a:solidFill>
+                <a:effectLst/>
+                <a:latin typeface="Courier New" panose="02070309020205020404" pitchFamily="49" charset="0"/>
+              </a:rPr>
+              <a:t>[362.33639889] 15802.319376714753</a:t>
+            </a:r>
+            <a:endParaRPr lang="en-US" dirty="0"/>
+          </a:p>
+        </p:txBody>
+      </p:sp>
+      <p:sp>
+        <p:nvSpPr>
+          <p:cNvPr id="19" name="TextBox 18">
+            <a:extLst>
+              <a:ext uri="{FF2B5EF4-FFF2-40B4-BE49-F238E27FC236}">
+                <a16:creationId xmlns:a16="http://schemas.microsoft.com/office/drawing/2014/main" id="{218A98D4-6287-749F-445A-D0B620AB7F89}"/>
+              </a:ext>
+            </a:extLst>
+          </p:cNvPr>
+          <p:cNvSpPr txBox="1"/>
+          <p:nvPr/>
+        </p:nvSpPr>
+        <p:spPr>
+          <a:xfrm>
+            <a:off x="780535" y="5275715"/>
+            <a:ext cx="9592962" cy="475771"/>
+          </a:xfrm>
+          <a:prstGeom prst="rect">
+            <a:avLst/>
+          </a:prstGeom>
+          <a:noFill/>
+        </p:spPr>
+        <p:txBody>
+          <a:bodyPr wrap="square">
+            <a:spAutoFit/>
+          </a:bodyPr>
+          <a:lstStyle/>
+          <a:p>
+            <a:pPr>
+              <a:lnSpc>
+                <a:spcPts val="1425"/>
+              </a:lnSpc>
+              <a:buNone/>
+            </a:pPr>
+            <a:r>
+              <a:rPr lang="en-US" b="1" noProof="1">
+                <a:solidFill>
+                  <a:srgbClr val="008000"/>
+                </a:solidFill>
+                <a:effectLst/>
+                <a:latin typeface="Courier New" panose="02070309020205020404" pitchFamily="49" charset="0"/>
+              </a:rPr>
+              <a:t># Make predictions using the training dataset</a:t>
+            </a:r>
+            <a:endParaRPr lang="en-US" b="1" noProof="1">
+              <a:solidFill>
+                <a:srgbClr val="000000"/>
+              </a:solidFill>
+              <a:effectLst/>
+              <a:latin typeface="Courier New" panose="02070309020205020404" pitchFamily="49" charset="0"/>
+            </a:endParaRPr>
+          </a:p>
+          <a:p>
+            <a:pPr>
+              <a:lnSpc>
+                <a:spcPts val="1425"/>
+              </a:lnSpc>
+            </a:pPr>
+            <a:r>
+              <a:rPr lang="en-US" b="1" noProof="1">
+                <a:solidFill>
+                  <a:srgbClr val="000000"/>
+                </a:solidFill>
+                <a:effectLst/>
+                <a:latin typeface="Courier New" panose="02070309020205020404" pitchFamily="49" charset="0"/>
+              </a:rPr>
+              <a:t>train_predictions= regressor.predict(x_train)</a:t>
+            </a:r>
+          </a:p>
+        </p:txBody>
+      </p:sp>
+    </p:spTree>
+    <p:extLst>
+      <p:ext uri="{BB962C8B-B14F-4D97-AF65-F5344CB8AC3E}">
+        <p14:creationId xmlns:p14="http://schemas.microsoft.com/office/powerpoint/2010/main" val="165576399"/>
+      </p:ext>
+    </p:extLst>
+  </p:cSld>
+  <p:clrMapOvr>
+    <a:masterClrMapping/>
+  </p:clrMapOvr>
+</p:sld>
+</file>
+
+<file path=ppt/slides/slide19.xml><?xml version="1.0" encoding="utf-8"?>
+<p:sld xmlns:a="http://schemas.openxmlformats.org/drawingml/2006/main" xmlns:r="http://schemas.openxmlformats.org/officeDocument/2006/relationships" xmlns:p="http://schemas.openxmlformats.org/presentationml/2006/main">
+  <p:cSld>
+    <p:spTree>
+      <p:nvGrpSpPr>
+        <p:cNvPr id="1" name=""/>
+        <p:cNvGrpSpPr/>
+        <p:nvPr/>
+      </p:nvGrpSpPr>
+      <p:grpSpPr>
+        <a:xfrm>
+          <a:off x="0" y="0"/>
+          <a:ext cx="0" cy="0"/>
+          <a:chOff x="0" y="0"/>
+          <a:chExt cx="0" cy="0"/>
+        </a:xfrm>
+      </p:grpSpPr>
+      <p:sp>
+        <p:nvSpPr>
+          <p:cNvPr id="3" name="Title 2">
+            <a:extLst>
+              <a:ext uri="{FF2B5EF4-FFF2-40B4-BE49-F238E27FC236}">
+                <a16:creationId xmlns:a16="http://schemas.microsoft.com/office/drawing/2014/main" id="{62185649-C82E-A3A1-050F-9B8CB93988AB}"/>
+              </a:ext>
+            </a:extLst>
+          </p:cNvPr>
+          <p:cNvSpPr>
+            <a:spLocks noGrp="1"/>
+          </p:cNvSpPr>
+          <p:nvPr>
+            <p:ph type="title"/>
+          </p:nvPr>
+        </p:nvSpPr>
+        <p:spPr/>
+        <p:txBody>
+          <a:bodyPr/>
+          <a:lstStyle/>
+          <a:p>
+            <a:r>
+              <a:rPr lang="en-US" dirty="0"/>
+              <a:t>Show Prediction Plot</a:t>
+            </a:r>
+          </a:p>
+        </p:txBody>
+      </p:sp>
+      <p:sp>
+        <p:nvSpPr>
+          <p:cNvPr id="5" name="TextBox 4">
+            <a:extLst>
+              <a:ext uri="{FF2B5EF4-FFF2-40B4-BE49-F238E27FC236}">
+                <a16:creationId xmlns:a16="http://schemas.microsoft.com/office/drawing/2014/main" id="{183324EB-912D-14B6-940B-67A9A7B6C6C0}"/>
+              </a:ext>
+            </a:extLst>
+          </p:cNvPr>
+          <p:cNvSpPr txBox="1"/>
+          <p:nvPr/>
+        </p:nvSpPr>
+        <p:spPr>
+          <a:xfrm>
+            <a:off x="838200" y="1758458"/>
+            <a:ext cx="9943070" cy="1912062"/>
+          </a:xfrm>
+          <a:prstGeom prst="rect">
+            <a:avLst/>
+          </a:prstGeom>
+          <a:noFill/>
+        </p:spPr>
+        <p:txBody>
+          <a:bodyPr wrap="square">
+            <a:spAutoFit/>
+          </a:bodyPr>
+          <a:lstStyle/>
+          <a:p>
+            <a:pPr>
+              <a:lnSpc>
+                <a:spcPts val="1425"/>
+              </a:lnSpc>
+              <a:buNone/>
+            </a:pPr>
+            <a:r>
+              <a:rPr lang="en-US" b="1" noProof="1">
+                <a:solidFill>
+                  <a:srgbClr val="008000"/>
+                </a:solidFill>
+                <a:effectLst/>
+                <a:latin typeface="Courier New" panose="02070309020205020404" pitchFamily="49" charset="0"/>
+              </a:rPr>
+              <a:t># plot the training data with the original dependent variable</a:t>
+            </a:r>
+            <a:endParaRPr lang="en-US" b="1" noProof="1">
+              <a:solidFill>
+                <a:srgbClr val="000000"/>
+              </a:solidFill>
+              <a:effectLst/>
+              <a:latin typeface="Courier New" panose="02070309020205020404" pitchFamily="49" charset="0"/>
+            </a:endParaRPr>
+          </a:p>
+          <a:p>
+            <a:pPr>
+              <a:lnSpc>
+                <a:spcPts val="1425"/>
+              </a:lnSpc>
+              <a:buNone/>
+            </a:pPr>
+            <a:r>
+              <a:rPr lang="en-US" b="1" noProof="1">
+                <a:solidFill>
+                  <a:srgbClr val="000000"/>
+                </a:solidFill>
+                <a:effectLst/>
+                <a:latin typeface="Courier New" panose="02070309020205020404" pitchFamily="49" charset="0"/>
+              </a:rPr>
+              <a:t>plt.scatter(x_train, y_train, color=</a:t>
+            </a:r>
+            <a:r>
+              <a:rPr lang="en-US" b="1" noProof="1">
+                <a:solidFill>
+                  <a:srgbClr val="A31515"/>
+                </a:solidFill>
+                <a:effectLst/>
+                <a:latin typeface="Courier New" panose="02070309020205020404" pitchFamily="49" charset="0"/>
+              </a:rPr>
+              <a:t>"green"</a:t>
+            </a:r>
+            <a:r>
+              <a:rPr lang="en-US" b="1" noProof="1">
+                <a:solidFill>
+                  <a:srgbClr val="000000"/>
+                </a:solidFill>
+                <a:effectLst/>
+                <a:latin typeface="Courier New" panose="02070309020205020404" pitchFamily="49" charset="0"/>
+              </a:rPr>
+              <a:t>)  </a:t>
+            </a:r>
+          </a:p>
+          <a:p>
+            <a:pPr>
+              <a:lnSpc>
+                <a:spcPts val="1425"/>
+              </a:lnSpc>
+              <a:buNone/>
+            </a:pPr>
+            <a:br>
+              <a:rPr lang="en-US" b="1" noProof="1">
+                <a:solidFill>
+                  <a:srgbClr val="000000"/>
+                </a:solidFill>
+                <a:effectLst/>
+                <a:latin typeface="Courier New" panose="02070309020205020404" pitchFamily="49" charset="0"/>
+              </a:rPr>
+            </a:br>
+            <a:r>
+              <a:rPr lang="en-US" b="1" noProof="1">
+                <a:solidFill>
+                  <a:srgbClr val="008000"/>
+                </a:solidFill>
+                <a:effectLst/>
+                <a:latin typeface="Courier New" panose="02070309020205020404" pitchFamily="49" charset="0"/>
+              </a:rPr>
+              <a:t># plot the training data with the predictions</a:t>
+            </a:r>
+            <a:endParaRPr lang="en-US" b="1" noProof="1">
+              <a:solidFill>
+                <a:srgbClr val="000000"/>
+              </a:solidFill>
+              <a:effectLst/>
+              <a:latin typeface="Courier New" panose="02070309020205020404" pitchFamily="49" charset="0"/>
+            </a:endParaRPr>
+          </a:p>
+          <a:p>
+            <a:pPr>
+              <a:lnSpc>
+                <a:spcPts val="1425"/>
+              </a:lnSpc>
+              <a:buNone/>
+            </a:pPr>
+            <a:r>
+              <a:rPr lang="en-US" b="1" noProof="1">
+                <a:solidFill>
+                  <a:srgbClr val="000000"/>
+                </a:solidFill>
+                <a:effectLst/>
+                <a:latin typeface="Courier New" panose="02070309020205020404" pitchFamily="49" charset="0"/>
+              </a:rPr>
+              <a:t>plt.plot(x_train, train_predictions, color=</a:t>
+            </a:r>
+            <a:r>
+              <a:rPr lang="en-US" b="1" noProof="1">
+                <a:solidFill>
+                  <a:srgbClr val="A31515"/>
+                </a:solidFill>
+                <a:effectLst/>
+                <a:latin typeface="Courier New" panose="02070309020205020404" pitchFamily="49" charset="0"/>
+              </a:rPr>
+              <a:t>"red"</a:t>
+            </a:r>
+            <a:r>
+              <a:rPr lang="en-US" b="1" noProof="1">
+                <a:solidFill>
+                  <a:srgbClr val="000000"/>
+                </a:solidFill>
+                <a:effectLst/>
+                <a:latin typeface="Courier New" panose="02070309020205020404" pitchFamily="49" charset="0"/>
+              </a:rPr>
+              <a:t>)    </a:t>
+            </a:r>
+          </a:p>
+          <a:p>
+            <a:pPr>
+              <a:lnSpc>
+                <a:spcPts val="1425"/>
+              </a:lnSpc>
+              <a:buNone/>
+            </a:pPr>
+            <a:br>
+              <a:rPr lang="en-US" b="1" noProof="1">
+                <a:solidFill>
+                  <a:srgbClr val="000000"/>
+                </a:solidFill>
+                <a:effectLst/>
+                <a:latin typeface="Courier New" panose="02070309020205020404" pitchFamily="49" charset="0"/>
+              </a:rPr>
+            </a:br>
+            <a:r>
+              <a:rPr lang="en-US" b="1" noProof="1">
+                <a:solidFill>
+                  <a:srgbClr val="000000"/>
+                </a:solidFill>
+                <a:effectLst/>
+                <a:latin typeface="Courier New" panose="02070309020205020404" pitchFamily="49" charset="0"/>
+              </a:rPr>
+              <a:t>plt.title(</a:t>
+            </a:r>
+            <a:r>
+              <a:rPr lang="en-US" b="1" noProof="1">
+                <a:solidFill>
+                  <a:srgbClr val="A31515"/>
+                </a:solidFill>
+                <a:effectLst/>
+                <a:latin typeface="Courier New" panose="02070309020205020404" pitchFamily="49" charset="0"/>
+              </a:rPr>
+              <a:t>"Size vs Price (Training Dataset)"</a:t>
+            </a:r>
+            <a:r>
+              <a:rPr lang="en-US" b="1" noProof="1">
+                <a:solidFill>
+                  <a:srgbClr val="000000"/>
+                </a:solidFill>
+                <a:effectLst/>
+                <a:latin typeface="Courier New" panose="02070309020205020404" pitchFamily="49" charset="0"/>
+              </a:rPr>
+              <a:t>)  </a:t>
+            </a:r>
+          </a:p>
+          <a:p>
+            <a:pPr>
+              <a:lnSpc>
+                <a:spcPts val="1425"/>
+              </a:lnSpc>
+              <a:buNone/>
+            </a:pPr>
+            <a:r>
+              <a:rPr lang="en-US" b="1" noProof="1">
+                <a:solidFill>
+                  <a:srgbClr val="000000"/>
+                </a:solidFill>
+                <a:effectLst/>
+                <a:latin typeface="Courier New" panose="02070309020205020404" pitchFamily="49" charset="0"/>
+              </a:rPr>
+              <a:t>plt.xlabel(</a:t>
+            </a:r>
+            <a:r>
+              <a:rPr lang="en-US" b="1" noProof="1">
+                <a:solidFill>
+                  <a:srgbClr val="A31515"/>
+                </a:solidFill>
+                <a:effectLst/>
+                <a:latin typeface="Courier New" panose="02070309020205020404" pitchFamily="49" charset="0"/>
+              </a:rPr>
+              <a:t>"Size in Square Meter"</a:t>
+            </a:r>
+            <a:r>
+              <a:rPr lang="en-US" b="1" noProof="1">
+                <a:solidFill>
+                  <a:srgbClr val="000000"/>
+                </a:solidFill>
+                <a:effectLst/>
+                <a:latin typeface="Courier New" panose="02070309020205020404" pitchFamily="49" charset="0"/>
+              </a:rPr>
+              <a:t>)  </a:t>
+            </a:r>
+          </a:p>
+          <a:p>
+            <a:pPr>
+              <a:lnSpc>
+                <a:spcPts val="1425"/>
+              </a:lnSpc>
+              <a:buNone/>
+            </a:pPr>
+            <a:r>
+              <a:rPr lang="en-US" b="1" noProof="1">
+                <a:solidFill>
+                  <a:srgbClr val="000000"/>
+                </a:solidFill>
+                <a:effectLst/>
+                <a:latin typeface="Courier New" panose="02070309020205020404" pitchFamily="49" charset="0"/>
+              </a:rPr>
+              <a:t>plt.ylabel(</a:t>
+            </a:r>
+            <a:r>
+              <a:rPr lang="en-US" b="1" noProof="1">
+                <a:solidFill>
+                  <a:srgbClr val="A31515"/>
+                </a:solidFill>
+                <a:effectLst/>
+                <a:latin typeface="Courier New" panose="02070309020205020404" pitchFamily="49" charset="0"/>
+              </a:rPr>
+              <a:t>"Appartment Price"</a:t>
+            </a:r>
+            <a:r>
+              <a:rPr lang="en-US" b="1" noProof="1">
+                <a:solidFill>
+                  <a:srgbClr val="000000"/>
+                </a:solidFill>
+                <a:effectLst/>
+                <a:latin typeface="Courier New" panose="02070309020205020404" pitchFamily="49" charset="0"/>
+              </a:rPr>
+              <a:t>)  </a:t>
+            </a:r>
+          </a:p>
+          <a:p>
+            <a:pPr>
+              <a:lnSpc>
+                <a:spcPts val="1425"/>
+              </a:lnSpc>
+            </a:pPr>
+            <a:r>
+              <a:rPr lang="en-US" b="1" noProof="1">
+                <a:solidFill>
+                  <a:srgbClr val="000000"/>
+                </a:solidFill>
+                <a:effectLst/>
+                <a:latin typeface="Courier New" panose="02070309020205020404" pitchFamily="49" charset="0"/>
+              </a:rPr>
+              <a:t>plt.show()</a:t>
+            </a:r>
+          </a:p>
+        </p:txBody>
+      </p:sp>
+      <p:pic>
+        <p:nvPicPr>
+          <p:cNvPr id="7" name="Picture 6">
+            <a:extLst>
+              <a:ext uri="{FF2B5EF4-FFF2-40B4-BE49-F238E27FC236}">
+                <a16:creationId xmlns:a16="http://schemas.microsoft.com/office/drawing/2014/main" id="{F3BC5B92-84C6-A71A-B9FF-22899DB146AE}"/>
+              </a:ext>
+            </a:extLst>
+          </p:cNvPr>
+          <p:cNvPicPr>
+            <a:picLocks noChangeAspect="1"/>
+          </p:cNvPicPr>
+          <p:nvPr/>
+        </p:nvPicPr>
+        <p:blipFill>
+          <a:blip r:embed="rId2"/>
+          <a:stretch>
+            <a:fillRect/>
+          </a:stretch>
+        </p:blipFill>
+        <p:spPr>
+          <a:xfrm>
+            <a:off x="7259760" y="3156210"/>
+            <a:ext cx="4094040" cy="3003634"/>
+          </a:xfrm>
+          <a:prstGeom prst="rect">
+            <a:avLst/>
+          </a:prstGeom>
+        </p:spPr>
+      </p:pic>
+      <p:sp>
+        <p:nvSpPr>
+          <p:cNvPr id="9" name="TextBox 8">
+            <a:extLst>
+              <a:ext uri="{FF2B5EF4-FFF2-40B4-BE49-F238E27FC236}">
+                <a16:creationId xmlns:a16="http://schemas.microsoft.com/office/drawing/2014/main" id="{B0D2EF0C-E643-3DDB-E0FE-3D4594086E87}"/>
+              </a:ext>
+            </a:extLst>
+          </p:cNvPr>
+          <p:cNvSpPr txBox="1"/>
+          <p:nvPr/>
+        </p:nvSpPr>
+        <p:spPr>
+          <a:xfrm>
+            <a:off x="837170" y="4795415"/>
+            <a:ext cx="6094970" cy="655308"/>
+          </a:xfrm>
+          <a:prstGeom prst="rect">
+            <a:avLst/>
+          </a:prstGeom>
+          <a:noFill/>
+        </p:spPr>
+        <p:txBody>
+          <a:bodyPr wrap="square">
+            <a:spAutoFit/>
+          </a:bodyPr>
+          <a:lstStyle/>
+          <a:p>
+            <a:pPr>
+              <a:lnSpc>
+                <a:spcPts val="1425"/>
+              </a:lnSpc>
+              <a:buNone/>
+            </a:pPr>
+            <a:r>
+              <a:rPr lang="fr-FR" b="1" dirty="0">
+                <a:solidFill>
+                  <a:srgbClr val="000000"/>
+                </a:solidFill>
+                <a:effectLst/>
+                <a:latin typeface="Courier New" panose="02070309020205020404" pitchFamily="49" charset="0"/>
+              </a:rPr>
+              <a:t>r2 = r2_score(</a:t>
+            </a:r>
+            <a:r>
+              <a:rPr lang="fr-FR" b="1" dirty="0" err="1">
+                <a:solidFill>
+                  <a:srgbClr val="000000"/>
+                </a:solidFill>
+                <a:effectLst/>
+                <a:latin typeface="Courier New" panose="02070309020205020404" pitchFamily="49" charset="0"/>
+              </a:rPr>
+              <a:t>y_train</a:t>
+            </a:r>
+            <a:r>
+              <a:rPr lang="fr-FR" b="1" dirty="0">
+                <a:solidFill>
+                  <a:srgbClr val="000000"/>
+                </a:solidFill>
+                <a:effectLst/>
+                <a:latin typeface="Courier New" panose="02070309020205020404" pitchFamily="49" charset="0"/>
+              </a:rPr>
+              <a:t>, </a:t>
+            </a:r>
+            <a:r>
+              <a:rPr lang="fr-FR" b="1" dirty="0" err="1">
+                <a:solidFill>
+                  <a:srgbClr val="000000"/>
+                </a:solidFill>
+                <a:effectLst/>
+                <a:latin typeface="Courier New" panose="02070309020205020404" pitchFamily="49" charset="0"/>
+              </a:rPr>
+              <a:t>train_predictions</a:t>
+            </a:r>
+            <a:r>
+              <a:rPr lang="fr-FR" b="1" dirty="0">
+                <a:solidFill>
+                  <a:srgbClr val="000000"/>
+                </a:solidFill>
+                <a:effectLst/>
+                <a:latin typeface="Courier New" panose="02070309020205020404" pitchFamily="49" charset="0"/>
+              </a:rPr>
+              <a:t>)</a:t>
+            </a:r>
+          </a:p>
+          <a:p>
+            <a:pPr>
+              <a:lnSpc>
+                <a:spcPts val="1425"/>
+              </a:lnSpc>
+              <a:buNone/>
+            </a:pPr>
+            <a:r>
+              <a:rPr lang="fr-FR" b="1" dirty="0">
+                <a:solidFill>
+                  <a:srgbClr val="000000"/>
+                </a:solidFill>
+                <a:effectLst/>
+                <a:latin typeface="Courier New" panose="02070309020205020404" pitchFamily="49" charset="0"/>
+              </a:rPr>
+              <a:t>r2 = </a:t>
+            </a:r>
+            <a:r>
+              <a:rPr lang="fr-FR" b="1" dirty="0">
+                <a:solidFill>
+                  <a:srgbClr val="6A5221"/>
+                </a:solidFill>
+                <a:effectLst/>
+                <a:latin typeface="Courier New" panose="02070309020205020404" pitchFamily="49" charset="0"/>
+              </a:rPr>
+              <a:t>round</a:t>
+            </a:r>
+            <a:r>
+              <a:rPr lang="fr-FR" b="1" dirty="0">
+                <a:solidFill>
+                  <a:srgbClr val="000000"/>
+                </a:solidFill>
+                <a:effectLst/>
+                <a:latin typeface="Courier New" panose="02070309020205020404" pitchFamily="49" charset="0"/>
+              </a:rPr>
+              <a:t>(r2,</a:t>
+            </a:r>
+            <a:r>
+              <a:rPr lang="fr-FR" b="1" dirty="0">
+                <a:solidFill>
+                  <a:srgbClr val="116644"/>
+                </a:solidFill>
+                <a:effectLst/>
+                <a:latin typeface="Courier New" panose="02070309020205020404" pitchFamily="49" charset="0"/>
+              </a:rPr>
+              <a:t>2</a:t>
+            </a:r>
+            <a:r>
+              <a:rPr lang="fr-FR" b="1" dirty="0">
+                <a:solidFill>
+                  <a:srgbClr val="000000"/>
+                </a:solidFill>
+                <a:effectLst/>
+                <a:latin typeface="Courier New" panose="02070309020205020404" pitchFamily="49" charset="0"/>
+              </a:rPr>
+              <a:t>)</a:t>
+            </a:r>
+          </a:p>
+          <a:p>
+            <a:pPr>
+              <a:lnSpc>
+                <a:spcPts val="1425"/>
+              </a:lnSpc>
+            </a:pPr>
+            <a:r>
+              <a:rPr lang="fr-FR" b="1" dirty="0" err="1">
+                <a:solidFill>
+                  <a:srgbClr val="6A5221"/>
+                </a:solidFill>
+                <a:effectLst/>
+                <a:latin typeface="Courier New" panose="02070309020205020404" pitchFamily="49" charset="0"/>
+              </a:rPr>
+              <a:t>print</a:t>
+            </a:r>
+            <a:r>
+              <a:rPr lang="fr-FR" b="1" dirty="0">
+                <a:solidFill>
+                  <a:srgbClr val="000000"/>
+                </a:solidFill>
+                <a:effectLst/>
+                <a:latin typeface="Courier New" panose="02070309020205020404" pitchFamily="49" charset="0"/>
+              </a:rPr>
+              <a:t>(</a:t>
+            </a:r>
+            <a:r>
+              <a:rPr lang="fr-FR" b="1" dirty="0">
+                <a:solidFill>
+                  <a:srgbClr val="A31515"/>
+                </a:solidFill>
+                <a:effectLst/>
+                <a:latin typeface="Courier New" panose="02070309020205020404" pitchFamily="49" charset="0"/>
+              </a:rPr>
+              <a:t>"r2 score: "</a:t>
+            </a:r>
+            <a:r>
+              <a:rPr lang="fr-FR" b="1" dirty="0">
+                <a:solidFill>
+                  <a:srgbClr val="000000"/>
+                </a:solidFill>
+                <a:effectLst/>
+                <a:latin typeface="Courier New" panose="02070309020205020404" pitchFamily="49" charset="0"/>
+              </a:rPr>
+              <a:t>, r2)</a:t>
+            </a:r>
+          </a:p>
+        </p:txBody>
+      </p:sp>
+      <p:sp>
+        <p:nvSpPr>
+          <p:cNvPr id="10" name="Content Placeholder 1">
+            <a:extLst>
+              <a:ext uri="{FF2B5EF4-FFF2-40B4-BE49-F238E27FC236}">
+                <a16:creationId xmlns:a16="http://schemas.microsoft.com/office/drawing/2014/main" id="{53E579A2-15AC-99B0-3420-360A8FB1DA23}"/>
+              </a:ext>
+            </a:extLst>
+          </p:cNvPr>
+          <p:cNvSpPr>
+            <a:spLocks noGrp="1"/>
+          </p:cNvSpPr>
+          <p:nvPr>
+            <p:ph idx="1"/>
+          </p:nvPr>
+        </p:nvSpPr>
+        <p:spPr>
+          <a:xfrm>
+            <a:off x="837170" y="4338778"/>
+            <a:ext cx="5741773" cy="351147"/>
+          </a:xfrm>
+        </p:spPr>
+        <p:txBody>
+          <a:bodyPr>
+            <a:normAutofit lnSpcReduction="10000"/>
+          </a:bodyPr>
+          <a:lstStyle/>
+          <a:p>
+            <a:pPr marL="0" indent="0">
+              <a:buNone/>
+            </a:pPr>
+            <a:r>
+              <a:rPr lang="en-US" sz="2000" dirty="0"/>
+              <a:t>Evaluate the model using R-Squared metric:</a:t>
+            </a:r>
+          </a:p>
+        </p:txBody>
+      </p:sp>
+      <p:sp>
+        <p:nvSpPr>
+          <p:cNvPr id="11" name="Rectangle 1">
+            <a:extLst>
+              <a:ext uri="{FF2B5EF4-FFF2-40B4-BE49-F238E27FC236}">
+                <a16:creationId xmlns:a16="http://schemas.microsoft.com/office/drawing/2014/main" id="{4A070593-0CE8-45D5-DF62-3F13FC7319C1}"/>
+              </a:ext>
+            </a:extLst>
+          </p:cNvPr>
+          <p:cNvSpPr>
+            <a:spLocks noChangeArrowheads="1"/>
+          </p:cNvSpPr>
+          <p:nvPr/>
+        </p:nvSpPr>
+        <p:spPr bwMode="auto">
+          <a:xfrm>
+            <a:off x="837170" y="6165968"/>
+            <a:ext cx="2036135" cy="246221"/>
+          </a:xfrm>
+          <a:prstGeom prst="rect">
+            <a:avLst/>
+          </a:prstGeom>
+          <a:noFill/>
+          <a:ln>
+            <a:noFill/>
+          </a:ln>
+          <a:effectLst/>
+          <a:extLst>
+            <a:ext uri="{909E8E84-426E-40DD-AFC4-6F175D3DCCD1}">
+              <a14:hiddenFill xmlns:a14="http://schemas.microsoft.com/office/drawing/2010/main">
+                <a:solidFill>
+                  <a:schemeClr val="accent1"/>
+                </a:solidFill>
+              </a14:hiddenFill>
+            </a:ext>
+            <a:ext uri="{91240B29-F687-4F45-9708-019B960494DF}">
+              <a14:hiddenLine xmlns:a14="http://schemas.microsoft.com/office/drawing/2010/main" w="9525">
+                <a:solidFill>
+                  <a:schemeClr val="tx1"/>
+                </a:solidFill>
+                <a:miter lim="800000"/>
+                <a:headEnd/>
+                <a:tailEnd/>
+              </a14:hiddenLine>
+            </a:ext>
+            <a:ext uri="{AF507438-7753-43E0-B8FC-AC1667EBCBE1}">
+              <a14:hiddenEffects xmlns:a14="http://schemas.microsoft.com/office/drawing/2010/main">
+                <a:effectLst>
+                  <a:outerShdw dist="35921" dir="2700000" algn="ctr" rotWithShape="0">
+                    <a:schemeClr val="bg2"/>
+                  </a:outerShdw>
+                </a:effectLst>
+              </a14:hiddenEffects>
+            </a:ext>
+          </a:extLst>
+        </p:spPr>
+        <p:txBody>
+          <a:bodyPr vert="horz" wrap="none" lIns="91440" tIns="0" rIns="91440" bIns="0" numCol="1" anchor="ctr" anchorCtr="0" compatLnSpc="1">
+            <a:prstTxWarp prst="textNoShape">
+              <a:avLst/>
+            </a:prstTxWarp>
+            <a:spAutoFit/>
+          </a:bodyPr>
+          <a:lstStyle>
+            <a:lvl1pPr eaLnBrk="0" fontAlgn="base" hangingPunct="0">
+              <a:spcBef>
+                <a:spcPct val="0"/>
+              </a:spcBef>
+              <a:spcAft>
+                <a:spcPct val="0"/>
+              </a:spcAft>
+              <a:defRPr>
+                <a:solidFill>
+                  <a:schemeClr val="tx1"/>
+                </a:solidFill>
+                <a:latin typeface="Arial" panose="020B0604020202020204" pitchFamily="34" charset="0"/>
+              </a:defRPr>
+            </a:lvl1pPr>
+            <a:lvl2pPr eaLnBrk="0" fontAlgn="base" hangingPunct="0">
+              <a:spcBef>
+                <a:spcPct val="0"/>
+              </a:spcBef>
+              <a:spcAft>
+                <a:spcPct val="0"/>
+              </a:spcAft>
+              <a:defRPr>
+                <a:solidFill>
+                  <a:schemeClr val="tx1"/>
+                </a:solidFill>
+                <a:latin typeface="Arial" panose="020B0604020202020204" pitchFamily="34" charset="0"/>
+              </a:defRPr>
+            </a:lvl2pPr>
+            <a:lvl3pPr eaLnBrk="0" fontAlgn="base" hangingPunct="0">
+              <a:spcBef>
+                <a:spcPct val="0"/>
+              </a:spcBef>
+              <a:spcAft>
+                <a:spcPct val="0"/>
+              </a:spcAft>
+              <a:defRPr>
+                <a:solidFill>
+                  <a:schemeClr val="tx1"/>
+                </a:solidFill>
+                <a:latin typeface="Arial" panose="020B0604020202020204" pitchFamily="34" charset="0"/>
+              </a:defRPr>
+            </a:lvl3pPr>
+            <a:lvl4pPr eaLnBrk="0" fontAlgn="base" hangingPunct="0">
+              <a:spcBef>
+                <a:spcPct val="0"/>
+              </a:spcBef>
+              <a:spcAft>
+                <a:spcPct val="0"/>
+              </a:spcAft>
+              <a:defRPr>
+                <a:solidFill>
+                  <a:schemeClr val="tx1"/>
+                </a:solidFill>
+                <a:latin typeface="Arial" panose="020B0604020202020204" pitchFamily="34" charset="0"/>
+              </a:defRPr>
+            </a:lvl4pPr>
+            <a:lvl5pPr eaLnBrk="0" fontAlgn="base" hangingPunct="0">
+              <a:spcBef>
+                <a:spcPct val="0"/>
+              </a:spcBef>
+              <a:spcAft>
+                <a:spcPct val="0"/>
+              </a:spcAft>
+              <a:defRPr>
+                <a:solidFill>
+                  <a:schemeClr val="tx1"/>
+                </a:solidFill>
+                <a:latin typeface="Arial" panose="020B0604020202020204" pitchFamily="34" charset="0"/>
+              </a:defRPr>
+            </a:lvl5pPr>
+            <a:lvl6pPr eaLnBrk="0" fontAlgn="base" hangingPunct="0">
+              <a:spcBef>
+                <a:spcPct val="0"/>
+              </a:spcBef>
+              <a:spcAft>
+                <a:spcPct val="0"/>
+              </a:spcAft>
+              <a:defRPr>
+                <a:solidFill>
+                  <a:schemeClr val="tx1"/>
+                </a:solidFill>
+                <a:latin typeface="Arial" panose="020B0604020202020204" pitchFamily="34" charset="0"/>
+              </a:defRPr>
+            </a:lvl6pPr>
+            <a:lvl7pPr eaLnBrk="0" fontAlgn="base" hangingPunct="0">
+              <a:spcBef>
+                <a:spcPct val="0"/>
+              </a:spcBef>
+              <a:spcAft>
+                <a:spcPct val="0"/>
+              </a:spcAft>
+              <a:defRPr>
+                <a:solidFill>
+                  <a:schemeClr val="tx1"/>
+                </a:solidFill>
+                <a:latin typeface="Arial" panose="020B0604020202020204" pitchFamily="34" charset="0"/>
+              </a:defRPr>
+            </a:lvl7pPr>
+            <a:lvl8pPr eaLnBrk="0" fontAlgn="base" hangingPunct="0">
+              <a:spcBef>
+                <a:spcPct val="0"/>
+              </a:spcBef>
+              <a:spcAft>
+                <a:spcPct val="0"/>
+              </a:spcAft>
+              <a:defRPr>
+                <a:solidFill>
+                  <a:schemeClr val="tx1"/>
+                </a:solidFill>
+                <a:latin typeface="Arial" panose="020B0604020202020204" pitchFamily="34" charset="0"/>
+              </a:defRPr>
+            </a:lvl8pPr>
+            <a:lvl9pPr eaLnBrk="0" fontAlgn="base" hangingPunct="0">
+              <a:spcBef>
+                <a:spcPct val="0"/>
+              </a:spcBef>
+              <a:spcAft>
+                <a:spcPct val="0"/>
+              </a:spcAft>
+              <a:defRPr>
+                <a:solidFill>
+                  <a:schemeClr val="tx1"/>
+                </a:solidFill>
+                <a:latin typeface="Arial" panose="020B0604020202020204" pitchFamily="34" charset="0"/>
+              </a:defRPr>
+            </a:lvl9pPr>
+          </a:lstStyle>
+          <a:p>
+            <a:pPr marL="0" marR="0" lvl="0" indent="0" algn="l" defTabSz="914400" rtl="0" eaLnBrk="0" fontAlgn="base" latinLnBrk="0" hangingPunct="0">
+              <a:lnSpc>
+                <a:spcPct val="100000"/>
+              </a:lnSpc>
+              <a:spcBef>
+                <a:spcPct val="0"/>
+              </a:spcBef>
+              <a:spcAft>
+                <a:spcPct val="0"/>
+              </a:spcAft>
+              <a:buClrTx/>
+              <a:buSzTx/>
+              <a:buFontTx/>
+              <a:buNone/>
+              <a:tabLst/>
+            </a:pPr>
+            <a:r>
+              <a:rPr kumimoji="0" lang="en-US" altLang="en-US" sz="1600" b="0" i="0" u="none" strike="noStrike" cap="none" normalizeH="0" baseline="0" dirty="0">
+                <a:ln>
+                  <a:noFill/>
+                </a:ln>
+                <a:solidFill>
+                  <a:srgbClr val="1F1F1F"/>
+                </a:solidFill>
+                <a:effectLst/>
+                <a:latin typeface="Courier New" panose="02070309020205020404" pitchFamily="49" charset="0"/>
+                <a:cs typeface="Courier New" panose="02070309020205020404" pitchFamily="49" charset="0"/>
+              </a:rPr>
+              <a:t>r2 score: 0.55 </a:t>
+            </a:r>
+          </a:p>
+        </p:txBody>
+      </p:sp>
+      <p:sp>
+        <p:nvSpPr>
+          <p:cNvPr id="12" name="Rectangle 2">
+            <a:extLst>
+              <a:ext uri="{FF2B5EF4-FFF2-40B4-BE49-F238E27FC236}">
+                <a16:creationId xmlns:a16="http://schemas.microsoft.com/office/drawing/2014/main" id="{B950AE4D-05FC-1BA2-97BD-60CF68022E2B}"/>
+              </a:ext>
+            </a:extLst>
+          </p:cNvPr>
+          <p:cNvSpPr>
+            <a:spLocks noChangeArrowheads="1"/>
+          </p:cNvSpPr>
+          <p:nvPr/>
+        </p:nvSpPr>
+        <p:spPr bwMode="auto">
+          <a:xfrm>
+            <a:off x="837170" y="6060477"/>
+            <a:ext cx="12192000" cy="0"/>
+          </a:xfrm>
+          <a:prstGeom prst="rect">
+            <a:avLst/>
+          </a:prstGeom>
+          <a:noFill/>
+          <a:ln>
+            <a:noFill/>
+          </a:ln>
+          <a:effectLst/>
+          <a:extLst>
+            <a:ext uri="{909E8E84-426E-40DD-AFC4-6F175D3DCCD1}">
+              <a14:hiddenFill xmlns:a14="http://schemas.microsoft.com/office/drawing/2010/main">
+                <a:solidFill>
+                  <a:schemeClr val="accent1"/>
+                </a:solidFill>
+              </a14:hiddenFill>
+            </a:ext>
+            <a:ext uri="{91240B29-F687-4F45-9708-019B960494DF}">
+              <a14:hiddenLine xmlns:a14="http://schemas.microsoft.com/office/drawing/2010/main" w="9525">
+                <a:solidFill>
+                  <a:schemeClr val="tx1"/>
+                </a:solidFill>
+                <a:miter lim="800000"/>
+                <a:headEnd/>
+                <a:tailEnd/>
+              </a14:hiddenLine>
+            </a:ext>
+            <a:ext uri="{AF507438-7753-43E0-B8FC-AC1667EBCBE1}">
+              <a14:hiddenEffects xmlns:a14="http://schemas.microsoft.com/office/drawing/2010/main">
+                <a:effectLst>
+                  <a:outerShdw dist="35921" dir="2700000" algn="ctr" rotWithShape="0">
+                    <a:schemeClr val="bg2"/>
+                  </a:outerShdw>
+                </a:effectLst>
+              </a14:hiddenEffects>
+            </a:ext>
+          </a:extLst>
+        </p:spPr>
+        <p:txBody>
+          <a:bodyPr vert="horz" wrap="none" lIns="91440" tIns="45720" rIns="91440" bIns="45720" numCol="1" anchor="ctr" anchorCtr="0" compatLnSpc="1">
+            <a:prstTxWarp prst="textNoShape">
+              <a:avLst/>
+            </a:prstTxWarp>
+            <a:spAutoFit/>
+          </a:bodyPr>
+          <a:lstStyle/>
+          <a:p>
+            <a:pPr marL="0" marR="0" lvl="0" indent="0" algn="l" defTabSz="914400" rtl="0" eaLnBrk="0" fontAlgn="base" latinLnBrk="0" hangingPunct="0">
+              <a:lnSpc>
+                <a:spcPct val="100000"/>
+              </a:lnSpc>
+              <a:spcBef>
+                <a:spcPct val="0"/>
+              </a:spcBef>
+              <a:spcAft>
+                <a:spcPct val="0"/>
+              </a:spcAft>
+              <a:buClrTx/>
+              <a:buSzTx/>
+              <a:buFontTx/>
+              <a:buNone/>
+              <a:tabLst/>
+            </a:pPr>
+            <a:br>
+              <a:rPr kumimoji="0" lang="en-US" altLang="en-US" sz="600" b="0" i="0" u="none" strike="noStrike" cap="none" normalizeH="0" baseline="0">
+                <a:ln>
+                  <a:noFill/>
+                </a:ln>
+                <a:solidFill>
+                  <a:schemeClr val="tx1"/>
+                </a:solidFill>
+                <a:effectLst/>
+              </a:rPr>
+            </a:br>
+            <a:endParaRPr kumimoji="0" lang="en-US" altLang="en-US" sz="1800" b="0" i="0" u="none" strike="noStrike" cap="none" normalizeH="0" baseline="0">
+              <a:ln>
+                <a:noFill/>
+              </a:ln>
+              <a:solidFill>
+                <a:schemeClr val="tx1"/>
+              </a:solidFill>
+              <a:effectLst/>
+              <a:latin typeface="Arial" panose="020B0604020202020204" pitchFamily="34" charset="0"/>
+            </a:endParaRPr>
+          </a:p>
+        </p:txBody>
+      </p:sp>
+    </p:spTree>
+    <p:extLst>
+      <p:ext uri="{BB962C8B-B14F-4D97-AF65-F5344CB8AC3E}">
+        <p14:creationId xmlns:p14="http://schemas.microsoft.com/office/powerpoint/2010/main" val="3390714327"/>
+      </p:ext>
+    </p:extLst>
+  </p:cSld>
+  <p:clrMapOvr>
+    <a:masterClrMapping/>
+  </p:clrMapOvr>
+</p:sld>
+</file>
+
+<file path=ppt/slides/slide2.xml><?xml version="1.0" encoding="utf-8"?>
+<p:sld xmlns:a="http://schemas.openxmlformats.org/drawingml/2006/main" xmlns:r="http://schemas.openxmlformats.org/officeDocument/2006/relationships" xmlns:p="http://schemas.openxmlformats.org/presentationml/2006/main">
+  <p:cSld>
+    <p:spTree>
+      <p:nvGrpSpPr>
+        <p:cNvPr id="1" name=""/>
+        <p:cNvGrpSpPr/>
+        <p:nvPr/>
+      </p:nvGrpSpPr>
+      <p:grpSpPr>
+        <a:xfrm>
+          <a:off x="0" y="0"/>
+          <a:ext cx="0" cy="0"/>
+          <a:chOff x="0" y="0"/>
+          <a:chExt cx="0" cy="0"/>
+        </a:xfrm>
+      </p:grpSpPr>
+      <p:sp>
+        <p:nvSpPr>
+          <p:cNvPr id="2" name="Content Placeholder 1">
+            <a:extLst>
+              <a:ext uri="{FF2B5EF4-FFF2-40B4-BE49-F238E27FC236}">
+                <a16:creationId xmlns:a16="http://schemas.microsoft.com/office/drawing/2014/main" id="{595313C8-76FF-2F07-3ED5-814AD3EC72DC}"/>
+              </a:ext>
+            </a:extLst>
+          </p:cNvPr>
+          <p:cNvSpPr>
+            <a:spLocks noGrp="1"/>
+          </p:cNvSpPr>
+          <p:nvPr>
+            <p:ph idx="1"/>
+          </p:nvPr>
+        </p:nvSpPr>
+        <p:spPr/>
+        <p:txBody>
+          <a:bodyPr>
+            <a:normAutofit/>
+          </a:bodyPr>
+          <a:lstStyle/>
+          <a:p>
+            <a:pPr marL="0" indent="0">
+              <a:buNone/>
+            </a:pPr>
+            <a:r>
+              <a:rPr lang="en-US" sz="2400" dirty="0"/>
+              <a:t>What You'll Learn:</a:t>
+            </a:r>
+          </a:p>
+          <a:p>
+            <a:r>
+              <a:rPr lang="en-US" sz="2400" dirty="0"/>
+              <a:t>Introduce the concept of supervised learning</a:t>
+            </a:r>
+          </a:p>
+          <a:p>
+            <a:r>
+              <a:rPr lang="en-US" sz="2400" dirty="0"/>
+              <a:t>Understanding regression analysis fundamentals</a:t>
+            </a:r>
+          </a:p>
+          <a:p>
+            <a:r>
+              <a:rPr lang="en-US" sz="2400" dirty="0"/>
+              <a:t>Types of linear regression models</a:t>
+            </a:r>
+          </a:p>
+          <a:p>
+            <a:r>
+              <a:rPr lang="en-US" sz="2400" dirty="0"/>
+              <a:t>Best-fit line, hypothesis function, and OLS method</a:t>
+            </a:r>
+          </a:p>
+          <a:p>
+            <a:r>
+              <a:rPr lang="en-US" sz="2400" dirty="0"/>
+              <a:t>Closed-form solution implementation</a:t>
+            </a:r>
+          </a:p>
+          <a:p>
+            <a:r>
+              <a:rPr lang="en-US" sz="2400" dirty="0"/>
+              <a:t>Gradient descent algorithm</a:t>
+            </a:r>
+          </a:p>
+          <a:p>
+            <a:r>
+              <a:rPr lang="en-US" sz="2400" dirty="0"/>
+              <a:t>Linear regression assumptions</a:t>
+            </a:r>
+          </a:p>
+          <a:p>
+            <a:r>
+              <a:rPr lang="en-US" sz="2400" dirty="0"/>
+              <a:t>Evaluation metrics and performance assessment</a:t>
+            </a:r>
+          </a:p>
+          <a:p>
+            <a:r>
+              <a:rPr lang="en-US" sz="2400" dirty="0"/>
+              <a:t>Practical implementation with scikit-learn</a:t>
+            </a:r>
+          </a:p>
+          <a:p>
+            <a:r>
+              <a:rPr lang="en-US" sz="2400" dirty="0"/>
+              <a:t>Linear Regression Assumptions</a:t>
+            </a:r>
+          </a:p>
+          <a:p>
+            <a:endParaRPr lang="en-US" sz="2400" dirty="0"/>
+          </a:p>
+        </p:txBody>
+      </p:sp>
+      <p:sp>
+        <p:nvSpPr>
+          <p:cNvPr id="3" name="Title 2">
+            <a:extLst>
+              <a:ext uri="{FF2B5EF4-FFF2-40B4-BE49-F238E27FC236}">
+                <a16:creationId xmlns:a16="http://schemas.microsoft.com/office/drawing/2014/main" id="{071A7914-96DB-51CC-53B0-AF8ED0AF6AEC}"/>
+              </a:ext>
+            </a:extLst>
+          </p:cNvPr>
+          <p:cNvSpPr>
+            <a:spLocks noGrp="1"/>
+          </p:cNvSpPr>
+          <p:nvPr>
+            <p:ph type="title"/>
+          </p:nvPr>
+        </p:nvSpPr>
+        <p:spPr/>
+        <p:txBody>
+          <a:bodyPr>
+            <a:normAutofit/>
+          </a:bodyPr>
+          <a:lstStyle/>
+          <a:p>
+            <a:r>
+              <a:rPr lang="en-US" dirty="0"/>
+              <a:t>Topics and Learning Outcomes</a:t>
+            </a:r>
+          </a:p>
+        </p:txBody>
+      </p:sp>
+    </p:spTree>
+    <p:extLst>
+      <p:ext uri="{BB962C8B-B14F-4D97-AF65-F5344CB8AC3E}">
+        <p14:creationId xmlns:p14="http://schemas.microsoft.com/office/powerpoint/2010/main" val="2145969539"/>
+      </p:ext>
+    </p:extLst>
+  </p:cSld>
+  <p:clrMapOvr>
+    <a:masterClrMapping/>
+  </p:clrMapOvr>
+</p:sld>
+</file>
+
+<file path=ppt/slides/slide20.xml><?xml version="1.0" encoding="utf-8"?>
+<p:sld xmlns:a="http://schemas.openxmlformats.org/drawingml/2006/main" xmlns:r="http://schemas.openxmlformats.org/officeDocument/2006/relationships" xmlns:p="http://schemas.openxmlformats.org/presentationml/2006/main">
+  <p:cSld>
+    <p:spTree>
+      <p:nvGrpSpPr>
+        <p:cNvPr id="1" name=""/>
+        <p:cNvGrpSpPr/>
+        <p:nvPr/>
+      </p:nvGrpSpPr>
+      <p:grpSpPr>
+        <a:xfrm>
+          <a:off x="0" y="0"/>
+          <a:ext cx="0" cy="0"/>
+          <a:chOff x="0" y="0"/>
+          <a:chExt cx="0" cy="0"/>
+        </a:xfrm>
+      </p:grpSpPr>
+      <p:sp>
+        <p:nvSpPr>
+          <p:cNvPr id="3" name="Title 2">
+            <a:extLst>
+              <a:ext uri="{FF2B5EF4-FFF2-40B4-BE49-F238E27FC236}">
+                <a16:creationId xmlns:a16="http://schemas.microsoft.com/office/drawing/2014/main" id="{50668113-EA52-BF53-9D93-4C2380293EF7}"/>
+              </a:ext>
+            </a:extLst>
+          </p:cNvPr>
+          <p:cNvSpPr>
+            <a:spLocks noGrp="1"/>
+          </p:cNvSpPr>
+          <p:nvPr>
+            <p:ph type="title"/>
+          </p:nvPr>
+        </p:nvSpPr>
+        <p:spPr/>
+        <p:txBody>
+          <a:bodyPr/>
+          <a:lstStyle/>
+          <a:p>
+            <a:r>
+              <a:rPr lang="en-US" dirty="0"/>
+              <a:t>Full Code</a:t>
+            </a:r>
+          </a:p>
+        </p:txBody>
+      </p:sp>
+      <p:sp>
+        <p:nvSpPr>
+          <p:cNvPr id="9" name="TextBox 8">
+            <a:extLst>
+              <a:ext uri="{FF2B5EF4-FFF2-40B4-BE49-F238E27FC236}">
+                <a16:creationId xmlns:a16="http://schemas.microsoft.com/office/drawing/2014/main" id="{56EE8E37-34F9-1845-A547-FF7D96EC5DD6}"/>
+              </a:ext>
+            </a:extLst>
+          </p:cNvPr>
+          <p:cNvSpPr txBox="1"/>
+          <p:nvPr/>
+        </p:nvSpPr>
+        <p:spPr>
+          <a:xfrm>
+            <a:off x="838200" y="1647611"/>
+            <a:ext cx="10515600" cy="3707425"/>
+          </a:xfrm>
+          <a:prstGeom prst="rect">
+            <a:avLst/>
+          </a:prstGeom>
+          <a:noFill/>
+        </p:spPr>
+        <p:txBody>
+          <a:bodyPr wrap="square">
+            <a:spAutoFit/>
+          </a:bodyPr>
+          <a:lstStyle/>
+          <a:p>
+            <a:pPr>
+              <a:lnSpc>
+                <a:spcPts val="1425"/>
+              </a:lnSpc>
+              <a:buNone/>
+            </a:pPr>
+            <a:r>
+              <a:rPr lang="en-US" b="1" noProof="1">
+                <a:solidFill>
+                  <a:srgbClr val="000000"/>
+                </a:solidFill>
+                <a:effectLst/>
+                <a:latin typeface="Courier New" panose="02070309020205020404" pitchFamily="49" charset="0"/>
+              </a:rPr>
+              <a:t>df = pd.read_csv(</a:t>
+            </a:r>
+            <a:r>
+              <a:rPr lang="en-US" b="1" noProof="1">
+                <a:solidFill>
+                  <a:srgbClr val="A31515"/>
+                </a:solidFill>
+                <a:effectLst/>
+                <a:latin typeface="Courier New" panose="02070309020205020404" pitchFamily="49" charset="0"/>
+              </a:rPr>
+              <a:t>'https://raw.githubusercontent.com/msfasha/307304-Data-Mining/refs/heads/main/20242/datasets/apartment_prices.csv'</a:t>
+            </a:r>
+            <a:r>
+              <a:rPr lang="en-US" b="1" noProof="1">
+                <a:solidFill>
+                  <a:srgbClr val="000000"/>
+                </a:solidFill>
+                <a:effectLst/>
+                <a:latin typeface="Courier New" panose="02070309020205020404" pitchFamily="49" charset="0"/>
+              </a:rPr>
+              <a:t>)</a:t>
+            </a:r>
+          </a:p>
+          <a:p>
+            <a:pPr>
+              <a:lnSpc>
+                <a:spcPts val="1425"/>
+              </a:lnSpc>
+              <a:buNone/>
+            </a:pPr>
+            <a:br>
+              <a:rPr lang="en-US" b="1" noProof="1">
+                <a:solidFill>
+                  <a:srgbClr val="000000"/>
+                </a:solidFill>
+                <a:effectLst/>
+                <a:latin typeface="Courier New" panose="02070309020205020404" pitchFamily="49" charset="0"/>
+              </a:rPr>
+            </a:br>
+            <a:r>
+              <a:rPr lang="en-US" b="1" noProof="1">
+                <a:solidFill>
+                  <a:srgbClr val="000000"/>
+                </a:solidFill>
+                <a:effectLst/>
+                <a:latin typeface="Courier New" panose="02070309020205020404" pitchFamily="49" charset="0"/>
+              </a:rPr>
+              <a:t>x = df.iloc[:, </a:t>
+            </a:r>
+            <a:r>
+              <a:rPr lang="en-US" b="1" noProof="1">
+                <a:solidFill>
+                  <a:srgbClr val="116644"/>
+                </a:solidFill>
+                <a:effectLst/>
+                <a:latin typeface="Courier New" panose="02070309020205020404" pitchFamily="49" charset="0"/>
+              </a:rPr>
+              <a:t>0</a:t>
+            </a:r>
+            <a:r>
+              <a:rPr lang="en-US" b="1" noProof="1">
+                <a:solidFill>
+                  <a:srgbClr val="000000"/>
+                </a:solidFill>
+                <a:effectLst/>
+                <a:latin typeface="Courier New" panose="02070309020205020404" pitchFamily="49" charset="0"/>
+              </a:rPr>
+              <a:t>].values.reshape(</a:t>
+            </a:r>
+            <a:r>
+              <a:rPr lang="en-US" b="1" noProof="1">
+                <a:solidFill>
+                  <a:srgbClr val="116644"/>
+                </a:solidFill>
+                <a:effectLst/>
+                <a:latin typeface="Courier New" panose="02070309020205020404" pitchFamily="49" charset="0"/>
+              </a:rPr>
+              <a:t>-1</a:t>
+            </a:r>
+            <a:r>
+              <a:rPr lang="en-US" b="1" noProof="1">
+                <a:solidFill>
+                  <a:srgbClr val="000000"/>
+                </a:solidFill>
+                <a:effectLst/>
+                <a:latin typeface="Courier New" panose="02070309020205020404" pitchFamily="49" charset="0"/>
+              </a:rPr>
+              <a:t>, </a:t>
+            </a:r>
+            <a:r>
+              <a:rPr lang="en-US" b="1" noProof="1">
+                <a:solidFill>
+                  <a:srgbClr val="116644"/>
+                </a:solidFill>
+                <a:effectLst/>
+                <a:latin typeface="Courier New" panose="02070309020205020404" pitchFamily="49" charset="0"/>
+              </a:rPr>
+              <a:t>1</a:t>
+            </a:r>
+            <a:r>
+              <a:rPr lang="en-US" b="1" noProof="1">
+                <a:solidFill>
+                  <a:srgbClr val="000000"/>
+                </a:solidFill>
+                <a:effectLst/>
+                <a:latin typeface="Courier New" panose="02070309020205020404" pitchFamily="49" charset="0"/>
+              </a:rPr>
+              <a:t>)  </a:t>
+            </a:r>
+            <a:r>
+              <a:rPr lang="en-US" b="1" noProof="1">
+                <a:solidFill>
+                  <a:srgbClr val="008000"/>
+                </a:solidFill>
+                <a:effectLst/>
+                <a:latin typeface="Courier New" panose="02070309020205020404" pitchFamily="49" charset="0"/>
+              </a:rPr>
+              <a:t># Reshape x to be a 2D array</a:t>
+            </a:r>
+            <a:endParaRPr lang="en-US" b="1" noProof="1">
+              <a:solidFill>
+                <a:srgbClr val="000000"/>
+              </a:solidFill>
+              <a:effectLst/>
+              <a:latin typeface="Courier New" panose="02070309020205020404" pitchFamily="49" charset="0"/>
+            </a:endParaRPr>
+          </a:p>
+          <a:p>
+            <a:pPr>
+              <a:lnSpc>
+                <a:spcPts val="1425"/>
+              </a:lnSpc>
+              <a:buNone/>
+            </a:pPr>
+            <a:r>
+              <a:rPr lang="en-US" b="1" noProof="1">
+                <a:solidFill>
+                  <a:srgbClr val="000000"/>
+                </a:solidFill>
+                <a:effectLst/>
+                <a:latin typeface="Courier New" panose="02070309020205020404" pitchFamily="49" charset="0"/>
+              </a:rPr>
+              <a:t>y = df.iloc[:, </a:t>
+            </a:r>
+            <a:r>
+              <a:rPr lang="en-US" b="1" noProof="1">
+                <a:solidFill>
+                  <a:srgbClr val="116644"/>
+                </a:solidFill>
+                <a:effectLst/>
+                <a:latin typeface="Courier New" panose="02070309020205020404" pitchFamily="49" charset="0"/>
+              </a:rPr>
+              <a:t>-1</a:t>
+            </a:r>
+            <a:r>
+              <a:rPr lang="en-US" b="1" noProof="1">
+                <a:solidFill>
+                  <a:srgbClr val="000000"/>
+                </a:solidFill>
+                <a:effectLst/>
+                <a:latin typeface="Courier New" panose="02070309020205020404" pitchFamily="49" charset="0"/>
+              </a:rPr>
+              <a:t>].values  </a:t>
+            </a:r>
+            <a:r>
+              <a:rPr lang="en-US" b="1" noProof="1">
+                <a:solidFill>
+                  <a:srgbClr val="008000"/>
+                </a:solidFill>
+                <a:effectLst/>
+                <a:latin typeface="Courier New" panose="02070309020205020404" pitchFamily="49" charset="0"/>
+              </a:rPr>
+              <a:t># y can remain as a 1D array</a:t>
+            </a:r>
+            <a:endParaRPr lang="en-US" b="1" noProof="1">
+              <a:solidFill>
+                <a:srgbClr val="000000"/>
+              </a:solidFill>
+              <a:effectLst/>
+              <a:latin typeface="Courier New" panose="02070309020205020404" pitchFamily="49" charset="0"/>
+            </a:endParaRPr>
+          </a:p>
+          <a:p>
+            <a:pPr>
+              <a:lnSpc>
+                <a:spcPts val="1425"/>
+              </a:lnSpc>
+              <a:buNone/>
+            </a:pPr>
+            <a:br>
+              <a:rPr lang="en-US" b="1" noProof="1">
+                <a:solidFill>
+                  <a:srgbClr val="000000"/>
+                </a:solidFill>
+                <a:effectLst/>
+                <a:latin typeface="Courier New" panose="02070309020205020404" pitchFamily="49" charset="0"/>
+              </a:rPr>
+            </a:br>
+            <a:r>
+              <a:rPr lang="en-US" b="1" noProof="1">
+                <a:solidFill>
+                  <a:srgbClr val="008000"/>
+                </a:solidFill>
+                <a:effectLst/>
+                <a:latin typeface="Courier New" panose="02070309020205020404" pitchFamily="49" charset="0"/>
+              </a:rPr>
+              <a:t># Splitting the dataset into training and test set. </a:t>
+            </a:r>
+            <a:endParaRPr lang="en-US" b="1" noProof="1">
+              <a:solidFill>
+                <a:srgbClr val="000000"/>
+              </a:solidFill>
+              <a:effectLst/>
+              <a:latin typeface="Courier New" panose="02070309020205020404" pitchFamily="49" charset="0"/>
+            </a:endParaRPr>
+          </a:p>
+          <a:p>
+            <a:pPr>
+              <a:lnSpc>
+                <a:spcPts val="1425"/>
+              </a:lnSpc>
+              <a:buNone/>
+            </a:pPr>
+            <a:r>
+              <a:rPr lang="en-US" b="1" noProof="1">
+                <a:solidFill>
+                  <a:srgbClr val="000000"/>
+                </a:solidFill>
+                <a:effectLst/>
+                <a:latin typeface="Courier New" panose="02070309020205020404" pitchFamily="49" charset="0"/>
+              </a:rPr>
+              <a:t>x_train, x_test, y_train, y_test= train_test_split(x, y, test_size= </a:t>
+            </a:r>
+            <a:r>
+              <a:rPr lang="en-US" b="1" noProof="1">
+                <a:solidFill>
+                  <a:srgbClr val="116644"/>
+                </a:solidFill>
+                <a:effectLst/>
+                <a:latin typeface="Courier New" panose="02070309020205020404" pitchFamily="49" charset="0"/>
+              </a:rPr>
+              <a:t>.1</a:t>
+            </a:r>
+            <a:r>
+              <a:rPr lang="en-US" b="1" noProof="1">
+                <a:solidFill>
+                  <a:srgbClr val="000000"/>
+                </a:solidFill>
+                <a:effectLst/>
+                <a:latin typeface="Courier New" panose="02070309020205020404" pitchFamily="49" charset="0"/>
+              </a:rPr>
+              <a:t>, random_state=</a:t>
+            </a:r>
+            <a:r>
+              <a:rPr lang="en-US" b="1" noProof="1">
+                <a:solidFill>
+                  <a:srgbClr val="116644"/>
+                </a:solidFill>
+                <a:effectLst/>
+                <a:latin typeface="Courier New" panose="02070309020205020404" pitchFamily="49" charset="0"/>
+              </a:rPr>
+              <a:t>0</a:t>
+            </a:r>
+            <a:r>
+              <a:rPr lang="en-US" b="1" noProof="1">
+                <a:solidFill>
+                  <a:srgbClr val="000000"/>
+                </a:solidFill>
+                <a:effectLst/>
+                <a:latin typeface="Courier New" panose="02070309020205020404" pitchFamily="49" charset="0"/>
+              </a:rPr>
+              <a:t>) </a:t>
+            </a:r>
+          </a:p>
+          <a:p>
+            <a:pPr>
+              <a:lnSpc>
+                <a:spcPts val="1425"/>
+              </a:lnSpc>
+              <a:buNone/>
+            </a:pPr>
+            <a:br>
+              <a:rPr lang="en-US" b="1" noProof="1">
+                <a:solidFill>
+                  <a:srgbClr val="000000"/>
+                </a:solidFill>
+                <a:effectLst/>
+                <a:latin typeface="Courier New" panose="02070309020205020404" pitchFamily="49" charset="0"/>
+              </a:rPr>
+            </a:br>
+            <a:r>
+              <a:rPr lang="en-US" b="1" noProof="1">
+                <a:solidFill>
+                  <a:srgbClr val="008000"/>
+                </a:solidFill>
+                <a:effectLst/>
+                <a:latin typeface="Courier New" panose="02070309020205020404" pitchFamily="49" charset="0"/>
+              </a:rPr>
+              <a:t># Create the LinearRegression Model</a:t>
+            </a:r>
+            <a:endParaRPr lang="en-US" b="1" noProof="1">
+              <a:solidFill>
+                <a:srgbClr val="000000"/>
+              </a:solidFill>
+              <a:effectLst/>
+              <a:latin typeface="Courier New" panose="02070309020205020404" pitchFamily="49" charset="0"/>
+            </a:endParaRPr>
+          </a:p>
+          <a:p>
+            <a:pPr>
+              <a:lnSpc>
+                <a:spcPts val="1425"/>
+              </a:lnSpc>
+              <a:buNone/>
+            </a:pPr>
+            <a:r>
+              <a:rPr lang="en-US" b="1" noProof="1">
+                <a:solidFill>
+                  <a:srgbClr val="000000"/>
+                </a:solidFill>
+                <a:effectLst/>
+                <a:latin typeface="Courier New" panose="02070309020205020404" pitchFamily="49" charset="0"/>
+              </a:rPr>
+              <a:t>regressor= LinearRegression()</a:t>
+            </a:r>
+          </a:p>
+          <a:p>
+            <a:pPr>
+              <a:lnSpc>
+                <a:spcPts val="1425"/>
+              </a:lnSpc>
+              <a:buNone/>
+            </a:pPr>
+            <a:br>
+              <a:rPr lang="en-US" b="1" noProof="1">
+                <a:solidFill>
+                  <a:srgbClr val="000000"/>
+                </a:solidFill>
+                <a:effectLst/>
+                <a:latin typeface="Courier New" panose="02070309020205020404" pitchFamily="49" charset="0"/>
+              </a:rPr>
+            </a:br>
+            <a:r>
+              <a:rPr lang="en-US" b="1" noProof="1">
+                <a:solidFill>
+                  <a:srgbClr val="008000"/>
+                </a:solidFill>
+                <a:effectLst/>
+                <a:latin typeface="Courier New" panose="02070309020205020404" pitchFamily="49" charset="0"/>
+              </a:rPr>
+              <a:t># Train the model</a:t>
+            </a:r>
+            <a:endParaRPr lang="en-US" b="1" noProof="1">
+              <a:solidFill>
+                <a:srgbClr val="000000"/>
+              </a:solidFill>
+              <a:effectLst/>
+              <a:latin typeface="Courier New" panose="02070309020205020404" pitchFamily="49" charset="0"/>
+            </a:endParaRPr>
+          </a:p>
+          <a:p>
+            <a:pPr>
+              <a:lnSpc>
+                <a:spcPts val="1425"/>
+              </a:lnSpc>
+              <a:buNone/>
+            </a:pPr>
+            <a:r>
+              <a:rPr lang="en-US" b="1" noProof="1">
+                <a:solidFill>
+                  <a:srgbClr val="000000"/>
+                </a:solidFill>
+                <a:effectLst/>
+                <a:latin typeface="Courier New" panose="02070309020205020404" pitchFamily="49" charset="0"/>
+              </a:rPr>
+              <a:t>regressor.fit(x_train, y_train)  </a:t>
+            </a:r>
+          </a:p>
+          <a:p>
+            <a:pPr>
+              <a:lnSpc>
+                <a:spcPts val="1425"/>
+              </a:lnSpc>
+              <a:buNone/>
+            </a:pPr>
+            <a:br>
+              <a:rPr lang="en-US" b="1" noProof="1">
+                <a:solidFill>
+                  <a:srgbClr val="000000"/>
+                </a:solidFill>
+                <a:effectLst/>
+                <a:latin typeface="Courier New" panose="02070309020205020404" pitchFamily="49" charset="0"/>
+              </a:rPr>
+            </a:br>
+            <a:r>
+              <a:rPr lang="en-US" b="1" noProof="1">
+                <a:solidFill>
+                  <a:srgbClr val="008000"/>
+                </a:solidFill>
+                <a:effectLst/>
+                <a:latin typeface="Courier New" panose="02070309020205020404" pitchFamily="49" charset="0"/>
+              </a:rPr>
+              <a:t># Print the results</a:t>
+            </a:r>
+            <a:endParaRPr lang="en-US" b="1" noProof="1">
+              <a:solidFill>
+                <a:srgbClr val="000000"/>
+              </a:solidFill>
+              <a:effectLst/>
+              <a:latin typeface="Courier New" panose="02070309020205020404" pitchFamily="49" charset="0"/>
+            </a:endParaRPr>
+          </a:p>
+          <a:p>
+            <a:pPr>
+              <a:lnSpc>
+                <a:spcPts val="1425"/>
+              </a:lnSpc>
+              <a:buNone/>
+            </a:pPr>
+            <a:r>
+              <a:rPr lang="en-US" b="1" noProof="1">
+                <a:solidFill>
+                  <a:srgbClr val="6A5221"/>
+                </a:solidFill>
+                <a:effectLst/>
+                <a:latin typeface="Courier New" panose="02070309020205020404" pitchFamily="49" charset="0"/>
+              </a:rPr>
+              <a:t>print</a:t>
+            </a:r>
+            <a:r>
+              <a:rPr lang="en-US" b="1" noProof="1">
+                <a:solidFill>
+                  <a:srgbClr val="000000"/>
+                </a:solidFill>
+                <a:effectLst/>
+                <a:latin typeface="Courier New" panose="02070309020205020404" pitchFamily="49" charset="0"/>
+              </a:rPr>
+              <a:t>(</a:t>
+            </a:r>
+            <a:r>
+              <a:rPr lang="en-US" b="1" noProof="1">
+                <a:solidFill>
+                  <a:srgbClr val="A31515"/>
+                </a:solidFill>
+                <a:effectLst/>
+                <a:latin typeface="Courier New" panose="02070309020205020404" pitchFamily="49" charset="0"/>
+              </a:rPr>
+              <a:t>"Study Hours Coefficient: "</a:t>
+            </a:r>
+            <a:r>
+              <a:rPr lang="en-US" b="1" noProof="1">
+                <a:solidFill>
+                  <a:srgbClr val="000000"/>
+                </a:solidFill>
+                <a:effectLst/>
+                <a:latin typeface="Courier New" panose="02070309020205020404" pitchFamily="49" charset="0"/>
+              </a:rPr>
+              <a:t>, regressor.coef_)</a:t>
+            </a:r>
+          </a:p>
+          <a:p>
+            <a:pPr>
+              <a:lnSpc>
+                <a:spcPts val="1425"/>
+              </a:lnSpc>
+              <a:buNone/>
+            </a:pPr>
+            <a:r>
+              <a:rPr lang="en-US" b="1" noProof="1">
+                <a:solidFill>
+                  <a:srgbClr val="6A5221"/>
+                </a:solidFill>
+                <a:effectLst/>
+                <a:latin typeface="Courier New" panose="02070309020205020404" pitchFamily="49" charset="0"/>
+              </a:rPr>
+              <a:t>print</a:t>
+            </a:r>
+            <a:r>
+              <a:rPr lang="en-US" b="1" noProof="1">
+                <a:solidFill>
+                  <a:srgbClr val="000000"/>
+                </a:solidFill>
+                <a:effectLst/>
+                <a:latin typeface="Courier New" panose="02070309020205020404" pitchFamily="49" charset="0"/>
+              </a:rPr>
+              <a:t>(</a:t>
+            </a:r>
+            <a:r>
+              <a:rPr lang="en-US" b="1" noProof="1">
+                <a:solidFill>
+                  <a:srgbClr val="A31515"/>
+                </a:solidFill>
+                <a:effectLst/>
+                <a:latin typeface="Courier New" panose="02070309020205020404" pitchFamily="49" charset="0"/>
+              </a:rPr>
+              <a:t>"Intercept Value: "</a:t>
+            </a:r>
+            <a:r>
+              <a:rPr lang="en-US" b="1" noProof="1">
+                <a:solidFill>
+                  <a:srgbClr val="000000"/>
+                </a:solidFill>
+                <a:effectLst/>
+                <a:latin typeface="Courier New" panose="02070309020205020404" pitchFamily="49" charset="0"/>
+              </a:rPr>
+              <a:t>, regressor.intercept_)</a:t>
+            </a:r>
+          </a:p>
+          <a:p>
+            <a:pPr>
+              <a:lnSpc>
+                <a:spcPts val="1425"/>
+              </a:lnSpc>
+            </a:pPr>
+            <a:r>
+              <a:rPr lang="en-US" b="1" noProof="1">
+                <a:solidFill>
+                  <a:srgbClr val="6A5221"/>
+                </a:solidFill>
+                <a:effectLst/>
+                <a:latin typeface="Courier New" panose="02070309020205020404" pitchFamily="49" charset="0"/>
+              </a:rPr>
+              <a:t>print</a:t>
+            </a:r>
+            <a:r>
+              <a:rPr lang="en-US" b="1" noProof="1">
+                <a:solidFill>
+                  <a:srgbClr val="000000"/>
+                </a:solidFill>
+                <a:effectLst/>
+                <a:latin typeface="Courier New" panose="02070309020205020404" pitchFamily="49" charset="0"/>
+              </a:rPr>
+              <a:t>(</a:t>
+            </a:r>
+            <a:r>
+              <a:rPr lang="en-US" b="1" noProof="1">
+                <a:solidFill>
+                  <a:srgbClr val="A31515"/>
+                </a:solidFill>
+                <a:effectLst/>
+                <a:latin typeface="Courier New" panose="02070309020205020404" pitchFamily="49" charset="0"/>
+              </a:rPr>
+              <a:t>"r2 score: "</a:t>
+            </a:r>
+            <a:r>
+              <a:rPr lang="en-US" b="1" noProof="1">
+                <a:solidFill>
+                  <a:srgbClr val="000000"/>
+                </a:solidFill>
+                <a:effectLst/>
+                <a:latin typeface="Courier New" panose="02070309020205020404" pitchFamily="49" charset="0"/>
+              </a:rPr>
+              <a:t>, </a:t>
+            </a:r>
+            <a:r>
+              <a:rPr lang="en-US" b="1" noProof="1">
+                <a:solidFill>
+                  <a:srgbClr val="6A5221"/>
+                </a:solidFill>
+                <a:effectLst/>
+                <a:latin typeface="Courier New" panose="02070309020205020404" pitchFamily="49" charset="0"/>
+              </a:rPr>
+              <a:t>round</a:t>
+            </a:r>
+            <a:r>
+              <a:rPr lang="en-US" b="1" noProof="1">
+                <a:solidFill>
+                  <a:srgbClr val="000000"/>
+                </a:solidFill>
+                <a:effectLst/>
+                <a:latin typeface="Courier New" panose="02070309020205020404" pitchFamily="49" charset="0"/>
+              </a:rPr>
+              <a:t>(r2_score(y_train, train_predictions),</a:t>
+            </a:r>
+            <a:r>
+              <a:rPr lang="en-US" b="1" noProof="1">
+                <a:solidFill>
+                  <a:srgbClr val="116644"/>
+                </a:solidFill>
+                <a:effectLst/>
+                <a:latin typeface="Courier New" panose="02070309020205020404" pitchFamily="49" charset="0"/>
+              </a:rPr>
+              <a:t>2</a:t>
+            </a:r>
+            <a:r>
+              <a:rPr lang="en-US" b="1" noProof="1">
+                <a:solidFill>
+                  <a:srgbClr val="000000"/>
+                </a:solidFill>
+                <a:effectLst/>
+                <a:latin typeface="Courier New" panose="02070309020205020404" pitchFamily="49" charset="0"/>
+              </a:rPr>
+              <a:t>))</a:t>
+            </a:r>
+          </a:p>
+        </p:txBody>
+      </p:sp>
+    </p:spTree>
+    <p:extLst>
+      <p:ext uri="{BB962C8B-B14F-4D97-AF65-F5344CB8AC3E}">
+        <p14:creationId xmlns:p14="http://schemas.microsoft.com/office/powerpoint/2010/main" val="3686005749"/>
+      </p:ext>
+    </p:extLst>
+  </p:cSld>
+  <p:clrMapOvr>
+    <a:masterClrMapping/>
+  </p:clrMapOvr>
+</p:sld>
+</file>
+
+<file path=ppt/slides/slide21.xml><?xml version="1.0" encoding="utf-8"?>
 <p:sld xmlns:a="http://schemas.openxmlformats.org/drawingml/2006/main" xmlns:r="http://schemas.openxmlformats.org/officeDocument/2006/relationships" xmlns:p="http://schemas.openxmlformats.org/presentationml/2006/main">
   <p:cSld>
     <p:spTree>
@@ -6668,12 +10841,12 @@
         <p:spPr>
           <a:xfrm>
             <a:off x="838200" y="1633491"/>
-            <a:ext cx="5887065" cy="4498368"/>
+            <a:ext cx="10999573" cy="748208"/>
           </a:xfrm>
         </p:spPr>
         <p:txBody>
           <a:bodyPr>
-            <a:normAutofit fontScale="92500" lnSpcReduction="20000"/>
+            <a:normAutofit/>
           </a:bodyPr>
           <a:lstStyle/>
           <a:p>
@@ -6681,17 +10854,8 @@
               <a:buNone/>
             </a:pPr>
             <a:r>
-              <a:rPr lang="en-US" dirty="0"/>
-              <a:t>Linear regression is a powerful tool for understanding and predicting the behavior of a variable, however, it needs to meet a few conditions in order to be accurate and dependable solutions. </a:t>
-            </a:r>
-          </a:p>
-          <a:p>
-            <a:pPr marL="0" indent="0">
-              <a:buNone/>
-            </a:pPr>
-            <a:r>
-              <a:rPr lang="en-US" dirty="0"/>
-              <a:t>1. Linearity: The independent and dependent variables have a linear relationship with one another. This implies that changes in the dependent variable follow those in the independent variable(s) in a linear fashion. This means that there should be a straight line that can be drawn through the data points. If the relationship is not linear, then linear regression will not be an accurate model.</a:t>
+              <a:rPr lang="en-US" sz="2000" dirty="0"/>
+              <a:t>Linear regression is a powerful tool for understanding and predicting the behavior of a variable; however, it needs to meet a few conditions to be accurate and dependable solutions. </a:t>
             </a:r>
           </a:p>
         </p:txBody>
@@ -6748,7 +10912,7 @@
         </p:blipFill>
         <p:spPr>
           <a:xfrm>
-            <a:off x="6893165" y="2775317"/>
+            <a:off x="6893165" y="2469459"/>
             <a:ext cx="4460635" cy="3499977"/>
           </a:xfrm>
           <a:prstGeom prst="rect">
@@ -6756,6 +10920,232 @@
           </a:prstGeom>
         </p:spPr>
       </p:pic>
+      <p:sp>
+        <p:nvSpPr>
+          <p:cNvPr id="4" name="Content Placeholder 1">
+            <a:extLst>
+              <a:ext uri="{FF2B5EF4-FFF2-40B4-BE49-F238E27FC236}">
+                <a16:creationId xmlns:a16="http://schemas.microsoft.com/office/drawing/2014/main" id="{BBEF8319-D9AC-E564-64FB-B881D619589E}"/>
+              </a:ext>
+            </a:extLst>
+          </p:cNvPr>
+          <p:cNvSpPr txBox="1">
+            <a:spLocks/>
+          </p:cNvSpPr>
+          <p:nvPr/>
+        </p:nvSpPr>
+        <p:spPr>
+          <a:xfrm>
+            <a:off x="838200" y="2539653"/>
+            <a:ext cx="5887065" cy="4498368"/>
+          </a:xfrm>
+          <a:prstGeom prst="rect">
+            <a:avLst/>
+          </a:prstGeom>
+        </p:spPr>
+        <p:txBody>
+          <a:bodyPr vert="horz" lIns="91440" tIns="45720" rIns="91440" bIns="45720" rtlCol="0">
+            <a:normAutofit/>
+          </a:bodyPr>
+          <a:lstStyle>
+            <a:lvl1pPr marL="228600" indent="-228600" algn="l" defTabSz="914400" rtl="0" eaLnBrk="1" latinLnBrk="0" hangingPunct="1">
+              <a:lnSpc>
+                <a:spcPct val="90000"/>
+              </a:lnSpc>
+              <a:spcBef>
+                <a:spcPts val="1000"/>
+              </a:spcBef>
+              <a:buFont typeface="Arial" panose="020B0604020202020204" pitchFamily="34" charset="0"/>
+              <a:buChar char="•"/>
+              <a:defRPr sz="2800" kern="1200">
+                <a:solidFill>
+                  <a:schemeClr val="tx1"/>
+                </a:solidFill>
+                <a:latin typeface="+mn-lt"/>
+                <a:ea typeface="+mn-ea"/>
+                <a:cs typeface="+mn-cs"/>
+              </a:defRPr>
+            </a:lvl1pPr>
+            <a:lvl2pPr marL="685800" indent="-228600" algn="l" defTabSz="914400" rtl="0" eaLnBrk="1" latinLnBrk="0" hangingPunct="1">
+              <a:lnSpc>
+                <a:spcPct val="90000"/>
+              </a:lnSpc>
+              <a:spcBef>
+                <a:spcPts val="500"/>
+              </a:spcBef>
+              <a:buFont typeface="Arial" panose="020B0604020202020204" pitchFamily="34" charset="0"/>
+              <a:buChar char="•"/>
+              <a:defRPr sz="2400" kern="1200">
+                <a:solidFill>
+                  <a:schemeClr val="tx1"/>
+                </a:solidFill>
+                <a:latin typeface="+mn-lt"/>
+                <a:ea typeface="+mn-ea"/>
+                <a:cs typeface="+mn-cs"/>
+              </a:defRPr>
+            </a:lvl2pPr>
+            <a:lvl3pPr marL="1143000" indent="-228600" algn="l" defTabSz="914400" rtl="0" eaLnBrk="1" latinLnBrk="0" hangingPunct="1">
+              <a:lnSpc>
+                <a:spcPct val="90000"/>
+              </a:lnSpc>
+              <a:spcBef>
+                <a:spcPts val="500"/>
+              </a:spcBef>
+              <a:buFont typeface="Arial" panose="020B0604020202020204" pitchFamily="34" charset="0"/>
+              <a:buChar char="•"/>
+              <a:defRPr sz="2000" kern="1200">
+                <a:solidFill>
+                  <a:schemeClr val="tx1"/>
+                </a:solidFill>
+                <a:latin typeface="+mn-lt"/>
+                <a:ea typeface="+mn-ea"/>
+                <a:cs typeface="+mn-cs"/>
+              </a:defRPr>
+            </a:lvl3pPr>
+            <a:lvl4pPr marL="1600200" indent="-228600" algn="l" defTabSz="914400" rtl="0" eaLnBrk="1" latinLnBrk="0" hangingPunct="1">
+              <a:lnSpc>
+                <a:spcPct val="90000"/>
+              </a:lnSpc>
+              <a:spcBef>
+                <a:spcPts val="500"/>
+              </a:spcBef>
+              <a:buFont typeface="Arial" panose="020B0604020202020204" pitchFamily="34" charset="0"/>
+              <a:buChar char="•"/>
+              <a:defRPr sz="1800" kern="1200">
+                <a:solidFill>
+                  <a:schemeClr val="tx1"/>
+                </a:solidFill>
+                <a:latin typeface="+mn-lt"/>
+                <a:ea typeface="+mn-ea"/>
+                <a:cs typeface="+mn-cs"/>
+              </a:defRPr>
+            </a:lvl4pPr>
+            <a:lvl5pPr marL="2057400" indent="-228600" algn="l" defTabSz="914400" rtl="0" eaLnBrk="1" latinLnBrk="0" hangingPunct="1">
+              <a:lnSpc>
+                <a:spcPct val="90000"/>
+              </a:lnSpc>
+              <a:spcBef>
+                <a:spcPts val="500"/>
+              </a:spcBef>
+              <a:buFont typeface="Arial" panose="020B0604020202020204" pitchFamily="34" charset="0"/>
+              <a:buChar char="•"/>
+              <a:defRPr sz="1800" kern="1200">
+                <a:solidFill>
+                  <a:schemeClr val="tx1"/>
+                </a:solidFill>
+                <a:latin typeface="+mn-lt"/>
+                <a:ea typeface="+mn-ea"/>
+                <a:cs typeface="+mn-cs"/>
+              </a:defRPr>
+            </a:lvl5pPr>
+            <a:lvl6pPr marL="2514600" indent="-228600" algn="l" defTabSz="914400" rtl="0" eaLnBrk="1" latinLnBrk="0" hangingPunct="1">
+              <a:lnSpc>
+                <a:spcPct val="90000"/>
+              </a:lnSpc>
+              <a:spcBef>
+                <a:spcPts val="500"/>
+              </a:spcBef>
+              <a:buFont typeface="Arial" panose="020B0604020202020204" pitchFamily="34" charset="0"/>
+              <a:buChar char="•"/>
+              <a:defRPr sz="1800" kern="1200">
+                <a:solidFill>
+                  <a:schemeClr val="tx1"/>
+                </a:solidFill>
+                <a:latin typeface="+mn-lt"/>
+                <a:ea typeface="+mn-ea"/>
+                <a:cs typeface="+mn-cs"/>
+              </a:defRPr>
+            </a:lvl6pPr>
+            <a:lvl7pPr marL="2971800" indent="-228600" algn="l" defTabSz="914400" rtl="0" eaLnBrk="1" latinLnBrk="0" hangingPunct="1">
+              <a:lnSpc>
+                <a:spcPct val="90000"/>
+              </a:lnSpc>
+              <a:spcBef>
+                <a:spcPts val="500"/>
+              </a:spcBef>
+              <a:buFont typeface="Arial" panose="020B0604020202020204" pitchFamily="34" charset="0"/>
+              <a:buChar char="•"/>
+              <a:defRPr sz="1800" kern="1200">
+                <a:solidFill>
+                  <a:schemeClr val="tx1"/>
+                </a:solidFill>
+                <a:latin typeface="+mn-lt"/>
+                <a:ea typeface="+mn-ea"/>
+                <a:cs typeface="+mn-cs"/>
+              </a:defRPr>
+            </a:lvl7pPr>
+            <a:lvl8pPr marL="3429000" indent="-228600" algn="l" defTabSz="914400" rtl="0" eaLnBrk="1" latinLnBrk="0" hangingPunct="1">
+              <a:lnSpc>
+                <a:spcPct val="90000"/>
+              </a:lnSpc>
+              <a:spcBef>
+                <a:spcPts val="500"/>
+              </a:spcBef>
+              <a:buFont typeface="Arial" panose="020B0604020202020204" pitchFamily="34" charset="0"/>
+              <a:buChar char="•"/>
+              <a:defRPr sz="1800" kern="1200">
+                <a:solidFill>
+                  <a:schemeClr val="tx1"/>
+                </a:solidFill>
+                <a:latin typeface="+mn-lt"/>
+                <a:ea typeface="+mn-ea"/>
+                <a:cs typeface="+mn-cs"/>
+              </a:defRPr>
+            </a:lvl8pPr>
+            <a:lvl9pPr marL="3886200" indent="-228600" algn="l" defTabSz="914400" rtl="0" eaLnBrk="1" latinLnBrk="0" hangingPunct="1">
+              <a:lnSpc>
+                <a:spcPct val="90000"/>
+              </a:lnSpc>
+              <a:spcBef>
+                <a:spcPts val="500"/>
+              </a:spcBef>
+              <a:buFont typeface="Arial" panose="020B0604020202020204" pitchFamily="34" charset="0"/>
+              <a:buChar char="•"/>
+              <a:defRPr sz="1800" kern="1200">
+                <a:solidFill>
+                  <a:schemeClr val="tx1"/>
+                </a:solidFill>
+                <a:latin typeface="+mn-lt"/>
+                <a:ea typeface="+mn-ea"/>
+                <a:cs typeface="+mn-cs"/>
+              </a:defRPr>
+            </a:lvl9pPr>
+          </a:lstStyle>
+          <a:p>
+            <a:pPr marL="0" indent="0">
+              <a:buNone/>
+            </a:pPr>
+            <a:r>
+              <a:rPr lang="en-US" sz="2000" b="1" dirty="0"/>
+              <a:t>1. Linearity: </a:t>
+            </a:r>
+          </a:p>
+          <a:p>
+            <a:r>
+              <a:rPr lang="en-US" sz="2000" dirty="0"/>
+              <a:t>The independent and dependent variables have a linear relationship with one another. </a:t>
+            </a:r>
+          </a:p>
+          <a:p>
+            <a:r>
+              <a:rPr lang="en-US" sz="2000" dirty="0"/>
+              <a:t>This implies that changes in the dependent variable follow those in the independent variable(s) in a linear fashion. </a:t>
+            </a:r>
+          </a:p>
+          <a:p>
+            <a:r>
+              <a:rPr lang="en-US" sz="2000" dirty="0"/>
+              <a:t>This means that there should be a straight line that can be drawn through the data points. </a:t>
+            </a:r>
+          </a:p>
+          <a:p>
+            <a:r>
+              <a:rPr lang="en-US" sz="2000" dirty="0"/>
+              <a:t>If the relationship is not linear, then linear regression will not be an accurate model.</a:t>
+            </a:r>
+          </a:p>
+        </p:txBody>
+      </p:sp>
     </p:spTree>
     <p:extLst>
       <p:ext uri="{BB962C8B-B14F-4D97-AF65-F5344CB8AC3E}">
@@ -6769,7 +11159,7 @@
 </p:sld>
 </file>
 
-<file path=ppt/slides/slide18.xml><?xml version="1.0" encoding="utf-8"?>
+<file path=ppt/slides/slide22.xml><?xml version="1.0" encoding="utf-8"?>
 <p:sld xmlns:a="http://schemas.openxmlformats.org/drawingml/2006/main" xmlns:r="http://schemas.openxmlformats.org/officeDocument/2006/relationships" xmlns:p="http://schemas.openxmlformats.org/presentationml/2006/main">
   <p:cSld>
     <p:spTree>
@@ -6816,7 +11206,7 @@
         </p:spPr>
         <p:txBody>
           <a:bodyPr>
-            <a:normAutofit fontScale="92500" lnSpcReduction="20000"/>
+            <a:normAutofit/>
           </a:bodyPr>
           <a:lstStyle/>
           <a:p>
@@ -6824,8 +11214,12 @@
               <a:buNone/>
             </a:pPr>
             <a:r>
-              <a:rPr lang="en-US" dirty="0"/>
-              <a:t>2. Independence: The observations in the dataset must be independent, meaning the value of the dependent variable for one observation should not be influenced by the value of another. If this condition is violated, linear regression may produce inaccurate results.</a:t>
+              <a:rPr lang="en-US" sz="2000" b="1" dirty="0"/>
+              <a:t>2. Independence: </a:t>
+            </a:r>
+            <a:r>
+              <a:rPr lang="en-US" sz="2000" dirty="0"/>
+              <a:t>The observations in the dataset must be independent, meaning the value of the dependent variable for one observation should not be influenced by the value of another. If this condition is violated, linear regression may produce inaccurate results.</a:t>
             </a:r>
           </a:p>
           <a:p>
@@ -6833,12 +11227,16 @@
               <a:buNone/>
             </a:pPr>
             <a:r>
-              <a:rPr lang="en-US" dirty="0"/>
-              <a:t>3. Homoscedasticity: The variance of the errors should be constant across all levels of the independent variable(s). This means that changes in the independent variable(s) should not affect the spread of the errors. If the error variance is not constant (heteroscedasticity), the linear regression model may not be reliable.</a:t>
-            </a:r>
-          </a:p>
-          <a:p>
-            <a:endParaRPr lang="en-US" dirty="0"/>
+              <a:rPr lang="en-US" sz="2000" b="1" dirty="0"/>
+              <a:t>3. Homoscedasticity: </a:t>
+            </a:r>
+            <a:r>
+              <a:rPr lang="en-US" sz="2000" dirty="0"/>
+              <a:t>The variance of the errors should be constant across all levels of the independent variable(s). This means that changes in the independent variable(s) should not affect the spread of the errors. If the error variance is not constant (heteroscedasticity), the linear regression model may not be reliable.</a:t>
+            </a:r>
+          </a:p>
+          <a:p>
+            <a:endParaRPr lang="en-US" sz="2000" dirty="0"/>
           </a:p>
         </p:txBody>
       </p:sp>
@@ -6892,7 +11290,7 @@
         </p:blipFill>
         <p:spPr>
           <a:xfrm>
-            <a:off x="2616247" y="4467962"/>
+            <a:off x="1349679" y="4410635"/>
             <a:ext cx="3479753" cy="2180382"/>
           </a:xfrm>
           <a:prstGeom prst="rect">
@@ -6922,7 +11320,7 @@
         </p:blipFill>
         <p:spPr>
           <a:xfrm>
-            <a:off x="6336600" y="4260088"/>
+            <a:off x="6985330" y="4225444"/>
             <a:ext cx="3633052" cy="2550765"/>
           </a:xfrm>
           <a:prstGeom prst="rect">
@@ -6943,7 +11341,7 @@
 </p:sld>
 </file>
 
-<file path=ppt/slides/slide19.xml><?xml version="1.0" encoding="utf-8"?>
+<file path=ppt/slides/slide23.xml><?xml version="1.0" encoding="utf-8"?>
 <p:sld xmlns:a="http://schemas.openxmlformats.org/drawingml/2006/main" xmlns:r="http://schemas.openxmlformats.org/officeDocument/2006/relationships" xmlns:p="http://schemas.openxmlformats.org/presentationml/2006/main">
   <p:cSld>
     <p:spTree>
@@ -6990,7 +11388,7 @@
         </p:spPr>
         <p:txBody>
           <a:bodyPr>
-            <a:normAutofit lnSpcReduction="10000"/>
+            <a:normAutofit/>
           </a:bodyPr>
           <a:lstStyle/>
           <a:p>
@@ -6998,8 +11396,12 @@
               <a:buNone/>
             </a:pPr>
             <a:r>
-              <a:rPr lang="en-US" dirty="0"/>
-              <a:t>4. Normality: The residuals should be normally distributed. This means that the residuals should follow a bell-shaped curve. If the residuals are not normally distributed, then linear regression will not be an accurate model.</a:t>
+              <a:rPr lang="en-US" sz="2000" b="1" dirty="0"/>
+              <a:t>4. Normality: </a:t>
+            </a:r>
+            <a:r>
+              <a:rPr lang="en-US" sz="2000" dirty="0"/>
+              <a:t>The residuals should be normally distributed. This means that the residuals should follow a bell-shaped curve. If the residuals are not normally distributed, then linear regression will not be an accurate model.</a:t>
             </a:r>
           </a:p>
         </p:txBody>
@@ -7054,7 +11456,7 @@
         </p:blipFill>
         <p:spPr>
           <a:xfrm>
-            <a:off x="1627094" y="3021106"/>
+            <a:off x="947472" y="3008749"/>
             <a:ext cx="4806485" cy="3760694"/>
           </a:xfrm>
           <a:prstGeom prst="rect">
@@ -7105,157 +11507,7 @@
 </p:sld>
 </file>
 
-<file path=ppt/slides/slide2.xml><?xml version="1.0" encoding="utf-8"?>
-<p:sld xmlns:a="http://schemas.openxmlformats.org/drawingml/2006/main" xmlns:r="http://schemas.openxmlformats.org/officeDocument/2006/relationships" xmlns:p="http://schemas.openxmlformats.org/presentationml/2006/main">
-  <p:cSld>
-    <p:spTree>
-      <p:nvGrpSpPr>
-        <p:cNvPr id="1" name=""/>
-        <p:cNvGrpSpPr/>
-        <p:nvPr/>
-      </p:nvGrpSpPr>
-      <p:grpSpPr>
-        <a:xfrm>
-          <a:off x="0" y="0"/>
-          <a:ext cx="0" cy="0"/>
-          <a:chOff x="0" y="0"/>
-          <a:chExt cx="0" cy="0"/>
-        </a:xfrm>
-      </p:grpSpPr>
-      <p:sp>
-        <p:nvSpPr>
-          <p:cNvPr id="2" name="Content Placeholder 1">
-            <a:extLst>
-              <a:ext uri="{FF2B5EF4-FFF2-40B4-BE49-F238E27FC236}">
-                <a16:creationId xmlns:a16="http://schemas.microsoft.com/office/drawing/2014/main" id="{595313C8-76FF-2F07-3ED5-814AD3EC72DC}"/>
-              </a:ext>
-            </a:extLst>
-          </p:cNvPr>
-          <p:cNvSpPr>
-            <a:spLocks noGrp="1"/>
-          </p:cNvSpPr>
-          <p:nvPr>
-            <p:ph idx="1"/>
-          </p:nvPr>
-        </p:nvSpPr>
-        <p:spPr/>
-        <p:txBody>
-          <a:bodyPr>
-            <a:normAutofit/>
-          </a:bodyPr>
-          <a:lstStyle/>
-          <a:p>
-            <a:pPr marL="0" indent="0">
-              <a:buNone/>
-            </a:pPr>
-            <a:r>
-              <a:rPr lang="en-US" sz="2400" dirty="0"/>
-              <a:t>What You'll Learn:</a:t>
-            </a:r>
-          </a:p>
-          <a:p>
-            <a:r>
-              <a:rPr lang="en-US" sz="2400" dirty="0"/>
-              <a:t>Introduce the concept of supervised learning</a:t>
-            </a:r>
-          </a:p>
-          <a:p>
-            <a:r>
-              <a:rPr lang="en-US" sz="2400" dirty="0"/>
-              <a:t>Understanding regression analysis fundamentals</a:t>
-            </a:r>
-          </a:p>
-          <a:p>
-            <a:r>
-              <a:rPr lang="en-US" sz="2400" dirty="0"/>
-              <a:t>Types of linear regression models</a:t>
-            </a:r>
-          </a:p>
-          <a:p>
-            <a:r>
-              <a:rPr lang="en-US" sz="2400" dirty="0"/>
-              <a:t>Best-fit line, hypothesis function, and OLS method</a:t>
-            </a:r>
-          </a:p>
-          <a:p>
-            <a:r>
-              <a:rPr lang="en-US" sz="2400" dirty="0"/>
-              <a:t>Closed-form solution implementation</a:t>
-            </a:r>
-          </a:p>
-          <a:p>
-            <a:r>
-              <a:rPr lang="en-US" sz="2400" dirty="0"/>
-              <a:t>Gradient descent algorithm</a:t>
-            </a:r>
-          </a:p>
-          <a:p>
-            <a:r>
-              <a:rPr lang="en-US" sz="2400" dirty="0"/>
-              <a:t>Linear regression assumptions</a:t>
-            </a:r>
-          </a:p>
-          <a:p>
-            <a:r>
-              <a:rPr lang="en-US" sz="2400" dirty="0"/>
-              <a:t>Evaluation metrics and performance assessment</a:t>
-            </a:r>
-          </a:p>
-          <a:p>
-            <a:r>
-              <a:rPr lang="en-US" sz="2400" dirty="0"/>
-              <a:t>Practical implementation with scikit-learn</a:t>
-            </a:r>
-          </a:p>
-          <a:p>
-            <a:endParaRPr lang="en-US" sz="2400" dirty="0"/>
-          </a:p>
-        </p:txBody>
-      </p:sp>
-      <p:sp>
-        <p:nvSpPr>
-          <p:cNvPr id="3" name="Title 2">
-            <a:extLst>
-              <a:ext uri="{FF2B5EF4-FFF2-40B4-BE49-F238E27FC236}">
-                <a16:creationId xmlns:a16="http://schemas.microsoft.com/office/drawing/2014/main" id="{071A7914-96DB-51CC-53B0-AF8ED0AF6AEC}"/>
-              </a:ext>
-            </a:extLst>
-          </p:cNvPr>
-          <p:cNvSpPr>
-            <a:spLocks noGrp="1"/>
-          </p:cNvSpPr>
-          <p:nvPr>
-            <p:ph type="title"/>
-          </p:nvPr>
-        </p:nvSpPr>
-        <p:spPr/>
-        <p:txBody>
-          <a:bodyPr>
-            <a:normAutofit/>
-          </a:bodyPr>
-          <a:lstStyle/>
-          <a:p>
-            <a:r>
-              <a:rPr lang="en-US" dirty="0"/>
-              <a:t>Topics and Learning Outcomes</a:t>
-            </a:r>
-          </a:p>
-        </p:txBody>
-      </p:sp>
-    </p:spTree>
-    <p:extLst>
-      <p:ext uri="{BB962C8B-B14F-4D97-AF65-F5344CB8AC3E}">
-        <p14:creationId xmlns:p14="http://schemas.microsoft.com/office/powerpoint/2010/main" val="2145969539"/>
-      </p:ext>
-    </p:extLst>
-  </p:cSld>
-  <p:clrMapOvr>
-    <a:masterClrMapping/>
-  </p:clrMapOvr>
-</p:sld>
-</file>
-
-<file path=ppt/slides/slide20.xml><?xml version="1.0" encoding="utf-8"?>
+<file path=ppt/slides/slide24.xml><?xml version="1.0" encoding="utf-8"?>
 <p:sld xmlns:a="http://schemas.openxmlformats.org/drawingml/2006/main" xmlns:r="http://schemas.openxmlformats.org/officeDocument/2006/relationships" xmlns:p="http://schemas.openxmlformats.org/presentationml/2006/main">
   <p:cSld>
     <p:spTree>
@@ -7310,31 +11562,31 @@
               <a:buNone/>
             </a:pPr>
             <a:r>
-              <a:rPr lang="en-US" dirty="0"/>
+              <a:rPr lang="en-US" sz="2000" b="1" dirty="0"/>
               <a:t>5. No Multicollinearity </a:t>
             </a:r>
           </a:p>
           <a:p>
             <a:r>
-              <a:rPr lang="en-US" dirty="0"/>
+              <a:rPr lang="en-US" sz="2000" dirty="0"/>
               <a:t>The independent variables should not be highly correlated with each other. </a:t>
             </a:r>
           </a:p>
           <a:p>
             <a:r>
-              <a:rPr lang="en-US" dirty="0"/>
+              <a:rPr lang="en-US" sz="2000" dirty="0"/>
               <a:t>Multicollinearity occurs when two or more independent variables are strongly related, making it difficult to isolate the effect of each variable on the dependent variable.</a:t>
             </a:r>
           </a:p>
           <a:p>
             <a:r>
-              <a:rPr lang="en-US" dirty="0"/>
+              <a:rPr lang="en-US" sz="2000" dirty="0"/>
               <a:t>If multicollinearity exists, it can lead to inaccurate results in multiple linear regression.</a:t>
             </a:r>
           </a:p>
           <a:p>
             <a:r>
-              <a:rPr lang="en-US" dirty="0"/>
+              <a:rPr lang="en-US" sz="2000" dirty="0"/>
               <a:t>For multiple linear regression, multicollinearity among independent variables can be assessed using the Variance Inflation Factor (VIF). A VIF value greater than 10 indicates high multicollinearity.</a:t>
             </a:r>
           </a:p>
@@ -7372,190 +11624,6 @@
     <p:extLst>
       <p:ext uri="{BB962C8B-B14F-4D97-AF65-F5344CB8AC3E}">
         <p14:creationId xmlns:p14="http://schemas.microsoft.com/office/powerpoint/2010/main" val="1558611893"/>
-      </p:ext>
-    </p:extLst>
-  </p:cSld>
-  <p:clrMapOvr>
-    <a:masterClrMapping/>
-  </p:clrMapOvr>
-</p:sld>
-</file>
-
-<file path=ppt/slides/slide21.xml><?xml version="1.0" encoding="utf-8"?>
-<p:sld xmlns:a="http://schemas.openxmlformats.org/drawingml/2006/main" xmlns:r="http://schemas.openxmlformats.org/officeDocument/2006/relationships" xmlns:p="http://schemas.openxmlformats.org/presentationml/2006/main">
-  <p:cSld>
-    <p:spTree>
-      <p:nvGrpSpPr>
-        <p:cNvPr id="1" name=""/>
-        <p:cNvGrpSpPr/>
-        <p:nvPr/>
-      </p:nvGrpSpPr>
-      <p:grpSpPr>
-        <a:xfrm>
-          <a:off x="0" y="0"/>
-          <a:ext cx="0" cy="0"/>
-          <a:chOff x="0" y="0"/>
-          <a:chExt cx="0" cy="0"/>
-        </a:xfrm>
-      </p:grpSpPr>
-      <p:pic>
-        <p:nvPicPr>
-          <p:cNvPr id="7" name="Picture 6">
-            <a:extLst>
-              <a:ext uri="{FF2B5EF4-FFF2-40B4-BE49-F238E27FC236}">
-                <a16:creationId xmlns:a16="http://schemas.microsoft.com/office/drawing/2014/main" id="{A38D0E97-EAFB-C1A1-50A4-D148BD794323}"/>
-              </a:ext>
-            </a:extLst>
-          </p:cNvPr>
-          <p:cNvPicPr>
-            <a:picLocks noChangeAspect="1"/>
-          </p:cNvPicPr>
-          <p:nvPr/>
-        </p:nvPicPr>
-        <p:blipFill>
-          <a:blip r:embed="rId2"/>
-          <a:stretch>
-            <a:fillRect/>
-          </a:stretch>
-        </p:blipFill>
-        <p:spPr>
-          <a:xfrm>
-            <a:off x="6660776" y="1690688"/>
-            <a:ext cx="5167946" cy="3227979"/>
-          </a:xfrm>
-          <a:prstGeom prst="rect">
-            <a:avLst/>
-          </a:prstGeom>
-        </p:spPr>
-      </p:pic>
-      <p:sp>
-        <p:nvSpPr>
-          <p:cNvPr id="3" name="Content Placeholder 2">
-            <a:extLst>
-              <a:ext uri="{FF2B5EF4-FFF2-40B4-BE49-F238E27FC236}">
-                <a16:creationId xmlns:a16="http://schemas.microsoft.com/office/drawing/2014/main" id="{102BC694-8487-C007-C9E9-C4570B4B8FFD}"/>
-              </a:ext>
-            </a:extLst>
-          </p:cNvPr>
-          <p:cNvSpPr>
-            <a:spLocks noGrp="1"/>
-          </p:cNvSpPr>
-          <p:nvPr>
-            <p:ph idx="1"/>
-          </p:nvPr>
-        </p:nvSpPr>
-        <p:spPr>
-          <a:xfrm>
-            <a:off x="838200" y="1633490"/>
-            <a:ext cx="6215743" cy="4310110"/>
-          </a:xfrm>
-        </p:spPr>
-        <p:txBody>
-          <a:bodyPr>
-            <a:normAutofit fontScale="85000" lnSpcReduction="10000"/>
-          </a:bodyPr>
-          <a:lstStyle/>
-          <a:p>
-            <a:r>
-              <a:rPr lang="en-US" sz="2400" dirty="0"/>
-              <a:t>Linear regression is a type of supervised machine learning algorithm that computes the linear relationship between a dependent variable and one or more independent variables by fitting a linear equation that models the relationship between these variables.</a:t>
-            </a:r>
-          </a:p>
-          <a:p>
-            <a:r>
-              <a:rPr lang="en-US" sz="2400" dirty="0"/>
-              <a:t>In LR, we use a linear formula in the form of:</a:t>
-            </a:r>
-          </a:p>
-          <a:p>
-            <a:pPr marL="233363" indent="-233363">
-              <a:buNone/>
-            </a:pPr>
-            <a:br>
-              <a:rPr lang="en-US" sz="2400" dirty="0"/>
-            </a:br>
-            <a:r>
-              <a:rPr lang="en-US" sz="3100" i="1" dirty="0"/>
-              <a:t>Y = B</a:t>
-            </a:r>
-            <a:r>
-              <a:rPr lang="en-US" sz="1500" b="1" i="1" dirty="0"/>
-              <a:t>0</a:t>
-            </a:r>
-            <a:r>
-              <a:rPr lang="en-US" sz="3100" i="1" dirty="0"/>
-              <a:t> + B</a:t>
-            </a:r>
-            <a:r>
-              <a:rPr lang="en-US" sz="1500" b="1" i="1" dirty="0"/>
-              <a:t>1</a:t>
-            </a:r>
-            <a:r>
-              <a:rPr lang="en-US" sz="3100" i="1" dirty="0"/>
-              <a:t>X</a:t>
-            </a:r>
-          </a:p>
-          <a:p>
-            <a:pPr marL="233363" indent="0">
-              <a:buNone/>
-            </a:pPr>
-            <a:r>
-              <a:rPr lang="en-US" sz="2400" dirty="0"/>
-              <a:t>to represent the relationship between an independent variable (X) and a dependent variable (Y).</a:t>
-            </a:r>
-          </a:p>
-          <a:p>
-            <a:pPr marL="233363" indent="-231775"/>
-            <a:r>
-              <a:rPr lang="en-US" sz="2400" dirty="0"/>
-              <a:t>In LR, both X and Y are numerical values, for example, X could be the employee’s years of experience and Y could be his predicted salary, and we use LR to model that relation.</a:t>
-            </a:r>
-          </a:p>
-          <a:p>
-            <a:pPr marL="233363" indent="0">
-              <a:buNone/>
-            </a:pPr>
-            <a:endParaRPr lang="en-US" sz="2400" dirty="0"/>
-          </a:p>
-          <a:p>
-            <a:endParaRPr lang="en-US" sz="2400" dirty="0"/>
-          </a:p>
-        </p:txBody>
-      </p:sp>
-      <p:sp>
-        <p:nvSpPr>
-          <p:cNvPr id="2" name="Title 1">
-            <a:extLst>
-              <a:ext uri="{FF2B5EF4-FFF2-40B4-BE49-F238E27FC236}">
-                <a16:creationId xmlns:a16="http://schemas.microsoft.com/office/drawing/2014/main" id="{F842C2E3-446E-3595-CA99-8E95BA7F2C23}"/>
-              </a:ext>
-            </a:extLst>
-          </p:cNvPr>
-          <p:cNvSpPr>
-            <a:spLocks noGrp="1"/>
-          </p:cNvSpPr>
-          <p:nvPr>
-            <p:ph type="title"/>
-          </p:nvPr>
-        </p:nvSpPr>
-        <p:spPr/>
-        <p:txBody>
-          <a:bodyPr>
-            <a:normAutofit/>
-          </a:bodyPr>
-          <a:lstStyle/>
-          <a:p>
-            <a:r>
-              <a:rPr lang="en-US" dirty="0"/>
-              <a:t>What is Regressions Analysis?</a:t>
-            </a:r>
-          </a:p>
-        </p:txBody>
-      </p:sp>
-    </p:spTree>
-    <p:extLst>
-      <p:ext uri="{BB962C8B-B14F-4D97-AF65-F5344CB8AC3E}">
-        <p14:creationId xmlns:p14="http://schemas.microsoft.com/office/powerpoint/2010/main" val="3910887702"/>
       </p:ext>
     </p:extLst>
   </p:cSld>

--- a/20243/Part 2-Regression/simple linear regression slides.pptx
+++ b/20243/Part 2-Regression/simple linear regression slides.pptx
@@ -19,16 +19,16 @@
     <p:sldId id="461" r:id="rId16"/>
     <p:sldId id="462" r:id="rId17"/>
     <p:sldId id="463" r:id="rId18"/>
-    <p:sldId id="482" r:id="rId19"/>
-    <p:sldId id="483" r:id="rId20"/>
-    <p:sldId id="486" r:id="rId21"/>
-    <p:sldId id="485" r:id="rId22"/>
-    <p:sldId id="487" r:id="rId23"/>
-    <p:sldId id="488" r:id="rId24"/>
-    <p:sldId id="465" r:id="rId25"/>
-    <p:sldId id="464" r:id="rId26"/>
-    <p:sldId id="466" r:id="rId27"/>
-    <p:sldId id="476" r:id="rId28"/>
+    <p:sldId id="465" r:id="rId19"/>
+    <p:sldId id="464" r:id="rId20"/>
+    <p:sldId id="466" r:id="rId21"/>
+    <p:sldId id="476" r:id="rId22"/>
+    <p:sldId id="482" r:id="rId23"/>
+    <p:sldId id="483" r:id="rId24"/>
+    <p:sldId id="486" r:id="rId25"/>
+    <p:sldId id="485" r:id="rId26"/>
+    <p:sldId id="487" r:id="rId27"/>
+    <p:sldId id="488" r:id="rId28"/>
   </p:sldIdLst>
   <p:sldSz cx="12192000" cy="6858000"/>
   <p:notesSz cx="6858000" cy="9144000"/>
@@ -138,7 +138,7 @@
 <file path=ppt/revisionInfo.xml><?xml version="1.0" encoding="utf-8"?>
 <p1510:revInfo xmlns:a="http://schemas.openxmlformats.org/drawingml/2006/main" xmlns:r="http://schemas.openxmlformats.org/officeDocument/2006/relationships" xmlns:p1510="http://schemas.microsoft.com/office/powerpoint/2015/10/main">
   <p1510:revLst>
-    <p1510:client id="{0455E0E6-2388-40FF-8789-A613D1CB1008}" v="37" dt="2025-07-26T18:08:36.814"/>
+    <p1510:client id="{0455E0E6-2388-40FF-8789-A613D1CB1008}" v="38" dt="2025-07-27T08:42:52.576"/>
   </p1510:revLst>
 </p1510:revInfo>
 </file>
@@ -1340,7 +1340,7 @@
   <pc:docChgLst>
     <pc:chgData name="Mohammed Fasha" userId="cc64f42d-a1a6-4f08-b97b-0c37f877119f" providerId="ADAL" clId="{0455E0E6-2388-40FF-8789-A613D1CB1008}"/>
     <pc:docChg chg="undo custSel addSld delSld modSld sldOrd">
-      <pc:chgData name="Mohammed Fasha" userId="cc64f42d-a1a6-4f08-b97b-0c37f877119f" providerId="ADAL" clId="{0455E0E6-2388-40FF-8789-A613D1CB1008}" dt="2025-07-26T18:10:35.618" v="584" actId="1076"/>
+      <pc:chgData name="Mohammed Fasha" userId="cc64f42d-a1a6-4f08-b97b-0c37f877119f" providerId="ADAL" clId="{0455E0E6-2388-40FF-8789-A613D1CB1008}" dt="2025-07-27T08:42:52.564" v="586"/>
       <pc:docMkLst>
         <pc:docMk/>
       </pc:docMkLst>
@@ -1497,7 +1497,14 @@
         </pc:spChg>
       </pc:sldChg>
       <pc:sldChg chg="add">
-        <pc:chgData name="Mohammed Fasha" userId="cc64f42d-a1a6-4f08-b97b-0c37f877119f" providerId="ADAL" clId="{0455E0E6-2388-40FF-8789-A613D1CB1008}" dt="2025-07-26T17:55:16.098" v="113"/>
+        <pc:chgData name="Mohammed Fasha" userId="cc64f42d-a1a6-4f08-b97b-0c37f877119f" providerId="ADAL" clId="{0455E0E6-2388-40FF-8789-A613D1CB1008}" dt="2025-07-27T08:42:52.564" v="586"/>
+        <pc:sldMkLst>
+          <pc:docMk/>
+          <pc:sldMk cId="105105862" sldId="482"/>
+        </pc:sldMkLst>
+      </pc:sldChg>
+      <pc:sldChg chg="add del">
+        <pc:chgData name="Mohammed Fasha" userId="cc64f42d-a1a6-4f08-b97b-0c37f877119f" providerId="ADAL" clId="{0455E0E6-2388-40FF-8789-A613D1CB1008}" dt="2025-07-27T08:42:49.961" v="585" actId="2696"/>
         <pc:sldMkLst>
           <pc:docMk/>
           <pc:sldMk cId="1929062822" sldId="482"/>
@@ -1541,6 +1548,13 @@
             <ac:spMk id="5" creationId="{ABCBDB70-511E-63F0-2A2E-C4DED7350238}"/>
           </ac:spMkLst>
         </pc:spChg>
+      </pc:sldChg>
+      <pc:sldChg chg="add">
+        <pc:chgData name="Mohammed Fasha" userId="cc64f42d-a1a6-4f08-b97b-0c37f877119f" providerId="ADAL" clId="{0455E0E6-2388-40FF-8789-A613D1CB1008}" dt="2025-07-27T08:42:52.564" v="586"/>
+        <pc:sldMkLst>
+          <pc:docMk/>
+          <pc:sldMk cId="853326057" sldId="483"/>
+        </pc:sldMkLst>
       </pc:sldChg>
       <pc:sldChg chg="addSp delSp modSp del mod">
         <pc:chgData name="Mohammed Fasha" userId="cc64f42d-a1a6-4f08-b97b-0c37f877119f" providerId="ADAL" clId="{0455E0E6-2388-40FF-8789-A613D1CB1008}" dt="2025-07-26T17:55:07.349" v="111" actId="2696"/>
@@ -1597,8 +1611,8 @@
           </ac:spMkLst>
         </pc:spChg>
       </pc:sldChg>
-      <pc:sldChg chg="add">
-        <pc:chgData name="Mohammed Fasha" userId="cc64f42d-a1a6-4f08-b97b-0c37f877119f" providerId="ADAL" clId="{0455E0E6-2388-40FF-8789-A613D1CB1008}" dt="2025-07-26T17:55:16.098" v="113"/>
+      <pc:sldChg chg="add del">
+        <pc:chgData name="Mohammed Fasha" userId="cc64f42d-a1a6-4f08-b97b-0c37f877119f" providerId="ADAL" clId="{0455E0E6-2388-40FF-8789-A613D1CB1008}" dt="2025-07-27T08:42:49.961" v="585" actId="2696"/>
         <pc:sldMkLst>
           <pc:docMk/>
           <pc:sldMk cId="2662145334" sldId="483"/>
@@ -1611,8 +1625,8 @@
           <pc:sldMk cId="124150105" sldId="485"/>
         </pc:sldMkLst>
       </pc:sldChg>
-      <pc:sldChg chg="addSp delSp modSp new mod">
-        <pc:chgData name="Mohammed Fasha" userId="cc64f42d-a1a6-4f08-b97b-0c37f877119f" providerId="ADAL" clId="{0455E0E6-2388-40FF-8789-A613D1CB1008}" dt="2025-07-26T18:07:58.982" v="550" actId="113"/>
+      <pc:sldChg chg="addSp delSp modSp new del mod">
+        <pc:chgData name="Mohammed Fasha" userId="cc64f42d-a1a6-4f08-b97b-0c37f877119f" providerId="ADAL" clId="{0455E0E6-2388-40FF-8789-A613D1CB1008}" dt="2025-07-27T08:42:49.961" v="585" actId="2696"/>
         <pc:sldMkLst>
           <pc:docMk/>
           <pc:sldMk cId="165576399" sldId="485"/>
@@ -1714,8 +1728,15 @@
           </ac:spMkLst>
         </pc:spChg>
       </pc:sldChg>
-      <pc:sldChg chg="addSp modSp add mod ord">
-        <pc:chgData name="Mohammed Fasha" userId="cc64f42d-a1a6-4f08-b97b-0c37f877119f" providerId="ADAL" clId="{0455E0E6-2388-40FF-8789-A613D1CB1008}" dt="2025-07-26T18:08:06.410" v="552" actId="113"/>
+      <pc:sldChg chg="add">
+        <pc:chgData name="Mohammed Fasha" userId="cc64f42d-a1a6-4f08-b97b-0c37f877119f" providerId="ADAL" clId="{0455E0E6-2388-40FF-8789-A613D1CB1008}" dt="2025-07-27T08:42:52.564" v="586"/>
+        <pc:sldMkLst>
+          <pc:docMk/>
+          <pc:sldMk cId="2868621846" sldId="485"/>
+        </pc:sldMkLst>
+      </pc:sldChg>
+      <pc:sldChg chg="addSp modSp add del mod ord">
+        <pc:chgData name="Mohammed Fasha" userId="cc64f42d-a1a6-4f08-b97b-0c37f877119f" providerId="ADAL" clId="{0455E0E6-2388-40FF-8789-A613D1CB1008}" dt="2025-07-27T08:42:49.961" v="585" actId="2696"/>
         <pc:sldMkLst>
           <pc:docMk/>
           <pc:sldMk cId="952835031" sldId="486"/>
@@ -1761,8 +1782,22 @@
           </ac:spMkLst>
         </pc:spChg>
       </pc:sldChg>
-      <pc:sldChg chg="addSp delSp modSp new mod">
-        <pc:chgData name="Mohammed Fasha" userId="cc64f42d-a1a6-4f08-b97b-0c37f877119f" providerId="ADAL" clId="{0455E0E6-2388-40FF-8789-A613D1CB1008}" dt="2025-07-26T18:07:48.760" v="547" actId="113"/>
+      <pc:sldChg chg="add">
+        <pc:chgData name="Mohammed Fasha" userId="cc64f42d-a1a6-4f08-b97b-0c37f877119f" providerId="ADAL" clId="{0455E0E6-2388-40FF-8789-A613D1CB1008}" dt="2025-07-27T08:42:52.564" v="586"/>
+        <pc:sldMkLst>
+          <pc:docMk/>
+          <pc:sldMk cId="3601141761" sldId="486"/>
+        </pc:sldMkLst>
+      </pc:sldChg>
+      <pc:sldChg chg="add">
+        <pc:chgData name="Mohammed Fasha" userId="cc64f42d-a1a6-4f08-b97b-0c37f877119f" providerId="ADAL" clId="{0455E0E6-2388-40FF-8789-A613D1CB1008}" dt="2025-07-27T08:42:52.564" v="586"/>
+        <pc:sldMkLst>
+          <pc:docMk/>
+          <pc:sldMk cId="1274490131" sldId="487"/>
+        </pc:sldMkLst>
+      </pc:sldChg>
+      <pc:sldChg chg="addSp delSp modSp new del mod">
+        <pc:chgData name="Mohammed Fasha" userId="cc64f42d-a1a6-4f08-b97b-0c37f877119f" providerId="ADAL" clId="{0455E0E6-2388-40FF-8789-A613D1CB1008}" dt="2025-07-27T08:42:49.961" v="585" actId="2696"/>
         <pc:sldMkLst>
           <pc:docMk/>
           <pc:sldMk cId="3390714327" sldId="487"/>
@@ -1832,8 +1867,15 @@
           </ac:picMkLst>
         </pc:picChg>
       </pc:sldChg>
-      <pc:sldChg chg="addSp delSp modSp new mod">
-        <pc:chgData name="Mohammed Fasha" userId="cc64f42d-a1a6-4f08-b97b-0c37f877119f" providerId="ADAL" clId="{0455E0E6-2388-40FF-8789-A613D1CB1008}" dt="2025-07-26T18:07:37.554" v="545" actId="790"/>
+      <pc:sldChg chg="add">
+        <pc:chgData name="Mohammed Fasha" userId="cc64f42d-a1a6-4f08-b97b-0c37f877119f" providerId="ADAL" clId="{0455E0E6-2388-40FF-8789-A613D1CB1008}" dt="2025-07-27T08:42:52.564" v="586"/>
+        <pc:sldMkLst>
+          <pc:docMk/>
+          <pc:sldMk cId="2357395440" sldId="488"/>
+        </pc:sldMkLst>
+      </pc:sldChg>
+      <pc:sldChg chg="addSp delSp modSp new del mod">
+        <pc:chgData name="Mohammed Fasha" userId="cc64f42d-a1a6-4f08-b97b-0c37f877119f" providerId="ADAL" clId="{0455E0E6-2388-40FF-8789-A613D1CB1008}" dt="2025-07-27T08:42:49.961" v="585" actId="2696"/>
         <pc:sldMkLst>
           <pc:docMk/>
           <pc:sldMk cId="3686005749" sldId="488"/>
@@ -2261,7 +2303,7 @@
           <a:p>
             <a:fld id="{D83FB9BE-DA6C-46CF-8E77-0CE63E601AD4}" type="datetimeFigureOut">
               <a:rPr lang="en-US" smtClean="0"/>
-              <a:t>7/26/2025</a:t>
+              <a:t>7/27/2025</a:t>
             </a:fld>
             <a:endParaRPr lang="en-US"/>
           </a:p>
@@ -2459,7 +2501,7 @@
           <a:p>
             <a:fld id="{D83FB9BE-DA6C-46CF-8E77-0CE63E601AD4}" type="datetimeFigureOut">
               <a:rPr lang="en-US" smtClean="0"/>
-              <a:t>7/26/2025</a:t>
+              <a:t>7/27/2025</a:t>
             </a:fld>
             <a:endParaRPr lang="en-US"/>
           </a:p>
@@ -2667,7 +2709,7 @@
           <a:p>
             <a:fld id="{D83FB9BE-DA6C-46CF-8E77-0CE63E601AD4}" type="datetimeFigureOut">
               <a:rPr lang="en-US" smtClean="0"/>
-              <a:t>7/26/2025</a:t>
+              <a:t>7/27/2025</a:t>
             </a:fld>
             <a:endParaRPr lang="en-US"/>
           </a:p>
@@ -3080,7 +3122,7 @@
           <a:p>
             <a:fld id="{D83FB9BE-DA6C-46CF-8E77-0CE63E601AD4}" type="datetimeFigureOut">
               <a:rPr lang="en-US" smtClean="0"/>
-              <a:t>7/26/2025</a:t>
+              <a:t>7/27/2025</a:t>
             </a:fld>
             <a:endParaRPr lang="en-US"/>
           </a:p>
@@ -3345,7 +3387,7 @@
           <a:p>
             <a:fld id="{D83FB9BE-DA6C-46CF-8E77-0CE63E601AD4}" type="datetimeFigureOut">
               <a:rPr lang="en-US" smtClean="0"/>
-              <a:t>7/26/2025</a:t>
+              <a:t>7/27/2025</a:t>
             </a:fld>
             <a:endParaRPr lang="en-US"/>
           </a:p>
@@ -3757,7 +3799,7 @@
           <a:p>
             <a:fld id="{D83FB9BE-DA6C-46CF-8E77-0CE63E601AD4}" type="datetimeFigureOut">
               <a:rPr lang="en-US" smtClean="0"/>
-              <a:t>7/26/2025</a:t>
+              <a:t>7/27/2025</a:t>
             </a:fld>
             <a:endParaRPr lang="en-US"/>
           </a:p>
@@ -3898,7 +3940,7 @@
           <a:p>
             <a:fld id="{D83FB9BE-DA6C-46CF-8E77-0CE63E601AD4}" type="datetimeFigureOut">
               <a:rPr lang="en-US" smtClean="0"/>
-              <a:t>7/26/2025</a:t>
+              <a:t>7/27/2025</a:t>
             </a:fld>
             <a:endParaRPr lang="en-US"/>
           </a:p>
@@ -4011,7 +4053,7 @@
           <a:p>
             <a:fld id="{D83FB9BE-DA6C-46CF-8E77-0CE63E601AD4}" type="datetimeFigureOut">
               <a:rPr lang="en-US" smtClean="0"/>
-              <a:t>7/26/2025</a:t>
+              <a:t>7/27/2025</a:t>
             </a:fld>
             <a:endParaRPr lang="en-US"/>
           </a:p>
@@ -4322,7 +4364,7 @@
           <a:p>
             <a:fld id="{D83FB9BE-DA6C-46CF-8E77-0CE63E601AD4}" type="datetimeFigureOut">
               <a:rPr lang="en-US" smtClean="0"/>
-              <a:t>7/26/2025</a:t>
+              <a:t>7/27/2025</a:t>
             </a:fld>
             <a:endParaRPr lang="en-US"/>
           </a:p>
@@ -4610,7 +4652,7 @@
           <a:p>
             <a:fld id="{D83FB9BE-DA6C-46CF-8E77-0CE63E601AD4}" type="datetimeFigureOut">
               <a:rPr lang="en-US" smtClean="0"/>
-              <a:t>7/26/2025</a:t>
+              <a:t>7/27/2025</a:t>
             </a:fld>
             <a:endParaRPr lang="en-US"/>
           </a:p>
@@ -4851,7 +4893,7 @@
           <a:p>
             <a:fld id="{D83FB9BE-DA6C-46CF-8E77-0CE63E601AD4}" type="datetimeFigureOut">
               <a:rPr lang="en-US" smtClean="0"/>
-              <a:t>7/26/2025</a:t>
+              <a:t>7/27/2025</a:t>
             </a:fld>
             <a:endParaRPr lang="en-US"/>
           </a:p>
@@ -6896,7 +6938,13 @@
   <p:cSld>
     <p:spTree>
       <p:nvGrpSpPr>
-        <p:cNvPr id="1" name=""/>
+        <p:cNvPr id="1" name="">
+          <a:extLst>
+            <a:ext uri="{FF2B5EF4-FFF2-40B4-BE49-F238E27FC236}">
+              <a16:creationId xmlns:a16="http://schemas.microsoft.com/office/drawing/2014/main" id="{D27CBF25-F52F-532E-A535-7A7D707482E4}"/>
+            </a:ext>
+          </a:extLst>
+        </p:cNvPr>
         <p:cNvGrpSpPr/>
         <p:nvPr/>
       </p:nvGrpSpPr>
@@ -6910,10 +6958,48 @@
       </p:grpSpPr>
       <p:sp>
         <p:nvSpPr>
-          <p:cNvPr id="4" name="Title 3">
-            <a:extLst>
-              <a:ext uri="{FF2B5EF4-FFF2-40B4-BE49-F238E27FC236}">
-                <a16:creationId xmlns:a16="http://schemas.microsoft.com/office/drawing/2014/main" id="{8E2EA1D2-44C5-E332-39BC-CE451FE205E7}"/>
+          <p:cNvPr id="2" name="Content Placeholder 1">
+            <a:extLst>
+              <a:ext uri="{FF2B5EF4-FFF2-40B4-BE49-F238E27FC236}">
+                <a16:creationId xmlns:a16="http://schemas.microsoft.com/office/drawing/2014/main" id="{D6A166C5-B6FB-3038-2293-415E4C7D22E6}"/>
+              </a:ext>
+            </a:extLst>
+          </p:cNvPr>
+          <p:cNvSpPr>
+            <a:spLocks noGrp="1"/>
+          </p:cNvSpPr>
+          <p:nvPr>
+            <p:ph idx="1"/>
+          </p:nvPr>
+        </p:nvSpPr>
+        <p:spPr>
+          <a:xfrm>
+            <a:off x="838200" y="1633491"/>
+            <a:ext cx="10999573" cy="748208"/>
+          </a:xfrm>
+        </p:spPr>
+        <p:txBody>
+          <a:bodyPr>
+            <a:normAutofit/>
+          </a:bodyPr>
+          <a:lstStyle/>
+          <a:p>
+            <a:pPr marL="0" indent="0">
+              <a:buNone/>
+            </a:pPr>
+            <a:r>
+              <a:rPr lang="en-US" sz="2000" dirty="0"/>
+              <a:t>Linear regression is a powerful tool for understanding and predicting the behavior of a variable; however, it needs to meet a few conditions to be accurate and dependable solutions. </a:t>
+            </a:r>
+          </a:p>
+        </p:txBody>
+      </p:sp>
+      <p:sp>
+        <p:nvSpPr>
+          <p:cNvPr id="3" name="Title 2">
+            <a:extLst>
+              <a:ext uri="{FF2B5EF4-FFF2-40B4-BE49-F238E27FC236}">
+                <a16:creationId xmlns:a16="http://schemas.microsoft.com/office/drawing/2014/main" id="{4699A8A2-3830-72B5-1A7A-82D011352862}"/>
               </a:ext>
             </a:extLst>
           </p:cNvPr>
@@ -6926,45 +7012,278 @@
         </p:nvSpPr>
         <p:spPr/>
         <p:txBody>
-          <a:bodyPr/>
+          <a:bodyPr>
+            <a:normAutofit/>
+          </a:bodyPr>
           <a:lstStyle/>
           <a:p>
             <a:r>
               <a:rPr lang="en-US" dirty="0"/>
-              <a:t>Implement Regression in Python</a:t>
+              <a:t>Assumptions of Simple Linear Regression</a:t>
             </a:r>
           </a:p>
         </p:txBody>
       </p:sp>
+      <p:pic>
+        <p:nvPicPr>
+          <p:cNvPr id="6" name="Picture 5">
+            <a:extLst>
+              <a:ext uri="{FF2B5EF4-FFF2-40B4-BE49-F238E27FC236}">
+                <a16:creationId xmlns:a16="http://schemas.microsoft.com/office/drawing/2014/main" id="{1200D47E-397F-9E31-C30B-EE0822713306}"/>
+              </a:ext>
+            </a:extLst>
+          </p:cNvPr>
+          <p:cNvPicPr>
+            <a:picLocks noChangeAspect="1"/>
+          </p:cNvPicPr>
+          <p:nvPr/>
+        </p:nvPicPr>
+        <p:blipFill>
+          <a:blip r:embed="rId2"/>
+          <a:stretch>
+            <a:fillRect/>
+          </a:stretch>
+        </p:blipFill>
+        <p:spPr>
+          <a:xfrm>
+            <a:off x="6893165" y="2469459"/>
+            <a:ext cx="4460635" cy="3499977"/>
+          </a:xfrm>
+          <a:prstGeom prst="rect">
+            <a:avLst/>
+          </a:prstGeom>
+        </p:spPr>
+      </p:pic>
       <p:sp>
         <p:nvSpPr>
-          <p:cNvPr id="5" name="Text Placeholder 4">
-            <a:extLst>
-              <a:ext uri="{FF2B5EF4-FFF2-40B4-BE49-F238E27FC236}">
-                <a16:creationId xmlns:a16="http://schemas.microsoft.com/office/drawing/2014/main" id="{ABCBDB70-511E-63F0-2A2E-C4DED7350238}"/>
-              </a:ext>
-            </a:extLst>
-          </p:cNvPr>
-          <p:cNvSpPr>
-            <a:spLocks noGrp="1"/>
+          <p:cNvPr id="4" name="Content Placeholder 1">
+            <a:extLst>
+              <a:ext uri="{FF2B5EF4-FFF2-40B4-BE49-F238E27FC236}">
+                <a16:creationId xmlns:a16="http://schemas.microsoft.com/office/drawing/2014/main" id="{BBEF8319-D9AC-E564-64FB-B881D619589E}"/>
+              </a:ext>
+            </a:extLst>
+          </p:cNvPr>
+          <p:cNvSpPr txBox="1">
+            <a:spLocks/>
           </p:cNvSpPr>
-          <p:nvPr>
-            <p:ph type="body" idx="1"/>
-          </p:nvPr>
+          <p:nvPr/>
         </p:nvSpPr>
-        <p:spPr/>
+        <p:spPr>
+          <a:xfrm>
+            <a:off x="838200" y="2539653"/>
+            <a:ext cx="5887065" cy="4498368"/>
+          </a:xfrm>
+          <a:prstGeom prst="rect">
+            <a:avLst/>
+          </a:prstGeom>
+        </p:spPr>
         <p:txBody>
-          <a:bodyPr/>
-          <a:lstStyle/>
-          <a:p>
-            <a:endParaRPr lang="en-US"/>
+          <a:bodyPr vert="horz" lIns="91440" tIns="45720" rIns="91440" bIns="45720" rtlCol="0">
+            <a:normAutofit/>
+          </a:bodyPr>
+          <a:lstStyle>
+            <a:lvl1pPr marL="228600" indent="-228600" algn="l" defTabSz="914400" rtl="0" eaLnBrk="1" latinLnBrk="0" hangingPunct="1">
+              <a:lnSpc>
+                <a:spcPct val="90000"/>
+              </a:lnSpc>
+              <a:spcBef>
+                <a:spcPts val="1000"/>
+              </a:spcBef>
+              <a:buFont typeface="Arial" panose="020B0604020202020204" pitchFamily="34" charset="0"/>
+              <a:buChar char="•"/>
+              <a:defRPr sz="2800" kern="1200">
+                <a:solidFill>
+                  <a:schemeClr val="tx1"/>
+                </a:solidFill>
+                <a:latin typeface="+mn-lt"/>
+                <a:ea typeface="+mn-ea"/>
+                <a:cs typeface="+mn-cs"/>
+              </a:defRPr>
+            </a:lvl1pPr>
+            <a:lvl2pPr marL="685800" indent="-228600" algn="l" defTabSz="914400" rtl="0" eaLnBrk="1" latinLnBrk="0" hangingPunct="1">
+              <a:lnSpc>
+                <a:spcPct val="90000"/>
+              </a:lnSpc>
+              <a:spcBef>
+                <a:spcPts val="500"/>
+              </a:spcBef>
+              <a:buFont typeface="Arial" panose="020B0604020202020204" pitchFamily="34" charset="0"/>
+              <a:buChar char="•"/>
+              <a:defRPr sz="2400" kern="1200">
+                <a:solidFill>
+                  <a:schemeClr val="tx1"/>
+                </a:solidFill>
+                <a:latin typeface="+mn-lt"/>
+                <a:ea typeface="+mn-ea"/>
+                <a:cs typeface="+mn-cs"/>
+              </a:defRPr>
+            </a:lvl2pPr>
+            <a:lvl3pPr marL="1143000" indent="-228600" algn="l" defTabSz="914400" rtl="0" eaLnBrk="1" latinLnBrk="0" hangingPunct="1">
+              <a:lnSpc>
+                <a:spcPct val="90000"/>
+              </a:lnSpc>
+              <a:spcBef>
+                <a:spcPts val="500"/>
+              </a:spcBef>
+              <a:buFont typeface="Arial" panose="020B0604020202020204" pitchFamily="34" charset="0"/>
+              <a:buChar char="•"/>
+              <a:defRPr sz="2000" kern="1200">
+                <a:solidFill>
+                  <a:schemeClr val="tx1"/>
+                </a:solidFill>
+                <a:latin typeface="+mn-lt"/>
+                <a:ea typeface="+mn-ea"/>
+                <a:cs typeface="+mn-cs"/>
+              </a:defRPr>
+            </a:lvl3pPr>
+            <a:lvl4pPr marL="1600200" indent="-228600" algn="l" defTabSz="914400" rtl="0" eaLnBrk="1" latinLnBrk="0" hangingPunct="1">
+              <a:lnSpc>
+                <a:spcPct val="90000"/>
+              </a:lnSpc>
+              <a:spcBef>
+                <a:spcPts val="500"/>
+              </a:spcBef>
+              <a:buFont typeface="Arial" panose="020B0604020202020204" pitchFamily="34" charset="0"/>
+              <a:buChar char="•"/>
+              <a:defRPr sz="1800" kern="1200">
+                <a:solidFill>
+                  <a:schemeClr val="tx1"/>
+                </a:solidFill>
+                <a:latin typeface="+mn-lt"/>
+                <a:ea typeface="+mn-ea"/>
+                <a:cs typeface="+mn-cs"/>
+              </a:defRPr>
+            </a:lvl4pPr>
+            <a:lvl5pPr marL="2057400" indent="-228600" algn="l" defTabSz="914400" rtl="0" eaLnBrk="1" latinLnBrk="0" hangingPunct="1">
+              <a:lnSpc>
+                <a:spcPct val="90000"/>
+              </a:lnSpc>
+              <a:spcBef>
+                <a:spcPts val="500"/>
+              </a:spcBef>
+              <a:buFont typeface="Arial" panose="020B0604020202020204" pitchFamily="34" charset="0"/>
+              <a:buChar char="•"/>
+              <a:defRPr sz="1800" kern="1200">
+                <a:solidFill>
+                  <a:schemeClr val="tx1"/>
+                </a:solidFill>
+                <a:latin typeface="+mn-lt"/>
+                <a:ea typeface="+mn-ea"/>
+                <a:cs typeface="+mn-cs"/>
+              </a:defRPr>
+            </a:lvl5pPr>
+            <a:lvl6pPr marL="2514600" indent="-228600" algn="l" defTabSz="914400" rtl="0" eaLnBrk="1" latinLnBrk="0" hangingPunct="1">
+              <a:lnSpc>
+                <a:spcPct val="90000"/>
+              </a:lnSpc>
+              <a:spcBef>
+                <a:spcPts val="500"/>
+              </a:spcBef>
+              <a:buFont typeface="Arial" panose="020B0604020202020204" pitchFamily="34" charset="0"/>
+              <a:buChar char="•"/>
+              <a:defRPr sz="1800" kern="1200">
+                <a:solidFill>
+                  <a:schemeClr val="tx1"/>
+                </a:solidFill>
+                <a:latin typeface="+mn-lt"/>
+                <a:ea typeface="+mn-ea"/>
+                <a:cs typeface="+mn-cs"/>
+              </a:defRPr>
+            </a:lvl6pPr>
+            <a:lvl7pPr marL="2971800" indent="-228600" algn="l" defTabSz="914400" rtl="0" eaLnBrk="1" latinLnBrk="0" hangingPunct="1">
+              <a:lnSpc>
+                <a:spcPct val="90000"/>
+              </a:lnSpc>
+              <a:spcBef>
+                <a:spcPts val="500"/>
+              </a:spcBef>
+              <a:buFont typeface="Arial" panose="020B0604020202020204" pitchFamily="34" charset="0"/>
+              <a:buChar char="•"/>
+              <a:defRPr sz="1800" kern="1200">
+                <a:solidFill>
+                  <a:schemeClr val="tx1"/>
+                </a:solidFill>
+                <a:latin typeface="+mn-lt"/>
+                <a:ea typeface="+mn-ea"/>
+                <a:cs typeface="+mn-cs"/>
+              </a:defRPr>
+            </a:lvl7pPr>
+            <a:lvl8pPr marL="3429000" indent="-228600" algn="l" defTabSz="914400" rtl="0" eaLnBrk="1" latinLnBrk="0" hangingPunct="1">
+              <a:lnSpc>
+                <a:spcPct val="90000"/>
+              </a:lnSpc>
+              <a:spcBef>
+                <a:spcPts val="500"/>
+              </a:spcBef>
+              <a:buFont typeface="Arial" panose="020B0604020202020204" pitchFamily="34" charset="0"/>
+              <a:buChar char="•"/>
+              <a:defRPr sz="1800" kern="1200">
+                <a:solidFill>
+                  <a:schemeClr val="tx1"/>
+                </a:solidFill>
+                <a:latin typeface="+mn-lt"/>
+                <a:ea typeface="+mn-ea"/>
+                <a:cs typeface="+mn-cs"/>
+              </a:defRPr>
+            </a:lvl8pPr>
+            <a:lvl9pPr marL="3886200" indent="-228600" algn="l" defTabSz="914400" rtl="0" eaLnBrk="1" latinLnBrk="0" hangingPunct="1">
+              <a:lnSpc>
+                <a:spcPct val="90000"/>
+              </a:lnSpc>
+              <a:spcBef>
+                <a:spcPts val="500"/>
+              </a:spcBef>
+              <a:buFont typeface="Arial" panose="020B0604020202020204" pitchFamily="34" charset="0"/>
+              <a:buChar char="•"/>
+              <a:defRPr sz="1800" kern="1200">
+                <a:solidFill>
+                  <a:schemeClr val="tx1"/>
+                </a:solidFill>
+                <a:latin typeface="+mn-lt"/>
+                <a:ea typeface="+mn-ea"/>
+                <a:cs typeface="+mn-cs"/>
+              </a:defRPr>
+            </a:lvl9pPr>
+          </a:lstStyle>
+          <a:p>
+            <a:pPr marL="0" indent="0">
+              <a:buNone/>
+            </a:pPr>
+            <a:r>
+              <a:rPr lang="en-US" sz="2000" b="1" dirty="0"/>
+              <a:t>1. Linearity: </a:t>
+            </a:r>
+          </a:p>
+          <a:p>
+            <a:r>
+              <a:rPr lang="en-US" sz="2000" dirty="0"/>
+              <a:t>The independent and dependent variables have a linear relationship with one another. </a:t>
+            </a:r>
+          </a:p>
+          <a:p>
+            <a:r>
+              <a:rPr lang="en-US" sz="2000" dirty="0"/>
+              <a:t>This implies that changes in the dependent variable follow those in the independent variable(s) in a linear fashion. </a:t>
+            </a:r>
+          </a:p>
+          <a:p>
+            <a:r>
+              <a:rPr lang="en-US" sz="2000" dirty="0"/>
+              <a:t>This means that there should be a straight line that can be drawn through the data points. </a:t>
+            </a:r>
+          </a:p>
+          <a:p>
+            <a:r>
+              <a:rPr lang="en-US" sz="2000" dirty="0"/>
+              <a:t>If the relationship is not linear, then linear regression will not be an accurate model.</a:t>
+            </a:r>
           </a:p>
         </p:txBody>
       </p:sp>
     </p:spTree>
     <p:extLst>
       <p:ext uri="{BB962C8B-B14F-4D97-AF65-F5344CB8AC3E}">
-        <p14:creationId xmlns:p14="http://schemas.microsoft.com/office/powerpoint/2010/main" val="1929062822"/>
+        <p14:creationId xmlns:p14="http://schemas.microsoft.com/office/powerpoint/2010/main" val="2067025602"/>
       </p:ext>
     </p:extLst>
   </p:cSld>
@@ -6979,7 +7298,13 @@
   <p:cSld>
     <p:spTree>
       <p:nvGrpSpPr>
-        <p:cNvPr id="1" name=""/>
+        <p:cNvPr id="1" name="">
+          <a:extLst>
+            <a:ext uri="{FF2B5EF4-FFF2-40B4-BE49-F238E27FC236}">
+              <a16:creationId xmlns:a16="http://schemas.microsoft.com/office/drawing/2014/main" id="{55E7488D-378D-04DB-274E-8070AF77B2F8}"/>
+            </a:ext>
+          </a:extLst>
+        </p:cNvPr>
         <p:cNvGrpSpPr/>
         <p:nvPr/>
       </p:nvGrpSpPr>
@@ -6993,10 +7318,68 @@
       </p:grpSpPr>
       <p:sp>
         <p:nvSpPr>
+          <p:cNvPr id="2" name="Content Placeholder 1">
+            <a:extLst>
+              <a:ext uri="{FF2B5EF4-FFF2-40B4-BE49-F238E27FC236}">
+                <a16:creationId xmlns:a16="http://schemas.microsoft.com/office/drawing/2014/main" id="{E4639E90-EC50-1142-F307-1730254FA4B7}"/>
+              </a:ext>
+            </a:extLst>
+          </p:cNvPr>
+          <p:cNvSpPr>
+            <a:spLocks noGrp="1"/>
+          </p:cNvSpPr>
+          <p:nvPr>
+            <p:ph idx="1"/>
+          </p:nvPr>
+        </p:nvSpPr>
+        <p:spPr>
+          <a:xfrm>
+            <a:off x="838200" y="1633491"/>
+            <a:ext cx="10515600" cy="2777144"/>
+          </a:xfrm>
+        </p:spPr>
+        <p:txBody>
+          <a:bodyPr>
+            <a:normAutofit/>
+          </a:bodyPr>
+          <a:lstStyle/>
+          <a:p>
+            <a:pPr marL="0" indent="0">
+              <a:buNone/>
+            </a:pPr>
+            <a:r>
+              <a:rPr lang="en-US" sz="2000" b="1" dirty="0"/>
+              <a:t>2. Independence: </a:t>
+            </a:r>
+            <a:r>
+              <a:rPr lang="en-US" sz="2000" dirty="0"/>
+              <a:t>The observations in the dataset must be independent, meaning the value of the dependent variable for one observation should not be influenced by the value of another. If this condition is violated, linear regression may produce inaccurate results.</a:t>
+            </a:r>
+          </a:p>
+          <a:p>
+            <a:pPr marL="0" indent="0">
+              <a:buNone/>
+            </a:pPr>
+            <a:r>
+              <a:rPr lang="en-US" sz="2000" b="1" dirty="0"/>
+              <a:t>3. Homoscedasticity: </a:t>
+            </a:r>
+            <a:r>
+              <a:rPr lang="en-US" sz="2000" dirty="0"/>
+              <a:t>The variance of the errors should be constant across all levels of the independent variable(s). This means that changes in the independent variable(s) should not affect the spread of the errors. If the error variance is not constant (heteroscedasticity), the linear regression model may not be reliable.</a:t>
+            </a:r>
+          </a:p>
+          <a:p>
+            <a:endParaRPr lang="en-US" sz="2000" dirty="0"/>
+          </a:p>
+        </p:txBody>
+      </p:sp>
+      <p:sp>
+        <p:nvSpPr>
           <p:cNvPr id="3" name="Title 2">
             <a:extLst>
               <a:ext uri="{FF2B5EF4-FFF2-40B4-BE49-F238E27FC236}">
-                <a16:creationId xmlns:a16="http://schemas.microsoft.com/office/drawing/2014/main" id="{313D3DFB-4B7B-5020-971F-AF2B7A0A35FA}"/>
+                <a16:creationId xmlns:a16="http://schemas.microsoft.com/office/drawing/2014/main" id="{9CE14663-F603-8E9B-380B-9F29A5C89810}"/>
               </a:ext>
             </a:extLst>
           </p:cNvPr>
@@ -7014,552 +7397,75 @@
           <a:p>
             <a:r>
               <a:rPr lang="en-US" dirty="0"/>
-              <a:t>Import the </a:t>
-            </a:r>
-            <a:r>
-              <a:rPr lang="en-US"/>
-              <a:t>Required Libraries</a:t>
+              <a:t>Assumptions of Simple Linear Regression</a:t>
             </a:r>
           </a:p>
         </p:txBody>
       </p:sp>
-      <p:sp>
-        <p:nvSpPr>
-          <p:cNvPr id="8" name="TextBox 7">
-            <a:extLst>
-              <a:ext uri="{FF2B5EF4-FFF2-40B4-BE49-F238E27FC236}">
-                <a16:creationId xmlns:a16="http://schemas.microsoft.com/office/drawing/2014/main" id="{ACB299D0-626F-737A-2A1F-4F549FE052EC}"/>
-              </a:ext>
-            </a:extLst>
-          </p:cNvPr>
-          <p:cNvSpPr txBox="1"/>
+      <p:pic>
+        <p:nvPicPr>
+          <p:cNvPr id="5" name="Picture 4">
+            <a:extLst>
+              <a:ext uri="{FF2B5EF4-FFF2-40B4-BE49-F238E27FC236}">
+                <a16:creationId xmlns:a16="http://schemas.microsoft.com/office/drawing/2014/main" id="{A8CF5184-C11D-A684-D4E9-FA1F42D7D64D}"/>
+              </a:ext>
+            </a:extLst>
+          </p:cNvPr>
+          <p:cNvPicPr>
+            <a:picLocks noChangeAspect="1"/>
+          </p:cNvPicPr>
           <p:nvPr/>
-        </p:nvSpPr>
+        </p:nvPicPr>
+        <p:blipFill>
+          <a:blip r:embed="rId2"/>
+          <a:stretch>
+            <a:fillRect/>
+          </a:stretch>
+        </p:blipFill>
         <p:spPr>
           <a:xfrm>
-            <a:off x="903586" y="1927455"/>
-            <a:ext cx="10450213" cy="4385816"/>
+            <a:off x="1349679" y="4410635"/>
+            <a:ext cx="3479753" cy="2180382"/>
           </a:xfrm>
           <a:prstGeom prst="rect">
             <a:avLst/>
           </a:prstGeom>
-          <a:noFill/>
         </p:spPr>
-        <p:txBody>
-          <a:bodyPr wrap="square">
-            <a:spAutoFit/>
-          </a:bodyPr>
-          <a:lstStyle/>
-          <a:p>
-            <a:pPr>
-              <a:spcBef>
-                <a:spcPts val="600"/>
-              </a:spcBef>
-              <a:buNone/>
-            </a:pPr>
-            <a:r>
-              <a:rPr lang="en-US" b="1" noProof="1">
-                <a:solidFill>
-                  <a:srgbClr val="9723B4"/>
-                </a:solidFill>
-                <a:effectLst/>
-                <a:latin typeface="Courier New" panose="02070309020205020404" pitchFamily="49" charset="0"/>
-              </a:rPr>
-              <a:t>import</a:t>
-            </a:r>
-            <a:r>
-              <a:rPr lang="en-US" b="1" noProof="1">
-                <a:solidFill>
-                  <a:srgbClr val="000000"/>
-                </a:solidFill>
-                <a:effectLst/>
-                <a:latin typeface="Courier New" panose="02070309020205020404" pitchFamily="49" charset="0"/>
-              </a:rPr>
-              <a:t> numpy </a:t>
-            </a:r>
-            <a:r>
-              <a:rPr lang="en-US" b="1" noProof="1">
-                <a:solidFill>
-                  <a:srgbClr val="9723B4"/>
-                </a:solidFill>
-                <a:effectLst/>
-                <a:latin typeface="Courier New" panose="02070309020205020404" pitchFamily="49" charset="0"/>
-              </a:rPr>
-              <a:t>as</a:t>
-            </a:r>
-            <a:r>
-              <a:rPr lang="en-US" b="1" noProof="1">
-                <a:solidFill>
-                  <a:srgbClr val="000000"/>
-                </a:solidFill>
-                <a:effectLst/>
-                <a:latin typeface="Courier New" panose="02070309020205020404" pitchFamily="49" charset="0"/>
-              </a:rPr>
-              <a:t> np</a:t>
-            </a:r>
-          </a:p>
-          <a:p>
-            <a:pPr>
-              <a:spcBef>
-                <a:spcPts val="600"/>
-              </a:spcBef>
-              <a:buNone/>
-            </a:pPr>
-            <a:r>
-              <a:rPr lang="en-US" b="1" noProof="1">
-                <a:solidFill>
-                  <a:srgbClr val="9723B4"/>
-                </a:solidFill>
-                <a:effectLst/>
-                <a:latin typeface="Courier New" panose="02070309020205020404" pitchFamily="49" charset="0"/>
-              </a:rPr>
-              <a:t>import</a:t>
-            </a:r>
-            <a:r>
-              <a:rPr lang="en-US" b="1" noProof="1">
-                <a:solidFill>
-                  <a:srgbClr val="000000"/>
-                </a:solidFill>
-                <a:effectLst/>
-                <a:latin typeface="Courier New" panose="02070309020205020404" pitchFamily="49" charset="0"/>
-              </a:rPr>
-              <a:t> pandas </a:t>
-            </a:r>
-            <a:r>
-              <a:rPr lang="en-US" b="1" noProof="1">
-                <a:solidFill>
-                  <a:srgbClr val="9723B4"/>
-                </a:solidFill>
-                <a:effectLst/>
-                <a:latin typeface="Courier New" panose="02070309020205020404" pitchFamily="49" charset="0"/>
-              </a:rPr>
-              <a:t>as</a:t>
-            </a:r>
-            <a:r>
-              <a:rPr lang="en-US" b="1" noProof="1">
-                <a:solidFill>
-                  <a:srgbClr val="000000"/>
-                </a:solidFill>
-                <a:effectLst/>
-                <a:latin typeface="Courier New" panose="02070309020205020404" pitchFamily="49" charset="0"/>
-              </a:rPr>
-              <a:t> pd</a:t>
-            </a:r>
-          </a:p>
-          <a:p>
-            <a:pPr>
-              <a:spcBef>
-                <a:spcPts val="600"/>
-              </a:spcBef>
-              <a:buNone/>
-            </a:pPr>
-            <a:r>
-              <a:rPr lang="en-US" b="1" noProof="1">
-                <a:solidFill>
-                  <a:srgbClr val="9723B4"/>
-                </a:solidFill>
-                <a:effectLst/>
-                <a:latin typeface="Courier New" panose="02070309020205020404" pitchFamily="49" charset="0"/>
-              </a:rPr>
-              <a:t>import</a:t>
-            </a:r>
-            <a:r>
-              <a:rPr lang="en-US" b="1" noProof="1">
-                <a:solidFill>
-                  <a:srgbClr val="000000"/>
-                </a:solidFill>
-                <a:effectLst/>
-                <a:latin typeface="Courier New" panose="02070309020205020404" pitchFamily="49" charset="0"/>
-              </a:rPr>
-              <a:t> matplotlib.pyplot </a:t>
-            </a:r>
-            <a:r>
-              <a:rPr lang="en-US" b="1" noProof="1">
-                <a:solidFill>
-                  <a:srgbClr val="9723B4"/>
-                </a:solidFill>
-                <a:effectLst/>
-                <a:latin typeface="Courier New" panose="02070309020205020404" pitchFamily="49" charset="0"/>
-              </a:rPr>
-              <a:t>as</a:t>
-            </a:r>
-            <a:r>
-              <a:rPr lang="en-US" b="1" noProof="1">
-                <a:solidFill>
-                  <a:srgbClr val="000000"/>
-                </a:solidFill>
-                <a:effectLst/>
-                <a:latin typeface="Courier New" panose="02070309020205020404" pitchFamily="49" charset="0"/>
-              </a:rPr>
-              <a:t> plt  </a:t>
-            </a:r>
-          </a:p>
-          <a:p>
-            <a:pPr>
-              <a:spcBef>
-                <a:spcPts val="600"/>
-              </a:spcBef>
-              <a:buNone/>
-            </a:pPr>
-            <a:br>
-              <a:rPr lang="en-US" b="1" noProof="1">
-                <a:solidFill>
-                  <a:srgbClr val="000000"/>
-                </a:solidFill>
-                <a:effectLst/>
-                <a:latin typeface="Courier New" panose="02070309020205020404" pitchFamily="49" charset="0"/>
-              </a:rPr>
-            </a:br>
-            <a:r>
-              <a:rPr lang="en-US" b="1" noProof="1">
-                <a:solidFill>
-                  <a:srgbClr val="008000"/>
-                </a:solidFill>
-                <a:effectLst/>
-                <a:latin typeface="Courier New" panose="02070309020205020404" pitchFamily="49" charset="0"/>
-              </a:rPr>
-              <a:t># import the required machine learning libraries</a:t>
-            </a:r>
-            <a:endParaRPr lang="en-US" b="1" noProof="1">
-              <a:solidFill>
-                <a:srgbClr val="000000"/>
-              </a:solidFill>
-              <a:effectLst/>
-              <a:latin typeface="Courier New" panose="02070309020205020404" pitchFamily="49" charset="0"/>
-            </a:endParaRPr>
-          </a:p>
-          <a:p>
-            <a:pPr>
-              <a:spcBef>
-                <a:spcPts val="600"/>
-              </a:spcBef>
-              <a:buNone/>
-            </a:pPr>
-            <a:r>
-              <a:rPr lang="en-US" b="1" noProof="1">
-                <a:solidFill>
-                  <a:srgbClr val="9723B4"/>
-                </a:solidFill>
-                <a:effectLst/>
-                <a:latin typeface="Courier New" panose="02070309020205020404" pitchFamily="49" charset="0"/>
-              </a:rPr>
-              <a:t>from</a:t>
-            </a:r>
-            <a:r>
-              <a:rPr lang="en-US" b="1" noProof="1">
-                <a:solidFill>
-                  <a:srgbClr val="000000"/>
-                </a:solidFill>
-                <a:effectLst/>
-                <a:latin typeface="Courier New" panose="02070309020205020404" pitchFamily="49" charset="0"/>
-              </a:rPr>
-              <a:t> sklearn.linear_model </a:t>
-            </a:r>
-            <a:r>
-              <a:rPr lang="en-US" b="1" noProof="1">
-                <a:solidFill>
-                  <a:srgbClr val="9723B4"/>
-                </a:solidFill>
-                <a:effectLst/>
-                <a:latin typeface="Courier New" panose="02070309020205020404" pitchFamily="49" charset="0"/>
-              </a:rPr>
-              <a:t>import</a:t>
-            </a:r>
-            <a:r>
-              <a:rPr lang="en-US" b="1" noProof="1">
-                <a:solidFill>
-                  <a:srgbClr val="000000"/>
-                </a:solidFill>
-                <a:effectLst/>
-                <a:latin typeface="Courier New" panose="02070309020205020404" pitchFamily="49" charset="0"/>
-              </a:rPr>
-              <a:t> LinearRegression</a:t>
-            </a:r>
-          </a:p>
-          <a:p>
-            <a:pPr>
-              <a:spcBef>
-                <a:spcPts val="600"/>
-              </a:spcBef>
-              <a:buNone/>
-            </a:pPr>
-            <a:r>
-              <a:rPr lang="en-US" b="1" noProof="1">
-                <a:solidFill>
-                  <a:srgbClr val="9723B4"/>
-                </a:solidFill>
-                <a:effectLst/>
-                <a:latin typeface="Courier New" panose="02070309020205020404" pitchFamily="49" charset="0"/>
-              </a:rPr>
-              <a:t>from</a:t>
-            </a:r>
-            <a:r>
-              <a:rPr lang="en-US" b="1" noProof="1">
-                <a:solidFill>
-                  <a:srgbClr val="000000"/>
-                </a:solidFill>
-                <a:effectLst/>
-                <a:latin typeface="Courier New" panose="02070309020205020404" pitchFamily="49" charset="0"/>
-              </a:rPr>
-              <a:t> sklearn.model_selection </a:t>
-            </a:r>
-            <a:r>
-              <a:rPr lang="en-US" b="1" noProof="1">
-                <a:solidFill>
-                  <a:srgbClr val="9723B4"/>
-                </a:solidFill>
-                <a:effectLst/>
-                <a:latin typeface="Courier New" panose="02070309020205020404" pitchFamily="49" charset="0"/>
-              </a:rPr>
-              <a:t>import</a:t>
-            </a:r>
-            <a:r>
-              <a:rPr lang="en-US" b="1" noProof="1">
-                <a:solidFill>
-                  <a:srgbClr val="000000"/>
-                </a:solidFill>
-                <a:effectLst/>
-                <a:latin typeface="Courier New" panose="02070309020205020404" pitchFamily="49" charset="0"/>
-              </a:rPr>
-              <a:t> train_test_split </a:t>
-            </a:r>
-          </a:p>
-          <a:p>
-            <a:pPr>
-              <a:spcBef>
-                <a:spcPts val="600"/>
-              </a:spcBef>
-              <a:buNone/>
-            </a:pPr>
-            <a:r>
-              <a:rPr lang="en-US" b="1" noProof="1">
-                <a:solidFill>
-                  <a:srgbClr val="9723B4"/>
-                </a:solidFill>
-                <a:effectLst/>
-                <a:latin typeface="Courier New" panose="02070309020205020404" pitchFamily="49" charset="0"/>
-              </a:rPr>
-              <a:t>from</a:t>
-            </a:r>
-            <a:r>
-              <a:rPr lang="en-US" b="1" noProof="1">
-                <a:solidFill>
-                  <a:srgbClr val="000000"/>
-                </a:solidFill>
-                <a:effectLst/>
-                <a:latin typeface="Courier New" panose="02070309020205020404" pitchFamily="49" charset="0"/>
-              </a:rPr>
-              <a:t> sklearn.metrics </a:t>
-            </a:r>
-            <a:r>
-              <a:rPr lang="en-US" b="1" noProof="1">
-                <a:solidFill>
-                  <a:srgbClr val="9723B4"/>
-                </a:solidFill>
-                <a:effectLst/>
-                <a:latin typeface="Courier New" panose="02070309020205020404" pitchFamily="49" charset="0"/>
-              </a:rPr>
-              <a:t>import</a:t>
-            </a:r>
-            <a:r>
-              <a:rPr lang="en-US" b="1" noProof="1">
-                <a:solidFill>
-                  <a:srgbClr val="000000"/>
-                </a:solidFill>
-                <a:effectLst/>
-                <a:latin typeface="Courier New" panose="02070309020205020404" pitchFamily="49" charset="0"/>
-              </a:rPr>
-              <a:t> r2_score</a:t>
-            </a:r>
-          </a:p>
-          <a:p>
-            <a:pPr>
-              <a:spcBef>
-                <a:spcPts val="600"/>
-              </a:spcBef>
-              <a:buNone/>
-            </a:pPr>
-            <a:br>
-              <a:rPr lang="en-US" b="1" noProof="1">
-                <a:solidFill>
-                  <a:srgbClr val="000000"/>
-                </a:solidFill>
-                <a:effectLst/>
-                <a:latin typeface="Courier New" panose="02070309020205020404" pitchFamily="49" charset="0"/>
-              </a:rPr>
-            </a:br>
-            <a:r>
-              <a:rPr lang="en-US" b="1" noProof="1">
-                <a:solidFill>
-                  <a:srgbClr val="000000"/>
-                </a:solidFill>
-                <a:effectLst/>
-                <a:latin typeface="Courier New" panose="02070309020205020404" pitchFamily="49" charset="0"/>
-              </a:rPr>
-              <a:t>df = pd.read_csv(</a:t>
-            </a:r>
-            <a:r>
-              <a:rPr lang="en-US" b="1" noProof="1">
-                <a:solidFill>
-                  <a:srgbClr val="A31515"/>
-                </a:solidFill>
-                <a:effectLst/>
-                <a:latin typeface="Courier New" panose="02070309020205020404" pitchFamily="49" charset="0"/>
-              </a:rPr>
-              <a:t>'https://raw.githubusercontent.com/msfasha/307304-Data-Mining/refs/heads/main/20242/datasets/apartment_prices.csv'</a:t>
-            </a:r>
-            <a:r>
-              <a:rPr lang="en-US" b="1" noProof="1">
-                <a:solidFill>
-                  <a:srgbClr val="000000"/>
-                </a:solidFill>
-                <a:effectLst/>
-                <a:latin typeface="Courier New" panose="02070309020205020404" pitchFamily="49" charset="0"/>
-              </a:rPr>
-              <a:t>)</a:t>
-            </a:r>
-          </a:p>
-          <a:p>
-            <a:pPr>
-              <a:spcBef>
-                <a:spcPts val="600"/>
-              </a:spcBef>
-              <a:buNone/>
-            </a:pPr>
-            <a:r>
-              <a:rPr lang="en-US" b="1" noProof="1">
-                <a:solidFill>
-                  <a:srgbClr val="6A5221"/>
-                </a:solidFill>
-                <a:effectLst/>
-                <a:latin typeface="Courier New" panose="02070309020205020404" pitchFamily="49" charset="0"/>
-              </a:rPr>
-              <a:t>print</a:t>
-            </a:r>
-            <a:r>
-              <a:rPr lang="en-US" b="1" noProof="1">
-                <a:solidFill>
-                  <a:srgbClr val="000000"/>
-                </a:solidFill>
-                <a:effectLst/>
-                <a:latin typeface="Courier New" panose="02070309020205020404" pitchFamily="49" charset="0"/>
-              </a:rPr>
-              <a:t>(</a:t>
-            </a:r>
-            <a:r>
-              <a:rPr lang="en-US" b="1" noProof="1">
-                <a:solidFill>
-                  <a:srgbClr val="0000FF"/>
-                </a:solidFill>
-                <a:effectLst/>
-                <a:latin typeface="Courier New" panose="02070309020205020404" pitchFamily="49" charset="0"/>
-              </a:rPr>
-              <a:t>f</a:t>
-            </a:r>
-            <a:r>
-              <a:rPr lang="en-US" b="1" noProof="1">
-                <a:solidFill>
-                  <a:srgbClr val="A31515"/>
-                </a:solidFill>
-                <a:effectLst/>
-                <a:latin typeface="Courier New" panose="02070309020205020404" pitchFamily="49" charset="0"/>
-              </a:rPr>
-              <a:t>"Number of rows in the dataset: </a:t>
-            </a:r>
-            <a:r>
-              <a:rPr lang="en-US" b="1" noProof="1">
-                <a:solidFill>
-                  <a:srgbClr val="000000"/>
-                </a:solidFill>
-                <a:effectLst/>
-                <a:latin typeface="Courier New" panose="02070309020205020404" pitchFamily="49" charset="0"/>
-              </a:rPr>
-              <a:t>{</a:t>
-            </a:r>
-            <a:r>
-              <a:rPr lang="en-US" b="1" noProof="1">
-                <a:solidFill>
-                  <a:srgbClr val="6A5221"/>
-                </a:solidFill>
-                <a:effectLst/>
-                <a:latin typeface="Courier New" panose="02070309020205020404" pitchFamily="49" charset="0"/>
-              </a:rPr>
-              <a:t>len</a:t>
-            </a:r>
-            <a:r>
-              <a:rPr lang="en-US" b="1" noProof="1">
-                <a:solidFill>
-                  <a:srgbClr val="000000"/>
-                </a:solidFill>
-                <a:effectLst/>
-                <a:latin typeface="Courier New" panose="02070309020205020404" pitchFamily="49" charset="0"/>
-              </a:rPr>
-              <a:t>(df)}</a:t>
-            </a:r>
-            <a:r>
-              <a:rPr lang="en-US" b="1" noProof="1">
-                <a:solidFill>
-                  <a:srgbClr val="A31515"/>
-                </a:solidFill>
-                <a:effectLst/>
-                <a:latin typeface="Courier New" panose="02070309020205020404" pitchFamily="49" charset="0"/>
-              </a:rPr>
-              <a:t>"</a:t>
-            </a:r>
-            <a:r>
-              <a:rPr lang="en-US" b="1" noProof="1">
-                <a:solidFill>
-                  <a:srgbClr val="000000"/>
-                </a:solidFill>
-                <a:effectLst/>
-                <a:latin typeface="Courier New" panose="02070309020205020404" pitchFamily="49" charset="0"/>
-              </a:rPr>
-              <a:t>)</a:t>
-            </a:r>
-          </a:p>
-          <a:p>
-            <a:pPr>
-              <a:spcBef>
-                <a:spcPts val="600"/>
-              </a:spcBef>
-            </a:pPr>
-            <a:r>
-              <a:rPr lang="en-US" b="1" noProof="1">
-                <a:solidFill>
-                  <a:srgbClr val="000000"/>
-                </a:solidFill>
-                <a:effectLst/>
-                <a:latin typeface="Courier New" panose="02070309020205020404" pitchFamily="49" charset="0"/>
-              </a:rPr>
-              <a:t>df.head(</a:t>
-            </a:r>
-            <a:r>
-              <a:rPr lang="en-US" b="1" noProof="1">
-                <a:solidFill>
-                  <a:srgbClr val="116644"/>
-                </a:solidFill>
-                <a:effectLst/>
-                <a:latin typeface="Courier New" panose="02070309020205020404" pitchFamily="49" charset="0"/>
-              </a:rPr>
-              <a:t>3</a:t>
-            </a:r>
-            <a:r>
-              <a:rPr lang="en-US" b="1" noProof="1">
-                <a:solidFill>
-                  <a:srgbClr val="000000"/>
-                </a:solidFill>
-                <a:effectLst/>
-                <a:latin typeface="Courier New" panose="02070309020205020404" pitchFamily="49" charset="0"/>
-              </a:rPr>
-              <a:t>)</a:t>
-            </a:r>
-          </a:p>
-        </p:txBody>
-      </p:sp>
+      </p:pic>
+      <p:pic>
+        <p:nvPicPr>
+          <p:cNvPr id="7" name="Picture 6">
+            <a:extLst>
+              <a:ext uri="{FF2B5EF4-FFF2-40B4-BE49-F238E27FC236}">
+                <a16:creationId xmlns:a16="http://schemas.microsoft.com/office/drawing/2014/main" id="{11CD6987-E88A-6289-EAA7-4A698B7CE9FF}"/>
+              </a:ext>
+            </a:extLst>
+          </p:cNvPr>
+          <p:cNvPicPr>
+            <a:picLocks noChangeAspect="1"/>
+          </p:cNvPicPr>
+          <p:nvPr/>
+        </p:nvPicPr>
+        <p:blipFill>
+          <a:blip r:embed="rId3"/>
+          <a:stretch>
+            <a:fillRect/>
+          </a:stretch>
+        </p:blipFill>
+        <p:spPr>
+          <a:xfrm>
+            <a:off x="6985330" y="4225444"/>
+            <a:ext cx="3633052" cy="2550765"/>
+          </a:xfrm>
+          <a:prstGeom prst="rect">
+            <a:avLst/>
+          </a:prstGeom>
+        </p:spPr>
+      </p:pic>
     </p:spTree>
     <p:extLst>
       <p:ext uri="{BB962C8B-B14F-4D97-AF65-F5344CB8AC3E}">
-        <p14:creationId xmlns:p14="http://schemas.microsoft.com/office/powerpoint/2010/main" val="2662145334"/>
+        <p14:creationId xmlns:p14="http://schemas.microsoft.com/office/powerpoint/2010/main" val="1559017199"/>
       </p:ext>
     </p:extLst>
   </p:cSld>
@@ -7577,7 +7483,7 @@
         <p:cNvPr id="1" name="">
           <a:extLst>
             <a:ext uri="{FF2B5EF4-FFF2-40B4-BE49-F238E27FC236}">
-              <a16:creationId xmlns:a16="http://schemas.microsoft.com/office/drawing/2014/main" id="{015ADE49-E05E-6062-5AAE-E6885C34FF1F}"/>
+              <a16:creationId xmlns:a16="http://schemas.microsoft.com/office/drawing/2014/main" id="{5900C09F-F48B-B9D4-D4BA-03E1293B4B46}"/>
             </a:ext>
           </a:extLst>
         </p:cNvPr>
@@ -7597,7 +7503,7 @@
           <p:cNvPr id="2" name="Content Placeholder 1">
             <a:extLst>
               <a:ext uri="{FF2B5EF4-FFF2-40B4-BE49-F238E27FC236}">
-                <a16:creationId xmlns:a16="http://schemas.microsoft.com/office/drawing/2014/main" id="{867A10B3-72F0-DEA2-7DED-0367CA380B36}"/>
+                <a16:creationId xmlns:a16="http://schemas.microsoft.com/office/drawing/2014/main" id="{AAD33A44-4738-B463-10DB-B09ADF5D976F}"/>
               </a:ext>
             </a:extLst>
           </p:cNvPr>
@@ -7610,13 +7516,13 @@
         </p:nvSpPr>
         <p:spPr>
           <a:xfrm>
-            <a:off x="838200" y="1763236"/>
-            <a:ext cx="10515600" cy="318877"/>
+            <a:off x="838201" y="1633491"/>
+            <a:ext cx="10515600" cy="1548980"/>
           </a:xfrm>
         </p:spPr>
         <p:txBody>
           <a:bodyPr>
-            <a:normAutofit fontScale="70000" lnSpcReduction="20000"/>
+            <a:normAutofit/>
           </a:bodyPr>
           <a:lstStyle/>
           <a:p>
@@ -7624,8 +7530,12 @@
               <a:buNone/>
             </a:pPr>
             <a:r>
-              <a:rPr lang="en-US" dirty="0"/>
-              <a:t>Split to x and y</a:t>
+              <a:rPr lang="en-US" sz="2000" b="1" dirty="0"/>
+              <a:t>4. Normality: </a:t>
+            </a:r>
+            <a:r>
+              <a:rPr lang="en-US" sz="2000" dirty="0"/>
+              <a:t>The residuals should be normally distributed. This means that the residuals should follow a bell-shaped curve. If the residuals are not normally distributed, then linear regression will not be an accurate model.</a:t>
             </a:r>
           </a:p>
         </p:txBody>
@@ -7635,7 +7545,7 @@
           <p:cNvPr id="3" name="Title 2">
             <a:extLst>
               <a:ext uri="{FF2B5EF4-FFF2-40B4-BE49-F238E27FC236}">
-                <a16:creationId xmlns:a16="http://schemas.microsoft.com/office/drawing/2014/main" id="{A734EC80-B40E-0812-2410-9449D662958C}"/>
+                <a16:creationId xmlns:a16="http://schemas.microsoft.com/office/drawing/2014/main" id="{975AB37D-8C19-77E5-43AF-90557368B563}"/>
               </a:ext>
             </a:extLst>
           </p:cNvPr>
@@ -7653,566 +7563,75 @@
           <a:p>
             <a:r>
               <a:rPr lang="en-US" dirty="0"/>
-              <a:t>Splitting the Data</a:t>
+              <a:t>Assumptions of Simple Linear Regression</a:t>
             </a:r>
           </a:p>
         </p:txBody>
       </p:sp>
-      <p:sp>
-        <p:nvSpPr>
-          <p:cNvPr id="5" name="TextBox 4">
-            <a:extLst>
-              <a:ext uri="{FF2B5EF4-FFF2-40B4-BE49-F238E27FC236}">
-                <a16:creationId xmlns:a16="http://schemas.microsoft.com/office/drawing/2014/main" id="{3D97D810-6FC8-DFB4-AEA6-1F5AC7EF64F7}"/>
-              </a:ext>
-            </a:extLst>
-          </p:cNvPr>
-          <p:cNvSpPr txBox="1"/>
+      <p:pic>
+        <p:nvPicPr>
+          <p:cNvPr id="7" name="Picture 6">
+            <a:extLst>
+              <a:ext uri="{FF2B5EF4-FFF2-40B4-BE49-F238E27FC236}">
+                <a16:creationId xmlns:a16="http://schemas.microsoft.com/office/drawing/2014/main" id="{673162F8-4616-4609-2A8E-E1582A467BE4}"/>
+              </a:ext>
+            </a:extLst>
+          </p:cNvPr>
+          <p:cNvPicPr>
+            <a:picLocks noChangeAspect="1"/>
+          </p:cNvPicPr>
           <p:nvPr/>
-        </p:nvSpPr>
+        </p:nvPicPr>
+        <p:blipFill>
+          <a:blip r:embed="rId2"/>
+          <a:stretch>
+            <a:fillRect/>
+          </a:stretch>
+        </p:blipFill>
         <p:spPr>
           <a:xfrm>
-            <a:off x="838200" y="2198577"/>
-            <a:ext cx="10369378" cy="1014380"/>
-          </a:xfrm>
-          <a:prstGeom prst="rect">
-            <a:avLst/>
-          </a:prstGeom>
-          <a:noFill/>
-        </p:spPr>
-        <p:txBody>
-          <a:bodyPr wrap="square">
-            <a:spAutoFit/>
-          </a:bodyPr>
-          <a:lstStyle/>
-          <a:p>
-            <a:pPr>
-              <a:lnSpc>
-                <a:spcPts val="1425"/>
-              </a:lnSpc>
-              <a:buNone/>
-            </a:pPr>
-            <a:r>
-              <a:rPr lang="en-US" b="1" noProof="1">
-                <a:solidFill>
-                  <a:srgbClr val="000000"/>
-                </a:solidFill>
-                <a:effectLst/>
-                <a:latin typeface="Courier New" panose="02070309020205020404" pitchFamily="49" charset="0"/>
-              </a:rPr>
-              <a:t>x = df.iloc[:, </a:t>
-            </a:r>
-            <a:r>
-              <a:rPr lang="en-US" b="1" noProof="1">
-                <a:solidFill>
-                  <a:srgbClr val="116644"/>
-                </a:solidFill>
-                <a:effectLst/>
-                <a:latin typeface="Courier New" panose="02070309020205020404" pitchFamily="49" charset="0"/>
-              </a:rPr>
-              <a:t>0</a:t>
-            </a:r>
-            <a:r>
-              <a:rPr lang="en-US" b="1" noProof="1">
-                <a:solidFill>
-                  <a:srgbClr val="000000"/>
-                </a:solidFill>
-                <a:effectLst/>
-                <a:latin typeface="Courier New" panose="02070309020205020404" pitchFamily="49" charset="0"/>
-              </a:rPr>
-              <a:t>].values.reshape(</a:t>
-            </a:r>
-            <a:r>
-              <a:rPr lang="en-US" b="1" noProof="1">
-                <a:solidFill>
-                  <a:srgbClr val="116644"/>
-                </a:solidFill>
-                <a:effectLst/>
-                <a:latin typeface="Courier New" panose="02070309020205020404" pitchFamily="49" charset="0"/>
-              </a:rPr>
-              <a:t>-1</a:t>
-            </a:r>
-            <a:r>
-              <a:rPr lang="en-US" b="1" noProof="1">
-                <a:solidFill>
-                  <a:srgbClr val="000000"/>
-                </a:solidFill>
-                <a:effectLst/>
-                <a:latin typeface="Courier New" panose="02070309020205020404" pitchFamily="49" charset="0"/>
-              </a:rPr>
-              <a:t>, </a:t>
-            </a:r>
-            <a:r>
-              <a:rPr lang="en-US" b="1" noProof="1">
-                <a:solidFill>
-                  <a:srgbClr val="116644"/>
-                </a:solidFill>
-                <a:effectLst/>
-                <a:latin typeface="Courier New" panose="02070309020205020404" pitchFamily="49" charset="0"/>
-              </a:rPr>
-              <a:t>1</a:t>
-            </a:r>
-            <a:r>
-              <a:rPr lang="en-US" b="1" noProof="1">
-                <a:solidFill>
-                  <a:srgbClr val="000000"/>
-                </a:solidFill>
-                <a:effectLst/>
-                <a:latin typeface="Courier New" panose="02070309020205020404" pitchFamily="49" charset="0"/>
-              </a:rPr>
-              <a:t>)  </a:t>
-            </a:r>
-            <a:r>
-              <a:rPr lang="en-US" b="1" noProof="1">
-                <a:solidFill>
-                  <a:srgbClr val="008000"/>
-                </a:solidFill>
-                <a:effectLst/>
-                <a:latin typeface="Courier New" panose="02070309020205020404" pitchFamily="49" charset="0"/>
-              </a:rPr>
-              <a:t># Reshape x to be a 2D array</a:t>
-            </a:r>
-            <a:endParaRPr lang="en-US" b="1" noProof="1">
-              <a:solidFill>
-                <a:srgbClr val="000000"/>
-              </a:solidFill>
-              <a:effectLst/>
-              <a:latin typeface="Courier New" panose="02070309020205020404" pitchFamily="49" charset="0"/>
-            </a:endParaRPr>
-          </a:p>
-          <a:p>
-            <a:pPr>
-              <a:lnSpc>
-                <a:spcPts val="1425"/>
-              </a:lnSpc>
-              <a:buNone/>
-            </a:pPr>
-            <a:r>
-              <a:rPr lang="en-US" b="1" noProof="1">
-                <a:solidFill>
-                  <a:srgbClr val="000000"/>
-                </a:solidFill>
-                <a:effectLst/>
-                <a:latin typeface="Courier New" panose="02070309020205020404" pitchFamily="49" charset="0"/>
-              </a:rPr>
-              <a:t>y = df.iloc[:, </a:t>
-            </a:r>
-            <a:r>
-              <a:rPr lang="en-US" b="1" noProof="1">
-                <a:solidFill>
-                  <a:srgbClr val="116644"/>
-                </a:solidFill>
-                <a:effectLst/>
-                <a:latin typeface="Courier New" panose="02070309020205020404" pitchFamily="49" charset="0"/>
-              </a:rPr>
-              <a:t>-1</a:t>
-            </a:r>
-            <a:r>
-              <a:rPr lang="en-US" b="1" noProof="1">
-                <a:solidFill>
-                  <a:srgbClr val="000000"/>
-                </a:solidFill>
-                <a:effectLst/>
-                <a:latin typeface="Courier New" panose="02070309020205020404" pitchFamily="49" charset="0"/>
-              </a:rPr>
-              <a:t>].values  </a:t>
-            </a:r>
-            <a:r>
-              <a:rPr lang="en-US" b="1" noProof="1">
-                <a:solidFill>
-                  <a:srgbClr val="008000"/>
-                </a:solidFill>
-                <a:effectLst/>
-                <a:latin typeface="Courier New" panose="02070309020205020404" pitchFamily="49" charset="0"/>
-              </a:rPr>
-              <a:t># y can remain as a 1D array</a:t>
-            </a:r>
-            <a:endParaRPr lang="en-US" b="1" noProof="1">
-              <a:solidFill>
-                <a:srgbClr val="000000"/>
-              </a:solidFill>
-              <a:effectLst/>
-              <a:latin typeface="Courier New" panose="02070309020205020404" pitchFamily="49" charset="0"/>
-            </a:endParaRPr>
-          </a:p>
-          <a:p>
-            <a:pPr>
-              <a:lnSpc>
-                <a:spcPts val="1425"/>
-              </a:lnSpc>
-              <a:buNone/>
-            </a:pPr>
-            <a:br>
-              <a:rPr lang="en-US" b="1" noProof="1">
-                <a:solidFill>
-                  <a:srgbClr val="000000"/>
-                </a:solidFill>
-                <a:effectLst/>
-                <a:latin typeface="Courier New" panose="02070309020205020404" pitchFamily="49" charset="0"/>
-              </a:rPr>
-            </a:br>
-            <a:r>
-              <a:rPr lang="en-US" b="1" noProof="1">
-                <a:solidFill>
-                  <a:srgbClr val="008000"/>
-                </a:solidFill>
-                <a:effectLst/>
-                <a:latin typeface="Courier New" panose="02070309020205020404" pitchFamily="49" charset="0"/>
-              </a:rPr>
-              <a:t># x = df["Square_Area"]</a:t>
-            </a:r>
-            <a:endParaRPr lang="en-US" b="1" noProof="1">
-              <a:solidFill>
-                <a:srgbClr val="000000"/>
-              </a:solidFill>
-              <a:effectLst/>
-              <a:latin typeface="Courier New" panose="02070309020205020404" pitchFamily="49" charset="0"/>
-            </a:endParaRPr>
-          </a:p>
-          <a:p>
-            <a:pPr>
-              <a:lnSpc>
-                <a:spcPts val="1425"/>
-              </a:lnSpc>
-            </a:pPr>
-            <a:r>
-              <a:rPr lang="en-US" b="1" noProof="1">
-                <a:solidFill>
-                  <a:srgbClr val="008000"/>
-                </a:solidFill>
-                <a:effectLst/>
-                <a:latin typeface="Courier New" panose="02070309020205020404" pitchFamily="49" charset="0"/>
-              </a:rPr>
-              <a:t># y= df["Price"]</a:t>
-            </a:r>
-            <a:endParaRPr lang="en-US" b="1" noProof="1">
-              <a:solidFill>
-                <a:srgbClr val="000000"/>
-              </a:solidFill>
-              <a:effectLst/>
-              <a:latin typeface="Courier New" panose="02070309020205020404" pitchFamily="49" charset="0"/>
-            </a:endParaRPr>
-          </a:p>
-        </p:txBody>
-      </p:sp>
-      <p:sp>
-        <p:nvSpPr>
-          <p:cNvPr id="6" name="Content Placeholder 1">
-            <a:extLst>
-              <a:ext uri="{FF2B5EF4-FFF2-40B4-BE49-F238E27FC236}">
-                <a16:creationId xmlns:a16="http://schemas.microsoft.com/office/drawing/2014/main" id="{0FC3CFFA-3CDA-4185-057F-2BC99E81793B}"/>
-              </a:ext>
-            </a:extLst>
-          </p:cNvPr>
-          <p:cNvSpPr txBox="1">
-            <a:spLocks/>
-          </p:cNvSpPr>
-          <p:nvPr/>
-        </p:nvSpPr>
-        <p:spPr>
-          <a:xfrm>
-            <a:off x="838200" y="3534506"/>
-            <a:ext cx="10515600" cy="318877"/>
+            <a:off x="947472" y="3008749"/>
+            <a:ext cx="4806485" cy="3760694"/>
           </a:xfrm>
           <a:prstGeom prst="rect">
             <a:avLst/>
           </a:prstGeom>
         </p:spPr>
-        <p:txBody>
-          <a:bodyPr vert="horz" lIns="91440" tIns="45720" rIns="91440" bIns="45720" rtlCol="0">
-            <a:normAutofit fontScale="70000" lnSpcReduction="20000"/>
-          </a:bodyPr>
-          <a:lstStyle>
-            <a:lvl1pPr marL="228600" indent="-228600" algn="l" defTabSz="914400" rtl="0" eaLnBrk="1" latinLnBrk="0" hangingPunct="1">
-              <a:lnSpc>
-                <a:spcPct val="90000"/>
-              </a:lnSpc>
-              <a:spcBef>
-                <a:spcPts val="1000"/>
-              </a:spcBef>
-              <a:buFont typeface="Arial" panose="020B0604020202020204" pitchFamily="34" charset="0"/>
-              <a:buChar char="•"/>
-              <a:defRPr sz="2800" kern="1200">
-                <a:solidFill>
-                  <a:schemeClr val="tx1"/>
-                </a:solidFill>
-                <a:latin typeface="+mn-lt"/>
-                <a:ea typeface="+mn-ea"/>
-                <a:cs typeface="+mn-cs"/>
-              </a:defRPr>
-            </a:lvl1pPr>
-            <a:lvl2pPr marL="685800" indent="-228600" algn="l" defTabSz="914400" rtl="0" eaLnBrk="1" latinLnBrk="0" hangingPunct="1">
-              <a:lnSpc>
-                <a:spcPct val="90000"/>
-              </a:lnSpc>
-              <a:spcBef>
-                <a:spcPts val="500"/>
-              </a:spcBef>
-              <a:buFont typeface="Arial" panose="020B0604020202020204" pitchFamily="34" charset="0"/>
-              <a:buChar char="•"/>
-              <a:defRPr sz="2400" kern="1200">
-                <a:solidFill>
-                  <a:schemeClr val="tx1"/>
-                </a:solidFill>
-                <a:latin typeface="+mn-lt"/>
-                <a:ea typeface="+mn-ea"/>
-                <a:cs typeface="+mn-cs"/>
-              </a:defRPr>
-            </a:lvl2pPr>
-            <a:lvl3pPr marL="1143000" indent="-228600" algn="l" defTabSz="914400" rtl="0" eaLnBrk="1" latinLnBrk="0" hangingPunct="1">
-              <a:lnSpc>
-                <a:spcPct val="90000"/>
-              </a:lnSpc>
-              <a:spcBef>
-                <a:spcPts val="500"/>
-              </a:spcBef>
-              <a:buFont typeface="Arial" panose="020B0604020202020204" pitchFamily="34" charset="0"/>
-              <a:buChar char="•"/>
-              <a:defRPr sz="2000" kern="1200">
-                <a:solidFill>
-                  <a:schemeClr val="tx1"/>
-                </a:solidFill>
-                <a:latin typeface="+mn-lt"/>
-                <a:ea typeface="+mn-ea"/>
-                <a:cs typeface="+mn-cs"/>
-              </a:defRPr>
-            </a:lvl3pPr>
-            <a:lvl4pPr marL="1600200" indent="-228600" algn="l" defTabSz="914400" rtl="0" eaLnBrk="1" latinLnBrk="0" hangingPunct="1">
-              <a:lnSpc>
-                <a:spcPct val="90000"/>
-              </a:lnSpc>
-              <a:spcBef>
-                <a:spcPts val="500"/>
-              </a:spcBef>
-              <a:buFont typeface="Arial" panose="020B0604020202020204" pitchFamily="34" charset="0"/>
-              <a:buChar char="•"/>
-              <a:defRPr sz="1800" kern="1200">
-                <a:solidFill>
-                  <a:schemeClr val="tx1"/>
-                </a:solidFill>
-                <a:latin typeface="+mn-lt"/>
-                <a:ea typeface="+mn-ea"/>
-                <a:cs typeface="+mn-cs"/>
-              </a:defRPr>
-            </a:lvl4pPr>
-            <a:lvl5pPr marL="2057400" indent="-228600" algn="l" defTabSz="914400" rtl="0" eaLnBrk="1" latinLnBrk="0" hangingPunct="1">
-              <a:lnSpc>
-                <a:spcPct val="90000"/>
-              </a:lnSpc>
-              <a:spcBef>
-                <a:spcPts val="500"/>
-              </a:spcBef>
-              <a:buFont typeface="Arial" panose="020B0604020202020204" pitchFamily="34" charset="0"/>
-              <a:buChar char="•"/>
-              <a:defRPr sz="1800" kern="1200">
-                <a:solidFill>
-                  <a:schemeClr val="tx1"/>
-                </a:solidFill>
-                <a:latin typeface="+mn-lt"/>
-                <a:ea typeface="+mn-ea"/>
-                <a:cs typeface="+mn-cs"/>
-              </a:defRPr>
-            </a:lvl5pPr>
-            <a:lvl6pPr marL="2514600" indent="-228600" algn="l" defTabSz="914400" rtl="0" eaLnBrk="1" latinLnBrk="0" hangingPunct="1">
-              <a:lnSpc>
-                <a:spcPct val="90000"/>
-              </a:lnSpc>
-              <a:spcBef>
-                <a:spcPts val="500"/>
-              </a:spcBef>
-              <a:buFont typeface="Arial" panose="020B0604020202020204" pitchFamily="34" charset="0"/>
-              <a:buChar char="•"/>
-              <a:defRPr sz="1800" kern="1200">
-                <a:solidFill>
-                  <a:schemeClr val="tx1"/>
-                </a:solidFill>
-                <a:latin typeface="+mn-lt"/>
-                <a:ea typeface="+mn-ea"/>
-                <a:cs typeface="+mn-cs"/>
-              </a:defRPr>
-            </a:lvl6pPr>
-            <a:lvl7pPr marL="2971800" indent="-228600" algn="l" defTabSz="914400" rtl="0" eaLnBrk="1" latinLnBrk="0" hangingPunct="1">
-              <a:lnSpc>
-                <a:spcPct val="90000"/>
-              </a:lnSpc>
-              <a:spcBef>
-                <a:spcPts val="500"/>
-              </a:spcBef>
-              <a:buFont typeface="Arial" panose="020B0604020202020204" pitchFamily="34" charset="0"/>
-              <a:buChar char="•"/>
-              <a:defRPr sz="1800" kern="1200">
-                <a:solidFill>
-                  <a:schemeClr val="tx1"/>
-                </a:solidFill>
-                <a:latin typeface="+mn-lt"/>
-                <a:ea typeface="+mn-ea"/>
-                <a:cs typeface="+mn-cs"/>
-              </a:defRPr>
-            </a:lvl7pPr>
-            <a:lvl8pPr marL="3429000" indent="-228600" algn="l" defTabSz="914400" rtl="0" eaLnBrk="1" latinLnBrk="0" hangingPunct="1">
-              <a:lnSpc>
-                <a:spcPct val="90000"/>
-              </a:lnSpc>
-              <a:spcBef>
-                <a:spcPts val="500"/>
-              </a:spcBef>
-              <a:buFont typeface="Arial" panose="020B0604020202020204" pitchFamily="34" charset="0"/>
-              <a:buChar char="•"/>
-              <a:defRPr sz="1800" kern="1200">
-                <a:solidFill>
-                  <a:schemeClr val="tx1"/>
-                </a:solidFill>
-                <a:latin typeface="+mn-lt"/>
-                <a:ea typeface="+mn-ea"/>
-                <a:cs typeface="+mn-cs"/>
-              </a:defRPr>
-            </a:lvl8pPr>
-            <a:lvl9pPr marL="3886200" indent="-228600" algn="l" defTabSz="914400" rtl="0" eaLnBrk="1" latinLnBrk="0" hangingPunct="1">
-              <a:lnSpc>
-                <a:spcPct val="90000"/>
-              </a:lnSpc>
-              <a:spcBef>
-                <a:spcPts val="500"/>
-              </a:spcBef>
-              <a:buFont typeface="Arial" panose="020B0604020202020204" pitchFamily="34" charset="0"/>
-              <a:buChar char="•"/>
-              <a:defRPr sz="1800" kern="1200">
-                <a:solidFill>
-                  <a:schemeClr val="tx1"/>
-                </a:solidFill>
-                <a:latin typeface="+mn-lt"/>
-                <a:ea typeface="+mn-ea"/>
-                <a:cs typeface="+mn-cs"/>
-              </a:defRPr>
-            </a:lvl9pPr>
-          </a:lstStyle>
-          <a:p>
-            <a:pPr marL="0" indent="0">
-              <a:buFont typeface="Arial" panose="020B0604020202020204" pitchFamily="34" charset="0"/>
-              <a:buNone/>
-            </a:pPr>
-            <a:r>
-              <a:rPr lang="en-US" dirty="0"/>
-              <a:t>Split to train and test</a:t>
-            </a:r>
-          </a:p>
-        </p:txBody>
-      </p:sp>
-      <p:sp>
-        <p:nvSpPr>
-          <p:cNvPr id="8" name="TextBox 7">
-            <a:extLst>
-              <a:ext uri="{FF2B5EF4-FFF2-40B4-BE49-F238E27FC236}">
-                <a16:creationId xmlns:a16="http://schemas.microsoft.com/office/drawing/2014/main" id="{92F4E3EE-1459-A6CC-DAC3-DE42F2873A6C}"/>
-              </a:ext>
-            </a:extLst>
-          </p:cNvPr>
-          <p:cNvSpPr txBox="1"/>
+      </p:pic>
+      <p:pic>
+        <p:nvPicPr>
+          <p:cNvPr id="9" name="Picture 8">
+            <a:extLst>
+              <a:ext uri="{FF2B5EF4-FFF2-40B4-BE49-F238E27FC236}">
+                <a16:creationId xmlns:a16="http://schemas.microsoft.com/office/drawing/2014/main" id="{B7380879-9916-D124-76D4-6D34DE2471F7}"/>
+              </a:ext>
+            </a:extLst>
+          </p:cNvPr>
+          <p:cNvPicPr>
+            <a:picLocks noChangeAspect="1"/>
+          </p:cNvPicPr>
           <p:nvPr/>
-        </p:nvSpPr>
+        </p:nvPicPr>
+        <p:blipFill>
+          <a:blip r:embed="rId3"/>
+          <a:stretch>
+            <a:fillRect/>
+          </a:stretch>
+        </p:blipFill>
         <p:spPr>
           <a:xfrm>
-            <a:off x="838200" y="3972808"/>
-            <a:ext cx="10515600" cy="655308"/>
+            <a:off x="6659395" y="3182471"/>
+            <a:ext cx="4468589" cy="3292326"/>
           </a:xfrm>
           <a:prstGeom prst="rect">
             <a:avLst/>
           </a:prstGeom>
-          <a:noFill/>
         </p:spPr>
-        <p:txBody>
-          <a:bodyPr wrap="square">
-            <a:spAutoFit/>
-          </a:bodyPr>
-          <a:lstStyle/>
-          <a:p>
-            <a:pPr>
-              <a:lnSpc>
-                <a:spcPts val="1425"/>
-              </a:lnSpc>
-              <a:buNone/>
-            </a:pPr>
-            <a:r>
-              <a:rPr lang="en-US" b="1" noProof="1">
-                <a:solidFill>
-                  <a:srgbClr val="008000"/>
-                </a:solidFill>
-                <a:effectLst/>
-                <a:latin typeface="Courier New" panose="02070309020205020404" pitchFamily="49" charset="0"/>
-              </a:rPr>
-              <a:t># Splitting the dataset into training and test set. </a:t>
-            </a:r>
-            <a:endParaRPr lang="en-US" b="1" noProof="1">
-              <a:solidFill>
-                <a:srgbClr val="000000"/>
-              </a:solidFill>
-              <a:effectLst/>
-              <a:latin typeface="Courier New" panose="02070309020205020404" pitchFamily="49" charset="0"/>
-            </a:endParaRPr>
-          </a:p>
-          <a:p>
-            <a:pPr>
-              <a:lnSpc>
-                <a:spcPts val="1425"/>
-              </a:lnSpc>
-            </a:pPr>
-            <a:r>
-              <a:rPr lang="en-US" b="1" noProof="1">
-                <a:solidFill>
-                  <a:srgbClr val="000000"/>
-                </a:solidFill>
-                <a:effectLst/>
-                <a:latin typeface="Courier New" panose="02070309020205020404" pitchFamily="49" charset="0"/>
-              </a:rPr>
-              <a:t>x_train, x_test, y_train, y_test= train_test_split(x, y, test_size= </a:t>
-            </a:r>
-            <a:r>
-              <a:rPr lang="en-US" b="1" noProof="1">
-                <a:solidFill>
-                  <a:srgbClr val="116644"/>
-                </a:solidFill>
-                <a:effectLst/>
-                <a:latin typeface="Courier New" panose="02070309020205020404" pitchFamily="49" charset="0"/>
-              </a:rPr>
-              <a:t>.1</a:t>
-            </a:r>
-            <a:r>
-              <a:rPr lang="en-US" b="1" noProof="1">
-                <a:solidFill>
-                  <a:srgbClr val="000000"/>
-                </a:solidFill>
-                <a:effectLst/>
-                <a:latin typeface="Courier New" panose="02070309020205020404" pitchFamily="49" charset="0"/>
-              </a:rPr>
-              <a:t>, random_state=</a:t>
-            </a:r>
-            <a:r>
-              <a:rPr lang="en-US" b="1" noProof="1">
-                <a:solidFill>
-                  <a:srgbClr val="116644"/>
-                </a:solidFill>
-                <a:effectLst/>
-                <a:latin typeface="Courier New" panose="02070309020205020404" pitchFamily="49" charset="0"/>
-              </a:rPr>
-              <a:t>0</a:t>
-            </a:r>
-            <a:r>
-              <a:rPr lang="en-US" b="1" noProof="1">
-                <a:solidFill>
-                  <a:srgbClr val="000000"/>
-                </a:solidFill>
-                <a:effectLst/>
-                <a:latin typeface="Courier New" panose="02070309020205020404" pitchFamily="49" charset="0"/>
-              </a:rPr>
-              <a:t>)  </a:t>
-            </a:r>
-          </a:p>
-        </p:txBody>
-      </p:sp>
+      </p:pic>
     </p:spTree>
     <p:extLst>
       <p:ext uri="{BB962C8B-B14F-4D97-AF65-F5344CB8AC3E}">
-        <p14:creationId xmlns:p14="http://schemas.microsoft.com/office/powerpoint/2010/main" val="952835031"/>
+        <p14:creationId xmlns:p14="http://schemas.microsoft.com/office/powerpoint/2010/main" val="2575217795"/>
       </p:ext>
     </p:extLst>
   </p:cSld>
@@ -8227,7 +7646,13 @@
   <p:cSld>
     <p:spTree>
       <p:nvGrpSpPr>
-        <p:cNvPr id="1" name=""/>
+        <p:cNvPr id="1" name="">
+          <a:extLst>
+            <a:ext uri="{FF2B5EF4-FFF2-40B4-BE49-F238E27FC236}">
+              <a16:creationId xmlns:a16="http://schemas.microsoft.com/office/drawing/2014/main" id="{5FF87552-A00A-A567-4B58-79A70A4BA61B}"/>
+            </a:ext>
+          </a:extLst>
+        </p:cNvPr>
         <p:cNvGrpSpPr/>
         <p:nvPr/>
       </p:nvGrpSpPr>
@@ -8241,10 +7666,72 @@
       </p:grpSpPr>
       <p:sp>
         <p:nvSpPr>
+          <p:cNvPr id="2" name="Content Placeholder 1">
+            <a:extLst>
+              <a:ext uri="{FF2B5EF4-FFF2-40B4-BE49-F238E27FC236}">
+                <a16:creationId xmlns:a16="http://schemas.microsoft.com/office/drawing/2014/main" id="{4E795974-C30C-A8F4-FC12-5BE5FE355A52}"/>
+              </a:ext>
+            </a:extLst>
+          </p:cNvPr>
+          <p:cNvSpPr>
+            <a:spLocks noGrp="1"/>
+          </p:cNvSpPr>
+          <p:nvPr>
+            <p:ph idx="1"/>
+          </p:nvPr>
+        </p:nvSpPr>
+        <p:spPr>
+          <a:xfrm>
+            <a:off x="838200" y="1633491"/>
+            <a:ext cx="10515600" cy="5131294"/>
+          </a:xfrm>
+        </p:spPr>
+        <p:txBody>
+          <a:bodyPr>
+            <a:normAutofit/>
+          </a:bodyPr>
+          <a:lstStyle/>
+          <a:p>
+            <a:pPr marL="0" indent="0">
+              <a:buNone/>
+            </a:pPr>
+            <a:r>
+              <a:rPr lang="en-US" sz="2000" b="1" dirty="0"/>
+              <a:t>5. No Multicollinearity </a:t>
+            </a:r>
+          </a:p>
+          <a:p>
+            <a:r>
+              <a:rPr lang="en-US" sz="2000" dirty="0"/>
+              <a:t>The independent variables should not be highly correlated with each other. </a:t>
+            </a:r>
+          </a:p>
+          <a:p>
+            <a:r>
+              <a:rPr lang="en-US" sz="2000" dirty="0"/>
+              <a:t>Multicollinearity occurs when two or more independent variables are strongly related, making it difficult to isolate the effect of each variable on the dependent variable.</a:t>
+            </a:r>
+          </a:p>
+          <a:p>
+            <a:r>
+              <a:rPr lang="en-US" sz="2000" dirty="0"/>
+              <a:t>If multicollinearity exists, it can lead to inaccurate results in multiple linear regression.</a:t>
+            </a:r>
+          </a:p>
+          <a:p>
+            <a:r>
+              <a:rPr lang="en-US" sz="2000" dirty="0"/>
+              <a:t>For multiple linear regression, multicollinearity among independent variables can be assessed using the Variance Inflation Factor (VIF). A VIF value greater than 10 indicates high multicollinearity.</a:t>
+            </a:r>
+          </a:p>
+        </p:txBody>
+      </p:sp>
+      <p:sp>
+        <p:nvSpPr>
           <p:cNvPr id="3" name="Title 2">
             <a:extLst>
               <a:ext uri="{FF2B5EF4-FFF2-40B4-BE49-F238E27FC236}">
-                <a16:creationId xmlns:a16="http://schemas.microsoft.com/office/drawing/2014/main" id="{18D3AF28-B4CC-BA03-E601-706704D9F578}"/>
+                <a16:creationId xmlns:a16="http://schemas.microsoft.com/office/drawing/2014/main" id="{927ED564-A8B2-AAC7-C34A-1B841519BD48}"/>
               </a:ext>
             </a:extLst>
           </p:cNvPr>
@@ -8262,721 +7749,7 @@
           <a:p>
             <a:r>
               <a:rPr lang="en-US" dirty="0"/>
-              <a:t>Create the Regression Model and Train it</a:t>
-            </a:r>
-          </a:p>
-        </p:txBody>
-      </p:sp>
-      <p:sp>
-        <p:nvSpPr>
-          <p:cNvPr id="5" name="TextBox 4">
-            <a:extLst>
-              <a:ext uri="{FF2B5EF4-FFF2-40B4-BE49-F238E27FC236}">
-                <a16:creationId xmlns:a16="http://schemas.microsoft.com/office/drawing/2014/main" id="{9DEAC493-EECE-8ECF-1390-683A329DE3A8}"/>
-              </a:ext>
-            </a:extLst>
-          </p:cNvPr>
-          <p:cNvSpPr txBox="1"/>
-          <p:nvPr/>
-        </p:nvSpPr>
-        <p:spPr>
-          <a:xfrm>
-            <a:off x="838200" y="2233841"/>
-            <a:ext cx="6094970" cy="296235"/>
-          </a:xfrm>
-          <a:prstGeom prst="rect">
-            <a:avLst/>
-          </a:prstGeom>
-          <a:noFill/>
-        </p:spPr>
-        <p:txBody>
-          <a:bodyPr wrap="square">
-            <a:spAutoFit/>
-          </a:bodyPr>
-          <a:lstStyle/>
-          <a:p>
-            <a:pPr>
-              <a:lnSpc>
-                <a:spcPts val="1425"/>
-              </a:lnSpc>
-            </a:pPr>
-            <a:r>
-              <a:rPr lang="en-US" b="1" noProof="1">
-                <a:solidFill>
-                  <a:srgbClr val="000000"/>
-                </a:solidFill>
-                <a:effectLst/>
-                <a:latin typeface="Courier New" panose="02070309020205020404" pitchFamily="49" charset="0"/>
-              </a:rPr>
-              <a:t>regressor= LinearRegression()  </a:t>
-            </a:r>
-          </a:p>
-        </p:txBody>
-      </p:sp>
-      <p:sp>
-        <p:nvSpPr>
-          <p:cNvPr id="7" name="TextBox 6">
-            <a:extLst>
-              <a:ext uri="{FF2B5EF4-FFF2-40B4-BE49-F238E27FC236}">
-                <a16:creationId xmlns:a16="http://schemas.microsoft.com/office/drawing/2014/main" id="{0A1C3751-059D-A947-518E-EEF9129D0C0E}"/>
-              </a:ext>
-            </a:extLst>
-          </p:cNvPr>
-          <p:cNvSpPr txBox="1"/>
-          <p:nvPr/>
-        </p:nvSpPr>
-        <p:spPr>
-          <a:xfrm>
-            <a:off x="838200" y="3250239"/>
-            <a:ext cx="6094970" cy="834844"/>
-          </a:xfrm>
-          <a:prstGeom prst="rect">
-            <a:avLst/>
-          </a:prstGeom>
-          <a:noFill/>
-        </p:spPr>
-        <p:txBody>
-          <a:bodyPr wrap="square">
-            <a:spAutoFit/>
-          </a:bodyPr>
-          <a:lstStyle/>
-          <a:p>
-            <a:pPr>
-              <a:lnSpc>
-                <a:spcPts val="1425"/>
-              </a:lnSpc>
-              <a:buNone/>
-            </a:pPr>
-            <a:r>
-              <a:rPr lang="fr-FR" b="1" noProof="1">
-                <a:solidFill>
-                  <a:srgbClr val="000000"/>
-                </a:solidFill>
-                <a:effectLst/>
-                <a:latin typeface="Courier New" panose="02070309020205020404" pitchFamily="49" charset="0"/>
-              </a:rPr>
-              <a:t>regressor.fit(x_train, y_train)  </a:t>
-            </a:r>
-          </a:p>
-          <a:p>
-            <a:pPr>
-              <a:lnSpc>
-                <a:spcPts val="1425"/>
-              </a:lnSpc>
-              <a:buNone/>
-            </a:pPr>
-            <a:br>
-              <a:rPr lang="fr-FR" b="1" noProof="1">
-                <a:solidFill>
-                  <a:srgbClr val="000000"/>
-                </a:solidFill>
-                <a:effectLst/>
-                <a:latin typeface="Courier New" panose="02070309020205020404" pitchFamily="49" charset="0"/>
-              </a:rPr>
-            </a:br>
-            <a:r>
-              <a:rPr lang="fr-FR" b="1" noProof="1">
-                <a:solidFill>
-                  <a:srgbClr val="6A5221"/>
-                </a:solidFill>
-                <a:effectLst/>
-                <a:latin typeface="Courier New" panose="02070309020205020404" pitchFamily="49" charset="0"/>
-              </a:rPr>
-              <a:t>print</a:t>
-            </a:r>
-            <a:r>
-              <a:rPr lang="fr-FR" b="1" noProof="1">
-                <a:solidFill>
-                  <a:srgbClr val="000000"/>
-                </a:solidFill>
-                <a:effectLst/>
-                <a:latin typeface="Courier New" panose="02070309020205020404" pitchFamily="49" charset="0"/>
-              </a:rPr>
-              <a:t>(regressor.coef_)</a:t>
-            </a:r>
-          </a:p>
-          <a:p>
-            <a:pPr>
-              <a:lnSpc>
-                <a:spcPts val="1425"/>
-              </a:lnSpc>
-            </a:pPr>
-            <a:r>
-              <a:rPr lang="fr-FR" b="1" noProof="1">
-                <a:solidFill>
-                  <a:srgbClr val="6A5221"/>
-                </a:solidFill>
-                <a:effectLst/>
-                <a:latin typeface="Courier New" panose="02070309020205020404" pitchFamily="49" charset="0"/>
-              </a:rPr>
-              <a:t>print</a:t>
-            </a:r>
-            <a:r>
-              <a:rPr lang="fr-FR" b="1" noProof="1">
-                <a:solidFill>
-                  <a:srgbClr val="000000"/>
-                </a:solidFill>
-                <a:effectLst/>
-                <a:latin typeface="Courier New" panose="02070309020205020404" pitchFamily="49" charset="0"/>
-              </a:rPr>
-              <a:t>(regressor.intercept_)</a:t>
-            </a:r>
-          </a:p>
-        </p:txBody>
-      </p:sp>
-      <p:sp>
-        <p:nvSpPr>
-          <p:cNvPr id="11" name="Content Placeholder 1">
-            <a:extLst>
-              <a:ext uri="{FF2B5EF4-FFF2-40B4-BE49-F238E27FC236}">
-                <a16:creationId xmlns:a16="http://schemas.microsoft.com/office/drawing/2014/main" id="{E74FFDBD-7691-0BC9-80E8-6A8F3A526534}"/>
-              </a:ext>
-            </a:extLst>
-          </p:cNvPr>
-          <p:cNvSpPr>
-            <a:spLocks noGrp="1"/>
-          </p:cNvSpPr>
-          <p:nvPr>
-            <p:ph idx="1"/>
-          </p:nvPr>
-        </p:nvSpPr>
-        <p:spPr>
-          <a:xfrm>
-            <a:off x="838200" y="1763236"/>
-            <a:ext cx="10515600" cy="318877"/>
-          </a:xfrm>
-        </p:spPr>
-        <p:txBody>
-          <a:bodyPr>
-            <a:normAutofit fontScale="70000" lnSpcReduction="20000"/>
-          </a:bodyPr>
-          <a:lstStyle/>
-          <a:p>
-            <a:pPr marL="0" indent="0">
-              <a:buNone/>
-            </a:pPr>
-            <a:r>
-              <a:rPr lang="en-US" dirty="0"/>
-              <a:t>Create the Machine Learning model and make any required configurations</a:t>
-            </a:r>
-          </a:p>
-        </p:txBody>
-      </p:sp>
-      <p:sp>
-        <p:nvSpPr>
-          <p:cNvPr id="12" name="Content Placeholder 1">
-            <a:extLst>
-              <a:ext uri="{FF2B5EF4-FFF2-40B4-BE49-F238E27FC236}">
-                <a16:creationId xmlns:a16="http://schemas.microsoft.com/office/drawing/2014/main" id="{866F223C-F998-07B7-7CDD-5E733482CD66}"/>
-              </a:ext>
-            </a:extLst>
-          </p:cNvPr>
-          <p:cNvSpPr txBox="1">
-            <a:spLocks/>
-          </p:cNvSpPr>
-          <p:nvPr/>
-        </p:nvSpPr>
-        <p:spPr>
-          <a:xfrm>
-            <a:off x="838200" y="2802276"/>
-            <a:ext cx="10515600" cy="318877"/>
-          </a:xfrm>
-          <a:prstGeom prst="rect">
-            <a:avLst/>
-          </a:prstGeom>
-        </p:spPr>
-        <p:txBody>
-          <a:bodyPr vert="horz" lIns="91440" tIns="45720" rIns="91440" bIns="45720" rtlCol="0">
-            <a:normAutofit fontScale="70000" lnSpcReduction="20000"/>
-          </a:bodyPr>
-          <a:lstStyle>
-            <a:lvl1pPr marL="228600" indent="-228600" algn="l" defTabSz="914400" rtl="0" eaLnBrk="1" latinLnBrk="0" hangingPunct="1">
-              <a:lnSpc>
-                <a:spcPct val="90000"/>
-              </a:lnSpc>
-              <a:spcBef>
-                <a:spcPts val="1000"/>
-              </a:spcBef>
-              <a:buFont typeface="Arial" panose="020B0604020202020204" pitchFamily="34" charset="0"/>
-              <a:buChar char="•"/>
-              <a:defRPr sz="2800" kern="1200">
-                <a:solidFill>
-                  <a:schemeClr val="tx1"/>
-                </a:solidFill>
-                <a:latin typeface="+mn-lt"/>
-                <a:ea typeface="+mn-ea"/>
-                <a:cs typeface="+mn-cs"/>
-              </a:defRPr>
-            </a:lvl1pPr>
-            <a:lvl2pPr marL="685800" indent="-228600" algn="l" defTabSz="914400" rtl="0" eaLnBrk="1" latinLnBrk="0" hangingPunct="1">
-              <a:lnSpc>
-                <a:spcPct val="90000"/>
-              </a:lnSpc>
-              <a:spcBef>
-                <a:spcPts val="500"/>
-              </a:spcBef>
-              <a:buFont typeface="Arial" panose="020B0604020202020204" pitchFamily="34" charset="0"/>
-              <a:buChar char="•"/>
-              <a:defRPr sz="2400" kern="1200">
-                <a:solidFill>
-                  <a:schemeClr val="tx1"/>
-                </a:solidFill>
-                <a:latin typeface="+mn-lt"/>
-                <a:ea typeface="+mn-ea"/>
-                <a:cs typeface="+mn-cs"/>
-              </a:defRPr>
-            </a:lvl2pPr>
-            <a:lvl3pPr marL="1143000" indent="-228600" algn="l" defTabSz="914400" rtl="0" eaLnBrk="1" latinLnBrk="0" hangingPunct="1">
-              <a:lnSpc>
-                <a:spcPct val="90000"/>
-              </a:lnSpc>
-              <a:spcBef>
-                <a:spcPts val="500"/>
-              </a:spcBef>
-              <a:buFont typeface="Arial" panose="020B0604020202020204" pitchFamily="34" charset="0"/>
-              <a:buChar char="•"/>
-              <a:defRPr sz="2000" kern="1200">
-                <a:solidFill>
-                  <a:schemeClr val="tx1"/>
-                </a:solidFill>
-                <a:latin typeface="+mn-lt"/>
-                <a:ea typeface="+mn-ea"/>
-                <a:cs typeface="+mn-cs"/>
-              </a:defRPr>
-            </a:lvl3pPr>
-            <a:lvl4pPr marL="1600200" indent="-228600" algn="l" defTabSz="914400" rtl="0" eaLnBrk="1" latinLnBrk="0" hangingPunct="1">
-              <a:lnSpc>
-                <a:spcPct val="90000"/>
-              </a:lnSpc>
-              <a:spcBef>
-                <a:spcPts val="500"/>
-              </a:spcBef>
-              <a:buFont typeface="Arial" panose="020B0604020202020204" pitchFamily="34" charset="0"/>
-              <a:buChar char="•"/>
-              <a:defRPr sz="1800" kern="1200">
-                <a:solidFill>
-                  <a:schemeClr val="tx1"/>
-                </a:solidFill>
-                <a:latin typeface="+mn-lt"/>
-                <a:ea typeface="+mn-ea"/>
-                <a:cs typeface="+mn-cs"/>
-              </a:defRPr>
-            </a:lvl4pPr>
-            <a:lvl5pPr marL="2057400" indent="-228600" algn="l" defTabSz="914400" rtl="0" eaLnBrk="1" latinLnBrk="0" hangingPunct="1">
-              <a:lnSpc>
-                <a:spcPct val="90000"/>
-              </a:lnSpc>
-              <a:spcBef>
-                <a:spcPts val="500"/>
-              </a:spcBef>
-              <a:buFont typeface="Arial" panose="020B0604020202020204" pitchFamily="34" charset="0"/>
-              <a:buChar char="•"/>
-              <a:defRPr sz="1800" kern="1200">
-                <a:solidFill>
-                  <a:schemeClr val="tx1"/>
-                </a:solidFill>
-                <a:latin typeface="+mn-lt"/>
-                <a:ea typeface="+mn-ea"/>
-                <a:cs typeface="+mn-cs"/>
-              </a:defRPr>
-            </a:lvl5pPr>
-            <a:lvl6pPr marL="2514600" indent="-228600" algn="l" defTabSz="914400" rtl="0" eaLnBrk="1" latinLnBrk="0" hangingPunct="1">
-              <a:lnSpc>
-                <a:spcPct val="90000"/>
-              </a:lnSpc>
-              <a:spcBef>
-                <a:spcPts val="500"/>
-              </a:spcBef>
-              <a:buFont typeface="Arial" panose="020B0604020202020204" pitchFamily="34" charset="0"/>
-              <a:buChar char="•"/>
-              <a:defRPr sz="1800" kern="1200">
-                <a:solidFill>
-                  <a:schemeClr val="tx1"/>
-                </a:solidFill>
-                <a:latin typeface="+mn-lt"/>
-                <a:ea typeface="+mn-ea"/>
-                <a:cs typeface="+mn-cs"/>
-              </a:defRPr>
-            </a:lvl6pPr>
-            <a:lvl7pPr marL="2971800" indent="-228600" algn="l" defTabSz="914400" rtl="0" eaLnBrk="1" latinLnBrk="0" hangingPunct="1">
-              <a:lnSpc>
-                <a:spcPct val="90000"/>
-              </a:lnSpc>
-              <a:spcBef>
-                <a:spcPts val="500"/>
-              </a:spcBef>
-              <a:buFont typeface="Arial" panose="020B0604020202020204" pitchFamily="34" charset="0"/>
-              <a:buChar char="•"/>
-              <a:defRPr sz="1800" kern="1200">
-                <a:solidFill>
-                  <a:schemeClr val="tx1"/>
-                </a:solidFill>
-                <a:latin typeface="+mn-lt"/>
-                <a:ea typeface="+mn-ea"/>
-                <a:cs typeface="+mn-cs"/>
-              </a:defRPr>
-            </a:lvl7pPr>
-            <a:lvl8pPr marL="3429000" indent="-228600" algn="l" defTabSz="914400" rtl="0" eaLnBrk="1" latinLnBrk="0" hangingPunct="1">
-              <a:lnSpc>
-                <a:spcPct val="90000"/>
-              </a:lnSpc>
-              <a:spcBef>
-                <a:spcPts val="500"/>
-              </a:spcBef>
-              <a:buFont typeface="Arial" panose="020B0604020202020204" pitchFamily="34" charset="0"/>
-              <a:buChar char="•"/>
-              <a:defRPr sz="1800" kern="1200">
-                <a:solidFill>
-                  <a:schemeClr val="tx1"/>
-                </a:solidFill>
-                <a:latin typeface="+mn-lt"/>
-                <a:ea typeface="+mn-ea"/>
-                <a:cs typeface="+mn-cs"/>
-              </a:defRPr>
-            </a:lvl8pPr>
-            <a:lvl9pPr marL="3886200" indent="-228600" algn="l" defTabSz="914400" rtl="0" eaLnBrk="1" latinLnBrk="0" hangingPunct="1">
-              <a:lnSpc>
-                <a:spcPct val="90000"/>
-              </a:lnSpc>
-              <a:spcBef>
-                <a:spcPts val="500"/>
-              </a:spcBef>
-              <a:buFont typeface="Arial" panose="020B0604020202020204" pitchFamily="34" charset="0"/>
-              <a:buChar char="•"/>
-              <a:defRPr sz="1800" kern="1200">
-                <a:solidFill>
-                  <a:schemeClr val="tx1"/>
-                </a:solidFill>
-                <a:latin typeface="+mn-lt"/>
-                <a:ea typeface="+mn-ea"/>
-                <a:cs typeface="+mn-cs"/>
-              </a:defRPr>
-            </a:lvl9pPr>
-          </a:lstStyle>
-          <a:p>
-            <a:pPr marL="0" indent="0">
-              <a:buFont typeface="Arial" panose="020B0604020202020204" pitchFamily="34" charset="0"/>
-              <a:buNone/>
-            </a:pPr>
-            <a:r>
-              <a:rPr lang="en-US" dirty="0"/>
-              <a:t>Train the model and print the learnt coefficients</a:t>
-            </a:r>
-          </a:p>
-        </p:txBody>
-      </p:sp>
-      <p:sp>
-        <p:nvSpPr>
-          <p:cNvPr id="13" name="Content Placeholder 1">
-            <a:extLst>
-              <a:ext uri="{FF2B5EF4-FFF2-40B4-BE49-F238E27FC236}">
-                <a16:creationId xmlns:a16="http://schemas.microsoft.com/office/drawing/2014/main" id="{1B382C33-91C0-8349-9B35-6FB5DFF763EE}"/>
-              </a:ext>
-            </a:extLst>
-          </p:cNvPr>
-          <p:cNvSpPr txBox="1">
-            <a:spLocks/>
-          </p:cNvSpPr>
-          <p:nvPr/>
-        </p:nvSpPr>
-        <p:spPr>
-          <a:xfrm>
-            <a:off x="780535" y="4777297"/>
-            <a:ext cx="10515600" cy="318877"/>
-          </a:xfrm>
-          <a:prstGeom prst="rect">
-            <a:avLst/>
-          </a:prstGeom>
-        </p:spPr>
-        <p:txBody>
-          <a:bodyPr vert="horz" lIns="91440" tIns="45720" rIns="91440" bIns="45720" rtlCol="0">
-            <a:normAutofit fontScale="70000" lnSpcReduction="20000"/>
-          </a:bodyPr>
-          <a:lstStyle>
-            <a:lvl1pPr marL="228600" indent="-228600" algn="l" defTabSz="914400" rtl="0" eaLnBrk="1" latinLnBrk="0" hangingPunct="1">
-              <a:lnSpc>
-                <a:spcPct val="90000"/>
-              </a:lnSpc>
-              <a:spcBef>
-                <a:spcPts val="1000"/>
-              </a:spcBef>
-              <a:buFont typeface="Arial" panose="020B0604020202020204" pitchFamily="34" charset="0"/>
-              <a:buChar char="•"/>
-              <a:defRPr sz="2800" kern="1200">
-                <a:solidFill>
-                  <a:schemeClr val="tx1"/>
-                </a:solidFill>
-                <a:latin typeface="+mn-lt"/>
-                <a:ea typeface="+mn-ea"/>
-                <a:cs typeface="+mn-cs"/>
-              </a:defRPr>
-            </a:lvl1pPr>
-            <a:lvl2pPr marL="685800" indent="-228600" algn="l" defTabSz="914400" rtl="0" eaLnBrk="1" latinLnBrk="0" hangingPunct="1">
-              <a:lnSpc>
-                <a:spcPct val="90000"/>
-              </a:lnSpc>
-              <a:spcBef>
-                <a:spcPts val="500"/>
-              </a:spcBef>
-              <a:buFont typeface="Arial" panose="020B0604020202020204" pitchFamily="34" charset="0"/>
-              <a:buChar char="•"/>
-              <a:defRPr sz="2400" kern="1200">
-                <a:solidFill>
-                  <a:schemeClr val="tx1"/>
-                </a:solidFill>
-                <a:latin typeface="+mn-lt"/>
-                <a:ea typeface="+mn-ea"/>
-                <a:cs typeface="+mn-cs"/>
-              </a:defRPr>
-            </a:lvl2pPr>
-            <a:lvl3pPr marL="1143000" indent="-228600" algn="l" defTabSz="914400" rtl="0" eaLnBrk="1" latinLnBrk="0" hangingPunct="1">
-              <a:lnSpc>
-                <a:spcPct val="90000"/>
-              </a:lnSpc>
-              <a:spcBef>
-                <a:spcPts val="500"/>
-              </a:spcBef>
-              <a:buFont typeface="Arial" panose="020B0604020202020204" pitchFamily="34" charset="0"/>
-              <a:buChar char="•"/>
-              <a:defRPr sz="2000" kern="1200">
-                <a:solidFill>
-                  <a:schemeClr val="tx1"/>
-                </a:solidFill>
-                <a:latin typeface="+mn-lt"/>
-                <a:ea typeface="+mn-ea"/>
-                <a:cs typeface="+mn-cs"/>
-              </a:defRPr>
-            </a:lvl3pPr>
-            <a:lvl4pPr marL="1600200" indent="-228600" algn="l" defTabSz="914400" rtl="0" eaLnBrk="1" latinLnBrk="0" hangingPunct="1">
-              <a:lnSpc>
-                <a:spcPct val="90000"/>
-              </a:lnSpc>
-              <a:spcBef>
-                <a:spcPts val="500"/>
-              </a:spcBef>
-              <a:buFont typeface="Arial" panose="020B0604020202020204" pitchFamily="34" charset="0"/>
-              <a:buChar char="•"/>
-              <a:defRPr sz="1800" kern="1200">
-                <a:solidFill>
-                  <a:schemeClr val="tx1"/>
-                </a:solidFill>
-                <a:latin typeface="+mn-lt"/>
-                <a:ea typeface="+mn-ea"/>
-                <a:cs typeface="+mn-cs"/>
-              </a:defRPr>
-            </a:lvl4pPr>
-            <a:lvl5pPr marL="2057400" indent="-228600" algn="l" defTabSz="914400" rtl="0" eaLnBrk="1" latinLnBrk="0" hangingPunct="1">
-              <a:lnSpc>
-                <a:spcPct val="90000"/>
-              </a:lnSpc>
-              <a:spcBef>
-                <a:spcPts val="500"/>
-              </a:spcBef>
-              <a:buFont typeface="Arial" panose="020B0604020202020204" pitchFamily="34" charset="0"/>
-              <a:buChar char="•"/>
-              <a:defRPr sz="1800" kern="1200">
-                <a:solidFill>
-                  <a:schemeClr val="tx1"/>
-                </a:solidFill>
-                <a:latin typeface="+mn-lt"/>
-                <a:ea typeface="+mn-ea"/>
-                <a:cs typeface="+mn-cs"/>
-              </a:defRPr>
-            </a:lvl5pPr>
-            <a:lvl6pPr marL="2514600" indent="-228600" algn="l" defTabSz="914400" rtl="0" eaLnBrk="1" latinLnBrk="0" hangingPunct="1">
-              <a:lnSpc>
-                <a:spcPct val="90000"/>
-              </a:lnSpc>
-              <a:spcBef>
-                <a:spcPts val="500"/>
-              </a:spcBef>
-              <a:buFont typeface="Arial" panose="020B0604020202020204" pitchFamily="34" charset="0"/>
-              <a:buChar char="•"/>
-              <a:defRPr sz="1800" kern="1200">
-                <a:solidFill>
-                  <a:schemeClr val="tx1"/>
-                </a:solidFill>
-                <a:latin typeface="+mn-lt"/>
-                <a:ea typeface="+mn-ea"/>
-                <a:cs typeface="+mn-cs"/>
-              </a:defRPr>
-            </a:lvl6pPr>
-            <a:lvl7pPr marL="2971800" indent="-228600" algn="l" defTabSz="914400" rtl="0" eaLnBrk="1" latinLnBrk="0" hangingPunct="1">
-              <a:lnSpc>
-                <a:spcPct val="90000"/>
-              </a:lnSpc>
-              <a:spcBef>
-                <a:spcPts val="500"/>
-              </a:spcBef>
-              <a:buFont typeface="Arial" panose="020B0604020202020204" pitchFamily="34" charset="0"/>
-              <a:buChar char="•"/>
-              <a:defRPr sz="1800" kern="1200">
-                <a:solidFill>
-                  <a:schemeClr val="tx1"/>
-                </a:solidFill>
-                <a:latin typeface="+mn-lt"/>
-                <a:ea typeface="+mn-ea"/>
-                <a:cs typeface="+mn-cs"/>
-              </a:defRPr>
-            </a:lvl7pPr>
-            <a:lvl8pPr marL="3429000" indent="-228600" algn="l" defTabSz="914400" rtl="0" eaLnBrk="1" latinLnBrk="0" hangingPunct="1">
-              <a:lnSpc>
-                <a:spcPct val="90000"/>
-              </a:lnSpc>
-              <a:spcBef>
-                <a:spcPts val="500"/>
-              </a:spcBef>
-              <a:buFont typeface="Arial" panose="020B0604020202020204" pitchFamily="34" charset="0"/>
-              <a:buChar char="•"/>
-              <a:defRPr sz="1800" kern="1200">
-                <a:solidFill>
-                  <a:schemeClr val="tx1"/>
-                </a:solidFill>
-                <a:latin typeface="+mn-lt"/>
-                <a:ea typeface="+mn-ea"/>
-                <a:cs typeface="+mn-cs"/>
-              </a:defRPr>
-            </a:lvl8pPr>
-            <a:lvl9pPr marL="3886200" indent="-228600" algn="l" defTabSz="914400" rtl="0" eaLnBrk="1" latinLnBrk="0" hangingPunct="1">
-              <a:lnSpc>
-                <a:spcPct val="90000"/>
-              </a:lnSpc>
-              <a:spcBef>
-                <a:spcPts val="500"/>
-              </a:spcBef>
-              <a:buFont typeface="Arial" panose="020B0604020202020204" pitchFamily="34" charset="0"/>
-              <a:buChar char="•"/>
-              <a:defRPr sz="1800" kern="1200">
-                <a:solidFill>
-                  <a:schemeClr val="tx1"/>
-                </a:solidFill>
-                <a:latin typeface="+mn-lt"/>
-                <a:ea typeface="+mn-ea"/>
-                <a:cs typeface="+mn-cs"/>
-              </a:defRPr>
-            </a:lvl9pPr>
-          </a:lstStyle>
-          <a:p>
-            <a:pPr marL="0" indent="0">
-              <a:buFont typeface="Arial" panose="020B0604020202020204" pitchFamily="34" charset="0"/>
-              <a:buNone/>
-            </a:pPr>
-            <a:r>
-              <a:rPr lang="en-US" dirty="0"/>
-              <a:t>Make Predictions</a:t>
-            </a:r>
-          </a:p>
-        </p:txBody>
-      </p:sp>
-      <p:sp>
-        <p:nvSpPr>
-          <p:cNvPr id="17" name="TextBox 16">
-            <a:extLst>
-              <a:ext uri="{FF2B5EF4-FFF2-40B4-BE49-F238E27FC236}">
-                <a16:creationId xmlns:a16="http://schemas.microsoft.com/office/drawing/2014/main" id="{4E68AEC2-F7AB-068A-1964-7A91D12FE50D}"/>
-              </a:ext>
-            </a:extLst>
-          </p:cNvPr>
-          <p:cNvSpPr txBox="1"/>
-          <p:nvPr/>
-        </p:nvSpPr>
-        <p:spPr>
-          <a:xfrm>
-            <a:off x="780535" y="4085083"/>
-            <a:ext cx="6094970" cy="369332"/>
-          </a:xfrm>
-          <a:prstGeom prst="rect">
-            <a:avLst/>
-          </a:prstGeom>
-          <a:noFill/>
-        </p:spPr>
-        <p:txBody>
-          <a:bodyPr wrap="square">
-            <a:spAutoFit/>
-          </a:bodyPr>
-          <a:lstStyle/>
-          <a:p>
-            <a:r>
-              <a:rPr lang="en-US" b="0" i="0" dirty="0">
-                <a:solidFill>
-                  <a:srgbClr val="1F1F1F"/>
-                </a:solidFill>
-                <a:effectLst/>
-                <a:latin typeface="Courier New" panose="02070309020205020404" pitchFamily="49" charset="0"/>
-              </a:rPr>
-              <a:t>[362.33639889] 15802.319376714753</a:t>
-            </a:r>
-            <a:endParaRPr lang="en-US" dirty="0"/>
-          </a:p>
-        </p:txBody>
-      </p:sp>
-      <p:sp>
-        <p:nvSpPr>
-          <p:cNvPr id="19" name="TextBox 18">
-            <a:extLst>
-              <a:ext uri="{FF2B5EF4-FFF2-40B4-BE49-F238E27FC236}">
-                <a16:creationId xmlns:a16="http://schemas.microsoft.com/office/drawing/2014/main" id="{218A98D4-6287-749F-445A-D0B620AB7F89}"/>
-              </a:ext>
-            </a:extLst>
-          </p:cNvPr>
-          <p:cNvSpPr txBox="1"/>
-          <p:nvPr/>
-        </p:nvSpPr>
-        <p:spPr>
-          <a:xfrm>
-            <a:off x="780535" y="5275715"/>
-            <a:ext cx="9592962" cy="475771"/>
-          </a:xfrm>
-          <a:prstGeom prst="rect">
-            <a:avLst/>
-          </a:prstGeom>
-          <a:noFill/>
-        </p:spPr>
-        <p:txBody>
-          <a:bodyPr wrap="square">
-            <a:spAutoFit/>
-          </a:bodyPr>
-          <a:lstStyle/>
-          <a:p>
-            <a:pPr>
-              <a:lnSpc>
-                <a:spcPts val="1425"/>
-              </a:lnSpc>
-              <a:buNone/>
-            </a:pPr>
-            <a:r>
-              <a:rPr lang="en-US" b="1" noProof="1">
-                <a:solidFill>
-                  <a:srgbClr val="008000"/>
-                </a:solidFill>
-                <a:effectLst/>
-                <a:latin typeface="Courier New" panose="02070309020205020404" pitchFamily="49" charset="0"/>
-              </a:rPr>
-              <a:t># Make predictions using the training dataset</a:t>
-            </a:r>
-            <a:endParaRPr lang="en-US" b="1" noProof="1">
-              <a:solidFill>
-                <a:srgbClr val="000000"/>
-              </a:solidFill>
-              <a:effectLst/>
-              <a:latin typeface="Courier New" panose="02070309020205020404" pitchFamily="49" charset="0"/>
-            </a:endParaRPr>
-          </a:p>
-          <a:p>
-            <a:pPr>
-              <a:lnSpc>
-                <a:spcPts val="1425"/>
-              </a:lnSpc>
-            </a:pPr>
-            <a:r>
-              <a:rPr lang="en-US" b="1" noProof="1">
-                <a:solidFill>
-                  <a:srgbClr val="000000"/>
-                </a:solidFill>
-                <a:effectLst/>
-                <a:latin typeface="Courier New" panose="02070309020205020404" pitchFamily="49" charset="0"/>
-              </a:rPr>
-              <a:t>train_predictions= regressor.predict(x_train)</a:t>
+              <a:t>Assumptions of Simple Linear Regression</a:t>
             </a:r>
           </a:p>
         </p:txBody>
@@ -8984,7 +7757,7 @@
     </p:spTree>
     <p:extLst>
       <p:ext uri="{BB962C8B-B14F-4D97-AF65-F5344CB8AC3E}">
-        <p14:creationId xmlns:p14="http://schemas.microsoft.com/office/powerpoint/2010/main" val="165576399"/>
+        <p14:creationId xmlns:p14="http://schemas.microsoft.com/office/powerpoint/2010/main" val="1558611893"/>
       </p:ext>
     </p:extLst>
   </p:cSld>
@@ -9013,10 +7786,10 @@
       </p:grpSpPr>
       <p:sp>
         <p:nvSpPr>
-          <p:cNvPr id="3" name="Title 2">
-            <a:extLst>
-              <a:ext uri="{FF2B5EF4-FFF2-40B4-BE49-F238E27FC236}">
-                <a16:creationId xmlns:a16="http://schemas.microsoft.com/office/drawing/2014/main" id="{62185649-C82E-A3A1-050F-9B8CB93988AB}"/>
+          <p:cNvPr id="4" name="Title 3">
+            <a:extLst>
+              <a:ext uri="{FF2B5EF4-FFF2-40B4-BE49-F238E27FC236}">
+                <a16:creationId xmlns:a16="http://schemas.microsoft.com/office/drawing/2014/main" id="{8E2EA1D2-44C5-E332-39BC-CE451FE205E7}"/>
               </a:ext>
             </a:extLst>
           </p:cNvPr>
@@ -9034,543 +7807,17 @@
           <a:p>
             <a:r>
               <a:rPr lang="en-US" dirty="0"/>
-              <a:t>Show Prediction Plot</a:t>
+              <a:t>Implement Regression in Python</a:t>
             </a:r>
           </a:p>
         </p:txBody>
       </p:sp>
       <p:sp>
         <p:nvSpPr>
-          <p:cNvPr id="5" name="TextBox 4">
-            <a:extLst>
-              <a:ext uri="{FF2B5EF4-FFF2-40B4-BE49-F238E27FC236}">
-                <a16:creationId xmlns:a16="http://schemas.microsoft.com/office/drawing/2014/main" id="{183324EB-912D-14B6-940B-67A9A7B6C6C0}"/>
-              </a:ext>
-            </a:extLst>
-          </p:cNvPr>
-          <p:cNvSpPr txBox="1"/>
-          <p:nvPr/>
-        </p:nvSpPr>
-        <p:spPr>
-          <a:xfrm>
-            <a:off x="838200" y="1758458"/>
-            <a:ext cx="9943070" cy="1912062"/>
-          </a:xfrm>
-          <a:prstGeom prst="rect">
-            <a:avLst/>
-          </a:prstGeom>
-          <a:noFill/>
-        </p:spPr>
-        <p:txBody>
-          <a:bodyPr wrap="square">
-            <a:spAutoFit/>
-          </a:bodyPr>
-          <a:lstStyle/>
-          <a:p>
-            <a:pPr>
-              <a:lnSpc>
-                <a:spcPts val="1425"/>
-              </a:lnSpc>
-              <a:buNone/>
-            </a:pPr>
-            <a:r>
-              <a:rPr lang="en-US" b="1" noProof="1">
-                <a:solidFill>
-                  <a:srgbClr val="008000"/>
-                </a:solidFill>
-                <a:effectLst/>
-                <a:latin typeface="Courier New" panose="02070309020205020404" pitchFamily="49" charset="0"/>
-              </a:rPr>
-              <a:t># plot the training data with the original dependent variable</a:t>
-            </a:r>
-            <a:endParaRPr lang="en-US" b="1" noProof="1">
-              <a:solidFill>
-                <a:srgbClr val="000000"/>
-              </a:solidFill>
-              <a:effectLst/>
-              <a:latin typeface="Courier New" panose="02070309020205020404" pitchFamily="49" charset="0"/>
-            </a:endParaRPr>
-          </a:p>
-          <a:p>
-            <a:pPr>
-              <a:lnSpc>
-                <a:spcPts val="1425"/>
-              </a:lnSpc>
-              <a:buNone/>
-            </a:pPr>
-            <a:r>
-              <a:rPr lang="en-US" b="1" noProof="1">
-                <a:solidFill>
-                  <a:srgbClr val="000000"/>
-                </a:solidFill>
-                <a:effectLst/>
-                <a:latin typeface="Courier New" panose="02070309020205020404" pitchFamily="49" charset="0"/>
-              </a:rPr>
-              <a:t>plt.scatter(x_train, y_train, color=</a:t>
-            </a:r>
-            <a:r>
-              <a:rPr lang="en-US" b="1" noProof="1">
-                <a:solidFill>
-                  <a:srgbClr val="A31515"/>
-                </a:solidFill>
-                <a:effectLst/>
-                <a:latin typeface="Courier New" panose="02070309020205020404" pitchFamily="49" charset="0"/>
-              </a:rPr>
-              <a:t>"green"</a:t>
-            </a:r>
-            <a:r>
-              <a:rPr lang="en-US" b="1" noProof="1">
-                <a:solidFill>
-                  <a:srgbClr val="000000"/>
-                </a:solidFill>
-                <a:effectLst/>
-                <a:latin typeface="Courier New" panose="02070309020205020404" pitchFamily="49" charset="0"/>
-              </a:rPr>
-              <a:t>)  </a:t>
-            </a:r>
-          </a:p>
-          <a:p>
-            <a:pPr>
-              <a:lnSpc>
-                <a:spcPts val="1425"/>
-              </a:lnSpc>
-              <a:buNone/>
-            </a:pPr>
-            <a:br>
-              <a:rPr lang="en-US" b="1" noProof="1">
-                <a:solidFill>
-                  <a:srgbClr val="000000"/>
-                </a:solidFill>
-                <a:effectLst/>
-                <a:latin typeface="Courier New" panose="02070309020205020404" pitchFamily="49" charset="0"/>
-              </a:rPr>
-            </a:br>
-            <a:r>
-              <a:rPr lang="en-US" b="1" noProof="1">
-                <a:solidFill>
-                  <a:srgbClr val="008000"/>
-                </a:solidFill>
-                <a:effectLst/>
-                <a:latin typeface="Courier New" panose="02070309020205020404" pitchFamily="49" charset="0"/>
-              </a:rPr>
-              <a:t># plot the training data with the predictions</a:t>
-            </a:r>
-            <a:endParaRPr lang="en-US" b="1" noProof="1">
-              <a:solidFill>
-                <a:srgbClr val="000000"/>
-              </a:solidFill>
-              <a:effectLst/>
-              <a:latin typeface="Courier New" panose="02070309020205020404" pitchFamily="49" charset="0"/>
-            </a:endParaRPr>
-          </a:p>
-          <a:p>
-            <a:pPr>
-              <a:lnSpc>
-                <a:spcPts val="1425"/>
-              </a:lnSpc>
-              <a:buNone/>
-            </a:pPr>
-            <a:r>
-              <a:rPr lang="en-US" b="1" noProof="1">
-                <a:solidFill>
-                  <a:srgbClr val="000000"/>
-                </a:solidFill>
-                <a:effectLst/>
-                <a:latin typeface="Courier New" panose="02070309020205020404" pitchFamily="49" charset="0"/>
-              </a:rPr>
-              <a:t>plt.plot(x_train, train_predictions, color=</a:t>
-            </a:r>
-            <a:r>
-              <a:rPr lang="en-US" b="1" noProof="1">
-                <a:solidFill>
-                  <a:srgbClr val="A31515"/>
-                </a:solidFill>
-                <a:effectLst/>
-                <a:latin typeface="Courier New" panose="02070309020205020404" pitchFamily="49" charset="0"/>
-              </a:rPr>
-              <a:t>"red"</a:t>
-            </a:r>
-            <a:r>
-              <a:rPr lang="en-US" b="1" noProof="1">
-                <a:solidFill>
-                  <a:srgbClr val="000000"/>
-                </a:solidFill>
-                <a:effectLst/>
-                <a:latin typeface="Courier New" panose="02070309020205020404" pitchFamily="49" charset="0"/>
-              </a:rPr>
-              <a:t>)    </a:t>
-            </a:r>
-          </a:p>
-          <a:p>
-            <a:pPr>
-              <a:lnSpc>
-                <a:spcPts val="1425"/>
-              </a:lnSpc>
-              <a:buNone/>
-            </a:pPr>
-            <a:br>
-              <a:rPr lang="en-US" b="1" noProof="1">
-                <a:solidFill>
-                  <a:srgbClr val="000000"/>
-                </a:solidFill>
-                <a:effectLst/>
-                <a:latin typeface="Courier New" panose="02070309020205020404" pitchFamily="49" charset="0"/>
-              </a:rPr>
-            </a:br>
-            <a:r>
-              <a:rPr lang="en-US" b="1" noProof="1">
-                <a:solidFill>
-                  <a:srgbClr val="000000"/>
-                </a:solidFill>
-                <a:effectLst/>
-                <a:latin typeface="Courier New" panose="02070309020205020404" pitchFamily="49" charset="0"/>
-              </a:rPr>
-              <a:t>plt.title(</a:t>
-            </a:r>
-            <a:r>
-              <a:rPr lang="en-US" b="1" noProof="1">
-                <a:solidFill>
-                  <a:srgbClr val="A31515"/>
-                </a:solidFill>
-                <a:effectLst/>
-                <a:latin typeface="Courier New" panose="02070309020205020404" pitchFamily="49" charset="0"/>
-              </a:rPr>
-              <a:t>"Size vs Price (Training Dataset)"</a:t>
-            </a:r>
-            <a:r>
-              <a:rPr lang="en-US" b="1" noProof="1">
-                <a:solidFill>
-                  <a:srgbClr val="000000"/>
-                </a:solidFill>
-                <a:effectLst/>
-                <a:latin typeface="Courier New" panose="02070309020205020404" pitchFamily="49" charset="0"/>
-              </a:rPr>
-              <a:t>)  </a:t>
-            </a:r>
-          </a:p>
-          <a:p>
-            <a:pPr>
-              <a:lnSpc>
-                <a:spcPts val="1425"/>
-              </a:lnSpc>
-              <a:buNone/>
-            </a:pPr>
-            <a:r>
-              <a:rPr lang="en-US" b="1" noProof="1">
-                <a:solidFill>
-                  <a:srgbClr val="000000"/>
-                </a:solidFill>
-                <a:effectLst/>
-                <a:latin typeface="Courier New" panose="02070309020205020404" pitchFamily="49" charset="0"/>
-              </a:rPr>
-              <a:t>plt.xlabel(</a:t>
-            </a:r>
-            <a:r>
-              <a:rPr lang="en-US" b="1" noProof="1">
-                <a:solidFill>
-                  <a:srgbClr val="A31515"/>
-                </a:solidFill>
-                <a:effectLst/>
-                <a:latin typeface="Courier New" panose="02070309020205020404" pitchFamily="49" charset="0"/>
-              </a:rPr>
-              <a:t>"Size in Square Meter"</a:t>
-            </a:r>
-            <a:r>
-              <a:rPr lang="en-US" b="1" noProof="1">
-                <a:solidFill>
-                  <a:srgbClr val="000000"/>
-                </a:solidFill>
-                <a:effectLst/>
-                <a:latin typeface="Courier New" panose="02070309020205020404" pitchFamily="49" charset="0"/>
-              </a:rPr>
-              <a:t>)  </a:t>
-            </a:r>
-          </a:p>
-          <a:p>
-            <a:pPr>
-              <a:lnSpc>
-                <a:spcPts val="1425"/>
-              </a:lnSpc>
-              <a:buNone/>
-            </a:pPr>
-            <a:r>
-              <a:rPr lang="en-US" b="1" noProof="1">
-                <a:solidFill>
-                  <a:srgbClr val="000000"/>
-                </a:solidFill>
-                <a:effectLst/>
-                <a:latin typeface="Courier New" panose="02070309020205020404" pitchFamily="49" charset="0"/>
-              </a:rPr>
-              <a:t>plt.ylabel(</a:t>
-            </a:r>
-            <a:r>
-              <a:rPr lang="en-US" b="1" noProof="1">
-                <a:solidFill>
-                  <a:srgbClr val="A31515"/>
-                </a:solidFill>
-                <a:effectLst/>
-                <a:latin typeface="Courier New" panose="02070309020205020404" pitchFamily="49" charset="0"/>
-              </a:rPr>
-              <a:t>"Appartment Price"</a:t>
-            </a:r>
-            <a:r>
-              <a:rPr lang="en-US" b="1" noProof="1">
-                <a:solidFill>
-                  <a:srgbClr val="000000"/>
-                </a:solidFill>
-                <a:effectLst/>
-                <a:latin typeface="Courier New" panose="02070309020205020404" pitchFamily="49" charset="0"/>
-              </a:rPr>
-              <a:t>)  </a:t>
-            </a:r>
-          </a:p>
-          <a:p>
-            <a:pPr>
-              <a:lnSpc>
-                <a:spcPts val="1425"/>
-              </a:lnSpc>
-            </a:pPr>
-            <a:r>
-              <a:rPr lang="en-US" b="1" noProof="1">
-                <a:solidFill>
-                  <a:srgbClr val="000000"/>
-                </a:solidFill>
-                <a:effectLst/>
-                <a:latin typeface="Courier New" panose="02070309020205020404" pitchFamily="49" charset="0"/>
-              </a:rPr>
-              <a:t>plt.show()</a:t>
-            </a:r>
-          </a:p>
-        </p:txBody>
-      </p:sp>
-      <p:pic>
-        <p:nvPicPr>
-          <p:cNvPr id="7" name="Picture 6">
-            <a:extLst>
-              <a:ext uri="{FF2B5EF4-FFF2-40B4-BE49-F238E27FC236}">
-                <a16:creationId xmlns:a16="http://schemas.microsoft.com/office/drawing/2014/main" id="{F3BC5B92-84C6-A71A-B9FF-22899DB146AE}"/>
-              </a:ext>
-            </a:extLst>
-          </p:cNvPr>
-          <p:cNvPicPr>
-            <a:picLocks noChangeAspect="1"/>
-          </p:cNvPicPr>
-          <p:nvPr/>
-        </p:nvPicPr>
-        <p:blipFill>
-          <a:blip r:embed="rId2"/>
-          <a:stretch>
-            <a:fillRect/>
-          </a:stretch>
-        </p:blipFill>
-        <p:spPr>
-          <a:xfrm>
-            <a:off x="7259760" y="3156210"/>
-            <a:ext cx="4094040" cy="3003634"/>
-          </a:xfrm>
-          <a:prstGeom prst="rect">
-            <a:avLst/>
-          </a:prstGeom>
-        </p:spPr>
-      </p:pic>
-      <p:sp>
-        <p:nvSpPr>
-          <p:cNvPr id="9" name="TextBox 8">
-            <a:extLst>
-              <a:ext uri="{FF2B5EF4-FFF2-40B4-BE49-F238E27FC236}">
-                <a16:creationId xmlns:a16="http://schemas.microsoft.com/office/drawing/2014/main" id="{B0D2EF0C-E643-3DDB-E0FE-3D4594086E87}"/>
-              </a:ext>
-            </a:extLst>
-          </p:cNvPr>
-          <p:cNvSpPr txBox="1"/>
-          <p:nvPr/>
-        </p:nvSpPr>
-        <p:spPr>
-          <a:xfrm>
-            <a:off x="837170" y="4795415"/>
-            <a:ext cx="6094970" cy="655308"/>
-          </a:xfrm>
-          <a:prstGeom prst="rect">
-            <a:avLst/>
-          </a:prstGeom>
-          <a:noFill/>
-        </p:spPr>
-        <p:txBody>
-          <a:bodyPr wrap="square">
-            <a:spAutoFit/>
-          </a:bodyPr>
-          <a:lstStyle/>
-          <a:p>
-            <a:pPr>
-              <a:lnSpc>
-                <a:spcPts val="1425"/>
-              </a:lnSpc>
-              <a:buNone/>
-            </a:pPr>
-            <a:r>
-              <a:rPr lang="fr-FR" b="1" dirty="0">
-                <a:solidFill>
-                  <a:srgbClr val="000000"/>
-                </a:solidFill>
-                <a:effectLst/>
-                <a:latin typeface="Courier New" panose="02070309020205020404" pitchFamily="49" charset="0"/>
-              </a:rPr>
-              <a:t>r2 = r2_score(</a:t>
-            </a:r>
-            <a:r>
-              <a:rPr lang="fr-FR" b="1" dirty="0" err="1">
-                <a:solidFill>
-                  <a:srgbClr val="000000"/>
-                </a:solidFill>
-                <a:effectLst/>
-                <a:latin typeface="Courier New" panose="02070309020205020404" pitchFamily="49" charset="0"/>
-              </a:rPr>
-              <a:t>y_train</a:t>
-            </a:r>
-            <a:r>
-              <a:rPr lang="fr-FR" b="1" dirty="0">
-                <a:solidFill>
-                  <a:srgbClr val="000000"/>
-                </a:solidFill>
-                <a:effectLst/>
-                <a:latin typeface="Courier New" panose="02070309020205020404" pitchFamily="49" charset="0"/>
-              </a:rPr>
-              <a:t>, </a:t>
-            </a:r>
-            <a:r>
-              <a:rPr lang="fr-FR" b="1" dirty="0" err="1">
-                <a:solidFill>
-                  <a:srgbClr val="000000"/>
-                </a:solidFill>
-                <a:effectLst/>
-                <a:latin typeface="Courier New" panose="02070309020205020404" pitchFamily="49" charset="0"/>
-              </a:rPr>
-              <a:t>train_predictions</a:t>
-            </a:r>
-            <a:r>
-              <a:rPr lang="fr-FR" b="1" dirty="0">
-                <a:solidFill>
-                  <a:srgbClr val="000000"/>
-                </a:solidFill>
-                <a:effectLst/>
-                <a:latin typeface="Courier New" panose="02070309020205020404" pitchFamily="49" charset="0"/>
-              </a:rPr>
-              <a:t>)</a:t>
-            </a:r>
-          </a:p>
-          <a:p>
-            <a:pPr>
-              <a:lnSpc>
-                <a:spcPts val="1425"/>
-              </a:lnSpc>
-              <a:buNone/>
-            </a:pPr>
-            <a:r>
-              <a:rPr lang="fr-FR" b="1" dirty="0">
-                <a:solidFill>
-                  <a:srgbClr val="000000"/>
-                </a:solidFill>
-                <a:effectLst/>
-                <a:latin typeface="Courier New" panose="02070309020205020404" pitchFamily="49" charset="0"/>
-              </a:rPr>
-              <a:t>r2 = </a:t>
-            </a:r>
-            <a:r>
-              <a:rPr lang="fr-FR" b="1" dirty="0">
-                <a:solidFill>
-                  <a:srgbClr val="6A5221"/>
-                </a:solidFill>
-                <a:effectLst/>
-                <a:latin typeface="Courier New" panose="02070309020205020404" pitchFamily="49" charset="0"/>
-              </a:rPr>
-              <a:t>round</a:t>
-            </a:r>
-            <a:r>
-              <a:rPr lang="fr-FR" b="1" dirty="0">
-                <a:solidFill>
-                  <a:srgbClr val="000000"/>
-                </a:solidFill>
-                <a:effectLst/>
-                <a:latin typeface="Courier New" panose="02070309020205020404" pitchFamily="49" charset="0"/>
-              </a:rPr>
-              <a:t>(r2,</a:t>
-            </a:r>
-            <a:r>
-              <a:rPr lang="fr-FR" b="1" dirty="0">
-                <a:solidFill>
-                  <a:srgbClr val="116644"/>
-                </a:solidFill>
-                <a:effectLst/>
-                <a:latin typeface="Courier New" panose="02070309020205020404" pitchFamily="49" charset="0"/>
-              </a:rPr>
-              <a:t>2</a:t>
-            </a:r>
-            <a:r>
-              <a:rPr lang="fr-FR" b="1" dirty="0">
-                <a:solidFill>
-                  <a:srgbClr val="000000"/>
-                </a:solidFill>
-                <a:effectLst/>
-                <a:latin typeface="Courier New" panose="02070309020205020404" pitchFamily="49" charset="0"/>
-              </a:rPr>
-              <a:t>)</a:t>
-            </a:r>
-          </a:p>
-          <a:p>
-            <a:pPr>
-              <a:lnSpc>
-                <a:spcPts val="1425"/>
-              </a:lnSpc>
-            </a:pPr>
-            <a:r>
-              <a:rPr lang="fr-FR" b="1" dirty="0" err="1">
-                <a:solidFill>
-                  <a:srgbClr val="6A5221"/>
-                </a:solidFill>
-                <a:effectLst/>
-                <a:latin typeface="Courier New" panose="02070309020205020404" pitchFamily="49" charset="0"/>
-              </a:rPr>
-              <a:t>print</a:t>
-            </a:r>
-            <a:r>
-              <a:rPr lang="fr-FR" b="1" dirty="0">
-                <a:solidFill>
-                  <a:srgbClr val="000000"/>
-                </a:solidFill>
-                <a:effectLst/>
-                <a:latin typeface="Courier New" panose="02070309020205020404" pitchFamily="49" charset="0"/>
-              </a:rPr>
-              <a:t>(</a:t>
-            </a:r>
-            <a:r>
-              <a:rPr lang="fr-FR" b="1" dirty="0">
-                <a:solidFill>
-                  <a:srgbClr val="A31515"/>
-                </a:solidFill>
-                <a:effectLst/>
-                <a:latin typeface="Courier New" panose="02070309020205020404" pitchFamily="49" charset="0"/>
-              </a:rPr>
-              <a:t>"r2 score: "</a:t>
-            </a:r>
-            <a:r>
-              <a:rPr lang="fr-FR" b="1" dirty="0">
-                <a:solidFill>
-                  <a:srgbClr val="000000"/>
-                </a:solidFill>
-                <a:effectLst/>
-                <a:latin typeface="Courier New" panose="02070309020205020404" pitchFamily="49" charset="0"/>
-              </a:rPr>
-              <a:t>, r2)</a:t>
-            </a:r>
-          </a:p>
-        </p:txBody>
-      </p:sp>
-      <p:sp>
-        <p:nvSpPr>
-          <p:cNvPr id="10" name="Content Placeholder 1">
-            <a:extLst>
-              <a:ext uri="{FF2B5EF4-FFF2-40B4-BE49-F238E27FC236}">
-                <a16:creationId xmlns:a16="http://schemas.microsoft.com/office/drawing/2014/main" id="{53E579A2-15AC-99B0-3420-360A8FB1DA23}"/>
+          <p:cNvPr id="5" name="Text Placeholder 4">
+            <a:extLst>
+              <a:ext uri="{FF2B5EF4-FFF2-40B4-BE49-F238E27FC236}">
+                <a16:creationId xmlns:a16="http://schemas.microsoft.com/office/drawing/2014/main" id="{ABCBDB70-511E-63F0-2A2E-C4DED7350238}"/>
               </a:ext>
             </a:extLst>
           </p:cNvPr>
@@ -9578,365 +7825,22 @@
             <a:spLocks noGrp="1"/>
           </p:cNvSpPr>
           <p:nvPr>
-            <p:ph idx="1"/>
+            <p:ph type="body" idx="1"/>
           </p:nvPr>
         </p:nvSpPr>
-        <p:spPr>
-          <a:xfrm>
-            <a:off x="837170" y="4338778"/>
-            <a:ext cx="5741773" cy="351147"/>
-          </a:xfrm>
-        </p:spPr>
+        <p:spPr/>
         <p:txBody>
-          <a:bodyPr>
-            <a:normAutofit lnSpcReduction="10000"/>
-          </a:bodyPr>
+          <a:bodyPr/>
           <a:lstStyle/>
           <a:p>
-            <a:pPr marL="0" indent="0">
-              <a:buNone/>
-            </a:pPr>
-            <a:r>
-              <a:rPr lang="en-US" sz="2000" dirty="0"/>
-              <a:t>Evaluate the model using R-Squared metric:</a:t>
-            </a:r>
-          </a:p>
-        </p:txBody>
-      </p:sp>
-      <p:sp>
-        <p:nvSpPr>
-          <p:cNvPr id="11" name="Rectangle 1">
-            <a:extLst>
-              <a:ext uri="{FF2B5EF4-FFF2-40B4-BE49-F238E27FC236}">
-                <a16:creationId xmlns:a16="http://schemas.microsoft.com/office/drawing/2014/main" id="{4A070593-0CE8-45D5-DF62-3F13FC7319C1}"/>
-              </a:ext>
-            </a:extLst>
-          </p:cNvPr>
-          <p:cNvSpPr>
-            <a:spLocks noChangeArrowheads="1"/>
-          </p:cNvSpPr>
-          <p:nvPr/>
-        </p:nvSpPr>
-        <p:spPr bwMode="auto">
-          <a:xfrm>
-            <a:off x="837170" y="6165968"/>
-            <a:ext cx="2036135" cy="246221"/>
-          </a:xfrm>
-          <a:prstGeom prst="rect">
-            <a:avLst/>
-          </a:prstGeom>
-          <a:noFill/>
-          <a:ln>
-            <a:noFill/>
-          </a:ln>
-          <a:effectLst/>
-          <a:extLst>
-            <a:ext uri="{909E8E84-426E-40DD-AFC4-6F175D3DCCD1}">
-              <a14:hiddenFill xmlns:a14="http://schemas.microsoft.com/office/drawing/2010/main">
-                <a:solidFill>
-                  <a:schemeClr val="accent1"/>
-                </a:solidFill>
-              </a14:hiddenFill>
-            </a:ext>
-            <a:ext uri="{91240B29-F687-4F45-9708-019B960494DF}">
-              <a14:hiddenLine xmlns:a14="http://schemas.microsoft.com/office/drawing/2010/main" w="9525">
-                <a:solidFill>
-                  <a:schemeClr val="tx1"/>
-                </a:solidFill>
-                <a:miter lim="800000"/>
-                <a:headEnd/>
-                <a:tailEnd/>
-              </a14:hiddenLine>
-            </a:ext>
-            <a:ext uri="{AF507438-7753-43E0-B8FC-AC1667EBCBE1}">
-              <a14:hiddenEffects xmlns:a14="http://schemas.microsoft.com/office/drawing/2010/main">
-                <a:effectLst>
-                  <a:outerShdw dist="35921" dir="2700000" algn="ctr" rotWithShape="0">
-                    <a:schemeClr val="bg2"/>
-                  </a:outerShdw>
-                </a:effectLst>
-              </a14:hiddenEffects>
-            </a:ext>
-          </a:extLst>
-        </p:spPr>
-        <p:txBody>
-          <a:bodyPr vert="horz" wrap="none" lIns="91440" tIns="0" rIns="91440" bIns="0" numCol="1" anchor="ctr" anchorCtr="0" compatLnSpc="1">
-            <a:prstTxWarp prst="textNoShape">
-              <a:avLst/>
-            </a:prstTxWarp>
-            <a:spAutoFit/>
-          </a:bodyPr>
-          <a:lstStyle>
-            <a:lvl1pPr eaLnBrk="0" fontAlgn="base" hangingPunct="0">
-              <a:spcBef>
-                <a:spcPct val="0"/>
-              </a:spcBef>
-              <a:spcAft>
-                <a:spcPct val="0"/>
-              </a:spcAft>
-              <a:defRPr>
-                <a:solidFill>
-                  <a:schemeClr val="tx1"/>
-                </a:solidFill>
-                <a:latin typeface="Arial" panose="020B0604020202020204" pitchFamily="34" charset="0"/>
-              </a:defRPr>
-            </a:lvl1pPr>
-            <a:lvl2pPr eaLnBrk="0" fontAlgn="base" hangingPunct="0">
-              <a:spcBef>
-                <a:spcPct val="0"/>
-              </a:spcBef>
-              <a:spcAft>
-                <a:spcPct val="0"/>
-              </a:spcAft>
-              <a:defRPr>
-                <a:solidFill>
-                  <a:schemeClr val="tx1"/>
-                </a:solidFill>
-                <a:latin typeface="Arial" panose="020B0604020202020204" pitchFamily="34" charset="0"/>
-              </a:defRPr>
-            </a:lvl2pPr>
-            <a:lvl3pPr eaLnBrk="0" fontAlgn="base" hangingPunct="0">
-              <a:spcBef>
-                <a:spcPct val="0"/>
-              </a:spcBef>
-              <a:spcAft>
-                <a:spcPct val="0"/>
-              </a:spcAft>
-              <a:defRPr>
-                <a:solidFill>
-                  <a:schemeClr val="tx1"/>
-                </a:solidFill>
-                <a:latin typeface="Arial" panose="020B0604020202020204" pitchFamily="34" charset="0"/>
-              </a:defRPr>
-            </a:lvl3pPr>
-            <a:lvl4pPr eaLnBrk="0" fontAlgn="base" hangingPunct="0">
-              <a:spcBef>
-                <a:spcPct val="0"/>
-              </a:spcBef>
-              <a:spcAft>
-                <a:spcPct val="0"/>
-              </a:spcAft>
-              <a:defRPr>
-                <a:solidFill>
-                  <a:schemeClr val="tx1"/>
-                </a:solidFill>
-                <a:latin typeface="Arial" panose="020B0604020202020204" pitchFamily="34" charset="0"/>
-              </a:defRPr>
-            </a:lvl4pPr>
-            <a:lvl5pPr eaLnBrk="0" fontAlgn="base" hangingPunct="0">
-              <a:spcBef>
-                <a:spcPct val="0"/>
-              </a:spcBef>
-              <a:spcAft>
-                <a:spcPct val="0"/>
-              </a:spcAft>
-              <a:defRPr>
-                <a:solidFill>
-                  <a:schemeClr val="tx1"/>
-                </a:solidFill>
-                <a:latin typeface="Arial" panose="020B0604020202020204" pitchFamily="34" charset="0"/>
-              </a:defRPr>
-            </a:lvl5pPr>
-            <a:lvl6pPr eaLnBrk="0" fontAlgn="base" hangingPunct="0">
-              <a:spcBef>
-                <a:spcPct val="0"/>
-              </a:spcBef>
-              <a:spcAft>
-                <a:spcPct val="0"/>
-              </a:spcAft>
-              <a:defRPr>
-                <a:solidFill>
-                  <a:schemeClr val="tx1"/>
-                </a:solidFill>
-                <a:latin typeface="Arial" panose="020B0604020202020204" pitchFamily="34" charset="0"/>
-              </a:defRPr>
-            </a:lvl6pPr>
-            <a:lvl7pPr eaLnBrk="0" fontAlgn="base" hangingPunct="0">
-              <a:spcBef>
-                <a:spcPct val="0"/>
-              </a:spcBef>
-              <a:spcAft>
-                <a:spcPct val="0"/>
-              </a:spcAft>
-              <a:defRPr>
-                <a:solidFill>
-                  <a:schemeClr val="tx1"/>
-                </a:solidFill>
-                <a:latin typeface="Arial" panose="020B0604020202020204" pitchFamily="34" charset="0"/>
-              </a:defRPr>
-            </a:lvl7pPr>
-            <a:lvl8pPr eaLnBrk="0" fontAlgn="base" hangingPunct="0">
-              <a:spcBef>
-                <a:spcPct val="0"/>
-              </a:spcBef>
-              <a:spcAft>
-                <a:spcPct val="0"/>
-              </a:spcAft>
-              <a:defRPr>
-                <a:solidFill>
-                  <a:schemeClr val="tx1"/>
-                </a:solidFill>
-                <a:latin typeface="Arial" panose="020B0604020202020204" pitchFamily="34" charset="0"/>
-              </a:defRPr>
-            </a:lvl8pPr>
-            <a:lvl9pPr eaLnBrk="0" fontAlgn="base" hangingPunct="0">
-              <a:spcBef>
-                <a:spcPct val="0"/>
-              </a:spcBef>
-              <a:spcAft>
-                <a:spcPct val="0"/>
-              </a:spcAft>
-              <a:defRPr>
-                <a:solidFill>
-                  <a:schemeClr val="tx1"/>
-                </a:solidFill>
-                <a:latin typeface="Arial" panose="020B0604020202020204" pitchFamily="34" charset="0"/>
-              </a:defRPr>
-            </a:lvl9pPr>
-          </a:lstStyle>
-          <a:p>
-            <a:pPr marL="0" marR="0" lvl="0" indent="0" algn="l" defTabSz="914400" rtl="0" eaLnBrk="0" fontAlgn="base" latinLnBrk="0" hangingPunct="0">
-              <a:lnSpc>
-                <a:spcPct val="100000"/>
-              </a:lnSpc>
-              <a:spcBef>
-                <a:spcPct val="0"/>
-              </a:spcBef>
-              <a:spcAft>
-                <a:spcPct val="0"/>
-              </a:spcAft>
-              <a:buClrTx/>
-              <a:buSzTx/>
-              <a:buFontTx/>
-              <a:buNone/>
-              <a:tabLst/>
-            </a:pPr>
-            <a:r>
-              <a:rPr kumimoji="0" lang="en-US" altLang="en-US" sz="1600" b="0" i="0" u="none" strike="noStrike" cap="none" normalizeH="0" baseline="0" dirty="0">
-                <a:ln>
-                  <a:noFill/>
-                </a:ln>
-                <a:solidFill>
-                  <a:srgbClr val="1F1F1F"/>
-                </a:solidFill>
-                <a:effectLst/>
-                <a:latin typeface="Courier New" panose="02070309020205020404" pitchFamily="49" charset="0"/>
-                <a:cs typeface="Courier New" panose="02070309020205020404" pitchFamily="49" charset="0"/>
-              </a:rPr>
-              <a:t>r2 score: 0.55 </a:t>
-            </a:r>
-          </a:p>
-        </p:txBody>
-      </p:sp>
-      <p:sp>
-        <p:nvSpPr>
-          <p:cNvPr id="12" name="Rectangle 2">
-            <a:extLst>
-              <a:ext uri="{FF2B5EF4-FFF2-40B4-BE49-F238E27FC236}">
-                <a16:creationId xmlns:a16="http://schemas.microsoft.com/office/drawing/2014/main" id="{B950AE4D-05FC-1BA2-97BD-60CF68022E2B}"/>
-              </a:ext>
-            </a:extLst>
-          </p:cNvPr>
-          <p:cNvSpPr>
-            <a:spLocks noChangeArrowheads="1"/>
-          </p:cNvSpPr>
-          <p:nvPr/>
-        </p:nvSpPr>
-        <p:spPr bwMode="auto">
-          <a:xfrm>
-            <a:off x="837170" y="6060477"/>
-            <a:ext cx="12192000" cy="0"/>
-          </a:xfrm>
-          <a:prstGeom prst="rect">
-            <a:avLst/>
-          </a:prstGeom>
-          <a:noFill/>
-          <a:ln>
-            <a:noFill/>
-          </a:ln>
-          <a:effectLst/>
-          <a:extLst>
-            <a:ext uri="{909E8E84-426E-40DD-AFC4-6F175D3DCCD1}">
-              <a14:hiddenFill xmlns:a14="http://schemas.microsoft.com/office/drawing/2010/main">
-                <a:solidFill>
-                  <a:schemeClr val="accent1"/>
-                </a:solidFill>
-              </a14:hiddenFill>
-            </a:ext>
-            <a:ext uri="{91240B29-F687-4F45-9708-019B960494DF}">
-              <a14:hiddenLine xmlns:a14="http://schemas.microsoft.com/office/drawing/2010/main" w="9525">
-                <a:solidFill>
-                  <a:schemeClr val="tx1"/>
-                </a:solidFill>
-                <a:miter lim="800000"/>
-                <a:headEnd/>
-                <a:tailEnd/>
-              </a14:hiddenLine>
-            </a:ext>
-            <a:ext uri="{AF507438-7753-43E0-B8FC-AC1667EBCBE1}">
-              <a14:hiddenEffects xmlns:a14="http://schemas.microsoft.com/office/drawing/2010/main">
-                <a:effectLst>
-                  <a:outerShdw dist="35921" dir="2700000" algn="ctr" rotWithShape="0">
-                    <a:schemeClr val="bg2"/>
-                  </a:outerShdw>
-                </a:effectLst>
-              </a14:hiddenEffects>
-            </a:ext>
-          </a:extLst>
-        </p:spPr>
-        <p:txBody>
-          <a:bodyPr vert="horz" wrap="none" lIns="91440" tIns="45720" rIns="91440" bIns="45720" numCol="1" anchor="ctr" anchorCtr="0" compatLnSpc="1">
-            <a:prstTxWarp prst="textNoShape">
-              <a:avLst/>
-            </a:prstTxWarp>
-            <a:spAutoFit/>
-          </a:bodyPr>
-          <a:lstStyle/>
-          <a:p>
-            <a:pPr marL="0" marR="0" lvl="0" indent="0" algn="l" defTabSz="914400" rtl="0" eaLnBrk="0" fontAlgn="base" latinLnBrk="0" hangingPunct="0">
-              <a:lnSpc>
-                <a:spcPct val="100000"/>
-              </a:lnSpc>
-              <a:spcBef>
-                <a:spcPct val="0"/>
-              </a:spcBef>
-              <a:spcAft>
-                <a:spcPct val="0"/>
-              </a:spcAft>
-              <a:buClrTx/>
-              <a:buSzTx/>
-              <a:buFontTx/>
-              <a:buNone/>
-              <a:tabLst/>
-            </a:pPr>
-            <a:br>
-              <a:rPr kumimoji="0" lang="en-US" altLang="en-US" sz="600" b="0" i="0" u="none" strike="noStrike" cap="none" normalizeH="0" baseline="0">
-                <a:ln>
-                  <a:noFill/>
-                </a:ln>
-                <a:solidFill>
-                  <a:schemeClr val="tx1"/>
-                </a:solidFill>
-                <a:effectLst/>
-              </a:rPr>
-            </a:br>
-            <a:endParaRPr kumimoji="0" lang="en-US" altLang="en-US" sz="1800" b="0" i="0" u="none" strike="noStrike" cap="none" normalizeH="0" baseline="0">
-              <a:ln>
-                <a:noFill/>
-              </a:ln>
-              <a:solidFill>
-                <a:schemeClr val="tx1"/>
-              </a:solidFill>
-              <a:effectLst/>
-              <a:latin typeface="Arial" panose="020B0604020202020204" pitchFamily="34" charset="0"/>
-            </a:endParaRPr>
+            <a:endParaRPr lang="en-US"/>
           </a:p>
         </p:txBody>
       </p:sp>
     </p:spTree>
     <p:extLst>
       <p:ext uri="{BB962C8B-B14F-4D97-AF65-F5344CB8AC3E}">
-        <p14:creationId xmlns:p14="http://schemas.microsoft.com/office/powerpoint/2010/main" val="3390714327"/>
+        <p14:creationId xmlns:p14="http://schemas.microsoft.com/office/powerpoint/2010/main" val="105105862"/>
       </p:ext>
     </p:extLst>
   </p:cSld>
@@ -10124,6 +8028,2978 @@
           <p:cNvPr id="3" name="Title 2">
             <a:extLst>
               <a:ext uri="{FF2B5EF4-FFF2-40B4-BE49-F238E27FC236}">
+                <a16:creationId xmlns:a16="http://schemas.microsoft.com/office/drawing/2014/main" id="{313D3DFB-4B7B-5020-971F-AF2B7A0A35FA}"/>
+              </a:ext>
+            </a:extLst>
+          </p:cNvPr>
+          <p:cNvSpPr>
+            <a:spLocks noGrp="1"/>
+          </p:cNvSpPr>
+          <p:nvPr>
+            <p:ph type="title"/>
+          </p:nvPr>
+        </p:nvSpPr>
+        <p:spPr/>
+        <p:txBody>
+          <a:bodyPr/>
+          <a:lstStyle/>
+          <a:p>
+            <a:r>
+              <a:rPr lang="en-US" dirty="0"/>
+              <a:t>Import the </a:t>
+            </a:r>
+            <a:r>
+              <a:rPr lang="en-US"/>
+              <a:t>Required Libraries</a:t>
+            </a:r>
+          </a:p>
+        </p:txBody>
+      </p:sp>
+      <p:sp>
+        <p:nvSpPr>
+          <p:cNvPr id="8" name="TextBox 7">
+            <a:extLst>
+              <a:ext uri="{FF2B5EF4-FFF2-40B4-BE49-F238E27FC236}">
+                <a16:creationId xmlns:a16="http://schemas.microsoft.com/office/drawing/2014/main" id="{ACB299D0-626F-737A-2A1F-4F549FE052EC}"/>
+              </a:ext>
+            </a:extLst>
+          </p:cNvPr>
+          <p:cNvSpPr txBox="1"/>
+          <p:nvPr/>
+        </p:nvSpPr>
+        <p:spPr>
+          <a:xfrm>
+            <a:off x="903586" y="1927455"/>
+            <a:ext cx="10450213" cy="4385816"/>
+          </a:xfrm>
+          <a:prstGeom prst="rect">
+            <a:avLst/>
+          </a:prstGeom>
+          <a:noFill/>
+        </p:spPr>
+        <p:txBody>
+          <a:bodyPr wrap="square">
+            <a:spAutoFit/>
+          </a:bodyPr>
+          <a:lstStyle/>
+          <a:p>
+            <a:pPr>
+              <a:spcBef>
+                <a:spcPts val="600"/>
+              </a:spcBef>
+              <a:buNone/>
+            </a:pPr>
+            <a:r>
+              <a:rPr lang="en-US" b="1" noProof="1">
+                <a:solidFill>
+                  <a:srgbClr val="9723B4"/>
+                </a:solidFill>
+                <a:effectLst/>
+                <a:latin typeface="Courier New" panose="02070309020205020404" pitchFamily="49" charset="0"/>
+              </a:rPr>
+              <a:t>import</a:t>
+            </a:r>
+            <a:r>
+              <a:rPr lang="en-US" b="1" noProof="1">
+                <a:solidFill>
+                  <a:srgbClr val="000000"/>
+                </a:solidFill>
+                <a:effectLst/>
+                <a:latin typeface="Courier New" panose="02070309020205020404" pitchFamily="49" charset="0"/>
+              </a:rPr>
+              <a:t> numpy </a:t>
+            </a:r>
+            <a:r>
+              <a:rPr lang="en-US" b="1" noProof="1">
+                <a:solidFill>
+                  <a:srgbClr val="9723B4"/>
+                </a:solidFill>
+                <a:effectLst/>
+                <a:latin typeface="Courier New" panose="02070309020205020404" pitchFamily="49" charset="0"/>
+              </a:rPr>
+              <a:t>as</a:t>
+            </a:r>
+            <a:r>
+              <a:rPr lang="en-US" b="1" noProof="1">
+                <a:solidFill>
+                  <a:srgbClr val="000000"/>
+                </a:solidFill>
+                <a:effectLst/>
+                <a:latin typeface="Courier New" panose="02070309020205020404" pitchFamily="49" charset="0"/>
+              </a:rPr>
+              <a:t> np</a:t>
+            </a:r>
+          </a:p>
+          <a:p>
+            <a:pPr>
+              <a:spcBef>
+                <a:spcPts val="600"/>
+              </a:spcBef>
+              <a:buNone/>
+            </a:pPr>
+            <a:r>
+              <a:rPr lang="en-US" b="1" noProof="1">
+                <a:solidFill>
+                  <a:srgbClr val="9723B4"/>
+                </a:solidFill>
+                <a:effectLst/>
+                <a:latin typeface="Courier New" panose="02070309020205020404" pitchFamily="49" charset="0"/>
+              </a:rPr>
+              <a:t>import</a:t>
+            </a:r>
+            <a:r>
+              <a:rPr lang="en-US" b="1" noProof="1">
+                <a:solidFill>
+                  <a:srgbClr val="000000"/>
+                </a:solidFill>
+                <a:effectLst/>
+                <a:latin typeface="Courier New" panose="02070309020205020404" pitchFamily="49" charset="0"/>
+              </a:rPr>
+              <a:t> pandas </a:t>
+            </a:r>
+            <a:r>
+              <a:rPr lang="en-US" b="1" noProof="1">
+                <a:solidFill>
+                  <a:srgbClr val="9723B4"/>
+                </a:solidFill>
+                <a:effectLst/>
+                <a:latin typeface="Courier New" panose="02070309020205020404" pitchFamily="49" charset="0"/>
+              </a:rPr>
+              <a:t>as</a:t>
+            </a:r>
+            <a:r>
+              <a:rPr lang="en-US" b="1" noProof="1">
+                <a:solidFill>
+                  <a:srgbClr val="000000"/>
+                </a:solidFill>
+                <a:effectLst/>
+                <a:latin typeface="Courier New" panose="02070309020205020404" pitchFamily="49" charset="0"/>
+              </a:rPr>
+              <a:t> pd</a:t>
+            </a:r>
+          </a:p>
+          <a:p>
+            <a:pPr>
+              <a:spcBef>
+                <a:spcPts val="600"/>
+              </a:spcBef>
+              <a:buNone/>
+            </a:pPr>
+            <a:r>
+              <a:rPr lang="en-US" b="1" noProof="1">
+                <a:solidFill>
+                  <a:srgbClr val="9723B4"/>
+                </a:solidFill>
+                <a:effectLst/>
+                <a:latin typeface="Courier New" panose="02070309020205020404" pitchFamily="49" charset="0"/>
+              </a:rPr>
+              <a:t>import</a:t>
+            </a:r>
+            <a:r>
+              <a:rPr lang="en-US" b="1" noProof="1">
+                <a:solidFill>
+                  <a:srgbClr val="000000"/>
+                </a:solidFill>
+                <a:effectLst/>
+                <a:latin typeface="Courier New" panose="02070309020205020404" pitchFamily="49" charset="0"/>
+              </a:rPr>
+              <a:t> matplotlib.pyplot </a:t>
+            </a:r>
+            <a:r>
+              <a:rPr lang="en-US" b="1" noProof="1">
+                <a:solidFill>
+                  <a:srgbClr val="9723B4"/>
+                </a:solidFill>
+                <a:effectLst/>
+                <a:latin typeface="Courier New" panose="02070309020205020404" pitchFamily="49" charset="0"/>
+              </a:rPr>
+              <a:t>as</a:t>
+            </a:r>
+            <a:r>
+              <a:rPr lang="en-US" b="1" noProof="1">
+                <a:solidFill>
+                  <a:srgbClr val="000000"/>
+                </a:solidFill>
+                <a:effectLst/>
+                <a:latin typeface="Courier New" panose="02070309020205020404" pitchFamily="49" charset="0"/>
+              </a:rPr>
+              <a:t> plt  </a:t>
+            </a:r>
+          </a:p>
+          <a:p>
+            <a:pPr>
+              <a:spcBef>
+                <a:spcPts val="600"/>
+              </a:spcBef>
+              <a:buNone/>
+            </a:pPr>
+            <a:br>
+              <a:rPr lang="en-US" b="1" noProof="1">
+                <a:solidFill>
+                  <a:srgbClr val="000000"/>
+                </a:solidFill>
+                <a:effectLst/>
+                <a:latin typeface="Courier New" panose="02070309020205020404" pitchFamily="49" charset="0"/>
+              </a:rPr>
+            </a:br>
+            <a:r>
+              <a:rPr lang="en-US" b="1" noProof="1">
+                <a:solidFill>
+                  <a:srgbClr val="008000"/>
+                </a:solidFill>
+                <a:effectLst/>
+                <a:latin typeface="Courier New" panose="02070309020205020404" pitchFamily="49" charset="0"/>
+              </a:rPr>
+              <a:t># import the required machine learning libraries</a:t>
+            </a:r>
+            <a:endParaRPr lang="en-US" b="1" noProof="1">
+              <a:solidFill>
+                <a:srgbClr val="000000"/>
+              </a:solidFill>
+              <a:effectLst/>
+              <a:latin typeface="Courier New" panose="02070309020205020404" pitchFamily="49" charset="0"/>
+            </a:endParaRPr>
+          </a:p>
+          <a:p>
+            <a:pPr>
+              <a:spcBef>
+                <a:spcPts val="600"/>
+              </a:spcBef>
+              <a:buNone/>
+            </a:pPr>
+            <a:r>
+              <a:rPr lang="en-US" b="1" noProof="1">
+                <a:solidFill>
+                  <a:srgbClr val="9723B4"/>
+                </a:solidFill>
+                <a:effectLst/>
+                <a:latin typeface="Courier New" panose="02070309020205020404" pitchFamily="49" charset="0"/>
+              </a:rPr>
+              <a:t>from</a:t>
+            </a:r>
+            <a:r>
+              <a:rPr lang="en-US" b="1" noProof="1">
+                <a:solidFill>
+                  <a:srgbClr val="000000"/>
+                </a:solidFill>
+                <a:effectLst/>
+                <a:latin typeface="Courier New" panose="02070309020205020404" pitchFamily="49" charset="0"/>
+              </a:rPr>
+              <a:t> sklearn.linear_model </a:t>
+            </a:r>
+            <a:r>
+              <a:rPr lang="en-US" b="1" noProof="1">
+                <a:solidFill>
+                  <a:srgbClr val="9723B4"/>
+                </a:solidFill>
+                <a:effectLst/>
+                <a:latin typeface="Courier New" panose="02070309020205020404" pitchFamily="49" charset="0"/>
+              </a:rPr>
+              <a:t>import</a:t>
+            </a:r>
+            <a:r>
+              <a:rPr lang="en-US" b="1" noProof="1">
+                <a:solidFill>
+                  <a:srgbClr val="000000"/>
+                </a:solidFill>
+                <a:effectLst/>
+                <a:latin typeface="Courier New" panose="02070309020205020404" pitchFamily="49" charset="0"/>
+              </a:rPr>
+              <a:t> LinearRegression</a:t>
+            </a:r>
+          </a:p>
+          <a:p>
+            <a:pPr>
+              <a:spcBef>
+                <a:spcPts val="600"/>
+              </a:spcBef>
+              <a:buNone/>
+            </a:pPr>
+            <a:r>
+              <a:rPr lang="en-US" b="1" noProof="1">
+                <a:solidFill>
+                  <a:srgbClr val="9723B4"/>
+                </a:solidFill>
+                <a:effectLst/>
+                <a:latin typeface="Courier New" panose="02070309020205020404" pitchFamily="49" charset="0"/>
+              </a:rPr>
+              <a:t>from</a:t>
+            </a:r>
+            <a:r>
+              <a:rPr lang="en-US" b="1" noProof="1">
+                <a:solidFill>
+                  <a:srgbClr val="000000"/>
+                </a:solidFill>
+                <a:effectLst/>
+                <a:latin typeface="Courier New" panose="02070309020205020404" pitchFamily="49" charset="0"/>
+              </a:rPr>
+              <a:t> sklearn.model_selection </a:t>
+            </a:r>
+            <a:r>
+              <a:rPr lang="en-US" b="1" noProof="1">
+                <a:solidFill>
+                  <a:srgbClr val="9723B4"/>
+                </a:solidFill>
+                <a:effectLst/>
+                <a:latin typeface="Courier New" panose="02070309020205020404" pitchFamily="49" charset="0"/>
+              </a:rPr>
+              <a:t>import</a:t>
+            </a:r>
+            <a:r>
+              <a:rPr lang="en-US" b="1" noProof="1">
+                <a:solidFill>
+                  <a:srgbClr val="000000"/>
+                </a:solidFill>
+                <a:effectLst/>
+                <a:latin typeface="Courier New" panose="02070309020205020404" pitchFamily="49" charset="0"/>
+              </a:rPr>
+              <a:t> train_test_split </a:t>
+            </a:r>
+          </a:p>
+          <a:p>
+            <a:pPr>
+              <a:spcBef>
+                <a:spcPts val="600"/>
+              </a:spcBef>
+              <a:buNone/>
+            </a:pPr>
+            <a:r>
+              <a:rPr lang="en-US" b="1" noProof="1">
+                <a:solidFill>
+                  <a:srgbClr val="9723B4"/>
+                </a:solidFill>
+                <a:effectLst/>
+                <a:latin typeface="Courier New" panose="02070309020205020404" pitchFamily="49" charset="0"/>
+              </a:rPr>
+              <a:t>from</a:t>
+            </a:r>
+            <a:r>
+              <a:rPr lang="en-US" b="1" noProof="1">
+                <a:solidFill>
+                  <a:srgbClr val="000000"/>
+                </a:solidFill>
+                <a:effectLst/>
+                <a:latin typeface="Courier New" panose="02070309020205020404" pitchFamily="49" charset="0"/>
+              </a:rPr>
+              <a:t> sklearn.metrics </a:t>
+            </a:r>
+            <a:r>
+              <a:rPr lang="en-US" b="1" noProof="1">
+                <a:solidFill>
+                  <a:srgbClr val="9723B4"/>
+                </a:solidFill>
+                <a:effectLst/>
+                <a:latin typeface="Courier New" panose="02070309020205020404" pitchFamily="49" charset="0"/>
+              </a:rPr>
+              <a:t>import</a:t>
+            </a:r>
+            <a:r>
+              <a:rPr lang="en-US" b="1" noProof="1">
+                <a:solidFill>
+                  <a:srgbClr val="000000"/>
+                </a:solidFill>
+                <a:effectLst/>
+                <a:latin typeface="Courier New" panose="02070309020205020404" pitchFamily="49" charset="0"/>
+              </a:rPr>
+              <a:t> r2_score</a:t>
+            </a:r>
+          </a:p>
+          <a:p>
+            <a:pPr>
+              <a:spcBef>
+                <a:spcPts val="600"/>
+              </a:spcBef>
+              <a:buNone/>
+            </a:pPr>
+            <a:br>
+              <a:rPr lang="en-US" b="1" noProof="1">
+                <a:solidFill>
+                  <a:srgbClr val="000000"/>
+                </a:solidFill>
+                <a:effectLst/>
+                <a:latin typeface="Courier New" panose="02070309020205020404" pitchFamily="49" charset="0"/>
+              </a:rPr>
+            </a:br>
+            <a:r>
+              <a:rPr lang="en-US" b="1" noProof="1">
+                <a:solidFill>
+                  <a:srgbClr val="000000"/>
+                </a:solidFill>
+                <a:effectLst/>
+                <a:latin typeface="Courier New" panose="02070309020205020404" pitchFamily="49" charset="0"/>
+              </a:rPr>
+              <a:t>df = pd.read_csv(</a:t>
+            </a:r>
+            <a:r>
+              <a:rPr lang="en-US" b="1" noProof="1">
+                <a:solidFill>
+                  <a:srgbClr val="A31515"/>
+                </a:solidFill>
+                <a:effectLst/>
+                <a:latin typeface="Courier New" panose="02070309020205020404" pitchFamily="49" charset="0"/>
+              </a:rPr>
+              <a:t>'https://raw.githubusercontent.com/msfasha/307304-Data-Mining/refs/heads/main/20242/datasets/apartment_prices.csv'</a:t>
+            </a:r>
+            <a:r>
+              <a:rPr lang="en-US" b="1" noProof="1">
+                <a:solidFill>
+                  <a:srgbClr val="000000"/>
+                </a:solidFill>
+                <a:effectLst/>
+                <a:latin typeface="Courier New" panose="02070309020205020404" pitchFamily="49" charset="0"/>
+              </a:rPr>
+              <a:t>)</a:t>
+            </a:r>
+          </a:p>
+          <a:p>
+            <a:pPr>
+              <a:spcBef>
+                <a:spcPts val="600"/>
+              </a:spcBef>
+              <a:buNone/>
+            </a:pPr>
+            <a:r>
+              <a:rPr lang="en-US" b="1" noProof="1">
+                <a:solidFill>
+                  <a:srgbClr val="6A5221"/>
+                </a:solidFill>
+                <a:effectLst/>
+                <a:latin typeface="Courier New" panose="02070309020205020404" pitchFamily="49" charset="0"/>
+              </a:rPr>
+              <a:t>print</a:t>
+            </a:r>
+            <a:r>
+              <a:rPr lang="en-US" b="1" noProof="1">
+                <a:solidFill>
+                  <a:srgbClr val="000000"/>
+                </a:solidFill>
+                <a:effectLst/>
+                <a:latin typeface="Courier New" panose="02070309020205020404" pitchFamily="49" charset="0"/>
+              </a:rPr>
+              <a:t>(</a:t>
+            </a:r>
+            <a:r>
+              <a:rPr lang="en-US" b="1" noProof="1">
+                <a:solidFill>
+                  <a:srgbClr val="0000FF"/>
+                </a:solidFill>
+                <a:effectLst/>
+                <a:latin typeface="Courier New" panose="02070309020205020404" pitchFamily="49" charset="0"/>
+              </a:rPr>
+              <a:t>f</a:t>
+            </a:r>
+            <a:r>
+              <a:rPr lang="en-US" b="1" noProof="1">
+                <a:solidFill>
+                  <a:srgbClr val="A31515"/>
+                </a:solidFill>
+                <a:effectLst/>
+                <a:latin typeface="Courier New" panose="02070309020205020404" pitchFamily="49" charset="0"/>
+              </a:rPr>
+              <a:t>"Number of rows in the dataset: </a:t>
+            </a:r>
+            <a:r>
+              <a:rPr lang="en-US" b="1" noProof="1">
+                <a:solidFill>
+                  <a:srgbClr val="000000"/>
+                </a:solidFill>
+                <a:effectLst/>
+                <a:latin typeface="Courier New" panose="02070309020205020404" pitchFamily="49" charset="0"/>
+              </a:rPr>
+              <a:t>{</a:t>
+            </a:r>
+            <a:r>
+              <a:rPr lang="en-US" b="1" noProof="1">
+                <a:solidFill>
+                  <a:srgbClr val="6A5221"/>
+                </a:solidFill>
+                <a:effectLst/>
+                <a:latin typeface="Courier New" panose="02070309020205020404" pitchFamily="49" charset="0"/>
+              </a:rPr>
+              <a:t>len</a:t>
+            </a:r>
+            <a:r>
+              <a:rPr lang="en-US" b="1" noProof="1">
+                <a:solidFill>
+                  <a:srgbClr val="000000"/>
+                </a:solidFill>
+                <a:effectLst/>
+                <a:latin typeface="Courier New" panose="02070309020205020404" pitchFamily="49" charset="0"/>
+              </a:rPr>
+              <a:t>(df)}</a:t>
+            </a:r>
+            <a:r>
+              <a:rPr lang="en-US" b="1" noProof="1">
+                <a:solidFill>
+                  <a:srgbClr val="A31515"/>
+                </a:solidFill>
+                <a:effectLst/>
+                <a:latin typeface="Courier New" panose="02070309020205020404" pitchFamily="49" charset="0"/>
+              </a:rPr>
+              <a:t>"</a:t>
+            </a:r>
+            <a:r>
+              <a:rPr lang="en-US" b="1" noProof="1">
+                <a:solidFill>
+                  <a:srgbClr val="000000"/>
+                </a:solidFill>
+                <a:effectLst/>
+                <a:latin typeface="Courier New" panose="02070309020205020404" pitchFamily="49" charset="0"/>
+              </a:rPr>
+              <a:t>)</a:t>
+            </a:r>
+          </a:p>
+          <a:p>
+            <a:pPr>
+              <a:spcBef>
+                <a:spcPts val="600"/>
+              </a:spcBef>
+            </a:pPr>
+            <a:r>
+              <a:rPr lang="en-US" b="1" noProof="1">
+                <a:solidFill>
+                  <a:srgbClr val="000000"/>
+                </a:solidFill>
+                <a:effectLst/>
+                <a:latin typeface="Courier New" panose="02070309020205020404" pitchFamily="49" charset="0"/>
+              </a:rPr>
+              <a:t>df.head(</a:t>
+            </a:r>
+            <a:r>
+              <a:rPr lang="en-US" b="1" noProof="1">
+                <a:solidFill>
+                  <a:srgbClr val="116644"/>
+                </a:solidFill>
+                <a:effectLst/>
+                <a:latin typeface="Courier New" panose="02070309020205020404" pitchFamily="49" charset="0"/>
+              </a:rPr>
+              <a:t>3</a:t>
+            </a:r>
+            <a:r>
+              <a:rPr lang="en-US" b="1" noProof="1">
+                <a:solidFill>
+                  <a:srgbClr val="000000"/>
+                </a:solidFill>
+                <a:effectLst/>
+                <a:latin typeface="Courier New" panose="02070309020205020404" pitchFamily="49" charset="0"/>
+              </a:rPr>
+              <a:t>)</a:t>
+            </a:r>
+          </a:p>
+        </p:txBody>
+      </p:sp>
+    </p:spTree>
+    <p:extLst>
+      <p:ext uri="{BB962C8B-B14F-4D97-AF65-F5344CB8AC3E}">
+        <p14:creationId xmlns:p14="http://schemas.microsoft.com/office/powerpoint/2010/main" val="853326057"/>
+      </p:ext>
+    </p:extLst>
+  </p:cSld>
+  <p:clrMapOvr>
+    <a:masterClrMapping/>
+  </p:clrMapOvr>
+</p:sld>
+</file>
+
+<file path=ppt/slides/slide21.xml><?xml version="1.0" encoding="utf-8"?>
+<p:sld xmlns:a="http://schemas.openxmlformats.org/drawingml/2006/main" xmlns:r="http://schemas.openxmlformats.org/officeDocument/2006/relationships" xmlns:p="http://schemas.openxmlformats.org/presentationml/2006/main">
+  <p:cSld>
+    <p:spTree>
+      <p:nvGrpSpPr>
+        <p:cNvPr id="1" name="">
+          <a:extLst>
+            <a:ext uri="{FF2B5EF4-FFF2-40B4-BE49-F238E27FC236}">
+              <a16:creationId xmlns:a16="http://schemas.microsoft.com/office/drawing/2014/main" id="{015ADE49-E05E-6062-5AAE-E6885C34FF1F}"/>
+            </a:ext>
+          </a:extLst>
+        </p:cNvPr>
+        <p:cNvGrpSpPr/>
+        <p:nvPr/>
+      </p:nvGrpSpPr>
+      <p:grpSpPr>
+        <a:xfrm>
+          <a:off x="0" y="0"/>
+          <a:ext cx="0" cy="0"/>
+          <a:chOff x="0" y="0"/>
+          <a:chExt cx="0" cy="0"/>
+        </a:xfrm>
+      </p:grpSpPr>
+      <p:sp>
+        <p:nvSpPr>
+          <p:cNvPr id="2" name="Content Placeholder 1">
+            <a:extLst>
+              <a:ext uri="{FF2B5EF4-FFF2-40B4-BE49-F238E27FC236}">
+                <a16:creationId xmlns:a16="http://schemas.microsoft.com/office/drawing/2014/main" id="{867A10B3-72F0-DEA2-7DED-0367CA380B36}"/>
+              </a:ext>
+            </a:extLst>
+          </p:cNvPr>
+          <p:cNvSpPr>
+            <a:spLocks noGrp="1"/>
+          </p:cNvSpPr>
+          <p:nvPr>
+            <p:ph idx="1"/>
+          </p:nvPr>
+        </p:nvSpPr>
+        <p:spPr>
+          <a:xfrm>
+            <a:off x="838200" y="1763236"/>
+            <a:ext cx="10515600" cy="318877"/>
+          </a:xfrm>
+        </p:spPr>
+        <p:txBody>
+          <a:bodyPr>
+            <a:normAutofit fontScale="70000" lnSpcReduction="20000"/>
+          </a:bodyPr>
+          <a:lstStyle/>
+          <a:p>
+            <a:pPr marL="0" indent="0">
+              <a:buNone/>
+            </a:pPr>
+            <a:r>
+              <a:rPr lang="en-US" dirty="0"/>
+              <a:t>Split to x and y</a:t>
+            </a:r>
+          </a:p>
+        </p:txBody>
+      </p:sp>
+      <p:sp>
+        <p:nvSpPr>
+          <p:cNvPr id="3" name="Title 2">
+            <a:extLst>
+              <a:ext uri="{FF2B5EF4-FFF2-40B4-BE49-F238E27FC236}">
+                <a16:creationId xmlns:a16="http://schemas.microsoft.com/office/drawing/2014/main" id="{A734EC80-B40E-0812-2410-9449D662958C}"/>
+              </a:ext>
+            </a:extLst>
+          </p:cNvPr>
+          <p:cNvSpPr>
+            <a:spLocks noGrp="1"/>
+          </p:cNvSpPr>
+          <p:nvPr>
+            <p:ph type="title"/>
+          </p:nvPr>
+        </p:nvSpPr>
+        <p:spPr/>
+        <p:txBody>
+          <a:bodyPr/>
+          <a:lstStyle/>
+          <a:p>
+            <a:r>
+              <a:rPr lang="en-US" dirty="0"/>
+              <a:t>Splitting the Data</a:t>
+            </a:r>
+          </a:p>
+        </p:txBody>
+      </p:sp>
+      <p:sp>
+        <p:nvSpPr>
+          <p:cNvPr id="5" name="TextBox 4">
+            <a:extLst>
+              <a:ext uri="{FF2B5EF4-FFF2-40B4-BE49-F238E27FC236}">
+                <a16:creationId xmlns:a16="http://schemas.microsoft.com/office/drawing/2014/main" id="{3D97D810-6FC8-DFB4-AEA6-1F5AC7EF64F7}"/>
+              </a:ext>
+            </a:extLst>
+          </p:cNvPr>
+          <p:cNvSpPr txBox="1"/>
+          <p:nvPr/>
+        </p:nvSpPr>
+        <p:spPr>
+          <a:xfrm>
+            <a:off x="838200" y="2198577"/>
+            <a:ext cx="10369378" cy="1014380"/>
+          </a:xfrm>
+          <a:prstGeom prst="rect">
+            <a:avLst/>
+          </a:prstGeom>
+          <a:noFill/>
+        </p:spPr>
+        <p:txBody>
+          <a:bodyPr wrap="square">
+            <a:spAutoFit/>
+          </a:bodyPr>
+          <a:lstStyle/>
+          <a:p>
+            <a:pPr>
+              <a:lnSpc>
+                <a:spcPts val="1425"/>
+              </a:lnSpc>
+              <a:buNone/>
+            </a:pPr>
+            <a:r>
+              <a:rPr lang="en-US" b="1" noProof="1">
+                <a:solidFill>
+                  <a:srgbClr val="000000"/>
+                </a:solidFill>
+                <a:effectLst/>
+                <a:latin typeface="Courier New" panose="02070309020205020404" pitchFamily="49" charset="0"/>
+              </a:rPr>
+              <a:t>x = df.iloc[:, </a:t>
+            </a:r>
+            <a:r>
+              <a:rPr lang="en-US" b="1" noProof="1">
+                <a:solidFill>
+                  <a:srgbClr val="116644"/>
+                </a:solidFill>
+                <a:effectLst/>
+                <a:latin typeface="Courier New" panose="02070309020205020404" pitchFamily="49" charset="0"/>
+              </a:rPr>
+              <a:t>0</a:t>
+            </a:r>
+            <a:r>
+              <a:rPr lang="en-US" b="1" noProof="1">
+                <a:solidFill>
+                  <a:srgbClr val="000000"/>
+                </a:solidFill>
+                <a:effectLst/>
+                <a:latin typeface="Courier New" panose="02070309020205020404" pitchFamily="49" charset="0"/>
+              </a:rPr>
+              <a:t>].values.reshape(</a:t>
+            </a:r>
+            <a:r>
+              <a:rPr lang="en-US" b="1" noProof="1">
+                <a:solidFill>
+                  <a:srgbClr val="116644"/>
+                </a:solidFill>
+                <a:effectLst/>
+                <a:latin typeface="Courier New" panose="02070309020205020404" pitchFamily="49" charset="0"/>
+              </a:rPr>
+              <a:t>-1</a:t>
+            </a:r>
+            <a:r>
+              <a:rPr lang="en-US" b="1" noProof="1">
+                <a:solidFill>
+                  <a:srgbClr val="000000"/>
+                </a:solidFill>
+                <a:effectLst/>
+                <a:latin typeface="Courier New" panose="02070309020205020404" pitchFamily="49" charset="0"/>
+              </a:rPr>
+              <a:t>, </a:t>
+            </a:r>
+            <a:r>
+              <a:rPr lang="en-US" b="1" noProof="1">
+                <a:solidFill>
+                  <a:srgbClr val="116644"/>
+                </a:solidFill>
+                <a:effectLst/>
+                <a:latin typeface="Courier New" panose="02070309020205020404" pitchFamily="49" charset="0"/>
+              </a:rPr>
+              <a:t>1</a:t>
+            </a:r>
+            <a:r>
+              <a:rPr lang="en-US" b="1" noProof="1">
+                <a:solidFill>
+                  <a:srgbClr val="000000"/>
+                </a:solidFill>
+                <a:effectLst/>
+                <a:latin typeface="Courier New" panose="02070309020205020404" pitchFamily="49" charset="0"/>
+              </a:rPr>
+              <a:t>)  </a:t>
+            </a:r>
+            <a:r>
+              <a:rPr lang="en-US" b="1" noProof="1">
+                <a:solidFill>
+                  <a:srgbClr val="008000"/>
+                </a:solidFill>
+                <a:effectLst/>
+                <a:latin typeface="Courier New" panose="02070309020205020404" pitchFamily="49" charset="0"/>
+              </a:rPr>
+              <a:t># Reshape x to be a 2D array</a:t>
+            </a:r>
+            <a:endParaRPr lang="en-US" b="1" noProof="1">
+              <a:solidFill>
+                <a:srgbClr val="000000"/>
+              </a:solidFill>
+              <a:effectLst/>
+              <a:latin typeface="Courier New" panose="02070309020205020404" pitchFamily="49" charset="0"/>
+            </a:endParaRPr>
+          </a:p>
+          <a:p>
+            <a:pPr>
+              <a:lnSpc>
+                <a:spcPts val="1425"/>
+              </a:lnSpc>
+              <a:buNone/>
+            </a:pPr>
+            <a:r>
+              <a:rPr lang="en-US" b="1" noProof="1">
+                <a:solidFill>
+                  <a:srgbClr val="000000"/>
+                </a:solidFill>
+                <a:effectLst/>
+                <a:latin typeface="Courier New" panose="02070309020205020404" pitchFamily="49" charset="0"/>
+              </a:rPr>
+              <a:t>y = df.iloc[:, </a:t>
+            </a:r>
+            <a:r>
+              <a:rPr lang="en-US" b="1" noProof="1">
+                <a:solidFill>
+                  <a:srgbClr val="116644"/>
+                </a:solidFill>
+                <a:effectLst/>
+                <a:latin typeface="Courier New" panose="02070309020205020404" pitchFamily="49" charset="0"/>
+              </a:rPr>
+              <a:t>-1</a:t>
+            </a:r>
+            <a:r>
+              <a:rPr lang="en-US" b="1" noProof="1">
+                <a:solidFill>
+                  <a:srgbClr val="000000"/>
+                </a:solidFill>
+                <a:effectLst/>
+                <a:latin typeface="Courier New" panose="02070309020205020404" pitchFamily="49" charset="0"/>
+              </a:rPr>
+              <a:t>].values  </a:t>
+            </a:r>
+            <a:r>
+              <a:rPr lang="en-US" b="1" noProof="1">
+                <a:solidFill>
+                  <a:srgbClr val="008000"/>
+                </a:solidFill>
+                <a:effectLst/>
+                <a:latin typeface="Courier New" panose="02070309020205020404" pitchFamily="49" charset="0"/>
+              </a:rPr>
+              <a:t># y can remain as a 1D array</a:t>
+            </a:r>
+            <a:endParaRPr lang="en-US" b="1" noProof="1">
+              <a:solidFill>
+                <a:srgbClr val="000000"/>
+              </a:solidFill>
+              <a:effectLst/>
+              <a:latin typeface="Courier New" panose="02070309020205020404" pitchFamily="49" charset="0"/>
+            </a:endParaRPr>
+          </a:p>
+          <a:p>
+            <a:pPr>
+              <a:lnSpc>
+                <a:spcPts val="1425"/>
+              </a:lnSpc>
+              <a:buNone/>
+            </a:pPr>
+            <a:br>
+              <a:rPr lang="en-US" b="1" noProof="1">
+                <a:solidFill>
+                  <a:srgbClr val="000000"/>
+                </a:solidFill>
+                <a:effectLst/>
+                <a:latin typeface="Courier New" panose="02070309020205020404" pitchFamily="49" charset="0"/>
+              </a:rPr>
+            </a:br>
+            <a:r>
+              <a:rPr lang="en-US" b="1" noProof="1">
+                <a:solidFill>
+                  <a:srgbClr val="008000"/>
+                </a:solidFill>
+                <a:effectLst/>
+                <a:latin typeface="Courier New" panose="02070309020205020404" pitchFamily="49" charset="0"/>
+              </a:rPr>
+              <a:t># x = df["Square_Area"]</a:t>
+            </a:r>
+            <a:endParaRPr lang="en-US" b="1" noProof="1">
+              <a:solidFill>
+                <a:srgbClr val="000000"/>
+              </a:solidFill>
+              <a:effectLst/>
+              <a:latin typeface="Courier New" panose="02070309020205020404" pitchFamily="49" charset="0"/>
+            </a:endParaRPr>
+          </a:p>
+          <a:p>
+            <a:pPr>
+              <a:lnSpc>
+                <a:spcPts val="1425"/>
+              </a:lnSpc>
+            </a:pPr>
+            <a:r>
+              <a:rPr lang="en-US" b="1" noProof="1">
+                <a:solidFill>
+                  <a:srgbClr val="008000"/>
+                </a:solidFill>
+                <a:effectLst/>
+                <a:latin typeface="Courier New" panose="02070309020205020404" pitchFamily="49" charset="0"/>
+              </a:rPr>
+              <a:t># y= df["Price"]</a:t>
+            </a:r>
+            <a:endParaRPr lang="en-US" b="1" noProof="1">
+              <a:solidFill>
+                <a:srgbClr val="000000"/>
+              </a:solidFill>
+              <a:effectLst/>
+              <a:latin typeface="Courier New" panose="02070309020205020404" pitchFamily="49" charset="0"/>
+            </a:endParaRPr>
+          </a:p>
+        </p:txBody>
+      </p:sp>
+      <p:sp>
+        <p:nvSpPr>
+          <p:cNvPr id="6" name="Content Placeholder 1">
+            <a:extLst>
+              <a:ext uri="{FF2B5EF4-FFF2-40B4-BE49-F238E27FC236}">
+                <a16:creationId xmlns:a16="http://schemas.microsoft.com/office/drawing/2014/main" id="{0FC3CFFA-3CDA-4185-057F-2BC99E81793B}"/>
+              </a:ext>
+            </a:extLst>
+          </p:cNvPr>
+          <p:cNvSpPr txBox="1">
+            <a:spLocks/>
+          </p:cNvSpPr>
+          <p:nvPr/>
+        </p:nvSpPr>
+        <p:spPr>
+          <a:xfrm>
+            <a:off x="838200" y="3534506"/>
+            <a:ext cx="10515600" cy="318877"/>
+          </a:xfrm>
+          <a:prstGeom prst="rect">
+            <a:avLst/>
+          </a:prstGeom>
+        </p:spPr>
+        <p:txBody>
+          <a:bodyPr vert="horz" lIns="91440" tIns="45720" rIns="91440" bIns="45720" rtlCol="0">
+            <a:normAutofit fontScale="70000" lnSpcReduction="20000"/>
+          </a:bodyPr>
+          <a:lstStyle>
+            <a:lvl1pPr marL="228600" indent="-228600" algn="l" defTabSz="914400" rtl="0" eaLnBrk="1" latinLnBrk="0" hangingPunct="1">
+              <a:lnSpc>
+                <a:spcPct val="90000"/>
+              </a:lnSpc>
+              <a:spcBef>
+                <a:spcPts val="1000"/>
+              </a:spcBef>
+              <a:buFont typeface="Arial" panose="020B0604020202020204" pitchFamily="34" charset="0"/>
+              <a:buChar char="•"/>
+              <a:defRPr sz="2800" kern="1200">
+                <a:solidFill>
+                  <a:schemeClr val="tx1"/>
+                </a:solidFill>
+                <a:latin typeface="+mn-lt"/>
+                <a:ea typeface="+mn-ea"/>
+                <a:cs typeface="+mn-cs"/>
+              </a:defRPr>
+            </a:lvl1pPr>
+            <a:lvl2pPr marL="685800" indent="-228600" algn="l" defTabSz="914400" rtl="0" eaLnBrk="1" latinLnBrk="0" hangingPunct="1">
+              <a:lnSpc>
+                <a:spcPct val="90000"/>
+              </a:lnSpc>
+              <a:spcBef>
+                <a:spcPts val="500"/>
+              </a:spcBef>
+              <a:buFont typeface="Arial" panose="020B0604020202020204" pitchFamily="34" charset="0"/>
+              <a:buChar char="•"/>
+              <a:defRPr sz="2400" kern="1200">
+                <a:solidFill>
+                  <a:schemeClr val="tx1"/>
+                </a:solidFill>
+                <a:latin typeface="+mn-lt"/>
+                <a:ea typeface="+mn-ea"/>
+                <a:cs typeface="+mn-cs"/>
+              </a:defRPr>
+            </a:lvl2pPr>
+            <a:lvl3pPr marL="1143000" indent="-228600" algn="l" defTabSz="914400" rtl="0" eaLnBrk="1" latinLnBrk="0" hangingPunct="1">
+              <a:lnSpc>
+                <a:spcPct val="90000"/>
+              </a:lnSpc>
+              <a:spcBef>
+                <a:spcPts val="500"/>
+              </a:spcBef>
+              <a:buFont typeface="Arial" panose="020B0604020202020204" pitchFamily="34" charset="0"/>
+              <a:buChar char="•"/>
+              <a:defRPr sz="2000" kern="1200">
+                <a:solidFill>
+                  <a:schemeClr val="tx1"/>
+                </a:solidFill>
+                <a:latin typeface="+mn-lt"/>
+                <a:ea typeface="+mn-ea"/>
+                <a:cs typeface="+mn-cs"/>
+              </a:defRPr>
+            </a:lvl3pPr>
+            <a:lvl4pPr marL="1600200" indent="-228600" algn="l" defTabSz="914400" rtl="0" eaLnBrk="1" latinLnBrk="0" hangingPunct="1">
+              <a:lnSpc>
+                <a:spcPct val="90000"/>
+              </a:lnSpc>
+              <a:spcBef>
+                <a:spcPts val="500"/>
+              </a:spcBef>
+              <a:buFont typeface="Arial" panose="020B0604020202020204" pitchFamily="34" charset="0"/>
+              <a:buChar char="•"/>
+              <a:defRPr sz="1800" kern="1200">
+                <a:solidFill>
+                  <a:schemeClr val="tx1"/>
+                </a:solidFill>
+                <a:latin typeface="+mn-lt"/>
+                <a:ea typeface="+mn-ea"/>
+                <a:cs typeface="+mn-cs"/>
+              </a:defRPr>
+            </a:lvl4pPr>
+            <a:lvl5pPr marL="2057400" indent="-228600" algn="l" defTabSz="914400" rtl="0" eaLnBrk="1" latinLnBrk="0" hangingPunct="1">
+              <a:lnSpc>
+                <a:spcPct val="90000"/>
+              </a:lnSpc>
+              <a:spcBef>
+                <a:spcPts val="500"/>
+              </a:spcBef>
+              <a:buFont typeface="Arial" panose="020B0604020202020204" pitchFamily="34" charset="0"/>
+              <a:buChar char="•"/>
+              <a:defRPr sz="1800" kern="1200">
+                <a:solidFill>
+                  <a:schemeClr val="tx1"/>
+                </a:solidFill>
+                <a:latin typeface="+mn-lt"/>
+                <a:ea typeface="+mn-ea"/>
+                <a:cs typeface="+mn-cs"/>
+              </a:defRPr>
+            </a:lvl5pPr>
+            <a:lvl6pPr marL="2514600" indent="-228600" algn="l" defTabSz="914400" rtl="0" eaLnBrk="1" latinLnBrk="0" hangingPunct="1">
+              <a:lnSpc>
+                <a:spcPct val="90000"/>
+              </a:lnSpc>
+              <a:spcBef>
+                <a:spcPts val="500"/>
+              </a:spcBef>
+              <a:buFont typeface="Arial" panose="020B0604020202020204" pitchFamily="34" charset="0"/>
+              <a:buChar char="•"/>
+              <a:defRPr sz="1800" kern="1200">
+                <a:solidFill>
+                  <a:schemeClr val="tx1"/>
+                </a:solidFill>
+                <a:latin typeface="+mn-lt"/>
+                <a:ea typeface="+mn-ea"/>
+                <a:cs typeface="+mn-cs"/>
+              </a:defRPr>
+            </a:lvl6pPr>
+            <a:lvl7pPr marL="2971800" indent="-228600" algn="l" defTabSz="914400" rtl="0" eaLnBrk="1" latinLnBrk="0" hangingPunct="1">
+              <a:lnSpc>
+                <a:spcPct val="90000"/>
+              </a:lnSpc>
+              <a:spcBef>
+                <a:spcPts val="500"/>
+              </a:spcBef>
+              <a:buFont typeface="Arial" panose="020B0604020202020204" pitchFamily="34" charset="0"/>
+              <a:buChar char="•"/>
+              <a:defRPr sz="1800" kern="1200">
+                <a:solidFill>
+                  <a:schemeClr val="tx1"/>
+                </a:solidFill>
+                <a:latin typeface="+mn-lt"/>
+                <a:ea typeface="+mn-ea"/>
+                <a:cs typeface="+mn-cs"/>
+              </a:defRPr>
+            </a:lvl7pPr>
+            <a:lvl8pPr marL="3429000" indent="-228600" algn="l" defTabSz="914400" rtl="0" eaLnBrk="1" latinLnBrk="0" hangingPunct="1">
+              <a:lnSpc>
+                <a:spcPct val="90000"/>
+              </a:lnSpc>
+              <a:spcBef>
+                <a:spcPts val="500"/>
+              </a:spcBef>
+              <a:buFont typeface="Arial" panose="020B0604020202020204" pitchFamily="34" charset="0"/>
+              <a:buChar char="•"/>
+              <a:defRPr sz="1800" kern="1200">
+                <a:solidFill>
+                  <a:schemeClr val="tx1"/>
+                </a:solidFill>
+                <a:latin typeface="+mn-lt"/>
+                <a:ea typeface="+mn-ea"/>
+                <a:cs typeface="+mn-cs"/>
+              </a:defRPr>
+            </a:lvl8pPr>
+            <a:lvl9pPr marL="3886200" indent="-228600" algn="l" defTabSz="914400" rtl="0" eaLnBrk="1" latinLnBrk="0" hangingPunct="1">
+              <a:lnSpc>
+                <a:spcPct val="90000"/>
+              </a:lnSpc>
+              <a:spcBef>
+                <a:spcPts val="500"/>
+              </a:spcBef>
+              <a:buFont typeface="Arial" panose="020B0604020202020204" pitchFamily="34" charset="0"/>
+              <a:buChar char="•"/>
+              <a:defRPr sz="1800" kern="1200">
+                <a:solidFill>
+                  <a:schemeClr val="tx1"/>
+                </a:solidFill>
+                <a:latin typeface="+mn-lt"/>
+                <a:ea typeface="+mn-ea"/>
+                <a:cs typeface="+mn-cs"/>
+              </a:defRPr>
+            </a:lvl9pPr>
+          </a:lstStyle>
+          <a:p>
+            <a:pPr marL="0" indent="0">
+              <a:buFont typeface="Arial" panose="020B0604020202020204" pitchFamily="34" charset="0"/>
+              <a:buNone/>
+            </a:pPr>
+            <a:r>
+              <a:rPr lang="en-US" dirty="0"/>
+              <a:t>Split to train and test</a:t>
+            </a:r>
+          </a:p>
+        </p:txBody>
+      </p:sp>
+      <p:sp>
+        <p:nvSpPr>
+          <p:cNvPr id="8" name="TextBox 7">
+            <a:extLst>
+              <a:ext uri="{FF2B5EF4-FFF2-40B4-BE49-F238E27FC236}">
+                <a16:creationId xmlns:a16="http://schemas.microsoft.com/office/drawing/2014/main" id="{92F4E3EE-1459-A6CC-DAC3-DE42F2873A6C}"/>
+              </a:ext>
+            </a:extLst>
+          </p:cNvPr>
+          <p:cNvSpPr txBox="1"/>
+          <p:nvPr/>
+        </p:nvSpPr>
+        <p:spPr>
+          <a:xfrm>
+            <a:off x="838200" y="3972808"/>
+            <a:ext cx="10515600" cy="655308"/>
+          </a:xfrm>
+          <a:prstGeom prst="rect">
+            <a:avLst/>
+          </a:prstGeom>
+          <a:noFill/>
+        </p:spPr>
+        <p:txBody>
+          <a:bodyPr wrap="square">
+            <a:spAutoFit/>
+          </a:bodyPr>
+          <a:lstStyle/>
+          <a:p>
+            <a:pPr>
+              <a:lnSpc>
+                <a:spcPts val="1425"/>
+              </a:lnSpc>
+              <a:buNone/>
+            </a:pPr>
+            <a:r>
+              <a:rPr lang="en-US" b="1" noProof="1">
+                <a:solidFill>
+                  <a:srgbClr val="008000"/>
+                </a:solidFill>
+                <a:effectLst/>
+                <a:latin typeface="Courier New" panose="02070309020205020404" pitchFamily="49" charset="0"/>
+              </a:rPr>
+              <a:t># Splitting the dataset into training and test set. </a:t>
+            </a:r>
+            <a:endParaRPr lang="en-US" b="1" noProof="1">
+              <a:solidFill>
+                <a:srgbClr val="000000"/>
+              </a:solidFill>
+              <a:effectLst/>
+              <a:latin typeface="Courier New" panose="02070309020205020404" pitchFamily="49" charset="0"/>
+            </a:endParaRPr>
+          </a:p>
+          <a:p>
+            <a:pPr>
+              <a:lnSpc>
+                <a:spcPts val="1425"/>
+              </a:lnSpc>
+            </a:pPr>
+            <a:r>
+              <a:rPr lang="en-US" b="1" noProof="1">
+                <a:solidFill>
+                  <a:srgbClr val="000000"/>
+                </a:solidFill>
+                <a:effectLst/>
+                <a:latin typeface="Courier New" panose="02070309020205020404" pitchFamily="49" charset="0"/>
+              </a:rPr>
+              <a:t>x_train, x_test, y_train, y_test= train_test_split(x, y, test_size= </a:t>
+            </a:r>
+            <a:r>
+              <a:rPr lang="en-US" b="1" noProof="1">
+                <a:solidFill>
+                  <a:srgbClr val="116644"/>
+                </a:solidFill>
+                <a:effectLst/>
+                <a:latin typeface="Courier New" panose="02070309020205020404" pitchFamily="49" charset="0"/>
+              </a:rPr>
+              <a:t>.1</a:t>
+            </a:r>
+            <a:r>
+              <a:rPr lang="en-US" b="1" noProof="1">
+                <a:solidFill>
+                  <a:srgbClr val="000000"/>
+                </a:solidFill>
+                <a:effectLst/>
+                <a:latin typeface="Courier New" panose="02070309020205020404" pitchFamily="49" charset="0"/>
+              </a:rPr>
+              <a:t>, random_state=</a:t>
+            </a:r>
+            <a:r>
+              <a:rPr lang="en-US" b="1" noProof="1">
+                <a:solidFill>
+                  <a:srgbClr val="116644"/>
+                </a:solidFill>
+                <a:effectLst/>
+                <a:latin typeface="Courier New" panose="02070309020205020404" pitchFamily="49" charset="0"/>
+              </a:rPr>
+              <a:t>0</a:t>
+            </a:r>
+            <a:r>
+              <a:rPr lang="en-US" b="1" noProof="1">
+                <a:solidFill>
+                  <a:srgbClr val="000000"/>
+                </a:solidFill>
+                <a:effectLst/>
+                <a:latin typeface="Courier New" panose="02070309020205020404" pitchFamily="49" charset="0"/>
+              </a:rPr>
+              <a:t>)  </a:t>
+            </a:r>
+          </a:p>
+        </p:txBody>
+      </p:sp>
+    </p:spTree>
+    <p:extLst>
+      <p:ext uri="{BB962C8B-B14F-4D97-AF65-F5344CB8AC3E}">
+        <p14:creationId xmlns:p14="http://schemas.microsoft.com/office/powerpoint/2010/main" val="3601141761"/>
+      </p:ext>
+    </p:extLst>
+  </p:cSld>
+  <p:clrMapOvr>
+    <a:masterClrMapping/>
+  </p:clrMapOvr>
+</p:sld>
+</file>
+
+<file path=ppt/slides/slide22.xml><?xml version="1.0" encoding="utf-8"?>
+<p:sld xmlns:a="http://schemas.openxmlformats.org/drawingml/2006/main" xmlns:r="http://schemas.openxmlformats.org/officeDocument/2006/relationships" xmlns:p="http://schemas.openxmlformats.org/presentationml/2006/main">
+  <p:cSld>
+    <p:spTree>
+      <p:nvGrpSpPr>
+        <p:cNvPr id="1" name=""/>
+        <p:cNvGrpSpPr/>
+        <p:nvPr/>
+      </p:nvGrpSpPr>
+      <p:grpSpPr>
+        <a:xfrm>
+          <a:off x="0" y="0"/>
+          <a:ext cx="0" cy="0"/>
+          <a:chOff x="0" y="0"/>
+          <a:chExt cx="0" cy="0"/>
+        </a:xfrm>
+      </p:grpSpPr>
+      <p:sp>
+        <p:nvSpPr>
+          <p:cNvPr id="3" name="Title 2">
+            <a:extLst>
+              <a:ext uri="{FF2B5EF4-FFF2-40B4-BE49-F238E27FC236}">
+                <a16:creationId xmlns:a16="http://schemas.microsoft.com/office/drawing/2014/main" id="{18D3AF28-B4CC-BA03-E601-706704D9F578}"/>
+              </a:ext>
+            </a:extLst>
+          </p:cNvPr>
+          <p:cNvSpPr>
+            <a:spLocks noGrp="1"/>
+          </p:cNvSpPr>
+          <p:nvPr>
+            <p:ph type="title"/>
+          </p:nvPr>
+        </p:nvSpPr>
+        <p:spPr/>
+        <p:txBody>
+          <a:bodyPr/>
+          <a:lstStyle/>
+          <a:p>
+            <a:r>
+              <a:rPr lang="en-US" dirty="0"/>
+              <a:t>Create the Regression Model and Train it</a:t>
+            </a:r>
+          </a:p>
+        </p:txBody>
+      </p:sp>
+      <p:sp>
+        <p:nvSpPr>
+          <p:cNvPr id="5" name="TextBox 4">
+            <a:extLst>
+              <a:ext uri="{FF2B5EF4-FFF2-40B4-BE49-F238E27FC236}">
+                <a16:creationId xmlns:a16="http://schemas.microsoft.com/office/drawing/2014/main" id="{9DEAC493-EECE-8ECF-1390-683A329DE3A8}"/>
+              </a:ext>
+            </a:extLst>
+          </p:cNvPr>
+          <p:cNvSpPr txBox="1"/>
+          <p:nvPr/>
+        </p:nvSpPr>
+        <p:spPr>
+          <a:xfrm>
+            <a:off x="838200" y="2233841"/>
+            <a:ext cx="6094970" cy="296235"/>
+          </a:xfrm>
+          <a:prstGeom prst="rect">
+            <a:avLst/>
+          </a:prstGeom>
+          <a:noFill/>
+        </p:spPr>
+        <p:txBody>
+          <a:bodyPr wrap="square">
+            <a:spAutoFit/>
+          </a:bodyPr>
+          <a:lstStyle/>
+          <a:p>
+            <a:pPr>
+              <a:lnSpc>
+                <a:spcPts val="1425"/>
+              </a:lnSpc>
+            </a:pPr>
+            <a:r>
+              <a:rPr lang="en-US" b="1" noProof="1">
+                <a:solidFill>
+                  <a:srgbClr val="000000"/>
+                </a:solidFill>
+                <a:effectLst/>
+                <a:latin typeface="Courier New" panose="02070309020205020404" pitchFamily="49" charset="0"/>
+              </a:rPr>
+              <a:t>regressor= LinearRegression()  </a:t>
+            </a:r>
+          </a:p>
+        </p:txBody>
+      </p:sp>
+      <p:sp>
+        <p:nvSpPr>
+          <p:cNvPr id="7" name="TextBox 6">
+            <a:extLst>
+              <a:ext uri="{FF2B5EF4-FFF2-40B4-BE49-F238E27FC236}">
+                <a16:creationId xmlns:a16="http://schemas.microsoft.com/office/drawing/2014/main" id="{0A1C3751-059D-A947-518E-EEF9129D0C0E}"/>
+              </a:ext>
+            </a:extLst>
+          </p:cNvPr>
+          <p:cNvSpPr txBox="1"/>
+          <p:nvPr/>
+        </p:nvSpPr>
+        <p:spPr>
+          <a:xfrm>
+            <a:off x="838200" y="3250239"/>
+            <a:ext cx="6094970" cy="834844"/>
+          </a:xfrm>
+          <a:prstGeom prst="rect">
+            <a:avLst/>
+          </a:prstGeom>
+          <a:noFill/>
+        </p:spPr>
+        <p:txBody>
+          <a:bodyPr wrap="square">
+            <a:spAutoFit/>
+          </a:bodyPr>
+          <a:lstStyle/>
+          <a:p>
+            <a:pPr>
+              <a:lnSpc>
+                <a:spcPts val="1425"/>
+              </a:lnSpc>
+              <a:buNone/>
+            </a:pPr>
+            <a:r>
+              <a:rPr lang="fr-FR" b="1" noProof="1">
+                <a:solidFill>
+                  <a:srgbClr val="000000"/>
+                </a:solidFill>
+                <a:effectLst/>
+                <a:latin typeface="Courier New" panose="02070309020205020404" pitchFamily="49" charset="0"/>
+              </a:rPr>
+              <a:t>regressor.fit(x_train, y_train)  </a:t>
+            </a:r>
+          </a:p>
+          <a:p>
+            <a:pPr>
+              <a:lnSpc>
+                <a:spcPts val="1425"/>
+              </a:lnSpc>
+              <a:buNone/>
+            </a:pPr>
+            <a:br>
+              <a:rPr lang="fr-FR" b="1" noProof="1">
+                <a:solidFill>
+                  <a:srgbClr val="000000"/>
+                </a:solidFill>
+                <a:effectLst/>
+                <a:latin typeface="Courier New" panose="02070309020205020404" pitchFamily="49" charset="0"/>
+              </a:rPr>
+            </a:br>
+            <a:r>
+              <a:rPr lang="fr-FR" b="1" noProof="1">
+                <a:solidFill>
+                  <a:srgbClr val="6A5221"/>
+                </a:solidFill>
+                <a:effectLst/>
+                <a:latin typeface="Courier New" panose="02070309020205020404" pitchFamily="49" charset="0"/>
+              </a:rPr>
+              <a:t>print</a:t>
+            </a:r>
+            <a:r>
+              <a:rPr lang="fr-FR" b="1" noProof="1">
+                <a:solidFill>
+                  <a:srgbClr val="000000"/>
+                </a:solidFill>
+                <a:effectLst/>
+                <a:latin typeface="Courier New" panose="02070309020205020404" pitchFamily="49" charset="0"/>
+              </a:rPr>
+              <a:t>(regressor.coef_)</a:t>
+            </a:r>
+          </a:p>
+          <a:p>
+            <a:pPr>
+              <a:lnSpc>
+                <a:spcPts val="1425"/>
+              </a:lnSpc>
+            </a:pPr>
+            <a:r>
+              <a:rPr lang="fr-FR" b="1" noProof="1">
+                <a:solidFill>
+                  <a:srgbClr val="6A5221"/>
+                </a:solidFill>
+                <a:effectLst/>
+                <a:latin typeface="Courier New" panose="02070309020205020404" pitchFamily="49" charset="0"/>
+              </a:rPr>
+              <a:t>print</a:t>
+            </a:r>
+            <a:r>
+              <a:rPr lang="fr-FR" b="1" noProof="1">
+                <a:solidFill>
+                  <a:srgbClr val="000000"/>
+                </a:solidFill>
+                <a:effectLst/>
+                <a:latin typeface="Courier New" panose="02070309020205020404" pitchFamily="49" charset="0"/>
+              </a:rPr>
+              <a:t>(regressor.intercept_)</a:t>
+            </a:r>
+          </a:p>
+        </p:txBody>
+      </p:sp>
+      <p:sp>
+        <p:nvSpPr>
+          <p:cNvPr id="11" name="Content Placeholder 1">
+            <a:extLst>
+              <a:ext uri="{FF2B5EF4-FFF2-40B4-BE49-F238E27FC236}">
+                <a16:creationId xmlns:a16="http://schemas.microsoft.com/office/drawing/2014/main" id="{E74FFDBD-7691-0BC9-80E8-6A8F3A526534}"/>
+              </a:ext>
+            </a:extLst>
+          </p:cNvPr>
+          <p:cNvSpPr>
+            <a:spLocks noGrp="1"/>
+          </p:cNvSpPr>
+          <p:nvPr>
+            <p:ph idx="1"/>
+          </p:nvPr>
+        </p:nvSpPr>
+        <p:spPr>
+          <a:xfrm>
+            <a:off x="838200" y="1763236"/>
+            <a:ext cx="10515600" cy="318877"/>
+          </a:xfrm>
+        </p:spPr>
+        <p:txBody>
+          <a:bodyPr>
+            <a:normAutofit fontScale="70000" lnSpcReduction="20000"/>
+          </a:bodyPr>
+          <a:lstStyle/>
+          <a:p>
+            <a:pPr marL="0" indent="0">
+              <a:buNone/>
+            </a:pPr>
+            <a:r>
+              <a:rPr lang="en-US" dirty="0"/>
+              <a:t>Create the Machine Learning model and make any required configurations</a:t>
+            </a:r>
+          </a:p>
+        </p:txBody>
+      </p:sp>
+      <p:sp>
+        <p:nvSpPr>
+          <p:cNvPr id="12" name="Content Placeholder 1">
+            <a:extLst>
+              <a:ext uri="{FF2B5EF4-FFF2-40B4-BE49-F238E27FC236}">
+                <a16:creationId xmlns:a16="http://schemas.microsoft.com/office/drawing/2014/main" id="{866F223C-F998-07B7-7CDD-5E733482CD66}"/>
+              </a:ext>
+            </a:extLst>
+          </p:cNvPr>
+          <p:cNvSpPr txBox="1">
+            <a:spLocks/>
+          </p:cNvSpPr>
+          <p:nvPr/>
+        </p:nvSpPr>
+        <p:spPr>
+          <a:xfrm>
+            <a:off x="838200" y="2802276"/>
+            <a:ext cx="10515600" cy="318877"/>
+          </a:xfrm>
+          <a:prstGeom prst="rect">
+            <a:avLst/>
+          </a:prstGeom>
+        </p:spPr>
+        <p:txBody>
+          <a:bodyPr vert="horz" lIns="91440" tIns="45720" rIns="91440" bIns="45720" rtlCol="0">
+            <a:normAutofit fontScale="70000" lnSpcReduction="20000"/>
+          </a:bodyPr>
+          <a:lstStyle>
+            <a:lvl1pPr marL="228600" indent="-228600" algn="l" defTabSz="914400" rtl="0" eaLnBrk="1" latinLnBrk="0" hangingPunct="1">
+              <a:lnSpc>
+                <a:spcPct val="90000"/>
+              </a:lnSpc>
+              <a:spcBef>
+                <a:spcPts val="1000"/>
+              </a:spcBef>
+              <a:buFont typeface="Arial" panose="020B0604020202020204" pitchFamily="34" charset="0"/>
+              <a:buChar char="•"/>
+              <a:defRPr sz="2800" kern="1200">
+                <a:solidFill>
+                  <a:schemeClr val="tx1"/>
+                </a:solidFill>
+                <a:latin typeface="+mn-lt"/>
+                <a:ea typeface="+mn-ea"/>
+                <a:cs typeface="+mn-cs"/>
+              </a:defRPr>
+            </a:lvl1pPr>
+            <a:lvl2pPr marL="685800" indent="-228600" algn="l" defTabSz="914400" rtl="0" eaLnBrk="1" latinLnBrk="0" hangingPunct="1">
+              <a:lnSpc>
+                <a:spcPct val="90000"/>
+              </a:lnSpc>
+              <a:spcBef>
+                <a:spcPts val="500"/>
+              </a:spcBef>
+              <a:buFont typeface="Arial" panose="020B0604020202020204" pitchFamily="34" charset="0"/>
+              <a:buChar char="•"/>
+              <a:defRPr sz="2400" kern="1200">
+                <a:solidFill>
+                  <a:schemeClr val="tx1"/>
+                </a:solidFill>
+                <a:latin typeface="+mn-lt"/>
+                <a:ea typeface="+mn-ea"/>
+                <a:cs typeface="+mn-cs"/>
+              </a:defRPr>
+            </a:lvl2pPr>
+            <a:lvl3pPr marL="1143000" indent="-228600" algn="l" defTabSz="914400" rtl="0" eaLnBrk="1" latinLnBrk="0" hangingPunct="1">
+              <a:lnSpc>
+                <a:spcPct val="90000"/>
+              </a:lnSpc>
+              <a:spcBef>
+                <a:spcPts val="500"/>
+              </a:spcBef>
+              <a:buFont typeface="Arial" panose="020B0604020202020204" pitchFamily="34" charset="0"/>
+              <a:buChar char="•"/>
+              <a:defRPr sz="2000" kern="1200">
+                <a:solidFill>
+                  <a:schemeClr val="tx1"/>
+                </a:solidFill>
+                <a:latin typeface="+mn-lt"/>
+                <a:ea typeface="+mn-ea"/>
+                <a:cs typeface="+mn-cs"/>
+              </a:defRPr>
+            </a:lvl3pPr>
+            <a:lvl4pPr marL="1600200" indent="-228600" algn="l" defTabSz="914400" rtl="0" eaLnBrk="1" latinLnBrk="0" hangingPunct="1">
+              <a:lnSpc>
+                <a:spcPct val="90000"/>
+              </a:lnSpc>
+              <a:spcBef>
+                <a:spcPts val="500"/>
+              </a:spcBef>
+              <a:buFont typeface="Arial" panose="020B0604020202020204" pitchFamily="34" charset="0"/>
+              <a:buChar char="•"/>
+              <a:defRPr sz="1800" kern="1200">
+                <a:solidFill>
+                  <a:schemeClr val="tx1"/>
+                </a:solidFill>
+                <a:latin typeface="+mn-lt"/>
+                <a:ea typeface="+mn-ea"/>
+                <a:cs typeface="+mn-cs"/>
+              </a:defRPr>
+            </a:lvl4pPr>
+            <a:lvl5pPr marL="2057400" indent="-228600" algn="l" defTabSz="914400" rtl="0" eaLnBrk="1" latinLnBrk="0" hangingPunct="1">
+              <a:lnSpc>
+                <a:spcPct val="90000"/>
+              </a:lnSpc>
+              <a:spcBef>
+                <a:spcPts val="500"/>
+              </a:spcBef>
+              <a:buFont typeface="Arial" panose="020B0604020202020204" pitchFamily="34" charset="0"/>
+              <a:buChar char="•"/>
+              <a:defRPr sz="1800" kern="1200">
+                <a:solidFill>
+                  <a:schemeClr val="tx1"/>
+                </a:solidFill>
+                <a:latin typeface="+mn-lt"/>
+                <a:ea typeface="+mn-ea"/>
+                <a:cs typeface="+mn-cs"/>
+              </a:defRPr>
+            </a:lvl5pPr>
+            <a:lvl6pPr marL="2514600" indent="-228600" algn="l" defTabSz="914400" rtl="0" eaLnBrk="1" latinLnBrk="0" hangingPunct="1">
+              <a:lnSpc>
+                <a:spcPct val="90000"/>
+              </a:lnSpc>
+              <a:spcBef>
+                <a:spcPts val="500"/>
+              </a:spcBef>
+              <a:buFont typeface="Arial" panose="020B0604020202020204" pitchFamily="34" charset="0"/>
+              <a:buChar char="•"/>
+              <a:defRPr sz="1800" kern="1200">
+                <a:solidFill>
+                  <a:schemeClr val="tx1"/>
+                </a:solidFill>
+                <a:latin typeface="+mn-lt"/>
+                <a:ea typeface="+mn-ea"/>
+                <a:cs typeface="+mn-cs"/>
+              </a:defRPr>
+            </a:lvl6pPr>
+            <a:lvl7pPr marL="2971800" indent="-228600" algn="l" defTabSz="914400" rtl="0" eaLnBrk="1" latinLnBrk="0" hangingPunct="1">
+              <a:lnSpc>
+                <a:spcPct val="90000"/>
+              </a:lnSpc>
+              <a:spcBef>
+                <a:spcPts val="500"/>
+              </a:spcBef>
+              <a:buFont typeface="Arial" panose="020B0604020202020204" pitchFamily="34" charset="0"/>
+              <a:buChar char="•"/>
+              <a:defRPr sz="1800" kern="1200">
+                <a:solidFill>
+                  <a:schemeClr val="tx1"/>
+                </a:solidFill>
+                <a:latin typeface="+mn-lt"/>
+                <a:ea typeface="+mn-ea"/>
+                <a:cs typeface="+mn-cs"/>
+              </a:defRPr>
+            </a:lvl7pPr>
+            <a:lvl8pPr marL="3429000" indent="-228600" algn="l" defTabSz="914400" rtl="0" eaLnBrk="1" latinLnBrk="0" hangingPunct="1">
+              <a:lnSpc>
+                <a:spcPct val="90000"/>
+              </a:lnSpc>
+              <a:spcBef>
+                <a:spcPts val="500"/>
+              </a:spcBef>
+              <a:buFont typeface="Arial" panose="020B0604020202020204" pitchFamily="34" charset="0"/>
+              <a:buChar char="•"/>
+              <a:defRPr sz="1800" kern="1200">
+                <a:solidFill>
+                  <a:schemeClr val="tx1"/>
+                </a:solidFill>
+                <a:latin typeface="+mn-lt"/>
+                <a:ea typeface="+mn-ea"/>
+                <a:cs typeface="+mn-cs"/>
+              </a:defRPr>
+            </a:lvl8pPr>
+            <a:lvl9pPr marL="3886200" indent="-228600" algn="l" defTabSz="914400" rtl="0" eaLnBrk="1" latinLnBrk="0" hangingPunct="1">
+              <a:lnSpc>
+                <a:spcPct val="90000"/>
+              </a:lnSpc>
+              <a:spcBef>
+                <a:spcPts val="500"/>
+              </a:spcBef>
+              <a:buFont typeface="Arial" panose="020B0604020202020204" pitchFamily="34" charset="0"/>
+              <a:buChar char="•"/>
+              <a:defRPr sz="1800" kern="1200">
+                <a:solidFill>
+                  <a:schemeClr val="tx1"/>
+                </a:solidFill>
+                <a:latin typeface="+mn-lt"/>
+                <a:ea typeface="+mn-ea"/>
+                <a:cs typeface="+mn-cs"/>
+              </a:defRPr>
+            </a:lvl9pPr>
+          </a:lstStyle>
+          <a:p>
+            <a:pPr marL="0" indent="0">
+              <a:buFont typeface="Arial" panose="020B0604020202020204" pitchFamily="34" charset="0"/>
+              <a:buNone/>
+            </a:pPr>
+            <a:r>
+              <a:rPr lang="en-US" dirty="0"/>
+              <a:t>Train the model and print the learnt coefficients</a:t>
+            </a:r>
+          </a:p>
+        </p:txBody>
+      </p:sp>
+      <p:sp>
+        <p:nvSpPr>
+          <p:cNvPr id="13" name="Content Placeholder 1">
+            <a:extLst>
+              <a:ext uri="{FF2B5EF4-FFF2-40B4-BE49-F238E27FC236}">
+                <a16:creationId xmlns:a16="http://schemas.microsoft.com/office/drawing/2014/main" id="{1B382C33-91C0-8349-9B35-6FB5DFF763EE}"/>
+              </a:ext>
+            </a:extLst>
+          </p:cNvPr>
+          <p:cNvSpPr txBox="1">
+            <a:spLocks/>
+          </p:cNvSpPr>
+          <p:nvPr/>
+        </p:nvSpPr>
+        <p:spPr>
+          <a:xfrm>
+            <a:off x="780535" y="4777297"/>
+            <a:ext cx="10515600" cy="318877"/>
+          </a:xfrm>
+          <a:prstGeom prst="rect">
+            <a:avLst/>
+          </a:prstGeom>
+        </p:spPr>
+        <p:txBody>
+          <a:bodyPr vert="horz" lIns="91440" tIns="45720" rIns="91440" bIns="45720" rtlCol="0">
+            <a:normAutofit fontScale="70000" lnSpcReduction="20000"/>
+          </a:bodyPr>
+          <a:lstStyle>
+            <a:lvl1pPr marL="228600" indent="-228600" algn="l" defTabSz="914400" rtl="0" eaLnBrk="1" latinLnBrk="0" hangingPunct="1">
+              <a:lnSpc>
+                <a:spcPct val="90000"/>
+              </a:lnSpc>
+              <a:spcBef>
+                <a:spcPts val="1000"/>
+              </a:spcBef>
+              <a:buFont typeface="Arial" panose="020B0604020202020204" pitchFamily="34" charset="0"/>
+              <a:buChar char="•"/>
+              <a:defRPr sz="2800" kern="1200">
+                <a:solidFill>
+                  <a:schemeClr val="tx1"/>
+                </a:solidFill>
+                <a:latin typeface="+mn-lt"/>
+                <a:ea typeface="+mn-ea"/>
+                <a:cs typeface="+mn-cs"/>
+              </a:defRPr>
+            </a:lvl1pPr>
+            <a:lvl2pPr marL="685800" indent="-228600" algn="l" defTabSz="914400" rtl="0" eaLnBrk="1" latinLnBrk="0" hangingPunct="1">
+              <a:lnSpc>
+                <a:spcPct val="90000"/>
+              </a:lnSpc>
+              <a:spcBef>
+                <a:spcPts val="500"/>
+              </a:spcBef>
+              <a:buFont typeface="Arial" panose="020B0604020202020204" pitchFamily="34" charset="0"/>
+              <a:buChar char="•"/>
+              <a:defRPr sz="2400" kern="1200">
+                <a:solidFill>
+                  <a:schemeClr val="tx1"/>
+                </a:solidFill>
+                <a:latin typeface="+mn-lt"/>
+                <a:ea typeface="+mn-ea"/>
+                <a:cs typeface="+mn-cs"/>
+              </a:defRPr>
+            </a:lvl2pPr>
+            <a:lvl3pPr marL="1143000" indent="-228600" algn="l" defTabSz="914400" rtl="0" eaLnBrk="1" latinLnBrk="0" hangingPunct="1">
+              <a:lnSpc>
+                <a:spcPct val="90000"/>
+              </a:lnSpc>
+              <a:spcBef>
+                <a:spcPts val="500"/>
+              </a:spcBef>
+              <a:buFont typeface="Arial" panose="020B0604020202020204" pitchFamily="34" charset="0"/>
+              <a:buChar char="•"/>
+              <a:defRPr sz="2000" kern="1200">
+                <a:solidFill>
+                  <a:schemeClr val="tx1"/>
+                </a:solidFill>
+                <a:latin typeface="+mn-lt"/>
+                <a:ea typeface="+mn-ea"/>
+                <a:cs typeface="+mn-cs"/>
+              </a:defRPr>
+            </a:lvl3pPr>
+            <a:lvl4pPr marL="1600200" indent="-228600" algn="l" defTabSz="914400" rtl="0" eaLnBrk="1" latinLnBrk="0" hangingPunct="1">
+              <a:lnSpc>
+                <a:spcPct val="90000"/>
+              </a:lnSpc>
+              <a:spcBef>
+                <a:spcPts val="500"/>
+              </a:spcBef>
+              <a:buFont typeface="Arial" panose="020B0604020202020204" pitchFamily="34" charset="0"/>
+              <a:buChar char="•"/>
+              <a:defRPr sz="1800" kern="1200">
+                <a:solidFill>
+                  <a:schemeClr val="tx1"/>
+                </a:solidFill>
+                <a:latin typeface="+mn-lt"/>
+                <a:ea typeface="+mn-ea"/>
+                <a:cs typeface="+mn-cs"/>
+              </a:defRPr>
+            </a:lvl4pPr>
+            <a:lvl5pPr marL="2057400" indent="-228600" algn="l" defTabSz="914400" rtl="0" eaLnBrk="1" latinLnBrk="0" hangingPunct="1">
+              <a:lnSpc>
+                <a:spcPct val="90000"/>
+              </a:lnSpc>
+              <a:spcBef>
+                <a:spcPts val="500"/>
+              </a:spcBef>
+              <a:buFont typeface="Arial" panose="020B0604020202020204" pitchFamily="34" charset="0"/>
+              <a:buChar char="•"/>
+              <a:defRPr sz="1800" kern="1200">
+                <a:solidFill>
+                  <a:schemeClr val="tx1"/>
+                </a:solidFill>
+                <a:latin typeface="+mn-lt"/>
+                <a:ea typeface="+mn-ea"/>
+                <a:cs typeface="+mn-cs"/>
+              </a:defRPr>
+            </a:lvl5pPr>
+            <a:lvl6pPr marL="2514600" indent="-228600" algn="l" defTabSz="914400" rtl="0" eaLnBrk="1" latinLnBrk="0" hangingPunct="1">
+              <a:lnSpc>
+                <a:spcPct val="90000"/>
+              </a:lnSpc>
+              <a:spcBef>
+                <a:spcPts val="500"/>
+              </a:spcBef>
+              <a:buFont typeface="Arial" panose="020B0604020202020204" pitchFamily="34" charset="0"/>
+              <a:buChar char="•"/>
+              <a:defRPr sz="1800" kern="1200">
+                <a:solidFill>
+                  <a:schemeClr val="tx1"/>
+                </a:solidFill>
+                <a:latin typeface="+mn-lt"/>
+                <a:ea typeface="+mn-ea"/>
+                <a:cs typeface="+mn-cs"/>
+              </a:defRPr>
+            </a:lvl6pPr>
+            <a:lvl7pPr marL="2971800" indent="-228600" algn="l" defTabSz="914400" rtl="0" eaLnBrk="1" latinLnBrk="0" hangingPunct="1">
+              <a:lnSpc>
+                <a:spcPct val="90000"/>
+              </a:lnSpc>
+              <a:spcBef>
+                <a:spcPts val="500"/>
+              </a:spcBef>
+              <a:buFont typeface="Arial" panose="020B0604020202020204" pitchFamily="34" charset="0"/>
+              <a:buChar char="•"/>
+              <a:defRPr sz="1800" kern="1200">
+                <a:solidFill>
+                  <a:schemeClr val="tx1"/>
+                </a:solidFill>
+                <a:latin typeface="+mn-lt"/>
+                <a:ea typeface="+mn-ea"/>
+                <a:cs typeface="+mn-cs"/>
+              </a:defRPr>
+            </a:lvl7pPr>
+            <a:lvl8pPr marL="3429000" indent="-228600" algn="l" defTabSz="914400" rtl="0" eaLnBrk="1" latinLnBrk="0" hangingPunct="1">
+              <a:lnSpc>
+                <a:spcPct val="90000"/>
+              </a:lnSpc>
+              <a:spcBef>
+                <a:spcPts val="500"/>
+              </a:spcBef>
+              <a:buFont typeface="Arial" panose="020B0604020202020204" pitchFamily="34" charset="0"/>
+              <a:buChar char="•"/>
+              <a:defRPr sz="1800" kern="1200">
+                <a:solidFill>
+                  <a:schemeClr val="tx1"/>
+                </a:solidFill>
+                <a:latin typeface="+mn-lt"/>
+                <a:ea typeface="+mn-ea"/>
+                <a:cs typeface="+mn-cs"/>
+              </a:defRPr>
+            </a:lvl8pPr>
+            <a:lvl9pPr marL="3886200" indent="-228600" algn="l" defTabSz="914400" rtl="0" eaLnBrk="1" latinLnBrk="0" hangingPunct="1">
+              <a:lnSpc>
+                <a:spcPct val="90000"/>
+              </a:lnSpc>
+              <a:spcBef>
+                <a:spcPts val="500"/>
+              </a:spcBef>
+              <a:buFont typeface="Arial" panose="020B0604020202020204" pitchFamily="34" charset="0"/>
+              <a:buChar char="•"/>
+              <a:defRPr sz="1800" kern="1200">
+                <a:solidFill>
+                  <a:schemeClr val="tx1"/>
+                </a:solidFill>
+                <a:latin typeface="+mn-lt"/>
+                <a:ea typeface="+mn-ea"/>
+                <a:cs typeface="+mn-cs"/>
+              </a:defRPr>
+            </a:lvl9pPr>
+          </a:lstStyle>
+          <a:p>
+            <a:pPr marL="0" indent="0">
+              <a:buFont typeface="Arial" panose="020B0604020202020204" pitchFamily="34" charset="0"/>
+              <a:buNone/>
+            </a:pPr>
+            <a:r>
+              <a:rPr lang="en-US" dirty="0"/>
+              <a:t>Make Predictions</a:t>
+            </a:r>
+          </a:p>
+        </p:txBody>
+      </p:sp>
+      <p:sp>
+        <p:nvSpPr>
+          <p:cNvPr id="17" name="TextBox 16">
+            <a:extLst>
+              <a:ext uri="{FF2B5EF4-FFF2-40B4-BE49-F238E27FC236}">
+                <a16:creationId xmlns:a16="http://schemas.microsoft.com/office/drawing/2014/main" id="{4E68AEC2-F7AB-068A-1964-7A91D12FE50D}"/>
+              </a:ext>
+            </a:extLst>
+          </p:cNvPr>
+          <p:cNvSpPr txBox="1"/>
+          <p:nvPr/>
+        </p:nvSpPr>
+        <p:spPr>
+          <a:xfrm>
+            <a:off x="780535" y="4085083"/>
+            <a:ext cx="6094970" cy="369332"/>
+          </a:xfrm>
+          <a:prstGeom prst="rect">
+            <a:avLst/>
+          </a:prstGeom>
+          <a:noFill/>
+        </p:spPr>
+        <p:txBody>
+          <a:bodyPr wrap="square">
+            <a:spAutoFit/>
+          </a:bodyPr>
+          <a:lstStyle/>
+          <a:p>
+            <a:r>
+              <a:rPr lang="en-US" b="0" i="0" dirty="0">
+                <a:solidFill>
+                  <a:srgbClr val="1F1F1F"/>
+                </a:solidFill>
+                <a:effectLst/>
+                <a:latin typeface="Courier New" panose="02070309020205020404" pitchFamily="49" charset="0"/>
+              </a:rPr>
+              <a:t>[362.33639889] 15802.319376714753</a:t>
+            </a:r>
+            <a:endParaRPr lang="en-US" dirty="0"/>
+          </a:p>
+        </p:txBody>
+      </p:sp>
+      <p:sp>
+        <p:nvSpPr>
+          <p:cNvPr id="19" name="TextBox 18">
+            <a:extLst>
+              <a:ext uri="{FF2B5EF4-FFF2-40B4-BE49-F238E27FC236}">
+                <a16:creationId xmlns:a16="http://schemas.microsoft.com/office/drawing/2014/main" id="{218A98D4-6287-749F-445A-D0B620AB7F89}"/>
+              </a:ext>
+            </a:extLst>
+          </p:cNvPr>
+          <p:cNvSpPr txBox="1"/>
+          <p:nvPr/>
+        </p:nvSpPr>
+        <p:spPr>
+          <a:xfrm>
+            <a:off x="780535" y="5275715"/>
+            <a:ext cx="9592962" cy="475771"/>
+          </a:xfrm>
+          <a:prstGeom prst="rect">
+            <a:avLst/>
+          </a:prstGeom>
+          <a:noFill/>
+        </p:spPr>
+        <p:txBody>
+          <a:bodyPr wrap="square">
+            <a:spAutoFit/>
+          </a:bodyPr>
+          <a:lstStyle/>
+          <a:p>
+            <a:pPr>
+              <a:lnSpc>
+                <a:spcPts val="1425"/>
+              </a:lnSpc>
+              <a:buNone/>
+            </a:pPr>
+            <a:r>
+              <a:rPr lang="en-US" b="1" noProof="1">
+                <a:solidFill>
+                  <a:srgbClr val="008000"/>
+                </a:solidFill>
+                <a:effectLst/>
+                <a:latin typeface="Courier New" panose="02070309020205020404" pitchFamily="49" charset="0"/>
+              </a:rPr>
+              <a:t># Make predictions using the training dataset</a:t>
+            </a:r>
+            <a:endParaRPr lang="en-US" b="1" noProof="1">
+              <a:solidFill>
+                <a:srgbClr val="000000"/>
+              </a:solidFill>
+              <a:effectLst/>
+              <a:latin typeface="Courier New" panose="02070309020205020404" pitchFamily="49" charset="0"/>
+            </a:endParaRPr>
+          </a:p>
+          <a:p>
+            <a:pPr>
+              <a:lnSpc>
+                <a:spcPts val="1425"/>
+              </a:lnSpc>
+            </a:pPr>
+            <a:r>
+              <a:rPr lang="en-US" b="1" noProof="1">
+                <a:solidFill>
+                  <a:srgbClr val="000000"/>
+                </a:solidFill>
+                <a:effectLst/>
+                <a:latin typeface="Courier New" panose="02070309020205020404" pitchFamily="49" charset="0"/>
+              </a:rPr>
+              <a:t>train_predictions= regressor.predict(x_train)</a:t>
+            </a:r>
+          </a:p>
+        </p:txBody>
+      </p:sp>
+    </p:spTree>
+    <p:extLst>
+      <p:ext uri="{BB962C8B-B14F-4D97-AF65-F5344CB8AC3E}">
+        <p14:creationId xmlns:p14="http://schemas.microsoft.com/office/powerpoint/2010/main" val="2868621846"/>
+      </p:ext>
+    </p:extLst>
+  </p:cSld>
+  <p:clrMapOvr>
+    <a:masterClrMapping/>
+  </p:clrMapOvr>
+</p:sld>
+</file>
+
+<file path=ppt/slides/slide23.xml><?xml version="1.0" encoding="utf-8"?>
+<p:sld xmlns:a="http://schemas.openxmlformats.org/drawingml/2006/main" xmlns:r="http://schemas.openxmlformats.org/officeDocument/2006/relationships" xmlns:p="http://schemas.openxmlformats.org/presentationml/2006/main">
+  <p:cSld>
+    <p:spTree>
+      <p:nvGrpSpPr>
+        <p:cNvPr id="1" name=""/>
+        <p:cNvGrpSpPr/>
+        <p:nvPr/>
+      </p:nvGrpSpPr>
+      <p:grpSpPr>
+        <a:xfrm>
+          <a:off x="0" y="0"/>
+          <a:ext cx="0" cy="0"/>
+          <a:chOff x="0" y="0"/>
+          <a:chExt cx="0" cy="0"/>
+        </a:xfrm>
+      </p:grpSpPr>
+      <p:sp>
+        <p:nvSpPr>
+          <p:cNvPr id="3" name="Title 2">
+            <a:extLst>
+              <a:ext uri="{FF2B5EF4-FFF2-40B4-BE49-F238E27FC236}">
+                <a16:creationId xmlns:a16="http://schemas.microsoft.com/office/drawing/2014/main" id="{62185649-C82E-A3A1-050F-9B8CB93988AB}"/>
+              </a:ext>
+            </a:extLst>
+          </p:cNvPr>
+          <p:cNvSpPr>
+            <a:spLocks noGrp="1"/>
+          </p:cNvSpPr>
+          <p:nvPr>
+            <p:ph type="title"/>
+          </p:nvPr>
+        </p:nvSpPr>
+        <p:spPr/>
+        <p:txBody>
+          <a:bodyPr/>
+          <a:lstStyle/>
+          <a:p>
+            <a:r>
+              <a:rPr lang="en-US" dirty="0"/>
+              <a:t>Show Prediction Plot</a:t>
+            </a:r>
+          </a:p>
+        </p:txBody>
+      </p:sp>
+      <p:sp>
+        <p:nvSpPr>
+          <p:cNvPr id="5" name="TextBox 4">
+            <a:extLst>
+              <a:ext uri="{FF2B5EF4-FFF2-40B4-BE49-F238E27FC236}">
+                <a16:creationId xmlns:a16="http://schemas.microsoft.com/office/drawing/2014/main" id="{183324EB-912D-14B6-940B-67A9A7B6C6C0}"/>
+              </a:ext>
+            </a:extLst>
+          </p:cNvPr>
+          <p:cNvSpPr txBox="1"/>
+          <p:nvPr/>
+        </p:nvSpPr>
+        <p:spPr>
+          <a:xfrm>
+            <a:off x="838200" y="1758458"/>
+            <a:ext cx="9943070" cy="1912062"/>
+          </a:xfrm>
+          <a:prstGeom prst="rect">
+            <a:avLst/>
+          </a:prstGeom>
+          <a:noFill/>
+        </p:spPr>
+        <p:txBody>
+          <a:bodyPr wrap="square">
+            <a:spAutoFit/>
+          </a:bodyPr>
+          <a:lstStyle/>
+          <a:p>
+            <a:pPr>
+              <a:lnSpc>
+                <a:spcPts val="1425"/>
+              </a:lnSpc>
+              <a:buNone/>
+            </a:pPr>
+            <a:r>
+              <a:rPr lang="en-US" b="1" noProof="1">
+                <a:solidFill>
+                  <a:srgbClr val="008000"/>
+                </a:solidFill>
+                <a:effectLst/>
+                <a:latin typeface="Courier New" panose="02070309020205020404" pitchFamily="49" charset="0"/>
+              </a:rPr>
+              <a:t># plot the training data with the original dependent variable</a:t>
+            </a:r>
+            <a:endParaRPr lang="en-US" b="1" noProof="1">
+              <a:solidFill>
+                <a:srgbClr val="000000"/>
+              </a:solidFill>
+              <a:effectLst/>
+              <a:latin typeface="Courier New" panose="02070309020205020404" pitchFamily="49" charset="0"/>
+            </a:endParaRPr>
+          </a:p>
+          <a:p>
+            <a:pPr>
+              <a:lnSpc>
+                <a:spcPts val="1425"/>
+              </a:lnSpc>
+              <a:buNone/>
+            </a:pPr>
+            <a:r>
+              <a:rPr lang="en-US" b="1" noProof="1">
+                <a:solidFill>
+                  <a:srgbClr val="000000"/>
+                </a:solidFill>
+                <a:effectLst/>
+                <a:latin typeface="Courier New" panose="02070309020205020404" pitchFamily="49" charset="0"/>
+              </a:rPr>
+              <a:t>plt.scatter(x_train, y_train, color=</a:t>
+            </a:r>
+            <a:r>
+              <a:rPr lang="en-US" b="1" noProof="1">
+                <a:solidFill>
+                  <a:srgbClr val="A31515"/>
+                </a:solidFill>
+                <a:effectLst/>
+                <a:latin typeface="Courier New" panose="02070309020205020404" pitchFamily="49" charset="0"/>
+              </a:rPr>
+              <a:t>"green"</a:t>
+            </a:r>
+            <a:r>
+              <a:rPr lang="en-US" b="1" noProof="1">
+                <a:solidFill>
+                  <a:srgbClr val="000000"/>
+                </a:solidFill>
+                <a:effectLst/>
+                <a:latin typeface="Courier New" panose="02070309020205020404" pitchFamily="49" charset="0"/>
+              </a:rPr>
+              <a:t>)  </a:t>
+            </a:r>
+          </a:p>
+          <a:p>
+            <a:pPr>
+              <a:lnSpc>
+                <a:spcPts val="1425"/>
+              </a:lnSpc>
+              <a:buNone/>
+            </a:pPr>
+            <a:br>
+              <a:rPr lang="en-US" b="1" noProof="1">
+                <a:solidFill>
+                  <a:srgbClr val="000000"/>
+                </a:solidFill>
+                <a:effectLst/>
+                <a:latin typeface="Courier New" panose="02070309020205020404" pitchFamily="49" charset="0"/>
+              </a:rPr>
+            </a:br>
+            <a:r>
+              <a:rPr lang="en-US" b="1" noProof="1">
+                <a:solidFill>
+                  <a:srgbClr val="008000"/>
+                </a:solidFill>
+                <a:effectLst/>
+                <a:latin typeface="Courier New" panose="02070309020205020404" pitchFamily="49" charset="0"/>
+              </a:rPr>
+              <a:t># plot the training data with the predictions</a:t>
+            </a:r>
+            <a:endParaRPr lang="en-US" b="1" noProof="1">
+              <a:solidFill>
+                <a:srgbClr val="000000"/>
+              </a:solidFill>
+              <a:effectLst/>
+              <a:latin typeface="Courier New" panose="02070309020205020404" pitchFamily="49" charset="0"/>
+            </a:endParaRPr>
+          </a:p>
+          <a:p>
+            <a:pPr>
+              <a:lnSpc>
+                <a:spcPts val="1425"/>
+              </a:lnSpc>
+              <a:buNone/>
+            </a:pPr>
+            <a:r>
+              <a:rPr lang="en-US" b="1" noProof="1">
+                <a:solidFill>
+                  <a:srgbClr val="000000"/>
+                </a:solidFill>
+                <a:effectLst/>
+                <a:latin typeface="Courier New" panose="02070309020205020404" pitchFamily="49" charset="0"/>
+              </a:rPr>
+              <a:t>plt.plot(x_train, train_predictions, color=</a:t>
+            </a:r>
+            <a:r>
+              <a:rPr lang="en-US" b="1" noProof="1">
+                <a:solidFill>
+                  <a:srgbClr val="A31515"/>
+                </a:solidFill>
+                <a:effectLst/>
+                <a:latin typeface="Courier New" panose="02070309020205020404" pitchFamily="49" charset="0"/>
+              </a:rPr>
+              <a:t>"red"</a:t>
+            </a:r>
+            <a:r>
+              <a:rPr lang="en-US" b="1" noProof="1">
+                <a:solidFill>
+                  <a:srgbClr val="000000"/>
+                </a:solidFill>
+                <a:effectLst/>
+                <a:latin typeface="Courier New" panose="02070309020205020404" pitchFamily="49" charset="0"/>
+              </a:rPr>
+              <a:t>)    </a:t>
+            </a:r>
+          </a:p>
+          <a:p>
+            <a:pPr>
+              <a:lnSpc>
+                <a:spcPts val="1425"/>
+              </a:lnSpc>
+              <a:buNone/>
+            </a:pPr>
+            <a:br>
+              <a:rPr lang="en-US" b="1" noProof="1">
+                <a:solidFill>
+                  <a:srgbClr val="000000"/>
+                </a:solidFill>
+                <a:effectLst/>
+                <a:latin typeface="Courier New" panose="02070309020205020404" pitchFamily="49" charset="0"/>
+              </a:rPr>
+            </a:br>
+            <a:r>
+              <a:rPr lang="en-US" b="1" noProof="1">
+                <a:solidFill>
+                  <a:srgbClr val="000000"/>
+                </a:solidFill>
+                <a:effectLst/>
+                <a:latin typeface="Courier New" panose="02070309020205020404" pitchFamily="49" charset="0"/>
+              </a:rPr>
+              <a:t>plt.title(</a:t>
+            </a:r>
+            <a:r>
+              <a:rPr lang="en-US" b="1" noProof="1">
+                <a:solidFill>
+                  <a:srgbClr val="A31515"/>
+                </a:solidFill>
+                <a:effectLst/>
+                <a:latin typeface="Courier New" panose="02070309020205020404" pitchFamily="49" charset="0"/>
+              </a:rPr>
+              <a:t>"Size vs Price (Training Dataset)"</a:t>
+            </a:r>
+            <a:r>
+              <a:rPr lang="en-US" b="1" noProof="1">
+                <a:solidFill>
+                  <a:srgbClr val="000000"/>
+                </a:solidFill>
+                <a:effectLst/>
+                <a:latin typeface="Courier New" panose="02070309020205020404" pitchFamily="49" charset="0"/>
+              </a:rPr>
+              <a:t>)  </a:t>
+            </a:r>
+          </a:p>
+          <a:p>
+            <a:pPr>
+              <a:lnSpc>
+                <a:spcPts val="1425"/>
+              </a:lnSpc>
+              <a:buNone/>
+            </a:pPr>
+            <a:r>
+              <a:rPr lang="en-US" b="1" noProof="1">
+                <a:solidFill>
+                  <a:srgbClr val="000000"/>
+                </a:solidFill>
+                <a:effectLst/>
+                <a:latin typeface="Courier New" panose="02070309020205020404" pitchFamily="49" charset="0"/>
+              </a:rPr>
+              <a:t>plt.xlabel(</a:t>
+            </a:r>
+            <a:r>
+              <a:rPr lang="en-US" b="1" noProof="1">
+                <a:solidFill>
+                  <a:srgbClr val="A31515"/>
+                </a:solidFill>
+                <a:effectLst/>
+                <a:latin typeface="Courier New" panose="02070309020205020404" pitchFamily="49" charset="0"/>
+              </a:rPr>
+              <a:t>"Size in Square Meter"</a:t>
+            </a:r>
+            <a:r>
+              <a:rPr lang="en-US" b="1" noProof="1">
+                <a:solidFill>
+                  <a:srgbClr val="000000"/>
+                </a:solidFill>
+                <a:effectLst/>
+                <a:latin typeface="Courier New" panose="02070309020205020404" pitchFamily="49" charset="0"/>
+              </a:rPr>
+              <a:t>)  </a:t>
+            </a:r>
+          </a:p>
+          <a:p>
+            <a:pPr>
+              <a:lnSpc>
+                <a:spcPts val="1425"/>
+              </a:lnSpc>
+              <a:buNone/>
+            </a:pPr>
+            <a:r>
+              <a:rPr lang="en-US" b="1" noProof="1">
+                <a:solidFill>
+                  <a:srgbClr val="000000"/>
+                </a:solidFill>
+                <a:effectLst/>
+                <a:latin typeface="Courier New" panose="02070309020205020404" pitchFamily="49" charset="0"/>
+              </a:rPr>
+              <a:t>plt.ylabel(</a:t>
+            </a:r>
+            <a:r>
+              <a:rPr lang="en-US" b="1" noProof="1">
+                <a:solidFill>
+                  <a:srgbClr val="A31515"/>
+                </a:solidFill>
+                <a:effectLst/>
+                <a:latin typeface="Courier New" panose="02070309020205020404" pitchFamily="49" charset="0"/>
+              </a:rPr>
+              <a:t>"Appartment Price"</a:t>
+            </a:r>
+            <a:r>
+              <a:rPr lang="en-US" b="1" noProof="1">
+                <a:solidFill>
+                  <a:srgbClr val="000000"/>
+                </a:solidFill>
+                <a:effectLst/>
+                <a:latin typeface="Courier New" panose="02070309020205020404" pitchFamily="49" charset="0"/>
+              </a:rPr>
+              <a:t>)  </a:t>
+            </a:r>
+          </a:p>
+          <a:p>
+            <a:pPr>
+              <a:lnSpc>
+                <a:spcPts val="1425"/>
+              </a:lnSpc>
+            </a:pPr>
+            <a:r>
+              <a:rPr lang="en-US" b="1" noProof="1">
+                <a:solidFill>
+                  <a:srgbClr val="000000"/>
+                </a:solidFill>
+                <a:effectLst/>
+                <a:latin typeface="Courier New" panose="02070309020205020404" pitchFamily="49" charset="0"/>
+              </a:rPr>
+              <a:t>plt.show()</a:t>
+            </a:r>
+          </a:p>
+        </p:txBody>
+      </p:sp>
+      <p:pic>
+        <p:nvPicPr>
+          <p:cNvPr id="7" name="Picture 6">
+            <a:extLst>
+              <a:ext uri="{FF2B5EF4-FFF2-40B4-BE49-F238E27FC236}">
+                <a16:creationId xmlns:a16="http://schemas.microsoft.com/office/drawing/2014/main" id="{F3BC5B92-84C6-A71A-B9FF-22899DB146AE}"/>
+              </a:ext>
+            </a:extLst>
+          </p:cNvPr>
+          <p:cNvPicPr>
+            <a:picLocks noChangeAspect="1"/>
+          </p:cNvPicPr>
+          <p:nvPr/>
+        </p:nvPicPr>
+        <p:blipFill>
+          <a:blip r:embed="rId2"/>
+          <a:stretch>
+            <a:fillRect/>
+          </a:stretch>
+        </p:blipFill>
+        <p:spPr>
+          <a:xfrm>
+            <a:off x="7259760" y="3156210"/>
+            <a:ext cx="4094040" cy="3003634"/>
+          </a:xfrm>
+          <a:prstGeom prst="rect">
+            <a:avLst/>
+          </a:prstGeom>
+        </p:spPr>
+      </p:pic>
+      <p:sp>
+        <p:nvSpPr>
+          <p:cNvPr id="9" name="TextBox 8">
+            <a:extLst>
+              <a:ext uri="{FF2B5EF4-FFF2-40B4-BE49-F238E27FC236}">
+                <a16:creationId xmlns:a16="http://schemas.microsoft.com/office/drawing/2014/main" id="{B0D2EF0C-E643-3DDB-E0FE-3D4594086E87}"/>
+              </a:ext>
+            </a:extLst>
+          </p:cNvPr>
+          <p:cNvSpPr txBox="1"/>
+          <p:nvPr/>
+        </p:nvSpPr>
+        <p:spPr>
+          <a:xfrm>
+            <a:off x="837170" y="4795415"/>
+            <a:ext cx="6094970" cy="655308"/>
+          </a:xfrm>
+          <a:prstGeom prst="rect">
+            <a:avLst/>
+          </a:prstGeom>
+          <a:noFill/>
+        </p:spPr>
+        <p:txBody>
+          <a:bodyPr wrap="square">
+            <a:spAutoFit/>
+          </a:bodyPr>
+          <a:lstStyle/>
+          <a:p>
+            <a:pPr>
+              <a:lnSpc>
+                <a:spcPts val="1425"/>
+              </a:lnSpc>
+              <a:buNone/>
+            </a:pPr>
+            <a:r>
+              <a:rPr lang="fr-FR" b="1" dirty="0">
+                <a:solidFill>
+                  <a:srgbClr val="000000"/>
+                </a:solidFill>
+                <a:effectLst/>
+                <a:latin typeface="Courier New" panose="02070309020205020404" pitchFamily="49" charset="0"/>
+              </a:rPr>
+              <a:t>r2 = r2_score(</a:t>
+            </a:r>
+            <a:r>
+              <a:rPr lang="fr-FR" b="1" dirty="0" err="1">
+                <a:solidFill>
+                  <a:srgbClr val="000000"/>
+                </a:solidFill>
+                <a:effectLst/>
+                <a:latin typeface="Courier New" panose="02070309020205020404" pitchFamily="49" charset="0"/>
+              </a:rPr>
+              <a:t>y_train</a:t>
+            </a:r>
+            <a:r>
+              <a:rPr lang="fr-FR" b="1" dirty="0">
+                <a:solidFill>
+                  <a:srgbClr val="000000"/>
+                </a:solidFill>
+                <a:effectLst/>
+                <a:latin typeface="Courier New" panose="02070309020205020404" pitchFamily="49" charset="0"/>
+              </a:rPr>
+              <a:t>, </a:t>
+            </a:r>
+            <a:r>
+              <a:rPr lang="fr-FR" b="1" dirty="0" err="1">
+                <a:solidFill>
+                  <a:srgbClr val="000000"/>
+                </a:solidFill>
+                <a:effectLst/>
+                <a:latin typeface="Courier New" panose="02070309020205020404" pitchFamily="49" charset="0"/>
+              </a:rPr>
+              <a:t>train_predictions</a:t>
+            </a:r>
+            <a:r>
+              <a:rPr lang="fr-FR" b="1" dirty="0">
+                <a:solidFill>
+                  <a:srgbClr val="000000"/>
+                </a:solidFill>
+                <a:effectLst/>
+                <a:latin typeface="Courier New" panose="02070309020205020404" pitchFamily="49" charset="0"/>
+              </a:rPr>
+              <a:t>)</a:t>
+            </a:r>
+          </a:p>
+          <a:p>
+            <a:pPr>
+              <a:lnSpc>
+                <a:spcPts val="1425"/>
+              </a:lnSpc>
+              <a:buNone/>
+            </a:pPr>
+            <a:r>
+              <a:rPr lang="fr-FR" b="1" dirty="0">
+                <a:solidFill>
+                  <a:srgbClr val="000000"/>
+                </a:solidFill>
+                <a:effectLst/>
+                <a:latin typeface="Courier New" panose="02070309020205020404" pitchFamily="49" charset="0"/>
+              </a:rPr>
+              <a:t>r2 = </a:t>
+            </a:r>
+            <a:r>
+              <a:rPr lang="fr-FR" b="1" dirty="0">
+                <a:solidFill>
+                  <a:srgbClr val="6A5221"/>
+                </a:solidFill>
+                <a:effectLst/>
+                <a:latin typeface="Courier New" panose="02070309020205020404" pitchFamily="49" charset="0"/>
+              </a:rPr>
+              <a:t>round</a:t>
+            </a:r>
+            <a:r>
+              <a:rPr lang="fr-FR" b="1" dirty="0">
+                <a:solidFill>
+                  <a:srgbClr val="000000"/>
+                </a:solidFill>
+                <a:effectLst/>
+                <a:latin typeface="Courier New" panose="02070309020205020404" pitchFamily="49" charset="0"/>
+              </a:rPr>
+              <a:t>(r2,</a:t>
+            </a:r>
+            <a:r>
+              <a:rPr lang="fr-FR" b="1" dirty="0">
+                <a:solidFill>
+                  <a:srgbClr val="116644"/>
+                </a:solidFill>
+                <a:effectLst/>
+                <a:latin typeface="Courier New" panose="02070309020205020404" pitchFamily="49" charset="0"/>
+              </a:rPr>
+              <a:t>2</a:t>
+            </a:r>
+            <a:r>
+              <a:rPr lang="fr-FR" b="1" dirty="0">
+                <a:solidFill>
+                  <a:srgbClr val="000000"/>
+                </a:solidFill>
+                <a:effectLst/>
+                <a:latin typeface="Courier New" panose="02070309020205020404" pitchFamily="49" charset="0"/>
+              </a:rPr>
+              <a:t>)</a:t>
+            </a:r>
+          </a:p>
+          <a:p>
+            <a:pPr>
+              <a:lnSpc>
+                <a:spcPts val="1425"/>
+              </a:lnSpc>
+            </a:pPr>
+            <a:r>
+              <a:rPr lang="fr-FR" b="1" dirty="0" err="1">
+                <a:solidFill>
+                  <a:srgbClr val="6A5221"/>
+                </a:solidFill>
+                <a:effectLst/>
+                <a:latin typeface="Courier New" panose="02070309020205020404" pitchFamily="49" charset="0"/>
+              </a:rPr>
+              <a:t>print</a:t>
+            </a:r>
+            <a:r>
+              <a:rPr lang="fr-FR" b="1" dirty="0">
+                <a:solidFill>
+                  <a:srgbClr val="000000"/>
+                </a:solidFill>
+                <a:effectLst/>
+                <a:latin typeface="Courier New" panose="02070309020205020404" pitchFamily="49" charset="0"/>
+              </a:rPr>
+              <a:t>(</a:t>
+            </a:r>
+            <a:r>
+              <a:rPr lang="fr-FR" b="1" dirty="0">
+                <a:solidFill>
+                  <a:srgbClr val="A31515"/>
+                </a:solidFill>
+                <a:effectLst/>
+                <a:latin typeface="Courier New" panose="02070309020205020404" pitchFamily="49" charset="0"/>
+              </a:rPr>
+              <a:t>"r2 score: "</a:t>
+            </a:r>
+            <a:r>
+              <a:rPr lang="fr-FR" b="1" dirty="0">
+                <a:solidFill>
+                  <a:srgbClr val="000000"/>
+                </a:solidFill>
+                <a:effectLst/>
+                <a:latin typeface="Courier New" panose="02070309020205020404" pitchFamily="49" charset="0"/>
+              </a:rPr>
+              <a:t>, r2)</a:t>
+            </a:r>
+          </a:p>
+        </p:txBody>
+      </p:sp>
+      <p:sp>
+        <p:nvSpPr>
+          <p:cNvPr id="10" name="Content Placeholder 1">
+            <a:extLst>
+              <a:ext uri="{FF2B5EF4-FFF2-40B4-BE49-F238E27FC236}">
+                <a16:creationId xmlns:a16="http://schemas.microsoft.com/office/drawing/2014/main" id="{53E579A2-15AC-99B0-3420-360A8FB1DA23}"/>
+              </a:ext>
+            </a:extLst>
+          </p:cNvPr>
+          <p:cNvSpPr>
+            <a:spLocks noGrp="1"/>
+          </p:cNvSpPr>
+          <p:nvPr>
+            <p:ph idx="1"/>
+          </p:nvPr>
+        </p:nvSpPr>
+        <p:spPr>
+          <a:xfrm>
+            <a:off x="837170" y="4338778"/>
+            <a:ext cx="5741773" cy="351147"/>
+          </a:xfrm>
+        </p:spPr>
+        <p:txBody>
+          <a:bodyPr>
+            <a:normAutofit lnSpcReduction="10000"/>
+          </a:bodyPr>
+          <a:lstStyle/>
+          <a:p>
+            <a:pPr marL="0" indent="0">
+              <a:buNone/>
+            </a:pPr>
+            <a:r>
+              <a:rPr lang="en-US" sz="2000" dirty="0"/>
+              <a:t>Evaluate the model using R-Squared metric:</a:t>
+            </a:r>
+          </a:p>
+        </p:txBody>
+      </p:sp>
+      <p:sp>
+        <p:nvSpPr>
+          <p:cNvPr id="11" name="Rectangle 1">
+            <a:extLst>
+              <a:ext uri="{FF2B5EF4-FFF2-40B4-BE49-F238E27FC236}">
+                <a16:creationId xmlns:a16="http://schemas.microsoft.com/office/drawing/2014/main" id="{4A070593-0CE8-45D5-DF62-3F13FC7319C1}"/>
+              </a:ext>
+            </a:extLst>
+          </p:cNvPr>
+          <p:cNvSpPr>
+            <a:spLocks noChangeArrowheads="1"/>
+          </p:cNvSpPr>
+          <p:nvPr/>
+        </p:nvSpPr>
+        <p:spPr bwMode="auto">
+          <a:xfrm>
+            <a:off x="837170" y="6165968"/>
+            <a:ext cx="2036135" cy="246221"/>
+          </a:xfrm>
+          <a:prstGeom prst="rect">
+            <a:avLst/>
+          </a:prstGeom>
+          <a:noFill/>
+          <a:ln>
+            <a:noFill/>
+          </a:ln>
+          <a:effectLst/>
+          <a:extLst>
+            <a:ext uri="{909E8E84-426E-40DD-AFC4-6F175D3DCCD1}">
+              <a14:hiddenFill xmlns:a14="http://schemas.microsoft.com/office/drawing/2010/main">
+                <a:solidFill>
+                  <a:schemeClr val="accent1"/>
+                </a:solidFill>
+              </a14:hiddenFill>
+            </a:ext>
+            <a:ext uri="{91240B29-F687-4F45-9708-019B960494DF}">
+              <a14:hiddenLine xmlns:a14="http://schemas.microsoft.com/office/drawing/2010/main" w="9525">
+                <a:solidFill>
+                  <a:schemeClr val="tx1"/>
+                </a:solidFill>
+                <a:miter lim="800000"/>
+                <a:headEnd/>
+                <a:tailEnd/>
+              </a14:hiddenLine>
+            </a:ext>
+            <a:ext uri="{AF507438-7753-43E0-B8FC-AC1667EBCBE1}">
+              <a14:hiddenEffects xmlns:a14="http://schemas.microsoft.com/office/drawing/2010/main">
+                <a:effectLst>
+                  <a:outerShdw dist="35921" dir="2700000" algn="ctr" rotWithShape="0">
+                    <a:schemeClr val="bg2"/>
+                  </a:outerShdw>
+                </a:effectLst>
+              </a14:hiddenEffects>
+            </a:ext>
+          </a:extLst>
+        </p:spPr>
+        <p:txBody>
+          <a:bodyPr vert="horz" wrap="none" lIns="91440" tIns="0" rIns="91440" bIns="0" numCol="1" anchor="ctr" anchorCtr="0" compatLnSpc="1">
+            <a:prstTxWarp prst="textNoShape">
+              <a:avLst/>
+            </a:prstTxWarp>
+            <a:spAutoFit/>
+          </a:bodyPr>
+          <a:lstStyle>
+            <a:lvl1pPr eaLnBrk="0" fontAlgn="base" hangingPunct="0">
+              <a:spcBef>
+                <a:spcPct val="0"/>
+              </a:spcBef>
+              <a:spcAft>
+                <a:spcPct val="0"/>
+              </a:spcAft>
+              <a:defRPr>
+                <a:solidFill>
+                  <a:schemeClr val="tx1"/>
+                </a:solidFill>
+                <a:latin typeface="Arial" panose="020B0604020202020204" pitchFamily="34" charset="0"/>
+              </a:defRPr>
+            </a:lvl1pPr>
+            <a:lvl2pPr eaLnBrk="0" fontAlgn="base" hangingPunct="0">
+              <a:spcBef>
+                <a:spcPct val="0"/>
+              </a:spcBef>
+              <a:spcAft>
+                <a:spcPct val="0"/>
+              </a:spcAft>
+              <a:defRPr>
+                <a:solidFill>
+                  <a:schemeClr val="tx1"/>
+                </a:solidFill>
+                <a:latin typeface="Arial" panose="020B0604020202020204" pitchFamily="34" charset="0"/>
+              </a:defRPr>
+            </a:lvl2pPr>
+            <a:lvl3pPr eaLnBrk="0" fontAlgn="base" hangingPunct="0">
+              <a:spcBef>
+                <a:spcPct val="0"/>
+              </a:spcBef>
+              <a:spcAft>
+                <a:spcPct val="0"/>
+              </a:spcAft>
+              <a:defRPr>
+                <a:solidFill>
+                  <a:schemeClr val="tx1"/>
+                </a:solidFill>
+                <a:latin typeface="Arial" panose="020B0604020202020204" pitchFamily="34" charset="0"/>
+              </a:defRPr>
+            </a:lvl3pPr>
+            <a:lvl4pPr eaLnBrk="0" fontAlgn="base" hangingPunct="0">
+              <a:spcBef>
+                <a:spcPct val="0"/>
+              </a:spcBef>
+              <a:spcAft>
+                <a:spcPct val="0"/>
+              </a:spcAft>
+              <a:defRPr>
+                <a:solidFill>
+                  <a:schemeClr val="tx1"/>
+                </a:solidFill>
+                <a:latin typeface="Arial" panose="020B0604020202020204" pitchFamily="34" charset="0"/>
+              </a:defRPr>
+            </a:lvl4pPr>
+            <a:lvl5pPr eaLnBrk="0" fontAlgn="base" hangingPunct="0">
+              <a:spcBef>
+                <a:spcPct val="0"/>
+              </a:spcBef>
+              <a:spcAft>
+                <a:spcPct val="0"/>
+              </a:spcAft>
+              <a:defRPr>
+                <a:solidFill>
+                  <a:schemeClr val="tx1"/>
+                </a:solidFill>
+                <a:latin typeface="Arial" panose="020B0604020202020204" pitchFamily="34" charset="0"/>
+              </a:defRPr>
+            </a:lvl5pPr>
+            <a:lvl6pPr eaLnBrk="0" fontAlgn="base" hangingPunct="0">
+              <a:spcBef>
+                <a:spcPct val="0"/>
+              </a:spcBef>
+              <a:spcAft>
+                <a:spcPct val="0"/>
+              </a:spcAft>
+              <a:defRPr>
+                <a:solidFill>
+                  <a:schemeClr val="tx1"/>
+                </a:solidFill>
+                <a:latin typeface="Arial" panose="020B0604020202020204" pitchFamily="34" charset="0"/>
+              </a:defRPr>
+            </a:lvl6pPr>
+            <a:lvl7pPr eaLnBrk="0" fontAlgn="base" hangingPunct="0">
+              <a:spcBef>
+                <a:spcPct val="0"/>
+              </a:spcBef>
+              <a:spcAft>
+                <a:spcPct val="0"/>
+              </a:spcAft>
+              <a:defRPr>
+                <a:solidFill>
+                  <a:schemeClr val="tx1"/>
+                </a:solidFill>
+                <a:latin typeface="Arial" panose="020B0604020202020204" pitchFamily="34" charset="0"/>
+              </a:defRPr>
+            </a:lvl7pPr>
+            <a:lvl8pPr eaLnBrk="0" fontAlgn="base" hangingPunct="0">
+              <a:spcBef>
+                <a:spcPct val="0"/>
+              </a:spcBef>
+              <a:spcAft>
+                <a:spcPct val="0"/>
+              </a:spcAft>
+              <a:defRPr>
+                <a:solidFill>
+                  <a:schemeClr val="tx1"/>
+                </a:solidFill>
+                <a:latin typeface="Arial" panose="020B0604020202020204" pitchFamily="34" charset="0"/>
+              </a:defRPr>
+            </a:lvl8pPr>
+            <a:lvl9pPr eaLnBrk="0" fontAlgn="base" hangingPunct="0">
+              <a:spcBef>
+                <a:spcPct val="0"/>
+              </a:spcBef>
+              <a:spcAft>
+                <a:spcPct val="0"/>
+              </a:spcAft>
+              <a:defRPr>
+                <a:solidFill>
+                  <a:schemeClr val="tx1"/>
+                </a:solidFill>
+                <a:latin typeface="Arial" panose="020B0604020202020204" pitchFamily="34" charset="0"/>
+              </a:defRPr>
+            </a:lvl9pPr>
+          </a:lstStyle>
+          <a:p>
+            <a:pPr marL="0" marR="0" lvl="0" indent="0" algn="l" defTabSz="914400" rtl="0" eaLnBrk="0" fontAlgn="base" latinLnBrk="0" hangingPunct="0">
+              <a:lnSpc>
+                <a:spcPct val="100000"/>
+              </a:lnSpc>
+              <a:spcBef>
+                <a:spcPct val="0"/>
+              </a:spcBef>
+              <a:spcAft>
+                <a:spcPct val="0"/>
+              </a:spcAft>
+              <a:buClrTx/>
+              <a:buSzTx/>
+              <a:buFontTx/>
+              <a:buNone/>
+              <a:tabLst/>
+            </a:pPr>
+            <a:r>
+              <a:rPr kumimoji="0" lang="en-US" altLang="en-US" sz="1600" b="0" i="0" u="none" strike="noStrike" cap="none" normalizeH="0" baseline="0" dirty="0">
+                <a:ln>
+                  <a:noFill/>
+                </a:ln>
+                <a:solidFill>
+                  <a:srgbClr val="1F1F1F"/>
+                </a:solidFill>
+                <a:effectLst/>
+                <a:latin typeface="Courier New" panose="02070309020205020404" pitchFamily="49" charset="0"/>
+                <a:cs typeface="Courier New" panose="02070309020205020404" pitchFamily="49" charset="0"/>
+              </a:rPr>
+              <a:t>r2 score: 0.55 </a:t>
+            </a:r>
+          </a:p>
+        </p:txBody>
+      </p:sp>
+      <p:sp>
+        <p:nvSpPr>
+          <p:cNvPr id="12" name="Rectangle 2">
+            <a:extLst>
+              <a:ext uri="{FF2B5EF4-FFF2-40B4-BE49-F238E27FC236}">
+                <a16:creationId xmlns:a16="http://schemas.microsoft.com/office/drawing/2014/main" id="{B950AE4D-05FC-1BA2-97BD-60CF68022E2B}"/>
+              </a:ext>
+            </a:extLst>
+          </p:cNvPr>
+          <p:cNvSpPr>
+            <a:spLocks noChangeArrowheads="1"/>
+          </p:cNvSpPr>
+          <p:nvPr/>
+        </p:nvSpPr>
+        <p:spPr bwMode="auto">
+          <a:xfrm>
+            <a:off x="837170" y="6060477"/>
+            <a:ext cx="12192000" cy="0"/>
+          </a:xfrm>
+          <a:prstGeom prst="rect">
+            <a:avLst/>
+          </a:prstGeom>
+          <a:noFill/>
+          <a:ln>
+            <a:noFill/>
+          </a:ln>
+          <a:effectLst/>
+          <a:extLst>
+            <a:ext uri="{909E8E84-426E-40DD-AFC4-6F175D3DCCD1}">
+              <a14:hiddenFill xmlns:a14="http://schemas.microsoft.com/office/drawing/2010/main">
+                <a:solidFill>
+                  <a:schemeClr val="accent1"/>
+                </a:solidFill>
+              </a14:hiddenFill>
+            </a:ext>
+            <a:ext uri="{91240B29-F687-4F45-9708-019B960494DF}">
+              <a14:hiddenLine xmlns:a14="http://schemas.microsoft.com/office/drawing/2010/main" w="9525">
+                <a:solidFill>
+                  <a:schemeClr val="tx1"/>
+                </a:solidFill>
+                <a:miter lim="800000"/>
+                <a:headEnd/>
+                <a:tailEnd/>
+              </a14:hiddenLine>
+            </a:ext>
+            <a:ext uri="{AF507438-7753-43E0-B8FC-AC1667EBCBE1}">
+              <a14:hiddenEffects xmlns:a14="http://schemas.microsoft.com/office/drawing/2010/main">
+                <a:effectLst>
+                  <a:outerShdw dist="35921" dir="2700000" algn="ctr" rotWithShape="0">
+                    <a:schemeClr val="bg2"/>
+                  </a:outerShdw>
+                </a:effectLst>
+              </a14:hiddenEffects>
+            </a:ext>
+          </a:extLst>
+        </p:spPr>
+        <p:txBody>
+          <a:bodyPr vert="horz" wrap="none" lIns="91440" tIns="45720" rIns="91440" bIns="45720" numCol="1" anchor="ctr" anchorCtr="0" compatLnSpc="1">
+            <a:prstTxWarp prst="textNoShape">
+              <a:avLst/>
+            </a:prstTxWarp>
+            <a:spAutoFit/>
+          </a:bodyPr>
+          <a:lstStyle/>
+          <a:p>
+            <a:pPr marL="0" marR="0" lvl="0" indent="0" algn="l" defTabSz="914400" rtl="0" eaLnBrk="0" fontAlgn="base" latinLnBrk="0" hangingPunct="0">
+              <a:lnSpc>
+                <a:spcPct val="100000"/>
+              </a:lnSpc>
+              <a:spcBef>
+                <a:spcPct val="0"/>
+              </a:spcBef>
+              <a:spcAft>
+                <a:spcPct val="0"/>
+              </a:spcAft>
+              <a:buClrTx/>
+              <a:buSzTx/>
+              <a:buFontTx/>
+              <a:buNone/>
+              <a:tabLst/>
+            </a:pPr>
+            <a:br>
+              <a:rPr kumimoji="0" lang="en-US" altLang="en-US" sz="600" b="0" i="0" u="none" strike="noStrike" cap="none" normalizeH="0" baseline="0">
+                <a:ln>
+                  <a:noFill/>
+                </a:ln>
+                <a:solidFill>
+                  <a:schemeClr val="tx1"/>
+                </a:solidFill>
+                <a:effectLst/>
+              </a:rPr>
+            </a:br>
+            <a:endParaRPr kumimoji="0" lang="en-US" altLang="en-US" sz="1800" b="0" i="0" u="none" strike="noStrike" cap="none" normalizeH="0" baseline="0">
+              <a:ln>
+                <a:noFill/>
+              </a:ln>
+              <a:solidFill>
+                <a:schemeClr val="tx1"/>
+              </a:solidFill>
+              <a:effectLst/>
+              <a:latin typeface="Arial" panose="020B0604020202020204" pitchFamily="34" charset="0"/>
+            </a:endParaRPr>
+          </a:p>
+        </p:txBody>
+      </p:sp>
+    </p:spTree>
+    <p:extLst>
+      <p:ext uri="{BB962C8B-B14F-4D97-AF65-F5344CB8AC3E}">
+        <p14:creationId xmlns:p14="http://schemas.microsoft.com/office/powerpoint/2010/main" val="1274490131"/>
+      </p:ext>
+    </p:extLst>
+  </p:cSld>
+  <p:clrMapOvr>
+    <a:masterClrMapping/>
+  </p:clrMapOvr>
+</p:sld>
+</file>
+
+<file path=ppt/slides/slide24.xml><?xml version="1.0" encoding="utf-8"?>
+<p:sld xmlns:a="http://schemas.openxmlformats.org/drawingml/2006/main" xmlns:r="http://schemas.openxmlformats.org/officeDocument/2006/relationships" xmlns:p="http://schemas.openxmlformats.org/presentationml/2006/main">
+  <p:cSld>
+    <p:spTree>
+      <p:nvGrpSpPr>
+        <p:cNvPr id="1" name=""/>
+        <p:cNvGrpSpPr/>
+        <p:nvPr/>
+      </p:nvGrpSpPr>
+      <p:grpSpPr>
+        <a:xfrm>
+          <a:off x="0" y="0"/>
+          <a:ext cx="0" cy="0"/>
+          <a:chOff x="0" y="0"/>
+          <a:chExt cx="0" cy="0"/>
+        </a:xfrm>
+      </p:grpSpPr>
+      <p:sp>
+        <p:nvSpPr>
+          <p:cNvPr id="3" name="Title 2">
+            <a:extLst>
+              <a:ext uri="{FF2B5EF4-FFF2-40B4-BE49-F238E27FC236}">
                 <a16:creationId xmlns:a16="http://schemas.microsoft.com/office/drawing/2014/main" id="{50668113-EA52-BF53-9D93-4C2380293EF7}"/>
               </a:ext>
             </a:extLst>
@@ -10789,841 +11665,7 @@
     </p:spTree>
     <p:extLst>
       <p:ext uri="{BB962C8B-B14F-4D97-AF65-F5344CB8AC3E}">
-        <p14:creationId xmlns:p14="http://schemas.microsoft.com/office/powerpoint/2010/main" val="3686005749"/>
-      </p:ext>
-    </p:extLst>
-  </p:cSld>
-  <p:clrMapOvr>
-    <a:masterClrMapping/>
-  </p:clrMapOvr>
-</p:sld>
-</file>
-
-<file path=ppt/slides/slide21.xml><?xml version="1.0" encoding="utf-8"?>
-<p:sld xmlns:a="http://schemas.openxmlformats.org/drawingml/2006/main" xmlns:r="http://schemas.openxmlformats.org/officeDocument/2006/relationships" xmlns:p="http://schemas.openxmlformats.org/presentationml/2006/main">
-  <p:cSld>
-    <p:spTree>
-      <p:nvGrpSpPr>
-        <p:cNvPr id="1" name="">
-          <a:extLst>
-            <a:ext uri="{FF2B5EF4-FFF2-40B4-BE49-F238E27FC236}">
-              <a16:creationId xmlns:a16="http://schemas.microsoft.com/office/drawing/2014/main" id="{D27CBF25-F52F-532E-A535-7A7D707482E4}"/>
-            </a:ext>
-          </a:extLst>
-        </p:cNvPr>
-        <p:cNvGrpSpPr/>
-        <p:nvPr/>
-      </p:nvGrpSpPr>
-      <p:grpSpPr>
-        <a:xfrm>
-          <a:off x="0" y="0"/>
-          <a:ext cx="0" cy="0"/>
-          <a:chOff x="0" y="0"/>
-          <a:chExt cx="0" cy="0"/>
-        </a:xfrm>
-      </p:grpSpPr>
-      <p:sp>
-        <p:nvSpPr>
-          <p:cNvPr id="2" name="Content Placeholder 1">
-            <a:extLst>
-              <a:ext uri="{FF2B5EF4-FFF2-40B4-BE49-F238E27FC236}">
-                <a16:creationId xmlns:a16="http://schemas.microsoft.com/office/drawing/2014/main" id="{D6A166C5-B6FB-3038-2293-415E4C7D22E6}"/>
-              </a:ext>
-            </a:extLst>
-          </p:cNvPr>
-          <p:cNvSpPr>
-            <a:spLocks noGrp="1"/>
-          </p:cNvSpPr>
-          <p:nvPr>
-            <p:ph idx="1"/>
-          </p:nvPr>
-        </p:nvSpPr>
-        <p:spPr>
-          <a:xfrm>
-            <a:off x="838200" y="1633491"/>
-            <a:ext cx="10999573" cy="748208"/>
-          </a:xfrm>
-        </p:spPr>
-        <p:txBody>
-          <a:bodyPr>
-            <a:normAutofit/>
-          </a:bodyPr>
-          <a:lstStyle/>
-          <a:p>
-            <a:pPr marL="0" indent="0">
-              <a:buNone/>
-            </a:pPr>
-            <a:r>
-              <a:rPr lang="en-US" sz="2000" dirty="0"/>
-              <a:t>Linear regression is a powerful tool for understanding and predicting the behavior of a variable; however, it needs to meet a few conditions to be accurate and dependable solutions. </a:t>
-            </a:r>
-          </a:p>
-        </p:txBody>
-      </p:sp>
-      <p:sp>
-        <p:nvSpPr>
-          <p:cNvPr id="3" name="Title 2">
-            <a:extLst>
-              <a:ext uri="{FF2B5EF4-FFF2-40B4-BE49-F238E27FC236}">
-                <a16:creationId xmlns:a16="http://schemas.microsoft.com/office/drawing/2014/main" id="{4699A8A2-3830-72B5-1A7A-82D011352862}"/>
-              </a:ext>
-            </a:extLst>
-          </p:cNvPr>
-          <p:cNvSpPr>
-            <a:spLocks noGrp="1"/>
-          </p:cNvSpPr>
-          <p:nvPr>
-            <p:ph type="title"/>
-          </p:nvPr>
-        </p:nvSpPr>
-        <p:spPr/>
-        <p:txBody>
-          <a:bodyPr>
-            <a:normAutofit/>
-          </a:bodyPr>
-          <a:lstStyle/>
-          <a:p>
-            <a:r>
-              <a:rPr lang="en-US" dirty="0"/>
-              <a:t>Assumptions of Simple Linear Regression</a:t>
-            </a:r>
-          </a:p>
-        </p:txBody>
-      </p:sp>
-      <p:pic>
-        <p:nvPicPr>
-          <p:cNvPr id="6" name="Picture 5">
-            <a:extLst>
-              <a:ext uri="{FF2B5EF4-FFF2-40B4-BE49-F238E27FC236}">
-                <a16:creationId xmlns:a16="http://schemas.microsoft.com/office/drawing/2014/main" id="{1200D47E-397F-9E31-C30B-EE0822713306}"/>
-              </a:ext>
-            </a:extLst>
-          </p:cNvPr>
-          <p:cNvPicPr>
-            <a:picLocks noChangeAspect="1"/>
-          </p:cNvPicPr>
-          <p:nvPr/>
-        </p:nvPicPr>
-        <p:blipFill>
-          <a:blip r:embed="rId2"/>
-          <a:stretch>
-            <a:fillRect/>
-          </a:stretch>
-        </p:blipFill>
-        <p:spPr>
-          <a:xfrm>
-            <a:off x="6893165" y="2469459"/>
-            <a:ext cx="4460635" cy="3499977"/>
-          </a:xfrm>
-          <a:prstGeom prst="rect">
-            <a:avLst/>
-          </a:prstGeom>
-        </p:spPr>
-      </p:pic>
-      <p:sp>
-        <p:nvSpPr>
-          <p:cNvPr id="4" name="Content Placeholder 1">
-            <a:extLst>
-              <a:ext uri="{FF2B5EF4-FFF2-40B4-BE49-F238E27FC236}">
-                <a16:creationId xmlns:a16="http://schemas.microsoft.com/office/drawing/2014/main" id="{BBEF8319-D9AC-E564-64FB-B881D619589E}"/>
-              </a:ext>
-            </a:extLst>
-          </p:cNvPr>
-          <p:cNvSpPr txBox="1">
-            <a:spLocks/>
-          </p:cNvSpPr>
-          <p:nvPr/>
-        </p:nvSpPr>
-        <p:spPr>
-          <a:xfrm>
-            <a:off x="838200" y="2539653"/>
-            <a:ext cx="5887065" cy="4498368"/>
-          </a:xfrm>
-          <a:prstGeom prst="rect">
-            <a:avLst/>
-          </a:prstGeom>
-        </p:spPr>
-        <p:txBody>
-          <a:bodyPr vert="horz" lIns="91440" tIns="45720" rIns="91440" bIns="45720" rtlCol="0">
-            <a:normAutofit/>
-          </a:bodyPr>
-          <a:lstStyle>
-            <a:lvl1pPr marL="228600" indent="-228600" algn="l" defTabSz="914400" rtl="0" eaLnBrk="1" latinLnBrk="0" hangingPunct="1">
-              <a:lnSpc>
-                <a:spcPct val="90000"/>
-              </a:lnSpc>
-              <a:spcBef>
-                <a:spcPts val="1000"/>
-              </a:spcBef>
-              <a:buFont typeface="Arial" panose="020B0604020202020204" pitchFamily="34" charset="0"/>
-              <a:buChar char="•"/>
-              <a:defRPr sz="2800" kern="1200">
-                <a:solidFill>
-                  <a:schemeClr val="tx1"/>
-                </a:solidFill>
-                <a:latin typeface="+mn-lt"/>
-                <a:ea typeface="+mn-ea"/>
-                <a:cs typeface="+mn-cs"/>
-              </a:defRPr>
-            </a:lvl1pPr>
-            <a:lvl2pPr marL="685800" indent="-228600" algn="l" defTabSz="914400" rtl="0" eaLnBrk="1" latinLnBrk="0" hangingPunct="1">
-              <a:lnSpc>
-                <a:spcPct val="90000"/>
-              </a:lnSpc>
-              <a:spcBef>
-                <a:spcPts val="500"/>
-              </a:spcBef>
-              <a:buFont typeface="Arial" panose="020B0604020202020204" pitchFamily="34" charset="0"/>
-              <a:buChar char="•"/>
-              <a:defRPr sz="2400" kern="1200">
-                <a:solidFill>
-                  <a:schemeClr val="tx1"/>
-                </a:solidFill>
-                <a:latin typeface="+mn-lt"/>
-                <a:ea typeface="+mn-ea"/>
-                <a:cs typeface="+mn-cs"/>
-              </a:defRPr>
-            </a:lvl2pPr>
-            <a:lvl3pPr marL="1143000" indent="-228600" algn="l" defTabSz="914400" rtl="0" eaLnBrk="1" latinLnBrk="0" hangingPunct="1">
-              <a:lnSpc>
-                <a:spcPct val="90000"/>
-              </a:lnSpc>
-              <a:spcBef>
-                <a:spcPts val="500"/>
-              </a:spcBef>
-              <a:buFont typeface="Arial" panose="020B0604020202020204" pitchFamily="34" charset="0"/>
-              <a:buChar char="•"/>
-              <a:defRPr sz="2000" kern="1200">
-                <a:solidFill>
-                  <a:schemeClr val="tx1"/>
-                </a:solidFill>
-                <a:latin typeface="+mn-lt"/>
-                <a:ea typeface="+mn-ea"/>
-                <a:cs typeface="+mn-cs"/>
-              </a:defRPr>
-            </a:lvl3pPr>
-            <a:lvl4pPr marL="1600200" indent="-228600" algn="l" defTabSz="914400" rtl="0" eaLnBrk="1" latinLnBrk="0" hangingPunct="1">
-              <a:lnSpc>
-                <a:spcPct val="90000"/>
-              </a:lnSpc>
-              <a:spcBef>
-                <a:spcPts val="500"/>
-              </a:spcBef>
-              <a:buFont typeface="Arial" panose="020B0604020202020204" pitchFamily="34" charset="0"/>
-              <a:buChar char="•"/>
-              <a:defRPr sz="1800" kern="1200">
-                <a:solidFill>
-                  <a:schemeClr val="tx1"/>
-                </a:solidFill>
-                <a:latin typeface="+mn-lt"/>
-                <a:ea typeface="+mn-ea"/>
-                <a:cs typeface="+mn-cs"/>
-              </a:defRPr>
-            </a:lvl4pPr>
-            <a:lvl5pPr marL="2057400" indent="-228600" algn="l" defTabSz="914400" rtl="0" eaLnBrk="1" latinLnBrk="0" hangingPunct="1">
-              <a:lnSpc>
-                <a:spcPct val="90000"/>
-              </a:lnSpc>
-              <a:spcBef>
-                <a:spcPts val="500"/>
-              </a:spcBef>
-              <a:buFont typeface="Arial" panose="020B0604020202020204" pitchFamily="34" charset="0"/>
-              <a:buChar char="•"/>
-              <a:defRPr sz="1800" kern="1200">
-                <a:solidFill>
-                  <a:schemeClr val="tx1"/>
-                </a:solidFill>
-                <a:latin typeface="+mn-lt"/>
-                <a:ea typeface="+mn-ea"/>
-                <a:cs typeface="+mn-cs"/>
-              </a:defRPr>
-            </a:lvl5pPr>
-            <a:lvl6pPr marL="2514600" indent="-228600" algn="l" defTabSz="914400" rtl="0" eaLnBrk="1" latinLnBrk="0" hangingPunct="1">
-              <a:lnSpc>
-                <a:spcPct val="90000"/>
-              </a:lnSpc>
-              <a:spcBef>
-                <a:spcPts val="500"/>
-              </a:spcBef>
-              <a:buFont typeface="Arial" panose="020B0604020202020204" pitchFamily="34" charset="0"/>
-              <a:buChar char="•"/>
-              <a:defRPr sz="1800" kern="1200">
-                <a:solidFill>
-                  <a:schemeClr val="tx1"/>
-                </a:solidFill>
-                <a:latin typeface="+mn-lt"/>
-                <a:ea typeface="+mn-ea"/>
-                <a:cs typeface="+mn-cs"/>
-              </a:defRPr>
-            </a:lvl6pPr>
-            <a:lvl7pPr marL="2971800" indent="-228600" algn="l" defTabSz="914400" rtl="0" eaLnBrk="1" latinLnBrk="0" hangingPunct="1">
-              <a:lnSpc>
-                <a:spcPct val="90000"/>
-              </a:lnSpc>
-              <a:spcBef>
-                <a:spcPts val="500"/>
-              </a:spcBef>
-              <a:buFont typeface="Arial" panose="020B0604020202020204" pitchFamily="34" charset="0"/>
-              <a:buChar char="•"/>
-              <a:defRPr sz="1800" kern="1200">
-                <a:solidFill>
-                  <a:schemeClr val="tx1"/>
-                </a:solidFill>
-                <a:latin typeface="+mn-lt"/>
-                <a:ea typeface="+mn-ea"/>
-                <a:cs typeface="+mn-cs"/>
-              </a:defRPr>
-            </a:lvl7pPr>
-            <a:lvl8pPr marL="3429000" indent="-228600" algn="l" defTabSz="914400" rtl="0" eaLnBrk="1" latinLnBrk="0" hangingPunct="1">
-              <a:lnSpc>
-                <a:spcPct val="90000"/>
-              </a:lnSpc>
-              <a:spcBef>
-                <a:spcPts val="500"/>
-              </a:spcBef>
-              <a:buFont typeface="Arial" panose="020B0604020202020204" pitchFamily="34" charset="0"/>
-              <a:buChar char="•"/>
-              <a:defRPr sz="1800" kern="1200">
-                <a:solidFill>
-                  <a:schemeClr val="tx1"/>
-                </a:solidFill>
-                <a:latin typeface="+mn-lt"/>
-                <a:ea typeface="+mn-ea"/>
-                <a:cs typeface="+mn-cs"/>
-              </a:defRPr>
-            </a:lvl8pPr>
-            <a:lvl9pPr marL="3886200" indent="-228600" algn="l" defTabSz="914400" rtl="0" eaLnBrk="1" latinLnBrk="0" hangingPunct="1">
-              <a:lnSpc>
-                <a:spcPct val="90000"/>
-              </a:lnSpc>
-              <a:spcBef>
-                <a:spcPts val="500"/>
-              </a:spcBef>
-              <a:buFont typeface="Arial" panose="020B0604020202020204" pitchFamily="34" charset="0"/>
-              <a:buChar char="•"/>
-              <a:defRPr sz="1800" kern="1200">
-                <a:solidFill>
-                  <a:schemeClr val="tx1"/>
-                </a:solidFill>
-                <a:latin typeface="+mn-lt"/>
-                <a:ea typeface="+mn-ea"/>
-                <a:cs typeface="+mn-cs"/>
-              </a:defRPr>
-            </a:lvl9pPr>
-          </a:lstStyle>
-          <a:p>
-            <a:pPr marL="0" indent="0">
-              <a:buNone/>
-            </a:pPr>
-            <a:r>
-              <a:rPr lang="en-US" sz="2000" b="1" dirty="0"/>
-              <a:t>1. Linearity: </a:t>
-            </a:r>
-          </a:p>
-          <a:p>
-            <a:r>
-              <a:rPr lang="en-US" sz="2000" dirty="0"/>
-              <a:t>The independent and dependent variables have a linear relationship with one another. </a:t>
-            </a:r>
-          </a:p>
-          <a:p>
-            <a:r>
-              <a:rPr lang="en-US" sz="2000" dirty="0"/>
-              <a:t>This implies that changes in the dependent variable follow those in the independent variable(s) in a linear fashion. </a:t>
-            </a:r>
-          </a:p>
-          <a:p>
-            <a:r>
-              <a:rPr lang="en-US" sz="2000" dirty="0"/>
-              <a:t>This means that there should be a straight line that can be drawn through the data points. </a:t>
-            </a:r>
-          </a:p>
-          <a:p>
-            <a:r>
-              <a:rPr lang="en-US" sz="2000" dirty="0"/>
-              <a:t>If the relationship is not linear, then linear regression will not be an accurate model.</a:t>
-            </a:r>
-          </a:p>
-        </p:txBody>
-      </p:sp>
-    </p:spTree>
-    <p:extLst>
-      <p:ext uri="{BB962C8B-B14F-4D97-AF65-F5344CB8AC3E}">
-        <p14:creationId xmlns:p14="http://schemas.microsoft.com/office/powerpoint/2010/main" val="2067025602"/>
-      </p:ext>
-    </p:extLst>
-  </p:cSld>
-  <p:clrMapOvr>
-    <a:masterClrMapping/>
-  </p:clrMapOvr>
-</p:sld>
-</file>
-
-<file path=ppt/slides/slide22.xml><?xml version="1.0" encoding="utf-8"?>
-<p:sld xmlns:a="http://schemas.openxmlformats.org/drawingml/2006/main" xmlns:r="http://schemas.openxmlformats.org/officeDocument/2006/relationships" xmlns:p="http://schemas.openxmlformats.org/presentationml/2006/main">
-  <p:cSld>
-    <p:spTree>
-      <p:nvGrpSpPr>
-        <p:cNvPr id="1" name="">
-          <a:extLst>
-            <a:ext uri="{FF2B5EF4-FFF2-40B4-BE49-F238E27FC236}">
-              <a16:creationId xmlns:a16="http://schemas.microsoft.com/office/drawing/2014/main" id="{55E7488D-378D-04DB-274E-8070AF77B2F8}"/>
-            </a:ext>
-          </a:extLst>
-        </p:cNvPr>
-        <p:cNvGrpSpPr/>
-        <p:nvPr/>
-      </p:nvGrpSpPr>
-      <p:grpSpPr>
-        <a:xfrm>
-          <a:off x="0" y="0"/>
-          <a:ext cx="0" cy="0"/>
-          <a:chOff x="0" y="0"/>
-          <a:chExt cx="0" cy="0"/>
-        </a:xfrm>
-      </p:grpSpPr>
-      <p:sp>
-        <p:nvSpPr>
-          <p:cNvPr id="2" name="Content Placeholder 1">
-            <a:extLst>
-              <a:ext uri="{FF2B5EF4-FFF2-40B4-BE49-F238E27FC236}">
-                <a16:creationId xmlns:a16="http://schemas.microsoft.com/office/drawing/2014/main" id="{E4639E90-EC50-1142-F307-1730254FA4B7}"/>
-              </a:ext>
-            </a:extLst>
-          </p:cNvPr>
-          <p:cNvSpPr>
-            <a:spLocks noGrp="1"/>
-          </p:cNvSpPr>
-          <p:nvPr>
-            <p:ph idx="1"/>
-          </p:nvPr>
-        </p:nvSpPr>
-        <p:spPr>
-          <a:xfrm>
-            <a:off x="838200" y="1633491"/>
-            <a:ext cx="10515600" cy="2777144"/>
-          </a:xfrm>
-        </p:spPr>
-        <p:txBody>
-          <a:bodyPr>
-            <a:normAutofit/>
-          </a:bodyPr>
-          <a:lstStyle/>
-          <a:p>
-            <a:pPr marL="0" indent="0">
-              <a:buNone/>
-            </a:pPr>
-            <a:r>
-              <a:rPr lang="en-US" sz="2000" b="1" dirty="0"/>
-              <a:t>2. Independence: </a:t>
-            </a:r>
-            <a:r>
-              <a:rPr lang="en-US" sz="2000" dirty="0"/>
-              <a:t>The observations in the dataset must be independent, meaning the value of the dependent variable for one observation should not be influenced by the value of another. If this condition is violated, linear regression may produce inaccurate results.</a:t>
-            </a:r>
-          </a:p>
-          <a:p>
-            <a:pPr marL="0" indent="0">
-              <a:buNone/>
-            </a:pPr>
-            <a:r>
-              <a:rPr lang="en-US" sz="2000" b="1" dirty="0"/>
-              <a:t>3. Homoscedasticity: </a:t>
-            </a:r>
-            <a:r>
-              <a:rPr lang="en-US" sz="2000" dirty="0"/>
-              <a:t>The variance of the errors should be constant across all levels of the independent variable(s). This means that changes in the independent variable(s) should not affect the spread of the errors. If the error variance is not constant (heteroscedasticity), the linear regression model may not be reliable.</a:t>
-            </a:r>
-          </a:p>
-          <a:p>
-            <a:endParaRPr lang="en-US" sz="2000" dirty="0"/>
-          </a:p>
-        </p:txBody>
-      </p:sp>
-      <p:sp>
-        <p:nvSpPr>
-          <p:cNvPr id="3" name="Title 2">
-            <a:extLst>
-              <a:ext uri="{FF2B5EF4-FFF2-40B4-BE49-F238E27FC236}">
-                <a16:creationId xmlns:a16="http://schemas.microsoft.com/office/drawing/2014/main" id="{9CE14663-F603-8E9B-380B-9F29A5C89810}"/>
-              </a:ext>
-            </a:extLst>
-          </p:cNvPr>
-          <p:cNvSpPr>
-            <a:spLocks noGrp="1"/>
-          </p:cNvSpPr>
-          <p:nvPr>
-            <p:ph type="title"/>
-          </p:nvPr>
-        </p:nvSpPr>
-        <p:spPr/>
-        <p:txBody>
-          <a:bodyPr/>
-          <a:lstStyle/>
-          <a:p>
-            <a:r>
-              <a:rPr lang="en-US" dirty="0"/>
-              <a:t>Assumptions of Simple Linear Regression</a:t>
-            </a:r>
-          </a:p>
-        </p:txBody>
-      </p:sp>
-      <p:pic>
-        <p:nvPicPr>
-          <p:cNvPr id="5" name="Picture 4">
-            <a:extLst>
-              <a:ext uri="{FF2B5EF4-FFF2-40B4-BE49-F238E27FC236}">
-                <a16:creationId xmlns:a16="http://schemas.microsoft.com/office/drawing/2014/main" id="{A8CF5184-C11D-A684-D4E9-FA1F42D7D64D}"/>
-              </a:ext>
-            </a:extLst>
-          </p:cNvPr>
-          <p:cNvPicPr>
-            <a:picLocks noChangeAspect="1"/>
-          </p:cNvPicPr>
-          <p:nvPr/>
-        </p:nvPicPr>
-        <p:blipFill>
-          <a:blip r:embed="rId2"/>
-          <a:stretch>
-            <a:fillRect/>
-          </a:stretch>
-        </p:blipFill>
-        <p:spPr>
-          <a:xfrm>
-            <a:off x="1349679" y="4410635"/>
-            <a:ext cx="3479753" cy="2180382"/>
-          </a:xfrm>
-          <a:prstGeom prst="rect">
-            <a:avLst/>
-          </a:prstGeom>
-        </p:spPr>
-      </p:pic>
-      <p:pic>
-        <p:nvPicPr>
-          <p:cNvPr id="7" name="Picture 6">
-            <a:extLst>
-              <a:ext uri="{FF2B5EF4-FFF2-40B4-BE49-F238E27FC236}">
-                <a16:creationId xmlns:a16="http://schemas.microsoft.com/office/drawing/2014/main" id="{11CD6987-E88A-6289-EAA7-4A698B7CE9FF}"/>
-              </a:ext>
-            </a:extLst>
-          </p:cNvPr>
-          <p:cNvPicPr>
-            <a:picLocks noChangeAspect="1"/>
-          </p:cNvPicPr>
-          <p:nvPr/>
-        </p:nvPicPr>
-        <p:blipFill>
-          <a:blip r:embed="rId3"/>
-          <a:stretch>
-            <a:fillRect/>
-          </a:stretch>
-        </p:blipFill>
-        <p:spPr>
-          <a:xfrm>
-            <a:off x="6985330" y="4225444"/>
-            <a:ext cx="3633052" cy="2550765"/>
-          </a:xfrm>
-          <a:prstGeom prst="rect">
-            <a:avLst/>
-          </a:prstGeom>
-        </p:spPr>
-      </p:pic>
-    </p:spTree>
-    <p:extLst>
-      <p:ext uri="{BB962C8B-B14F-4D97-AF65-F5344CB8AC3E}">
-        <p14:creationId xmlns:p14="http://schemas.microsoft.com/office/powerpoint/2010/main" val="1559017199"/>
-      </p:ext>
-    </p:extLst>
-  </p:cSld>
-  <p:clrMapOvr>
-    <a:masterClrMapping/>
-  </p:clrMapOvr>
-</p:sld>
-</file>
-
-<file path=ppt/slides/slide23.xml><?xml version="1.0" encoding="utf-8"?>
-<p:sld xmlns:a="http://schemas.openxmlformats.org/drawingml/2006/main" xmlns:r="http://schemas.openxmlformats.org/officeDocument/2006/relationships" xmlns:p="http://schemas.openxmlformats.org/presentationml/2006/main">
-  <p:cSld>
-    <p:spTree>
-      <p:nvGrpSpPr>
-        <p:cNvPr id="1" name="">
-          <a:extLst>
-            <a:ext uri="{FF2B5EF4-FFF2-40B4-BE49-F238E27FC236}">
-              <a16:creationId xmlns:a16="http://schemas.microsoft.com/office/drawing/2014/main" id="{5900C09F-F48B-B9D4-D4BA-03E1293B4B46}"/>
-            </a:ext>
-          </a:extLst>
-        </p:cNvPr>
-        <p:cNvGrpSpPr/>
-        <p:nvPr/>
-      </p:nvGrpSpPr>
-      <p:grpSpPr>
-        <a:xfrm>
-          <a:off x="0" y="0"/>
-          <a:ext cx="0" cy="0"/>
-          <a:chOff x="0" y="0"/>
-          <a:chExt cx="0" cy="0"/>
-        </a:xfrm>
-      </p:grpSpPr>
-      <p:sp>
-        <p:nvSpPr>
-          <p:cNvPr id="2" name="Content Placeholder 1">
-            <a:extLst>
-              <a:ext uri="{FF2B5EF4-FFF2-40B4-BE49-F238E27FC236}">
-                <a16:creationId xmlns:a16="http://schemas.microsoft.com/office/drawing/2014/main" id="{AAD33A44-4738-B463-10DB-B09ADF5D976F}"/>
-              </a:ext>
-            </a:extLst>
-          </p:cNvPr>
-          <p:cNvSpPr>
-            <a:spLocks noGrp="1"/>
-          </p:cNvSpPr>
-          <p:nvPr>
-            <p:ph idx="1"/>
-          </p:nvPr>
-        </p:nvSpPr>
-        <p:spPr>
-          <a:xfrm>
-            <a:off x="838201" y="1633491"/>
-            <a:ext cx="10515600" cy="1548980"/>
-          </a:xfrm>
-        </p:spPr>
-        <p:txBody>
-          <a:bodyPr>
-            <a:normAutofit/>
-          </a:bodyPr>
-          <a:lstStyle/>
-          <a:p>
-            <a:pPr marL="0" indent="0">
-              <a:buNone/>
-            </a:pPr>
-            <a:r>
-              <a:rPr lang="en-US" sz="2000" b="1" dirty="0"/>
-              <a:t>4. Normality: </a:t>
-            </a:r>
-            <a:r>
-              <a:rPr lang="en-US" sz="2000" dirty="0"/>
-              <a:t>The residuals should be normally distributed. This means that the residuals should follow a bell-shaped curve. If the residuals are not normally distributed, then linear regression will not be an accurate model.</a:t>
-            </a:r>
-          </a:p>
-        </p:txBody>
-      </p:sp>
-      <p:sp>
-        <p:nvSpPr>
-          <p:cNvPr id="3" name="Title 2">
-            <a:extLst>
-              <a:ext uri="{FF2B5EF4-FFF2-40B4-BE49-F238E27FC236}">
-                <a16:creationId xmlns:a16="http://schemas.microsoft.com/office/drawing/2014/main" id="{975AB37D-8C19-77E5-43AF-90557368B563}"/>
-              </a:ext>
-            </a:extLst>
-          </p:cNvPr>
-          <p:cNvSpPr>
-            <a:spLocks noGrp="1"/>
-          </p:cNvSpPr>
-          <p:nvPr>
-            <p:ph type="title"/>
-          </p:nvPr>
-        </p:nvSpPr>
-        <p:spPr/>
-        <p:txBody>
-          <a:bodyPr/>
-          <a:lstStyle/>
-          <a:p>
-            <a:r>
-              <a:rPr lang="en-US" dirty="0"/>
-              <a:t>Assumptions of Simple Linear Regression</a:t>
-            </a:r>
-          </a:p>
-        </p:txBody>
-      </p:sp>
-      <p:pic>
-        <p:nvPicPr>
-          <p:cNvPr id="7" name="Picture 6">
-            <a:extLst>
-              <a:ext uri="{FF2B5EF4-FFF2-40B4-BE49-F238E27FC236}">
-                <a16:creationId xmlns:a16="http://schemas.microsoft.com/office/drawing/2014/main" id="{673162F8-4616-4609-2A8E-E1582A467BE4}"/>
-              </a:ext>
-            </a:extLst>
-          </p:cNvPr>
-          <p:cNvPicPr>
-            <a:picLocks noChangeAspect="1"/>
-          </p:cNvPicPr>
-          <p:nvPr/>
-        </p:nvPicPr>
-        <p:blipFill>
-          <a:blip r:embed="rId2"/>
-          <a:stretch>
-            <a:fillRect/>
-          </a:stretch>
-        </p:blipFill>
-        <p:spPr>
-          <a:xfrm>
-            <a:off x="947472" y="3008749"/>
-            <a:ext cx="4806485" cy="3760694"/>
-          </a:xfrm>
-          <a:prstGeom prst="rect">
-            <a:avLst/>
-          </a:prstGeom>
-        </p:spPr>
-      </p:pic>
-      <p:pic>
-        <p:nvPicPr>
-          <p:cNvPr id="9" name="Picture 8">
-            <a:extLst>
-              <a:ext uri="{FF2B5EF4-FFF2-40B4-BE49-F238E27FC236}">
-                <a16:creationId xmlns:a16="http://schemas.microsoft.com/office/drawing/2014/main" id="{B7380879-9916-D124-76D4-6D34DE2471F7}"/>
-              </a:ext>
-            </a:extLst>
-          </p:cNvPr>
-          <p:cNvPicPr>
-            <a:picLocks noChangeAspect="1"/>
-          </p:cNvPicPr>
-          <p:nvPr/>
-        </p:nvPicPr>
-        <p:blipFill>
-          <a:blip r:embed="rId3"/>
-          <a:stretch>
-            <a:fillRect/>
-          </a:stretch>
-        </p:blipFill>
-        <p:spPr>
-          <a:xfrm>
-            <a:off x="6659395" y="3182471"/>
-            <a:ext cx="4468589" cy="3292326"/>
-          </a:xfrm>
-          <a:prstGeom prst="rect">
-            <a:avLst/>
-          </a:prstGeom>
-        </p:spPr>
-      </p:pic>
-    </p:spTree>
-    <p:extLst>
-      <p:ext uri="{BB962C8B-B14F-4D97-AF65-F5344CB8AC3E}">
-        <p14:creationId xmlns:p14="http://schemas.microsoft.com/office/powerpoint/2010/main" val="2575217795"/>
-      </p:ext>
-    </p:extLst>
-  </p:cSld>
-  <p:clrMapOvr>
-    <a:masterClrMapping/>
-  </p:clrMapOvr>
-</p:sld>
-</file>
-
-<file path=ppt/slides/slide24.xml><?xml version="1.0" encoding="utf-8"?>
-<p:sld xmlns:a="http://schemas.openxmlformats.org/drawingml/2006/main" xmlns:r="http://schemas.openxmlformats.org/officeDocument/2006/relationships" xmlns:p="http://schemas.openxmlformats.org/presentationml/2006/main">
-  <p:cSld>
-    <p:spTree>
-      <p:nvGrpSpPr>
-        <p:cNvPr id="1" name="">
-          <a:extLst>
-            <a:ext uri="{FF2B5EF4-FFF2-40B4-BE49-F238E27FC236}">
-              <a16:creationId xmlns:a16="http://schemas.microsoft.com/office/drawing/2014/main" id="{5FF87552-A00A-A567-4B58-79A70A4BA61B}"/>
-            </a:ext>
-          </a:extLst>
-        </p:cNvPr>
-        <p:cNvGrpSpPr/>
-        <p:nvPr/>
-      </p:nvGrpSpPr>
-      <p:grpSpPr>
-        <a:xfrm>
-          <a:off x="0" y="0"/>
-          <a:ext cx="0" cy="0"/>
-          <a:chOff x="0" y="0"/>
-          <a:chExt cx="0" cy="0"/>
-        </a:xfrm>
-      </p:grpSpPr>
-      <p:sp>
-        <p:nvSpPr>
-          <p:cNvPr id="2" name="Content Placeholder 1">
-            <a:extLst>
-              <a:ext uri="{FF2B5EF4-FFF2-40B4-BE49-F238E27FC236}">
-                <a16:creationId xmlns:a16="http://schemas.microsoft.com/office/drawing/2014/main" id="{4E795974-C30C-A8F4-FC12-5BE5FE355A52}"/>
-              </a:ext>
-            </a:extLst>
-          </p:cNvPr>
-          <p:cNvSpPr>
-            <a:spLocks noGrp="1"/>
-          </p:cNvSpPr>
-          <p:nvPr>
-            <p:ph idx="1"/>
-          </p:nvPr>
-        </p:nvSpPr>
-        <p:spPr>
-          <a:xfrm>
-            <a:off x="838200" y="1633491"/>
-            <a:ext cx="10515600" cy="5131294"/>
-          </a:xfrm>
-        </p:spPr>
-        <p:txBody>
-          <a:bodyPr>
-            <a:normAutofit/>
-          </a:bodyPr>
-          <a:lstStyle/>
-          <a:p>
-            <a:pPr marL="0" indent="0">
-              <a:buNone/>
-            </a:pPr>
-            <a:r>
-              <a:rPr lang="en-US" sz="2000" b="1" dirty="0"/>
-              <a:t>5. No Multicollinearity </a:t>
-            </a:r>
-          </a:p>
-          <a:p>
-            <a:r>
-              <a:rPr lang="en-US" sz="2000" dirty="0"/>
-              <a:t>The independent variables should not be highly correlated with each other. </a:t>
-            </a:r>
-          </a:p>
-          <a:p>
-            <a:r>
-              <a:rPr lang="en-US" sz="2000" dirty="0"/>
-              <a:t>Multicollinearity occurs when two or more independent variables are strongly related, making it difficult to isolate the effect of each variable on the dependent variable.</a:t>
-            </a:r>
-          </a:p>
-          <a:p>
-            <a:r>
-              <a:rPr lang="en-US" sz="2000" dirty="0"/>
-              <a:t>If multicollinearity exists, it can lead to inaccurate results in multiple linear regression.</a:t>
-            </a:r>
-          </a:p>
-          <a:p>
-            <a:r>
-              <a:rPr lang="en-US" sz="2000" dirty="0"/>
-              <a:t>For multiple linear regression, multicollinearity among independent variables can be assessed using the Variance Inflation Factor (VIF). A VIF value greater than 10 indicates high multicollinearity.</a:t>
-            </a:r>
-          </a:p>
-        </p:txBody>
-      </p:sp>
-      <p:sp>
-        <p:nvSpPr>
-          <p:cNvPr id="3" name="Title 2">
-            <a:extLst>
-              <a:ext uri="{FF2B5EF4-FFF2-40B4-BE49-F238E27FC236}">
-                <a16:creationId xmlns:a16="http://schemas.microsoft.com/office/drawing/2014/main" id="{927ED564-A8B2-AAC7-C34A-1B841519BD48}"/>
-              </a:ext>
-            </a:extLst>
-          </p:cNvPr>
-          <p:cNvSpPr>
-            <a:spLocks noGrp="1"/>
-          </p:cNvSpPr>
-          <p:nvPr>
-            <p:ph type="title"/>
-          </p:nvPr>
-        </p:nvSpPr>
-        <p:spPr/>
-        <p:txBody>
-          <a:bodyPr/>
-          <a:lstStyle/>
-          <a:p>
-            <a:r>
-              <a:rPr lang="en-US" dirty="0"/>
-              <a:t>Assumptions of Simple Linear Regression</a:t>
-            </a:r>
-          </a:p>
-        </p:txBody>
-      </p:sp>
-    </p:spTree>
-    <p:extLst>
-      <p:ext uri="{BB962C8B-B14F-4D97-AF65-F5344CB8AC3E}">
-        <p14:creationId xmlns:p14="http://schemas.microsoft.com/office/powerpoint/2010/main" val="1558611893"/>
+        <p14:creationId xmlns:p14="http://schemas.microsoft.com/office/powerpoint/2010/main" val="2357395440"/>
       </p:ext>
     </p:extLst>
   </p:cSld>
@@ -13694,6 +13736,15 @@
 </file>
 
 <file path=customXml/item1.xml><?xml version="1.0" encoding="utf-8"?>
+<?mso-contentType ?>
+<FormTemplates xmlns="http://schemas.microsoft.com/sharepoint/v3/contenttype/forms">
+  <Display>DocumentLibraryForm</Display>
+  <Edit>DocumentLibraryForm</Edit>
+  <New>DocumentLibraryForm</New>
+</FormTemplates>
+</file>
+
+<file path=customXml/item2.xml><?xml version="1.0" encoding="utf-8"?>
 <ct:contentTypeSchema xmlns:ct="http://schemas.microsoft.com/office/2006/metadata/contentType" xmlns:ma="http://schemas.microsoft.com/office/2006/metadata/properties/metaAttributes" ct:_="" ma:_="" ma:contentTypeName="Document" ma:contentTypeID="0x010100D30DB0B4DCD4994BA0B53B90F48248FB" ma:contentTypeVersion="17" ma:contentTypeDescription="Create a new document." ma:contentTypeScope="" ma:versionID="89b596077de0219f935a6ab711f2d0ee">
   <xsd:schema xmlns:xsd="http://www.w3.org/2001/XMLSchema" xmlns:xs="http://www.w3.org/2001/XMLSchema" xmlns:p="http://schemas.microsoft.com/office/2006/metadata/properties" xmlns:ns3="5d9e8ea6-d7cf-4c00-b931-0c0027af1451" xmlns:ns4="24b8453d-154c-4c63-97d1-80f7846f6991" targetNamespace="http://schemas.microsoft.com/office/2006/metadata/properties" ma:root="true" ma:fieldsID="cd616adf96839ca32a36dfb6e4534def" ns3:_="" ns4:_="">
     <xsd:import namespace="5d9e8ea6-d7cf-4c00-b931-0c0027af1451"/>
@@ -13940,15 +13991,6 @@
 </ct:contentTypeSchema>
 </file>
 
-<file path=customXml/item2.xml><?xml version="1.0" encoding="utf-8"?>
-<?mso-contentType ?>
-<FormTemplates xmlns="http://schemas.microsoft.com/sharepoint/v3/contenttype/forms">
-  <Display>DocumentLibraryForm</Display>
-  <Edit>DocumentLibraryForm</Edit>
-  <New>DocumentLibraryForm</New>
-</FormTemplates>
-</file>
-
 <file path=customXml/item3.xml><?xml version="1.0" encoding="utf-8"?>
 <p:properties xmlns:p="http://schemas.microsoft.com/office/2006/metadata/properties" xmlns:xsi="http://www.w3.org/2001/XMLSchema-instance" xmlns:pc="http://schemas.microsoft.com/office/infopath/2007/PartnerControls">
   <documentManagement>
@@ -13958,6 +14000,14 @@
 </file>
 
 <file path=customXml/itemProps1.xml><?xml version="1.0" encoding="utf-8"?>
+<ds:datastoreItem xmlns:ds="http://schemas.openxmlformats.org/officeDocument/2006/customXml" ds:itemID="{45A00539-F935-4DAE-994B-29A86868AB4E}">
+  <ds:schemaRefs>
+    <ds:schemaRef ds:uri="http://schemas.microsoft.com/sharepoint/v3/contenttype/forms"/>
+  </ds:schemaRefs>
+</ds:datastoreItem>
+</file>
+
+<file path=customXml/itemProps2.xml><?xml version="1.0" encoding="utf-8"?>
 <ds:datastoreItem xmlns:ds="http://schemas.openxmlformats.org/officeDocument/2006/customXml" ds:itemID="{E49744A2-A4E7-4F10-8EA8-A7278CF8AA73}">
   <ds:schemaRefs>
     <ds:schemaRef ds:uri="http://schemas.microsoft.com/office/2006/metadata/contentType"/>
@@ -13972,14 +14022,6 @@
     <ds:schemaRef ds:uri="http://purl.org/dc/elements/1.1/"/>
     <ds:schemaRef ds:uri="http://purl.org/dc/terms/"/>
     <ds:schemaRef ds:uri="http://schemas.microsoft.com/internal/obd"/>
-  </ds:schemaRefs>
-</ds:datastoreItem>
-</file>
-
-<file path=customXml/itemProps2.xml><?xml version="1.0" encoding="utf-8"?>
-<ds:datastoreItem xmlns:ds="http://schemas.openxmlformats.org/officeDocument/2006/customXml" ds:itemID="{45A00539-F935-4DAE-994B-29A86868AB4E}">
-  <ds:schemaRefs>
-    <ds:schemaRef ds:uri="http://schemas.microsoft.com/sharepoint/v3/contenttype/forms"/>
   </ds:schemaRefs>
 </ds:datastoreItem>
 </file>

--- a/20243/Part 2-Regression/simple linear regression slides.pptx
+++ b/20243/Part 2-Regression/simple linear regression slides.pptx
@@ -7,28 +7,31 @@
   <p:sldIdLst>
     <p:sldId id="455" r:id="rId5"/>
     <p:sldId id="478" r:id="rId6"/>
-    <p:sldId id="257" r:id="rId7"/>
-    <p:sldId id="477" r:id="rId8"/>
-    <p:sldId id="457" r:id="rId9"/>
-    <p:sldId id="458" r:id="rId10"/>
-    <p:sldId id="459" r:id="rId11"/>
-    <p:sldId id="479" r:id="rId12"/>
-    <p:sldId id="480" r:id="rId13"/>
-    <p:sldId id="484" r:id="rId14"/>
-    <p:sldId id="481" r:id="rId15"/>
-    <p:sldId id="461" r:id="rId16"/>
-    <p:sldId id="462" r:id="rId17"/>
-    <p:sldId id="463" r:id="rId18"/>
-    <p:sldId id="465" r:id="rId19"/>
-    <p:sldId id="464" r:id="rId20"/>
-    <p:sldId id="466" r:id="rId21"/>
-    <p:sldId id="476" r:id="rId22"/>
-    <p:sldId id="482" r:id="rId23"/>
-    <p:sldId id="483" r:id="rId24"/>
-    <p:sldId id="486" r:id="rId25"/>
-    <p:sldId id="485" r:id="rId26"/>
-    <p:sldId id="487" r:id="rId27"/>
-    <p:sldId id="488" r:id="rId28"/>
+    <p:sldId id="555" r:id="rId7"/>
+    <p:sldId id="556" r:id="rId8"/>
+    <p:sldId id="557" r:id="rId9"/>
+    <p:sldId id="257" r:id="rId10"/>
+    <p:sldId id="477" r:id="rId11"/>
+    <p:sldId id="457" r:id="rId12"/>
+    <p:sldId id="458" r:id="rId13"/>
+    <p:sldId id="459" r:id="rId14"/>
+    <p:sldId id="479" r:id="rId15"/>
+    <p:sldId id="480" r:id="rId16"/>
+    <p:sldId id="484" r:id="rId17"/>
+    <p:sldId id="481" r:id="rId18"/>
+    <p:sldId id="461" r:id="rId19"/>
+    <p:sldId id="462" r:id="rId20"/>
+    <p:sldId id="463" r:id="rId21"/>
+    <p:sldId id="465" r:id="rId22"/>
+    <p:sldId id="464" r:id="rId23"/>
+    <p:sldId id="466" r:id="rId24"/>
+    <p:sldId id="476" r:id="rId25"/>
+    <p:sldId id="482" r:id="rId26"/>
+    <p:sldId id="483" r:id="rId27"/>
+    <p:sldId id="486" r:id="rId28"/>
+    <p:sldId id="485" r:id="rId29"/>
+    <p:sldId id="487" r:id="rId30"/>
+    <p:sldId id="488" r:id="rId31"/>
   </p:sldIdLst>
   <p:sldSz cx="12192000" cy="6858000"/>
   <p:notesSz cx="6858000" cy="9144000"/>
@@ -146,6 +149,646 @@
 <file path=ppt/changesInfos/changesInfo1.xml><?xml version="1.0" encoding="utf-8"?>
 <pc:chgInfo xmlns:a="http://schemas.openxmlformats.org/drawingml/2006/main" xmlns:r="http://schemas.openxmlformats.org/officeDocument/2006/relationships" xmlns:ac="http://schemas.microsoft.com/office/drawing/2013/main/command" xmlns:pc="http://schemas.microsoft.com/office/powerpoint/2013/main/command">
   <pc:docChgLst>
+    <pc:chgData name="Mohammed Fasha" userId="cc64f42d-a1a6-4f08-b97b-0c37f877119f" providerId="ADAL" clId="{91427648-DE24-4A1A-BB79-28C1AEF5A4FD}"/>
+    <pc:docChg chg="custSel addSld delSld modSld">
+      <pc:chgData name="Mohammed Fasha" userId="cc64f42d-a1a6-4f08-b97b-0c37f877119f" providerId="ADAL" clId="{91427648-DE24-4A1A-BB79-28C1AEF5A4FD}" dt="2025-07-28T08:17:04.357" v="50" actId="1076"/>
+      <pc:docMkLst>
+        <pc:docMk/>
+      </pc:docMkLst>
+      <pc:sldChg chg="new del">
+        <pc:chgData name="Mohammed Fasha" userId="cc64f42d-a1a6-4f08-b97b-0c37f877119f" providerId="ADAL" clId="{91427648-DE24-4A1A-BB79-28C1AEF5A4FD}" dt="2025-07-28T08:05:47.549" v="3" actId="47"/>
+        <pc:sldMkLst>
+          <pc:docMk/>
+          <pc:sldMk cId="617230245" sldId="489"/>
+        </pc:sldMkLst>
+      </pc:sldChg>
+      <pc:sldChg chg="modSp add del mod">
+        <pc:chgData name="Mohammed Fasha" userId="cc64f42d-a1a6-4f08-b97b-0c37f877119f" providerId="ADAL" clId="{91427648-DE24-4A1A-BB79-28C1AEF5A4FD}" dt="2025-07-28T08:06:40.945" v="9" actId="2696"/>
+        <pc:sldMkLst>
+          <pc:docMk/>
+          <pc:sldMk cId="441270624" sldId="554"/>
+        </pc:sldMkLst>
+        <pc:spChg chg="mod">
+          <ac:chgData name="Mohammed Fasha" userId="cc64f42d-a1a6-4f08-b97b-0c37f877119f" providerId="ADAL" clId="{91427648-DE24-4A1A-BB79-28C1AEF5A4FD}" dt="2025-07-28T08:05:57.038" v="4" actId="6549"/>
+          <ac:spMkLst>
+            <pc:docMk/>
+            <pc:sldMk cId="441270624" sldId="554"/>
+            <ac:spMk id="2" creationId="{6CE15484-70F8-0665-3400-03EA635FE864}"/>
+          </ac:spMkLst>
+        </pc:spChg>
+      </pc:sldChg>
+      <pc:sldChg chg="modSp add mod">
+        <pc:chgData name="Mohammed Fasha" userId="cc64f42d-a1a6-4f08-b97b-0c37f877119f" providerId="ADAL" clId="{91427648-DE24-4A1A-BB79-28C1AEF5A4FD}" dt="2025-07-28T08:06:39.132" v="6" actId="27636"/>
+        <pc:sldMkLst>
+          <pc:docMk/>
+          <pc:sldMk cId="3728469856" sldId="555"/>
+        </pc:sldMkLst>
+        <pc:spChg chg="mod">
+          <ac:chgData name="Mohammed Fasha" userId="cc64f42d-a1a6-4f08-b97b-0c37f877119f" providerId="ADAL" clId="{91427648-DE24-4A1A-BB79-28C1AEF5A4FD}" dt="2025-07-28T08:06:39.132" v="6" actId="27636"/>
+          <ac:spMkLst>
+            <pc:docMk/>
+            <pc:sldMk cId="3728469856" sldId="555"/>
+            <ac:spMk id="2" creationId="{6CE15484-70F8-0665-3400-03EA635FE864}"/>
+          </ac:spMkLst>
+        </pc:spChg>
+      </pc:sldChg>
+      <pc:sldChg chg="modSp add mod">
+        <pc:chgData name="Mohammed Fasha" userId="cc64f42d-a1a6-4f08-b97b-0c37f877119f" providerId="ADAL" clId="{91427648-DE24-4A1A-BB79-28C1AEF5A4FD}" dt="2025-07-28T08:06:39.220" v="7" actId="27636"/>
+        <pc:sldMkLst>
+          <pc:docMk/>
+          <pc:sldMk cId="1528868272" sldId="556"/>
+        </pc:sldMkLst>
+        <pc:spChg chg="mod">
+          <ac:chgData name="Mohammed Fasha" userId="cc64f42d-a1a6-4f08-b97b-0c37f877119f" providerId="ADAL" clId="{91427648-DE24-4A1A-BB79-28C1AEF5A4FD}" dt="2025-07-28T08:06:39.220" v="7" actId="27636"/>
+          <ac:spMkLst>
+            <pc:docMk/>
+            <pc:sldMk cId="1528868272" sldId="556"/>
+            <ac:spMk id="2" creationId="{7A175F36-413A-2EE8-A632-91E824FB290E}"/>
+          </ac:spMkLst>
+        </pc:spChg>
+      </pc:sldChg>
+      <pc:sldChg chg="addSp delSp modSp add mod">
+        <pc:chgData name="Mohammed Fasha" userId="cc64f42d-a1a6-4f08-b97b-0c37f877119f" providerId="ADAL" clId="{91427648-DE24-4A1A-BB79-28C1AEF5A4FD}" dt="2025-07-28T08:17:04.357" v="50" actId="1076"/>
+        <pc:sldMkLst>
+          <pc:docMk/>
+          <pc:sldMk cId="354603000" sldId="557"/>
+        </pc:sldMkLst>
+        <pc:spChg chg="mod">
+          <ac:chgData name="Mohammed Fasha" userId="cc64f42d-a1a6-4f08-b97b-0c37f877119f" providerId="ADAL" clId="{91427648-DE24-4A1A-BB79-28C1AEF5A4FD}" dt="2025-07-28T08:07:44.835" v="14" actId="20577"/>
+          <ac:spMkLst>
+            <pc:docMk/>
+            <pc:sldMk cId="354603000" sldId="557"/>
+            <ac:spMk id="2" creationId="{E16D6C77-9DD6-0E66-D55F-C8E1782453A7}"/>
+          </ac:spMkLst>
+        </pc:spChg>
+        <pc:spChg chg="add del">
+          <ac:chgData name="Mohammed Fasha" userId="cc64f42d-a1a6-4f08-b97b-0c37f877119f" providerId="ADAL" clId="{91427648-DE24-4A1A-BB79-28C1AEF5A4FD}" dt="2025-07-28T08:08:14.286" v="17"/>
+          <ac:spMkLst>
+            <pc:docMk/>
+            <pc:sldMk cId="354603000" sldId="557"/>
+            <ac:spMk id="4" creationId="{CC5FAFA2-5D97-45FF-9D60-CBBE31EC51C8}"/>
+          </ac:spMkLst>
+        </pc:spChg>
+        <pc:picChg chg="add del mod">
+          <ac:chgData name="Mohammed Fasha" userId="cc64f42d-a1a6-4f08-b97b-0c37f877119f" providerId="ADAL" clId="{91427648-DE24-4A1A-BB79-28C1AEF5A4FD}" dt="2025-07-28T08:16:50.333" v="44" actId="478"/>
+          <ac:picMkLst>
+            <pc:docMk/>
+            <pc:sldMk cId="354603000" sldId="557"/>
+            <ac:picMk id="6" creationId="{3C47C92A-CE56-426F-A71C-0650A9B1EE89}"/>
+          </ac:picMkLst>
+        </pc:picChg>
+        <pc:picChg chg="add mod">
+          <ac:chgData name="Mohammed Fasha" userId="cc64f42d-a1a6-4f08-b97b-0c37f877119f" providerId="ADAL" clId="{91427648-DE24-4A1A-BB79-28C1AEF5A4FD}" dt="2025-07-28T08:17:01.327" v="49" actId="14100"/>
+          <ac:picMkLst>
+            <pc:docMk/>
+            <pc:sldMk cId="354603000" sldId="557"/>
+            <ac:picMk id="8" creationId="{FD5D9391-C85B-4D3E-A702-3CD3F3C5FC78}"/>
+          </ac:picMkLst>
+        </pc:picChg>
+        <pc:picChg chg="add del mod">
+          <ac:chgData name="Mohammed Fasha" userId="cc64f42d-a1a6-4f08-b97b-0c37f877119f" providerId="ADAL" clId="{91427648-DE24-4A1A-BB79-28C1AEF5A4FD}" dt="2025-07-28T08:15:24.570" v="39" actId="478"/>
+          <ac:picMkLst>
+            <pc:docMk/>
+            <pc:sldMk cId="354603000" sldId="557"/>
+            <ac:picMk id="1028" creationId="{7AAD67E7-DF11-4232-B3DF-E83F827BB3C4}"/>
+          </ac:picMkLst>
+        </pc:picChg>
+        <pc:picChg chg="add del mod">
+          <ac:chgData name="Mohammed Fasha" userId="cc64f42d-a1a6-4f08-b97b-0c37f877119f" providerId="ADAL" clId="{91427648-DE24-4A1A-BB79-28C1AEF5A4FD}" dt="2025-07-28T08:12:55.437" v="33" actId="478"/>
+          <ac:picMkLst>
+            <pc:docMk/>
+            <pc:sldMk cId="354603000" sldId="557"/>
+            <ac:picMk id="1030" creationId="{4530B67C-9D2B-431E-A19D-A34F0A64F98E}"/>
+          </ac:picMkLst>
+        </pc:picChg>
+        <pc:picChg chg="add mod">
+          <ac:chgData name="Mohammed Fasha" userId="cc64f42d-a1a6-4f08-b97b-0c37f877119f" providerId="ADAL" clId="{91427648-DE24-4A1A-BB79-28C1AEF5A4FD}" dt="2025-07-28T08:17:04.357" v="50" actId="1076"/>
+          <ac:picMkLst>
+            <pc:docMk/>
+            <pc:sldMk cId="354603000" sldId="557"/>
+            <ac:picMk id="1032" creationId="{9E1D2373-5557-4683-A166-33F9A527E303}"/>
+          </ac:picMkLst>
+        </pc:picChg>
+        <pc:picChg chg="del">
+          <ac:chgData name="Mohammed Fasha" userId="cc64f42d-a1a6-4f08-b97b-0c37f877119f" providerId="ADAL" clId="{91427648-DE24-4A1A-BB79-28C1AEF5A4FD}" dt="2025-07-28T08:07:47.050" v="15" actId="21"/>
+          <ac:picMkLst>
+            <pc:docMk/>
+            <pc:sldMk cId="354603000" sldId="557"/>
+            <ac:picMk id="2050" creationId="{D2CFE27B-B6AF-7617-1393-D7F4BA3591AB}"/>
+          </ac:picMkLst>
+        </pc:picChg>
+        <pc:picChg chg="del">
+          <ac:chgData name="Mohammed Fasha" userId="cc64f42d-a1a6-4f08-b97b-0c37f877119f" providerId="ADAL" clId="{91427648-DE24-4A1A-BB79-28C1AEF5A4FD}" dt="2025-07-28T08:11:56.220" v="25" actId="478"/>
+          <ac:picMkLst>
+            <pc:docMk/>
+            <pc:sldMk cId="354603000" sldId="557"/>
+            <ac:picMk id="4098" creationId="{8CAFD137-093A-EC9B-8B6D-12AE8B5B6C2B}"/>
+          </ac:picMkLst>
+        </pc:picChg>
+      </pc:sldChg>
+    </pc:docChg>
+  </pc:docChgLst>
+  <pc:docChgLst>
+    <pc:chgData name="Mohammed Fasha" userId="cc64f42d-a1a6-4f08-b97b-0c37f877119f" providerId="ADAL" clId="{6B515210-E3E2-4B4B-BC10-968DB84AFC83}"/>
+    <pc:docChg chg="undo custSel addSld delSld modSld sldOrd modMainMaster">
+      <pc:chgData name="Mohammed Fasha" userId="cc64f42d-a1a6-4f08-b97b-0c37f877119f" providerId="ADAL" clId="{6B515210-E3E2-4B4B-BC10-968DB84AFC83}" dt="2025-03-12T03:08:53.710" v="1713" actId="20577"/>
+      <pc:docMkLst>
+        <pc:docMk/>
+      </pc:docMkLst>
+      <pc:sldChg chg="addSp delSp modSp mod chgLayout">
+        <pc:chgData name="Mohammed Fasha" userId="cc64f42d-a1a6-4f08-b97b-0c37f877119f" providerId="ADAL" clId="{6B515210-E3E2-4B4B-BC10-968DB84AFC83}" dt="2025-03-12T02:44:50.431" v="832"/>
+        <pc:sldMkLst>
+          <pc:docMk/>
+          <pc:sldMk cId="1162554463" sldId="257"/>
+        </pc:sldMkLst>
+      </pc:sldChg>
+      <pc:sldChg chg="del">
+        <pc:chgData name="Mohammed Fasha" userId="cc64f42d-a1a6-4f08-b97b-0c37f877119f" providerId="ADAL" clId="{6B515210-E3E2-4B4B-BC10-968DB84AFC83}" dt="2025-03-12T01:34:08.372" v="83" actId="2696"/>
+        <pc:sldMkLst>
+          <pc:docMk/>
+          <pc:sldMk cId="706735111" sldId="258"/>
+        </pc:sldMkLst>
+      </pc:sldChg>
+      <pc:sldChg chg="del">
+        <pc:chgData name="Mohammed Fasha" userId="cc64f42d-a1a6-4f08-b97b-0c37f877119f" providerId="ADAL" clId="{6B515210-E3E2-4B4B-BC10-968DB84AFC83}" dt="2025-03-12T01:34:08.372" v="83" actId="2696"/>
+        <pc:sldMkLst>
+          <pc:docMk/>
+          <pc:sldMk cId="4289469650" sldId="261"/>
+        </pc:sldMkLst>
+      </pc:sldChg>
+      <pc:sldChg chg="del">
+        <pc:chgData name="Mohammed Fasha" userId="cc64f42d-a1a6-4f08-b97b-0c37f877119f" providerId="ADAL" clId="{6B515210-E3E2-4B4B-BC10-968DB84AFC83}" dt="2025-03-12T01:34:08.372" v="83" actId="2696"/>
+        <pc:sldMkLst>
+          <pc:docMk/>
+          <pc:sldMk cId="4130133658" sldId="262"/>
+        </pc:sldMkLst>
+      </pc:sldChg>
+      <pc:sldChg chg="del">
+        <pc:chgData name="Mohammed Fasha" userId="cc64f42d-a1a6-4f08-b97b-0c37f877119f" providerId="ADAL" clId="{6B515210-E3E2-4B4B-BC10-968DB84AFC83}" dt="2025-03-12T01:34:08.372" v="83" actId="2696"/>
+        <pc:sldMkLst>
+          <pc:docMk/>
+          <pc:sldMk cId="4074862586" sldId="263"/>
+        </pc:sldMkLst>
+      </pc:sldChg>
+      <pc:sldChg chg="del">
+        <pc:chgData name="Mohammed Fasha" userId="cc64f42d-a1a6-4f08-b97b-0c37f877119f" providerId="ADAL" clId="{6B515210-E3E2-4B4B-BC10-968DB84AFC83}" dt="2025-03-12T01:34:08.372" v="83" actId="2696"/>
+        <pc:sldMkLst>
+          <pc:docMk/>
+          <pc:sldMk cId="2611575643" sldId="264"/>
+        </pc:sldMkLst>
+      </pc:sldChg>
+      <pc:sldChg chg="del">
+        <pc:chgData name="Mohammed Fasha" userId="cc64f42d-a1a6-4f08-b97b-0c37f877119f" providerId="ADAL" clId="{6B515210-E3E2-4B4B-BC10-968DB84AFC83}" dt="2025-03-12T01:34:08.372" v="83" actId="2696"/>
+        <pc:sldMkLst>
+          <pc:docMk/>
+          <pc:sldMk cId="335199774" sldId="265"/>
+        </pc:sldMkLst>
+      </pc:sldChg>
+      <pc:sldChg chg="del">
+        <pc:chgData name="Mohammed Fasha" userId="cc64f42d-a1a6-4f08-b97b-0c37f877119f" providerId="ADAL" clId="{6B515210-E3E2-4B4B-BC10-968DB84AFC83}" dt="2025-03-12T01:34:08.372" v="83" actId="2696"/>
+        <pc:sldMkLst>
+          <pc:docMk/>
+          <pc:sldMk cId="2810357117" sldId="266"/>
+        </pc:sldMkLst>
+      </pc:sldChg>
+      <pc:sldChg chg="del">
+        <pc:chgData name="Mohammed Fasha" userId="cc64f42d-a1a6-4f08-b97b-0c37f877119f" providerId="ADAL" clId="{6B515210-E3E2-4B4B-BC10-968DB84AFC83}" dt="2025-03-12T01:34:08.372" v="83" actId="2696"/>
+        <pc:sldMkLst>
+          <pc:docMk/>
+          <pc:sldMk cId="2433706687" sldId="267"/>
+        </pc:sldMkLst>
+      </pc:sldChg>
+      <pc:sldChg chg="del">
+        <pc:chgData name="Mohammed Fasha" userId="cc64f42d-a1a6-4f08-b97b-0c37f877119f" providerId="ADAL" clId="{6B515210-E3E2-4B4B-BC10-968DB84AFC83}" dt="2025-03-12T01:34:08.372" v="83" actId="2696"/>
+        <pc:sldMkLst>
+          <pc:docMk/>
+          <pc:sldMk cId="4051642265" sldId="268"/>
+        </pc:sldMkLst>
+      </pc:sldChg>
+      <pc:sldChg chg="del">
+        <pc:chgData name="Mohammed Fasha" userId="cc64f42d-a1a6-4f08-b97b-0c37f877119f" providerId="ADAL" clId="{6B515210-E3E2-4B4B-BC10-968DB84AFC83}" dt="2025-03-12T01:34:08.372" v="83" actId="2696"/>
+        <pc:sldMkLst>
+          <pc:docMk/>
+          <pc:sldMk cId="87410777" sldId="269"/>
+        </pc:sldMkLst>
+      </pc:sldChg>
+      <pc:sldChg chg="del">
+        <pc:chgData name="Mohammed Fasha" userId="cc64f42d-a1a6-4f08-b97b-0c37f877119f" providerId="ADAL" clId="{6B515210-E3E2-4B4B-BC10-968DB84AFC83}" dt="2025-03-12T01:34:08.372" v="83" actId="2696"/>
+        <pc:sldMkLst>
+          <pc:docMk/>
+          <pc:sldMk cId="595502031" sldId="270"/>
+        </pc:sldMkLst>
+      </pc:sldChg>
+      <pc:sldChg chg="del">
+        <pc:chgData name="Mohammed Fasha" userId="cc64f42d-a1a6-4f08-b97b-0c37f877119f" providerId="ADAL" clId="{6B515210-E3E2-4B4B-BC10-968DB84AFC83}" dt="2025-03-12T01:34:08.372" v="83" actId="2696"/>
+        <pc:sldMkLst>
+          <pc:docMk/>
+          <pc:sldMk cId="3925652072" sldId="271"/>
+        </pc:sldMkLst>
+      </pc:sldChg>
+      <pc:sldChg chg="del">
+        <pc:chgData name="Mohammed Fasha" userId="cc64f42d-a1a6-4f08-b97b-0c37f877119f" providerId="ADAL" clId="{6B515210-E3E2-4B4B-BC10-968DB84AFC83}" dt="2025-03-12T01:34:08.372" v="83" actId="2696"/>
+        <pc:sldMkLst>
+          <pc:docMk/>
+          <pc:sldMk cId="463115072" sldId="272"/>
+        </pc:sldMkLst>
+      </pc:sldChg>
+      <pc:sldChg chg="del">
+        <pc:chgData name="Mohammed Fasha" userId="cc64f42d-a1a6-4f08-b97b-0c37f877119f" providerId="ADAL" clId="{6B515210-E3E2-4B4B-BC10-968DB84AFC83}" dt="2025-03-12T01:34:08.372" v="83" actId="2696"/>
+        <pc:sldMkLst>
+          <pc:docMk/>
+          <pc:sldMk cId="3668955903" sldId="273"/>
+        </pc:sldMkLst>
+      </pc:sldChg>
+      <pc:sldChg chg="del">
+        <pc:chgData name="Mohammed Fasha" userId="cc64f42d-a1a6-4f08-b97b-0c37f877119f" providerId="ADAL" clId="{6B515210-E3E2-4B4B-BC10-968DB84AFC83}" dt="2025-03-12T01:34:08.372" v="83" actId="2696"/>
+        <pc:sldMkLst>
+          <pc:docMk/>
+          <pc:sldMk cId="3192380798" sldId="274"/>
+        </pc:sldMkLst>
+      </pc:sldChg>
+      <pc:sldChg chg="del">
+        <pc:chgData name="Mohammed Fasha" userId="cc64f42d-a1a6-4f08-b97b-0c37f877119f" providerId="ADAL" clId="{6B515210-E3E2-4B4B-BC10-968DB84AFC83}" dt="2025-03-12T01:34:08.372" v="83" actId="2696"/>
+        <pc:sldMkLst>
+          <pc:docMk/>
+          <pc:sldMk cId="3898002179" sldId="275"/>
+        </pc:sldMkLst>
+      </pc:sldChg>
+      <pc:sldChg chg="del">
+        <pc:chgData name="Mohammed Fasha" userId="cc64f42d-a1a6-4f08-b97b-0c37f877119f" providerId="ADAL" clId="{6B515210-E3E2-4B4B-BC10-968DB84AFC83}" dt="2025-03-12T01:34:08.372" v="83" actId="2696"/>
+        <pc:sldMkLst>
+          <pc:docMk/>
+          <pc:sldMk cId="1503352162" sldId="276"/>
+        </pc:sldMkLst>
+      </pc:sldChg>
+      <pc:sldChg chg="del">
+        <pc:chgData name="Mohammed Fasha" userId="cc64f42d-a1a6-4f08-b97b-0c37f877119f" providerId="ADAL" clId="{6B515210-E3E2-4B4B-BC10-968DB84AFC83}" dt="2025-03-12T01:34:08.372" v="83" actId="2696"/>
+        <pc:sldMkLst>
+          <pc:docMk/>
+          <pc:sldMk cId="1260131707" sldId="277"/>
+        </pc:sldMkLst>
+      </pc:sldChg>
+      <pc:sldChg chg="del">
+        <pc:chgData name="Mohammed Fasha" userId="cc64f42d-a1a6-4f08-b97b-0c37f877119f" providerId="ADAL" clId="{6B515210-E3E2-4B4B-BC10-968DB84AFC83}" dt="2025-03-12T01:34:08.372" v="83" actId="2696"/>
+        <pc:sldMkLst>
+          <pc:docMk/>
+          <pc:sldMk cId="1324937023" sldId="280"/>
+        </pc:sldMkLst>
+      </pc:sldChg>
+      <pc:sldChg chg="del">
+        <pc:chgData name="Mohammed Fasha" userId="cc64f42d-a1a6-4f08-b97b-0c37f877119f" providerId="ADAL" clId="{6B515210-E3E2-4B4B-BC10-968DB84AFC83}" dt="2025-03-12T01:34:08.372" v="83" actId="2696"/>
+        <pc:sldMkLst>
+          <pc:docMk/>
+          <pc:sldMk cId="4085727926" sldId="281"/>
+        </pc:sldMkLst>
+      </pc:sldChg>
+      <pc:sldChg chg="del">
+        <pc:chgData name="Mohammed Fasha" userId="cc64f42d-a1a6-4f08-b97b-0c37f877119f" providerId="ADAL" clId="{6B515210-E3E2-4B4B-BC10-968DB84AFC83}" dt="2025-03-12T01:34:08.372" v="83" actId="2696"/>
+        <pc:sldMkLst>
+          <pc:docMk/>
+          <pc:sldMk cId="156012141" sldId="282"/>
+        </pc:sldMkLst>
+      </pc:sldChg>
+      <pc:sldChg chg="del">
+        <pc:chgData name="Mohammed Fasha" userId="cc64f42d-a1a6-4f08-b97b-0c37f877119f" providerId="ADAL" clId="{6B515210-E3E2-4B4B-BC10-968DB84AFC83}" dt="2025-03-12T01:34:08.372" v="83" actId="2696"/>
+        <pc:sldMkLst>
+          <pc:docMk/>
+          <pc:sldMk cId="248623450" sldId="284"/>
+        </pc:sldMkLst>
+      </pc:sldChg>
+      <pc:sldChg chg="delSp modSp mod">
+        <pc:chgData name="Mohammed Fasha" userId="cc64f42d-a1a6-4f08-b97b-0c37f877119f" providerId="ADAL" clId="{6B515210-E3E2-4B4B-BC10-968DB84AFC83}" dt="2025-03-12T01:46:21.043" v="268" actId="1076"/>
+        <pc:sldMkLst>
+          <pc:docMk/>
+          <pc:sldMk cId="1489447582" sldId="455"/>
+        </pc:sldMkLst>
+      </pc:sldChg>
+      <pc:sldChg chg="addSp delSp modSp new mod chgLayout">
+        <pc:chgData name="Mohammed Fasha" userId="cc64f42d-a1a6-4f08-b97b-0c37f877119f" providerId="ADAL" clId="{6B515210-E3E2-4B4B-BC10-968DB84AFC83}" dt="2025-03-12T03:08:53.710" v="1713" actId="20577"/>
+        <pc:sldMkLst>
+          <pc:docMk/>
+          <pc:sldMk cId="3910887702" sldId="456"/>
+        </pc:sldMkLst>
+      </pc:sldChg>
+      <pc:sldChg chg="add del">
+        <pc:chgData name="Mohammed Fasha" userId="cc64f42d-a1a6-4f08-b97b-0c37f877119f" providerId="ADAL" clId="{6B515210-E3E2-4B4B-BC10-968DB84AFC83}" dt="2025-03-12T01:38:38.172" v="141" actId="2696"/>
+        <pc:sldMkLst>
+          <pc:docMk/>
+          <pc:sldMk cId="3573010135" sldId="457"/>
+        </pc:sldMkLst>
+      </pc:sldChg>
+      <pc:sldChg chg="addSp delSp modSp new mod">
+        <pc:chgData name="Mohammed Fasha" userId="cc64f42d-a1a6-4f08-b97b-0c37f877119f" providerId="ADAL" clId="{6B515210-E3E2-4B4B-BC10-968DB84AFC83}" dt="2025-03-12T02:46:20.092" v="837" actId="14100"/>
+        <pc:sldMkLst>
+          <pc:docMk/>
+          <pc:sldMk cId="3639736080" sldId="457"/>
+        </pc:sldMkLst>
+      </pc:sldChg>
+      <pc:sldChg chg="addSp modSp add mod">
+        <pc:chgData name="Mohammed Fasha" userId="cc64f42d-a1a6-4f08-b97b-0c37f877119f" providerId="ADAL" clId="{6B515210-E3E2-4B4B-BC10-968DB84AFC83}" dt="2025-03-12T01:50:16.041" v="361" actId="27636"/>
+        <pc:sldMkLst>
+          <pc:docMk/>
+          <pc:sldMk cId="2042404279" sldId="458"/>
+        </pc:sldMkLst>
+      </pc:sldChg>
+      <pc:sldChg chg="add del">
+        <pc:chgData name="Mohammed Fasha" userId="cc64f42d-a1a6-4f08-b97b-0c37f877119f" providerId="ADAL" clId="{6B515210-E3E2-4B4B-BC10-968DB84AFC83}" dt="2025-03-12T01:38:38.172" v="141" actId="2696"/>
+        <pc:sldMkLst>
+          <pc:docMk/>
+          <pc:sldMk cId="2742298196" sldId="458"/>
+        </pc:sldMkLst>
+      </pc:sldChg>
+      <pc:sldChg chg="add del">
+        <pc:chgData name="Mohammed Fasha" userId="cc64f42d-a1a6-4f08-b97b-0c37f877119f" providerId="ADAL" clId="{6B515210-E3E2-4B4B-BC10-968DB84AFC83}" dt="2025-03-12T01:38:38.172" v="141" actId="2696"/>
+        <pc:sldMkLst>
+          <pc:docMk/>
+          <pc:sldMk cId="65005378" sldId="459"/>
+        </pc:sldMkLst>
+      </pc:sldChg>
+      <pc:sldChg chg="addSp delSp modSp add mod">
+        <pc:chgData name="Mohammed Fasha" userId="cc64f42d-a1a6-4f08-b97b-0c37f877119f" providerId="ADAL" clId="{6B515210-E3E2-4B4B-BC10-968DB84AFC83}" dt="2025-03-12T03:00:53.810" v="1066" actId="21"/>
+        <pc:sldMkLst>
+          <pc:docMk/>
+          <pc:sldMk cId="2881282849" sldId="459"/>
+        </pc:sldMkLst>
+      </pc:sldChg>
+      <pc:sldChg chg="del">
+        <pc:chgData name="Mohammed Fasha" userId="cc64f42d-a1a6-4f08-b97b-0c37f877119f" providerId="ADAL" clId="{6B515210-E3E2-4B4B-BC10-968DB84AFC83}" dt="2025-03-12T01:34:08.372" v="83" actId="2696"/>
+        <pc:sldMkLst>
+          <pc:docMk/>
+          <pc:sldMk cId="713799975" sldId="460"/>
+        </pc:sldMkLst>
+      </pc:sldChg>
+      <pc:sldChg chg="addSp delSp modSp add mod">
+        <pc:chgData name="Mohammed Fasha" userId="cc64f42d-a1a6-4f08-b97b-0c37f877119f" providerId="ADAL" clId="{6B515210-E3E2-4B4B-BC10-968DB84AFC83}" dt="2025-03-12T02:58:39.819" v="995" actId="27636"/>
+        <pc:sldMkLst>
+          <pc:docMk/>
+          <pc:sldMk cId="945325653" sldId="460"/>
+        </pc:sldMkLst>
+      </pc:sldChg>
+      <pc:sldChg chg="add del">
+        <pc:chgData name="Mohammed Fasha" userId="cc64f42d-a1a6-4f08-b97b-0c37f877119f" providerId="ADAL" clId="{6B515210-E3E2-4B4B-BC10-968DB84AFC83}" dt="2025-03-12T01:38:38.172" v="141" actId="2696"/>
+        <pc:sldMkLst>
+          <pc:docMk/>
+          <pc:sldMk cId="1130963138" sldId="460"/>
+        </pc:sldMkLst>
+      </pc:sldChg>
+      <pc:sldChg chg="del">
+        <pc:chgData name="Mohammed Fasha" userId="cc64f42d-a1a6-4f08-b97b-0c37f877119f" providerId="ADAL" clId="{6B515210-E3E2-4B4B-BC10-968DB84AFC83}" dt="2025-03-12T01:34:08.372" v="83" actId="2696"/>
+        <pc:sldMkLst>
+          <pc:docMk/>
+          <pc:sldMk cId="1559487564" sldId="461"/>
+        </pc:sldMkLst>
+      </pc:sldChg>
+      <pc:sldChg chg="addSp delSp modSp add mod">
+        <pc:chgData name="Mohammed Fasha" userId="cc64f42d-a1a6-4f08-b97b-0c37f877119f" providerId="ADAL" clId="{6B515210-E3E2-4B4B-BC10-968DB84AFC83}" dt="2025-03-12T02:11:44.303" v="509"/>
+        <pc:sldMkLst>
+          <pc:docMk/>
+          <pc:sldMk cId="2248227231" sldId="461"/>
+        </pc:sldMkLst>
+      </pc:sldChg>
+      <pc:sldChg chg="add del">
+        <pc:chgData name="Mohammed Fasha" userId="cc64f42d-a1a6-4f08-b97b-0c37f877119f" providerId="ADAL" clId="{6B515210-E3E2-4B4B-BC10-968DB84AFC83}" dt="2025-03-12T01:38:38.172" v="141" actId="2696"/>
+        <pc:sldMkLst>
+          <pc:docMk/>
+          <pc:sldMk cId="2546861112" sldId="461"/>
+        </pc:sldMkLst>
+      </pc:sldChg>
+      <pc:sldChg chg="add del">
+        <pc:chgData name="Mohammed Fasha" userId="cc64f42d-a1a6-4f08-b97b-0c37f877119f" providerId="ADAL" clId="{6B515210-E3E2-4B4B-BC10-968DB84AFC83}" dt="2025-03-12T01:38:38.172" v="141" actId="2696"/>
+        <pc:sldMkLst>
+          <pc:docMk/>
+          <pc:sldMk cId="376539193" sldId="462"/>
+        </pc:sldMkLst>
+      </pc:sldChg>
+      <pc:sldChg chg="addSp modSp add mod">
+        <pc:chgData name="Mohammed Fasha" userId="cc64f42d-a1a6-4f08-b97b-0c37f877119f" providerId="ADAL" clId="{6B515210-E3E2-4B4B-BC10-968DB84AFC83}" dt="2025-03-12T02:18:24.439" v="598" actId="6549"/>
+        <pc:sldMkLst>
+          <pc:docMk/>
+          <pc:sldMk cId="1427723282" sldId="462"/>
+        </pc:sldMkLst>
+      </pc:sldChg>
+      <pc:sldChg chg="del">
+        <pc:chgData name="Mohammed Fasha" userId="cc64f42d-a1a6-4f08-b97b-0c37f877119f" providerId="ADAL" clId="{6B515210-E3E2-4B4B-BC10-968DB84AFC83}" dt="2025-03-12T01:34:08.372" v="83" actId="2696"/>
+        <pc:sldMkLst>
+          <pc:docMk/>
+          <pc:sldMk cId="3087456825" sldId="462"/>
+        </pc:sldMkLst>
+      </pc:sldChg>
+      <pc:sldChg chg="addSp delSp modSp add mod">
+        <pc:chgData name="Mohammed Fasha" userId="cc64f42d-a1a6-4f08-b97b-0c37f877119f" providerId="ADAL" clId="{6B515210-E3E2-4B4B-BC10-968DB84AFC83}" dt="2025-03-12T02:34:11.888" v="748" actId="14100"/>
+        <pc:sldMkLst>
+          <pc:docMk/>
+          <pc:sldMk cId="538252582" sldId="463"/>
+        </pc:sldMkLst>
+      </pc:sldChg>
+      <pc:sldChg chg="del">
+        <pc:chgData name="Mohammed Fasha" userId="cc64f42d-a1a6-4f08-b97b-0c37f877119f" providerId="ADAL" clId="{6B515210-E3E2-4B4B-BC10-968DB84AFC83}" dt="2025-03-12T01:34:08.372" v="83" actId="2696"/>
+        <pc:sldMkLst>
+          <pc:docMk/>
+          <pc:sldMk cId="1869085755" sldId="463"/>
+        </pc:sldMkLst>
+      </pc:sldChg>
+      <pc:sldChg chg="add del">
+        <pc:chgData name="Mohammed Fasha" userId="cc64f42d-a1a6-4f08-b97b-0c37f877119f" providerId="ADAL" clId="{6B515210-E3E2-4B4B-BC10-968DB84AFC83}" dt="2025-03-12T01:38:38.172" v="141" actId="2696"/>
+        <pc:sldMkLst>
+          <pc:docMk/>
+          <pc:sldMk cId="2204594696" sldId="463"/>
+        </pc:sldMkLst>
+      </pc:sldChg>
+      <pc:sldChg chg="del">
+        <pc:chgData name="Mohammed Fasha" userId="cc64f42d-a1a6-4f08-b97b-0c37f877119f" providerId="ADAL" clId="{6B515210-E3E2-4B4B-BC10-968DB84AFC83}" dt="2025-03-12T01:34:08.372" v="83" actId="2696"/>
+        <pc:sldMkLst>
+          <pc:docMk/>
+          <pc:sldMk cId="4139560" sldId="464"/>
+        </pc:sldMkLst>
+      </pc:sldChg>
+      <pc:sldChg chg="add del">
+        <pc:chgData name="Mohammed Fasha" userId="cc64f42d-a1a6-4f08-b97b-0c37f877119f" providerId="ADAL" clId="{6B515210-E3E2-4B4B-BC10-968DB84AFC83}" dt="2025-03-12T01:38:38.172" v="141" actId="2696"/>
+        <pc:sldMkLst>
+          <pc:docMk/>
+          <pc:sldMk cId="235027490" sldId="464"/>
+        </pc:sldMkLst>
+      </pc:sldChg>
+      <pc:sldChg chg="addSp modSp add mod">
+        <pc:chgData name="Mohammed Fasha" userId="cc64f42d-a1a6-4f08-b97b-0c37f877119f" providerId="ADAL" clId="{6B515210-E3E2-4B4B-BC10-968DB84AFC83}" dt="2025-03-12T02:33:11.507" v="724" actId="1076"/>
+        <pc:sldMkLst>
+          <pc:docMk/>
+          <pc:sldMk cId="1559017199" sldId="464"/>
+        </pc:sldMkLst>
+      </pc:sldChg>
+      <pc:sldChg chg="del">
+        <pc:chgData name="Mohammed Fasha" userId="cc64f42d-a1a6-4f08-b97b-0c37f877119f" providerId="ADAL" clId="{6B515210-E3E2-4B4B-BC10-968DB84AFC83}" dt="2025-03-12T01:34:08.372" v="83" actId="2696"/>
+        <pc:sldMkLst>
+          <pc:docMk/>
+          <pc:sldMk cId="277181267" sldId="465"/>
+        </pc:sldMkLst>
+      </pc:sldChg>
+      <pc:sldChg chg="add del">
+        <pc:chgData name="Mohammed Fasha" userId="cc64f42d-a1a6-4f08-b97b-0c37f877119f" providerId="ADAL" clId="{6B515210-E3E2-4B4B-BC10-968DB84AFC83}" dt="2025-03-12T01:38:38.172" v="141" actId="2696"/>
+        <pc:sldMkLst>
+          <pc:docMk/>
+          <pc:sldMk cId="1358405375" sldId="465"/>
+        </pc:sldMkLst>
+      </pc:sldChg>
+      <pc:sldChg chg="addSp delSp modSp add mod ord">
+        <pc:chgData name="Mohammed Fasha" userId="cc64f42d-a1a6-4f08-b97b-0c37f877119f" providerId="ADAL" clId="{6B515210-E3E2-4B4B-BC10-968DB84AFC83}" dt="2025-03-12T02:30:23.572" v="691" actId="1076"/>
+        <pc:sldMkLst>
+          <pc:docMk/>
+          <pc:sldMk cId="2067025602" sldId="465"/>
+        </pc:sldMkLst>
+      </pc:sldChg>
+      <pc:sldChg chg="addSp delSp modSp add mod">
+        <pc:chgData name="Mohammed Fasha" userId="cc64f42d-a1a6-4f08-b97b-0c37f877119f" providerId="ADAL" clId="{6B515210-E3E2-4B4B-BC10-968DB84AFC83}" dt="2025-03-12T02:31:16.001" v="705" actId="1076"/>
+        <pc:sldMkLst>
+          <pc:docMk/>
+          <pc:sldMk cId="2575217795" sldId="466"/>
+        </pc:sldMkLst>
+      </pc:sldChg>
+      <pc:sldChg chg="add del">
+        <pc:chgData name="Mohammed Fasha" userId="cc64f42d-a1a6-4f08-b97b-0c37f877119f" providerId="ADAL" clId="{6B515210-E3E2-4B4B-BC10-968DB84AFC83}" dt="2025-03-12T01:38:38.172" v="141" actId="2696"/>
+        <pc:sldMkLst>
+          <pc:docMk/>
+          <pc:sldMk cId="2730556220" sldId="466"/>
+        </pc:sldMkLst>
+      </pc:sldChg>
+      <pc:sldChg chg="add del">
+        <pc:chgData name="Mohammed Fasha" userId="cc64f42d-a1a6-4f08-b97b-0c37f877119f" providerId="ADAL" clId="{6B515210-E3E2-4B4B-BC10-968DB84AFC83}" dt="2025-03-12T01:38:38.172" v="141" actId="2696"/>
+        <pc:sldMkLst>
+          <pc:docMk/>
+          <pc:sldMk cId="2076829353" sldId="467"/>
+        </pc:sldMkLst>
+      </pc:sldChg>
+      <pc:sldChg chg="addSp delSp modSp add del mod modClrScheme chgLayout">
+        <pc:chgData name="Mohammed Fasha" userId="cc64f42d-a1a6-4f08-b97b-0c37f877119f" providerId="ADAL" clId="{6B515210-E3E2-4B4B-BC10-968DB84AFC83}" dt="2025-03-12T02:34:20.006" v="749" actId="47"/>
+        <pc:sldMkLst>
+          <pc:docMk/>
+          <pc:sldMk cId="3203545122" sldId="467"/>
+        </pc:sldMkLst>
+      </pc:sldChg>
+      <pc:sldChg chg="add del">
+        <pc:chgData name="Mohammed Fasha" userId="cc64f42d-a1a6-4f08-b97b-0c37f877119f" providerId="ADAL" clId="{6B515210-E3E2-4B4B-BC10-968DB84AFC83}" dt="2025-03-12T01:38:38.172" v="141" actId="2696"/>
+        <pc:sldMkLst>
+          <pc:docMk/>
+          <pc:sldMk cId="176966881" sldId="468"/>
+        </pc:sldMkLst>
+      </pc:sldChg>
+      <pc:sldChg chg="add del">
+        <pc:chgData name="Mohammed Fasha" userId="cc64f42d-a1a6-4f08-b97b-0c37f877119f" providerId="ADAL" clId="{6B515210-E3E2-4B4B-BC10-968DB84AFC83}" dt="2025-03-12T02:34:20.168" v="750" actId="47"/>
+        <pc:sldMkLst>
+          <pc:docMk/>
+          <pc:sldMk cId="2058978584" sldId="468"/>
+        </pc:sldMkLst>
+      </pc:sldChg>
+      <pc:sldChg chg="add del">
+        <pc:chgData name="Mohammed Fasha" userId="cc64f42d-a1a6-4f08-b97b-0c37f877119f" providerId="ADAL" clId="{6B515210-E3E2-4B4B-BC10-968DB84AFC83}" dt="2025-03-12T02:34:20.353" v="751" actId="47"/>
+        <pc:sldMkLst>
+          <pc:docMk/>
+          <pc:sldMk cId="2001259236" sldId="469"/>
+        </pc:sldMkLst>
+      </pc:sldChg>
+      <pc:sldChg chg="add del">
+        <pc:chgData name="Mohammed Fasha" userId="cc64f42d-a1a6-4f08-b97b-0c37f877119f" providerId="ADAL" clId="{6B515210-E3E2-4B4B-BC10-968DB84AFC83}" dt="2025-03-12T01:38:38.172" v="141" actId="2696"/>
+        <pc:sldMkLst>
+          <pc:docMk/>
+          <pc:sldMk cId="2149133959" sldId="469"/>
+        </pc:sldMkLst>
+      </pc:sldChg>
+      <pc:sldChg chg="add del">
+        <pc:chgData name="Mohammed Fasha" userId="cc64f42d-a1a6-4f08-b97b-0c37f877119f" providerId="ADAL" clId="{6B515210-E3E2-4B4B-BC10-968DB84AFC83}" dt="2025-03-12T01:38:38.172" v="141" actId="2696"/>
+        <pc:sldMkLst>
+          <pc:docMk/>
+          <pc:sldMk cId="2184469585" sldId="470"/>
+        </pc:sldMkLst>
+      </pc:sldChg>
+      <pc:sldChg chg="add del">
+        <pc:chgData name="Mohammed Fasha" userId="cc64f42d-a1a6-4f08-b97b-0c37f877119f" providerId="ADAL" clId="{6B515210-E3E2-4B4B-BC10-968DB84AFC83}" dt="2025-03-12T02:34:21.650" v="752" actId="47"/>
+        <pc:sldMkLst>
+          <pc:docMk/>
+          <pc:sldMk cId="4176577481" sldId="470"/>
+        </pc:sldMkLst>
+      </pc:sldChg>
+      <pc:sldChg chg="add del">
+        <pc:chgData name="Mohammed Fasha" userId="cc64f42d-a1a6-4f08-b97b-0c37f877119f" providerId="ADAL" clId="{6B515210-E3E2-4B4B-BC10-968DB84AFC83}" dt="2025-03-12T02:34:22.147" v="753" actId="47"/>
+        <pc:sldMkLst>
+          <pc:docMk/>
+          <pc:sldMk cId="581574831" sldId="471"/>
+        </pc:sldMkLst>
+      </pc:sldChg>
+      <pc:sldChg chg="add del">
+        <pc:chgData name="Mohammed Fasha" userId="cc64f42d-a1a6-4f08-b97b-0c37f877119f" providerId="ADAL" clId="{6B515210-E3E2-4B4B-BC10-968DB84AFC83}" dt="2025-03-12T01:38:38.172" v="141" actId="2696"/>
+        <pc:sldMkLst>
+          <pc:docMk/>
+          <pc:sldMk cId="2059800610" sldId="471"/>
+        </pc:sldMkLst>
+      </pc:sldChg>
+      <pc:sldChg chg="add del">
+        <pc:chgData name="Mohammed Fasha" userId="cc64f42d-a1a6-4f08-b97b-0c37f877119f" providerId="ADAL" clId="{6B515210-E3E2-4B4B-BC10-968DB84AFC83}" dt="2025-03-12T01:38:38.172" v="141" actId="2696"/>
+        <pc:sldMkLst>
+          <pc:docMk/>
+          <pc:sldMk cId="1566193115" sldId="472"/>
+        </pc:sldMkLst>
+      </pc:sldChg>
+      <pc:sldChg chg="add del">
+        <pc:chgData name="Mohammed Fasha" userId="cc64f42d-a1a6-4f08-b97b-0c37f877119f" providerId="ADAL" clId="{6B515210-E3E2-4B4B-BC10-968DB84AFC83}" dt="2025-03-12T02:34:22.723" v="754" actId="47"/>
+        <pc:sldMkLst>
+          <pc:docMk/>
+          <pc:sldMk cId="3652126392" sldId="472"/>
+        </pc:sldMkLst>
+      </pc:sldChg>
+      <pc:sldChg chg="add del">
+        <pc:chgData name="Mohammed Fasha" userId="cc64f42d-a1a6-4f08-b97b-0c37f877119f" providerId="ADAL" clId="{6B515210-E3E2-4B4B-BC10-968DB84AFC83}" dt="2025-03-12T02:34:23.387" v="755" actId="47"/>
+        <pc:sldMkLst>
+          <pc:docMk/>
+          <pc:sldMk cId="3716915739" sldId="473"/>
+        </pc:sldMkLst>
+      </pc:sldChg>
+      <pc:sldChg chg="add del">
+        <pc:chgData name="Mohammed Fasha" userId="cc64f42d-a1a6-4f08-b97b-0c37f877119f" providerId="ADAL" clId="{6B515210-E3E2-4B4B-BC10-968DB84AFC83}" dt="2025-03-12T02:34:24.048" v="756" actId="47"/>
+        <pc:sldMkLst>
+          <pc:docMk/>
+          <pc:sldMk cId="1718835763" sldId="474"/>
+        </pc:sldMkLst>
+      </pc:sldChg>
+      <pc:sldChg chg="add del">
+        <pc:chgData name="Mohammed Fasha" userId="cc64f42d-a1a6-4f08-b97b-0c37f877119f" providerId="ADAL" clId="{6B515210-E3E2-4B4B-BC10-968DB84AFC83}" dt="2025-03-12T02:34:24.615" v="757" actId="47"/>
+        <pc:sldMkLst>
+          <pc:docMk/>
+          <pc:sldMk cId="1692059453" sldId="475"/>
+        </pc:sldMkLst>
+      </pc:sldChg>
+      <pc:sldChg chg="modSp add mod">
+        <pc:chgData name="Mohammed Fasha" userId="cc64f42d-a1a6-4f08-b97b-0c37f877119f" providerId="ADAL" clId="{6B515210-E3E2-4B4B-BC10-968DB84AFC83}" dt="2025-03-12T02:32:31.978" v="715" actId="12"/>
+        <pc:sldMkLst>
+          <pc:docMk/>
+          <pc:sldMk cId="1558611893" sldId="476"/>
+        </pc:sldMkLst>
+      </pc:sldChg>
+      <pc:sldChg chg="addSp delSp modSp add del mod">
+        <pc:chgData name="Mohammed Fasha" userId="cc64f42d-a1a6-4f08-b97b-0c37f877119f" providerId="ADAL" clId="{6B515210-E3E2-4B4B-BC10-968DB84AFC83}" dt="2025-03-12T02:50:02.536" v="890"/>
+        <pc:sldMkLst>
+          <pc:docMk/>
+          <pc:sldMk cId="471849074" sldId="477"/>
+        </pc:sldMkLst>
+      </pc:sldChg>
+      <pc:sldMasterChg chg="modSldLayout">
+        <pc:chgData name="Mohammed Fasha" userId="cc64f42d-a1a6-4f08-b97b-0c37f877119f" providerId="ADAL" clId="{6B515210-E3E2-4B4B-BC10-968DB84AFC83}" dt="2025-03-12T01:38:22.885" v="140" actId="14100"/>
+        <pc:sldMasterMkLst>
+          <pc:docMk/>
+          <pc:sldMasterMk cId="2573801746" sldId="2147483648"/>
+        </pc:sldMasterMkLst>
+        <pc:sldLayoutChg chg="addSp delSp modSp mod">
+          <pc:chgData name="Mohammed Fasha" userId="cc64f42d-a1a6-4f08-b97b-0c37f877119f" providerId="ADAL" clId="{6B515210-E3E2-4B4B-BC10-968DB84AFC83}" dt="2025-03-12T01:38:22.885" v="140" actId="14100"/>
+          <pc:sldLayoutMkLst>
+            <pc:docMk/>
+            <pc:sldMasterMk cId="2573801746" sldId="2147483648"/>
+            <pc:sldLayoutMk cId="3033015503" sldId="2147483650"/>
+          </pc:sldLayoutMkLst>
+        </pc:sldLayoutChg>
+      </pc:sldMasterChg>
+    </pc:docChg>
+  </pc:docChgLst>
+  <pc:docChgLst>
     <pc:chgData name="Mohammed Fasha" userId="cc64f42d-a1a6-4f08-b97b-0c37f877119f" providerId="ADAL" clId="{D3520BFC-89CF-4CB5-8BC6-02854ED6C636}"/>
     <pc:docChg chg="undo custSel addSld delSld modSld modMainMaster">
       <pc:chgData name="Mohammed Fasha" userId="cc64f42d-a1a6-4f08-b97b-0c37f877119f" providerId="ADAL" clId="{D3520BFC-89CF-4CB5-8BC6-02854ED6C636}" dt="2024-10-16T09:49:25.572" v="384"/>
@@ -262,649 +905,233 @@
     </pc:docChg>
   </pc:docChgLst>
   <pc:docChgLst>
-    <pc:chgData name="Mohammed Fasha" userId="cc64f42d-a1a6-4f08-b97b-0c37f877119f" providerId="ADAL" clId="{6B515210-E3E2-4B4B-BC10-968DB84AFC83}"/>
-    <pc:docChg chg="undo custSel addSld delSld modSld sldOrd modMainMaster">
-      <pc:chgData name="Mohammed Fasha" userId="cc64f42d-a1a6-4f08-b97b-0c37f877119f" providerId="ADAL" clId="{6B515210-E3E2-4B4B-BC10-968DB84AFC83}" dt="2025-03-12T03:08:53.710" v="1713" actId="20577"/>
+    <pc:chgData name="Mohammed Fasha" userId="cc64f42d-a1a6-4f08-b97b-0c37f877119f" providerId="ADAL" clId="{985CD171-9E4A-4264-B045-872AAA800AE3}"/>
+    <pc:docChg chg="undo custSel addSld delSld modSld sldOrd">
+      <pc:chgData name="Mohammed Fasha" userId="cc64f42d-a1a6-4f08-b97b-0c37f877119f" providerId="ADAL" clId="{985CD171-9E4A-4264-B045-872AAA800AE3}" dt="2024-10-16T08:02:59.311" v="633" actId="404"/>
       <pc:docMkLst>
         <pc:docMk/>
       </pc:docMkLst>
-      <pc:sldChg chg="addSp delSp modSp mod chgLayout">
-        <pc:chgData name="Mohammed Fasha" userId="cc64f42d-a1a6-4f08-b97b-0c37f877119f" providerId="ADAL" clId="{6B515210-E3E2-4B4B-BC10-968DB84AFC83}" dt="2025-03-12T02:44:50.431" v="832"/>
+      <pc:sldChg chg="modSp">
+        <pc:chgData name="Mohammed Fasha" userId="cc64f42d-a1a6-4f08-b97b-0c37f877119f" providerId="ADAL" clId="{985CD171-9E4A-4264-B045-872AAA800AE3}" dt="2024-10-16T07:15:21.970" v="481" actId="27636"/>
         <pc:sldMkLst>
           <pc:docMk/>
           <pc:sldMk cId="1162554463" sldId="257"/>
         </pc:sldMkLst>
       </pc:sldChg>
-      <pc:sldChg chg="del">
-        <pc:chgData name="Mohammed Fasha" userId="cc64f42d-a1a6-4f08-b97b-0c37f877119f" providerId="ADAL" clId="{6B515210-E3E2-4B4B-BC10-968DB84AFC83}" dt="2025-03-12T01:34:08.372" v="83" actId="2696"/>
+      <pc:sldChg chg="addSp modSp">
+        <pc:chgData name="Mohammed Fasha" userId="cc64f42d-a1a6-4f08-b97b-0c37f877119f" providerId="ADAL" clId="{985CD171-9E4A-4264-B045-872AAA800AE3}" dt="2024-10-16T07:06:03.884" v="437" actId="1076"/>
         <pc:sldMkLst>
           <pc:docMk/>
           <pc:sldMk cId="706735111" sldId="258"/>
         </pc:sldMkLst>
       </pc:sldChg>
-      <pc:sldChg chg="del">
-        <pc:chgData name="Mohammed Fasha" userId="cc64f42d-a1a6-4f08-b97b-0c37f877119f" providerId="ADAL" clId="{6B515210-E3E2-4B4B-BC10-968DB84AFC83}" dt="2025-03-12T01:34:08.372" v="83" actId="2696"/>
+      <pc:sldChg chg="addSp delSp modSp ord">
+        <pc:chgData name="Mohammed Fasha" userId="cc64f42d-a1a6-4f08-b97b-0c37f877119f" providerId="ADAL" clId="{985CD171-9E4A-4264-B045-872AAA800AE3}" dt="2024-10-16T07:00:38.831" v="349" actId="207"/>
         <pc:sldMkLst>
           <pc:docMk/>
           <pc:sldMk cId="4289469650" sldId="261"/>
         </pc:sldMkLst>
       </pc:sldChg>
-      <pc:sldChg chg="del">
-        <pc:chgData name="Mohammed Fasha" userId="cc64f42d-a1a6-4f08-b97b-0c37f877119f" providerId="ADAL" clId="{6B515210-E3E2-4B4B-BC10-968DB84AFC83}" dt="2025-03-12T01:34:08.372" v="83" actId="2696"/>
+      <pc:sldChg chg="addSp delSp modSp ord">
+        <pc:chgData name="Mohammed Fasha" userId="cc64f42d-a1a6-4f08-b97b-0c37f877119f" providerId="ADAL" clId="{985CD171-9E4A-4264-B045-872AAA800AE3}" dt="2024-10-16T06:46:39.846" v="191" actId="14100"/>
         <pc:sldMkLst>
           <pc:docMk/>
           <pc:sldMk cId="4130133658" sldId="262"/>
         </pc:sldMkLst>
       </pc:sldChg>
-      <pc:sldChg chg="del">
-        <pc:chgData name="Mohammed Fasha" userId="cc64f42d-a1a6-4f08-b97b-0c37f877119f" providerId="ADAL" clId="{6B515210-E3E2-4B4B-BC10-968DB84AFC83}" dt="2025-03-12T01:34:08.372" v="83" actId="2696"/>
+      <pc:sldChg chg="addSp modSp ord">
+        <pc:chgData name="Mohammed Fasha" userId="cc64f42d-a1a6-4f08-b97b-0c37f877119f" providerId="ADAL" clId="{985CD171-9E4A-4264-B045-872AAA800AE3}" dt="2024-10-16T07:55:18.576" v="615" actId="207"/>
         <pc:sldMkLst>
           <pc:docMk/>
           <pc:sldMk cId="4074862586" sldId="263"/>
         </pc:sldMkLst>
       </pc:sldChg>
-      <pc:sldChg chg="del">
-        <pc:chgData name="Mohammed Fasha" userId="cc64f42d-a1a6-4f08-b97b-0c37f877119f" providerId="ADAL" clId="{6B515210-E3E2-4B4B-BC10-968DB84AFC83}" dt="2025-03-12T01:34:08.372" v="83" actId="2696"/>
+      <pc:sldChg chg="addSp delSp modSp add">
+        <pc:chgData name="Mohammed Fasha" userId="cc64f42d-a1a6-4f08-b97b-0c37f877119f" providerId="ADAL" clId="{985CD171-9E4A-4264-B045-872AAA800AE3}" dt="2024-10-16T07:54:33.790" v="610"/>
         <pc:sldMkLst>
           <pc:docMk/>
           <pc:sldMk cId="2611575643" sldId="264"/>
         </pc:sldMkLst>
       </pc:sldChg>
-      <pc:sldChg chg="del">
-        <pc:chgData name="Mohammed Fasha" userId="cc64f42d-a1a6-4f08-b97b-0c37f877119f" providerId="ADAL" clId="{6B515210-E3E2-4B4B-BC10-968DB84AFC83}" dt="2025-03-12T01:34:08.372" v="83" actId="2696"/>
+      <pc:sldChg chg="addSp modSp add ord">
+        <pc:chgData name="Mohammed Fasha" userId="cc64f42d-a1a6-4f08-b97b-0c37f877119f" providerId="ADAL" clId="{985CD171-9E4A-4264-B045-872AAA800AE3}" dt="2024-10-16T07:08:38.092" v="475" actId="27636"/>
         <pc:sldMkLst>
           <pc:docMk/>
           <pc:sldMk cId="335199774" sldId="265"/>
         </pc:sldMkLst>
       </pc:sldChg>
-      <pc:sldChg chg="del">
-        <pc:chgData name="Mohammed Fasha" userId="cc64f42d-a1a6-4f08-b97b-0c37f877119f" providerId="ADAL" clId="{6B515210-E3E2-4B4B-BC10-968DB84AFC83}" dt="2025-03-12T01:34:08.372" v="83" actId="2696"/>
+      <pc:sldChg chg="addSp delSp modSp add">
+        <pc:chgData name="Mohammed Fasha" userId="cc64f42d-a1a6-4f08-b97b-0c37f877119f" providerId="ADAL" clId="{985CD171-9E4A-4264-B045-872AAA800AE3}" dt="2024-10-16T07:02:57.901" v="385" actId="27636"/>
         <pc:sldMkLst>
           <pc:docMk/>
           <pc:sldMk cId="2810357117" sldId="266"/>
         </pc:sldMkLst>
       </pc:sldChg>
-      <pc:sldChg chg="del">
-        <pc:chgData name="Mohammed Fasha" userId="cc64f42d-a1a6-4f08-b97b-0c37f877119f" providerId="ADAL" clId="{6B515210-E3E2-4B4B-BC10-968DB84AFC83}" dt="2025-03-12T01:34:08.372" v="83" actId="2696"/>
+      <pc:sldChg chg="addSp modSp add">
+        <pc:chgData name="Mohammed Fasha" userId="cc64f42d-a1a6-4f08-b97b-0c37f877119f" providerId="ADAL" clId="{985CD171-9E4A-4264-B045-872AAA800AE3}" dt="2024-10-16T07:03:19.455" v="397" actId="27636"/>
         <pc:sldMkLst>
           <pc:docMk/>
           <pc:sldMk cId="2433706687" sldId="267"/>
         </pc:sldMkLst>
       </pc:sldChg>
-      <pc:sldChg chg="del">
-        <pc:chgData name="Mohammed Fasha" userId="cc64f42d-a1a6-4f08-b97b-0c37f877119f" providerId="ADAL" clId="{6B515210-E3E2-4B4B-BC10-968DB84AFC83}" dt="2025-03-12T01:34:08.372" v="83" actId="2696"/>
+      <pc:sldChg chg="addSp modSp add">
+        <pc:chgData name="Mohammed Fasha" userId="cc64f42d-a1a6-4f08-b97b-0c37f877119f" providerId="ADAL" clId="{985CD171-9E4A-4264-B045-872AAA800AE3}" dt="2024-10-16T08:00:33.047" v="616" actId="14100"/>
         <pc:sldMkLst>
           <pc:docMk/>
           <pc:sldMk cId="4051642265" sldId="268"/>
         </pc:sldMkLst>
       </pc:sldChg>
-      <pc:sldChg chg="del">
-        <pc:chgData name="Mohammed Fasha" userId="cc64f42d-a1a6-4f08-b97b-0c37f877119f" providerId="ADAL" clId="{6B515210-E3E2-4B4B-BC10-968DB84AFC83}" dt="2025-03-12T01:34:08.372" v="83" actId="2696"/>
+      <pc:sldChg chg="addSp modSp add">
+        <pc:chgData name="Mohammed Fasha" userId="cc64f42d-a1a6-4f08-b97b-0c37f877119f" providerId="ADAL" clId="{985CD171-9E4A-4264-B045-872AAA800AE3}" dt="2024-10-16T07:04:05.205" v="412" actId="14100"/>
         <pc:sldMkLst>
           <pc:docMk/>
           <pc:sldMk cId="87410777" sldId="269"/>
         </pc:sldMkLst>
       </pc:sldChg>
-      <pc:sldChg chg="del">
-        <pc:chgData name="Mohammed Fasha" userId="cc64f42d-a1a6-4f08-b97b-0c37f877119f" providerId="ADAL" clId="{6B515210-E3E2-4B4B-BC10-968DB84AFC83}" dt="2025-03-12T01:34:08.372" v="83" actId="2696"/>
+      <pc:sldChg chg="addSp modSp add">
+        <pc:chgData name="Mohammed Fasha" userId="cc64f42d-a1a6-4f08-b97b-0c37f877119f" providerId="ADAL" clId="{985CD171-9E4A-4264-B045-872AAA800AE3}" dt="2024-10-16T07:04:34.185" v="419" actId="14100"/>
         <pc:sldMkLst>
           <pc:docMk/>
           <pc:sldMk cId="595502031" sldId="270"/>
         </pc:sldMkLst>
       </pc:sldChg>
-      <pc:sldChg chg="del">
-        <pc:chgData name="Mohammed Fasha" userId="cc64f42d-a1a6-4f08-b97b-0c37f877119f" providerId="ADAL" clId="{6B515210-E3E2-4B4B-BC10-968DB84AFC83}" dt="2025-03-12T01:34:08.372" v="83" actId="2696"/>
+      <pc:sldChg chg="addSp modSp add ord">
+        <pc:chgData name="Mohammed Fasha" userId="cc64f42d-a1a6-4f08-b97b-0c37f877119f" providerId="ADAL" clId="{985CD171-9E4A-4264-B045-872AAA800AE3}" dt="2024-10-16T07:03:52.480" v="404" actId="27636"/>
         <pc:sldMkLst>
           <pc:docMk/>
           <pc:sldMk cId="3925652072" sldId="271"/>
         </pc:sldMkLst>
       </pc:sldChg>
-      <pc:sldChg chg="del">
-        <pc:chgData name="Mohammed Fasha" userId="cc64f42d-a1a6-4f08-b97b-0c37f877119f" providerId="ADAL" clId="{6B515210-E3E2-4B4B-BC10-968DB84AFC83}" dt="2025-03-12T01:34:08.372" v="83" actId="2696"/>
+      <pc:sldChg chg="addSp modSp add">
+        <pc:chgData name="Mohammed Fasha" userId="cc64f42d-a1a6-4f08-b97b-0c37f877119f" providerId="ADAL" clId="{985CD171-9E4A-4264-B045-872AAA800AE3}" dt="2024-10-16T07:04:42.805" v="424" actId="1076"/>
         <pc:sldMkLst>
           <pc:docMk/>
           <pc:sldMk cId="463115072" sldId="272"/>
         </pc:sldMkLst>
       </pc:sldChg>
-      <pc:sldChg chg="del">
-        <pc:chgData name="Mohammed Fasha" userId="cc64f42d-a1a6-4f08-b97b-0c37f877119f" providerId="ADAL" clId="{6B515210-E3E2-4B4B-BC10-968DB84AFC83}" dt="2025-03-12T01:34:08.372" v="83" actId="2696"/>
+      <pc:sldChg chg="addSp modSp add">
+        <pc:chgData name="Mohammed Fasha" userId="cc64f42d-a1a6-4f08-b97b-0c37f877119f" providerId="ADAL" clId="{985CD171-9E4A-4264-B045-872AAA800AE3}" dt="2024-10-16T07:06:32.789" v="441" actId="14100"/>
         <pc:sldMkLst>
           <pc:docMk/>
           <pc:sldMk cId="3668955903" sldId="273"/>
         </pc:sldMkLst>
       </pc:sldChg>
-      <pc:sldChg chg="del">
-        <pc:chgData name="Mohammed Fasha" userId="cc64f42d-a1a6-4f08-b97b-0c37f877119f" providerId="ADAL" clId="{6B515210-E3E2-4B4B-BC10-968DB84AFC83}" dt="2025-03-12T01:34:08.372" v="83" actId="2696"/>
+      <pc:sldChg chg="addSp delSp modSp add">
+        <pc:chgData name="Mohammed Fasha" userId="cc64f42d-a1a6-4f08-b97b-0c37f877119f" providerId="ADAL" clId="{985CD171-9E4A-4264-B045-872AAA800AE3}" dt="2024-10-16T07:06:45.628" v="449" actId="27636"/>
         <pc:sldMkLst>
           <pc:docMk/>
           <pc:sldMk cId="3192380798" sldId="274"/>
         </pc:sldMkLst>
       </pc:sldChg>
-      <pc:sldChg chg="del">
-        <pc:chgData name="Mohammed Fasha" userId="cc64f42d-a1a6-4f08-b97b-0c37f877119f" providerId="ADAL" clId="{6B515210-E3E2-4B4B-BC10-968DB84AFC83}" dt="2025-03-12T01:34:08.372" v="83" actId="2696"/>
+      <pc:sldChg chg="addSp modSp add">
+        <pc:chgData name="Mohammed Fasha" userId="cc64f42d-a1a6-4f08-b97b-0c37f877119f" providerId="ADAL" clId="{985CD171-9E4A-4264-B045-872AAA800AE3}" dt="2024-10-16T07:07:23.747" v="460" actId="20577"/>
         <pc:sldMkLst>
           <pc:docMk/>
           <pc:sldMk cId="3898002179" sldId="275"/>
         </pc:sldMkLst>
       </pc:sldChg>
-      <pc:sldChg chg="del">
-        <pc:chgData name="Mohammed Fasha" userId="cc64f42d-a1a6-4f08-b97b-0c37f877119f" providerId="ADAL" clId="{6B515210-E3E2-4B4B-BC10-968DB84AFC83}" dt="2025-03-12T01:34:08.372" v="83" actId="2696"/>
+      <pc:sldChg chg="addSp modSp add">
+        <pc:chgData name="Mohammed Fasha" userId="cc64f42d-a1a6-4f08-b97b-0c37f877119f" providerId="ADAL" clId="{985CD171-9E4A-4264-B045-872AAA800AE3}" dt="2024-10-16T07:07:35.379" v="465" actId="27636"/>
         <pc:sldMkLst>
           <pc:docMk/>
           <pc:sldMk cId="1503352162" sldId="276"/>
         </pc:sldMkLst>
       </pc:sldChg>
-      <pc:sldChg chg="del">
-        <pc:chgData name="Mohammed Fasha" userId="cc64f42d-a1a6-4f08-b97b-0c37f877119f" providerId="ADAL" clId="{6B515210-E3E2-4B4B-BC10-968DB84AFC83}" dt="2025-03-12T01:34:08.372" v="83" actId="2696"/>
+      <pc:sldChg chg="addSp delSp modSp add">
+        <pc:chgData name="Mohammed Fasha" userId="cc64f42d-a1a6-4f08-b97b-0c37f877119f" providerId="ADAL" clId="{985CD171-9E4A-4264-B045-872AAA800AE3}" dt="2024-10-16T07:28:38.184" v="537" actId="948"/>
         <pc:sldMkLst>
           <pc:docMk/>
           <pc:sldMk cId="1260131707" sldId="277"/>
         </pc:sldMkLst>
       </pc:sldChg>
-      <pc:sldChg chg="del">
-        <pc:chgData name="Mohammed Fasha" userId="cc64f42d-a1a6-4f08-b97b-0c37f877119f" providerId="ADAL" clId="{6B515210-E3E2-4B4B-BC10-968DB84AFC83}" dt="2025-03-12T01:34:08.372" v="83" actId="2696"/>
+      <pc:sldChg chg="addSp modSp add ord">
+        <pc:chgData name="Mohammed Fasha" userId="cc64f42d-a1a6-4f08-b97b-0c37f877119f" providerId="ADAL" clId="{985CD171-9E4A-4264-B045-872AAA800AE3}" dt="2024-10-16T07:16:54.093" v="501" actId="27636"/>
         <pc:sldMkLst>
           <pc:docMk/>
           <pc:sldMk cId="1324937023" sldId="280"/>
         </pc:sldMkLst>
       </pc:sldChg>
-      <pc:sldChg chg="del">
-        <pc:chgData name="Mohammed Fasha" userId="cc64f42d-a1a6-4f08-b97b-0c37f877119f" providerId="ADAL" clId="{6B515210-E3E2-4B4B-BC10-968DB84AFC83}" dt="2025-03-12T01:34:08.372" v="83" actId="2696"/>
+      <pc:sldChg chg="addSp delSp modSp add">
+        <pc:chgData name="Mohammed Fasha" userId="cc64f42d-a1a6-4f08-b97b-0c37f877119f" providerId="ADAL" clId="{985CD171-9E4A-4264-B045-872AAA800AE3}" dt="2024-10-16T07:44:30.797" v="606" actId="5793"/>
         <pc:sldMkLst>
           <pc:docMk/>
           <pc:sldMk cId="4085727926" sldId="281"/>
         </pc:sldMkLst>
       </pc:sldChg>
-      <pc:sldChg chg="del">
-        <pc:chgData name="Mohammed Fasha" userId="cc64f42d-a1a6-4f08-b97b-0c37f877119f" providerId="ADAL" clId="{6B515210-E3E2-4B4B-BC10-968DB84AFC83}" dt="2025-03-12T01:34:08.372" v="83" actId="2696"/>
+      <pc:sldChg chg="addSp modSp add">
+        <pc:chgData name="Mohammed Fasha" userId="cc64f42d-a1a6-4f08-b97b-0c37f877119f" providerId="ADAL" clId="{985CD171-9E4A-4264-B045-872AAA800AE3}" dt="2024-10-16T08:01:33.772" v="621" actId="403"/>
         <pc:sldMkLst>
           <pc:docMk/>
           <pc:sldMk cId="156012141" sldId="282"/>
         </pc:sldMkLst>
       </pc:sldChg>
-      <pc:sldChg chg="del">
-        <pc:chgData name="Mohammed Fasha" userId="cc64f42d-a1a6-4f08-b97b-0c37f877119f" providerId="ADAL" clId="{6B515210-E3E2-4B4B-BC10-968DB84AFC83}" dt="2025-03-12T01:34:08.372" v="83" actId="2696"/>
+      <pc:sldChg chg="addSp modSp add">
+        <pc:chgData name="Mohammed Fasha" userId="cc64f42d-a1a6-4f08-b97b-0c37f877119f" providerId="ADAL" clId="{985CD171-9E4A-4264-B045-872AAA800AE3}" dt="2024-10-16T08:02:59.311" v="633" actId="404"/>
         <pc:sldMkLst>
           <pc:docMk/>
           <pc:sldMk cId="248623450" sldId="284"/>
         </pc:sldMkLst>
       </pc:sldChg>
-      <pc:sldChg chg="delSp modSp mod">
-        <pc:chgData name="Mohammed Fasha" userId="cc64f42d-a1a6-4f08-b97b-0c37f877119f" providerId="ADAL" clId="{6B515210-E3E2-4B4B-BC10-968DB84AFC83}" dt="2025-03-12T01:46:21.043" v="268" actId="1076"/>
-        <pc:sldMkLst>
-          <pc:docMk/>
-          <pc:sldMk cId="1489447582" sldId="455"/>
-        </pc:sldMkLst>
-      </pc:sldChg>
-      <pc:sldChg chg="addSp delSp modSp new mod chgLayout">
-        <pc:chgData name="Mohammed Fasha" userId="cc64f42d-a1a6-4f08-b97b-0c37f877119f" providerId="ADAL" clId="{6B515210-E3E2-4B4B-BC10-968DB84AFC83}" dt="2025-03-12T03:08:53.710" v="1713" actId="20577"/>
-        <pc:sldMkLst>
-          <pc:docMk/>
-          <pc:sldMk cId="3910887702" sldId="456"/>
-        </pc:sldMkLst>
-      </pc:sldChg>
-      <pc:sldChg chg="add del">
-        <pc:chgData name="Mohammed Fasha" userId="cc64f42d-a1a6-4f08-b97b-0c37f877119f" providerId="ADAL" clId="{6B515210-E3E2-4B4B-BC10-968DB84AFC83}" dt="2025-03-12T01:38:38.172" v="141" actId="2696"/>
-        <pc:sldMkLst>
-          <pc:docMk/>
-          <pc:sldMk cId="3573010135" sldId="457"/>
-        </pc:sldMkLst>
-      </pc:sldChg>
-      <pc:sldChg chg="addSp delSp modSp new mod">
-        <pc:chgData name="Mohammed Fasha" userId="cc64f42d-a1a6-4f08-b97b-0c37f877119f" providerId="ADAL" clId="{6B515210-E3E2-4B4B-BC10-968DB84AFC83}" dt="2025-03-12T02:46:20.092" v="837" actId="14100"/>
-        <pc:sldMkLst>
-          <pc:docMk/>
-          <pc:sldMk cId="3639736080" sldId="457"/>
-        </pc:sldMkLst>
-      </pc:sldChg>
-      <pc:sldChg chg="addSp modSp add mod">
-        <pc:chgData name="Mohammed Fasha" userId="cc64f42d-a1a6-4f08-b97b-0c37f877119f" providerId="ADAL" clId="{6B515210-E3E2-4B4B-BC10-968DB84AFC83}" dt="2025-03-12T01:50:16.041" v="361" actId="27636"/>
-        <pc:sldMkLst>
-          <pc:docMk/>
-          <pc:sldMk cId="2042404279" sldId="458"/>
-        </pc:sldMkLst>
-      </pc:sldChg>
-      <pc:sldChg chg="add del">
-        <pc:chgData name="Mohammed Fasha" userId="cc64f42d-a1a6-4f08-b97b-0c37f877119f" providerId="ADAL" clId="{6B515210-E3E2-4B4B-BC10-968DB84AFC83}" dt="2025-03-12T01:38:38.172" v="141" actId="2696"/>
-        <pc:sldMkLst>
-          <pc:docMk/>
-          <pc:sldMk cId="2742298196" sldId="458"/>
-        </pc:sldMkLst>
-      </pc:sldChg>
-      <pc:sldChg chg="add del">
-        <pc:chgData name="Mohammed Fasha" userId="cc64f42d-a1a6-4f08-b97b-0c37f877119f" providerId="ADAL" clId="{6B515210-E3E2-4B4B-BC10-968DB84AFC83}" dt="2025-03-12T01:38:38.172" v="141" actId="2696"/>
-        <pc:sldMkLst>
-          <pc:docMk/>
-          <pc:sldMk cId="65005378" sldId="459"/>
-        </pc:sldMkLst>
-      </pc:sldChg>
-      <pc:sldChg chg="addSp delSp modSp add mod">
-        <pc:chgData name="Mohammed Fasha" userId="cc64f42d-a1a6-4f08-b97b-0c37f877119f" providerId="ADAL" clId="{6B515210-E3E2-4B4B-BC10-968DB84AFC83}" dt="2025-03-12T03:00:53.810" v="1066" actId="21"/>
-        <pc:sldMkLst>
-          <pc:docMk/>
-          <pc:sldMk cId="2881282849" sldId="459"/>
-        </pc:sldMkLst>
-      </pc:sldChg>
-      <pc:sldChg chg="del">
-        <pc:chgData name="Mohammed Fasha" userId="cc64f42d-a1a6-4f08-b97b-0c37f877119f" providerId="ADAL" clId="{6B515210-E3E2-4B4B-BC10-968DB84AFC83}" dt="2025-03-12T01:34:08.372" v="83" actId="2696"/>
-        <pc:sldMkLst>
-          <pc:docMk/>
-          <pc:sldMk cId="713799975" sldId="460"/>
-        </pc:sldMkLst>
-      </pc:sldChg>
-      <pc:sldChg chg="addSp delSp modSp add mod">
-        <pc:chgData name="Mohammed Fasha" userId="cc64f42d-a1a6-4f08-b97b-0c37f877119f" providerId="ADAL" clId="{6B515210-E3E2-4B4B-BC10-968DB84AFC83}" dt="2025-03-12T02:58:39.819" v="995" actId="27636"/>
-        <pc:sldMkLst>
-          <pc:docMk/>
-          <pc:sldMk cId="945325653" sldId="460"/>
-        </pc:sldMkLst>
-      </pc:sldChg>
-      <pc:sldChg chg="add del">
-        <pc:chgData name="Mohammed Fasha" userId="cc64f42d-a1a6-4f08-b97b-0c37f877119f" providerId="ADAL" clId="{6B515210-E3E2-4B4B-BC10-968DB84AFC83}" dt="2025-03-12T01:38:38.172" v="141" actId="2696"/>
-        <pc:sldMkLst>
-          <pc:docMk/>
-          <pc:sldMk cId="1130963138" sldId="460"/>
-        </pc:sldMkLst>
-      </pc:sldChg>
-      <pc:sldChg chg="del">
-        <pc:chgData name="Mohammed Fasha" userId="cc64f42d-a1a6-4f08-b97b-0c37f877119f" providerId="ADAL" clId="{6B515210-E3E2-4B4B-BC10-968DB84AFC83}" dt="2025-03-12T01:34:08.372" v="83" actId="2696"/>
-        <pc:sldMkLst>
-          <pc:docMk/>
-          <pc:sldMk cId="1559487564" sldId="461"/>
-        </pc:sldMkLst>
-      </pc:sldChg>
-      <pc:sldChg chg="addSp delSp modSp add mod">
-        <pc:chgData name="Mohammed Fasha" userId="cc64f42d-a1a6-4f08-b97b-0c37f877119f" providerId="ADAL" clId="{6B515210-E3E2-4B4B-BC10-968DB84AFC83}" dt="2025-03-12T02:11:44.303" v="509"/>
-        <pc:sldMkLst>
-          <pc:docMk/>
-          <pc:sldMk cId="2248227231" sldId="461"/>
-        </pc:sldMkLst>
-      </pc:sldChg>
-      <pc:sldChg chg="add del">
-        <pc:chgData name="Mohammed Fasha" userId="cc64f42d-a1a6-4f08-b97b-0c37f877119f" providerId="ADAL" clId="{6B515210-E3E2-4B4B-BC10-968DB84AFC83}" dt="2025-03-12T01:38:38.172" v="141" actId="2696"/>
-        <pc:sldMkLst>
-          <pc:docMk/>
-          <pc:sldMk cId="2546861112" sldId="461"/>
-        </pc:sldMkLst>
-      </pc:sldChg>
-      <pc:sldChg chg="add del">
-        <pc:chgData name="Mohammed Fasha" userId="cc64f42d-a1a6-4f08-b97b-0c37f877119f" providerId="ADAL" clId="{6B515210-E3E2-4B4B-BC10-968DB84AFC83}" dt="2025-03-12T01:38:38.172" v="141" actId="2696"/>
-        <pc:sldMkLst>
-          <pc:docMk/>
-          <pc:sldMk cId="376539193" sldId="462"/>
-        </pc:sldMkLst>
-      </pc:sldChg>
-      <pc:sldChg chg="addSp modSp add mod">
-        <pc:chgData name="Mohammed Fasha" userId="cc64f42d-a1a6-4f08-b97b-0c37f877119f" providerId="ADAL" clId="{6B515210-E3E2-4B4B-BC10-968DB84AFC83}" dt="2025-03-12T02:18:24.439" v="598" actId="6549"/>
-        <pc:sldMkLst>
-          <pc:docMk/>
-          <pc:sldMk cId="1427723282" sldId="462"/>
-        </pc:sldMkLst>
-      </pc:sldChg>
-      <pc:sldChg chg="del">
-        <pc:chgData name="Mohammed Fasha" userId="cc64f42d-a1a6-4f08-b97b-0c37f877119f" providerId="ADAL" clId="{6B515210-E3E2-4B4B-BC10-968DB84AFC83}" dt="2025-03-12T01:34:08.372" v="83" actId="2696"/>
-        <pc:sldMkLst>
-          <pc:docMk/>
-          <pc:sldMk cId="3087456825" sldId="462"/>
-        </pc:sldMkLst>
-      </pc:sldChg>
-      <pc:sldChg chg="addSp delSp modSp add mod">
-        <pc:chgData name="Mohammed Fasha" userId="cc64f42d-a1a6-4f08-b97b-0c37f877119f" providerId="ADAL" clId="{6B515210-E3E2-4B4B-BC10-968DB84AFC83}" dt="2025-03-12T02:34:11.888" v="748" actId="14100"/>
-        <pc:sldMkLst>
-          <pc:docMk/>
-          <pc:sldMk cId="538252582" sldId="463"/>
-        </pc:sldMkLst>
-      </pc:sldChg>
-      <pc:sldChg chg="del">
-        <pc:chgData name="Mohammed Fasha" userId="cc64f42d-a1a6-4f08-b97b-0c37f877119f" providerId="ADAL" clId="{6B515210-E3E2-4B4B-BC10-968DB84AFC83}" dt="2025-03-12T01:34:08.372" v="83" actId="2696"/>
-        <pc:sldMkLst>
-          <pc:docMk/>
-          <pc:sldMk cId="1869085755" sldId="463"/>
-        </pc:sldMkLst>
-      </pc:sldChg>
-      <pc:sldChg chg="add del">
-        <pc:chgData name="Mohammed Fasha" userId="cc64f42d-a1a6-4f08-b97b-0c37f877119f" providerId="ADAL" clId="{6B515210-E3E2-4B4B-BC10-968DB84AFC83}" dt="2025-03-12T01:38:38.172" v="141" actId="2696"/>
-        <pc:sldMkLst>
-          <pc:docMk/>
-          <pc:sldMk cId="2204594696" sldId="463"/>
-        </pc:sldMkLst>
-      </pc:sldChg>
-      <pc:sldChg chg="del">
-        <pc:chgData name="Mohammed Fasha" userId="cc64f42d-a1a6-4f08-b97b-0c37f877119f" providerId="ADAL" clId="{6B515210-E3E2-4B4B-BC10-968DB84AFC83}" dt="2025-03-12T01:34:08.372" v="83" actId="2696"/>
-        <pc:sldMkLst>
-          <pc:docMk/>
-          <pc:sldMk cId="4139560" sldId="464"/>
-        </pc:sldMkLst>
-      </pc:sldChg>
-      <pc:sldChg chg="add del">
-        <pc:chgData name="Mohammed Fasha" userId="cc64f42d-a1a6-4f08-b97b-0c37f877119f" providerId="ADAL" clId="{6B515210-E3E2-4B4B-BC10-968DB84AFC83}" dt="2025-03-12T01:38:38.172" v="141" actId="2696"/>
-        <pc:sldMkLst>
-          <pc:docMk/>
-          <pc:sldMk cId="235027490" sldId="464"/>
-        </pc:sldMkLst>
-      </pc:sldChg>
-      <pc:sldChg chg="addSp modSp add mod">
-        <pc:chgData name="Mohammed Fasha" userId="cc64f42d-a1a6-4f08-b97b-0c37f877119f" providerId="ADAL" clId="{6B515210-E3E2-4B4B-BC10-968DB84AFC83}" dt="2025-03-12T02:33:11.507" v="724" actId="1076"/>
-        <pc:sldMkLst>
-          <pc:docMk/>
-          <pc:sldMk cId="1559017199" sldId="464"/>
-        </pc:sldMkLst>
-      </pc:sldChg>
-      <pc:sldChg chg="del">
-        <pc:chgData name="Mohammed Fasha" userId="cc64f42d-a1a6-4f08-b97b-0c37f877119f" providerId="ADAL" clId="{6B515210-E3E2-4B4B-BC10-968DB84AFC83}" dt="2025-03-12T01:34:08.372" v="83" actId="2696"/>
-        <pc:sldMkLst>
-          <pc:docMk/>
-          <pc:sldMk cId="277181267" sldId="465"/>
-        </pc:sldMkLst>
-      </pc:sldChg>
-      <pc:sldChg chg="add del">
-        <pc:chgData name="Mohammed Fasha" userId="cc64f42d-a1a6-4f08-b97b-0c37f877119f" providerId="ADAL" clId="{6B515210-E3E2-4B4B-BC10-968DB84AFC83}" dt="2025-03-12T01:38:38.172" v="141" actId="2696"/>
-        <pc:sldMkLst>
-          <pc:docMk/>
-          <pc:sldMk cId="1358405375" sldId="465"/>
-        </pc:sldMkLst>
-      </pc:sldChg>
-      <pc:sldChg chg="addSp delSp modSp add mod ord">
-        <pc:chgData name="Mohammed Fasha" userId="cc64f42d-a1a6-4f08-b97b-0c37f877119f" providerId="ADAL" clId="{6B515210-E3E2-4B4B-BC10-968DB84AFC83}" dt="2025-03-12T02:30:23.572" v="691" actId="1076"/>
-        <pc:sldMkLst>
-          <pc:docMk/>
-          <pc:sldMk cId="2067025602" sldId="465"/>
-        </pc:sldMkLst>
-      </pc:sldChg>
-      <pc:sldChg chg="addSp delSp modSp add mod">
-        <pc:chgData name="Mohammed Fasha" userId="cc64f42d-a1a6-4f08-b97b-0c37f877119f" providerId="ADAL" clId="{6B515210-E3E2-4B4B-BC10-968DB84AFC83}" dt="2025-03-12T02:31:16.001" v="705" actId="1076"/>
-        <pc:sldMkLst>
-          <pc:docMk/>
-          <pc:sldMk cId="2575217795" sldId="466"/>
-        </pc:sldMkLst>
-      </pc:sldChg>
-      <pc:sldChg chg="add del">
-        <pc:chgData name="Mohammed Fasha" userId="cc64f42d-a1a6-4f08-b97b-0c37f877119f" providerId="ADAL" clId="{6B515210-E3E2-4B4B-BC10-968DB84AFC83}" dt="2025-03-12T01:38:38.172" v="141" actId="2696"/>
-        <pc:sldMkLst>
-          <pc:docMk/>
-          <pc:sldMk cId="2730556220" sldId="466"/>
-        </pc:sldMkLst>
-      </pc:sldChg>
-      <pc:sldChg chg="add del">
-        <pc:chgData name="Mohammed Fasha" userId="cc64f42d-a1a6-4f08-b97b-0c37f877119f" providerId="ADAL" clId="{6B515210-E3E2-4B4B-BC10-968DB84AFC83}" dt="2025-03-12T01:38:38.172" v="141" actId="2696"/>
-        <pc:sldMkLst>
-          <pc:docMk/>
-          <pc:sldMk cId="2076829353" sldId="467"/>
-        </pc:sldMkLst>
-      </pc:sldChg>
-      <pc:sldChg chg="addSp delSp modSp add del mod modClrScheme chgLayout">
-        <pc:chgData name="Mohammed Fasha" userId="cc64f42d-a1a6-4f08-b97b-0c37f877119f" providerId="ADAL" clId="{6B515210-E3E2-4B4B-BC10-968DB84AFC83}" dt="2025-03-12T02:34:20.006" v="749" actId="47"/>
-        <pc:sldMkLst>
-          <pc:docMk/>
-          <pc:sldMk cId="3203545122" sldId="467"/>
-        </pc:sldMkLst>
-      </pc:sldChg>
-      <pc:sldChg chg="add del">
-        <pc:chgData name="Mohammed Fasha" userId="cc64f42d-a1a6-4f08-b97b-0c37f877119f" providerId="ADAL" clId="{6B515210-E3E2-4B4B-BC10-968DB84AFC83}" dt="2025-03-12T01:38:38.172" v="141" actId="2696"/>
-        <pc:sldMkLst>
-          <pc:docMk/>
-          <pc:sldMk cId="176966881" sldId="468"/>
-        </pc:sldMkLst>
-      </pc:sldChg>
-      <pc:sldChg chg="add del">
-        <pc:chgData name="Mohammed Fasha" userId="cc64f42d-a1a6-4f08-b97b-0c37f877119f" providerId="ADAL" clId="{6B515210-E3E2-4B4B-BC10-968DB84AFC83}" dt="2025-03-12T02:34:20.168" v="750" actId="47"/>
-        <pc:sldMkLst>
-          <pc:docMk/>
-          <pc:sldMk cId="2058978584" sldId="468"/>
-        </pc:sldMkLst>
-      </pc:sldChg>
-      <pc:sldChg chg="add del">
-        <pc:chgData name="Mohammed Fasha" userId="cc64f42d-a1a6-4f08-b97b-0c37f877119f" providerId="ADAL" clId="{6B515210-E3E2-4B4B-BC10-968DB84AFC83}" dt="2025-03-12T02:34:20.353" v="751" actId="47"/>
-        <pc:sldMkLst>
-          <pc:docMk/>
-          <pc:sldMk cId="2001259236" sldId="469"/>
-        </pc:sldMkLst>
-      </pc:sldChg>
-      <pc:sldChg chg="add del">
-        <pc:chgData name="Mohammed Fasha" userId="cc64f42d-a1a6-4f08-b97b-0c37f877119f" providerId="ADAL" clId="{6B515210-E3E2-4B4B-BC10-968DB84AFC83}" dt="2025-03-12T01:38:38.172" v="141" actId="2696"/>
-        <pc:sldMkLst>
-          <pc:docMk/>
-          <pc:sldMk cId="2149133959" sldId="469"/>
-        </pc:sldMkLst>
-      </pc:sldChg>
-      <pc:sldChg chg="add del">
-        <pc:chgData name="Mohammed Fasha" userId="cc64f42d-a1a6-4f08-b97b-0c37f877119f" providerId="ADAL" clId="{6B515210-E3E2-4B4B-BC10-968DB84AFC83}" dt="2025-03-12T01:38:38.172" v="141" actId="2696"/>
-        <pc:sldMkLst>
-          <pc:docMk/>
-          <pc:sldMk cId="2184469585" sldId="470"/>
-        </pc:sldMkLst>
-      </pc:sldChg>
-      <pc:sldChg chg="add del">
-        <pc:chgData name="Mohammed Fasha" userId="cc64f42d-a1a6-4f08-b97b-0c37f877119f" providerId="ADAL" clId="{6B515210-E3E2-4B4B-BC10-968DB84AFC83}" dt="2025-03-12T02:34:21.650" v="752" actId="47"/>
-        <pc:sldMkLst>
-          <pc:docMk/>
-          <pc:sldMk cId="4176577481" sldId="470"/>
-        </pc:sldMkLst>
-      </pc:sldChg>
-      <pc:sldChg chg="add del">
-        <pc:chgData name="Mohammed Fasha" userId="cc64f42d-a1a6-4f08-b97b-0c37f877119f" providerId="ADAL" clId="{6B515210-E3E2-4B4B-BC10-968DB84AFC83}" dt="2025-03-12T02:34:22.147" v="753" actId="47"/>
-        <pc:sldMkLst>
-          <pc:docMk/>
-          <pc:sldMk cId="581574831" sldId="471"/>
-        </pc:sldMkLst>
-      </pc:sldChg>
-      <pc:sldChg chg="add del">
-        <pc:chgData name="Mohammed Fasha" userId="cc64f42d-a1a6-4f08-b97b-0c37f877119f" providerId="ADAL" clId="{6B515210-E3E2-4B4B-BC10-968DB84AFC83}" dt="2025-03-12T01:38:38.172" v="141" actId="2696"/>
-        <pc:sldMkLst>
-          <pc:docMk/>
-          <pc:sldMk cId="2059800610" sldId="471"/>
-        </pc:sldMkLst>
-      </pc:sldChg>
-      <pc:sldChg chg="add del">
-        <pc:chgData name="Mohammed Fasha" userId="cc64f42d-a1a6-4f08-b97b-0c37f877119f" providerId="ADAL" clId="{6B515210-E3E2-4B4B-BC10-968DB84AFC83}" dt="2025-03-12T01:38:38.172" v="141" actId="2696"/>
-        <pc:sldMkLst>
-          <pc:docMk/>
-          <pc:sldMk cId="1566193115" sldId="472"/>
-        </pc:sldMkLst>
-      </pc:sldChg>
-      <pc:sldChg chg="add del">
-        <pc:chgData name="Mohammed Fasha" userId="cc64f42d-a1a6-4f08-b97b-0c37f877119f" providerId="ADAL" clId="{6B515210-E3E2-4B4B-BC10-968DB84AFC83}" dt="2025-03-12T02:34:22.723" v="754" actId="47"/>
-        <pc:sldMkLst>
-          <pc:docMk/>
-          <pc:sldMk cId="3652126392" sldId="472"/>
-        </pc:sldMkLst>
-      </pc:sldChg>
-      <pc:sldChg chg="add del">
-        <pc:chgData name="Mohammed Fasha" userId="cc64f42d-a1a6-4f08-b97b-0c37f877119f" providerId="ADAL" clId="{6B515210-E3E2-4B4B-BC10-968DB84AFC83}" dt="2025-03-12T02:34:23.387" v="755" actId="47"/>
-        <pc:sldMkLst>
-          <pc:docMk/>
-          <pc:sldMk cId="3716915739" sldId="473"/>
-        </pc:sldMkLst>
-      </pc:sldChg>
-      <pc:sldChg chg="add del">
-        <pc:chgData name="Mohammed Fasha" userId="cc64f42d-a1a6-4f08-b97b-0c37f877119f" providerId="ADAL" clId="{6B515210-E3E2-4B4B-BC10-968DB84AFC83}" dt="2025-03-12T02:34:24.048" v="756" actId="47"/>
-        <pc:sldMkLst>
-          <pc:docMk/>
-          <pc:sldMk cId="1718835763" sldId="474"/>
-        </pc:sldMkLst>
-      </pc:sldChg>
-      <pc:sldChg chg="add del">
-        <pc:chgData name="Mohammed Fasha" userId="cc64f42d-a1a6-4f08-b97b-0c37f877119f" providerId="ADAL" clId="{6B515210-E3E2-4B4B-BC10-968DB84AFC83}" dt="2025-03-12T02:34:24.615" v="757" actId="47"/>
-        <pc:sldMkLst>
-          <pc:docMk/>
-          <pc:sldMk cId="1692059453" sldId="475"/>
-        </pc:sldMkLst>
-      </pc:sldChg>
-      <pc:sldChg chg="modSp add mod">
-        <pc:chgData name="Mohammed Fasha" userId="cc64f42d-a1a6-4f08-b97b-0c37f877119f" providerId="ADAL" clId="{6B515210-E3E2-4B4B-BC10-968DB84AFC83}" dt="2025-03-12T02:32:31.978" v="715" actId="12"/>
-        <pc:sldMkLst>
-          <pc:docMk/>
-          <pc:sldMk cId="1558611893" sldId="476"/>
-        </pc:sldMkLst>
-      </pc:sldChg>
-      <pc:sldChg chg="addSp delSp modSp add del mod">
-        <pc:chgData name="Mohammed Fasha" userId="cc64f42d-a1a6-4f08-b97b-0c37f877119f" providerId="ADAL" clId="{6B515210-E3E2-4B4B-BC10-968DB84AFC83}" dt="2025-03-12T02:50:02.536" v="890"/>
-        <pc:sldMkLst>
-          <pc:docMk/>
-          <pc:sldMk cId="471849074" sldId="477"/>
-        </pc:sldMkLst>
-      </pc:sldChg>
-      <pc:sldMasterChg chg="modSldLayout">
-        <pc:chgData name="Mohammed Fasha" userId="cc64f42d-a1a6-4f08-b97b-0c37f877119f" providerId="ADAL" clId="{6B515210-E3E2-4B4B-BC10-968DB84AFC83}" dt="2025-03-12T01:38:22.885" v="140" actId="14100"/>
-        <pc:sldMasterMkLst>
-          <pc:docMk/>
-          <pc:sldMasterMk cId="2573801746" sldId="2147483648"/>
-        </pc:sldMasterMkLst>
-        <pc:sldLayoutChg chg="addSp delSp modSp mod">
-          <pc:chgData name="Mohammed Fasha" userId="cc64f42d-a1a6-4f08-b97b-0c37f877119f" providerId="ADAL" clId="{6B515210-E3E2-4B4B-BC10-968DB84AFC83}" dt="2025-03-12T01:38:22.885" v="140" actId="14100"/>
-          <pc:sldLayoutMkLst>
-            <pc:docMk/>
-            <pc:sldMasterMk cId="2573801746" sldId="2147483648"/>
-            <pc:sldLayoutMk cId="3033015503" sldId="2147483650"/>
-          </pc:sldLayoutMkLst>
-        </pc:sldLayoutChg>
-      </pc:sldMasterChg>
     </pc:docChg>
   </pc:docChgLst>
   <pc:docChgLst>
-    <pc:chgData name="Mohammed Fasha" userId="cc64f42d-a1a6-4f08-b97b-0c37f877119f" providerId="ADAL" clId="{F585A28F-34F7-4D28-B641-78252DAB29E0}"/>
-    <pc:docChg chg="undo custSel modSld sldOrd">
-      <pc:chgData name="Mohammed Fasha" userId="cc64f42d-a1a6-4f08-b97b-0c37f877119f" providerId="ADAL" clId="{F585A28F-34F7-4D28-B641-78252DAB29E0}" dt="2025-07-16T09:17:57.509" v="81" actId="114"/>
+    <pc:chgData name="Mohammed Fasha" userId="cc64f42d-a1a6-4f08-b97b-0c37f877119f" providerId="ADAL" clId="{30DD28B9-8B97-487C-83EE-EC2EB54F3F9E}"/>
+    <pc:docChg chg="undo custSel modSld">
+      <pc:chgData name="Mohammed Fasha" userId="cc64f42d-a1a6-4f08-b97b-0c37f877119f" providerId="ADAL" clId="{30DD28B9-8B97-487C-83EE-EC2EB54F3F9E}" dt="2024-10-17T03:04:01.750" v="11" actId="1076"/>
       <pc:docMkLst>
         <pc:docMk/>
       </pc:docMkLst>
       <pc:sldChg chg="modSp mod">
-        <pc:chgData name="Mohammed Fasha" userId="cc64f42d-a1a6-4f08-b97b-0c37f877119f" providerId="ADAL" clId="{F585A28F-34F7-4D28-B641-78252DAB29E0}" dt="2025-07-16T09:14:06.583" v="24" actId="27636"/>
+        <pc:chgData name="Mohammed Fasha" userId="cc64f42d-a1a6-4f08-b97b-0c37f877119f" providerId="ADAL" clId="{30DD28B9-8B97-487C-83EE-EC2EB54F3F9E}" dt="2024-10-16T20:03:44.325" v="2" actId="20577"/>
         <pc:sldMkLst>
           <pc:docMk/>
           <pc:sldMk cId="1162554463" sldId="257"/>
         </pc:sldMkLst>
-        <pc:spChg chg="mod">
-          <ac:chgData name="Mohammed Fasha" userId="cc64f42d-a1a6-4f08-b97b-0c37f877119f" providerId="ADAL" clId="{F585A28F-34F7-4D28-B641-78252DAB29E0}" dt="2025-07-16T09:14:06.583" v="24" actId="27636"/>
-          <ac:spMkLst>
-            <pc:docMk/>
-            <pc:sldMk cId="1162554463" sldId="257"/>
-            <ac:spMk id="3" creationId="{1A647627-019E-4599-BFE9-83A7DEA04B6D}"/>
-          </ac:spMkLst>
-        </pc:spChg>
-        <pc:spChg chg="mod">
-          <ac:chgData name="Mohammed Fasha" userId="cc64f42d-a1a6-4f08-b97b-0c37f877119f" providerId="ADAL" clId="{F585A28F-34F7-4D28-B641-78252DAB29E0}" dt="2025-07-16T09:14:03.934" v="22" actId="403"/>
-          <ac:spMkLst>
-            <pc:docMk/>
-            <pc:sldMk cId="1162554463" sldId="257"/>
-            <ac:spMk id="4" creationId="{929A5FA8-1320-61F3-BC79-488C9BA93D9F}"/>
-          </ac:spMkLst>
-        </pc:spChg>
       </pc:sldChg>
       <pc:sldChg chg="modSp mod">
-        <pc:chgData name="Mohammed Fasha" userId="cc64f42d-a1a6-4f08-b97b-0c37f877119f" providerId="ADAL" clId="{F585A28F-34F7-4D28-B641-78252DAB29E0}" dt="2025-07-16T09:14:22.611" v="25" actId="20577"/>
-        <pc:sldMkLst>
-          <pc:docMk/>
-          <pc:sldMk cId="2881282849" sldId="459"/>
-        </pc:sldMkLst>
-        <pc:spChg chg="mod">
-          <ac:chgData name="Mohammed Fasha" userId="cc64f42d-a1a6-4f08-b97b-0c37f877119f" providerId="ADAL" clId="{F585A28F-34F7-4D28-B641-78252DAB29E0}" dt="2025-07-16T09:14:22.611" v="25" actId="20577"/>
-          <ac:spMkLst>
-            <pc:docMk/>
-            <pc:sldMk cId="2881282849" sldId="459"/>
-            <ac:spMk id="10" creationId="{997C4077-274B-FAF4-67DA-B0DEA55B5FEA}"/>
-          </ac:spMkLst>
-        </pc:spChg>
-      </pc:sldChg>
-      <pc:sldChg chg="modSp mod ord">
-        <pc:chgData name="Mohammed Fasha" userId="cc64f42d-a1a6-4f08-b97b-0c37f877119f" providerId="ADAL" clId="{F585A28F-34F7-4D28-B641-78252DAB29E0}" dt="2025-07-16T09:17:57.509" v="81" actId="114"/>
-        <pc:sldMkLst>
-          <pc:docMk/>
-          <pc:sldMk cId="1427723282" sldId="462"/>
-        </pc:sldMkLst>
-        <pc:spChg chg="mod">
-          <ac:chgData name="Mohammed Fasha" userId="cc64f42d-a1a6-4f08-b97b-0c37f877119f" providerId="ADAL" clId="{F585A28F-34F7-4D28-B641-78252DAB29E0}" dt="2025-07-16T09:17:57.509" v="81" actId="114"/>
-          <ac:spMkLst>
-            <pc:docMk/>
-            <pc:sldMk cId="1427723282" sldId="462"/>
-            <ac:spMk id="2" creationId="{5161A592-C95D-5F4C-D812-FDE1F8B67D98}"/>
-          </ac:spMkLst>
-        </pc:spChg>
+        <pc:chgData name="Mohammed Fasha" userId="cc64f42d-a1a6-4f08-b97b-0c37f877119f" providerId="ADAL" clId="{30DD28B9-8B97-487C-83EE-EC2EB54F3F9E}" dt="2024-10-16T20:03:53.393" v="4" actId="113"/>
+        <pc:sldMkLst>
+          <pc:docMk/>
+          <pc:sldMk cId="706735111" sldId="258"/>
+        </pc:sldMkLst>
+      </pc:sldChg>
+      <pc:sldChg chg="addSp delSp modSp mod">
+        <pc:chgData name="Mohammed Fasha" userId="cc64f42d-a1a6-4f08-b97b-0c37f877119f" providerId="ADAL" clId="{30DD28B9-8B97-487C-83EE-EC2EB54F3F9E}" dt="2024-10-16T20:04:08.776" v="6"/>
+        <pc:sldMkLst>
+          <pc:docMk/>
+          <pc:sldMk cId="2433706687" sldId="267"/>
+        </pc:sldMkLst>
+      </pc:sldChg>
+      <pc:sldChg chg="addSp delSp modSp mod">
+        <pc:chgData name="Mohammed Fasha" userId="cc64f42d-a1a6-4f08-b97b-0c37f877119f" providerId="ADAL" clId="{30DD28B9-8B97-487C-83EE-EC2EB54F3F9E}" dt="2024-10-16T20:04:23.488" v="10" actId="27636"/>
+        <pc:sldMkLst>
+          <pc:docMk/>
+          <pc:sldMk cId="3925652072" sldId="271"/>
+        </pc:sldMkLst>
       </pc:sldChg>
       <pc:sldChg chg="modSp mod">
-        <pc:chgData name="Mohammed Fasha" userId="cc64f42d-a1a6-4f08-b97b-0c37f877119f" providerId="ADAL" clId="{F585A28F-34F7-4D28-B641-78252DAB29E0}" dt="2025-07-16T09:12:22.563" v="0" actId="404"/>
-        <pc:sldMkLst>
-          <pc:docMk/>
-          <pc:sldMk cId="2145969539" sldId="478"/>
-        </pc:sldMkLst>
-        <pc:spChg chg="mod">
-          <ac:chgData name="Mohammed Fasha" userId="cc64f42d-a1a6-4f08-b97b-0c37f877119f" providerId="ADAL" clId="{F585A28F-34F7-4D28-B641-78252DAB29E0}" dt="2025-07-16T09:12:22.563" v="0" actId="404"/>
-          <ac:spMkLst>
-            <pc:docMk/>
-            <pc:sldMk cId="2145969539" sldId="478"/>
-            <ac:spMk id="2" creationId="{595313C8-76FF-2F07-3ED5-814AD3EC72DC}"/>
-          </ac:spMkLst>
-        </pc:spChg>
-      </pc:sldChg>
-      <pc:sldChg chg="modSp mod">
-        <pc:chgData name="Mohammed Fasha" userId="cc64f42d-a1a6-4f08-b97b-0c37f877119f" providerId="ADAL" clId="{F585A28F-34F7-4D28-B641-78252DAB29E0}" dt="2025-07-16T09:14:47.069" v="29" actId="255"/>
-        <pc:sldMkLst>
-          <pc:docMk/>
-          <pc:sldMk cId="1427132372" sldId="479"/>
-        </pc:sldMkLst>
-        <pc:spChg chg="mod">
-          <ac:chgData name="Mohammed Fasha" userId="cc64f42d-a1a6-4f08-b97b-0c37f877119f" providerId="ADAL" clId="{F585A28F-34F7-4D28-B641-78252DAB29E0}" dt="2025-07-16T09:14:47.069" v="29" actId="255"/>
-          <ac:spMkLst>
-            <pc:docMk/>
-            <pc:sldMk cId="1427132372" sldId="479"/>
-            <ac:spMk id="2" creationId="{E56CB444-3023-BA2B-502A-E63C438605D8}"/>
-          </ac:spMkLst>
-        </pc:spChg>
-      </pc:sldChg>
-      <pc:sldChg chg="modSp mod">
-        <pc:chgData name="Mohammed Fasha" userId="cc64f42d-a1a6-4f08-b97b-0c37f877119f" providerId="ADAL" clId="{F585A28F-34F7-4D28-B641-78252DAB29E0}" dt="2025-07-16T09:16:07.771" v="68" actId="1076"/>
-        <pc:sldMkLst>
-          <pc:docMk/>
-          <pc:sldMk cId="3075052158" sldId="480"/>
-        </pc:sldMkLst>
-        <pc:spChg chg="mod">
-          <ac:chgData name="Mohammed Fasha" userId="cc64f42d-a1a6-4f08-b97b-0c37f877119f" providerId="ADAL" clId="{F585A28F-34F7-4D28-B641-78252DAB29E0}" dt="2025-07-16T09:16:02.732" v="67" actId="179"/>
-          <ac:spMkLst>
-            <pc:docMk/>
-            <pc:sldMk cId="3075052158" sldId="480"/>
-            <ac:spMk id="2" creationId="{D7723A21-97D0-9266-6B42-28CBEDC236D9}"/>
-          </ac:spMkLst>
-        </pc:spChg>
-        <pc:picChg chg="mod">
-          <ac:chgData name="Mohammed Fasha" userId="cc64f42d-a1a6-4f08-b97b-0c37f877119f" providerId="ADAL" clId="{F585A28F-34F7-4D28-B641-78252DAB29E0}" dt="2025-07-16T09:16:07.771" v="68" actId="1076"/>
-          <ac:picMkLst>
-            <pc:docMk/>
-            <pc:sldMk cId="3075052158" sldId="480"/>
-            <ac:picMk id="5123" creationId="{7227A453-5C80-EF05-DBFF-BB24669D733C}"/>
-          </ac:picMkLst>
-        </pc:picChg>
-      </pc:sldChg>
-      <pc:sldChg chg="modSp mod">
-        <pc:chgData name="Mohammed Fasha" userId="cc64f42d-a1a6-4f08-b97b-0c37f877119f" providerId="ADAL" clId="{F585A28F-34F7-4D28-B641-78252DAB29E0}" dt="2025-07-16T09:16:45.419" v="74" actId="1076"/>
-        <pc:sldMkLst>
-          <pc:docMk/>
-          <pc:sldMk cId="1949621639" sldId="484"/>
-        </pc:sldMkLst>
-        <pc:spChg chg="mod">
-          <ac:chgData name="Mohammed Fasha" userId="cc64f42d-a1a6-4f08-b97b-0c37f877119f" providerId="ADAL" clId="{F585A28F-34F7-4D28-B641-78252DAB29E0}" dt="2025-07-16T09:16:34.981" v="72" actId="5793"/>
-          <ac:spMkLst>
-            <pc:docMk/>
-            <pc:sldMk cId="1949621639" sldId="484"/>
-            <ac:spMk id="2" creationId="{00E50F6B-D0D0-409C-B437-2D7A32D8857A}"/>
-          </ac:spMkLst>
-        </pc:spChg>
-        <pc:picChg chg="mod">
-          <ac:chgData name="Mohammed Fasha" userId="cc64f42d-a1a6-4f08-b97b-0c37f877119f" providerId="ADAL" clId="{F585A28F-34F7-4D28-B641-78252DAB29E0}" dt="2025-07-16T09:16:42.296" v="73" actId="14100"/>
-          <ac:picMkLst>
-            <pc:docMk/>
-            <pc:sldMk cId="1949621639" sldId="484"/>
-            <ac:picMk id="12" creationId="{ED72E220-66E3-C895-AA2B-7821BAB0B80F}"/>
-          </ac:picMkLst>
-        </pc:picChg>
-        <pc:picChg chg="mod">
-          <ac:chgData name="Mohammed Fasha" userId="cc64f42d-a1a6-4f08-b97b-0c37f877119f" providerId="ADAL" clId="{F585A28F-34F7-4D28-B641-78252DAB29E0}" dt="2025-07-16T09:16:45.419" v="74" actId="1076"/>
-          <ac:picMkLst>
-            <pc:docMk/>
-            <pc:sldMk cId="1949621639" sldId="484"/>
-            <ac:picMk id="13" creationId="{923AB4FC-8803-B130-E7FF-D6F9B65D8759}"/>
-          </ac:picMkLst>
-        </pc:picChg>
-      </pc:sldChg>
+        <pc:chgData name="Mohammed Fasha" userId="cc64f42d-a1a6-4f08-b97b-0c37f877119f" providerId="ADAL" clId="{30DD28B9-8B97-487C-83EE-EC2EB54F3F9E}" dt="2024-10-17T03:04:01.750" v="11" actId="1076"/>
+        <pc:sldMkLst>
+          <pc:docMk/>
+          <pc:sldMk cId="1489447582" sldId="455"/>
+        </pc:sldMkLst>
+      </pc:sldChg>
+    </pc:docChg>
+  </pc:docChgLst>
+  <pc:docChgLst>
+    <pc:chgData name="Mohammed Fasha" userId="cc64f42d-a1a6-4f08-b97b-0c37f877119f" providerId="ADAL" clId="{D1859E10-E91F-4CD4-B9AD-657F2116AC8C}"/>
+    <pc:docChg chg="custSel modMainMaster">
+      <pc:chgData name="Mohammed Fasha" userId="cc64f42d-a1a6-4f08-b97b-0c37f877119f" providerId="ADAL" clId="{D1859E10-E91F-4CD4-B9AD-657F2116AC8C}" dt="2024-11-09T05:23:14.444" v="3" actId="1076"/>
+      <pc:docMkLst>
+        <pc:docMk/>
+      </pc:docMkLst>
+      <pc:sldMasterChg chg="addSp delSp modSp mod">
+        <pc:chgData name="Mohammed Fasha" userId="cc64f42d-a1a6-4f08-b97b-0c37f877119f" providerId="ADAL" clId="{D1859E10-E91F-4CD4-B9AD-657F2116AC8C}" dt="2024-11-09T05:23:14.444" v="3" actId="1076"/>
+        <pc:sldMasterMkLst>
+          <pc:docMk/>
+          <pc:sldMasterMk cId="2573801746" sldId="2147483648"/>
+        </pc:sldMasterMkLst>
+      </pc:sldMasterChg>
     </pc:docChg>
   </pc:docChgLst>
   <pc:docChgLst>
@@ -1235,6 +1462,152 @@
         </pc:picChg>
         <pc:picChg chg="add mod">
           <ac:chgData name="Mohammed Fasha" userId="cc64f42d-a1a6-4f08-b97b-0c37f877119f" providerId="ADAL" clId="{161A7FAA-B398-4429-9FC2-656B0895AF0F}" dt="2025-07-16T08:19:15.788" v="238"/>
+          <ac:picMkLst>
+            <pc:docMk/>
+            <pc:sldMk cId="1949621639" sldId="484"/>
+            <ac:picMk id="13" creationId="{923AB4FC-8803-B130-E7FF-D6F9B65D8759}"/>
+          </ac:picMkLst>
+        </pc:picChg>
+      </pc:sldChg>
+    </pc:docChg>
+  </pc:docChgLst>
+  <pc:docChgLst>
+    <pc:chgData name="Mohammed Fasha" userId="cc64f42d-a1a6-4f08-b97b-0c37f877119f" providerId="ADAL" clId="{F585A28F-34F7-4D28-B641-78252DAB29E0}"/>
+    <pc:docChg chg="undo custSel modSld sldOrd">
+      <pc:chgData name="Mohammed Fasha" userId="cc64f42d-a1a6-4f08-b97b-0c37f877119f" providerId="ADAL" clId="{F585A28F-34F7-4D28-B641-78252DAB29E0}" dt="2025-07-16T09:17:57.509" v="81" actId="114"/>
+      <pc:docMkLst>
+        <pc:docMk/>
+      </pc:docMkLst>
+      <pc:sldChg chg="modSp mod">
+        <pc:chgData name="Mohammed Fasha" userId="cc64f42d-a1a6-4f08-b97b-0c37f877119f" providerId="ADAL" clId="{F585A28F-34F7-4D28-B641-78252DAB29E0}" dt="2025-07-16T09:14:06.583" v="24" actId="27636"/>
+        <pc:sldMkLst>
+          <pc:docMk/>
+          <pc:sldMk cId="1162554463" sldId="257"/>
+        </pc:sldMkLst>
+        <pc:spChg chg="mod">
+          <ac:chgData name="Mohammed Fasha" userId="cc64f42d-a1a6-4f08-b97b-0c37f877119f" providerId="ADAL" clId="{F585A28F-34F7-4D28-B641-78252DAB29E0}" dt="2025-07-16T09:14:06.583" v="24" actId="27636"/>
+          <ac:spMkLst>
+            <pc:docMk/>
+            <pc:sldMk cId="1162554463" sldId="257"/>
+            <ac:spMk id="3" creationId="{1A647627-019E-4599-BFE9-83A7DEA04B6D}"/>
+          </ac:spMkLst>
+        </pc:spChg>
+        <pc:spChg chg="mod">
+          <ac:chgData name="Mohammed Fasha" userId="cc64f42d-a1a6-4f08-b97b-0c37f877119f" providerId="ADAL" clId="{F585A28F-34F7-4D28-B641-78252DAB29E0}" dt="2025-07-16T09:14:03.934" v="22" actId="403"/>
+          <ac:spMkLst>
+            <pc:docMk/>
+            <pc:sldMk cId="1162554463" sldId="257"/>
+            <ac:spMk id="4" creationId="{929A5FA8-1320-61F3-BC79-488C9BA93D9F}"/>
+          </ac:spMkLst>
+        </pc:spChg>
+      </pc:sldChg>
+      <pc:sldChg chg="modSp mod">
+        <pc:chgData name="Mohammed Fasha" userId="cc64f42d-a1a6-4f08-b97b-0c37f877119f" providerId="ADAL" clId="{F585A28F-34F7-4D28-B641-78252DAB29E0}" dt="2025-07-16T09:14:22.611" v="25" actId="20577"/>
+        <pc:sldMkLst>
+          <pc:docMk/>
+          <pc:sldMk cId="2881282849" sldId="459"/>
+        </pc:sldMkLst>
+        <pc:spChg chg="mod">
+          <ac:chgData name="Mohammed Fasha" userId="cc64f42d-a1a6-4f08-b97b-0c37f877119f" providerId="ADAL" clId="{F585A28F-34F7-4D28-B641-78252DAB29E0}" dt="2025-07-16T09:14:22.611" v="25" actId="20577"/>
+          <ac:spMkLst>
+            <pc:docMk/>
+            <pc:sldMk cId="2881282849" sldId="459"/>
+            <ac:spMk id="10" creationId="{997C4077-274B-FAF4-67DA-B0DEA55B5FEA}"/>
+          </ac:spMkLst>
+        </pc:spChg>
+      </pc:sldChg>
+      <pc:sldChg chg="modSp mod ord">
+        <pc:chgData name="Mohammed Fasha" userId="cc64f42d-a1a6-4f08-b97b-0c37f877119f" providerId="ADAL" clId="{F585A28F-34F7-4D28-B641-78252DAB29E0}" dt="2025-07-16T09:17:57.509" v="81" actId="114"/>
+        <pc:sldMkLst>
+          <pc:docMk/>
+          <pc:sldMk cId="1427723282" sldId="462"/>
+        </pc:sldMkLst>
+        <pc:spChg chg="mod">
+          <ac:chgData name="Mohammed Fasha" userId="cc64f42d-a1a6-4f08-b97b-0c37f877119f" providerId="ADAL" clId="{F585A28F-34F7-4D28-B641-78252DAB29E0}" dt="2025-07-16T09:17:57.509" v="81" actId="114"/>
+          <ac:spMkLst>
+            <pc:docMk/>
+            <pc:sldMk cId="1427723282" sldId="462"/>
+            <ac:spMk id="2" creationId="{5161A592-C95D-5F4C-D812-FDE1F8B67D98}"/>
+          </ac:spMkLst>
+        </pc:spChg>
+      </pc:sldChg>
+      <pc:sldChg chg="modSp mod">
+        <pc:chgData name="Mohammed Fasha" userId="cc64f42d-a1a6-4f08-b97b-0c37f877119f" providerId="ADAL" clId="{F585A28F-34F7-4D28-B641-78252DAB29E0}" dt="2025-07-16T09:12:22.563" v="0" actId="404"/>
+        <pc:sldMkLst>
+          <pc:docMk/>
+          <pc:sldMk cId="2145969539" sldId="478"/>
+        </pc:sldMkLst>
+        <pc:spChg chg="mod">
+          <ac:chgData name="Mohammed Fasha" userId="cc64f42d-a1a6-4f08-b97b-0c37f877119f" providerId="ADAL" clId="{F585A28F-34F7-4D28-B641-78252DAB29E0}" dt="2025-07-16T09:12:22.563" v="0" actId="404"/>
+          <ac:spMkLst>
+            <pc:docMk/>
+            <pc:sldMk cId="2145969539" sldId="478"/>
+            <ac:spMk id="2" creationId="{595313C8-76FF-2F07-3ED5-814AD3EC72DC}"/>
+          </ac:spMkLst>
+        </pc:spChg>
+      </pc:sldChg>
+      <pc:sldChg chg="modSp mod">
+        <pc:chgData name="Mohammed Fasha" userId="cc64f42d-a1a6-4f08-b97b-0c37f877119f" providerId="ADAL" clId="{F585A28F-34F7-4D28-B641-78252DAB29E0}" dt="2025-07-16T09:14:47.069" v="29" actId="255"/>
+        <pc:sldMkLst>
+          <pc:docMk/>
+          <pc:sldMk cId="1427132372" sldId="479"/>
+        </pc:sldMkLst>
+        <pc:spChg chg="mod">
+          <ac:chgData name="Mohammed Fasha" userId="cc64f42d-a1a6-4f08-b97b-0c37f877119f" providerId="ADAL" clId="{F585A28F-34F7-4D28-B641-78252DAB29E0}" dt="2025-07-16T09:14:47.069" v="29" actId="255"/>
+          <ac:spMkLst>
+            <pc:docMk/>
+            <pc:sldMk cId="1427132372" sldId="479"/>
+            <ac:spMk id="2" creationId="{E56CB444-3023-BA2B-502A-E63C438605D8}"/>
+          </ac:spMkLst>
+        </pc:spChg>
+      </pc:sldChg>
+      <pc:sldChg chg="modSp mod">
+        <pc:chgData name="Mohammed Fasha" userId="cc64f42d-a1a6-4f08-b97b-0c37f877119f" providerId="ADAL" clId="{F585A28F-34F7-4D28-B641-78252DAB29E0}" dt="2025-07-16T09:16:07.771" v="68" actId="1076"/>
+        <pc:sldMkLst>
+          <pc:docMk/>
+          <pc:sldMk cId="3075052158" sldId="480"/>
+        </pc:sldMkLst>
+        <pc:spChg chg="mod">
+          <ac:chgData name="Mohammed Fasha" userId="cc64f42d-a1a6-4f08-b97b-0c37f877119f" providerId="ADAL" clId="{F585A28F-34F7-4D28-B641-78252DAB29E0}" dt="2025-07-16T09:16:02.732" v="67" actId="179"/>
+          <ac:spMkLst>
+            <pc:docMk/>
+            <pc:sldMk cId="3075052158" sldId="480"/>
+            <ac:spMk id="2" creationId="{D7723A21-97D0-9266-6B42-28CBEDC236D9}"/>
+          </ac:spMkLst>
+        </pc:spChg>
+        <pc:picChg chg="mod">
+          <ac:chgData name="Mohammed Fasha" userId="cc64f42d-a1a6-4f08-b97b-0c37f877119f" providerId="ADAL" clId="{F585A28F-34F7-4D28-B641-78252DAB29E0}" dt="2025-07-16T09:16:07.771" v="68" actId="1076"/>
+          <ac:picMkLst>
+            <pc:docMk/>
+            <pc:sldMk cId="3075052158" sldId="480"/>
+            <ac:picMk id="5123" creationId="{7227A453-5C80-EF05-DBFF-BB24669D733C}"/>
+          </ac:picMkLst>
+        </pc:picChg>
+      </pc:sldChg>
+      <pc:sldChg chg="modSp mod">
+        <pc:chgData name="Mohammed Fasha" userId="cc64f42d-a1a6-4f08-b97b-0c37f877119f" providerId="ADAL" clId="{F585A28F-34F7-4D28-B641-78252DAB29E0}" dt="2025-07-16T09:16:45.419" v="74" actId="1076"/>
+        <pc:sldMkLst>
+          <pc:docMk/>
+          <pc:sldMk cId="1949621639" sldId="484"/>
+        </pc:sldMkLst>
+        <pc:spChg chg="mod">
+          <ac:chgData name="Mohammed Fasha" userId="cc64f42d-a1a6-4f08-b97b-0c37f877119f" providerId="ADAL" clId="{F585A28F-34F7-4D28-B641-78252DAB29E0}" dt="2025-07-16T09:16:34.981" v="72" actId="5793"/>
+          <ac:spMkLst>
+            <pc:docMk/>
+            <pc:sldMk cId="1949621639" sldId="484"/>
+            <ac:spMk id="2" creationId="{00E50F6B-D0D0-409C-B437-2D7A32D8857A}"/>
+          </ac:spMkLst>
+        </pc:spChg>
+        <pc:picChg chg="mod">
+          <ac:chgData name="Mohammed Fasha" userId="cc64f42d-a1a6-4f08-b97b-0c37f877119f" providerId="ADAL" clId="{F585A28F-34F7-4D28-B641-78252DAB29E0}" dt="2025-07-16T09:16:42.296" v="73" actId="14100"/>
+          <ac:picMkLst>
+            <pc:docMk/>
+            <pc:sldMk cId="1949621639" sldId="484"/>
+            <ac:picMk id="12" creationId="{ED72E220-66E3-C895-AA2B-7821BAB0B80F}"/>
+          </ac:picMkLst>
+        </pc:picChg>
+        <pc:picChg chg="mod">
+          <ac:chgData name="Mohammed Fasha" userId="cc64f42d-a1a6-4f08-b97b-0c37f877119f" providerId="ADAL" clId="{F585A28F-34F7-4D28-B641-78252DAB29E0}" dt="2025-07-16T09:16:45.419" v="74" actId="1076"/>
           <ac:picMkLst>
             <pc:docMk/>
             <pc:sldMk cId="1949621639" sldId="484"/>
@@ -1923,236 +2296,6 @@
       </pc:sldChg>
     </pc:docChg>
   </pc:docChgLst>
-  <pc:docChgLst>
-    <pc:chgData name="Mohammed Fasha" userId="cc64f42d-a1a6-4f08-b97b-0c37f877119f" providerId="ADAL" clId="{D1859E10-E91F-4CD4-B9AD-657F2116AC8C}"/>
-    <pc:docChg chg="custSel modMainMaster">
-      <pc:chgData name="Mohammed Fasha" userId="cc64f42d-a1a6-4f08-b97b-0c37f877119f" providerId="ADAL" clId="{D1859E10-E91F-4CD4-B9AD-657F2116AC8C}" dt="2024-11-09T05:23:14.444" v="3" actId="1076"/>
-      <pc:docMkLst>
-        <pc:docMk/>
-      </pc:docMkLst>
-      <pc:sldMasterChg chg="addSp delSp modSp mod">
-        <pc:chgData name="Mohammed Fasha" userId="cc64f42d-a1a6-4f08-b97b-0c37f877119f" providerId="ADAL" clId="{D1859E10-E91F-4CD4-B9AD-657F2116AC8C}" dt="2024-11-09T05:23:14.444" v="3" actId="1076"/>
-        <pc:sldMasterMkLst>
-          <pc:docMk/>
-          <pc:sldMasterMk cId="2573801746" sldId="2147483648"/>
-        </pc:sldMasterMkLst>
-      </pc:sldMasterChg>
-    </pc:docChg>
-  </pc:docChgLst>
-  <pc:docChgLst>
-    <pc:chgData name="Mohammed Fasha" userId="cc64f42d-a1a6-4f08-b97b-0c37f877119f" providerId="ADAL" clId="{30DD28B9-8B97-487C-83EE-EC2EB54F3F9E}"/>
-    <pc:docChg chg="undo custSel modSld">
-      <pc:chgData name="Mohammed Fasha" userId="cc64f42d-a1a6-4f08-b97b-0c37f877119f" providerId="ADAL" clId="{30DD28B9-8B97-487C-83EE-EC2EB54F3F9E}" dt="2024-10-17T03:04:01.750" v="11" actId="1076"/>
-      <pc:docMkLst>
-        <pc:docMk/>
-      </pc:docMkLst>
-      <pc:sldChg chg="modSp mod">
-        <pc:chgData name="Mohammed Fasha" userId="cc64f42d-a1a6-4f08-b97b-0c37f877119f" providerId="ADAL" clId="{30DD28B9-8B97-487C-83EE-EC2EB54F3F9E}" dt="2024-10-16T20:03:44.325" v="2" actId="20577"/>
-        <pc:sldMkLst>
-          <pc:docMk/>
-          <pc:sldMk cId="1162554463" sldId="257"/>
-        </pc:sldMkLst>
-      </pc:sldChg>
-      <pc:sldChg chg="modSp mod">
-        <pc:chgData name="Mohammed Fasha" userId="cc64f42d-a1a6-4f08-b97b-0c37f877119f" providerId="ADAL" clId="{30DD28B9-8B97-487C-83EE-EC2EB54F3F9E}" dt="2024-10-16T20:03:53.393" v="4" actId="113"/>
-        <pc:sldMkLst>
-          <pc:docMk/>
-          <pc:sldMk cId="706735111" sldId="258"/>
-        </pc:sldMkLst>
-      </pc:sldChg>
-      <pc:sldChg chg="addSp delSp modSp mod">
-        <pc:chgData name="Mohammed Fasha" userId="cc64f42d-a1a6-4f08-b97b-0c37f877119f" providerId="ADAL" clId="{30DD28B9-8B97-487C-83EE-EC2EB54F3F9E}" dt="2024-10-16T20:04:08.776" v="6"/>
-        <pc:sldMkLst>
-          <pc:docMk/>
-          <pc:sldMk cId="2433706687" sldId="267"/>
-        </pc:sldMkLst>
-      </pc:sldChg>
-      <pc:sldChg chg="addSp delSp modSp mod">
-        <pc:chgData name="Mohammed Fasha" userId="cc64f42d-a1a6-4f08-b97b-0c37f877119f" providerId="ADAL" clId="{30DD28B9-8B97-487C-83EE-EC2EB54F3F9E}" dt="2024-10-16T20:04:23.488" v="10" actId="27636"/>
-        <pc:sldMkLst>
-          <pc:docMk/>
-          <pc:sldMk cId="3925652072" sldId="271"/>
-        </pc:sldMkLst>
-      </pc:sldChg>
-      <pc:sldChg chg="modSp mod">
-        <pc:chgData name="Mohammed Fasha" userId="cc64f42d-a1a6-4f08-b97b-0c37f877119f" providerId="ADAL" clId="{30DD28B9-8B97-487C-83EE-EC2EB54F3F9E}" dt="2024-10-17T03:04:01.750" v="11" actId="1076"/>
-        <pc:sldMkLst>
-          <pc:docMk/>
-          <pc:sldMk cId="1489447582" sldId="455"/>
-        </pc:sldMkLst>
-      </pc:sldChg>
-    </pc:docChg>
-  </pc:docChgLst>
-  <pc:docChgLst>
-    <pc:chgData name="Mohammed Fasha" userId="cc64f42d-a1a6-4f08-b97b-0c37f877119f" providerId="ADAL" clId="{985CD171-9E4A-4264-B045-872AAA800AE3}"/>
-    <pc:docChg chg="undo custSel addSld delSld modSld sldOrd">
-      <pc:chgData name="Mohammed Fasha" userId="cc64f42d-a1a6-4f08-b97b-0c37f877119f" providerId="ADAL" clId="{985CD171-9E4A-4264-B045-872AAA800AE3}" dt="2024-10-16T08:02:59.311" v="633" actId="404"/>
-      <pc:docMkLst>
-        <pc:docMk/>
-      </pc:docMkLst>
-      <pc:sldChg chg="modSp">
-        <pc:chgData name="Mohammed Fasha" userId="cc64f42d-a1a6-4f08-b97b-0c37f877119f" providerId="ADAL" clId="{985CD171-9E4A-4264-B045-872AAA800AE3}" dt="2024-10-16T07:15:21.970" v="481" actId="27636"/>
-        <pc:sldMkLst>
-          <pc:docMk/>
-          <pc:sldMk cId="1162554463" sldId="257"/>
-        </pc:sldMkLst>
-      </pc:sldChg>
-      <pc:sldChg chg="addSp modSp">
-        <pc:chgData name="Mohammed Fasha" userId="cc64f42d-a1a6-4f08-b97b-0c37f877119f" providerId="ADAL" clId="{985CD171-9E4A-4264-B045-872AAA800AE3}" dt="2024-10-16T07:06:03.884" v="437" actId="1076"/>
-        <pc:sldMkLst>
-          <pc:docMk/>
-          <pc:sldMk cId="706735111" sldId="258"/>
-        </pc:sldMkLst>
-      </pc:sldChg>
-      <pc:sldChg chg="addSp delSp modSp ord">
-        <pc:chgData name="Mohammed Fasha" userId="cc64f42d-a1a6-4f08-b97b-0c37f877119f" providerId="ADAL" clId="{985CD171-9E4A-4264-B045-872AAA800AE3}" dt="2024-10-16T07:00:38.831" v="349" actId="207"/>
-        <pc:sldMkLst>
-          <pc:docMk/>
-          <pc:sldMk cId="4289469650" sldId="261"/>
-        </pc:sldMkLst>
-      </pc:sldChg>
-      <pc:sldChg chg="addSp delSp modSp ord">
-        <pc:chgData name="Mohammed Fasha" userId="cc64f42d-a1a6-4f08-b97b-0c37f877119f" providerId="ADAL" clId="{985CD171-9E4A-4264-B045-872AAA800AE3}" dt="2024-10-16T06:46:39.846" v="191" actId="14100"/>
-        <pc:sldMkLst>
-          <pc:docMk/>
-          <pc:sldMk cId="4130133658" sldId="262"/>
-        </pc:sldMkLst>
-      </pc:sldChg>
-      <pc:sldChg chg="addSp modSp ord">
-        <pc:chgData name="Mohammed Fasha" userId="cc64f42d-a1a6-4f08-b97b-0c37f877119f" providerId="ADAL" clId="{985CD171-9E4A-4264-B045-872AAA800AE3}" dt="2024-10-16T07:55:18.576" v="615" actId="207"/>
-        <pc:sldMkLst>
-          <pc:docMk/>
-          <pc:sldMk cId="4074862586" sldId="263"/>
-        </pc:sldMkLst>
-      </pc:sldChg>
-      <pc:sldChg chg="addSp delSp modSp add">
-        <pc:chgData name="Mohammed Fasha" userId="cc64f42d-a1a6-4f08-b97b-0c37f877119f" providerId="ADAL" clId="{985CD171-9E4A-4264-B045-872AAA800AE3}" dt="2024-10-16T07:54:33.790" v="610"/>
-        <pc:sldMkLst>
-          <pc:docMk/>
-          <pc:sldMk cId="2611575643" sldId="264"/>
-        </pc:sldMkLst>
-      </pc:sldChg>
-      <pc:sldChg chg="addSp modSp add ord">
-        <pc:chgData name="Mohammed Fasha" userId="cc64f42d-a1a6-4f08-b97b-0c37f877119f" providerId="ADAL" clId="{985CD171-9E4A-4264-B045-872AAA800AE3}" dt="2024-10-16T07:08:38.092" v="475" actId="27636"/>
-        <pc:sldMkLst>
-          <pc:docMk/>
-          <pc:sldMk cId="335199774" sldId="265"/>
-        </pc:sldMkLst>
-      </pc:sldChg>
-      <pc:sldChg chg="addSp delSp modSp add">
-        <pc:chgData name="Mohammed Fasha" userId="cc64f42d-a1a6-4f08-b97b-0c37f877119f" providerId="ADAL" clId="{985CD171-9E4A-4264-B045-872AAA800AE3}" dt="2024-10-16T07:02:57.901" v="385" actId="27636"/>
-        <pc:sldMkLst>
-          <pc:docMk/>
-          <pc:sldMk cId="2810357117" sldId="266"/>
-        </pc:sldMkLst>
-      </pc:sldChg>
-      <pc:sldChg chg="addSp modSp add">
-        <pc:chgData name="Mohammed Fasha" userId="cc64f42d-a1a6-4f08-b97b-0c37f877119f" providerId="ADAL" clId="{985CD171-9E4A-4264-B045-872AAA800AE3}" dt="2024-10-16T07:03:19.455" v="397" actId="27636"/>
-        <pc:sldMkLst>
-          <pc:docMk/>
-          <pc:sldMk cId="2433706687" sldId="267"/>
-        </pc:sldMkLst>
-      </pc:sldChg>
-      <pc:sldChg chg="addSp modSp add">
-        <pc:chgData name="Mohammed Fasha" userId="cc64f42d-a1a6-4f08-b97b-0c37f877119f" providerId="ADAL" clId="{985CD171-9E4A-4264-B045-872AAA800AE3}" dt="2024-10-16T08:00:33.047" v="616" actId="14100"/>
-        <pc:sldMkLst>
-          <pc:docMk/>
-          <pc:sldMk cId="4051642265" sldId="268"/>
-        </pc:sldMkLst>
-      </pc:sldChg>
-      <pc:sldChg chg="addSp modSp add">
-        <pc:chgData name="Mohammed Fasha" userId="cc64f42d-a1a6-4f08-b97b-0c37f877119f" providerId="ADAL" clId="{985CD171-9E4A-4264-B045-872AAA800AE3}" dt="2024-10-16T07:04:05.205" v="412" actId="14100"/>
-        <pc:sldMkLst>
-          <pc:docMk/>
-          <pc:sldMk cId="87410777" sldId="269"/>
-        </pc:sldMkLst>
-      </pc:sldChg>
-      <pc:sldChg chg="addSp modSp add">
-        <pc:chgData name="Mohammed Fasha" userId="cc64f42d-a1a6-4f08-b97b-0c37f877119f" providerId="ADAL" clId="{985CD171-9E4A-4264-B045-872AAA800AE3}" dt="2024-10-16T07:04:34.185" v="419" actId="14100"/>
-        <pc:sldMkLst>
-          <pc:docMk/>
-          <pc:sldMk cId="595502031" sldId="270"/>
-        </pc:sldMkLst>
-      </pc:sldChg>
-      <pc:sldChg chg="addSp modSp add ord">
-        <pc:chgData name="Mohammed Fasha" userId="cc64f42d-a1a6-4f08-b97b-0c37f877119f" providerId="ADAL" clId="{985CD171-9E4A-4264-B045-872AAA800AE3}" dt="2024-10-16T07:03:52.480" v="404" actId="27636"/>
-        <pc:sldMkLst>
-          <pc:docMk/>
-          <pc:sldMk cId="3925652072" sldId="271"/>
-        </pc:sldMkLst>
-      </pc:sldChg>
-      <pc:sldChg chg="addSp modSp add">
-        <pc:chgData name="Mohammed Fasha" userId="cc64f42d-a1a6-4f08-b97b-0c37f877119f" providerId="ADAL" clId="{985CD171-9E4A-4264-B045-872AAA800AE3}" dt="2024-10-16T07:04:42.805" v="424" actId="1076"/>
-        <pc:sldMkLst>
-          <pc:docMk/>
-          <pc:sldMk cId="463115072" sldId="272"/>
-        </pc:sldMkLst>
-      </pc:sldChg>
-      <pc:sldChg chg="addSp modSp add">
-        <pc:chgData name="Mohammed Fasha" userId="cc64f42d-a1a6-4f08-b97b-0c37f877119f" providerId="ADAL" clId="{985CD171-9E4A-4264-B045-872AAA800AE3}" dt="2024-10-16T07:06:32.789" v="441" actId="14100"/>
-        <pc:sldMkLst>
-          <pc:docMk/>
-          <pc:sldMk cId="3668955903" sldId="273"/>
-        </pc:sldMkLst>
-      </pc:sldChg>
-      <pc:sldChg chg="addSp delSp modSp add">
-        <pc:chgData name="Mohammed Fasha" userId="cc64f42d-a1a6-4f08-b97b-0c37f877119f" providerId="ADAL" clId="{985CD171-9E4A-4264-B045-872AAA800AE3}" dt="2024-10-16T07:06:45.628" v="449" actId="27636"/>
-        <pc:sldMkLst>
-          <pc:docMk/>
-          <pc:sldMk cId="3192380798" sldId="274"/>
-        </pc:sldMkLst>
-      </pc:sldChg>
-      <pc:sldChg chg="addSp modSp add">
-        <pc:chgData name="Mohammed Fasha" userId="cc64f42d-a1a6-4f08-b97b-0c37f877119f" providerId="ADAL" clId="{985CD171-9E4A-4264-B045-872AAA800AE3}" dt="2024-10-16T07:07:23.747" v="460" actId="20577"/>
-        <pc:sldMkLst>
-          <pc:docMk/>
-          <pc:sldMk cId="3898002179" sldId="275"/>
-        </pc:sldMkLst>
-      </pc:sldChg>
-      <pc:sldChg chg="addSp modSp add">
-        <pc:chgData name="Mohammed Fasha" userId="cc64f42d-a1a6-4f08-b97b-0c37f877119f" providerId="ADAL" clId="{985CD171-9E4A-4264-B045-872AAA800AE3}" dt="2024-10-16T07:07:35.379" v="465" actId="27636"/>
-        <pc:sldMkLst>
-          <pc:docMk/>
-          <pc:sldMk cId="1503352162" sldId="276"/>
-        </pc:sldMkLst>
-      </pc:sldChg>
-      <pc:sldChg chg="addSp delSp modSp add">
-        <pc:chgData name="Mohammed Fasha" userId="cc64f42d-a1a6-4f08-b97b-0c37f877119f" providerId="ADAL" clId="{985CD171-9E4A-4264-B045-872AAA800AE3}" dt="2024-10-16T07:28:38.184" v="537" actId="948"/>
-        <pc:sldMkLst>
-          <pc:docMk/>
-          <pc:sldMk cId="1260131707" sldId="277"/>
-        </pc:sldMkLst>
-      </pc:sldChg>
-      <pc:sldChg chg="addSp modSp add ord">
-        <pc:chgData name="Mohammed Fasha" userId="cc64f42d-a1a6-4f08-b97b-0c37f877119f" providerId="ADAL" clId="{985CD171-9E4A-4264-B045-872AAA800AE3}" dt="2024-10-16T07:16:54.093" v="501" actId="27636"/>
-        <pc:sldMkLst>
-          <pc:docMk/>
-          <pc:sldMk cId="1324937023" sldId="280"/>
-        </pc:sldMkLst>
-      </pc:sldChg>
-      <pc:sldChg chg="addSp delSp modSp add">
-        <pc:chgData name="Mohammed Fasha" userId="cc64f42d-a1a6-4f08-b97b-0c37f877119f" providerId="ADAL" clId="{985CD171-9E4A-4264-B045-872AAA800AE3}" dt="2024-10-16T07:44:30.797" v="606" actId="5793"/>
-        <pc:sldMkLst>
-          <pc:docMk/>
-          <pc:sldMk cId="4085727926" sldId="281"/>
-        </pc:sldMkLst>
-      </pc:sldChg>
-      <pc:sldChg chg="addSp modSp add">
-        <pc:chgData name="Mohammed Fasha" userId="cc64f42d-a1a6-4f08-b97b-0c37f877119f" providerId="ADAL" clId="{985CD171-9E4A-4264-B045-872AAA800AE3}" dt="2024-10-16T08:01:33.772" v="621" actId="403"/>
-        <pc:sldMkLst>
-          <pc:docMk/>
-          <pc:sldMk cId="156012141" sldId="282"/>
-        </pc:sldMkLst>
-      </pc:sldChg>
-      <pc:sldChg chg="addSp modSp add">
-        <pc:chgData name="Mohammed Fasha" userId="cc64f42d-a1a6-4f08-b97b-0c37f877119f" providerId="ADAL" clId="{985CD171-9E4A-4264-B045-872AAA800AE3}" dt="2024-10-16T08:02:59.311" v="633" actId="404"/>
-        <pc:sldMkLst>
-          <pc:docMk/>
-          <pc:sldMk cId="248623450" sldId="284"/>
-        </pc:sldMkLst>
-      </pc:sldChg>
-    </pc:docChg>
-  </pc:docChgLst>
 </pc:chgInfo>
 </file>
 
@@ -2303,7 +2446,7 @@
           <a:p>
             <a:fld id="{D83FB9BE-DA6C-46CF-8E77-0CE63E601AD4}" type="datetimeFigureOut">
               <a:rPr lang="en-US" smtClean="0"/>
-              <a:t>7/27/2025</a:t>
+              <a:t>7/28/2025</a:t>
             </a:fld>
             <a:endParaRPr lang="en-US"/>
           </a:p>
@@ -2501,7 +2644,7 @@
           <a:p>
             <a:fld id="{D83FB9BE-DA6C-46CF-8E77-0CE63E601AD4}" type="datetimeFigureOut">
               <a:rPr lang="en-US" smtClean="0"/>
-              <a:t>7/27/2025</a:t>
+              <a:t>7/28/2025</a:t>
             </a:fld>
             <a:endParaRPr lang="en-US"/>
           </a:p>
@@ -2709,7 +2852,7 @@
           <a:p>
             <a:fld id="{D83FB9BE-DA6C-46CF-8E77-0CE63E601AD4}" type="datetimeFigureOut">
               <a:rPr lang="en-US" smtClean="0"/>
-              <a:t>7/27/2025</a:t>
+              <a:t>7/28/2025</a:t>
             </a:fld>
             <a:endParaRPr lang="en-US"/>
           </a:p>
@@ -3122,7 +3265,7 @@
           <a:p>
             <a:fld id="{D83FB9BE-DA6C-46CF-8E77-0CE63E601AD4}" type="datetimeFigureOut">
               <a:rPr lang="en-US" smtClean="0"/>
-              <a:t>7/27/2025</a:t>
+              <a:t>7/28/2025</a:t>
             </a:fld>
             <a:endParaRPr lang="en-US"/>
           </a:p>
@@ -3387,7 +3530,7 @@
           <a:p>
             <a:fld id="{D83FB9BE-DA6C-46CF-8E77-0CE63E601AD4}" type="datetimeFigureOut">
               <a:rPr lang="en-US" smtClean="0"/>
-              <a:t>7/27/2025</a:t>
+              <a:t>7/28/2025</a:t>
             </a:fld>
             <a:endParaRPr lang="en-US"/>
           </a:p>
@@ -3799,7 +3942,7 @@
           <a:p>
             <a:fld id="{D83FB9BE-DA6C-46CF-8E77-0CE63E601AD4}" type="datetimeFigureOut">
               <a:rPr lang="en-US" smtClean="0"/>
-              <a:t>7/27/2025</a:t>
+              <a:t>7/28/2025</a:t>
             </a:fld>
             <a:endParaRPr lang="en-US"/>
           </a:p>
@@ -3940,7 +4083,7 @@
           <a:p>
             <a:fld id="{D83FB9BE-DA6C-46CF-8E77-0CE63E601AD4}" type="datetimeFigureOut">
               <a:rPr lang="en-US" smtClean="0"/>
-              <a:t>7/27/2025</a:t>
+              <a:t>7/28/2025</a:t>
             </a:fld>
             <a:endParaRPr lang="en-US"/>
           </a:p>
@@ -4053,7 +4196,7 @@
           <a:p>
             <a:fld id="{D83FB9BE-DA6C-46CF-8E77-0CE63E601AD4}" type="datetimeFigureOut">
               <a:rPr lang="en-US" smtClean="0"/>
-              <a:t>7/27/2025</a:t>
+              <a:t>7/28/2025</a:t>
             </a:fld>
             <a:endParaRPr lang="en-US"/>
           </a:p>
@@ -4364,7 +4507,7 @@
           <a:p>
             <a:fld id="{D83FB9BE-DA6C-46CF-8E77-0CE63E601AD4}" type="datetimeFigureOut">
               <a:rPr lang="en-US" smtClean="0"/>
-              <a:t>7/27/2025</a:t>
+              <a:t>7/28/2025</a:t>
             </a:fld>
             <a:endParaRPr lang="en-US"/>
           </a:p>
@@ -4652,7 +4795,7 @@
           <a:p>
             <a:fld id="{D83FB9BE-DA6C-46CF-8E77-0CE63E601AD4}" type="datetimeFigureOut">
               <a:rPr lang="en-US" smtClean="0"/>
-              <a:t>7/27/2025</a:t>
+              <a:t>7/28/2025</a:t>
             </a:fld>
             <a:endParaRPr lang="en-US"/>
           </a:p>
@@ -4893,7 +5036,7 @@
           <a:p>
             <a:fld id="{D83FB9BE-DA6C-46CF-8E77-0CE63E601AD4}" type="datetimeFigureOut">
               <a:rPr lang="en-US" smtClean="0"/>
-              <a:t>7/27/2025</a:t>
+              <a:t>7/28/2025</a:t>
             </a:fld>
             <a:endParaRPr lang="en-US"/>
           </a:p>
@@ -5549,6 +5692,757 @@
   <p:cSld>
     <p:spTree>
       <p:nvGrpSpPr>
+        <p:cNvPr id="1" name="">
+          <a:extLst>
+            <a:ext uri="{FF2B5EF4-FFF2-40B4-BE49-F238E27FC236}">
+              <a16:creationId xmlns:a16="http://schemas.microsoft.com/office/drawing/2014/main" id="{58EDEB5C-3093-1F7B-7FA6-4B77F1E67686}"/>
+            </a:ext>
+          </a:extLst>
+        </p:cNvPr>
+        <p:cNvGrpSpPr/>
+        <p:nvPr/>
+      </p:nvGrpSpPr>
+      <p:grpSpPr>
+        <a:xfrm>
+          <a:off x="0" y="0"/>
+          <a:ext cx="0" cy="0"/>
+          <a:chOff x="0" y="0"/>
+          <a:chExt cx="0" cy="0"/>
+        </a:xfrm>
+      </p:grpSpPr>
+      <p:sp>
+        <p:nvSpPr>
+          <p:cNvPr id="2" name="Content Placeholder 1">
+            <a:extLst>
+              <a:ext uri="{FF2B5EF4-FFF2-40B4-BE49-F238E27FC236}">
+                <a16:creationId xmlns:a16="http://schemas.microsoft.com/office/drawing/2014/main" id="{E892612F-1544-2D60-DC38-ECFBC8778E6E}"/>
+              </a:ext>
+            </a:extLst>
+          </p:cNvPr>
+          <p:cNvSpPr>
+            <a:spLocks noGrp="1"/>
+          </p:cNvSpPr>
+          <p:nvPr>
+            <p:ph idx="1"/>
+          </p:nvPr>
+        </p:nvSpPr>
+        <p:spPr>
+          <a:xfrm>
+            <a:off x="838199" y="1633491"/>
+            <a:ext cx="6588967" cy="3199766"/>
+          </a:xfrm>
+        </p:spPr>
+        <p:txBody>
+          <a:bodyPr>
+            <a:noAutofit/>
+          </a:bodyPr>
+          <a:lstStyle/>
+          <a:p>
+            <a:r>
+              <a:rPr lang="en-US" sz="2000" dirty="0"/>
+              <a:t>In linear regression, the best-fit line is the line that minimizes the error between the predicted and actual values. </a:t>
+            </a:r>
+          </a:p>
+          <a:p>
+            <a:r>
+              <a:rPr lang="en-US" sz="2000" dirty="0"/>
+              <a:t>It represents the relationship between the dependent and independent variables.</a:t>
+            </a:r>
+          </a:p>
+          <a:p>
+            <a:r>
+              <a:rPr lang="en-US" sz="2000" dirty="0"/>
+              <a:t>The goal is to change the slope and the intercept of the line to make the most accurate predictions.</a:t>
+            </a:r>
+          </a:p>
+          <a:p>
+            <a:endParaRPr lang="en-US" sz="2000" dirty="0"/>
+          </a:p>
+        </p:txBody>
+      </p:sp>
+      <p:sp>
+        <p:nvSpPr>
+          <p:cNvPr id="3" name="Title 2">
+            <a:extLst>
+              <a:ext uri="{FF2B5EF4-FFF2-40B4-BE49-F238E27FC236}">
+                <a16:creationId xmlns:a16="http://schemas.microsoft.com/office/drawing/2014/main" id="{725980BE-973B-2E05-6334-7722DF93378D}"/>
+              </a:ext>
+            </a:extLst>
+          </p:cNvPr>
+          <p:cNvSpPr>
+            <a:spLocks noGrp="1"/>
+          </p:cNvSpPr>
+          <p:nvPr>
+            <p:ph type="title"/>
+          </p:nvPr>
+        </p:nvSpPr>
+        <p:spPr/>
+        <p:txBody>
+          <a:bodyPr/>
+          <a:lstStyle/>
+          <a:p>
+            <a:r>
+              <a:rPr lang="en-US" dirty="0"/>
+              <a:t>What is the Best Fit Line?</a:t>
+            </a:r>
+          </a:p>
+        </p:txBody>
+      </p:sp>
+      <p:pic>
+        <p:nvPicPr>
+          <p:cNvPr id="8" name="Picture 7">
+            <a:extLst>
+              <a:ext uri="{FF2B5EF4-FFF2-40B4-BE49-F238E27FC236}">
+                <a16:creationId xmlns:a16="http://schemas.microsoft.com/office/drawing/2014/main" id="{576B1216-E911-2753-B592-C77DC7E9A789}"/>
+              </a:ext>
+            </a:extLst>
+          </p:cNvPr>
+          <p:cNvPicPr>
+            <a:picLocks noChangeAspect="1"/>
+          </p:cNvPicPr>
+          <p:nvPr/>
+        </p:nvPicPr>
+        <p:blipFill>
+          <a:blip r:embed="rId2"/>
+          <a:stretch>
+            <a:fillRect/>
+          </a:stretch>
+        </p:blipFill>
+        <p:spPr>
+          <a:xfrm>
+            <a:off x="7427167" y="1731885"/>
+            <a:ext cx="3926633" cy="2842003"/>
+          </a:xfrm>
+          <a:prstGeom prst="rect">
+            <a:avLst/>
+          </a:prstGeom>
+        </p:spPr>
+      </p:pic>
+      <p:sp>
+        <p:nvSpPr>
+          <p:cNvPr id="10" name="Content Placeholder 1">
+            <a:extLst>
+              <a:ext uri="{FF2B5EF4-FFF2-40B4-BE49-F238E27FC236}">
+                <a16:creationId xmlns:a16="http://schemas.microsoft.com/office/drawing/2014/main" id="{997C4077-274B-FAF4-67DA-B0DEA55B5FEA}"/>
+              </a:ext>
+            </a:extLst>
+          </p:cNvPr>
+          <p:cNvSpPr txBox="1">
+            <a:spLocks/>
+          </p:cNvSpPr>
+          <p:nvPr/>
+        </p:nvSpPr>
+        <p:spPr>
+          <a:xfrm>
+            <a:off x="908178" y="4921017"/>
+            <a:ext cx="10923038" cy="2233126"/>
+          </a:xfrm>
+          <a:prstGeom prst="rect">
+            <a:avLst/>
+          </a:prstGeom>
+        </p:spPr>
+        <p:txBody>
+          <a:bodyPr vert="horz" lIns="91440" tIns="45720" rIns="91440" bIns="45720" rtlCol="0">
+            <a:noAutofit/>
+          </a:bodyPr>
+          <a:lstStyle>
+            <a:lvl1pPr marL="228600" indent="-228600" algn="l" defTabSz="914400" rtl="0" eaLnBrk="1" latinLnBrk="0" hangingPunct="1">
+              <a:lnSpc>
+                <a:spcPct val="90000"/>
+              </a:lnSpc>
+              <a:spcBef>
+                <a:spcPts val="1000"/>
+              </a:spcBef>
+              <a:buFont typeface="Arial" panose="020B0604020202020204" pitchFamily="34" charset="0"/>
+              <a:buChar char="•"/>
+              <a:defRPr sz="2800" kern="1200">
+                <a:solidFill>
+                  <a:schemeClr val="tx1"/>
+                </a:solidFill>
+                <a:latin typeface="+mn-lt"/>
+                <a:ea typeface="+mn-ea"/>
+                <a:cs typeface="+mn-cs"/>
+              </a:defRPr>
+            </a:lvl1pPr>
+            <a:lvl2pPr marL="685800" indent="-228600" algn="l" defTabSz="914400" rtl="0" eaLnBrk="1" latinLnBrk="0" hangingPunct="1">
+              <a:lnSpc>
+                <a:spcPct val="90000"/>
+              </a:lnSpc>
+              <a:spcBef>
+                <a:spcPts val="500"/>
+              </a:spcBef>
+              <a:buFont typeface="Arial" panose="020B0604020202020204" pitchFamily="34" charset="0"/>
+              <a:buChar char="•"/>
+              <a:defRPr sz="2400" kern="1200">
+                <a:solidFill>
+                  <a:schemeClr val="tx1"/>
+                </a:solidFill>
+                <a:latin typeface="+mn-lt"/>
+                <a:ea typeface="+mn-ea"/>
+                <a:cs typeface="+mn-cs"/>
+              </a:defRPr>
+            </a:lvl2pPr>
+            <a:lvl3pPr marL="1143000" indent="-228600" algn="l" defTabSz="914400" rtl="0" eaLnBrk="1" latinLnBrk="0" hangingPunct="1">
+              <a:lnSpc>
+                <a:spcPct val="90000"/>
+              </a:lnSpc>
+              <a:spcBef>
+                <a:spcPts val="500"/>
+              </a:spcBef>
+              <a:buFont typeface="Arial" panose="020B0604020202020204" pitchFamily="34" charset="0"/>
+              <a:buChar char="•"/>
+              <a:defRPr sz="2000" kern="1200">
+                <a:solidFill>
+                  <a:schemeClr val="tx1"/>
+                </a:solidFill>
+                <a:latin typeface="+mn-lt"/>
+                <a:ea typeface="+mn-ea"/>
+                <a:cs typeface="+mn-cs"/>
+              </a:defRPr>
+            </a:lvl3pPr>
+            <a:lvl4pPr marL="1600200" indent="-228600" algn="l" defTabSz="914400" rtl="0" eaLnBrk="1" latinLnBrk="0" hangingPunct="1">
+              <a:lnSpc>
+                <a:spcPct val="90000"/>
+              </a:lnSpc>
+              <a:spcBef>
+                <a:spcPts val="500"/>
+              </a:spcBef>
+              <a:buFont typeface="Arial" panose="020B0604020202020204" pitchFamily="34" charset="0"/>
+              <a:buChar char="•"/>
+              <a:defRPr sz="1800" kern="1200">
+                <a:solidFill>
+                  <a:schemeClr val="tx1"/>
+                </a:solidFill>
+                <a:latin typeface="+mn-lt"/>
+                <a:ea typeface="+mn-ea"/>
+                <a:cs typeface="+mn-cs"/>
+              </a:defRPr>
+            </a:lvl4pPr>
+            <a:lvl5pPr marL="2057400" indent="-228600" algn="l" defTabSz="914400" rtl="0" eaLnBrk="1" latinLnBrk="0" hangingPunct="1">
+              <a:lnSpc>
+                <a:spcPct val="90000"/>
+              </a:lnSpc>
+              <a:spcBef>
+                <a:spcPts val="500"/>
+              </a:spcBef>
+              <a:buFont typeface="Arial" panose="020B0604020202020204" pitchFamily="34" charset="0"/>
+              <a:buChar char="•"/>
+              <a:defRPr sz="1800" kern="1200">
+                <a:solidFill>
+                  <a:schemeClr val="tx1"/>
+                </a:solidFill>
+                <a:latin typeface="+mn-lt"/>
+                <a:ea typeface="+mn-ea"/>
+                <a:cs typeface="+mn-cs"/>
+              </a:defRPr>
+            </a:lvl5pPr>
+            <a:lvl6pPr marL="2514600" indent="-228600" algn="l" defTabSz="914400" rtl="0" eaLnBrk="1" latinLnBrk="0" hangingPunct="1">
+              <a:lnSpc>
+                <a:spcPct val="90000"/>
+              </a:lnSpc>
+              <a:spcBef>
+                <a:spcPts val="500"/>
+              </a:spcBef>
+              <a:buFont typeface="Arial" panose="020B0604020202020204" pitchFamily="34" charset="0"/>
+              <a:buChar char="•"/>
+              <a:defRPr sz="1800" kern="1200">
+                <a:solidFill>
+                  <a:schemeClr val="tx1"/>
+                </a:solidFill>
+                <a:latin typeface="+mn-lt"/>
+                <a:ea typeface="+mn-ea"/>
+                <a:cs typeface="+mn-cs"/>
+              </a:defRPr>
+            </a:lvl6pPr>
+            <a:lvl7pPr marL="2971800" indent="-228600" algn="l" defTabSz="914400" rtl="0" eaLnBrk="1" latinLnBrk="0" hangingPunct="1">
+              <a:lnSpc>
+                <a:spcPct val="90000"/>
+              </a:lnSpc>
+              <a:spcBef>
+                <a:spcPts val="500"/>
+              </a:spcBef>
+              <a:buFont typeface="Arial" panose="020B0604020202020204" pitchFamily="34" charset="0"/>
+              <a:buChar char="•"/>
+              <a:defRPr sz="1800" kern="1200">
+                <a:solidFill>
+                  <a:schemeClr val="tx1"/>
+                </a:solidFill>
+                <a:latin typeface="+mn-lt"/>
+                <a:ea typeface="+mn-ea"/>
+                <a:cs typeface="+mn-cs"/>
+              </a:defRPr>
+            </a:lvl7pPr>
+            <a:lvl8pPr marL="3429000" indent="-228600" algn="l" defTabSz="914400" rtl="0" eaLnBrk="1" latinLnBrk="0" hangingPunct="1">
+              <a:lnSpc>
+                <a:spcPct val="90000"/>
+              </a:lnSpc>
+              <a:spcBef>
+                <a:spcPts val="500"/>
+              </a:spcBef>
+              <a:buFont typeface="Arial" panose="020B0604020202020204" pitchFamily="34" charset="0"/>
+              <a:buChar char="•"/>
+              <a:defRPr sz="1800" kern="1200">
+                <a:solidFill>
+                  <a:schemeClr val="tx1"/>
+                </a:solidFill>
+                <a:latin typeface="+mn-lt"/>
+                <a:ea typeface="+mn-ea"/>
+                <a:cs typeface="+mn-cs"/>
+              </a:defRPr>
+            </a:lvl8pPr>
+            <a:lvl9pPr marL="3886200" indent="-228600" algn="l" defTabSz="914400" rtl="0" eaLnBrk="1" latinLnBrk="0" hangingPunct="1">
+              <a:lnSpc>
+                <a:spcPct val="90000"/>
+              </a:lnSpc>
+              <a:spcBef>
+                <a:spcPts val="500"/>
+              </a:spcBef>
+              <a:buFont typeface="Arial" panose="020B0604020202020204" pitchFamily="34" charset="0"/>
+              <a:buChar char="•"/>
+              <a:defRPr sz="1800" kern="1200">
+                <a:solidFill>
+                  <a:schemeClr val="tx1"/>
+                </a:solidFill>
+                <a:latin typeface="+mn-lt"/>
+                <a:ea typeface="+mn-ea"/>
+                <a:cs typeface="+mn-cs"/>
+              </a:defRPr>
+            </a:lvl9pPr>
+          </a:lstStyle>
+          <a:p>
+            <a:r>
+              <a:rPr lang="en-US" sz="2000" dirty="0"/>
+              <a:t>Linear regression predicts Y based on X, using a straight line to model the relationship. For example, X could be work experience, and Y could be salary. </a:t>
+            </a:r>
+          </a:p>
+          <a:p>
+            <a:r>
+              <a:rPr lang="en-US" sz="2000" dirty="0"/>
+              <a:t>The goal is to find the best-fit line that minimizes the error between predicted and actual values.</a:t>
+            </a:r>
+          </a:p>
+          <a:p>
+            <a:r>
+              <a:rPr lang="en-US" sz="2000" dirty="0"/>
+              <a:t>To find this line, we use a cost function, which helps determine the best values for the line's coefficients.</a:t>
+            </a:r>
+          </a:p>
+        </p:txBody>
+      </p:sp>
+    </p:spTree>
+    <p:extLst>
+      <p:ext uri="{BB962C8B-B14F-4D97-AF65-F5344CB8AC3E}">
+        <p14:creationId xmlns:p14="http://schemas.microsoft.com/office/powerpoint/2010/main" val="2881282849"/>
+      </p:ext>
+    </p:extLst>
+  </p:cSld>
+  <p:clrMapOvr>
+    <a:masterClrMapping/>
+  </p:clrMapOvr>
+</p:sld>
+</file>
+
+<file path=ppt/slides/slide11.xml><?xml version="1.0" encoding="utf-8"?>
+<p:sld xmlns:a="http://schemas.openxmlformats.org/drawingml/2006/main" xmlns:r="http://schemas.openxmlformats.org/officeDocument/2006/relationships" xmlns:p="http://schemas.openxmlformats.org/presentationml/2006/main">
+  <p:cSld>
+    <p:spTree>
+      <p:nvGrpSpPr>
+        <p:cNvPr id="1" name=""/>
+        <p:cNvGrpSpPr/>
+        <p:nvPr/>
+      </p:nvGrpSpPr>
+      <p:grpSpPr>
+        <a:xfrm>
+          <a:off x="0" y="0"/>
+          <a:ext cx="0" cy="0"/>
+          <a:chOff x="0" y="0"/>
+          <a:chExt cx="0" cy="0"/>
+        </a:xfrm>
+      </p:grpSpPr>
+      <p:sp>
+        <p:nvSpPr>
+          <p:cNvPr id="2" name="Content Placeholder 1">
+            <a:extLst>
+              <a:ext uri="{FF2B5EF4-FFF2-40B4-BE49-F238E27FC236}">
+                <a16:creationId xmlns:a16="http://schemas.microsoft.com/office/drawing/2014/main" id="{E56CB444-3023-BA2B-502A-E63C438605D8}"/>
+              </a:ext>
+            </a:extLst>
+          </p:cNvPr>
+          <p:cNvSpPr>
+            <a:spLocks noGrp="1"/>
+          </p:cNvSpPr>
+          <p:nvPr>
+            <p:ph idx="1"/>
+          </p:nvPr>
+        </p:nvSpPr>
+        <p:spPr/>
+        <p:txBody>
+          <a:bodyPr>
+            <a:normAutofit fontScale="92500" lnSpcReduction="10000"/>
+          </a:bodyPr>
+          <a:lstStyle/>
+          <a:p>
+            <a:pPr marL="0" indent="0">
+              <a:buNone/>
+            </a:pPr>
+            <a:r>
+              <a:rPr lang="en-US" sz="2600" b="1" dirty="0"/>
+              <a:t>Four Key Benefits:</a:t>
+            </a:r>
+          </a:p>
+          <a:p>
+            <a:r>
+              <a:rPr lang="en-US" sz="2600" b="1" dirty="0"/>
+              <a:t>Interpretability</a:t>
+            </a:r>
+            <a:r>
+              <a:rPr lang="en-US" sz="2600" dirty="0"/>
+              <a:t> </a:t>
+            </a:r>
+          </a:p>
+          <a:p>
+            <a:pPr lvl="1"/>
+            <a:r>
+              <a:rPr lang="en-US" dirty="0"/>
+              <a:t>Clear, understandable coefficients</a:t>
+            </a:r>
+          </a:p>
+          <a:p>
+            <a:pPr lvl="1"/>
+            <a:r>
+              <a:rPr lang="en-US" dirty="0"/>
+              <a:t>Easy to explain relationships between variables</a:t>
+            </a:r>
+          </a:p>
+          <a:p>
+            <a:r>
+              <a:rPr lang="en-US" sz="2600" b="1" dirty="0"/>
+              <a:t>Simplicity</a:t>
+            </a:r>
+            <a:r>
+              <a:rPr lang="en-US" sz="2600" dirty="0"/>
+              <a:t> </a:t>
+            </a:r>
+          </a:p>
+          <a:p>
+            <a:pPr lvl="1"/>
+            <a:r>
+              <a:rPr lang="en-US" dirty="0"/>
+              <a:t>Transparent and easy to implement</a:t>
+            </a:r>
+          </a:p>
+          <a:p>
+            <a:pPr lvl="1"/>
+            <a:r>
+              <a:rPr lang="en-US" dirty="0"/>
+              <a:t>Foundation for more complex algorithms</a:t>
+            </a:r>
+          </a:p>
+          <a:p>
+            <a:r>
+              <a:rPr lang="en-US" sz="2600" b="1" dirty="0"/>
+              <a:t>Basis for Advanced Models</a:t>
+            </a:r>
+            <a:r>
+              <a:rPr lang="en-US" sz="2600" dirty="0"/>
+              <a:t> </a:t>
+            </a:r>
+          </a:p>
+          <a:p>
+            <a:pPr lvl="1"/>
+            <a:r>
+              <a:rPr lang="en-US" dirty="0"/>
+              <a:t>Building block for regularization (Ridge, Lasso)</a:t>
+            </a:r>
+          </a:p>
+          <a:p>
+            <a:pPr lvl="1"/>
+            <a:r>
+              <a:rPr lang="en-US" dirty="0"/>
+              <a:t>Foundation for support vector machines</a:t>
+            </a:r>
+          </a:p>
+          <a:p>
+            <a:r>
+              <a:rPr lang="en-US" sz="2600" b="1" dirty="0"/>
+              <a:t>Assumption Testing</a:t>
+            </a:r>
+            <a:r>
+              <a:rPr lang="en-US" sz="2600" dirty="0"/>
+              <a:t> </a:t>
+            </a:r>
+          </a:p>
+          <a:p>
+            <a:pPr lvl="1"/>
+            <a:r>
+              <a:rPr lang="en-US" dirty="0"/>
+              <a:t>Validates key data assumptions</a:t>
+            </a:r>
+          </a:p>
+          <a:p>
+            <a:pPr lvl="1"/>
+            <a:r>
+              <a:rPr lang="en-US" dirty="0"/>
+              <a:t>Critical for statistical analysis</a:t>
+            </a:r>
+          </a:p>
+          <a:p>
+            <a:endParaRPr lang="en-US" dirty="0"/>
+          </a:p>
+        </p:txBody>
+      </p:sp>
+      <p:sp>
+        <p:nvSpPr>
+          <p:cNvPr id="3" name="Title 2">
+            <a:extLst>
+              <a:ext uri="{FF2B5EF4-FFF2-40B4-BE49-F238E27FC236}">
+                <a16:creationId xmlns:a16="http://schemas.microsoft.com/office/drawing/2014/main" id="{55B8EC88-FA32-80C6-9212-225795D1FE9E}"/>
+              </a:ext>
+            </a:extLst>
+          </p:cNvPr>
+          <p:cNvSpPr>
+            <a:spLocks noGrp="1"/>
+          </p:cNvSpPr>
+          <p:nvPr>
+            <p:ph type="title"/>
+          </p:nvPr>
+        </p:nvSpPr>
+        <p:spPr/>
+        <p:txBody>
+          <a:bodyPr>
+            <a:normAutofit/>
+          </a:bodyPr>
+          <a:lstStyle/>
+          <a:p>
+            <a:r>
+              <a:rPr lang="en-US" dirty="0"/>
+              <a:t>Why Linear Regression Matters</a:t>
+            </a:r>
+          </a:p>
+        </p:txBody>
+      </p:sp>
+    </p:spTree>
+    <p:extLst>
+      <p:ext uri="{BB962C8B-B14F-4D97-AF65-F5344CB8AC3E}">
+        <p14:creationId xmlns:p14="http://schemas.microsoft.com/office/powerpoint/2010/main" val="1427132372"/>
+      </p:ext>
+    </p:extLst>
+  </p:cSld>
+  <p:clrMapOvr>
+    <a:masterClrMapping/>
+  </p:clrMapOvr>
+</p:sld>
+</file>
+
+<file path=ppt/slides/slide12.xml><?xml version="1.0" encoding="utf-8"?>
+<p:sld xmlns:a="http://schemas.openxmlformats.org/drawingml/2006/main" xmlns:r="http://schemas.openxmlformats.org/officeDocument/2006/relationships" xmlns:p="http://schemas.openxmlformats.org/presentationml/2006/main">
+  <p:cSld>
+    <p:spTree>
+      <p:nvGrpSpPr>
+        <p:cNvPr id="1" name=""/>
+        <p:cNvGrpSpPr/>
+        <p:nvPr/>
+      </p:nvGrpSpPr>
+      <p:grpSpPr>
+        <a:xfrm>
+          <a:off x="0" y="0"/>
+          <a:ext cx="0" cy="0"/>
+          <a:chOff x="0" y="0"/>
+          <a:chExt cx="0" cy="0"/>
+        </a:xfrm>
+      </p:grpSpPr>
+      <p:sp>
+        <p:nvSpPr>
+          <p:cNvPr id="2" name="Content Placeholder 1">
+            <a:extLst>
+              <a:ext uri="{FF2B5EF4-FFF2-40B4-BE49-F238E27FC236}">
+                <a16:creationId xmlns:a16="http://schemas.microsoft.com/office/drawing/2014/main" id="{D7723A21-97D0-9266-6B42-28CBEDC236D9}"/>
+              </a:ext>
+            </a:extLst>
+          </p:cNvPr>
+          <p:cNvSpPr>
+            <a:spLocks noGrp="1"/>
+          </p:cNvSpPr>
+          <p:nvPr>
+            <p:ph idx="1"/>
+          </p:nvPr>
+        </p:nvSpPr>
+        <p:spPr>
+          <a:xfrm>
+            <a:off x="838200" y="1633491"/>
+            <a:ext cx="6470822" cy="5131294"/>
+          </a:xfrm>
+        </p:spPr>
+        <p:txBody>
+          <a:bodyPr>
+            <a:normAutofit/>
+          </a:bodyPr>
+          <a:lstStyle/>
+          <a:p>
+            <a:pPr marL="0" indent="0">
+              <a:buNone/>
+            </a:pPr>
+            <a:r>
+              <a:rPr lang="en-US" sz="2400" b="1" dirty="0"/>
+              <a:t>What Makes a Line "Best-Fit"?</a:t>
+            </a:r>
+          </a:p>
+          <a:p>
+            <a:pPr marL="0" indent="0">
+              <a:buNone/>
+            </a:pPr>
+            <a:r>
+              <a:rPr lang="en-US" sz="2400" dirty="0"/>
+              <a:t>The best-fit line minimizes the error between predicted and actual values.</a:t>
+            </a:r>
+          </a:p>
+          <a:p>
+            <a:pPr marL="0" indent="0">
+              <a:buNone/>
+            </a:pPr>
+            <a:r>
+              <a:rPr lang="en-US" sz="2400" b="1" dirty="0"/>
+              <a:t>Key Components:</a:t>
+            </a:r>
+          </a:p>
+          <a:p>
+            <a:pPr marL="457200" lvl="1"/>
+            <a:r>
+              <a:rPr lang="en-US" sz="2200" b="1" dirty="0"/>
+              <a:t>Slope (β₁): </a:t>
+            </a:r>
+            <a:r>
+              <a:rPr lang="en-US" sz="2200" dirty="0"/>
+              <a:t>How much Y changes for each unit change in X</a:t>
+            </a:r>
+          </a:p>
+          <a:p>
+            <a:pPr marL="457200" lvl="1"/>
+            <a:r>
+              <a:rPr lang="en-US" sz="2200" b="1" dirty="0"/>
+              <a:t>Intercept (β₀): </a:t>
+            </a:r>
+            <a:r>
+              <a:rPr lang="en-US" sz="2200" dirty="0"/>
+              <a:t>Value of Y when X = 0</a:t>
+            </a:r>
+          </a:p>
+          <a:p>
+            <a:r>
+              <a:rPr lang="en-US" sz="2400" dirty="0"/>
+              <a:t>Goal: Find the line that makes the most accurate predictions</a:t>
+            </a:r>
+          </a:p>
+          <a:p>
+            <a:r>
+              <a:rPr lang="en-US" sz="2400" dirty="0"/>
+              <a:t>Mathematical Representation: Ŷ = β₀ + β₁X</a:t>
+            </a:r>
+          </a:p>
+          <a:p>
+            <a:pPr marL="284163" indent="0">
+              <a:buNone/>
+            </a:pPr>
+            <a:r>
+              <a:rPr lang="en-US" sz="2400" dirty="0"/>
+              <a:t>Where Ŷ (pronounced Y Hat) is the predicted value.</a:t>
+            </a:r>
+          </a:p>
+        </p:txBody>
+      </p:sp>
+      <p:sp>
+        <p:nvSpPr>
+          <p:cNvPr id="3" name="Title 2">
+            <a:extLst>
+              <a:ext uri="{FF2B5EF4-FFF2-40B4-BE49-F238E27FC236}">
+                <a16:creationId xmlns:a16="http://schemas.microsoft.com/office/drawing/2014/main" id="{E520913F-E7B6-47CD-911A-B7E553D5285A}"/>
+              </a:ext>
+            </a:extLst>
+          </p:cNvPr>
+          <p:cNvSpPr>
+            <a:spLocks noGrp="1"/>
+          </p:cNvSpPr>
+          <p:nvPr>
+            <p:ph type="title"/>
+          </p:nvPr>
+        </p:nvSpPr>
+        <p:spPr/>
+        <p:txBody>
+          <a:bodyPr/>
+          <a:lstStyle/>
+          <a:p>
+            <a:r>
+              <a:rPr lang="en-US" dirty="0"/>
+              <a:t>The Best-Fit Line Concept</a:t>
+            </a:r>
+          </a:p>
+        </p:txBody>
+      </p:sp>
+      <p:pic>
+        <p:nvPicPr>
+          <p:cNvPr id="5123" name="Picture 3" descr="Fitting Lines to Data | CK-12 Foundation">
+            <a:extLst>
+              <a:ext uri="{FF2B5EF4-FFF2-40B4-BE49-F238E27FC236}">
+                <a16:creationId xmlns:a16="http://schemas.microsoft.com/office/drawing/2014/main" id="{7227A453-5C80-EF05-DBFF-BB24669D733C}"/>
+              </a:ext>
+            </a:extLst>
+          </p:cNvPr>
+          <p:cNvPicPr>
+            <a:picLocks noChangeAspect="1" noChangeArrowheads="1"/>
+          </p:cNvPicPr>
+          <p:nvPr/>
+        </p:nvPicPr>
+        <p:blipFill>
+          <a:blip r:embed="rId2">
+            <a:extLst>
+              <a:ext uri="{28A0092B-C50C-407E-A947-70E740481C1C}">
+                <a14:useLocalDpi xmlns:a14="http://schemas.microsoft.com/office/drawing/2010/main" val="0"/>
+              </a:ext>
+            </a:extLst>
+          </a:blip>
+          <a:srcRect/>
+          <a:stretch>
+            <a:fillRect/>
+          </a:stretch>
+        </p:blipFill>
+        <p:spPr bwMode="auto">
+          <a:xfrm>
+            <a:off x="7309022" y="1633491"/>
+            <a:ext cx="4335878" cy="4324865"/>
+          </a:xfrm>
+          <a:prstGeom prst="rect">
+            <a:avLst/>
+          </a:prstGeom>
+          <a:noFill/>
+          <a:extLst>
+            <a:ext uri="{909E8E84-426E-40DD-AFC4-6F175D3DCCD1}">
+              <a14:hiddenFill xmlns:a14="http://schemas.microsoft.com/office/drawing/2010/main">
+                <a:solidFill>
+                  <a:srgbClr val="FFFFFF"/>
+                </a:solidFill>
+              </a14:hiddenFill>
+            </a:ext>
+          </a:extLst>
+        </p:spPr>
+      </p:pic>
+    </p:spTree>
+    <p:extLst>
+      <p:ext uri="{BB962C8B-B14F-4D97-AF65-F5344CB8AC3E}">
+        <p14:creationId xmlns:p14="http://schemas.microsoft.com/office/powerpoint/2010/main" val="3075052158"/>
+      </p:ext>
+    </p:extLst>
+  </p:cSld>
+  <p:clrMapOvr>
+    <a:masterClrMapping/>
+  </p:clrMapOvr>
+</p:sld>
+</file>
+
+<file path=ppt/slides/slide13.xml><?xml version="1.0" encoding="utf-8"?>
+<p:sld xmlns:a="http://schemas.openxmlformats.org/drawingml/2006/main" xmlns:r="http://schemas.openxmlformats.org/officeDocument/2006/relationships" xmlns:p="http://schemas.openxmlformats.org/presentationml/2006/main">
+  <p:cSld>
+    <p:spTree>
+      <p:nvGrpSpPr>
         <p:cNvPr id="1" name=""/>
         <p:cNvGrpSpPr/>
         <p:nvPr/>
@@ -5746,7 +6640,7 @@
 </p:sld>
 </file>
 
-<file path=ppt/slides/slide11.xml><?xml version="1.0" encoding="utf-8"?>
+<file path=ppt/slides/slide14.xml><?xml version="1.0" encoding="utf-8"?>
 <p:sld xmlns:a="http://schemas.openxmlformats.org/drawingml/2006/main" xmlns:r="http://schemas.openxmlformats.org/officeDocument/2006/relationships" xmlns:p="http://schemas.openxmlformats.org/presentationml/2006/main">
   <p:cSld>
     <p:spTree>
@@ -6172,7 +7066,7 @@
 </p:sld>
 </file>
 
-<file path=ppt/slides/slide12.xml><?xml version="1.0" encoding="utf-8"?>
+<file path=ppt/slides/slide15.xml><?xml version="1.0" encoding="utf-8"?>
 <p:sld xmlns:a="http://schemas.openxmlformats.org/drawingml/2006/main" xmlns:r="http://schemas.openxmlformats.org/officeDocument/2006/relationships" xmlns:p="http://schemas.openxmlformats.org/presentationml/2006/main">
   <p:cSld>
     <p:spTree>
@@ -6589,7 +7483,7 @@
 </p:sld>
 </file>
 
-<file path=ppt/slides/slide13.xml><?xml version="1.0" encoding="utf-8"?>
+<file path=ppt/slides/slide16.xml><?xml version="1.0" encoding="utf-8"?>
 <p:sld xmlns:a="http://schemas.openxmlformats.org/drawingml/2006/main" xmlns:r="http://schemas.openxmlformats.org/officeDocument/2006/relationships" xmlns:p="http://schemas.openxmlformats.org/presentationml/2006/main">
   <p:cSld>
     <p:spTree>
@@ -6756,7 +7650,7 @@
 </p:sld>
 </file>
 
-<file path=ppt/slides/slide14.xml><?xml version="1.0" encoding="utf-8"?>
+<file path=ppt/slides/slide17.xml><?xml version="1.0" encoding="utf-8"?>
 <p:sld xmlns:a="http://schemas.openxmlformats.org/drawingml/2006/main" xmlns:r="http://schemas.openxmlformats.org/officeDocument/2006/relationships" xmlns:p="http://schemas.openxmlformats.org/presentationml/2006/main">
   <p:cSld>
     <p:spTree>
@@ -6933,7 +7827,7 @@
 </p:sld>
 </file>
 
-<file path=ppt/slides/slide15.xml><?xml version="1.0" encoding="utf-8"?>
+<file path=ppt/slides/slide18.xml><?xml version="1.0" encoding="utf-8"?>
 <p:sld xmlns:a="http://schemas.openxmlformats.org/drawingml/2006/main" xmlns:r="http://schemas.openxmlformats.org/officeDocument/2006/relationships" xmlns:p="http://schemas.openxmlformats.org/presentationml/2006/main">
   <p:cSld>
     <p:spTree>
@@ -7293,7 +8187,7 @@
 </p:sld>
 </file>
 
-<file path=ppt/slides/slide16.xml><?xml version="1.0" encoding="utf-8"?>
+<file path=ppt/slides/slide19.xml><?xml version="1.0" encoding="utf-8"?>
 <p:sld xmlns:a="http://schemas.openxmlformats.org/drawingml/2006/main" xmlns:r="http://schemas.openxmlformats.org/officeDocument/2006/relationships" xmlns:p="http://schemas.openxmlformats.org/presentationml/2006/main">
   <p:cSld>
     <p:spTree>
@@ -7475,7 +8369,163 @@
 </p:sld>
 </file>
 
-<file path=ppt/slides/slide17.xml><?xml version="1.0" encoding="utf-8"?>
+<file path=ppt/slides/slide2.xml><?xml version="1.0" encoding="utf-8"?>
+<p:sld xmlns:a="http://schemas.openxmlformats.org/drawingml/2006/main" xmlns:r="http://schemas.openxmlformats.org/officeDocument/2006/relationships" xmlns:p="http://schemas.openxmlformats.org/presentationml/2006/main">
+  <p:cSld>
+    <p:spTree>
+      <p:nvGrpSpPr>
+        <p:cNvPr id="1" name=""/>
+        <p:cNvGrpSpPr/>
+        <p:nvPr/>
+      </p:nvGrpSpPr>
+      <p:grpSpPr>
+        <a:xfrm>
+          <a:off x="0" y="0"/>
+          <a:ext cx="0" cy="0"/>
+          <a:chOff x="0" y="0"/>
+          <a:chExt cx="0" cy="0"/>
+        </a:xfrm>
+      </p:grpSpPr>
+      <p:sp>
+        <p:nvSpPr>
+          <p:cNvPr id="2" name="Content Placeholder 1">
+            <a:extLst>
+              <a:ext uri="{FF2B5EF4-FFF2-40B4-BE49-F238E27FC236}">
+                <a16:creationId xmlns:a16="http://schemas.microsoft.com/office/drawing/2014/main" id="{595313C8-76FF-2F07-3ED5-814AD3EC72DC}"/>
+              </a:ext>
+            </a:extLst>
+          </p:cNvPr>
+          <p:cNvSpPr>
+            <a:spLocks noGrp="1"/>
+          </p:cNvSpPr>
+          <p:nvPr>
+            <p:ph idx="1"/>
+          </p:nvPr>
+        </p:nvSpPr>
+        <p:spPr/>
+        <p:txBody>
+          <a:bodyPr>
+            <a:normAutofit/>
+          </a:bodyPr>
+          <a:lstStyle/>
+          <a:p>
+            <a:pPr marL="0" indent="0">
+              <a:buNone/>
+            </a:pPr>
+            <a:r>
+              <a:rPr lang="en-US" sz="2400" dirty="0"/>
+              <a:t>What You'll Learn:</a:t>
+            </a:r>
+          </a:p>
+          <a:p>
+            <a:r>
+              <a:rPr lang="en-US" sz="2400" dirty="0"/>
+              <a:t>Introduce the concept of supervised learning</a:t>
+            </a:r>
+          </a:p>
+          <a:p>
+            <a:r>
+              <a:rPr lang="en-US" sz="2400" dirty="0"/>
+              <a:t>Understanding regression analysis fundamentals</a:t>
+            </a:r>
+          </a:p>
+          <a:p>
+            <a:r>
+              <a:rPr lang="en-US" sz="2400" dirty="0"/>
+              <a:t>Types of linear regression models</a:t>
+            </a:r>
+          </a:p>
+          <a:p>
+            <a:r>
+              <a:rPr lang="en-US" sz="2400" dirty="0"/>
+              <a:t>Best-fit line, hypothesis function, and OLS method</a:t>
+            </a:r>
+          </a:p>
+          <a:p>
+            <a:r>
+              <a:rPr lang="en-US" sz="2400" dirty="0"/>
+              <a:t>Closed-form solution implementation</a:t>
+            </a:r>
+          </a:p>
+          <a:p>
+            <a:r>
+              <a:rPr lang="en-US" sz="2400" dirty="0"/>
+              <a:t>Gradient descent algorithm</a:t>
+            </a:r>
+          </a:p>
+          <a:p>
+            <a:r>
+              <a:rPr lang="en-US" sz="2400" dirty="0"/>
+              <a:t>Linear regression assumptions</a:t>
+            </a:r>
+          </a:p>
+          <a:p>
+            <a:r>
+              <a:rPr lang="en-US" sz="2400" dirty="0"/>
+              <a:t>Evaluation metrics and performance assessment</a:t>
+            </a:r>
+          </a:p>
+          <a:p>
+            <a:r>
+              <a:rPr lang="en-US" sz="2400" dirty="0"/>
+              <a:t>Practical implementation with scikit-learn</a:t>
+            </a:r>
+          </a:p>
+          <a:p>
+            <a:r>
+              <a:rPr lang="en-US" sz="2400" dirty="0"/>
+              <a:t>Linear Regression Assumptions</a:t>
+            </a:r>
+          </a:p>
+          <a:p>
+            <a:endParaRPr lang="en-US" sz="2400" dirty="0"/>
+          </a:p>
+        </p:txBody>
+      </p:sp>
+      <p:sp>
+        <p:nvSpPr>
+          <p:cNvPr id="3" name="Title 2">
+            <a:extLst>
+              <a:ext uri="{FF2B5EF4-FFF2-40B4-BE49-F238E27FC236}">
+                <a16:creationId xmlns:a16="http://schemas.microsoft.com/office/drawing/2014/main" id="{071A7914-96DB-51CC-53B0-AF8ED0AF6AEC}"/>
+              </a:ext>
+            </a:extLst>
+          </p:cNvPr>
+          <p:cNvSpPr>
+            <a:spLocks noGrp="1"/>
+          </p:cNvSpPr>
+          <p:nvPr>
+            <p:ph type="title"/>
+          </p:nvPr>
+        </p:nvSpPr>
+        <p:spPr/>
+        <p:txBody>
+          <a:bodyPr>
+            <a:normAutofit/>
+          </a:bodyPr>
+          <a:lstStyle/>
+          <a:p>
+            <a:r>
+              <a:rPr lang="en-US" dirty="0"/>
+              <a:t>Topics and Learning Outcomes</a:t>
+            </a:r>
+          </a:p>
+        </p:txBody>
+      </p:sp>
+    </p:spTree>
+    <p:extLst>
+      <p:ext uri="{BB962C8B-B14F-4D97-AF65-F5344CB8AC3E}">
+        <p14:creationId xmlns:p14="http://schemas.microsoft.com/office/powerpoint/2010/main" val="2145969539"/>
+      </p:ext>
+    </p:extLst>
+  </p:cSld>
+  <p:clrMapOvr>
+    <a:masterClrMapping/>
+  </p:clrMapOvr>
+</p:sld>
+</file>
+
+<file path=ppt/slides/slide20.xml><?xml version="1.0" encoding="utf-8"?>
 <p:sld xmlns:a="http://schemas.openxmlformats.org/drawingml/2006/main" xmlns:r="http://schemas.openxmlformats.org/officeDocument/2006/relationships" xmlns:p="http://schemas.openxmlformats.org/presentationml/2006/main">
   <p:cSld>
     <p:spTree>
@@ -7641,7 +8691,7 @@
 </p:sld>
 </file>
 
-<file path=ppt/slides/slide18.xml><?xml version="1.0" encoding="utf-8"?>
+<file path=ppt/slides/slide21.xml><?xml version="1.0" encoding="utf-8"?>
 <p:sld xmlns:a="http://schemas.openxmlformats.org/drawingml/2006/main" xmlns:r="http://schemas.openxmlformats.org/officeDocument/2006/relationships" xmlns:p="http://schemas.openxmlformats.org/presentationml/2006/main">
   <p:cSld>
     <p:spTree>
@@ -7767,7 +8817,7 @@
 </p:sld>
 </file>
 
-<file path=ppt/slides/slide19.xml><?xml version="1.0" encoding="utf-8"?>
+<file path=ppt/slides/slide22.xml><?xml version="1.0" encoding="utf-8"?>
 <p:sld xmlns:a="http://schemas.openxmlformats.org/drawingml/2006/main" xmlns:r="http://schemas.openxmlformats.org/officeDocument/2006/relationships" xmlns:p="http://schemas.openxmlformats.org/presentationml/2006/main">
   <p:cSld>
     <p:spTree>
@@ -7850,163 +8900,7 @@
 </p:sld>
 </file>
 
-<file path=ppt/slides/slide2.xml><?xml version="1.0" encoding="utf-8"?>
-<p:sld xmlns:a="http://schemas.openxmlformats.org/drawingml/2006/main" xmlns:r="http://schemas.openxmlformats.org/officeDocument/2006/relationships" xmlns:p="http://schemas.openxmlformats.org/presentationml/2006/main">
-  <p:cSld>
-    <p:spTree>
-      <p:nvGrpSpPr>
-        <p:cNvPr id="1" name=""/>
-        <p:cNvGrpSpPr/>
-        <p:nvPr/>
-      </p:nvGrpSpPr>
-      <p:grpSpPr>
-        <a:xfrm>
-          <a:off x="0" y="0"/>
-          <a:ext cx="0" cy="0"/>
-          <a:chOff x="0" y="0"/>
-          <a:chExt cx="0" cy="0"/>
-        </a:xfrm>
-      </p:grpSpPr>
-      <p:sp>
-        <p:nvSpPr>
-          <p:cNvPr id="2" name="Content Placeholder 1">
-            <a:extLst>
-              <a:ext uri="{FF2B5EF4-FFF2-40B4-BE49-F238E27FC236}">
-                <a16:creationId xmlns:a16="http://schemas.microsoft.com/office/drawing/2014/main" id="{595313C8-76FF-2F07-3ED5-814AD3EC72DC}"/>
-              </a:ext>
-            </a:extLst>
-          </p:cNvPr>
-          <p:cNvSpPr>
-            <a:spLocks noGrp="1"/>
-          </p:cNvSpPr>
-          <p:nvPr>
-            <p:ph idx="1"/>
-          </p:nvPr>
-        </p:nvSpPr>
-        <p:spPr/>
-        <p:txBody>
-          <a:bodyPr>
-            <a:normAutofit/>
-          </a:bodyPr>
-          <a:lstStyle/>
-          <a:p>
-            <a:pPr marL="0" indent="0">
-              <a:buNone/>
-            </a:pPr>
-            <a:r>
-              <a:rPr lang="en-US" sz="2400" dirty="0"/>
-              <a:t>What You'll Learn:</a:t>
-            </a:r>
-          </a:p>
-          <a:p>
-            <a:r>
-              <a:rPr lang="en-US" sz="2400" dirty="0"/>
-              <a:t>Introduce the concept of supervised learning</a:t>
-            </a:r>
-          </a:p>
-          <a:p>
-            <a:r>
-              <a:rPr lang="en-US" sz="2400" dirty="0"/>
-              <a:t>Understanding regression analysis fundamentals</a:t>
-            </a:r>
-          </a:p>
-          <a:p>
-            <a:r>
-              <a:rPr lang="en-US" sz="2400" dirty="0"/>
-              <a:t>Types of linear regression models</a:t>
-            </a:r>
-          </a:p>
-          <a:p>
-            <a:r>
-              <a:rPr lang="en-US" sz="2400" dirty="0"/>
-              <a:t>Best-fit line, hypothesis function, and OLS method</a:t>
-            </a:r>
-          </a:p>
-          <a:p>
-            <a:r>
-              <a:rPr lang="en-US" sz="2400" dirty="0"/>
-              <a:t>Closed-form solution implementation</a:t>
-            </a:r>
-          </a:p>
-          <a:p>
-            <a:r>
-              <a:rPr lang="en-US" sz="2400" dirty="0"/>
-              <a:t>Gradient descent algorithm</a:t>
-            </a:r>
-          </a:p>
-          <a:p>
-            <a:r>
-              <a:rPr lang="en-US" sz="2400" dirty="0"/>
-              <a:t>Linear regression assumptions</a:t>
-            </a:r>
-          </a:p>
-          <a:p>
-            <a:r>
-              <a:rPr lang="en-US" sz="2400" dirty="0"/>
-              <a:t>Evaluation metrics and performance assessment</a:t>
-            </a:r>
-          </a:p>
-          <a:p>
-            <a:r>
-              <a:rPr lang="en-US" sz="2400" dirty="0"/>
-              <a:t>Practical implementation with scikit-learn</a:t>
-            </a:r>
-          </a:p>
-          <a:p>
-            <a:r>
-              <a:rPr lang="en-US" sz="2400" dirty="0"/>
-              <a:t>Linear Regression Assumptions</a:t>
-            </a:r>
-          </a:p>
-          <a:p>
-            <a:endParaRPr lang="en-US" sz="2400" dirty="0"/>
-          </a:p>
-        </p:txBody>
-      </p:sp>
-      <p:sp>
-        <p:nvSpPr>
-          <p:cNvPr id="3" name="Title 2">
-            <a:extLst>
-              <a:ext uri="{FF2B5EF4-FFF2-40B4-BE49-F238E27FC236}">
-                <a16:creationId xmlns:a16="http://schemas.microsoft.com/office/drawing/2014/main" id="{071A7914-96DB-51CC-53B0-AF8ED0AF6AEC}"/>
-              </a:ext>
-            </a:extLst>
-          </p:cNvPr>
-          <p:cNvSpPr>
-            <a:spLocks noGrp="1"/>
-          </p:cNvSpPr>
-          <p:nvPr>
-            <p:ph type="title"/>
-          </p:nvPr>
-        </p:nvSpPr>
-        <p:spPr/>
-        <p:txBody>
-          <a:bodyPr>
-            <a:normAutofit/>
-          </a:bodyPr>
-          <a:lstStyle/>
-          <a:p>
-            <a:r>
-              <a:rPr lang="en-US" dirty="0"/>
-              <a:t>Topics and Learning Outcomes</a:t>
-            </a:r>
-          </a:p>
-        </p:txBody>
-      </p:sp>
-    </p:spTree>
-    <p:extLst>
-      <p:ext uri="{BB962C8B-B14F-4D97-AF65-F5344CB8AC3E}">
-        <p14:creationId xmlns:p14="http://schemas.microsoft.com/office/powerpoint/2010/main" val="2145969539"/>
-      </p:ext>
-    </p:extLst>
-  </p:cSld>
-  <p:clrMapOvr>
-    <a:masterClrMapping/>
-  </p:clrMapOvr>
-</p:sld>
-</file>
-
-<file path=ppt/slides/slide20.xml><?xml version="1.0" encoding="utf-8"?>
+<file path=ppt/slides/slide23.xml><?xml version="1.0" encoding="utf-8"?>
 <p:sld xmlns:a="http://schemas.openxmlformats.org/drawingml/2006/main" xmlns:r="http://schemas.openxmlformats.org/officeDocument/2006/relationships" xmlns:p="http://schemas.openxmlformats.org/presentationml/2006/main">
   <p:cSld>
     <p:spTree>
@@ -8601,7 +9495,7 @@
 </p:sld>
 </file>
 
-<file path=ppt/slides/slide21.xml><?xml version="1.0" encoding="utf-8"?>
+<file path=ppt/slides/slide24.xml><?xml version="1.0" encoding="utf-8"?>
 <p:sld xmlns:a="http://schemas.openxmlformats.org/drawingml/2006/main" xmlns:r="http://schemas.openxmlformats.org/officeDocument/2006/relationships" xmlns:p="http://schemas.openxmlformats.org/presentationml/2006/main">
   <p:cSld>
     <p:spTree>
@@ -9254,7 +10148,7 @@
 </p:sld>
 </file>
 
-<file path=ppt/slides/slide22.xml><?xml version="1.0" encoding="utf-8"?>
+<file path=ppt/slides/slide25.xml><?xml version="1.0" encoding="utf-8"?>
 <p:sld xmlns:a="http://schemas.openxmlformats.org/drawingml/2006/main" xmlns:r="http://schemas.openxmlformats.org/officeDocument/2006/relationships" xmlns:p="http://schemas.openxmlformats.org/presentationml/2006/main">
   <p:cSld>
     <p:spTree>
@@ -10026,7 +10920,7 @@
 </p:sld>
 </file>
 
-<file path=ppt/slides/slide23.xml><?xml version="1.0" encoding="utf-8"?>
+<file path=ppt/slides/slide26.xml><?xml version="1.0" encoding="utf-8"?>
 <p:sld xmlns:a="http://schemas.openxmlformats.org/drawingml/2006/main" xmlns:r="http://schemas.openxmlformats.org/officeDocument/2006/relationships" xmlns:p="http://schemas.openxmlformats.org/presentationml/2006/main">
   <p:cSld>
     <p:spTree>
@@ -10978,7 +11872,7 @@
 </p:sld>
 </file>
 
-<file path=ppt/slides/slide24.xml><?xml version="1.0" encoding="utf-8"?>
+<file path=ppt/slides/slide27.xml><?xml version="1.0" encoding="utf-8"?>
 <p:sld xmlns:a="http://schemas.openxmlformats.org/drawingml/2006/main" xmlns:r="http://schemas.openxmlformats.org/officeDocument/2006/relationships" xmlns:p="http://schemas.openxmlformats.org/presentationml/2006/main">
   <p:cSld>
     <p:spTree>
@@ -11676,6 +12570,870 @@
 </file>
 
 <file path=ppt/slides/slide3.xml><?xml version="1.0" encoding="utf-8"?>
+<p:sld xmlns:a="http://schemas.openxmlformats.org/drawingml/2006/main" xmlns:r="http://schemas.openxmlformats.org/officeDocument/2006/relationships" xmlns:p="http://schemas.openxmlformats.org/presentationml/2006/main">
+  <p:cSld>
+    <p:spTree>
+      <p:nvGrpSpPr>
+        <p:cNvPr id="1" name="">
+          <a:extLst>
+            <a:ext uri="{FF2B5EF4-FFF2-40B4-BE49-F238E27FC236}">
+              <a16:creationId xmlns:a16="http://schemas.microsoft.com/office/drawing/2014/main" id="{4D109BE8-DA6C-1254-E03E-F698EB124F5D}"/>
+            </a:ext>
+          </a:extLst>
+        </p:cNvPr>
+        <p:cNvGrpSpPr/>
+        <p:nvPr/>
+      </p:nvGrpSpPr>
+      <p:grpSpPr>
+        <a:xfrm>
+          <a:off x="0" y="0"/>
+          <a:ext cx="0" cy="0"/>
+          <a:chOff x="0" y="0"/>
+          <a:chExt cx="0" cy="0"/>
+        </a:xfrm>
+      </p:grpSpPr>
+      <p:sp>
+        <p:nvSpPr>
+          <p:cNvPr id="2" name="Content Placeholder 1">
+            <a:extLst>
+              <a:ext uri="{FF2B5EF4-FFF2-40B4-BE49-F238E27FC236}">
+                <a16:creationId xmlns:a16="http://schemas.microsoft.com/office/drawing/2014/main" id="{6CE15484-70F8-0665-3400-03EA635FE864}"/>
+              </a:ext>
+            </a:extLst>
+          </p:cNvPr>
+          <p:cNvSpPr>
+            <a:spLocks noGrp="1"/>
+          </p:cNvSpPr>
+          <p:nvPr>
+            <p:ph idx="1"/>
+          </p:nvPr>
+        </p:nvSpPr>
+        <p:spPr>
+          <a:xfrm>
+            <a:off x="838200" y="1633491"/>
+            <a:ext cx="6724650" cy="5131294"/>
+          </a:xfrm>
+        </p:spPr>
+        <p:txBody>
+          <a:bodyPr>
+            <a:normAutofit fontScale="92500"/>
+          </a:bodyPr>
+          <a:lstStyle/>
+          <a:p>
+            <a:r>
+              <a:rPr lang="en-US" b="1" dirty="0"/>
+              <a:t>Concept:</a:t>
+            </a:r>
+            <a:r>
+              <a:rPr lang="en-US" dirty="0"/>
+              <a:t> ML is the engine behind most AI, allowing systems to learn from data without explicit programming.</a:t>
+            </a:r>
+          </a:p>
+          <a:p>
+            <a:r>
+              <a:rPr lang="en-US" b="1" dirty="0"/>
+              <a:t>How it works (simplified):</a:t>
+            </a:r>
+            <a:endParaRPr lang="en-US" dirty="0"/>
+          </a:p>
+          <a:p>
+            <a:pPr lvl="1"/>
+            <a:r>
+              <a:rPr lang="en-US" b="1" dirty="0"/>
+              <a:t>Data Input:</a:t>
+            </a:r>
+            <a:r>
+              <a:rPr lang="en-US" dirty="0"/>
+              <a:t> Provide historical data with known outcomes.</a:t>
+            </a:r>
+          </a:p>
+          <a:p>
+            <a:pPr lvl="1"/>
+            <a:r>
+              <a:rPr lang="en-US" b="1" dirty="0"/>
+              <a:t>Learning:</a:t>
+            </a:r>
+            <a:r>
+              <a:rPr lang="en-US" dirty="0"/>
+              <a:t> Algorithm identifies patterns and relationships.</a:t>
+            </a:r>
+          </a:p>
+          <a:p>
+            <a:pPr lvl="1"/>
+            <a:r>
+              <a:rPr lang="en-US" b="1" dirty="0"/>
+              <a:t>Prediction/Decision:</a:t>
+            </a:r>
+            <a:r>
+              <a:rPr lang="en-US" dirty="0"/>
+              <a:t> Uses learned patterns on new data to make informed decisions or predictions.</a:t>
+            </a:r>
+          </a:p>
+          <a:p>
+            <a:r>
+              <a:rPr lang="en-US" b="1" dirty="0"/>
+              <a:t>Why it's transformative:</a:t>
+            </a:r>
+            <a:r>
+              <a:rPr lang="en-US" dirty="0"/>
+              <a:t> Enables data-driven decision-making at scale, identifies hidden insights, and automates complex tasks.</a:t>
+            </a:r>
+          </a:p>
+          <a:p>
+            <a:endParaRPr lang="en-US" dirty="0"/>
+          </a:p>
+        </p:txBody>
+      </p:sp>
+      <p:sp>
+        <p:nvSpPr>
+          <p:cNvPr id="3" name="Title 2">
+            <a:extLst>
+              <a:ext uri="{FF2B5EF4-FFF2-40B4-BE49-F238E27FC236}">
+                <a16:creationId xmlns:a16="http://schemas.microsoft.com/office/drawing/2014/main" id="{A519CCFF-5416-B2F2-D152-80B5D8DA4E73}"/>
+              </a:ext>
+            </a:extLst>
+          </p:cNvPr>
+          <p:cNvSpPr>
+            <a:spLocks noGrp="1"/>
+          </p:cNvSpPr>
+          <p:nvPr>
+            <p:ph type="title"/>
+          </p:nvPr>
+        </p:nvSpPr>
+        <p:spPr/>
+        <p:txBody>
+          <a:bodyPr>
+            <a:normAutofit/>
+          </a:bodyPr>
+          <a:lstStyle/>
+          <a:p>
+            <a:r>
+              <a:rPr lang="en-US" dirty="0"/>
+              <a:t>Machine Learning</a:t>
+            </a:r>
+          </a:p>
+        </p:txBody>
+      </p:sp>
+      <p:pic>
+        <p:nvPicPr>
+          <p:cNvPr id="3074" name="Picture 2" descr="Conventional Programming VS Machine Learning | by Ruben Stefanus | Medium">
+            <a:extLst>
+              <a:ext uri="{FF2B5EF4-FFF2-40B4-BE49-F238E27FC236}">
+                <a16:creationId xmlns:a16="http://schemas.microsoft.com/office/drawing/2014/main" id="{2FBD570F-A62D-631D-F1DC-2EE577BDEF95}"/>
+              </a:ext>
+            </a:extLst>
+          </p:cNvPr>
+          <p:cNvPicPr>
+            <a:picLocks noChangeAspect="1" noChangeArrowheads="1"/>
+          </p:cNvPicPr>
+          <p:nvPr/>
+        </p:nvPicPr>
+        <p:blipFill>
+          <a:blip r:embed="rId2">
+            <a:extLst>
+              <a:ext uri="{28A0092B-C50C-407E-A947-70E740481C1C}">
+                <a14:useLocalDpi xmlns:a14="http://schemas.microsoft.com/office/drawing/2010/main" val="0"/>
+              </a:ext>
+            </a:extLst>
+          </a:blip>
+          <a:srcRect/>
+          <a:stretch>
+            <a:fillRect/>
+          </a:stretch>
+        </p:blipFill>
+        <p:spPr bwMode="auto">
+          <a:xfrm>
+            <a:off x="7562850" y="1765720"/>
+            <a:ext cx="3790950" cy="2343150"/>
+          </a:xfrm>
+          <a:prstGeom prst="rect">
+            <a:avLst/>
+          </a:prstGeom>
+          <a:noFill/>
+          <a:extLst>
+            <a:ext uri="{909E8E84-426E-40DD-AFC4-6F175D3DCCD1}">
+              <a14:hiddenFill xmlns:a14="http://schemas.microsoft.com/office/drawing/2010/main">
+                <a:solidFill>
+                  <a:srgbClr val="FFFFFF"/>
+                </a:solidFill>
+              </a14:hiddenFill>
+            </a:ext>
+          </a:extLst>
+        </p:spPr>
+      </p:pic>
+    </p:spTree>
+    <p:extLst>
+      <p:ext uri="{BB962C8B-B14F-4D97-AF65-F5344CB8AC3E}">
+        <p14:creationId xmlns:p14="http://schemas.microsoft.com/office/powerpoint/2010/main" val="3728469856"/>
+      </p:ext>
+    </p:extLst>
+  </p:cSld>
+  <p:clrMapOvr>
+    <a:masterClrMapping/>
+  </p:clrMapOvr>
+</p:sld>
+</file>
+
+<file path=ppt/slides/slide4.xml><?xml version="1.0" encoding="utf-8"?>
+<p:sld xmlns:a="http://schemas.openxmlformats.org/drawingml/2006/main" xmlns:r="http://schemas.openxmlformats.org/officeDocument/2006/relationships" xmlns:p="http://schemas.openxmlformats.org/presentationml/2006/main">
+  <p:cSld>
+    <p:spTree>
+      <p:nvGrpSpPr>
+        <p:cNvPr id="1" name="">
+          <a:extLst>
+            <a:ext uri="{FF2B5EF4-FFF2-40B4-BE49-F238E27FC236}">
+              <a16:creationId xmlns:a16="http://schemas.microsoft.com/office/drawing/2014/main" id="{FFB98EE9-2C50-E68E-F0DB-D597478A08AC}"/>
+            </a:ext>
+          </a:extLst>
+        </p:cNvPr>
+        <p:cNvGrpSpPr/>
+        <p:nvPr/>
+      </p:nvGrpSpPr>
+      <p:grpSpPr>
+        <a:xfrm>
+          <a:off x="0" y="0"/>
+          <a:ext cx="0" cy="0"/>
+          <a:chOff x="0" y="0"/>
+          <a:chExt cx="0" cy="0"/>
+        </a:xfrm>
+      </p:grpSpPr>
+      <p:sp>
+        <p:nvSpPr>
+          <p:cNvPr id="2" name="Content Placeholder 1">
+            <a:extLst>
+              <a:ext uri="{FF2B5EF4-FFF2-40B4-BE49-F238E27FC236}">
+                <a16:creationId xmlns:a16="http://schemas.microsoft.com/office/drawing/2014/main" id="{7A175F36-413A-2EE8-A632-91E824FB290E}"/>
+              </a:ext>
+            </a:extLst>
+          </p:cNvPr>
+          <p:cNvSpPr>
+            <a:spLocks noGrp="1"/>
+          </p:cNvSpPr>
+          <p:nvPr>
+            <p:ph idx="1"/>
+          </p:nvPr>
+        </p:nvSpPr>
+        <p:spPr>
+          <a:xfrm>
+            <a:off x="838200" y="1633491"/>
+            <a:ext cx="6671553" cy="5131294"/>
+          </a:xfrm>
+        </p:spPr>
+        <p:txBody>
+          <a:bodyPr>
+            <a:normAutofit fontScale="85000" lnSpcReduction="20000"/>
+          </a:bodyPr>
+          <a:lstStyle/>
+          <a:p>
+            <a:pPr marL="0" indent="0">
+              <a:buNone/>
+            </a:pPr>
+            <a:r>
+              <a:rPr lang="en-US" b="1" dirty="0"/>
+              <a:t>Concept:</a:t>
+            </a:r>
+            <a:r>
+              <a:rPr lang="en-US" dirty="0"/>
+              <a:t> Learning from </a:t>
+            </a:r>
+            <a:r>
+              <a:rPr lang="en-US" b="1" dirty="0"/>
+              <a:t>labeled data</a:t>
+            </a:r>
+            <a:r>
+              <a:rPr lang="en-US" dirty="0"/>
+              <a:t> (input-output pairs).</a:t>
+            </a:r>
+          </a:p>
+          <a:p>
+            <a:pPr marL="0" indent="0">
+              <a:buNone/>
+            </a:pPr>
+            <a:r>
+              <a:rPr lang="en-US" b="1" dirty="0"/>
+              <a:t>1. Regression (Predicting a Number):</a:t>
+            </a:r>
+            <a:endParaRPr lang="en-US" dirty="0"/>
+          </a:p>
+          <a:p>
+            <a:pPr lvl="1"/>
+            <a:r>
+              <a:rPr lang="en-US" i="1" dirty="0"/>
+              <a:t>Goal:</a:t>
+            </a:r>
+            <a:r>
+              <a:rPr lang="en-US" dirty="0"/>
+              <a:t> Predict a </a:t>
+            </a:r>
+            <a:r>
+              <a:rPr lang="en-US" dirty="0">
+                <a:solidFill>
+                  <a:srgbClr val="FF0000"/>
+                </a:solidFill>
+              </a:rPr>
+              <a:t>continuous numerical </a:t>
+            </a:r>
+            <a:r>
+              <a:rPr lang="en-US" dirty="0"/>
+              <a:t>value.</a:t>
+            </a:r>
+          </a:p>
+          <a:p>
+            <a:pPr lvl="1"/>
+            <a:r>
+              <a:rPr lang="en-US" i="1" dirty="0"/>
+              <a:t>Business Applications:</a:t>
+            </a:r>
+            <a:endParaRPr lang="en-US" dirty="0"/>
+          </a:p>
+          <a:p>
+            <a:pPr marL="796925" lvl="2"/>
+            <a:r>
+              <a:rPr lang="en-US" b="1" dirty="0"/>
+              <a:t>Sales Forecasting:</a:t>
+            </a:r>
+            <a:r>
+              <a:rPr lang="en-US" dirty="0"/>
+              <a:t> Predicting future revenue based on historical sales, promotions, economic indicators.</a:t>
+            </a:r>
+          </a:p>
+          <a:p>
+            <a:pPr marL="796925" lvl="2"/>
+            <a:r>
+              <a:rPr lang="en-US" b="1" dirty="0"/>
+              <a:t>Customer Lifetime Value (CLV):</a:t>
+            </a:r>
+            <a:r>
+              <a:rPr lang="en-US" dirty="0"/>
+              <a:t> Estimating the total revenue a customer will generate.</a:t>
+            </a:r>
+          </a:p>
+          <a:p>
+            <a:pPr marL="796925" lvl="2"/>
+            <a:r>
+              <a:rPr lang="en-US" b="1" dirty="0"/>
+              <a:t>Property Valuation:</a:t>
+            </a:r>
+            <a:r>
+              <a:rPr lang="en-US" dirty="0"/>
+              <a:t> Predicting house prices based on features.</a:t>
+            </a:r>
+          </a:p>
+          <a:p>
+            <a:pPr marL="0" indent="0">
+              <a:buNone/>
+            </a:pPr>
+            <a:r>
+              <a:rPr lang="en-US" b="1" dirty="0"/>
+              <a:t>2. Classification (Predicting a Category):</a:t>
+            </a:r>
+            <a:endParaRPr lang="en-US" dirty="0"/>
+          </a:p>
+          <a:p>
+            <a:pPr lvl="1"/>
+            <a:r>
+              <a:rPr lang="en-US" i="1" dirty="0"/>
+              <a:t>Goal:</a:t>
+            </a:r>
+            <a:r>
+              <a:rPr lang="en-US" dirty="0"/>
+              <a:t> Assign data points to predefined </a:t>
+            </a:r>
+            <a:r>
+              <a:rPr lang="en-US" dirty="0">
+                <a:solidFill>
+                  <a:srgbClr val="FF0000"/>
+                </a:solidFill>
+              </a:rPr>
+              <a:t>categories</a:t>
+            </a:r>
+            <a:r>
+              <a:rPr lang="en-US" dirty="0"/>
+              <a:t>.</a:t>
+            </a:r>
+          </a:p>
+          <a:p>
+            <a:pPr lvl="1"/>
+            <a:r>
+              <a:rPr lang="en-US" i="1" dirty="0"/>
+              <a:t>Business Applications:</a:t>
+            </a:r>
+            <a:endParaRPr lang="en-US" dirty="0"/>
+          </a:p>
+          <a:p>
+            <a:pPr marL="796925" lvl="2"/>
+            <a:r>
+              <a:rPr lang="en-US" b="1" dirty="0"/>
+              <a:t>Customer Churn Prediction:</a:t>
+            </a:r>
+            <a:r>
+              <a:rPr lang="en-US" dirty="0"/>
+              <a:t> Identifying customers likely to leave.</a:t>
+            </a:r>
+          </a:p>
+          <a:p>
+            <a:pPr marL="796925" lvl="2"/>
+            <a:r>
+              <a:rPr lang="en-US" b="1" dirty="0"/>
+              <a:t>Credit Risk Assessment:</a:t>
+            </a:r>
+            <a:r>
+              <a:rPr lang="en-US" dirty="0"/>
+              <a:t> Classifying loan applicants as low/high risk.</a:t>
+            </a:r>
+          </a:p>
+          <a:p>
+            <a:pPr marL="796925" lvl="2"/>
+            <a:r>
+              <a:rPr lang="en-US" b="1" dirty="0"/>
+              <a:t>Fraud Detection:</a:t>
+            </a:r>
+            <a:r>
+              <a:rPr lang="en-US" dirty="0"/>
+              <a:t> Identifying fraudulent transactions.</a:t>
+            </a:r>
+          </a:p>
+          <a:p>
+            <a:pPr marL="796925" lvl="2"/>
+            <a:r>
+              <a:rPr lang="en-US" b="1" dirty="0"/>
+              <a:t>Email Spam Filtering:</a:t>
+            </a:r>
+            <a:r>
+              <a:rPr lang="en-US" dirty="0"/>
+              <a:t> Classifying emails as spam or not spam.</a:t>
+            </a:r>
+          </a:p>
+          <a:p>
+            <a:endParaRPr lang="en-US" dirty="0"/>
+          </a:p>
+        </p:txBody>
+      </p:sp>
+      <p:sp>
+        <p:nvSpPr>
+          <p:cNvPr id="3" name="Title 2">
+            <a:extLst>
+              <a:ext uri="{FF2B5EF4-FFF2-40B4-BE49-F238E27FC236}">
+                <a16:creationId xmlns:a16="http://schemas.microsoft.com/office/drawing/2014/main" id="{A33F1F0B-2248-6E21-2B4C-DCEFE4C653C5}"/>
+              </a:ext>
+            </a:extLst>
+          </p:cNvPr>
+          <p:cNvSpPr>
+            <a:spLocks noGrp="1"/>
+          </p:cNvSpPr>
+          <p:nvPr>
+            <p:ph type="title"/>
+          </p:nvPr>
+        </p:nvSpPr>
+        <p:spPr/>
+        <p:txBody>
+          <a:bodyPr>
+            <a:normAutofit/>
+          </a:bodyPr>
+          <a:lstStyle/>
+          <a:p>
+            <a:r>
+              <a:rPr lang="en-US" dirty="0"/>
+              <a:t>Supervised Learning: Prediction &amp; Classification</a:t>
+            </a:r>
+          </a:p>
+        </p:txBody>
+      </p:sp>
+      <p:pic>
+        <p:nvPicPr>
+          <p:cNvPr id="1026" name="Picture 2" descr="Classifier machine learning python">
+            <a:extLst>
+              <a:ext uri="{FF2B5EF4-FFF2-40B4-BE49-F238E27FC236}">
+                <a16:creationId xmlns:a16="http://schemas.microsoft.com/office/drawing/2014/main" id="{F7617006-FE19-78C0-9E4E-FF154B1BCF7F}"/>
+              </a:ext>
+            </a:extLst>
+          </p:cNvPr>
+          <p:cNvPicPr>
+            <a:picLocks noChangeAspect="1" noChangeArrowheads="1"/>
+          </p:cNvPicPr>
+          <p:nvPr/>
+        </p:nvPicPr>
+        <p:blipFill>
+          <a:blip r:embed="rId2">
+            <a:extLst>
+              <a:ext uri="{28A0092B-C50C-407E-A947-70E740481C1C}">
+                <a14:useLocalDpi xmlns:a14="http://schemas.microsoft.com/office/drawing/2010/main" val="0"/>
+              </a:ext>
+            </a:extLst>
+          </a:blip>
+          <a:srcRect/>
+          <a:stretch>
+            <a:fillRect/>
+          </a:stretch>
+        </p:blipFill>
+        <p:spPr bwMode="auto">
+          <a:xfrm>
+            <a:off x="8289226" y="4481635"/>
+            <a:ext cx="2829663" cy="2506462"/>
+          </a:xfrm>
+          <a:prstGeom prst="rect">
+            <a:avLst/>
+          </a:prstGeom>
+          <a:noFill/>
+          <a:extLst>
+            <a:ext uri="{909E8E84-426E-40DD-AFC4-6F175D3DCCD1}">
+              <a14:hiddenFill xmlns:a14="http://schemas.microsoft.com/office/drawing/2010/main">
+                <a:solidFill>
+                  <a:srgbClr val="FFFFFF"/>
+                </a:solidFill>
+              </a14:hiddenFill>
+            </a:ext>
+          </a:extLst>
+        </p:spPr>
+      </p:pic>
+      <p:pic>
+        <p:nvPicPr>
+          <p:cNvPr id="7" name="Picture 6">
+            <a:extLst>
+              <a:ext uri="{FF2B5EF4-FFF2-40B4-BE49-F238E27FC236}">
+                <a16:creationId xmlns:a16="http://schemas.microsoft.com/office/drawing/2014/main" id="{1F297992-6378-786F-F8CE-EE50BD6D7AD1}"/>
+              </a:ext>
+            </a:extLst>
+          </p:cNvPr>
+          <p:cNvPicPr>
+            <a:picLocks noChangeAspect="1"/>
+          </p:cNvPicPr>
+          <p:nvPr/>
+        </p:nvPicPr>
+        <p:blipFill>
+          <a:blip r:embed="rId3"/>
+          <a:stretch>
+            <a:fillRect/>
+          </a:stretch>
+        </p:blipFill>
+        <p:spPr>
+          <a:xfrm>
+            <a:off x="7703041" y="1645800"/>
+            <a:ext cx="4002035" cy="2735766"/>
+          </a:xfrm>
+          <a:prstGeom prst="rect">
+            <a:avLst/>
+          </a:prstGeom>
+        </p:spPr>
+      </p:pic>
+    </p:spTree>
+    <p:extLst>
+      <p:ext uri="{BB962C8B-B14F-4D97-AF65-F5344CB8AC3E}">
+        <p14:creationId xmlns:p14="http://schemas.microsoft.com/office/powerpoint/2010/main" val="1528868272"/>
+      </p:ext>
+    </p:extLst>
+  </p:cSld>
+  <p:clrMapOvr>
+    <a:masterClrMapping/>
+  </p:clrMapOvr>
+</p:sld>
+</file>
+
+<file path=ppt/slides/slide5.xml><?xml version="1.0" encoding="utf-8"?>
+<p:sld xmlns:a="http://schemas.openxmlformats.org/drawingml/2006/main" xmlns:r="http://schemas.openxmlformats.org/officeDocument/2006/relationships" xmlns:p="http://schemas.openxmlformats.org/presentationml/2006/main">
+  <p:cSld>
+    <p:spTree>
+      <p:nvGrpSpPr>
+        <p:cNvPr id="1" name="">
+          <a:extLst>
+            <a:ext uri="{FF2B5EF4-FFF2-40B4-BE49-F238E27FC236}">
+              <a16:creationId xmlns:a16="http://schemas.microsoft.com/office/drawing/2014/main" id="{1DC858CE-69CA-4B51-3723-05D5DF1EC167}"/>
+            </a:ext>
+          </a:extLst>
+        </p:cNvPr>
+        <p:cNvGrpSpPr/>
+        <p:nvPr/>
+      </p:nvGrpSpPr>
+      <p:grpSpPr>
+        <a:xfrm>
+          <a:off x="0" y="0"/>
+          <a:ext cx="0" cy="0"/>
+          <a:chOff x="0" y="0"/>
+          <a:chExt cx="0" cy="0"/>
+        </a:xfrm>
+      </p:grpSpPr>
+      <p:sp>
+        <p:nvSpPr>
+          <p:cNvPr id="2" name="Content Placeholder 1">
+            <a:extLst>
+              <a:ext uri="{FF2B5EF4-FFF2-40B4-BE49-F238E27FC236}">
+                <a16:creationId xmlns:a16="http://schemas.microsoft.com/office/drawing/2014/main" id="{E16D6C77-9DD6-0E66-D55F-C8E1782453A7}"/>
+              </a:ext>
+            </a:extLst>
+          </p:cNvPr>
+          <p:cNvSpPr>
+            <a:spLocks noGrp="1"/>
+          </p:cNvSpPr>
+          <p:nvPr>
+            <p:ph idx="1"/>
+          </p:nvPr>
+        </p:nvSpPr>
+        <p:spPr>
+          <a:xfrm>
+            <a:off x="838200" y="1633491"/>
+            <a:ext cx="6127595" cy="5131294"/>
+          </a:xfrm>
+        </p:spPr>
+        <p:txBody>
+          <a:bodyPr>
+            <a:normAutofit fontScale="62500" lnSpcReduction="20000"/>
+          </a:bodyPr>
+          <a:lstStyle/>
+          <a:p>
+            <a:pPr marL="0" indent="0">
+              <a:buNone/>
+            </a:pPr>
+            <a:r>
+              <a:rPr lang="en-US" b="1" dirty="0"/>
+              <a:t>1. Clustering (Grouping Similar Data):</a:t>
+            </a:r>
+          </a:p>
+          <a:p>
+            <a:r>
+              <a:rPr lang="en-US" b="1" dirty="0"/>
+              <a:t>Goal</a:t>
+            </a:r>
+            <a:r>
+              <a:rPr lang="en-US" dirty="0"/>
+              <a:t>: Discover natural groupings within data.</a:t>
+            </a:r>
+            <a:br>
+              <a:rPr lang="en-US" dirty="0"/>
+            </a:br>
+            <a:r>
+              <a:rPr lang="en-US" b="1" dirty="0"/>
+              <a:t>Business Applications</a:t>
+            </a:r>
+            <a:r>
+              <a:rPr lang="en-US" dirty="0"/>
+              <a:t>:</a:t>
+            </a:r>
+          </a:p>
+          <a:p>
+            <a:r>
+              <a:rPr lang="en-US" b="1" dirty="0"/>
+              <a:t>Customer Segmentation</a:t>
+            </a:r>
+            <a:r>
+              <a:rPr lang="en-US" dirty="0"/>
+              <a:t>: Grouping customers with similar behaviors/preferences for targeted marketing.</a:t>
+            </a:r>
+          </a:p>
+          <a:p>
+            <a:r>
+              <a:rPr lang="en-US" b="1" dirty="0"/>
+              <a:t>Market Basket Analysis</a:t>
+            </a:r>
+            <a:r>
+              <a:rPr lang="en-US" dirty="0"/>
+              <a:t>: Identifying products frequently purchased together.</a:t>
+            </a:r>
+          </a:p>
+          <a:p>
+            <a:r>
+              <a:rPr lang="en-US" b="1" dirty="0"/>
+              <a:t>Document Clustering</a:t>
+            </a:r>
+            <a:r>
+              <a:rPr lang="en-US" dirty="0"/>
+              <a:t>: Organizing large sets of documents by topic.</a:t>
+            </a:r>
+          </a:p>
+          <a:p>
+            <a:pPr marL="0" indent="0">
+              <a:buNone/>
+            </a:pPr>
+            <a:r>
+              <a:rPr lang="en-US" b="1" dirty="0"/>
+              <a:t>2. Association Rules Mining (Finding Relationships in Data):</a:t>
+            </a:r>
+          </a:p>
+          <a:p>
+            <a:r>
+              <a:rPr lang="en-US" b="1" dirty="0"/>
+              <a:t>Goal:</a:t>
+            </a:r>
+            <a:r>
+              <a:rPr lang="en-US" dirty="0"/>
+              <a:t> Discover interesting relationships or patterns between variables in large datasets.</a:t>
+            </a:r>
+            <a:br>
+              <a:rPr lang="en-US" dirty="0"/>
+            </a:br>
+            <a:r>
+              <a:rPr lang="en-US" b="1" dirty="0"/>
+              <a:t>Business Applications:</a:t>
+            </a:r>
+            <a:endParaRPr lang="en-US" dirty="0"/>
+          </a:p>
+          <a:p>
+            <a:pPr>
+              <a:buFont typeface="Arial" panose="020B0604020202020204" pitchFamily="34" charset="0"/>
+              <a:buChar char="•"/>
+            </a:pPr>
+            <a:r>
+              <a:rPr lang="en-US" b="1" dirty="0"/>
+              <a:t>Market Basket Analysis:</a:t>
+            </a:r>
+            <a:r>
+              <a:rPr lang="en-US" dirty="0"/>
+              <a:t> Discovering items frequently bought together to optimize store layout or cross-selling.</a:t>
+            </a:r>
+          </a:p>
+          <a:p>
+            <a:pPr>
+              <a:buFont typeface="Arial" panose="020B0604020202020204" pitchFamily="34" charset="0"/>
+              <a:buChar char="•"/>
+            </a:pPr>
+            <a:r>
+              <a:rPr lang="en-US" b="1" dirty="0"/>
+              <a:t>Recommendation Systems:</a:t>
+            </a:r>
+            <a:r>
+              <a:rPr lang="en-US" dirty="0"/>
+              <a:t> Suggesting products based on association rules derived from user behavior.</a:t>
+            </a:r>
+          </a:p>
+          <a:p>
+            <a:pPr>
+              <a:buFont typeface="Arial" panose="020B0604020202020204" pitchFamily="34" charset="0"/>
+              <a:buChar char="•"/>
+            </a:pPr>
+            <a:r>
+              <a:rPr lang="en-US" b="1" dirty="0"/>
+              <a:t>Fraud Detection:</a:t>
+            </a:r>
+            <a:r>
+              <a:rPr lang="en-US" dirty="0"/>
+              <a:t> Uncovering unusual combinations of transactions or events that may indicate fraud.</a:t>
+            </a:r>
+          </a:p>
+          <a:p>
+            <a:endParaRPr lang="en-US" dirty="0"/>
+          </a:p>
+        </p:txBody>
+      </p:sp>
+      <p:sp>
+        <p:nvSpPr>
+          <p:cNvPr id="3" name="Title 2">
+            <a:extLst>
+              <a:ext uri="{FF2B5EF4-FFF2-40B4-BE49-F238E27FC236}">
+                <a16:creationId xmlns:a16="http://schemas.microsoft.com/office/drawing/2014/main" id="{0F0AEF42-0FB9-458B-E007-F46DBEF7C0A8}"/>
+              </a:ext>
+            </a:extLst>
+          </p:cNvPr>
+          <p:cNvSpPr>
+            <a:spLocks noGrp="1"/>
+          </p:cNvSpPr>
+          <p:nvPr>
+            <p:ph type="title"/>
+          </p:nvPr>
+        </p:nvSpPr>
+        <p:spPr/>
+        <p:txBody>
+          <a:bodyPr>
+            <a:normAutofit/>
+          </a:bodyPr>
+          <a:lstStyle/>
+          <a:p>
+            <a:r>
+              <a:rPr lang="en-US" dirty="0"/>
+              <a:t>Unsupervised Learning: Discovery &amp; Segmentation</a:t>
+            </a:r>
+          </a:p>
+        </p:txBody>
+      </p:sp>
+      <p:pic>
+        <p:nvPicPr>
+          <p:cNvPr id="8" name="Picture 7">
+            <a:extLst>
+              <a:ext uri="{FF2B5EF4-FFF2-40B4-BE49-F238E27FC236}">
+                <a16:creationId xmlns:a16="http://schemas.microsoft.com/office/drawing/2014/main" id="{FD5D9391-C85B-4D3E-A702-3CD3F3C5FC78}"/>
+              </a:ext>
+            </a:extLst>
+          </p:cNvPr>
+          <p:cNvPicPr>
+            <a:picLocks noChangeAspect="1"/>
+          </p:cNvPicPr>
+          <p:nvPr/>
+        </p:nvPicPr>
+        <p:blipFill>
+          <a:blip r:embed="rId2"/>
+          <a:stretch>
+            <a:fillRect/>
+          </a:stretch>
+        </p:blipFill>
+        <p:spPr>
+          <a:xfrm>
+            <a:off x="8102395" y="4350314"/>
+            <a:ext cx="3019874" cy="2440367"/>
+          </a:xfrm>
+          <a:prstGeom prst="rect">
+            <a:avLst/>
+          </a:prstGeom>
+        </p:spPr>
+      </p:pic>
+      <p:pic>
+        <p:nvPicPr>
+          <p:cNvPr id="1032" name="Picture 8" descr="The Solution to Every Marketing Problem: Market Segmentation | by Corporate  Wise Man | Medium">
+            <a:extLst>
+              <a:ext uri="{FF2B5EF4-FFF2-40B4-BE49-F238E27FC236}">
+                <a16:creationId xmlns:a16="http://schemas.microsoft.com/office/drawing/2014/main" id="{9E1D2373-5557-4683-A166-33F9A527E303}"/>
+              </a:ext>
+            </a:extLst>
+          </p:cNvPr>
+          <p:cNvPicPr>
+            <a:picLocks noChangeAspect="1" noChangeArrowheads="1"/>
+          </p:cNvPicPr>
+          <p:nvPr/>
+        </p:nvPicPr>
+        <p:blipFill>
+          <a:blip r:embed="rId3">
+            <a:extLst>
+              <a:ext uri="{28A0092B-C50C-407E-A947-70E740481C1C}">
+                <a14:useLocalDpi xmlns:a14="http://schemas.microsoft.com/office/drawing/2010/main" val="0"/>
+              </a:ext>
+            </a:extLst>
+          </a:blip>
+          <a:srcRect/>
+          <a:stretch>
+            <a:fillRect/>
+          </a:stretch>
+        </p:blipFill>
+        <p:spPr bwMode="auto">
+          <a:xfrm>
+            <a:off x="7896713" y="1633491"/>
+            <a:ext cx="3225556" cy="2601643"/>
+          </a:xfrm>
+          <a:prstGeom prst="rect">
+            <a:avLst/>
+          </a:prstGeom>
+          <a:noFill/>
+          <a:extLst>
+            <a:ext uri="{909E8E84-426E-40DD-AFC4-6F175D3DCCD1}">
+              <a14:hiddenFill xmlns:a14="http://schemas.microsoft.com/office/drawing/2010/main">
+                <a:solidFill>
+                  <a:srgbClr val="FFFFFF"/>
+                </a:solidFill>
+              </a14:hiddenFill>
+            </a:ext>
+          </a:extLst>
+        </p:spPr>
+      </p:pic>
+    </p:spTree>
+    <p:extLst>
+      <p:ext uri="{BB962C8B-B14F-4D97-AF65-F5344CB8AC3E}">
+        <p14:creationId xmlns:p14="http://schemas.microsoft.com/office/powerpoint/2010/main" val="354603000"/>
+      </p:ext>
+    </p:extLst>
+  </p:cSld>
+  <p:clrMapOvr>
+    <a:masterClrMapping/>
+  </p:clrMapOvr>
+</p:sld>
+</file>
+
+<file path=ppt/slides/slide6.xml><?xml version="1.0" encoding="utf-8"?>
 <p:sld xmlns:a="http://schemas.openxmlformats.org/drawingml/2006/main" xmlns:r="http://schemas.openxmlformats.org/officeDocument/2006/relationships" xmlns:p="http://schemas.openxmlformats.org/presentationml/2006/main">
   <p:cSld>
     <p:spTree>
@@ -12070,7 +13828,7 @@
 </p:sld>
 </file>
 
-<file path=ppt/slides/slide4.xml><?xml version="1.0" encoding="utf-8"?>
+<file path=ppt/slides/slide7.xml><?xml version="1.0" encoding="utf-8"?>
 <p:sld xmlns:a="http://schemas.openxmlformats.org/drawingml/2006/main" xmlns:r="http://schemas.openxmlformats.org/officeDocument/2006/relationships" xmlns:p="http://schemas.openxmlformats.org/presentationml/2006/main">
   <p:cSld>
     <p:spTree>
@@ -12276,765 +14034,6 @@
     <p:extLst>
       <p:ext uri="{BB962C8B-B14F-4D97-AF65-F5344CB8AC3E}">
         <p14:creationId xmlns:p14="http://schemas.microsoft.com/office/powerpoint/2010/main" val="2300765676"/>
-      </p:ext>
-    </p:extLst>
-  </p:cSld>
-  <p:clrMapOvr>
-    <a:masterClrMapping/>
-  </p:clrMapOvr>
-</p:sld>
-</file>
-
-<file path=ppt/slides/slide5.xml><?xml version="1.0" encoding="utf-8"?>
-<p:sld xmlns:a="http://schemas.openxmlformats.org/drawingml/2006/main" xmlns:r="http://schemas.openxmlformats.org/officeDocument/2006/relationships" xmlns:p="http://schemas.openxmlformats.org/presentationml/2006/main">
-  <p:cSld>
-    <p:spTree>
-      <p:nvGrpSpPr>
-        <p:cNvPr id="1" name=""/>
-        <p:cNvGrpSpPr/>
-        <p:nvPr/>
-      </p:nvGrpSpPr>
-      <p:grpSpPr>
-        <a:xfrm>
-          <a:off x="0" y="0"/>
-          <a:ext cx="0" cy="0"/>
-          <a:chOff x="0" y="0"/>
-          <a:chExt cx="0" cy="0"/>
-        </a:xfrm>
-      </p:grpSpPr>
-      <p:sp>
-        <p:nvSpPr>
-          <p:cNvPr id="2" name="Content Placeholder 1">
-            <a:extLst>
-              <a:ext uri="{FF2B5EF4-FFF2-40B4-BE49-F238E27FC236}">
-                <a16:creationId xmlns:a16="http://schemas.microsoft.com/office/drawing/2014/main" id="{5A741632-F5AA-89F8-92B0-716C60C6B299}"/>
-              </a:ext>
-            </a:extLst>
-          </p:cNvPr>
-          <p:cNvSpPr>
-            <a:spLocks noGrp="1"/>
-          </p:cNvSpPr>
-          <p:nvPr>
-            <p:ph idx="1"/>
-          </p:nvPr>
-        </p:nvSpPr>
-        <p:spPr>
-          <a:xfrm>
-            <a:off x="838200" y="1633491"/>
-            <a:ext cx="6390503" cy="2759215"/>
-          </a:xfrm>
-        </p:spPr>
-        <p:txBody>
-          <a:bodyPr>
-            <a:normAutofit/>
-          </a:bodyPr>
-          <a:lstStyle/>
-          <a:p>
-            <a:pPr marL="0" indent="0">
-              <a:buNone/>
-            </a:pPr>
-            <a:r>
-              <a:rPr lang="en-US" sz="2400" dirty="0"/>
-              <a:t>There are two main types of linear regression:</a:t>
-            </a:r>
-          </a:p>
-          <a:p>
-            <a:pPr marL="0" indent="0">
-              <a:buNone/>
-            </a:pPr>
-            <a:r>
-              <a:rPr lang="en-US" sz="2400" b="1" dirty="0"/>
-              <a:t>1- Simple Linear Regression</a:t>
-            </a:r>
-          </a:p>
-          <a:p>
-            <a:pPr marL="0" indent="0">
-              <a:buNone/>
-            </a:pPr>
-            <a:r>
-              <a:rPr lang="en-US" sz="2400" dirty="0"/>
-              <a:t>This is the simplest form of linear regression, and it involves only one independent variable and one dependent variable. </a:t>
-            </a:r>
-          </a:p>
-          <a:p>
-            <a:pPr marL="0" indent="0">
-              <a:buNone/>
-            </a:pPr>
-            <a:r>
-              <a:rPr lang="en-US" sz="2400" dirty="0"/>
-              <a:t>The equation for simple linear regression is:</a:t>
-            </a:r>
-          </a:p>
-        </p:txBody>
-      </p:sp>
-      <p:sp>
-        <p:nvSpPr>
-          <p:cNvPr id="3" name="Title 2">
-            <a:extLst>
-              <a:ext uri="{FF2B5EF4-FFF2-40B4-BE49-F238E27FC236}">
-                <a16:creationId xmlns:a16="http://schemas.microsoft.com/office/drawing/2014/main" id="{100EB5BB-BBC7-B31E-D00E-0CEEBA8A5671}"/>
-              </a:ext>
-            </a:extLst>
-          </p:cNvPr>
-          <p:cNvSpPr>
-            <a:spLocks noGrp="1"/>
-          </p:cNvSpPr>
-          <p:nvPr>
-            <p:ph type="title"/>
-          </p:nvPr>
-        </p:nvSpPr>
-        <p:spPr/>
-        <p:txBody>
-          <a:bodyPr>
-            <a:normAutofit/>
-          </a:bodyPr>
-          <a:lstStyle/>
-          <a:p>
-            <a:r>
-              <a:rPr lang="en-US" dirty="0"/>
-              <a:t>Types of Linear Regression</a:t>
-            </a:r>
-          </a:p>
-        </p:txBody>
-      </p:sp>
-      <p:pic>
-        <p:nvPicPr>
-          <p:cNvPr id="7" name="Picture 6">
-            <a:extLst>
-              <a:ext uri="{FF2B5EF4-FFF2-40B4-BE49-F238E27FC236}">
-                <a16:creationId xmlns:a16="http://schemas.microsoft.com/office/drawing/2014/main" id="{82D86F0E-0628-3880-4CDD-0284B92DC94E}"/>
-              </a:ext>
-            </a:extLst>
-          </p:cNvPr>
-          <p:cNvPicPr>
-            <a:picLocks noChangeAspect="1"/>
-          </p:cNvPicPr>
-          <p:nvPr/>
-        </p:nvPicPr>
-        <p:blipFill>
-          <a:blip r:embed="rId2"/>
-          <a:stretch>
-            <a:fillRect/>
-          </a:stretch>
-        </p:blipFill>
-        <p:spPr>
-          <a:xfrm>
-            <a:off x="912341" y="4077099"/>
-            <a:ext cx="4044544" cy="2684106"/>
-          </a:xfrm>
-          <a:prstGeom prst="rect">
-            <a:avLst/>
-          </a:prstGeom>
-        </p:spPr>
-      </p:pic>
-      <p:pic>
-        <p:nvPicPr>
-          <p:cNvPr id="4" name="Picture 6" descr="Linear Regression in Machine Learning: Python Examples">
-            <a:extLst>
-              <a:ext uri="{FF2B5EF4-FFF2-40B4-BE49-F238E27FC236}">
-                <a16:creationId xmlns:a16="http://schemas.microsoft.com/office/drawing/2014/main" id="{DE2B1E32-0CA3-128D-CB32-2F690773BA5C}"/>
-              </a:ext>
-            </a:extLst>
-          </p:cNvPr>
-          <p:cNvPicPr>
-            <a:picLocks noChangeAspect="1" noChangeArrowheads="1"/>
-          </p:cNvPicPr>
-          <p:nvPr/>
-        </p:nvPicPr>
-        <p:blipFill>
-          <a:blip r:embed="rId3">
-            <a:extLst>
-              <a:ext uri="{28A0092B-C50C-407E-A947-70E740481C1C}">
-                <a14:useLocalDpi xmlns:a14="http://schemas.microsoft.com/office/drawing/2010/main" val="0"/>
-              </a:ext>
-            </a:extLst>
-          </a:blip>
-          <a:srcRect/>
-          <a:stretch>
-            <a:fillRect/>
-          </a:stretch>
-        </p:blipFill>
-        <p:spPr bwMode="auto">
-          <a:xfrm>
-            <a:off x="7446149" y="1633491"/>
-            <a:ext cx="4501477" cy="2940194"/>
-          </a:xfrm>
-          <a:prstGeom prst="rect">
-            <a:avLst/>
-          </a:prstGeom>
-          <a:noFill/>
-          <a:extLst>
-            <a:ext uri="{909E8E84-426E-40DD-AFC4-6F175D3DCCD1}">
-              <a14:hiddenFill xmlns:a14="http://schemas.microsoft.com/office/drawing/2010/main">
-                <a:solidFill>
-                  <a:srgbClr val="FFFFFF"/>
-                </a:solidFill>
-              </a14:hiddenFill>
-            </a:ext>
-          </a:extLst>
-        </p:spPr>
-      </p:pic>
-    </p:spTree>
-    <p:extLst>
-      <p:ext uri="{BB962C8B-B14F-4D97-AF65-F5344CB8AC3E}">
-        <p14:creationId xmlns:p14="http://schemas.microsoft.com/office/powerpoint/2010/main" val="3639736080"/>
-      </p:ext>
-    </p:extLst>
-  </p:cSld>
-  <p:clrMapOvr>
-    <a:masterClrMapping/>
-  </p:clrMapOvr>
-</p:sld>
-</file>
-
-<file path=ppt/slides/slide6.xml><?xml version="1.0" encoding="utf-8"?>
-<p:sld xmlns:a="http://schemas.openxmlformats.org/drawingml/2006/main" xmlns:r="http://schemas.openxmlformats.org/officeDocument/2006/relationships" xmlns:p="http://schemas.openxmlformats.org/presentationml/2006/main">
-  <p:cSld>
-    <p:spTree>
-      <p:nvGrpSpPr>
-        <p:cNvPr id="1" name="">
-          <a:extLst>
-            <a:ext uri="{FF2B5EF4-FFF2-40B4-BE49-F238E27FC236}">
-              <a16:creationId xmlns:a16="http://schemas.microsoft.com/office/drawing/2014/main" id="{AF1544B4-D3B8-1197-92FD-7FA1979115B0}"/>
-            </a:ext>
-          </a:extLst>
-        </p:cNvPr>
-        <p:cNvGrpSpPr/>
-        <p:nvPr/>
-      </p:nvGrpSpPr>
-      <p:grpSpPr>
-        <a:xfrm>
-          <a:off x="0" y="0"/>
-          <a:ext cx="0" cy="0"/>
-          <a:chOff x="0" y="0"/>
-          <a:chExt cx="0" cy="0"/>
-        </a:xfrm>
-      </p:grpSpPr>
-      <p:sp>
-        <p:nvSpPr>
-          <p:cNvPr id="2" name="Content Placeholder 1">
-            <a:extLst>
-              <a:ext uri="{FF2B5EF4-FFF2-40B4-BE49-F238E27FC236}">
-                <a16:creationId xmlns:a16="http://schemas.microsoft.com/office/drawing/2014/main" id="{AFD55279-926D-56F4-16C1-40E544073600}"/>
-              </a:ext>
-            </a:extLst>
-          </p:cNvPr>
-          <p:cNvSpPr>
-            <a:spLocks noGrp="1"/>
-          </p:cNvSpPr>
-          <p:nvPr>
-            <p:ph idx="1"/>
-          </p:nvPr>
-        </p:nvSpPr>
-        <p:spPr>
-          <a:xfrm>
-            <a:off x="838200" y="1633490"/>
-            <a:ext cx="5519351" cy="2257334"/>
-          </a:xfrm>
-        </p:spPr>
-        <p:txBody>
-          <a:bodyPr>
-            <a:normAutofit/>
-          </a:bodyPr>
-          <a:lstStyle/>
-          <a:p>
-            <a:pPr marL="0" indent="0">
-              <a:buNone/>
-            </a:pPr>
-            <a:r>
-              <a:rPr lang="en-US" sz="2400" b="1" dirty="0"/>
-              <a:t>2- Multiple Linear Regression (Simplified)</a:t>
-            </a:r>
-          </a:p>
-          <a:p>
-            <a:pPr marL="0" indent="0">
-              <a:buNone/>
-            </a:pPr>
-            <a:r>
-              <a:rPr lang="en-US" sz="2400" dirty="0"/>
-              <a:t>In multiple linear regression, there is one dependent variable and more than one independent variable. </a:t>
-            </a:r>
-          </a:p>
-          <a:p>
-            <a:pPr marL="0" indent="0">
-              <a:buNone/>
-            </a:pPr>
-            <a:r>
-              <a:rPr lang="en-US" sz="2400" dirty="0"/>
-              <a:t>The equation is:</a:t>
-            </a:r>
-          </a:p>
-          <a:p>
-            <a:endParaRPr lang="en-US" sz="2400" dirty="0"/>
-          </a:p>
-        </p:txBody>
-      </p:sp>
-      <p:sp>
-        <p:nvSpPr>
-          <p:cNvPr id="3" name="Title 2">
-            <a:extLst>
-              <a:ext uri="{FF2B5EF4-FFF2-40B4-BE49-F238E27FC236}">
-                <a16:creationId xmlns:a16="http://schemas.microsoft.com/office/drawing/2014/main" id="{1B18397A-8235-FC5E-C59A-91BD2E6824E0}"/>
-              </a:ext>
-            </a:extLst>
-          </p:cNvPr>
-          <p:cNvSpPr>
-            <a:spLocks noGrp="1"/>
-          </p:cNvSpPr>
-          <p:nvPr>
-            <p:ph type="title"/>
-          </p:nvPr>
-        </p:nvSpPr>
-        <p:spPr/>
-        <p:txBody>
-          <a:bodyPr>
-            <a:normAutofit/>
-          </a:bodyPr>
-          <a:lstStyle/>
-          <a:p>
-            <a:r>
-              <a:rPr lang="en-US" dirty="0"/>
-              <a:t>Types of Linear Regression</a:t>
-            </a:r>
-          </a:p>
-        </p:txBody>
-      </p:sp>
-      <p:pic>
-        <p:nvPicPr>
-          <p:cNvPr id="5" name="Picture 4">
-            <a:extLst>
-              <a:ext uri="{FF2B5EF4-FFF2-40B4-BE49-F238E27FC236}">
-                <a16:creationId xmlns:a16="http://schemas.microsoft.com/office/drawing/2014/main" id="{D78EEB53-EDB0-9883-EF22-7ECFE0832215}"/>
-              </a:ext>
-            </a:extLst>
-          </p:cNvPr>
-          <p:cNvPicPr>
-            <a:picLocks noChangeAspect="1"/>
-          </p:cNvPicPr>
-          <p:nvPr/>
-        </p:nvPicPr>
-        <p:blipFill>
-          <a:blip r:embed="rId2"/>
-          <a:stretch>
-            <a:fillRect/>
-          </a:stretch>
-        </p:blipFill>
-        <p:spPr>
-          <a:xfrm>
-            <a:off x="838200" y="3890824"/>
-            <a:ext cx="10269383" cy="2667372"/>
-          </a:xfrm>
-          <a:prstGeom prst="rect">
-            <a:avLst/>
-          </a:prstGeom>
-        </p:spPr>
-      </p:pic>
-      <p:pic>
-        <p:nvPicPr>
-          <p:cNvPr id="3074" name="Picture 2" descr="What Is Linear Regression? - MATLAB &amp; Simulink">
-            <a:extLst>
-              <a:ext uri="{FF2B5EF4-FFF2-40B4-BE49-F238E27FC236}">
-                <a16:creationId xmlns:a16="http://schemas.microsoft.com/office/drawing/2014/main" id="{4DD72E80-9023-5209-B53A-ADEDF9507F30}"/>
-              </a:ext>
-            </a:extLst>
-          </p:cNvPr>
-          <p:cNvPicPr>
-            <a:picLocks noChangeAspect="1" noChangeArrowheads="1"/>
-          </p:cNvPicPr>
-          <p:nvPr/>
-        </p:nvPicPr>
-        <p:blipFill>
-          <a:blip r:embed="rId3">
-            <a:extLst>
-              <a:ext uri="{28A0092B-C50C-407E-A947-70E740481C1C}">
-                <a14:useLocalDpi xmlns:a14="http://schemas.microsoft.com/office/drawing/2010/main" val="0"/>
-              </a:ext>
-            </a:extLst>
-          </a:blip>
-          <a:srcRect/>
-          <a:stretch>
-            <a:fillRect/>
-          </a:stretch>
-        </p:blipFill>
-        <p:spPr bwMode="auto">
-          <a:xfrm>
-            <a:off x="6697362" y="1719135"/>
-            <a:ext cx="4537504" cy="3403128"/>
-          </a:xfrm>
-          <a:prstGeom prst="rect">
-            <a:avLst/>
-          </a:prstGeom>
-          <a:noFill/>
-          <a:extLst>
-            <a:ext uri="{909E8E84-426E-40DD-AFC4-6F175D3DCCD1}">
-              <a14:hiddenFill xmlns:a14="http://schemas.microsoft.com/office/drawing/2010/main">
-                <a:solidFill>
-                  <a:srgbClr val="FFFFFF"/>
-                </a:solidFill>
-              </a14:hiddenFill>
-            </a:ext>
-          </a:extLst>
-        </p:spPr>
-      </p:pic>
-    </p:spTree>
-    <p:extLst>
-      <p:ext uri="{BB962C8B-B14F-4D97-AF65-F5344CB8AC3E}">
-        <p14:creationId xmlns:p14="http://schemas.microsoft.com/office/powerpoint/2010/main" val="2042404279"/>
-      </p:ext>
-    </p:extLst>
-  </p:cSld>
-  <p:clrMapOvr>
-    <a:masterClrMapping/>
-  </p:clrMapOvr>
-</p:sld>
-</file>
-
-<file path=ppt/slides/slide7.xml><?xml version="1.0" encoding="utf-8"?>
-<p:sld xmlns:a="http://schemas.openxmlformats.org/drawingml/2006/main" xmlns:r="http://schemas.openxmlformats.org/officeDocument/2006/relationships" xmlns:p="http://schemas.openxmlformats.org/presentationml/2006/main">
-  <p:cSld>
-    <p:spTree>
-      <p:nvGrpSpPr>
-        <p:cNvPr id="1" name="">
-          <a:extLst>
-            <a:ext uri="{FF2B5EF4-FFF2-40B4-BE49-F238E27FC236}">
-              <a16:creationId xmlns:a16="http://schemas.microsoft.com/office/drawing/2014/main" id="{58EDEB5C-3093-1F7B-7FA6-4B77F1E67686}"/>
-            </a:ext>
-          </a:extLst>
-        </p:cNvPr>
-        <p:cNvGrpSpPr/>
-        <p:nvPr/>
-      </p:nvGrpSpPr>
-      <p:grpSpPr>
-        <a:xfrm>
-          <a:off x="0" y="0"/>
-          <a:ext cx="0" cy="0"/>
-          <a:chOff x="0" y="0"/>
-          <a:chExt cx="0" cy="0"/>
-        </a:xfrm>
-      </p:grpSpPr>
-      <p:sp>
-        <p:nvSpPr>
-          <p:cNvPr id="2" name="Content Placeholder 1">
-            <a:extLst>
-              <a:ext uri="{FF2B5EF4-FFF2-40B4-BE49-F238E27FC236}">
-                <a16:creationId xmlns:a16="http://schemas.microsoft.com/office/drawing/2014/main" id="{E892612F-1544-2D60-DC38-ECFBC8778E6E}"/>
-              </a:ext>
-            </a:extLst>
-          </p:cNvPr>
-          <p:cNvSpPr>
-            <a:spLocks noGrp="1"/>
-          </p:cNvSpPr>
-          <p:nvPr>
-            <p:ph idx="1"/>
-          </p:nvPr>
-        </p:nvSpPr>
-        <p:spPr>
-          <a:xfrm>
-            <a:off x="838199" y="1633491"/>
-            <a:ext cx="6588967" cy="3199766"/>
-          </a:xfrm>
-        </p:spPr>
-        <p:txBody>
-          <a:bodyPr>
-            <a:noAutofit/>
-          </a:bodyPr>
-          <a:lstStyle/>
-          <a:p>
-            <a:r>
-              <a:rPr lang="en-US" sz="2000" dirty="0"/>
-              <a:t>In linear regression, the best-fit line is the line that minimizes the error between the predicted and actual values. </a:t>
-            </a:r>
-          </a:p>
-          <a:p>
-            <a:r>
-              <a:rPr lang="en-US" sz="2000" dirty="0"/>
-              <a:t>It represents the relationship between the dependent and independent variables.</a:t>
-            </a:r>
-          </a:p>
-          <a:p>
-            <a:r>
-              <a:rPr lang="en-US" sz="2000" dirty="0"/>
-              <a:t>The goal is to change the slope and the intercept of the line to make the most accurate predictions.</a:t>
-            </a:r>
-          </a:p>
-          <a:p>
-            <a:endParaRPr lang="en-US" sz="2000" dirty="0"/>
-          </a:p>
-        </p:txBody>
-      </p:sp>
-      <p:sp>
-        <p:nvSpPr>
-          <p:cNvPr id="3" name="Title 2">
-            <a:extLst>
-              <a:ext uri="{FF2B5EF4-FFF2-40B4-BE49-F238E27FC236}">
-                <a16:creationId xmlns:a16="http://schemas.microsoft.com/office/drawing/2014/main" id="{725980BE-973B-2E05-6334-7722DF93378D}"/>
-              </a:ext>
-            </a:extLst>
-          </p:cNvPr>
-          <p:cNvSpPr>
-            <a:spLocks noGrp="1"/>
-          </p:cNvSpPr>
-          <p:nvPr>
-            <p:ph type="title"/>
-          </p:nvPr>
-        </p:nvSpPr>
-        <p:spPr/>
-        <p:txBody>
-          <a:bodyPr/>
-          <a:lstStyle/>
-          <a:p>
-            <a:r>
-              <a:rPr lang="en-US" dirty="0"/>
-              <a:t>What is the Best Fit Line?</a:t>
-            </a:r>
-          </a:p>
-        </p:txBody>
-      </p:sp>
-      <p:pic>
-        <p:nvPicPr>
-          <p:cNvPr id="8" name="Picture 7">
-            <a:extLst>
-              <a:ext uri="{FF2B5EF4-FFF2-40B4-BE49-F238E27FC236}">
-                <a16:creationId xmlns:a16="http://schemas.microsoft.com/office/drawing/2014/main" id="{576B1216-E911-2753-B592-C77DC7E9A789}"/>
-              </a:ext>
-            </a:extLst>
-          </p:cNvPr>
-          <p:cNvPicPr>
-            <a:picLocks noChangeAspect="1"/>
-          </p:cNvPicPr>
-          <p:nvPr/>
-        </p:nvPicPr>
-        <p:blipFill>
-          <a:blip r:embed="rId2"/>
-          <a:stretch>
-            <a:fillRect/>
-          </a:stretch>
-        </p:blipFill>
-        <p:spPr>
-          <a:xfrm>
-            <a:off x="7427167" y="1731885"/>
-            <a:ext cx="3926633" cy="2842003"/>
-          </a:xfrm>
-          <a:prstGeom prst="rect">
-            <a:avLst/>
-          </a:prstGeom>
-        </p:spPr>
-      </p:pic>
-      <p:sp>
-        <p:nvSpPr>
-          <p:cNvPr id="10" name="Content Placeholder 1">
-            <a:extLst>
-              <a:ext uri="{FF2B5EF4-FFF2-40B4-BE49-F238E27FC236}">
-                <a16:creationId xmlns:a16="http://schemas.microsoft.com/office/drawing/2014/main" id="{997C4077-274B-FAF4-67DA-B0DEA55B5FEA}"/>
-              </a:ext>
-            </a:extLst>
-          </p:cNvPr>
-          <p:cNvSpPr txBox="1">
-            <a:spLocks/>
-          </p:cNvSpPr>
-          <p:nvPr/>
-        </p:nvSpPr>
-        <p:spPr>
-          <a:xfrm>
-            <a:off x="908178" y="4921017"/>
-            <a:ext cx="10923038" cy="2233126"/>
-          </a:xfrm>
-          <a:prstGeom prst="rect">
-            <a:avLst/>
-          </a:prstGeom>
-        </p:spPr>
-        <p:txBody>
-          <a:bodyPr vert="horz" lIns="91440" tIns="45720" rIns="91440" bIns="45720" rtlCol="0">
-            <a:noAutofit/>
-          </a:bodyPr>
-          <a:lstStyle>
-            <a:lvl1pPr marL="228600" indent="-228600" algn="l" defTabSz="914400" rtl="0" eaLnBrk="1" latinLnBrk="0" hangingPunct="1">
-              <a:lnSpc>
-                <a:spcPct val="90000"/>
-              </a:lnSpc>
-              <a:spcBef>
-                <a:spcPts val="1000"/>
-              </a:spcBef>
-              <a:buFont typeface="Arial" panose="020B0604020202020204" pitchFamily="34" charset="0"/>
-              <a:buChar char="•"/>
-              <a:defRPr sz="2800" kern="1200">
-                <a:solidFill>
-                  <a:schemeClr val="tx1"/>
-                </a:solidFill>
-                <a:latin typeface="+mn-lt"/>
-                <a:ea typeface="+mn-ea"/>
-                <a:cs typeface="+mn-cs"/>
-              </a:defRPr>
-            </a:lvl1pPr>
-            <a:lvl2pPr marL="685800" indent="-228600" algn="l" defTabSz="914400" rtl="0" eaLnBrk="1" latinLnBrk="0" hangingPunct="1">
-              <a:lnSpc>
-                <a:spcPct val="90000"/>
-              </a:lnSpc>
-              <a:spcBef>
-                <a:spcPts val="500"/>
-              </a:spcBef>
-              <a:buFont typeface="Arial" panose="020B0604020202020204" pitchFamily="34" charset="0"/>
-              <a:buChar char="•"/>
-              <a:defRPr sz="2400" kern="1200">
-                <a:solidFill>
-                  <a:schemeClr val="tx1"/>
-                </a:solidFill>
-                <a:latin typeface="+mn-lt"/>
-                <a:ea typeface="+mn-ea"/>
-                <a:cs typeface="+mn-cs"/>
-              </a:defRPr>
-            </a:lvl2pPr>
-            <a:lvl3pPr marL="1143000" indent="-228600" algn="l" defTabSz="914400" rtl="0" eaLnBrk="1" latinLnBrk="0" hangingPunct="1">
-              <a:lnSpc>
-                <a:spcPct val="90000"/>
-              </a:lnSpc>
-              <a:spcBef>
-                <a:spcPts val="500"/>
-              </a:spcBef>
-              <a:buFont typeface="Arial" panose="020B0604020202020204" pitchFamily="34" charset="0"/>
-              <a:buChar char="•"/>
-              <a:defRPr sz="2000" kern="1200">
-                <a:solidFill>
-                  <a:schemeClr val="tx1"/>
-                </a:solidFill>
-                <a:latin typeface="+mn-lt"/>
-                <a:ea typeface="+mn-ea"/>
-                <a:cs typeface="+mn-cs"/>
-              </a:defRPr>
-            </a:lvl3pPr>
-            <a:lvl4pPr marL="1600200" indent="-228600" algn="l" defTabSz="914400" rtl="0" eaLnBrk="1" latinLnBrk="0" hangingPunct="1">
-              <a:lnSpc>
-                <a:spcPct val="90000"/>
-              </a:lnSpc>
-              <a:spcBef>
-                <a:spcPts val="500"/>
-              </a:spcBef>
-              <a:buFont typeface="Arial" panose="020B0604020202020204" pitchFamily="34" charset="0"/>
-              <a:buChar char="•"/>
-              <a:defRPr sz="1800" kern="1200">
-                <a:solidFill>
-                  <a:schemeClr val="tx1"/>
-                </a:solidFill>
-                <a:latin typeface="+mn-lt"/>
-                <a:ea typeface="+mn-ea"/>
-                <a:cs typeface="+mn-cs"/>
-              </a:defRPr>
-            </a:lvl4pPr>
-            <a:lvl5pPr marL="2057400" indent="-228600" algn="l" defTabSz="914400" rtl="0" eaLnBrk="1" latinLnBrk="0" hangingPunct="1">
-              <a:lnSpc>
-                <a:spcPct val="90000"/>
-              </a:lnSpc>
-              <a:spcBef>
-                <a:spcPts val="500"/>
-              </a:spcBef>
-              <a:buFont typeface="Arial" panose="020B0604020202020204" pitchFamily="34" charset="0"/>
-              <a:buChar char="•"/>
-              <a:defRPr sz="1800" kern="1200">
-                <a:solidFill>
-                  <a:schemeClr val="tx1"/>
-                </a:solidFill>
-                <a:latin typeface="+mn-lt"/>
-                <a:ea typeface="+mn-ea"/>
-                <a:cs typeface="+mn-cs"/>
-              </a:defRPr>
-            </a:lvl5pPr>
-            <a:lvl6pPr marL="2514600" indent="-228600" algn="l" defTabSz="914400" rtl="0" eaLnBrk="1" latinLnBrk="0" hangingPunct="1">
-              <a:lnSpc>
-                <a:spcPct val="90000"/>
-              </a:lnSpc>
-              <a:spcBef>
-                <a:spcPts val="500"/>
-              </a:spcBef>
-              <a:buFont typeface="Arial" panose="020B0604020202020204" pitchFamily="34" charset="0"/>
-              <a:buChar char="•"/>
-              <a:defRPr sz="1800" kern="1200">
-                <a:solidFill>
-                  <a:schemeClr val="tx1"/>
-                </a:solidFill>
-                <a:latin typeface="+mn-lt"/>
-                <a:ea typeface="+mn-ea"/>
-                <a:cs typeface="+mn-cs"/>
-              </a:defRPr>
-            </a:lvl6pPr>
-            <a:lvl7pPr marL="2971800" indent="-228600" algn="l" defTabSz="914400" rtl="0" eaLnBrk="1" latinLnBrk="0" hangingPunct="1">
-              <a:lnSpc>
-                <a:spcPct val="90000"/>
-              </a:lnSpc>
-              <a:spcBef>
-                <a:spcPts val="500"/>
-              </a:spcBef>
-              <a:buFont typeface="Arial" panose="020B0604020202020204" pitchFamily="34" charset="0"/>
-              <a:buChar char="•"/>
-              <a:defRPr sz="1800" kern="1200">
-                <a:solidFill>
-                  <a:schemeClr val="tx1"/>
-                </a:solidFill>
-                <a:latin typeface="+mn-lt"/>
-                <a:ea typeface="+mn-ea"/>
-                <a:cs typeface="+mn-cs"/>
-              </a:defRPr>
-            </a:lvl7pPr>
-            <a:lvl8pPr marL="3429000" indent="-228600" algn="l" defTabSz="914400" rtl="0" eaLnBrk="1" latinLnBrk="0" hangingPunct="1">
-              <a:lnSpc>
-                <a:spcPct val="90000"/>
-              </a:lnSpc>
-              <a:spcBef>
-                <a:spcPts val="500"/>
-              </a:spcBef>
-              <a:buFont typeface="Arial" panose="020B0604020202020204" pitchFamily="34" charset="0"/>
-              <a:buChar char="•"/>
-              <a:defRPr sz="1800" kern="1200">
-                <a:solidFill>
-                  <a:schemeClr val="tx1"/>
-                </a:solidFill>
-                <a:latin typeface="+mn-lt"/>
-                <a:ea typeface="+mn-ea"/>
-                <a:cs typeface="+mn-cs"/>
-              </a:defRPr>
-            </a:lvl8pPr>
-            <a:lvl9pPr marL="3886200" indent="-228600" algn="l" defTabSz="914400" rtl="0" eaLnBrk="1" latinLnBrk="0" hangingPunct="1">
-              <a:lnSpc>
-                <a:spcPct val="90000"/>
-              </a:lnSpc>
-              <a:spcBef>
-                <a:spcPts val="500"/>
-              </a:spcBef>
-              <a:buFont typeface="Arial" panose="020B0604020202020204" pitchFamily="34" charset="0"/>
-              <a:buChar char="•"/>
-              <a:defRPr sz="1800" kern="1200">
-                <a:solidFill>
-                  <a:schemeClr val="tx1"/>
-                </a:solidFill>
-                <a:latin typeface="+mn-lt"/>
-                <a:ea typeface="+mn-ea"/>
-                <a:cs typeface="+mn-cs"/>
-              </a:defRPr>
-            </a:lvl9pPr>
-          </a:lstStyle>
-          <a:p>
-            <a:r>
-              <a:rPr lang="en-US" sz="2000" dirty="0"/>
-              <a:t>Linear regression predicts Y based on X, using a straight line to model the relationship. For example, X could be work experience, and Y could be salary. </a:t>
-            </a:r>
-          </a:p>
-          <a:p>
-            <a:r>
-              <a:rPr lang="en-US" sz="2000" dirty="0"/>
-              <a:t>The goal is to find the best-fit line that minimizes the error between predicted and actual values.</a:t>
-            </a:r>
-          </a:p>
-          <a:p>
-            <a:r>
-              <a:rPr lang="en-US" sz="2000" dirty="0"/>
-              <a:t>To find this line, we use a cost function, which helps determine the best values for the line's coefficients.</a:t>
-            </a:r>
-          </a:p>
-        </p:txBody>
-      </p:sp>
-    </p:spTree>
-    <p:extLst>
-      <p:ext uri="{BB962C8B-B14F-4D97-AF65-F5344CB8AC3E}">
-        <p14:creationId xmlns:p14="http://schemas.microsoft.com/office/powerpoint/2010/main" val="2881282849"/>
       </p:ext>
     </p:extLst>
   </p:cSld>
@@ -13066,7 +14065,7 @@
           <p:cNvPr id="2" name="Content Placeholder 1">
             <a:extLst>
               <a:ext uri="{FF2B5EF4-FFF2-40B4-BE49-F238E27FC236}">
-                <a16:creationId xmlns:a16="http://schemas.microsoft.com/office/drawing/2014/main" id="{E56CB444-3023-BA2B-502A-E63C438605D8}"/>
+                <a16:creationId xmlns:a16="http://schemas.microsoft.com/office/drawing/2014/main" id="{5A741632-F5AA-89F8-92B0-716C60C6B299}"/>
               </a:ext>
             </a:extLst>
           </p:cNvPr>
@@ -13077,10 +14076,15 @@
             <p:ph idx="1"/>
           </p:nvPr>
         </p:nvSpPr>
-        <p:spPr/>
+        <p:spPr>
+          <a:xfrm>
+            <a:off x="838200" y="1633491"/>
+            <a:ext cx="6390503" cy="2759215"/>
+          </a:xfrm>
+        </p:spPr>
         <p:txBody>
           <a:bodyPr>
-            <a:normAutofit fontScale="92500" lnSpcReduction="10000"/>
+            <a:normAutofit/>
           </a:bodyPr>
           <a:lstStyle/>
           <a:p>
@@ -13088,108 +14092,36 @@
               <a:buNone/>
             </a:pPr>
             <a:r>
-              <a:rPr lang="en-US" sz="2600" b="1" dirty="0"/>
-              <a:t>Four Key Benefits:</a:t>
-            </a:r>
-          </a:p>
-          <a:p>
-            <a:r>
-              <a:rPr lang="en-US" sz="2600" b="1" dirty="0"/>
-              <a:t>Interpretability</a:t>
-            </a:r>
-            <a:r>
-              <a:rPr lang="en-US" sz="2600" dirty="0"/>
-              <a:t> </a:t>
-            </a:r>
-          </a:p>
-          <a:p>
-            <a:pPr lvl="1"/>
-            <a:r>
-              <a:rPr lang="en-US" dirty="0"/>
-              <a:t>Clear, understandable coefficients</a:t>
-            </a:r>
-          </a:p>
-          <a:p>
-            <a:pPr lvl="1"/>
-            <a:r>
-              <a:rPr lang="en-US" dirty="0"/>
-              <a:t>Easy to explain relationships between variables</a:t>
-            </a:r>
-          </a:p>
-          <a:p>
-            <a:r>
-              <a:rPr lang="en-US" sz="2600" b="1" dirty="0"/>
-              <a:t>Simplicity</a:t>
-            </a:r>
-            <a:r>
-              <a:rPr lang="en-US" sz="2600" dirty="0"/>
-              <a:t> </a:t>
-            </a:r>
-          </a:p>
-          <a:p>
-            <a:pPr lvl="1"/>
-            <a:r>
-              <a:rPr lang="en-US" dirty="0"/>
-              <a:t>Transparent and easy to implement</a:t>
-            </a:r>
-          </a:p>
-          <a:p>
-            <a:pPr lvl="1"/>
-            <a:r>
-              <a:rPr lang="en-US" dirty="0"/>
-              <a:t>Foundation for more complex algorithms</a:t>
-            </a:r>
-          </a:p>
-          <a:p>
-            <a:r>
-              <a:rPr lang="en-US" sz="2600" b="1" dirty="0"/>
-              <a:t>Basis for Advanced Models</a:t>
-            </a:r>
-            <a:r>
-              <a:rPr lang="en-US" sz="2600" dirty="0"/>
-              <a:t> </a:t>
-            </a:r>
-          </a:p>
-          <a:p>
-            <a:pPr lvl="1"/>
-            <a:r>
-              <a:rPr lang="en-US" dirty="0"/>
-              <a:t>Building block for regularization (Ridge, Lasso)</a:t>
-            </a:r>
-          </a:p>
-          <a:p>
-            <a:pPr lvl="1"/>
-            <a:r>
-              <a:rPr lang="en-US" dirty="0"/>
-              <a:t>Foundation for support vector machines</a:t>
-            </a:r>
-          </a:p>
-          <a:p>
-            <a:r>
-              <a:rPr lang="en-US" sz="2600" b="1" dirty="0"/>
-              <a:t>Assumption Testing</a:t>
-            </a:r>
-            <a:r>
-              <a:rPr lang="en-US" sz="2600" dirty="0"/>
-              <a:t> </a:t>
-            </a:r>
-          </a:p>
-          <a:p>
-            <a:pPr lvl="1"/>
-            <a:r>
-              <a:rPr lang="en-US" dirty="0"/>
-              <a:t>Validates key data assumptions</a:t>
-            </a:r>
-          </a:p>
-          <a:p>
-            <a:pPr lvl="1"/>
-            <a:r>
-              <a:rPr lang="en-US" dirty="0"/>
-              <a:t>Critical for statistical analysis</a:t>
-            </a:r>
-          </a:p>
-          <a:p>
-            <a:endParaRPr lang="en-US" dirty="0"/>
+              <a:rPr lang="en-US" sz="2400" dirty="0"/>
+              <a:t>There are two main types of linear regression:</a:t>
+            </a:r>
+          </a:p>
+          <a:p>
+            <a:pPr marL="0" indent="0">
+              <a:buNone/>
+            </a:pPr>
+            <a:r>
+              <a:rPr lang="en-US" sz="2400" b="1" dirty="0"/>
+              <a:t>1- Simple Linear Regression</a:t>
+            </a:r>
+          </a:p>
+          <a:p>
+            <a:pPr marL="0" indent="0">
+              <a:buNone/>
+            </a:pPr>
+            <a:r>
+              <a:rPr lang="en-US" sz="2400" dirty="0"/>
+              <a:t>This is the simplest form of linear regression, and it involves only one independent variable and one dependent variable. </a:t>
+            </a:r>
+          </a:p>
+          <a:p>
+            <a:pPr marL="0" indent="0">
+              <a:buNone/>
+            </a:pPr>
+            <a:r>
+              <a:rPr lang="en-US" sz="2400" dirty="0"/>
+              <a:t>The equation for simple linear regression is:</a:t>
+            </a:r>
           </a:p>
         </p:txBody>
       </p:sp>
@@ -13198,7 +14130,7 @@
           <p:cNvPr id="3" name="Title 2">
             <a:extLst>
               <a:ext uri="{FF2B5EF4-FFF2-40B4-BE49-F238E27FC236}">
-                <a16:creationId xmlns:a16="http://schemas.microsoft.com/office/drawing/2014/main" id="{55B8EC88-FA32-80C6-9212-225795D1FE9E}"/>
+                <a16:creationId xmlns:a16="http://schemas.microsoft.com/office/drawing/2014/main" id="{100EB5BB-BBC7-B31E-D00E-0CEEBA8A5671}"/>
               </a:ext>
             </a:extLst>
           </p:cNvPr>
@@ -13218,15 +14150,92 @@
           <a:p>
             <a:r>
               <a:rPr lang="en-US" dirty="0"/>
-              <a:t>Why Linear Regression Matters</a:t>
+              <a:t>Types of Linear Regression</a:t>
             </a:r>
           </a:p>
         </p:txBody>
       </p:sp>
+      <p:pic>
+        <p:nvPicPr>
+          <p:cNvPr id="7" name="Picture 6">
+            <a:extLst>
+              <a:ext uri="{FF2B5EF4-FFF2-40B4-BE49-F238E27FC236}">
+                <a16:creationId xmlns:a16="http://schemas.microsoft.com/office/drawing/2014/main" id="{82D86F0E-0628-3880-4CDD-0284B92DC94E}"/>
+              </a:ext>
+            </a:extLst>
+          </p:cNvPr>
+          <p:cNvPicPr>
+            <a:picLocks noChangeAspect="1"/>
+          </p:cNvPicPr>
+          <p:nvPr/>
+        </p:nvPicPr>
+        <p:blipFill>
+          <a:blip r:embed="rId2"/>
+          <a:stretch>
+            <a:fillRect/>
+          </a:stretch>
+        </p:blipFill>
+        <p:spPr>
+          <a:xfrm>
+            <a:off x="912341" y="4077099"/>
+            <a:ext cx="4044544" cy="2684106"/>
+          </a:xfrm>
+          <a:prstGeom prst="rect">
+            <a:avLst/>
+          </a:prstGeom>
+        </p:spPr>
+      </p:pic>
+      <p:pic>
+        <p:nvPicPr>
+          <p:cNvPr id="4" name="Picture 6" descr="Linear Regression in Machine Learning: Python Examples">
+            <a:extLst>
+              <a:ext uri="{FF2B5EF4-FFF2-40B4-BE49-F238E27FC236}">
+                <a16:creationId xmlns:a16="http://schemas.microsoft.com/office/drawing/2014/main" id="{DE2B1E32-0CA3-128D-CB32-2F690773BA5C}"/>
+              </a:ext>
+            </a:extLst>
+          </p:cNvPr>
+          <p:cNvPicPr>
+            <a:picLocks noChangeAspect="1" noChangeArrowheads="1"/>
+          </p:cNvPicPr>
+          <p:nvPr/>
+        </p:nvPicPr>
+        <p:blipFill>
+          <a:blip r:embed="rId3">
+            <a:extLst>
+              <a:ext uri="{28A0092B-C50C-407E-A947-70E740481C1C}">
+                <a14:useLocalDpi xmlns:a14="http://schemas.microsoft.com/office/drawing/2010/main" val="0"/>
+              </a:ext>
+            </a:extLst>
+          </a:blip>
+          <a:srcRect/>
+          <a:stretch>
+            <a:fillRect/>
+          </a:stretch>
+        </p:blipFill>
+        <p:spPr bwMode="auto">
+          <a:xfrm>
+            <a:off x="7446149" y="1633491"/>
+            <a:ext cx="4501477" cy="2940194"/>
+          </a:xfrm>
+          <a:prstGeom prst="rect">
+            <a:avLst/>
+          </a:prstGeom>
+          <a:noFill/>
+          <a:extLst>
+            <a:ext uri="{909E8E84-426E-40DD-AFC4-6F175D3DCCD1}">
+              <a14:hiddenFill xmlns:a14="http://schemas.microsoft.com/office/drawing/2010/main">
+                <a:solidFill>
+                  <a:srgbClr val="FFFFFF"/>
+                </a:solidFill>
+              </a14:hiddenFill>
+            </a:ext>
+          </a:extLst>
+        </p:spPr>
+      </p:pic>
     </p:spTree>
     <p:extLst>
       <p:ext uri="{BB962C8B-B14F-4D97-AF65-F5344CB8AC3E}">
-        <p14:creationId xmlns:p14="http://schemas.microsoft.com/office/powerpoint/2010/main" val="1427132372"/>
+        <p14:creationId xmlns:p14="http://schemas.microsoft.com/office/powerpoint/2010/main" val="3639736080"/>
       </p:ext>
     </p:extLst>
   </p:cSld>
@@ -13241,7 +14250,13 @@
   <p:cSld>
     <p:spTree>
       <p:nvGrpSpPr>
-        <p:cNvPr id="1" name=""/>
+        <p:cNvPr id="1" name="">
+          <a:extLst>
+            <a:ext uri="{FF2B5EF4-FFF2-40B4-BE49-F238E27FC236}">
+              <a16:creationId xmlns:a16="http://schemas.microsoft.com/office/drawing/2014/main" id="{AF1544B4-D3B8-1197-92FD-7FA1979115B0}"/>
+            </a:ext>
+          </a:extLst>
+        </p:cNvPr>
         <p:cNvGrpSpPr/>
         <p:nvPr/>
       </p:nvGrpSpPr>
@@ -13258,7 +14273,7 @@
           <p:cNvPr id="2" name="Content Placeholder 1">
             <a:extLst>
               <a:ext uri="{FF2B5EF4-FFF2-40B4-BE49-F238E27FC236}">
-                <a16:creationId xmlns:a16="http://schemas.microsoft.com/office/drawing/2014/main" id="{D7723A21-97D0-9266-6B42-28CBEDC236D9}"/>
+                <a16:creationId xmlns:a16="http://schemas.microsoft.com/office/drawing/2014/main" id="{AFD55279-926D-56F4-16C1-40E544073600}"/>
               </a:ext>
             </a:extLst>
           </p:cNvPr>
@@ -13271,8 +14286,8 @@
         </p:nvSpPr>
         <p:spPr>
           <a:xfrm>
-            <a:off x="838200" y="1633491"/>
-            <a:ext cx="6470822" cy="5131294"/>
+            <a:off x="838200" y="1633490"/>
+            <a:ext cx="5519351" cy="2257334"/>
           </a:xfrm>
         </p:spPr>
         <p:txBody>
@@ -13286,7 +14301,7 @@
             </a:pPr>
             <a:r>
               <a:rPr lang="en-US" sz="2400" b="1" dirty="0"/>
-              <a:t>What Makes a Line "Best-Fit"?</a:t>
+              <a:t>2- Multiple Linear Regression (Simplified)</a:t>
             </a:r>
           </a:p>
           <a:p>
@@ -13295,7 +14310,7 @@
             </a:pPr>
             <a:r>
               <a:rPr lang="en-US" sz="2400" dirty="0"/>
-              <a:t>The best-fit line minimizes the error between predicted and actual values.</a:t>
+              <a:t>In multiple linear regression, there is one dependent variable and more than one independent variable. </a:t>
             </a:r>
           </a:p>
           <a:p>
@@ -13303,52 +14318,12 @@
               <a:buNone/>
             </a:pPr>
             <a:r>
-              <a:rPr lang="en-US" sz="2400" b="1" dirty="0"/>
-              <a:t>Key Components:</a:t>
-            </a:r>
-          </a:p>
-          <a:p>
-            <a:pPr marL="457200" lvl="1"/>
-            <a:r>
-              <a:rPr lang="en-US" sz="2200" b="1" dirty="0"/>
-              <a:t>Slope (β₁): </a:t>
-            </a:r>
-            <a:r>
-              <a:rPr lang="en-US" sz="2200" dirty="0"/>
-              <a:t>How much Y changes for each unit change in X</a:t>
-            </a:r>
-          </a:p>
-          <a:p>
-            <a:pPr marL="457200" lvl="1"/>
-            <a:r>
-              <a:rPr lang="en-US" sz="2200" b="1" dirty="0"/>
-              <a:t>Intercept (β₀): </a:t>
-            </a:r>
-            <a:r>
-              <a:rPr lang="en-US" sz="2200" dirty="0"/>
-              <a:t>Value of Y when X = 0</a:t>
-            </a:r>
-          </a:p>
-          <a:p>
-            <a:r>
               <a:rPr lang="en-US" sz="2400" dirty="0"/>
-              <a:t>Goal: Find the line that makes the most accurate predictions</a:t>
-            </a:r>
-          </a:p>
-          <a:p>
-            <a:r>
-              <a:rPr lang="en-US" sz="2400" dirty="0"/>
-              <a:t>Mathematical Representation: Ŷ = β₀ + β₁X</a:t>
-            </a:r>
-          </a:p>
-          <a:p>
-            <a:pPr marL="284163" indent="0">
-              <a:buNone/>
-            </a:pPr>
-            <a:r>
-              <a:rPr lang="en-US" sz="2400" dirty="0"/>
-              <a:t>Where Ŷ (pronounced Y Hat) is the predicted value.</a:t>
-            </a:r>
+              <a:t>The equation is:</a:t>
+            </a:r>
+          </a:p>
+          <a:p>
+            <a:endParaRPr lang="en-US" sz="2400" dirty="0"/>
           </a:p>
         </p:txBody>
       </p:sp>
@@ -13357,7 +14332,7 @@
           <p:cNvPr id="3" name="Title 2">
             <a:extLst>
               <a:ext uri="{FF2B5EF4-FFF2-40B4-BE49-F238E27FC236}">
-                <a16:creationId xmlns:a16="http://schemas.microsoft.com/office/drawing/2014/main" id="{E520913F-E7B6-47CD-911A-B7E553D5285A}"/>
+                <a16:creationId xmlns:a16="http://schemas.microsoft.com/office/drawing/2014/main" id="{1B18397A-8235-FC5E-C59A-91BD2E6824E0}"/>
               </a:ext>
             </a:extLst>
           </p:cNvPr>
@@ -13370,22 +14345,54 @@
         </p:nvSpPr>
         <p:spPr/>
         <p:txBody>
-          <a:bodyPr/>
+          <a:bodyPr>
+            <a:normAutofit/>
+          </a:bodyPr>
           <a:lstStyle/>
           <a:p>
             <a:r>
               <a:rPr lang="en-US" dirty="0"/>
-              <a:t>The Best-Fit Line Concept</a:t>
+              <a:t>Types of Linear Regression</a:t>
             </a:r>
           </a:p>
         </p:txBody>
       </p:sp>
       <p:pic>
         <p:nvPicPr>
-          <p:cNvPr id="5123" name="Picture 3" descr="Fitting Lines to Data | CK-12 Foundation">
-            <a:extLst>
-              <a:ext uri="{FF2B5EF4-FFF2-40B4-BE49-F238E27FC236}">
-                <a16:creationId xmlns:a16="http://schemas.microsoft.com/office/drawing/2014/main" id="{7227A453-5C80-EF05-DBFF-BB24669D733C}"/>
+          <p:cNvPr id="5" name="Picture 4">
+            <a:extLst>
+              <a:ext uri="{FF2B5EF4-FFF2-40B4-BE49-F238E27FC236}">
+                <a16:creationId xmlns:a16="http://schemas.microsoft.com/office/drawing/2014/main" id="{D78EEB53-EDB0-9883-EF22-7ECFE0832215}"/>
+              </a:ext>
+            </a:extLst>
+          </p:cNvPr>
+          <p:cNvPicPr>
+            <a:picLocks noChangeAspect="1"/>
+          </p:cNvPicPr>
+          <p:nvPr/>
+        </p:nvPicPr>
+        <p:blipFill>
+          <a:blip r:embed="rId2"/>
+          <a:stretch>
+            <a:fillRect/>
+          </a:stretch>
+        </p:blipFill>
+        <p:spPr>
+          <a:xfrm>
+            <a:off x="838200" y="3890824"/>
+            <a:ext cx="10269383" cy="2667372"/>
+          </a:xfrm>
+          <a:prstGeom prst="rect">
+            <a:avLst/>
+          </a:prstGeom>
+        </p:spPr>
+      </p:pic>
+      <p:pic>
+        <p:nvPicPr>
+          <p:cNvPr id="3074" name="Picture 2" descr="What Is Linear Regression? - MATLAB &amp; Simulink">
+            <a:extLst>
+              <a:ext uri="{FF2B5EF4-FFF2-40B4-BE49-F238E27FC236}">
+                <a16:creationId xmlns:a16="http://schemas.microsoft.com/office/drawing/2014/main" id="{4DD72E80-9023-5209-B53A-ADEDF9507F30}"/>
               </a:ext>
             </a:extLst>
           </p:cNvPr>
@@ -13395,7 +14402,7 @@
           <p:nvPr/>
         </p:nvPicPr>
         <p:blipFill>
-          <a:blip r:embed="rId2">
+          <a:blip r:embed="rId3">
             <a:extLst>
               <a:ext uri="{28A0092B-C50C-407E-A947-70E740481C1C}">
                 <a14:useLocalDpi xmlns:a14="http://schemas.microsoft.com/office/drawing/2010/main" val="0"/>
@@ -13409,8 +14416,8 @@
         </p:blipFill>
         <p:spPr bwMode="auto">
           <a:xfrm>
-            <a:off x="7309022" y="1633491"/>
-            <a:ext cx="4335878" cy="4324865"/>
+            <a:off x="6697362" y="1719135"/>
+            <a:ext cx="4537504" cy="3403128"/>
           </a:xfrm>
           <a:prstGeom prst="rect">
             <a:avLst/>
@@ -13430,7 +14437,7 @@
     </p:spTree>
     <p:extLst>
       <p:ext uri="{BB962C8B-B14F-4D97-AF65-F5344CB8AC3E}">
-        <p14:creationId xmlns:p14="http://schemas.microsoft.com/office/powerpoint/2010/main" val="3075052158"/>
+        <p14:creationId xmlns:p14="http://schemas.microsoft.com/office/powerpoint/2010/main" val="2042404279"/>
       </p:ext>
     </p:extLst>
   </p:cSld>
@@ -13736,15 +14743,6 @@
 </file>
 
 <file path=customXml/item1.xml><?xml version="1.0" encoding="utf-8"?>
-<?mso-contentType ?>
-<FormTemplates xmlns="http://schemas.microsoft.com/sharepoint/v3/contenttype/forms">
-  <Display>DocumentLibraryForm</Display>
-  <Edit>DocumentLibraryForm</Edit>
-  <New>DocumentLibraryForm</New>
-</FormTemplates>
-</file>
-
-<file path=customXml/item2.xml><?xml version="1.0" encoding="utf-8"?>
 <ct:contentTypeSchema xmlns:ct="http://schemas.microsoft.com/office/2006/metadata/contentType" xmlns:ma="http://schemas.microsoft.com/office/2006/metadata/properties/metaAttributes" ct:_="" ma:_="" ma:contentTypeName="Document" ma:contentTypeID="0x010100D30DB0B4DCD4994BA0B53B90F48248FB" ma:contentTypeVersion="17" ma:contentTypeDescription="Create a new document." ma:contentTypeScope="" ma:versionID="89b596077de0219f935a6ab711f2d0ee">
   <xsd:schema xmlns:xsd="http://www.w3.org/2001/XMLSchema" xmlns:xs="http://www.w3.org/2001/XMLSchema" xmlns:p="http://schemas.microsoft.com/office/2006/metadata/properties" xmlns:ns3="5d9e8ea6-d7cf-4c00-b931-0c0027af1451" xmlns:ns4="24b8453d-154c-4c63-97d1-80f7846f6991" targetNamespace="http://schemas.microsoft.com/office/2006/metadata/properties" ma:root="true" ma:fieldsID="cd616adf96839ca32a36dfb6e4534def" ns3:_="" ns4:_="">
     <xsd:import namespace="5d9e8ea6-d7cf-4c00-b931-0c0027af1451"/>
@@ -13991,6 +14989,15 @@
 </ct:contentTypeSchema>
 </file>
 
+<file path=customXml/item2.xml><?xml version="1.0" encoding="utf-8"?>
+<?mso-contentType ?>
+<FormTemplates xmlns="http://schemas.microsoft.com/sharepoint/v3/contenttype/forms">
+  <Display>DocumentLibraryForm</Display>
+  <Edit>DocumentLibraryForm</Edit>
+  <New>DocumentLibraryForm</New>
+</FormTemplates>
+</file>
+
 <file path=customXml/item3.xml><?xml version="1.0" encoding="utf-8"?>
 <p:properties xmlns:p="http://schemas.microsoft.com/office/2006/metadata/properties" xmlns:xsi="http://www.w3.org/2001/XMLSchema-instance" xmlns:pc="http://schemas.microsoft.com/office/infopath/2007/PartnerControls">
   <documentManagement>
@@ -14000,14 +15007,6 @@
 </file>
 
 <file path=customXml/itemProps1.xml><?xml version="1.0" encoding="utf-8"?>
-<ds:datastoreItem xmlns:ds="http://schemas.openxmlformats.org/officeDocument/2006/customXml" ds:itemID="{45A00539-F935-4DAE-994B-29A86868AB4E}">
-  <ds:schemaRefs>
-    <ds:schemaRef ds:uri="http://schemas.microsoft.com/sharepoint/v3/contenttype/forms"/>
-  </ds:schemaRefs>
-</ds:datastoreItem>
-</file>
-
-<file path=customXml/itemProps2.xml><?xml version="1.0" encoding="utf-8"?>
 <ds:datastoreItem xmlns:ds="http://schemas.openxmlformats.org/officeDocument/2006/customXml" ds:itemID="{E49744A2-A4E7-4F10-8EA8-A7278CF8AA73}">
   <ds:schemaRefs>
     <ds:schemaRef ds:uri="http://schemas.microsoft.com/office/2006/metadata/contentType"/>
@@ -14022,6 +15021,14 @@
     <ds:schemaRef ds:uri="http://purl.org/dc/elements/1.1/"/>
     <ds:schemaRef ds:uri="http://purl.org/dc/terms/"/>
     <ds:schemaRef ds:uri="http://schemas.microsoft.com/internal/obd"/>
+  </ds:schemaRefs>
+</ds:datastoreItem>
+</file>
+
+<file path=customXml/itemProps2.xml><?xml version="1.0" encoding="utf-8"?>
+<ds:datastoreItem xmlns:ds="http://schemas.openxmlformats.org/officeDocument/2006/customXml" ds:itemID="{45A00539-F935-4DAE-994B-29A86868AB4E}">
+  <ds:schemaRefs>
+    <ds:schemaRef ds:uri="http://schemas.microsoft.com/sharepoint/v3/contenttype/forms"/>
   </ds:schemaRefs>
 </ds:datastoreItem>
 </file>
